--- a/ldp_for_search_slides.pptx
+++ b/ldp_for_search_slides.pptx
@@ -11996,7 +11996,7 @@
                 </a:solidFill>
                 <a:latin typeface="Helvetica Neue"/>
               </a:rPr>
-              <a:t>Notebook, data and plots: github.com/jzonthemtn</a:t>
+              <a:t>github.com/jzonthemtn/ldp-for-search</a:t>
             </a:r>
           </a:p>
         </p:txBody>

--- a/ldp_for_search_slides.pptx
+++ b/ldp_for_search_slides.pptx
@@ -36,7 +36,6 @@
     <p:sldId id="284" r:id="rId36"/>
     <p:sldId id="285" r:id="rId37"/>
     <p:sldId id="286" r:id="rId38"/>
-    <p:sldId id="287" r:id="rId39"/>
   </p:sldIdLst>
   <p:sldSz cx="12191695" cy="6858000" type="screen4x3"/>
   <p:notesSz cx="6858000" cy="9144000"/>
@@ -813,7 +812,7 @@
           <a:lstStyle/>
           <a:p>
             <a:r>
-              <a:t>One slide only. Resist the urge to teach differential privacy properly, there is not time and it is not the point of the talk.</a:t>
+              <a:t>One slide only. Resist the urge to teach differential privacy properly, there is not time and it is not the point of the talk. The noise is Laplace, but the word can wait for the next slide, where the shape is on screen and does the explaining for you. If someone asks here, one sentence: symmetric noise, equally likely to push the value up or down, centred on the truth.</a:t>
             </a:r>
           </a:p>
         </p:txBody>
@@ -953,7 +952,7 @@
           <a:lstStyle/>
           <a:p>
             <a:r>
-              <a:t>Stronger evidence than the histogram, because it measures an adversary rather than a distribution. This discharges the 'verify, do not hope' promise in the abstract.</a:t>
+              <a:t>Stronger evidence than the histogram, because it measures an adversary rather than a distribution. This discharges the 'verify, do not hope' promise in the abstract. Head off the obvious confusion: the previous slide used epsilon 1.2 and this axis runs to 200. Epsilon is not portable between indexes, because what matters is the noise scale relative to the spread of the coordinates, and that spread differs between the 20-document PCA and this 43,000-document one. On the baselines: the query is 'solid wood platform bed', whose class Beds holds 1,112 of the 42,994 products, so class chance is 2.6 percent and item chance 0.002 percent. Class recovery of 6 percent at epsilon 1 is low but not nothing. Do not oversell the item curve either: 13 percent at epsilon 10 is still about 5,600 times chance, so the claim is that the category leaks first, not that the item is safe. This is where the limitations slide gets its first bullet, so it lands later as a callback rather than a new admission.</a:t>
             </a:r>
           </a:p>
         </p:txBody>
@@ -1023,7 +1022,7 @@
           <a:lstStyle/>
           <a:p>
             <a:r>
-              <a:t>About 7 minutes. Volunteer the weakness before anyone asks. This buys credibility for Act 5.</a:t>
+              <a:t>About 7 minutes. Volunteer the weakness before anyone asks. This buys credibility for Part 5.</a:t>
             </a:r>
           </a:p>
         </p:txBody>
@@ -1093,7 +1092,7 @@
           <a:lstStyle/>
           <a:p>
             <a:r>
-              <a:t>Say this yourself. If it comes out in Q&amp;A instead, the talk loses. Volunteering it is what makes Act 5 believable.</a:t>
+              <a:t>Say this yourself. If it comes out in Q&amp;A instead, the talk loses. Volunteering it is what makes Part 5 believable.</a:t>
             </a:r>
           </a:p>
         </p:txBody>
@@ -1163,7 +1162,7 @@
           <a:lstStyle/>
           <a:p>
             <a:r>
-              <a:t>The useful region is epsilon 3 to 5, where R@5 is high but P@1 has collapsed. Past 10 the noise stops doing anything.</a:t>
+              <a:t>Go to the red line first and stay there. That is the demo from Part 2, with the top hit correct 7 percent of the time against a 5 percent baseline, and the top five 45 against 25. Barely above guessing, which is the confession from the previous slide made visible. Then sweep right to make the second point, that utility only returns as epsilon rises, and by then the attacker is reading the query too. Note the curves rise here where slide 15's rose for the attacker: up means the search still works. Exact values if asked: at epsilon 1.2, P@1 0.07 and R@5 0.45; at 3, 0.38 and 0.75; at 5, 0.72 and 0.95; at 10, 0.98 and 1.00. Resist calling epsilon 3 to 5 a usable window. P@1 of 0.38 is eight times chance, so the attacker is already doing well there. The honest version of that argument needs the real index, which is the next slide.</a:t>
             </a:r>
           </a:p>
         </p:txBody>
@@ -1233,7 +1232,7 @@
           <a:lstStyle/>
           <a:p>
             <a:r>
-              <a:t>Around epsilon 10 to 20 the attacker recovers the category but not the item. That gap is the honest version of the privacy claim, and far more defensible than 'they get gibberish'.</a:t>
+              <a:t>About 8 minutes. This is the payoff and the answer to Part 4. Give it the most room.</a:t>
             </a:r>
           </a:p>
         </p:txBody>
@@ -1373,7 +1372,7 @@
           <a:lstStyle/>
           <a:p>
             <a:r>
-              <a:t>About 8 minutes. This is the payoff and the answer to Act 4. Give it the most room.</a:t>
+              <a:t>This is the conceptual core of the talk. Everything before it was setup. LDP is not a privacy tax, it is a trade of individual resolution for population accuracy.</a:t>
             </a:r>
           </a:p>
         </p:txBody>
@@ -1443,7 +1442,7 @@
           <a:lstStyle/>
           <a:p>
             <a:r>
-              <a:t>This is the conceptual core of the talk. Everything before it was setup. LDP is not a privacy tax, it is a trade of individual resolution for population accuracy.</a:t>
+              <a:t>Stress that no cohort member sends a readable query, and the server does the aggregation on noised vectors only. There is no trusted intermediate step.</a:t>
             </a:r>
           </a:p>
         </p:txBody>
@@ -1513,7 +1512,7 @@
           <a:lstStyle/>
           <a:p>
             <a:r>
-              <a:t>Stress that no cohort member sends a readable query, and the server does the aggregation on noised vectors only. There is no trusted intermediate step.</a:t>
+              <a:t>Individual recovery runs at roughly 1x to 2.5x chance, which is not usable. Aggregate recovery is exact. Same data, same epsilon, two different questions.</a:t>
             </a:r>
           </a:p>
         </p:txBody>
@@ -1583,7 +1582,7 @@
           <a:lstStyle/>
           <a:p>
             <a:r>
-              <a:t>Individual recovery runs at roughly 1x to 2.5x chance, which is not usable. Aggregate recovery is exact. Same data, same epsilon, two different questions.</a:t>
+              <a:t>The centrepiece. Measured error tracks theory across four orders of magnitude. Point at the crossing with the red line, that is the next slide.</a:t>
             </a:r>
           </a:p>
         </p:txBody>
@@ -1653,7 +1652,7 @@
           <a:lstStyle/>
           <a:p>
             <a:r>
-              <a:t>The centrepiece. Measured error tracks theory across four orders of magnitude. Point at the crossing with the red line, that is the next slide.</a:t>
+              <a:t>Give the audience one operational number they can apply on Monday. This is it. The 2,500 is where the measured error crosses the spread of the index, 0.128, on the convergence plot. It is not a constant: error goes as one over epsilon times one over root n, so the threshold scales as one over epsilon squared. At epsilon 0.5 it is 10,000 users, at epsilon 2 it is about 625.</a:t>
             </a:r>
           </a:p>
         </p:txBody>
@@ -1723,7 +1722,7 @@
           <a:lstStyle/>
           <a:p>
             <a:r>
-              <a:t>Give the audience one operational number they can apply on Monday. This is it.</a:t>
+              <a:t>The reframe. Every input relevance tuning actually needs is a population statistic. Let this sit on screen for a beat before moving on.</a:t>
             </a:r>
           </a:p>
         </p:txBody>
@@ -1793,7 +1792,7 @@
           <a:lstStyle/>
           <a:p>
             <a:r>
-              <a:t>The reframe. Every input relevance tuning actually needs is a population statistic. Let this sit on screen for a beat before moving on.</a:t>
+              <a:t>About 7 minutes. Land the integration, then be honest about what does not work.</a:t>
             </a:r>
           </a:p>
         </p:txBody>
@@ -1863,7 +1862,7 @@
           <a:lstStyle/>
           <a:p>
             <a:r>
-              <a:t>About 7 minutes. Land the integration, then be honest about what does not work.</a:t>
+              <a:t>The architectural payoff. The trust boundary moves to the device, which is the only place the raw query legitimately exists. The last bullet answers the obvious objection, that the people collecting the data are the ones choosing how much privacy users get. True, and the standing critique of deployed LDP. The web deployment is the answer: because the mechanism ships as JavaScript, a user, an auditor or a regulator can open devtools and check the epsilon. A server-side pipeline or a native app cannot make that claim. It turns trust us into check us, which is the same promise as the rest of the talk.</a:t>
             </a:r>
           </a:p>
         </p:txBody>
@@ -1933,7 +1932,7 @@
           <a:lstStyle/>
           <a:p>
             <a:r>
-              <a:t>The architectural payoff. The trust boundary moves to the device, which is the only place the raw query legitimately exists.</a:t>
+              <a:t>Tie back to the abstract's promise about LTR and query-intent analysis. Then name the thing that genuinely goes away.</a:t>
             </a:r>
           </a:p>
         </p:txBody>
@@ -2003,7 +2002,7 @@
           <a:lstStyle/>
           <a:p>
             <a:r>
-              <a:t>Tie back to the abstract's promise about LTR and query-intent analysis. Then name the thing that genuinely goes away.</a:t>
+              <a:t>Every one of these is a question someone will ask. Answering them first is cheaper than answering them under pressure. Also mention that a formal epsilon-DP claim needs sensitivity calibrated to the true coordinate range. Here the vectors are L2-normalized before PCA, so the whole 20-dimensional vector has norm 1, which makes sensitivity 1.0 per coordinate conservative rather than tight. That is the answer if someone asks how sensitivity was set. On the long tail, which someone will ask about: the workarounds are coarser segments and longer time windows, and both are the same trade at lower resolution, because they only raise n. The genuinely different answer is shuffle DP or secure aggregation, which buys far more utility at the same epsilon but changes the architecture rather than the parameter. Worth adding that tail relevance is usually improved by retrieval work rather than behavioural signal anyway.</a:t>
             </a:r>
           </a:p>
         </p:txBody>
@@ -2143,7 +2142,7 @@
           <a:lstStyle/>
           <a:p>
             <a:r>
-              <a:t>Every one of these is a question someone will ask. Answering them first is cheaper than answering them under pressure. Also mention that a formal epsilon-DP claim needs sensitivity calibrated to the true coordinate range.</a:t>
+              <a:t>Four sentences. If someone remembers only one, it should be the last.</a:t>
             </a:r>
           </a:p>
         </p:txBody>
@@ -2169,76 +2168,6 @@
 </file>
 
 <file path=ppt/notesSlides/notesSlide31.xml><?xml version="1.0" encoding="utf-8"?>
-<p:notes xmlns:a="http://schemas.openxmlformats.org/drawingml/2006/main" xmlns:p="http://schemas.openxmlformats.org/presentationml/2006/main" xmlns:r="http://schemas.openxmlformats.org/officeDocument/2006/relationships">
-  <p:cSld>
-    <p:spTree>
-      <p:nvGrpSpPr>
-        <p:cNvPr id="1" name=""/>
-        <p:cNvGrpSpPr/>
-        <p:nvPr/>
-      </p:nvGrpSpPr>
-      <p:grpSpPr>
-        <a:xfrm>
-          <a:off x="0" y="0"/>
-          <a:ext cx="0" cy="0"/>
-          <a:chOff x="0" y="0"/>
-          <a:chExt cx="0" cy="0"/>
-        </a:xfrm>
-      </p:grpSpPr>
-      <p:sp>
-        <p:nvSpPr>
-          <p:cNvPr id="2" name="Slide Image Placeholder 1"/>
-          <p:cNvSpPr>
-            <a:spLocks noGrp="1"/>
-          </p:cNvSpPr>
-          <p:nvPr>
-            <p:ph type="sldImg" idx="2"/>
-          </p:nvPr>
-        </p:nvSpPr>
-        <p:spPr/>
-      </p:sp>
-      <p:sp>
-        <p:nvSpPr>
-          <p:cNvPr id="3" name="Notes Placeholder 2"/>
-          <p:cNvSpPr>
-            <a:spLocks noGrp="1"/>
-          </p:cNvSpPr>
-          <p:nvPr>
-            <p:ph type="body" idx="3" sz="quarter"/>
-          </p:nvPr>
-        </p:nvSpPr>
-        <p:spPr/>
-        <p:txBody>
-          <a:bodyPr/>
-          <a:lstStyle/>
-          <a:p>
-            <a:r>
-              <a:t>Four sentences. If someone remembers only one, it should be the last.</a:t>
-            </a:r>
-          </a:p>
-        </p:txBody>
-      </p:sp>
-      <p:sp>
-        <p:nvSpPr>
-          <p:cNvPr id="4" name="Slide Number Placeholder 3"/>
-          <p:cNvSpPr>
-            <a:spLocks noGrp="1"/>
-          </p:cNvSpPr>
-          <p:nvPr>
-            <p:ph type="sldNum" idx="5" sz="quarter"/>
-          </p:nvPr>
-        </p:nvSpPr>
-        <p:spPr/>
-      </p:sp>
-    </p:spTree>
-  </p:cSld>
-  <p:clrMapOvr>
-    <a:masterClrMapping/>
-  </p:clrMapOvr>
-</p:notes>
-</file>
-
-<file path=ppt/notesSlides/notesSlide32.xml><?xml version="1.0" encoding="utf-8"?>
 <p:notes xmlns:a="http://schemas.openxmlformats.org/drawingml/2006/main" xmlns:p="http://schemas.openxmlformats.org/presentationml/2006/main" xmlns:r="http://schemas.openxmlformats.org/officeDocument/2006/relationships">
   <p:cSld>
     <p:spTree>
@@ -5812,7 +5741,7 @@
                 </a:solidFill>
                 <a:latin typeface="Helvetica Neue"/>
               </a:rPr>
-              <a:t>OpenSearchCon, San Jose</a:t>
+              <a:t>OpenSearchCon NA</a:t>
             </a:r>
           </a:p>
           <a:p>
@@ -6318,7 +6247,7 @@
                 </a:solidFill>
                 <a:latin typeface="Helvetica Neue"/>
               </a:rPr>
-              <a:t>ACT 3</a:t>
+              <a:t>PART 3</a:t>
             </a:r>
           </a:p>
           <a:p>
@@ -6487,7 +6416,7 @@
         <p:spPr>
           <a:xfrm>
             <a:off x="822960" y="2057400"/>
-            <a:ext cx="10515600" cy="4023360"/>
+            <a:ext cx="5120640" cy="4023360"/>
           </a:xfrm>
           <a:prstGeom prst="rect">
             <a:avLst/>
@@ -6502,11 +6431,11 @@
           <a:p>
             <a:pPr marL="342900" indent="-342900">
               <a:spcAft>
-                <a:spcPts val="2000"/>
+                <a:spcPts val="1400"/>
               </a:spcAft>
             </a:pPr>
             <a:r>
-              <a:rPr sz="2400" b="1">
+              <a:rPr sz="2100" b="1">
                 <a:solidFill>
                   <a:srgbClr val="005EB8"/>
                 </a:solidFill>
@@ -6515,23 +6444,23 @@
               <a:t>-   </a:t>
             </a:r>
             <a:r>
-              <a:rPr sz="2400" b="0">
+              <a:rPr sz="2100" b="0">
                 <a:solidFill>
                   <a:srgbClr val="141B2D"/>
                 </a:solidFill>
                 <a:latin typeface="Helvetica Neue"/>
               </a:rPr>
-              <a:t>Add calibrated Laplace noise to the query vector on the device</a:t>
+              <a:t>Add calibrated noise to the query vector on the device</a:t>
             </a:r>
           </a:p>
           <a:p>
             <a:pPr marL="342900" indent="-342900">
               <a:spcAft>
-                <a:spcPts val="2000"/>
+                <a:spcPts val="1400"/>
               </a:spcAft>
             </a:pPr>
             <a:r>
-              <a:rPr sz="2400" b="1">
+              <a:rPr sz="2100" b="1">
                 <a:solidFill>
                   <a:srgbClr val="005EB8"/>
                 </a:solidFill>
@@ -6540,7 +6469,7 @@
               <a:t>-   </a:t>
             </a:r>
             <a:r>
-              <a:rPr sz="2400" b="0">
+              <a:rPr sz="2100" b="0">
                 <a:solidFill>
                   <a:srgbClr val="141B2D"/>
                 </a:solidFill>
@@ -6552,11 +6481,11 @@
           <a:p>
             <a:pPr marL="342900" indent="-342900">
               <a:spcAft>
-                <a:spcPts val="2000"/>
+                <a:spcPts val="1400"/>
               </a:spcAft>
             </a:pPr>
             <a:r>
-              <a:rPr sz="2400" b="1">
+              <a:rPr sz="2100" b="1">
                 <a:solidFill>
                   <a:srgbClr val="005EB8"/>
                 </a:solidFill>
@@ -6565,23 +6494,23 @@
               <a:t>-   </a:t>
             </a:r>
             <a:r>
-              <a:rPr sz="2400" b="0">
+              <a:rPr sz="2100" b="0">
                 <a:solidFill>
                   <a:srgbClr val="141B2D"/>
                 </a:solidFill>
                 <a:latin typeface="Helvetica Neue"/>
               </a:rPr>
-              <a:t>Epsilon is the dial. Lower epsilon means more noise and more privacy</a:t>
+              <a:t>Epsilon is the dial, and lower epsilon means more noise and more privacy</a:t>
             </a:r>
           </a:p>
           <a:p>
             <a:pPr marL="342900" indent="-342900">
               <a:spcAft>
-                <a:spcPts val="2000"/>
+                <a:spcPts val="1400"/>
               </a:spcAft>
             </a:pPr>
             <a:r>
-              <a:rPr sz="2400" b="1">
+              <a:rPr sz="2100" b="1">
                 <a:solidFill>
                   <a:srgbClr val="005EB8"/>
                 </a:solidFill>
@@ -6590,20 +6519,88 @@
               <a:t>-   </a:t>
             </a:r>
             <a:r>
-              <a:rPr sz="2400" b="0">
+              <a:rPr sz="2100" b="0">
                 <a:solidFill>
                   <a:srgbClr val="141B2D"/>
                 </a:solidFill>
                 <a:latin typeface="Helvetica Neue"/>
               </a:rPr>
-              <a:t>The cluster never receives a readable query. There is nothing to scrub</a:t>
-            </a:r>
-          </a:p>
-        </p:txBody>
-      </p:sp>
-      <p:sp>
-        <p:nvSpPr>
-          <p:cNvPr id="5" name="TextBox 4"/>
+              <a:t>The cluster never receives a readable query, so there is nothing to scrub</a:t>
+            </a:r>
+          </a:p>
+        </p:txBody>
+      </p:sp>
+      <p:pic>
+        <p:nvPicPr>
+          <p:cNvPr id="5" name="Picture 4" descr="13_epsilon_dial.png"/>
+          <p:cNvPicPr>
+            <a:picLocks noChangeAspect="1"/>
+          </p:cNvPicPr>
+          <p:nvPr/>
+        </p:nvPicPr>
+        <p:blipFill>
+          <a:blip r:embed="rId2"/>
+          <a:stretch>
+            <a:fillRect/>
+          </a:stretch>
+        </p:blipFill>
+        <p:spPr>
+          <a:xfrm>
+            <a:off x="6263640" y="2535314"/>
+            <a:ext cx="5029200" cy="2701770"/>
+          </a:xfrm>
+          <a:prstGeom prst="rect">
+            <a:avLst/>
+          </a:prstGeom>
+        </p:spPr>
+      </p:pic>
+      <p:sp>
+        <p:nvSpPr>
+          <p:cNvPr id="6" name="TextBox 5"/>
+          <p:cNvSpPr txBox="1"/>
+          <p:nvPr/>
+        </p:nvSpPr>
+        <p:spPr>
+          <a:xfrm>
+            <a:off x="822960" y="5989320"/>
+            <a:ext cx="8961120" cy="502920"/>
+          </a:xfrm>
+          <a:prstGeom prst="rect">
+            <a:avLst/>
+          </a:prstGeom>
+          <a:noFill/>
+        </p:spPr>
+        <p:txBody>
+          <a:bodyPr wrap="square">
+            <a:spAutoFit/>
+          </a:bodyPr>
+          <a:lstStyle/>
+          <a:p>
+            <a:r>
+              <a:rPr sz="1400" b="0">
+                <a:solidFill>
+                  <a:srgbClr val="5A647A"/>
+                </a:solidFill>
+                <a:latin typeface="Helvetica Neue"/>
+              </a:rPr>
+              <a:t>More on local differential privacy: </a:t>
+            </a:r>
+            <a:r>
+              <a:rPr sz="1400" b="0" u="sng">
+                <a:solidFill>
+                  <a:srgbClr val="005EB8"/>
+                </a:solidFill>
+                <a:latin typeface="Helvetica Neue"/>
+                <a:hlinkClick r:id="rId3"/>
+              </a:rPr>
+              <a:t>en.wikipedia.org/wiki/Local_differential_privacy</a:t>
+            </a:r>
+          </a:p>
+        </p:txBody>
+      </p:sp>
+      <p:sp>
+        <p:nvSpPr>
+          <p:cNvPr id="7" name="TextBox 6"/>
           <p:cNvSpPr txBox="1"/>
           <p:nvPr/>
         </p:nvSpPr>
@@ -6712,8 +6709,8 @@
         </p:blipFill>
         <p:spPr>
           <a:xfrm>
-            <a:off x="2172111" y="1417320"/>
-            <a:ext cx="7847473" cy="4343400"/>
+            <a:off x="2155300" y="1417320"/>
+            <a:ext cx="7881094" cy="4343400"/>
           </a:xfrm>
           <a:prstGeom prst="rect">
             <a:avLst/>
@@ -6728,8 +6725,8 @@
         </p:nvSpPr>
         <p:spPr>
           <a:xfrm>
-            <a:off x="822960" y="5989320"/>
-            <a:ext cx="10515600" cy="640080"/>
+            <a:off x="1325880" y="5989320"/>
+            <a:ext cx="9509760" cy="640080"/>
           </a:xfrm>
           <a:prstGeom prst="rect">
             <a:avLst/>
@@ -6750,7 +6747,7 @@
                 </a:solidFill>
                 <a:latin typeface="Helvetica Neue"/>
               </a:rPr>
-              <a:t>1,000 draws of the same query. The Laplace tent, centred on the true value.</a:t>
+              <a:t>The peak sits on the true value, and the width of the tent is the privacy.</a:t>
             </a:r>
           </a:p>
         </p:txBody>
@@ -6866,8 +6863,8 @@
         </p:blipFill>
         <p:spPr>
           <a:xfrm>
-            <a:off x="2505894" y="1417320"/>
-            <a:ext cx="7179906" cy="4343400"/>
+            <a:off x="2487714" y="1417320"/>
+            <a:ext cx="7216267" cy="4343400"/>
           </a:xfrm>
           <a:prstGeom prst="rect">
             <a:avLst/>
@@ -6882,8 +6879,8 @@
         </p:nvSpPr>
         <p:spPr>
           <a:xfrm>
-            <a:off x="822960" y="5989320"/>
-            <a:ext cx="10515600" cy="640080"/>
+            <a:off x="1325880" y="5989320"/>
+            <a:ext cx="9509760" cy="640080"/>
           </a:xfrm>
           <a:prstGeom prst="rect">
             <a:avLst/>
@@ -6904,7 +6901,7 @@
                 </a:solidFill>
                 <a:latin typeface="Helvetica Neue"/>
               </a:rPr>
-              <a:t>42,994 real Wayfair products. Attacker success against epsilon.</a:t>
+              <a:t>The category leaks well before the item does. At epsilon 1, neither is recoverable.</a:t>
             </a:r>
           </a:p>
         </p:txBody>
@@ -6999,7 +6996,7 @@
                 </a:solidFill>
                 <a:latin typeface="Helvetica Neue"/>
               </a:rPr>
-              <a:t>ACT 4</a:t>
+              <a:t>PART 4</a:t>
             </a:r>
           </a:p>
           <a:p>
@@ -7351,8 +7348,8 @@
         </p:nvSpPr>
         <p:spPr>
           <a:xfrm>
-            <a:off x="822960" y="640080"/>
-            <a:ext cx="10515600" cy="960120"/>
+            <a:off x="822960" y="411480"/>
+            <a:ext cx="10515600" cy="822960"/>
           </a:xfrm>
           <a:prstGeom prst="rect">
             <a:avLst/>
@@ -7366,61 +7363,41 @@
           <a:lstStyle/>
           <a:p>
             <a:r>
-              <a:rPr sz="3200" b="1">
+              <a:rPr sz="3000" b="1">
                 <a:solidFill>
                   <a:srgbClr val="141B2D"/>
                 </a:solidFill>
                 <a:latin typeface="Helvetica Neue"/>
               </a:rPr>
-              <a:t>The tradeoff on the toy index</a:t>
-            </a:r>
-          </a:p>
-        </p:txBody>
-      </p:sp>
-      <p:sp>
-        <p:nvSpPr>
-          <p:cNvPr id="3" name="Rectangle 2"/>
-          <p:cNvSpPr/>
+              <a:t>At epsilon 1.2, barely better than guessing</a:t>
+            </a:r>
+          </a:p>
+        </p:txBody>
+      </p:sp>
+      <p:pic>
+        <p:nvPicPr>
+          <p:cNvPr id="3" name="Picture 2" descr="07_epsilon_tradeoff_toy_index.png"/>
+          <p:cNvPicPr>
+            <a:picLocks noChangeAspect="1"/>
+          </p:cNvPicPr>
           <p:nvPr/>
-        </p:nvSpPr>
-        <p:spPr>
-          <a:xfrm>
-            <a:off x="822960" y="1245615"/>
-            <a:ext cx="1463040" cy="50800"/>
+        </p:nvPicPr>
+        <p:blipFill>
+          <a:blip r:embed="rId2"/>
+          <a:stretch>
+            <a:fillRect/>
+          </a:stretch>
+        </p:blipFill>
+        <p:spPr>
+          <a:xfrm>
+            <a:off x="2192782" y="1417320"/>
+            <a:ext cx="7806131" cy="4343400"/>
           </a:xfrm>
           <a:prstGeom prst="rect">
             <a:avLst/>
           </a:prstGeom>
-          <a:solidFill>
-            <a:srgbClr val="005EB8"/>
-          </a:solidFill>
-          <a:ln>
-            <a:noFill/>
-          </a:ln>
-          <a:effectLst/>
-        </p:spPr>
-        <p:style>
-          <a:lnRef idx="1">
-            <a:schemeClr val="accent1"/>
-          </a:lnRef>
-          <a:fillRef idx="3">
-            <a:schemeClr val="accent1"/>
-          </a:fillRef>
-          <a:effectRef idx="2">
-            <a:schemeClr val="accent1"/>
-          </a:effectRef>
-          <a:fontRef idx="minor">
-            <a:schemeClr val="lt1"/>
-          </a:fontRef>
-        </p:style>
-        <p:txBody>
-          <a:bodyPr rtlCol="0" anchor="ctr"/>
-          <a:lstStyle/>
-          <a:p>
-            <a:pPr algn="ctr"/>
-          </a:p>
-        </p:txBody>
-      </p:sp>
+        </p:spPr>
+      </p:pic>
       <p:sp>
         <p:nvSpPr>
           <p:cNvPr id="4" name="TextBox 3"/>
@@ -7429,8 +7406,8 @@
         </p:nvSpPr>
         <p:spPr>
           <a:xfrm>
-            <a:off x="822960" y="1691640"/>
-            <a:ext cx="10515600" cy="548640"/>
+            <a:off x="1325880" y="5989320"/>
+            <a:ext cx="9509760" cy="640080"/>
           </a:xfrm>
           <a:prstGeom prst="rect">
             <a:avLst/>
@@ -7443,438 +7420,22 @@
           </a:bodyPr>
           <a:lstStyle/>
           <a:p>
-            <a:r>
-              <a:rPr sz="2100" b="0">
+            <a:pPr algn="ctr"/>
+            <a:r>
+              <a:rPr sz="1600" b="0">
                 <a:solidFill>
                   <a:srgbClr val="5A647A"/>
                 </a:solidFill>
                 <a:latin typeface="Helvetica Neue"/>
               </a:rPr>
-              <a:t>R@5 holds up long after P@1 collapses. The usable window is epsilon 3 to 5.</a:t>
-            </a:r>
-          </a:p>
-        </p:txBody>
-      </p:sp>
-      <p:graphicFrame>
-        <p:nvGraphicFramePr>
-          <p:cNvPr id="5" name="Table 4"/>
-          <p:cNvGraphicFramePr>
-            <a:graphicFrameLocks noGrp="1"/>
-          </p:cNvGraphicFramePr>
-          <p:nvPr/>
-        </p:nvGraphicFramePr>
-        <p:xfrm>
-          <a:off x="1523847" y="2514600"/>
-          <a:ext cx="9144000" cy="2834640"/>
-        </p:xfrm>
-        <a:graphic>
-          <a:graphicData uri="http://schemas.openxmlformats.org/drawingml/2006/table">
-            <a:tbl>
-              <a:tblPr firstRow="1" bandRow="1">
-                <a:tableStyleId>{5C22544A-7EE6-4342-B048-85BDC9FD1C3A}</a:tableStyleId>
-              </a:tblPr>
-              <a:tblGrid>
-                <a:gridCol w="3048000"/>
-                <a:gridCol w="3048000"/>
-                <a:gridCol w="3048000"/>
-              </a:tblGrid>
-              <a:tr h="566928">
-                <a:tc>
-                  <a:txBody>
-                    <a:bodyPr/>
-                    <a:lstStyle/>
-                    <a:p>
-                      <a:pPr algn="l"/>
-                      <a:r>
-                        <a:rPr sz="1800" b="1">
-                          <a:solidFill>
-                            <a:srgbClr val="FFFFFF"/>
-                          </a:solidFill>
-                          <a:latin typeface="Helvetica Neue"/>
-                        </a:rPr>
-                        <a:t>epsilon</a:t>
-                      </a:r>
-                    </a:p>
-                  </a:txBody>
-                  <a:tcPr anchor="ctr">
-                    <a:solidFill>
-                      <a:srgbClr val="005EB8"/>
-                    </a:solidFill>
-                  </a:tcPr>
-                </a:tc>
-                <a:tc>
-                  <a:txBody>
-                    <a:bodyPr/>
-                    <a:lstStyle/>
-                    <a:p>
-                      <a:pPr algn="ctr"/>
-                      <a:r>
-                        <a:rPr sz="1800" b="1">
-                          <a:solidFill>
-                            <a:srgbClr val="FFFFFF"/>
-                          </a:solidFill>
-                          <a:latin typeface="Helvetica Neue"/>
-                        </a:rPr>
-                        <a:t>P@1</a:t>
-                      </a:r>
-                    </a:p>
-                  </a:txBody>
-                  <a:tcPr anchor="ctr">
-                    <a:solidFill>
-                      <a:srgbClr val="005EB8"/>
-                    </a:solidFill>
-                  </a:tcPr>
-                </a:tc>
-                <a:tc>
-                  <a:txBody>
-                    <a:bodyPr/>
-                    <a:lstStyle/>
-                    <a:p>
-                      <a:pPr algn="ctr"/>
-                      <a:r>
-                        <a:rPr sz="1800" b="1">
-                          <a:solidFill>
-                            <a:srgbClr val="FFFFFF"/>
-                          </a:solidFill>
-                          <a:latin typeface="Helvetica Neue"/>
-                        </a:rPr>
-                        <a:t>R@5</a:t>
-                      </a:r>
-                    </a:p>
-                  </a:txBody>
-                  <a:tcPr anchor="ctr">
-                    <a:solidFill>
-                      <a:srgbClr val="005EB8"/>
-                    </a:solidFill>
-                  </a:tcPr>
-                </a:tc>
-              </a:tr>
-              <a:tr h="566928">
-                <a:tc>
-                  <a:txBody>
-                    <a:bodyPr/>
-                    <a:lstStyle/>
-                    <a:p>
-                      <a:pPr algn="l"/>
-                      <a:r>
-                        <a:rPr sz="1800" b="0">
-                          <a:solidFill>
-                            <a:srgbClr val="141B2D"/>
-                          </a:solidFill>
-                          <a:latin typeface="Helvetica Neue"/>
-                        </a:rPr>
-                        <a:t>1.2</a:t>
-                      </a:r>
-                    </a:p>
-                  </a:txBody>
-                  <a:tcPr anchor="ctr">
-                    <a:solidFill>
-                      <a:srgbClr val="F4F7FB"/>
-                    </a:solidFill>
-                  </a:tcPr>
-                </a:tc>
-                <a:tc>
-                  <a:txBody>
-                    <a:bodyPr/>
-                    <a:lstStyle/>
-                    <a:p>
-                      <a:pPr algn="ctr"/>
-                      <a:r>
-                        <a:rPr sz="1800" b="0">
-                          <a:solidFill>
-                            <a:srgbClr val="141B2D"/>
-                          </a:solidFill>
-                          <a:latin typeface="Helvetica Neue"/>
-                        </a:rPr>
-                        <a:t>0.07</a:t>
-                      </a:r>
-                    </a:p>
-                  </a:txBody>
-                  <a:tcPr anchor="ctr">
-                    <a:solidFill>
-                      <a:srgbClr val="F4F7FB"/>
-                    </a:solidFill>
-                  </a:tcPr>
-                </a:tc>
-                <a:tc>
-                  <a:txBody>
-                    <a:bodyPr/>
-                    <a:lstStyle/>
-                    <a:p>
-                      <a:pPr algn="ctr"/>
-                      <a:r>
-                        <a:rPr sz="1800" b="0">
-                          <a:solidFill>
-                            <a:srgbClr val="141B2D"/>
-                          </a:solidFill>
-                          <a:latin typeface="Helvetica Neue"/>
-                        </a:rPr>
-                        <a:t>0.45</a:t>
-                      </a:r>
-                    </a:p>
-                  </a:txBody>
-                  <a:tcPr anchor="ctr">
-                    <a:solidFill>
-                      <a:srgbClr val="F4F7FB"/>
-                    </a:solidFill>
-                  </a:tcPr>
-                </a:tc>
-              </a:tr>
-              <a:tr h="566928">
-                <a:tc>
-                  <a:txBody>
-                    <a:bodyPr/>
-                    <a:lstStyle/>
-                    <a:p>
-                      <a:pPr algn="l"/>
-                      <a:r>
-                        <a:rPr sz="1800" b="0">
-                          <a:solidFill>
-                            <a:srgbClr val="141B2D"/>
-                          </a:solidFill>
-                          <a:latin typeface="Helvetica Neue"/>
-                        </a:rPr>
-                        <a:t>3</a:t>
-                      </a:r>
-                    </a:p>
-                  </a:txBody>
-                  <a:tcPr anchor="ctr">
-                    <a:solidFill>
-                      <a:srgbClr val="FFFFFF"/>
-                    </a:solidFill>
-                  </a:tcPr>
-                </a:tc>
-                <a:tc>
-                  <a:txBody>
-                    <a:bodyPr/>
-                    <a:lstStyle/>
-                    <a:p>
-                      <a:pPr algn="ctr"/>
-                      <a:r>
-                        <a:rPr sz="1800" b="0">
-                          <a:solidFill>
-                            <a:srgbClr val="141B2D"/>
-                          </a:solidFill>
-                          <a:latin typeface="Helvetica Neue"/>
-                        </a:rPr>
-                        <a:t>0.38</a:t>
-                      </a:r>
-                    </a:p>
-                  </a:txBody>
-                  <a:tcPr anchor="ctr">
-                    <a:solidFill>
-                      <a:srgbClr val="FFFFFF"/>
-                    </a:solidFill>
-                  </a:tcPr>
-                </a:tc>
-                <a:tc>
-                  <a:txBody>
-                    <a:bodyPr/>
-                    <a:lstStyle/>
-                    <a:p>
-                      <a:pPr algn="ctr"/>
-                      <a:r>
-                        <a:rPr sz="1800" b="0">
-                          <a:solidFill>
-                            <a:srgbClr val="141B2D"/>
-                          </a:solidFill>
-                          <a:latin typeface="Helvetica Neue"/>
-                        </a:rPr>
-                        <a:t>0.75</a:t>
-                      </a:r>
-                    </a:p>
-                  </a:txBody>
-                  <a:tcPr anchor="ctr">
-                    <a:solidFill>
-                      <a:srgbClr val="FFFFFF"/>
-                    </a:solidFill>
-                  </a:tcPr>
-                </a:tc>
-              </a:tr>
-              <a:tr h="566928">
-                <a:tc>
-                  <a:txBody>
-                    <a:bodyPr/>
-                    <a:lstStyle/>
-                    <a:p>
-                      <a:pPr algn="l"/>
-                      <a:r>
-                        <a:rPr sz="1800" b="0">
-                          <a:solidFill>
-                            <a:srgbClr val="141B2D"/>
-                          </a:solidFill>
-                          <a:latin typeface="Helvetica Neue"/>
-                        </a:rPr>
-                        <a:t>5</a:t>
-                      </a:r>
-                    </a:p>
-                  </a:txBody>
-                  <a:tcPr anchor="ctr">
-                    <a:solidFill>
-                      <a:srgbClr val="F4F7FB"/>
-                    </a:solidFill>
-                  </a:tcPr>
-                </a:tc>
-                <a:tc>
-                  <a:txBody>
-                    <a:bodyPr/>
-                    <a:lstStyle/>
-                    <a:p>
-                      <a:pPr algn="ctr"/>
-                      <a:r>
-                        <a:rPr sz="1800" b="0">
-                          <a:solidFill>
-                            <a:srgbClr val="141B2D"/>
-                          </a:solidFill>
-                          <a:latin typeface="Helvetica Neue"/>
-                        </a:rPr>
-                        <a:t>0.72</a:t>
-                      </a:r>
-                    </a:p>
-                  </a:txBody>
-                  <a:tcPr anchor="ctr">
-                    <a:solidFill>
-                      <a:srgbClr val="F4F7FB"/>
-                    </a:solidFill>
-                  </a:tcPr>
-                </a:tc>
-                <a:tc>
-                  <a:txBody>
-                    <a:bodyPr/>
-                    <a:lstStyle/>
-                    <a:p>
-                      <a:pPr algn="ctr"/>
-                      <a:r>
-                        <a:rPr sz="1800" b="0">
-                          <a:solidFill>
-                            <a:srgbClr val="141B2D"/>
-                          </a:solidFill>
-                          <a:latin typeface="Helvetica Neue"/>
-                        </a:rPr>
-                        <a:t>0.95</a:t>
-                      </a:r>
-                    </a:p>
-                  </a:txBody>
-                  <a:tcPr anchor="ctr">
-                    <a:solidFill>
-                      <a:srgbClr val="F4F7FB"/>
-                    </a:solidFill>
-                  </a:tcPr>
-                </a:tc>
-              </a:tr>
-              <a:tr h="566928">
-                <a:tc>
-                  <a:txBody>
-                    <a:bodyPr/>
-                    <a:lstStyle/>
-                    <a:p>
-                      <a:pPr algn="l"/>
-                      <a:r>
-                        <a:rPr sz="1800" b="0">
-                          <a:solidFill>
-                            <a:srgbClr val="141B2D"/>
-                          </a:solidFill>
-                          <a:latin typeface="Helvetica Neue"/>
-                        </a:rPr>
-                        <a:t>10</a:t>
-                      </a:r>
-                    </a:p>
-                  </a:txBody>
-                  <a:tcPr anchor="ctr">
-                    <a:solidFill>
-                      <a:srgbClr val="FFFFFF"/>
-                    </a:solidFill>
-                  </a:tcPr>
-                </a:tc>
-                <a:tc>
-                  <a:txBody>
-                    <a:bodyPr/>
-                    <a:lstStyle/>
-                    <a:p>
-                      <a:pPr algn="ctr"/>
-                      <a:r>
-                        <a:rPr sz="1800" b="0">
-                          <a:solidFill>
-                            <a:srgbClr val="141B2D"/>
-                          </a:solidFill>
-                          <a:latin typeface="Helvetica Neue"/>
-                        </a:rPr>
-                        <a:t>0.98</a:t>
-                      </a:r>
-                    </a:p>
-                  </a:txBody>
-                  <a:tcPr anchor="ctr">
-                    <a:solidFill>
-                      <a:srgbClr val="FFFFFF"/>
-                    </a:solidFill>
-                  </a:tcPr>
-                </a:tc>
-                <a:tc>
-                  <a:txBody>
-                    <a:bodyPr/>
-                    <a:lstStyle/>
-                    <a:p>
-                      <a:pPr algn="ctr"/>
-                      <a:r>
-                        <a:rPr sz="1800" b="0">
-                          <a:solidFill>
-                            <a:srgbClr val="141B2D"/>
-                          </a:solidFill>
-                          <a:latin typeface="Helvetica Neue"/>
-                        </a:rPr>
-                        <a:t>1.00</a:t>
-                      </a:r>
-                    </a:p>
-                  </a:txBody>
-                  <a:tcPr anchor="ctr">
-                    <a:solidFill>
-                      <a:srgbClr val="FFFFFF"/>
-                    </a:solidFill>
-                  </a:tcPr>
-                </a:tc>
-              </a:tr>
-            </a:tbl>
-          </a:graphicData>
-        </a:graphic>
-      </p:graphicFrame>
-      <p:sp>
-        <p:nvSpPr>
-          <p:cNvPr id="6" name="TextBox 5"/>
-          <p:cNvSpPr txBox="1"/>
-          <p:nvPr/>
-        </p:nvSpPr>
-        <p:spPr>
-          <a:xfrm>
-            <a:off x="822960" y="5943600"/>
-            <a:ext cx="10515600" cy="640080"/>
-          </a:xfrm>
-          <a:prstGeom prst="rect">
-            <a:avLst/>
-          </a:prstGeom>
-          <a:noFill/>
-        </p:spPr>
-        <p:txBody>
-          <a:bodyPr wrap="square">
-            <a:spAutoFit/>
-          </a:bodyPr>
-          <a:lstStyle/>
-          <a:p>
-            <a:pPr algn="ctr"/>
-            <a:r>
-              <a:rPr sz="1500" b="0">
-                <a:solidFill>
-                  <a:srgbClr val="5A647A"/>
-                </a:solidFill>
-                <a:latin typeface="Helvetica Neue"/>
-              </a:rPr>
-              <a:t>20 documents. Random chance is P@1 0.05 and R@5 0.25.</a:t>
-            </a:r>
-          </a:p>
-        </p:txBody>
-      </p:sp>
-      <p:sp>
-        <p:nvSpPr>
-          <p:cNvPr id="7" name="TextBox 6"/>
+              <a:t>The red line is where the first demo ran. Utility only comes back where the attacker wins too.</a:t>
+            </a:r>
+          </a:p>
+        </p:txBody>
+      </p:sp>
+      <p:sp>
+        <p:nvSpPr>
+          <p:cNvPr id="5" name="TextBox 4"/>
           <p:cNvSpPr txBox="1"/>
           <p:nvPr/>
         </p:nvSpPr>
@@ -7921,7 +7482,7 @@
     <p:bg>
       <p:bgPr>
         <a:solidFill>
-          <a:srgbClr val="FFFFFF"/>
+          <a:srgbClr val="0E1A2F"/>
         </a:solidFill>
         <a:effectLst/>
       </p:bgPr>
@@ -7941,8 +7502,8 @@
         </p:nvSpPr>
         <p:spPr>
           <a:xfrm>
-            <a:off x="822960" y="640080"/>
-            <a:ext cx="10515600" cy="960120"/>
+            <a:off x="822960" y="2560320"/>
+            <a:ext cx="10515600" cy="1828800"/>
           </a:xfrm>
           <a:prstGeom prst="rect">
             <a:avLst/>
@@ -7956,71 +7517,43 @@
           <a:lstStyle/>
           <a:p>
             <a:r>
-              <a:rPr sz="3200" b="1">
-                <a:solidFill>
-                  <a:srgbClr val="141B2D"/>
-                </a:solidFill>
-                <a:latin typeface="Helvetica Neue"/>
-              </a:rPr>
-              <a:t>A real index: the curves separate</a:t>
-            </a:r>
-          </a:p>
-        </p:txBody>
-      </p:sp>
-      <p:sp>
-        <p:nvSpPr>
-          <p:cNvPr id="3" name="Rectangle 2"/>
-          <p:cNvSpPr/>
-          <p:nvPr/>
-        </p:nvSpPr>
-        <p:spPr>
-          <a:xfrm>
-            <a:off x="822960" y="1245615"/>
-            <a:ext cx="1463040" cy="50800"/>
-          </a:xfrm>
-          <a:prstGeom prst="rect">
-            <a:avLst/>
-          </a:prstGeom>
-          <a:solidFill>
-            <a:srgbClr val="005EB8"/>
-          </a:solidFill>
-          <a:ln>
-            <a:noFill/>
-          </a:ln>
-          <a:effectLst/>
-        </p:spPr>
-        <p:style>
-          <a:lnRef idx="1">
-            <a:schemeClr val="accent1"/>
-          </a:lnRef>
-          <a:fillRef idx="3">
-            <a:schemeClr val="accent1"/>
-          </a:fillRef>
-          <a:effectRef idx="2">
-            <a:schemeClr val="accent1"/>
-          </a:effectRef>
-          <a:fontRef idx="minor">
-            <a:schemeClr val="lt1"/>
-          </a:fontRef>
-        </p:style>
-        <p:txBody>
-          <a:bodyPr rtlCol="0" anchor="ctr"/>
-          <a:lstStyle/>
-          <a:p>
-            <a:pPr algn="ctr"/>
-          </a:p>
-        </p:txBody>
-      </p:sp>
-      <p:sp>
-        <p:nvSpPr>
-          <p:cNvPr id="4" name="TextBox 3"/>
+              <a:rPr sz="1800" b="1">
+                <a:solidFill>
+                  <a:srgbClr val="5A9BE8"/>
+                </a:solidFill>
+                <a:latin typeface="Helvetica Neue"/>
+              </a:rPr>
+              <a:t>PART 5</a:t>
+            </a:r>
+          </a:p>
+          <a:p>
+            <a:pPr>
+              <a:spcBef>
+                <a:spcPts val="1000"/>
+              </a:spcBef>
+            </a:pPr>
+            <a:r>
+              <a:rPr sz="4200" b="1">
+                <a:solidFill>
+                  <a:srgbClr val="FFFFFF"/>
+                </a:solidFill>
+                <a:latin typeface="Helvetica Neue"/>
+              </a:rPr>
+              <a:t>What you keep</a:t>
+            </a:r>
+          </a:p>
+        </p:txBody>
+      </p:sp>
+      <p:sp>
+        <p:nvSpPr>
+          <p:cNvPr id="3" name="TextBox 2"/>
           <p:cNvSpPr txBox="1"/>
           <p:nvPr/>
         </p:nvSpPr>
         <p:spPr>
           <a:xfrm>
-            <a:off x="822960" y="1691640"/>
-            <a:ext cx="10515600" cy="548640"/>
+            <a:off x="10405872" y="6144768"/>
+            <a:ext cx="960120" cy="411480"/>
           </a:xfrm>
           <a:prstGeom prst="rect">
             <a:avLst/>
@@ -8033,462 +7566,11 @@
           </a:bodyPr>
           <a:lstStyle/>
           <a:p>
-            <a:r>
-              <a:rPr sz="2100" b="0">
-                <a:solidFill>
-                  <a:srgbClr val="5A647A"/>
-                </a:solidFill>
-                <a:latin typeface="Helvetica Neue"/>
-              </a:rPr>
-              <a:t>The category leaks long before the item. At epsilon 10, 0.63 against 0.13.</a:t>
-            </a:r>
-          </a:p>
-        </p:txBody>
-      </p:sp>
-      <p:graphicFrame>
-        <p:nvGraphicFramePr>
-          <p:cNvPr id="5" name="Table 4"/>
-          <p:cNvGraphicFramePr>
-            <a:graphicFrameLocks noGrp="1"/>
-          </p:cNvGraphicFramePr>
-          <p:nvPr/>
-        </p:nvGraphicFramePr>
-        <p:xfrm>
-          <a:off x="1523847" y="2514600"/>
-          <a:ext cx="9144000" cy="2834640"/>
-        </p:xfrm>
-        <a:graphic>
-          <a:graphicData uri="http://schemas.openxmlformats.org/drawingml/2006/table">
-            <a:tbl>
-              <a:tblPr firstRow="1" bandRow="1">
-                <a:tableStyleId>{5C22544A-7EE6-4342-B048-85BDC9FD1C3A}</a:tableStyleId>
-              </a:tblPr>
-              <a:tblGrid>
-                <a:gridCol w="3048000"/>
-                <a:gridCol w="3048000"/>
-                <a:gridCol w="3048000"/>
-              </a:tblGrid>
-              <a:tr h="566928">
-                <a:tc>
-                  <a:txBody>
-                    <a:bodyPr/>
-                    <a:lstStyle/>
-                    <a:p>
-                      <a:pPr algn="l"/>
-                      <a:r>
-                        <a:rPr sz="1800" b="1">
-                          <a:solidFill>
-                            <a:srgbClr val="FFFFFF"/>
-                          </a:solidFill>
-                          <a:latin typeface="Helvetica Neue"/>
-                        </a:rPr>
-                        <a:t>epsilon</a:t>
-                      </a:r>
-                    </a:p>
-                  </a:txBody>
-                  <a:tcPr anchor="ctr">
-                    <a:solidFill>
-                      <a:srgbClr val="005EB8"/>
-                    </a:solidFill>
-                  </a:tcPr>
-                </a:tc>
-                <a:tc>
-                  <a:txBody>
-                    <a:bodyPr/>
-                    <a:lstStyle/>
-                    <a:p>
-                      <a:pPr algn="ctr"/>
-                      <a:r>
-                        <a:rPr sz="1800" b="1">
-                          <a:solidFill>
-                            <a:srgbClr val="FFFFFF"/>
-                          </a:solidFill>
-                          <a:latin typeface="Helvetica Neue"/>
-                        </a:rPr>
-                        <a:t>item P@1</a:t>
-                      </a:r>
-                    </a:p>
-                  </a:txBody>
-                  <a:tcPr anchor="ctr">
-                    <a:solidFill>
-                      <a:srgbClr val="005EB8"/>
-                    </a:solidFill>
-                  </a:tcPr>
-                </a:tc>
-                <a:tc>
-                  <a:txBody>
-                    <a:bodyPr/>
-                    <a:lstStyle/>
-                    <a:p>
-                      <a:pPr algn="ctr"/>
-                      <a:r>
-                        <a:rPr sz="1800" b="1">
-                          <a:solidFill>
-                            <a:srgbClr val="FFFFFF"/>
-                          </a:solidFill>
-                          <a:latin typeface="Helvetica Neue"/>
-                        </a:rPr>
-                        <a:t>class P@1</a:t>
-                      </a:r>
-                    </a:p>
-                  </a:txBody>
-                  <a:tcPr anchor="ctr">
-                    <a:solidFill>
-                      <a:srgbClr val="005EB8"/>
-                    </a:solidFill>
-                  </a:tcPr>
-                </a:tc>
-              </a:tr>
-              <a:tr h="566928">
-                <a:tc>
-                  <a:txBody>
-                    <a:bodyPr/>
-                    <a:lstStyle/>
-                    <a:p>
-                      <a:pPr algn="l"/>
-                      <a:r>
-                        <a:rPr sz="1800" b="0">
-                          <a:solidFill>
-                            <a:srgbClr val="141B2D"/>
-                          </a:solidFill>
-                          <a:latin typeface="Helvetica Neue"/>
-                        </a:rPr>
-                        <a:t>5</a:t>
-                      </a:r>
-                    </a:p>
-                  </a:txBody>
-                  <a:tcPr anchor="ctr">
-                    <a:solidFill>
-                      <a:srgbClr val="F4F7FB"/>
-                    </a:solidFill>
-                  </a:tcPr>
-                </a:tc>
-                <a:tc>
-                  <a:txBody>
-                    <a:bodyPr/>
-                    <a:lstStyle/>
-                    <a:p>
-                      <a:pPr algn="ctr"/>
-                      <a:r>
-                        <a:rPr sz="1800" b="0">
-                          <a:solidFill>
-                            <a:srgbClr val="141B2D"/>
-                          </a:solidFill>
-                          <a:latin typeface="Helvetica Neue"/>
-                        </a:rPr>
-                        <a:t>0.04</a:t>
-                      </a:r>
-                    </a:p>
-                  </a:txBody>
-                  <a:tcPr anchor="ctr">
-                    <a:solidFill>
-                      <a:srgbClr val="F4F7FB"/>
-                    </a:solidFill>
-                  </a:tcPr>
-                </a:tc>
-                <a:tc>
-                  <a:txBody>
-                    <a:bodyPr/>
-                    <a:lstStyle/>
-                    <a:p>
-                      <a:pPr algn="ctr"/>
-                      <a:r>
-                        <a:rPr sz="1800" b="0">
-                          <a:solidFill>
-                            <a:srgbClr val="141B2D"/>
-                          </a:solidFill>
-                          <a:latin typeface="Helvetica Neue"/>
-                        </a:rPr>
-                        <a:t>0.33</a:t>
-                      </a:r>
-                    </a:p>
-                  </a:txBody>
-                  <a:tcPr anchor="ctr">
-                    <a:solidFill>
-                      <a:srgbClr val="F4F7FB"/>
-                    </a:solidFill>
-                  </a:tcPr>
-                </a:tc>
-              </a:tr>
-              <a:tr h="566928">
-                <a:tc>
-                  <a:txBody>
-                    <a:bodyPr/>
-                    <a:lstStyle/>
-                    <a:p>
-                      <a:pPr algn="l"/>
-                      <a:r>
-                        <a:rPr sz="1800" b="0">
-                          <a:solidFill>
-                            <a:srgbClr val="141B2D"/>
-                          </a:solidFill>
-                          <a:latin typeface="Helvetica Neue"/>
-                        </a:rPr>
-                        <a:t>10</a:t>
-                      </a:r>
-                    </a:p>
-                  </a:txBody>
-                  <a:tcPr anchor="ctr">
-                    <a:solidFill>
-                      <a:srgbClr val="FFFFFF"/>
-                    </a:solidFill>
-                  </a:tcPr>
-                </a:tc>
-                <a:tc>
-                  <a:txBody>
-                    <a:bodyPr/>
-                    <a:lstStyle/>
-                    <a:p>
-                      <a:pPr algn="ctr"/>
-                      <a:r>
-                        <a:rPr sz="1800" b="0">
-                          <a:solidFill>
-                            <a:srgbClr val="141B2D"/>
-                          </a:solidFill>
-                          <a:latin typeface="Helvetica Neue"/>
-                        </a:rPr>
-                        <a:t>0.13</a:t>
-                      </a:r>
-                    </a:p>
-                  </a:txBody>
-                  <a:tcPr anchor="ctr">
-                    <a:solidFill>
-                      <a:srgbClr val="FFFFFF"/>
-                    </a:solidFill>
-                  </a:tcPr>
-                </a:tc>
-                <a:tc>
-                  <a:txBody>
-                    <a:bodyPr/>
-                    <a:lstStyle/>
-                    <a:p>
-                      <a:pPr algn="ctr"/>
-                      <a:r>
-                        <a:rPr sz="1800" b="0">
-                          <a:solidFill>
-                            <a:srgbClr val="141B2D"/>
-                          </a:solidFill>
-                          <a:latin typeface="Helvetica Neue"/>
-                        </a:rPr>
-                        <a:t>0.63</a:t>
-                      </a:r>
-                    </a:p>
-                  </a:txBody>
-                  <a:tcPr anchor="ctr">
-                    <a:solidFill>
-                      <a:srgbClr val="FFFFFF"/>
-                    </a:solidFill>
-                  </a:tcPr>
-                </a:tc>
-              </a:tr>
-              <a:tr h="566928">
-                <a:tc>
-                  <a:txBody>
-                    <a:bodyPr/>
-                    <a:lstStyle/>
-                    <a:p>
-                      <a:pPr algn="l"/>
-                      <a:r>
-                        <a:rPr sz="1800" b="0">
-                          <a:solidFill>
-                            <a:srgbClr val="141B2D"/>
-                          </a:solidFill>
-                          <a:latin typeface="Helvetica Neue"/>
-                        </a:rPr>
-                        <a:t>20</a:t>
-                      </a:r>
-                    </a:p>
-                  </a:txBody>
-                  <a:tcPr anchor="ctr">
-                    <a:solidFill>
-                      <a:srgbClr val="F4F7FB"/>
-                    </a:solidFill>
-                  </a:tcPr>
-                </a:tc>
-                <a:tc>
-                  <a:txBody>
-                    <a:bodyPr/>
-                    <a:lstStyle/>
-                    <a:p>
-                      <a:pPr algn="ctr"/>
-                      <a:r>
-                        <a:rPr sz="1800" b="0">
-                          <a:solidFill>
-                            <a:srgbClr val="141B2D"/>
-                          </a:solidFill>
-                          <a:latin typeface="Helvetica Neue"/>
-                        </a:rPr>
-                        <a:t>0.42</a:t>
-                      </a:r>
-                    </a:p>
-                  </a:txBody>
-                  <a:tcPr anchor="ctr">
-                    <a:solidFill>
-                      <a:srgbClr val="F4F7FB"/>
-                    </a:solidFill>
-                  </a:tcPr>
-                </a:tc>
-                <a:tc>
-                  <a:txBody>
-                    <a:bodyPr/>
-                    <a:lstStyle/>
-                    <a:p>
-                      <a:pPr algn="ctr"/>
-                      <a:r>
-                        <a:rPr sz="1800" b="0">
-                          <a:solidFill>
-                            <a:srgbClr val="141B2D"/>
-                          </a:solidFill>
-                          <a:latin typeface="Helvetica Neue"/>
-                        </a:rPr>
-                        <a:t>0.82</a:t>
-                      </a:r>
-                    </a:p>
-                  </a:txBody>
-                  <a:tcPr anchor="ctr">
-                    <a:solidFill>
-                      <a:srgbClr val="F4F7FB"/>
-                    </a:solidFill>
-                  </a:tcPr>
-                </a:tc>
-              </a:tr>
-              <a:tr h="566928">
-                <a:tc>
-                  <a:txBody>
-                    <a:bodyPr/>
-                    <a:lstStyle/>
-                    <a:p>
-                      <a:pPr algn="l"/>
-                      <a:r>
-                        <a:rPr sz="1800" b="0">
-                          <a:solidFill>
-                            <a:srgbClr val="141B2D"/>
-                          </a:solidFill>
-                          <a:latin typeface="Helvetica Neue"/>
-                        </a:rPr>
-                        <a:t>50</a:t>
-                      </a:r>
-                    </a:p>
-                  </a:txBody>
-                  <a:tcPr anchor="ctr">
-                    <a:solidFill>
-                      <a:srgbClr val="FFFFFF"/>
-                    </a:solidFill>
-                  </a:tcPr>
-                </a:tc>
-                <a:tc>
-                  <a:txBody>
-                    <a:bodyPr/>
-                    <a:lstStyle/>
-                    <a:p>
-                      <a:pPr algn="ctr"/>
-                      <a:r>
-                        <a:rPr sz="1800" b="0">
-                          <a:solidFill>
-                            <a:srgbClr val="141B2D"/>
-                          </a:solidFill>
-                          <a:latin typeface="Helvetica Neue"/>
-                        </a:rPr>
-                        <a:t>0.93</a:t>
-                      </a:r>
-                    </a:p>
-                  </a:txBody>
-                  <a:tcPr anchor="ctr">
-                    <a:solidFill>
-                      <a:srgbClr val="FFFFFF"/>
-                    </a:solidFill>
-                  </a:tcPr>
-                </a:tc>
-                <a:tc>
-                  <a:txBody>
-                    <a:bodyPr/>
-                    <a:lstStyle/>
-                    <a:p>
-                      <a:pPr algn="ctr"/>
-                      <a:r>
-                        <a:rPr sz="1800" b="0">
-                          <a:solidFill>
-                            <a:srgbClr val="141B2D"/>
-                          </a:solidFill>
-                          <a:latin typeface="Helvetica Neue"/>
-                        </a:rPr>
-                        <a:t>0.98</a:t>
-                      </a:r>
-                    </a:p>
-                  </a:txBody>
-                  <a:tcPr anchor="ctr">
-                    <a:solidFill>
-                      <a:srgbClr val="FFFFFF"/>
-                    </a:solidFill>
-                  </a:tcPr>
-                </a:tc>
-              </a:tr>
-            </a:tbl>
-          </a:graphicData>
-        </a:graphic>
-      </p:graphicFrame>
-      <p:sp>
-        <p:nvSpPr>
-          <p:cNvPr id="6" name="TextBox 5"/>
-          <p:cNvSpPr txBox="1"/>
-          <p:nvPr/>
-        </p:nvSpPr>
-        <p:spPr>
-          <a:xfrm>
-            <a:off x="822960" y="5943600"/>
-            <a:ext cx="10515600" cy="640080"/>
-          </a:xfrm>
-          <a:prstGeom prst="rect">
-            <a:avLst/>
-          </a:prstGeom>
-          <a:noFill/>
-        </p:spPr>
-        <p:txBody>
-          <a:bodyPr wrap="square">
-            <a:spAutoFit/>
-          </a:bodyPr>
-          <a:lstStyle/>
-          <a:p>
-            <a:pPr algn="ctr"/>
-            <a:r>
-              <a:rPr sz="1500" b="0">
-                <a:solidFill>
-                  <a:srgbClr val="5A647A"/>
-                </a:solidFill>
-                <a:latin typeface="Helvetica Neue"/>
-              </a:rPr>
-              <a:t>Chance is item 0.00002 and class 0.026. WANDS, 42,994 products, 861 classes.</a:t>
-            </a:r>
-          </a:p>
-        </p:txBody>
-      </p:sp>
-      <p:sp>
-        <p:nvSpPr>
-          <p:cNvPr id="7" name="TextBox 6"/>
-          <p:cNvSpPr txBox="1"/>
-          <p:nvPr/>
-        </p:nvSpPr>
-        <p:spPr>
-          <a:xfrm>
-            <a:off x="10405872" y="6144768"/>
-            <a:ext cx="960120" cy="411480"/>
-          </a:xfrm>
-          <a:prstGeom prst="rect">
-            <a:avLst/>
-          </a:prstGeom>
-          <a:noFill/>
-        </p:spPr>
-        <p:txBody>
-          <a:bodyPr wrap="square">
-            <a:spAutoFit/>
-          </a:bodyPr>
-          <a:lstStyle/>
-          <a:p>
             <a:pPr algn="r"/>
             <a:r>
               <a:rPr sz="1300" b="0">
                 <a:solidFill>
-                  <a:srgbClr val="5A647A"/>
+                  <a:srgbClr val="6E7C93"/>
                 </a:solidFill>
                 <a:latin typeface="Helvetica Neue"/>
               </a:rPr>
@@ -8747,6 +7829,23 @@
               <a:t>Works in search, NLP, and privacy</a:t>
             </a:r>
           </a:p>
+          <a:p>
+            <a:pPr>
+              <a:spcBef>
+                <a:spcPts val="800"/>
+              </a:spcBef>
+            </a:pPr>
+            <a:r>
+              <a:rPr sz="2400" b="0" u="sng">
+                <a:solidFill>
+                  <a:srgbClr val="005EB8"/>
+                </a:solidFill>
+                <a:latin typeface="Helvetica Neue"/>
+                <a:hlinkClick r:id="rId2"/>
+              </a:rPr>
+              <a:t>jeffzemerick.dev</a:t>
+            </a:r>
+          </a:p>
         </p:txBody>
       </p:sp>
       <p:sp>
@@ -8793,6 +7892,292 @@
 </file>
 
 <file path=ppt/slides/slide20.xml><?xml version="1.0" encoding="utf-8"?>
+<p:sld xmlns:a="http://schemas.openxmlformats.org/drawingml/2006/main" xmlns:p="http://schemas.openxmlformats.org/presentationml/2006/main" xmlns:r="http://schemas.openxmlformats.org/officeDocument/2006/relationships">
+  <p:cSld>
+    <p:bg>
+      <p:bgPr>
+        <a:solidFill>
+          <a:srgbClr val="FFFFFF"/>
+        </a:solidFill>
+        <a:effectLst/>
+      </p:bgPr>
+    </p:bg>
+    <p:spTree>
+      <p:nvGrpSpPr>
+        <p:cNvPr id="1" name=""/>
+        <p:cNvGrpSpPr/>
+        <p:nvPr/>
+      </p:nvGrpSpPr>
+      <p:grpSpPr/>
+      <p:sp>
+        <p:nvSpPr>
+          <p:cNvPr id="2" name="TextBox 1"/>
+          <p:cNvSpPr txBox="1"/>
+          <p:nvPr/>
+        </p:nvSpPr>
+        <p:spPr>
+          <a:xfrm>
+            <a:off x="822960" y="640080"/>
+            <a:ext cx="10515600" cy="960120"/>
+          </a:xfrm>
+          <a:prstGeom prst="rect">
+            <a:avLst/>
+          </a:prstGeom>
+          <a:noFill/>
+        </p:spPr>
+        <p:txBody>
+          <a:bodyPr wrap="square">
+            <a:spAutoFit/>
+          </a:bodyPr>
+          <a:lstStyle/>
+          <a:p>
+            <a:r>
+              <a:rPr sz="3400" b="1">
+                <a:solidFill>
+                  <a:srgbClr val="141B2D"/>
+                </a:solidFill>
+                <a:latin typeface="Helvetica Neue"/>
+              </a:rPr>
+              <a:t>The asymmetry is the whole point</a:t>
+            </a:r>
+          </a:p>
+        </p:txBody>
+      </p:sp>
+      <p:sp>
+        <p:nvSpPr>
+          <p:cNvPr id="3" name="Rectangle 2"/>
+          <p:cNvSpPr/>
+          <p:nvPr/>
+        </p:nvSpPr>
+        <p:spPr>
+          <a:xfrm>
+            <a:off x="822960" y="1276603"/>
+            <a:ext cx="1463040" cy="50800"/>
+          </a:xfrm>
+          <a:prstGeom prst="rect">
+            <a:avLst/>
+          </a:prstGeom>
+          <a:solidFill>
+            <a:srgbClr val="005EB8"/>
+          </a:solidFill>
+          <a:ln>
+            <a:noFill/>
+          </a:ln>
+          <a:effectLst/>
+        </p:spPr>
+        <p:style>
+          <a:lnRef idx="1">
+            <a:schemeClr val="accent1"/>
+          </a:lnRef>
+          <a:fillRef idx="3">
+            <a:schemeClr val="accent1"/>
+          </a:fillRef>
+          <a:effectRef idx="2">
+            <a:schemeClr val="accent1"/>
+          </a:effectRef>
+          <a:fontRef idx="minor">
+            <a:schemeClr val="lt1"/>
+          </a:fontRef>
+        </p:style>
+        <p:txBody>
+          <a:bodyPr rtlCol="0" anchor="ctr"/>
+          <a:lstStyle/>
+          <a:p>
+            <a:pPr algn="ctr"/>
+          </a:p>
+        </p:txBody>
+      </p:sp>
+      <p:sp>
+        <p:nvSpPr>
+          <p:cNvPr id="4" name="TextBox 3"/>
+          <p:cNvSpPr txBox="1"/>
+          <p:nvPr/>
+        </p:nvSpPr>
+        <p:spPr>
+          <a:xfrm>
+            <a:off x="822960" y="2057400"/>
+            <a:ext cx="5120640" cy="4023360"/>
+          </a:xfrm>
+          <a:prstGeom prst="rect">
+            <a:avLst/>
+          </a:prstGeom>
+          <a:noFill/>
+        </p:spPr>
+        <p:txBody>
+          <a:bodyPr wrap="square">
+            <a:spAutoFit/>
+          </a:bodyPr>
+          <a:lstStyle/>
+          <a:p>
+            <a:pPr marL="342900" indent="-342900">
+              <a:spcAft>
+                <a:spcPts val="1400"/>
+              </a:spcAft>
+            </a:pPr>
+            <a:r>
+              <a:rPr sz="2100" b="1">
+                <a:solidFill>
+                  <a:srgbClr val="005EB8"/>
+                </a:solidFill>
+                <a:latin typeface="Helvetica Neue"/>
+              </a:rPr>
+              <a:t>-   </a:t>
+            </a:r>
+            <a:r>
+              <a:rPr sz="2100" b="0">
+                <a:solidFill>
+                  <a:srgbClr val="141B2D"/>
+                </a:solidFill>
+                <a:latin typeface="Helvetica Neue"/>
+              </a:rPr>
+              <a:t>Laplace noise is zero-mean</a:t>
+            </a:r>
+          </a:p>
+          <a:p>
+            <a:pPr marL="342900" indent="-342900">
+              <a:spcAft>
+                <a:spcPts val="1400"/>
+              </a:spcAft>
+            </a:pPr>
+            <a:r>
+              <a:rPr sz="2100" b="1">
+                <a:solidFill>
+                  <a:srgbClr val="005EB8"/>
+                </a:solidFill>
+                <a:latin typeface="Helvetica Neue"/>
+              </a:rPr>
+              <a:t>-   </a:t>
+            </a:r>
+            <a:r>
+              <a:rPr sz="2100" b="0">
+                <a:solidFill>
+                  <a:srgbClr val="141B2D"/>
+                </a:solidFill>
+                <a:latin typeface="Helvetica Neue"/>
+              </a:rPr>
+              <a:t>It cancels when you average over many independent users</a:t>
+            </a:r>
+          </a:p>
+          <a:p>
+            <a:pPr marL="342900" indent="-342900">
+              <a:spcAft>
+                <a:spcPts val="1400"/>
+              </a:spcAft>
+            </a:pPr>
+            <a:r>
+              <a:rPr sz="2100" b="1">
+                <a:solidFill>
+                  <a:srgbClr val="005EB8"/>
+                </a:solidFill>
+                <a:latin typeface="Helvetica Neue"/>
+              </a:rPr>
+              <a:t>-   </a:t>
+            </a:r>
+            <a:r>
+              <a:rPr sz="2100" b="0">
+                <a:solidFill>
+                  <a:srgbClr val="141B2D"/>
+                </a:solidFill>
+                <a:latin typeface="Helvetica Neue"/>
+              </a:rPr>
+              <a:t>One person's query is unrecoverable</a:t>
+            </a:r>
+          </a:p>
+          <a:p>
+            <a:pPr marL="342900" indent="-342900">
+              <a:spcAft>
+                <a:spcPts val="1400"/>
+              </a:spcAft>
+            </a:pPr>
+            <a:r>
+              <a:rPr sz="2100" b="1">
+                <a:solidFill>
+                  <a:srgbClr val="005EB8"/>
+                </a:solidFill>
+                <a:latin typeface="Helvetica Neue"/>
+              </a:rPr>
+              <a:t>-   </a:t>
+            </a:r>
+            <a:r>
+              <a:rPr sz="2100" b="0">
+                <a:solidFill>
+                  <a:srgbClr val="141B2D"/>
+                </a:solidFill>
+                <a:latin typeface="Helvetica Neue"/>
+              </a:rPr>
+              <a:t>The trend across ten thousand people is not</a:t>
+            </a:r>
+          </a:p>
+        </p:txBody>
+      </p:sp>
+      <p:pic>
+        <p:nvPicPr>
+          <p:cNvPr id="5" name="Picture 4" descr="21_cancellation.png"/>
+          <p:cNvPicPr>
+            <a:picLocks noChangeAspect="1"/>
+          </p:cNvPicPr>
+          <p:nvPr/>
+        </p:nvPicPr>
+        <p:blipFill>
+          <a:blip r:embed="rId2"/>
+          <a:stretch>
+            <a:fillRect/>
+          </a:stretch>
+        </p:blipFill>
+        <p:spPr>
+          <a:xfrm>
+            <a:off x="6600990" y="1874519"/>
+            <a:ext cx="4354500" cy="4023360"/>
+          </a:xfrm>
+          <a:prstGeom prst="rect">
+            <a:avLst/>
+          </a:prstGeom>
+        </p:spPr>
+      </p:pic>
+      <p:sp>
+        <p:nvSpPr>
+          <p:cNvPr id="6" name="TextBox 5"/>
+          <p:cNvSpPr txBox="1"/>
+          <p:nvPr/>
+        </p:nvSpPr>
+        <p:spPr>
+          <a:xfrm>
+            <a:off x="10405872" y="6144768"/>
+            <a:ext cx="960120" cy="411480"/>
+          </a:xfrm>
+          <a:prstGeom prst="rect">
+            <a:avLst/>
+          </a:prstGeom>
+          <a:noFill/>
+        </p:spPr>
+        <p:txBody>
+          <a:bodyPr wrap="square">
+            <a:spAutoFit/>
+          </a:bodyPr>
+          <a:lstStyle/>
+          <a:p>
+            <a:pPr algn="r"/>
+            <a:r>
+              <a:rPr sz="1300" b="0">
+                <a:solidFill>
+                  <a:srgbClr val="5A647A"/>
+                </a:solidFill>
+                <a:latin typeface="Helvetica Neue"/>
+              </a:rPr>
+              <a:t>20</a:t>
+            </a:r>
+          </a:p>
+        </p:txBody>
+      </p:sp>
+    </p:spTree>
+  </p:cSld>
+  <p:clrMapOvr>
+    <a:masterClrMapping/>
+  </p:clrMapOvr>
+</p:sld>
+</file>
+
+<file path=ppt/slides/slide21.xml><?xml version="1.0" encoding="utf-8"?>
 <p:sld xmlns:a="http://schemas.openxmlformats.org/drawingml/2006/main" xmlns:p="http://schemas.openxmlformats.org/presentationml/2006/main" xmlns:r="http://schemas.openxmlformats.org/officeDocument/2006/relationships">
   <p:cSld>
     <p:bg>
@@ -8818,8 +8203,8 @@
         </p:nvSpPr>
         <p:spPr>
           <a:xfrm>
-            <a:off x="822960" y="2560320"/>
-            <a:ext cx="10515600" cy="1828800"/>
+            <a:off x="822960" y="1737360"/>
+            <a:ext cx="10515600" cy="548640"/>
           </a:xfrm>
           <a:prstGeom prst="rect">
             <a:avLst/>
@@ -8839,23 +8224,7 @@
                 </a:solidFill>
                 <a:latin typeface="Helvetica Neue"/>
               </a:rPr>
-              <a:t>ACT 5</a:t>
-            </a:r>
-          </a:p>
-          <a:p>
-            <a:pPr>
-              <a:spcBef>
-                <a:spcPts val="1000"/>
-              </a:spcBef>
-            </a:pPr>
-            <a:r>
-              <a:rPr sz="4200" b="1">
-                <a:solidFill>
-                  <a:srgbClr val="FFFFFF"/>
-                </a:solidFill>
-                <a:latin typeface="Helvetica Neue"/>
-              </a:rPr>
-              <a:t>What you keep</a:t>
+              <a:t>LIVE NOTEBOOK</a:t>
             </a:r>
           </a:p>
         </p:txBody>
@@ -8868,8 +8237,8 @@
         </p:nvSpPr>
         <p:spPr>
           <a:xfrm>
-            <a:off x="10405872" y="6144768"/>
-            <a:ext cx="960120" cy="411480"/>
+            <a:off x="822960" y="2377440"/>
+            <a:ext cx="10515600" cy="1097280"/>
           </a:xfrm>
           <a:prstGeom prst="rect">
             <a:avLst/>
@@ -8882,55 +8251,28 @@
           </a:bodyPr>
           <a:lstStyle/>
           <a:p>
-            <a:pPr algn="r"/>
-            <a:r>
-              <a:rPr sz="1300" b="0">
-                <a:solidFill>
-                  <a:srgbClr val="6E7C93"/>
-                </a:solidFill>
-                <a:latin typeface="Helvetica Neue"/>
-              </a:rPr>
-              <a:t>20</a:t>
-            </a:r>
-          </a:p>
-        </p:txBody>
-      </p:sp>
-    </p:spTree>
-  </p:cSld>
-  <p:clrMapOvr>
-    <a:masterClrMapping/>
-  </p:clrMapOvr>
-</p:sld>
-</file>
-
-<file path=ppt/slides/slide21.xml><?xml version="1.0" encoding="utf-8"?>
-<p:sld xmlns:a="http://schemas.openxmlformats.org/drawingml/2006/main" xmlns:p="http://schemas.openxmlformats.org/presentationml/2006/main" xmlns:r="http://schemas.openxmlformats.org/officeDocument/2006/relationships">
-  <p:cSld>
-    <p:bg>
-      <p:bgPr>
-        <a:solidFill>
-          <a:srgbClr val="FFFFFF"/>
-        </a:solidFill>
-        <a:effectLst/>
-      </p:bgPr>
-    </p:bg>
-    <p:spTree>
-      <p:nvGrpSpPr>
-        <p:cNvPr id="1" name=""/>
-        <p:cNvGrpSpPr/>
-        <p:nvPr/>
-      </p:nvGrpSpPr>
-      <p:grpSpPr/>
-      <p:sp>
-        <p:nvSpPr>
-          <p:cNvPr id="2" name="TextBox 1"/>
+            <a:r>
+              <a:rPr sz="3800" b="1">
+                <a:solidFill>
+                  <a:srgbClr val="FFFFFF"/>
+                </a:solidFill>
+                <a:latin typeface="Helvetica Neue"/>
+              </a:rPr>
+              <a:t>Demo: cohorts of real users</a:t>
+            </a:r>
+          </a:p>
+        </p:txBody>
+      </p:sp>
+      <p:sp>
+        <p:nvSpPr>
+          <p:cNvPr id="4" name="TextBox 3"/>
           <p:cNvSpPr txBox="1"/>
           <p:nvPr/>
         </p:nvSpPr>
         <p:spPr>
           <a:xfrm>
-            <a:off x="822960" y="640080"/>
-            <a:ext cx="10515600" cy="960120"/>
+            <a:off x="822960" y="3749039"/>
+            <a:ext cx="10515600" cy="1828800"/>
           </a:xfrm>
           <a:prstGeom prst="rect">
             <a:avLst/>
@@ -8943,72 +8285,65 @@
           </a:bodyPr>
           <a:lstStyle/>
           <a:p>
-            <a:r>
-              <a:rPr sz="3400" b="1">
-                <a:solidFill>
-                  <a:srgbClr val="141B2D"/>
-                </a:solidFill>
-                <a:latin typeface="Helvetica Neue"/>
-              </a:rPr>
-              <a:t>The asymmetry is the whole point</a:t>
-            </a:r>
-          </a:p>
-        </p:txBody>
-      </p:sp>
-      <p:sp>
-        <p:nvSpPr>
-          <p:cNvPr id="3" name="Rectangle 2"/>
-          <p:cNvSpPr/>
-          <p:nvPr/>
-        </p:nvSpPr>
-        <p:spPr>
-          <a:xfrm>
-            <a:off x="822960" y="1276603"/>
-            <a:ext cx="1463040" cy="50800"/>
-          </a:xfrm>
-          <a:prstGeom prst="rect">
-            <a:avLst/>
-          </a:prstGeom>
-          <a:solidFill>
-            <a:srgbClr val="005EB8"/>
-          </a:solidFill>
-          <a:ln>
-            <a:noFill/>
-          </a:ln>
-          <a:effectLst/>
-        </p:spPr>
-        <p:style>
-          <a:lnRef idx="1">
-            <a:schemeClr val="accent1"/>
-          </a:lnRef>
-          <a:fillRef idx="3">
-            <a:schemeClr val="accent1"/>
-          </a:fillRef>
-          <a:effectRef idx="2">
-            <a:schemeClr val="accent1"/>
-          </a:effectRef>
-          <a:fontRef idx="minor">
-            <a:schemeClr val="lt1"/>
-          </a:fontRef>
-        </p:style>
-        <p:txBody>
-          <a:bodyPr rtlCol="0" anchor="ctr"/>
-          <a:lstStyle/>
-          <a:p>
-            <a:pPr algn="ctr"/>
-          </a:p>
-        </p:txBody>
-      </p:sp>
-      <p:sp>
-        <p:nvSpPr>
-          <p:cNvPr id="4" name="TextBox 3"/>
+            <a:pPr>
+              <a:spcAft>
+                <a:spcPts val="1200"/>
+              </a:spcAft>
+            </a:pPr>
+            <a:r>
+              <a:rPr sz="2200" b="0">
+                <a:solidFill>
+                  <a:srgbClr val="B8C2D4"/>
+                </a:solidFill>
+                <a:latin typeface="Helvetica Neue"/>
+              </a:rPr>
+              <a:t>Notebook section 11</a:t>
+            </a:r>
+          </a:p>
+          <a:p>
+            <a:pPr>
+              <a:spcAft>
+                <a:spcPts val="1200"/>
+              </a:spcAft>
+            </a:pPr>
+            <a:r>
+              <a:rPr sz="2200" b="0">
+                <a:solidFill>
+                  <a:srgbClr val="B8C2D4"/>
+                </a:solidFill>
+                <a:latin typeface="Helvetica Neue"/>
+              </a:rPr>
+              <a:t>480 real WANDS queries, grouped into 5 cohorts</a:t>
+            </a:r>
+          </a:p>
+          <a:p>
+            <a:pPr>
+              <a:spcAft>
+                <a:spcPts val="1200"/>
+              </a:spcAft>
+            </a:pPr>
+            <a:r>
+              <a:rPr sz="2200" b="0">
+                <a:solidFill>
+                  <a:srgbClr val="B8C2D4"/>
+                </a:solidFill>
+                <a:latin typeface="Helvetica Neue"/>
+              </a:rPr>
+              <a:t>Every user privatizes independently, on their own device</a:t>
+            </a:r>
+          </a:p>
+        </p:txBody>
+      </p:sp>
+      <p:sp>
+        <p:nvSpPr>
+          <p:cNvPr id="5" name="TextBox 4"/>
           <p:cNvSpPr txBox="1"/>
           <p:nvPr/>
         </p:nvSpPr>
         <p:spPr>
           <a:xfrm>
-            <a:off x="822960" y="2057400"/>
-            <a:ext cx="10515600" cy="4023360"/>
+            <a:off x="10405872" y="6144768"/>
+            <a:ext cx="960120" cy="411480"/>
           </a:xfrm>
           <a:prstGeom prst="rect">
             <a:avLst/>
@@ -9021,134 +8356,11 @@
           </a:bodyPr>
           <a:lstStyle/>
           <a:p>
-            <a:pPr marL="342900" indent="-342900">
-              <a:spcAft>
-                <a:spcPts val="2000"/>
-              </a:spcAft>
-            </a:pPr>
-            <a:r>
-              <a:rPr sz="2400" b="1">
-                <a:solidFill>
-                  <a:srgbClr val="005EB8"/>
-                </a:solidFill>
-                <a:latin typeface="Helvetica Neue"/>
-              </a:rPr>
-              <a:t>-   </a:t>
-            </a:r>
-            <a:r>
-              <a:rPr sz="2400" b="0">
-                <a:solidFill>
-                  <a:srgbClr val="141B2D"/>
-                </a:solidFill>
-                <a:latin typeface="Helvetica Neue"/>
-              </a:rPr>
-              <a:t>Laplace noise is zero-mean</a:t>
-            </a:r>
-          </a:p>
-          <a:p>
-            <a:pPr marL="342900" indent="-342900">
-              <a:spcAft>
-                <a:spcPts val="2000"/>
-              </a:spcAft>
-            </a:pPr>
-            <a:r>
-              <a:rPr sz="2400" b="1">
-                <a:solidFill>
-                  <a:srgbClr val="005EB8"/>
-                </a:solidFill>
-                <a:latin typeface="Helvetica Neue"/>
-              </a:rPr>
-              <a:t>-   </a:t>
-            </a:r>
-            <a:r>
-              <a:rPr sz="2400" b="0">
-                <a:solidFill>
-                  <a:srgbClr val="141B2D"/>
-                </a:solidFill>
-                <a:latin typeface="Helvetica Neue"/>
-              </a:rPr>
-              <a:t>It cancels when you average over many independent users</a:t>
-            </a:r>
-          </a:p>
-          <a:p>
-            <a:pPr marL="342900" indent="-342900">
-              <a:spcAft>
-                <a:spcPts val="2000"/>
-              </a:spcAft>
-            </a:pPr>
-            <a:r>
-              <a:rPr sz="2400" b="1">
-                <a:solidFill>
-                  <a:srgbClr val="005EB8"/>
-                </a:solidFill>
-                <a:latin typeface="Helvetica Neue"/>
-              </a:rPr>
-              <a:t>-   </a:t>
-            </a:r>
-            <a:r>
-              <a:rPr sz="2400" b="0">
-                <a:solidFill>
-                  <a:srgbClr val="141B2D"/>
-                </a:solidFill>
-                <a:latin typeface="Helvetica Neue"/>
-              </a:rPr>
-              <a:t>One person's query is unrecoverable</a:t>
-            </a:r>
-          </a:p>
-          <a:p>
-            <a:pPr marL="342900" indent="-342900">
-              <a:spcAft>
-                <a:spcPts val="2000"/>
-              </a:spcAft>
-            </a:pPr>
-            <a:r>
-              <a:rPr sz="2400" b="1">
-                <a:solidFill>
-                  <a:srgbClr val="005EB8"/>
-                </a:solidFill>
-                <a:latin typeface="Helvetica Neue"/>
-              </a:rPr>
-              <a:t>-   </a:t>
-            </a:r>
-            <a:r>
-              <a:rPr sz="2400" b="0">
-                <a:solidFill>
-                  <a:srgbClr val="141B2D"/>
-                </a:solidFill>
-                <a:latin typeface="Helvetica Neue"/>
-              </a:rPr>
-              <a:t>The trend across ten thousand people is not</a:t>
-            </a:r>
-          </a:p>
-        </p:txBody>
-      </p:sp>
-      <p:sp>
-        <p:nvSpPr>
-          <p:cNvPr id="5" name="TextBox 4"/>
-          <p:cNvSpPr txBox="1"/>
-          <p:nvPr/>
-        </p:nvSpPr>
-        <p:spPr>
-          <a:xfrm>
-            <a:off x="10405872" y="6144768"/>
-            <a:ext cx="960120" cy="411480"/>
-          </a:xfrm>
-          <a:prstGeom prst="rect">
-            <a:avLst/>
-          </a:prstGeom>
-          <a:noFill/>
-        </p:spPr>
-        <p:txBody>
-          <a:bodyPr wrap="square">
-            <a:spAutoFit/>
-          </a:bodyPr>
-          <a:lstStyle/>
-          <a:p>
             <a:pPr algn="r"/>
             <a:r>
               <a:rPr sz="1300" b="0">
                 <a:solidFill>
-                  <a:srgbClr val="5A647A"/>
+                  <a:srgbClr val="6E7C93"/>
                 </a:solidFill>
                 <a:latin typeface="Helvetica Neue"/>
               </a:rPr>
@@ -9166,206 +8378,6 @@
 </file>
 
 <file path=ppt/slides/slide22.xml><?xml version="1.0" encoding="utf-8"?>
-<p:sld xmlns:a="http://schemas.openxmlformats.org/drawingml/2006/main" xmlns:p="http://schemas.openxmlformats.org/presentationml/2006/main" xmlns:r="http://schemas.openxmlformats.org/officeDocument/2006/relationships">
-  <p:cSld>
-    <p:bg>
-      <p:bgPr>
-        <a:solidFill>
-          <a:srgbClr val="0E1A2F"/>
-        </a:solidFill>
-        <a:effectLst/>
-      </p:bgPr>
-    </p:bg>
-    <p:spTree>
-      <p:nvGrpSpPr>
-        <p:cNvPr id="1" name=""/>
-        <p:cNvGrpSpPr/>
-        <p:nvPr/>
-      </p:nvGrpSpPr>
-      <p:grpSpPr/>
-      <p:sp>
-        <p:nvSpPr>
-          <p:cNvPr id="2" name="TextBox 1"/>
-          <p:cNvSpPr txBox="1"/>
-          <p:nvPr/>
-        </p:nvSpPr>
-        <p:spPr>
-          <a:xfrm>
-            <a:off x="822960" y="1737360"/>
-            <a:ext cx="10515600" cy="548640"/>
-          </a:xfrm>
-          <a:prstGeom prst="rect">
-            <a:avLst/>
-          </a:prstGeom>
-          <a:noFill/>
-        </p:spPr>
-        <p:txBody>
-          <a:bodyPr wrap="square">
-            <a:spAutoFit/>
-          </a:bodyPr>
-          <a:lstStyle/>
-          <a:p>
-            <a:r>
-              <a:rPr sz="1800" b="1">
-                <a:solidFill>
-                  <a:srgbClr val="5A9BE8"/>
-                </a:solidFill>
-                <a:latin typeface="Helvetica Neue"/>
-              </a:rPr>
-              <a:t>LIVE NOTEBOOK</a:t>
-            </a:r>
-          </a:p>
-        </p:txBody>
-      </p:sp>
-      <p:sp>
-        <p:nvSpPr>
-          <p:cNvPr id="3" name="TextBox 2"/>
-          <p:cNvSpPr txBox="1"/>
-          <p:nvPr/>
-        </p:nvSpPr>
-        <p:spPr>
-          <a:xfrm>
-            <a:off x="822960" y="2377440"/>
-            <a:ext cx="10515600" cy="1097280"/>
-          </a:xfrm>
-          <a:prstGeom prst="rect">
-            <a:avLst/>
-          </a:prstGeom>
-          <a:noFill/>
-        </p:spPr>
-        <p:txBody>
-          <a:bodyPr wrap="square">
-            <a:spAutoFit/>
-          </a:bodyPr>
-          <a:lstStyle/>
-          <a:p>
-            <a:r>
-              <a:rPr sz="3800" b="1">
-                <a:solidFill>
-                  <a:srgbClr val="FFFFFF"/>
-                </a:solidFill>
-                <a:latin typeface="Helvetica Neue"/>
-              </a:rPr>
-              <a:t>Demo: cohorts of real users</a:t>
-            </a:r>
-          </a:p>
-        </p:txBody>
-      </p:sp>
-      <p:sp>
-        <p:nvSpPr>
-          <p:cNvPr id="4" name="TextBox 3"/>
-          <p:cNvSpPr txBox="1"/>
-          <p:nvPr/>
-        </p:nvSpPr>
-        <p:spPr>
-          <a:xfrm>
-            <a:off x="822960" y="3749039"/>
-            <a:ext cx="10515600" cy="1828800"/>
-          </a:xfrm>
-          <a:prstGeom prst="rect">
-            <a:avLst/>
-          </a:prstGeom>
-          <a:noFill/>
-        </p:spPr>
-        <p:txBody>
-          <a:bodyPr wrap="square">
-            <a:spAutoFit/>
-          </a:bodyPr>
-          <a:lstStyle/>
-          <a:p>
-            <a:pPr>
-              <a:spcAft>
-                <a:spcPts val="1200"/>
-              </a:spcAft>
-            </a:pPr>
-            <a:r>
-              <a:rPr sz="2200" b="0">
-                <a:solidFill>
-                  <a:srgbClr val="B8C2D4"/>
-                </a:solidFill>
-                <a:latin typeface="Helvetica Neue"/>
-              </a:rPr>
-              <a:t>Notebook section 11</a:t>
-            </a:r>
-          </a:p>
-          <a:p>
-            <a:pPr>
-              <a:spcAft>
-                <a:spcPts val="1200"/>
-              </a:spcAft>
-            </a:pPr>
-            <a:r>
-              <a:rPr sz="2200" b="0">
-                <a:solidFill>
-                  <a:srgbClr val="B8C2D4"/>
-                </a:solidFill>
-                <a:latin typeface="Helvetica Neue"/>
-              </a:rPr>
-              <a:t>480 real WANDS queries, grouped into 5 cohorts</a:t>
-            </a:r>
-          </a:p>
-          <a:p>
-            <a:pPr>
-              <a:spcAft>
-                <a:spcPts val="1200"/>
-              </a:spcAft>
-            </a:pPr>
-            <a:r>
-              <a:rPr sz="2200" b="0">
-                <a:solidFill>
-                  <a:srgbClr val="B8C2D4"/>
-                </a:solidFill>
-                <a:latin typeface="Helvetica Neue"/>
-              </a:rPr>
-              <a:t>Every user privatizes independently, on their own device</a:t>
-            </a:r>
-          </a:p>
-        </p:txBody>
-      </p:sp>
-      <p:sp>
-        <p:nvSpPr>
-          <p:cNvPr id="5" name="TextBox 4"/>
-          <p:cNvSpPr txBox="1"/>
-          <p:nvPr/>
-        </p:nvSpPr>
-        <p:spPr>
-          <a:xfrm>
-            <a:off x="10405872" y="6144768"/>
-            <a:ext cx="960120" cy="411480"/>
-          </a:xfrm>
-          <a:prstGeom prst="rect">
-            <a:avLst/>
-          </a:prstGeom>
-          <a:noFill/>
-        </p:spPr>
-        <p:txBody>
-          <a:bodyPr wrap="square">
-            <a:spAutoFit/>
-          </a:bodyPr>
-          <a:lstStyle/>
-          <a:p>
-            <a:pPr algn="r"/>
-            <a:r>
-              <a:rPr sz="1300" b="0">
-                <a:solidFill>
-                  <a:srgbClr val="6E7C93"/>
-                </a:solidFill>
-                <a:latin typeface="Helvetica Neue"/>
-              </a:rPr>
-              <a:t>22</a:t>
-            </a:r>
-          </a:p>
-        </p:txBody>
-      </p:sp>
-    </p:spTree>
-  </p:cSld>
-  <p:clrMapOvr>
-    <a:masterClrMapping/>
-  </p:clrMapOvr>
-</p:sld>
-</file>
-
-<file path=ppt/slides/slide23.xml><?xml version="1.0" encoding="utf-8"?>
 <p:sld xmlns:a="http://schemas.openxmlformats.org/drawingml/2006/main" xmlns:p="http://schemas.openxmlformats.org/presentationml/2006/main" xmlns:r="http://schemas.openxmlformats.org/officeDocument/2006/relationships">
   <p:cSld>
     <p:bg>
@@ -10083,7 +9095,7 @@
                 </a:solidFill>
                 <a:latin typeface="Helvetica Neue"/>
               </a:rPr>
-              <a:t>epsilon 1.0, heavier noise than anything in Act 4. 20,000 users per cohort. 5 of 5 recovered.</a:t>
+              <a:t>epsilon 1.0, heavier noise than anything in Part 4. 20,000 users per cohort. 5 of 5 recovered.</a:t>
             </a:r>
           </a:p>
         </p:txBody>
@@ -10091,6 +9103,160 @@
       <p:sp>
         <p:nvSpPr>
           <p:cNvPr id="6" name="TextBox 5"/>
+          <p:cNvSpPr txBox="1"/>
+          <p:nvPr/>
+        </p:nvSpPr>
+        <p:spPr>
+          <a:xfrm>
+            <a:off x="10405872" y="6144768"/>
+            <a:ext cx="960120" cy="411480"/>
+          </a:xfrm>
+          <a:prstGeom prst="rect">
+            <a:avLst/>
+          </a:prstGeom>
+          <a:noFill/>
+        </p:spPr>
+        <p:txBody>
+          <a:bodyPr wrap="square">
+            <a:spAutoFit/>
+          </a:bodyPr>
+          <a:lstStyle/>
+          <a:p>
+            <a:pPr algn="r"/>
+            <a:r>
+              <a:rPr sz="1300" b="0">
+                <a:solidFill>
+                  <a:srgbClr val="5A647A"/>
+                </a:solidFill>
+                <a:latin typeface="Helvetica Neue"/>
+              </a:rPr>
+              <a:t>22</a:t>
+            </a:r>
+          </a:p>
+        </p:txBody>
+      </p:sp>
+    </p:spTree>
+  </p:cSld>
+  <p:clrMapOvr>
+    <a:masterClrMapping/>
+  </p:clrMapOvr>
+</p:sld>
+</file>
+
+<file path=ppt/slides/slide23.xml><?xml version="1.0" encoding="utf-8"?>
+<p:sld xmlns:a="http://schemas.openxmlformats.org/drawingml/2006/main" xmlns:p="http://schemas.openxmlformats.org/presentationml/2006/main" xmlns:r="http://schemas.openxmlformats.org/officeDocument/2006/relationships">
+  <p:cSld>
+    <p:bg>
+      <p:bgPr>
+        <a:solidFill>
+          <a:srgbClr val="FFFFFF"/>
+        </a:solidFill>
+        <a:effectLst/>
+      </p:bgPr>
+    </p:bg>
+    <p:spTree>
+      <p:nvGrpSpPr>
+        <p:cNvPr id="1" name=""/>
+        <p:cNvGrpSpPr/>
+        <p:nvPr/>
+      </p:nvGrpSpPr>
+      <p:grpSpPr/>
+      <p:sp>
+        <p:nvSpPr>
+          <p:cNvPr id="2" name="TextBox 1"/>
+          <p:cNvSpPr txBox="1"/>
+          <p:nvPr/>
+        </p:nvSpPr>
+        <p:spPr>
+          <a:xfrm>
+            <a:off x="822960" y="411480"/>
+            <a:ext cx="10515600" cy="822960"/>
+          </a:xfrm>
+          <a:prstGeom prst="rect">
+            <a:avLst/>
+          </a:prstGeom>
+          <a:noFill/>
+        </p:spPr>
+        <p:txBody>
+          <a:bodyPr wrap="square">
+            <a:spAutoFit/>
+          </a:bodyPr>
+          <a:lstStyle/>
+          <a:p>
+            <a:r>
+              <a:rPr sz="3000" b="1">
+                <a:solidFill>
+                  <a:srgbClr val="141B2D"/>
+                </a:solidFill>
+                <a:latin typeface="Helvetica Neue"/>
+              </a:rPr>
+              <a:t>Error falls as 1 / sqrt(n), exactly as theory says</a:t>
+            </a:r>
+          </a:p>
+        </p:txBody>
+      </p:sp>
+      <p:pic>
+        <p:nvPicPr>
+          <p:cNvPr id="3" name="Picture 2" descr="11_aggregate_convergence.png"/>
+          <p:cNvPicPr>
+            <a:picLocks noChangeAspect="1"/>
+          </p:cNvPicPr>
+          <p:nvPr/>
+        </p:nvPicPr>
+        <p:blipFill>
+          <a:blip r:embed="rId2"/>
+          <a:stretch>
+            <a:fillRect/>
+          </a:stretch>
+        </p:blipFill>
+        <p:spPr>
+          <a:xfrm>
+            <a:off x="2442959" y="1417320"/>
+            <a:ext cx="7305777" cy="4343400"/>
+          </a:xfrm>
+          <a:prstGeom prst="rect">
+            <a:avLst/>
+          </a:prstGeom>
+        </p:spPr>
+      </p:pic>
+      <p:sp>
+        <p:nvSpPr>
+          <p:cNvPr id="4" name="TextBox 3"/>
+          <p:cNvSpPr txBox="1"/>
+          <p:nvPr/>
+        </p:nvSpPr>
+        <p:spPr>
+          <a:xfrm>
+            <a:off x="1325880" y="5989320"/>
+            <a:ext cx="9509760" cy="640080"/>
+          </a:xfrm>
+          <a:prstGeom prst="rect">
+            <a:avLst/>
+          </a:prstGeom>
+          <a:noFill/>
+        </p:spPr>
+        <p:txBody>
+          <a:bodyPr wrap="square">
+            <a:spAutoFit/>
+          </a:bodyPr>
+          <a:lstStyle/>
+          <a:p>
+            <a:pPr algn="ctr"/>
+            <a:r>
+              <a:rPr sz="1600" b="0">
+                <a:solidFill>
+                  <a:srgbClr val="5A647A"/>
+                </a:solidFill>
+                <a:latin typeface="Helvetica Neue"/>
+              </a:rPr>
+              <a:t>Doubling the privacy budget is expensive. Four times the users is free.</a:t>
+            </a:r>
+          </a:p>
+        </p:txBody>
+      </p:sp>
+      <p:sp>
+        <p:nvSpPr>
+          <p:cNvPr id="5" name="TextBox 4"/>
           <p:cNvSpPr txBox="1"/>
           <p:nvPr/>
         </p:nvSpPr>
@@ -10157,8 +9323,8 @@
         </p:nvSpPr>
         <p:spPr>
           <a:xfrm>
-            <a:off x="822960" y="411480"/>
-            <a:ext cx="10515600" cy="822960"/>
+            <a:off x="822960" y="640080"/>
+            <a:ext cx="10515600" cy="960120"/>
           </a:xfrm>
           <a:prstGeom prst="rect">
             <a:avLst/>
@@ -10172,41 +9338,61 @@
           <a:lstStyle/>
           <a:p>
             <a:r>
-              <a:rPr sz="3000" b="1">
+              <a:rPr sz="3400" b="1">
                 <a:solidFill>
                   <a:srgbClr val="141B2D"/>
                 </a:solidFill>
                 <a:latin typeface="Helvetica Neue"/>
               </a:rPr>
-              <a:t>Error falls as 1 / sqrt(n), exactly as theory says</a:t>
-            </a:r>
-          </a:p>
-        </p:txBody>
-      </p:sp>
-      <p:pic>
-        <p:nvPicPr>
-          <p:cNvPr id="3" name="Picture 2" descr="11_aggregate_convergence.png"/>
-          <p:cNvPicPr>
-            <a:picLocks noChangeAspect="1"/>
-          </p:cNvPicPr>
+              <a:t>How big a segment has to be</a:t>
+            </a:r>
+          </a:p>
+        </p:txBody>
+      </p:sp>
+      <p:sp>
+        <p:nvSpPr>
+          <p:cNvPr id="3" name="Rectangle 2"/>
+          <p:cNvSpPr/>
           <p:nvPr/>
-        </p:nvPicPr>
-        <p:blipFill>
-          <a:blip r:embed="rId2"/>
-          <a:stretch>
-            <a:fillRect/>
-          </a:stretch>
-        </p:blipFill>
-        <p:spPr>
-          <a:xfrm>
-            <a:off x="2459464" y="1417320"/>
-            <a:ext cx="7272767" cy="4343400"/>
+        </p:nvSpPr>
+        <p:spPr>
+          <a:xfrm>
+            <a:off x="822960" y="1276603"/>
+            <a:ext cx="1463040" cy="50800"/>
           </a:xfrm>
           <a:prstGeom prst="rect">
             <a:avLst/>
           </a:prstGeom>
-        </p:spPr>
-      </p:pic>
+          <a:solidFill>
+            <a:srgbClr val="005EB8"/>
+          </a:solidFill>
+          <a:ln>
+            <a:noFill/>
+          </a:ln>
+          <a:effectLst/>
+        </p:spPr>
+        <p:style>
+          <a:lnRef idx="1">
+            <a:schemeClr val="accent1"/>
+          </a:lnRef>
+          <a:fillRef idx="3">
+            <a:schemeClr val="accent1"/>
+          </a:fillRef>
+          <a:effectRef idx="2">
+            <a:schemeClr val="accent1"/>
+          </a:effectRef>
+          <a:fontRef idx="minor">
+            <a:schemeClr val="lt1"/>
+          </a:fontRef>
+        </p:style>
+        <p:txBody>
+          <a:bodyPr rtlCol="0" anchor="ctr"/>
+          <a:lstStyle/>
+          <a:p>
+            <a:pPr algn="ctr"/>
+          </a:p>
+        </p:txBody>
+      </p:sp>
       <p:sp>
         <p:nvSpPr>
           <p:cNvPr id="4" name="TextBox 3"/>
@@ -10215,8 +9401,8 @@
         </p:nvSpPr>
         <p:spPr>
           <a:xfrm>
-            <a:off x="822960" y="5989320"/>
-            <a:ext cx="10515600" cy="640080"/>
+            <a:off x="822960" y="2057400"/>
+            <a:ext cx="10515600" cy="4023360"/>
           </a:xfrm>
           <a:prstGeom prst="rect">
             <a:avLst/>
@@ -10229,15 +9415,128 @@
           </a:bodyPr>
           <a:lstStyle/>
           <a:p>
-            <a:pPr algn="ctr"/>
-            <a:r>
-              <a:rPr sz="1600" b="0">
-                <a:solidFill>
-                  <a:srgbClr val="5A647A"/>
-                </a:solidFill>
-                <a:latin typeface="Helvetica Neue"/>
-              </a:rPr>
-              <a:t>Doubling the privacy budget is expensive. Four times the users is free.</a:t>
+            <a:pPr marL="342900" indent="-342900">
+              <a:spcAft>
+                <a:spcPts val="2000"/>
+              </a:spcAft>
+            </a:pPr>
+            <a:r>
+              <a:rPr sz="2400" b="1">
+                <a:solidFill>
+                  <a:srgbClr val="005EB8"/>
+                </a:solidFill>
+                <a:latin typeface="Helvetica Neue"/>
+              </a:rPr>
+              <a:t>-   </a:t>
+            </a:r>
+            <a:r>
+              <a:rPr sz="2400" b="0">
+                <a:solidFill>
+                  <a:srgbClr val="141B2D"/>
+                </a:solidFill>
+                <a:latin typeface="Helvetica Neue"/>
+              </a:rPr>
+              <a:t>Error drops below the spread of the index at roughly 2,500 users</a:t>
+            </a:r>
+          </a:p>
+          <a:p>
+            <a:pPr marL="342900" indent="-342900">
+              <a:spcAft>
+                <a:spcPts val="2000"/>
+              </a:spcAft>
+            </a:pPr>
+            <a:r>
+              <a:rPr sz="2400" b="1">
+                <a:solidFill>
+                  <a:srgbClr val="005EB8"/>
+                </a:solidFill>
+                <a:latin typeface="Helvetica Neue"/>
+              </a:rPr>
+              <a:t>-   </a:t>
+            </a:r>
+            <a:r>
+              <a:rPr sz="2400" b="0">
+                <a:solidFill>
+                  <a:srgbClr val="141B2D"/>
+                </a:solidFill>
+                <a:latin typeface="Helvetica Neue"/>
+              </a:rPr>
+              <a:t>That is at epsilon 1, and halving epsilon needs four times the users</a:t>
+            </a:r>
+          </a:p>
+          <a:p>
+            <a:pPr marL="342900" indent="-342900">
+              <a:spcAft>
+                <a:spcPts val="2000"/>
+              </a:spcAft>
+            </a:pPr>
+            <a:r>
+              <a:rPr sz="2400" b="1">
+                <a:solidFill>
+                  <a:srgbClr val="005EB8"/>
+                </a:solidFill>
+                <a:latin typeface="Helvetica Neue"/>
+              </a:rPr>
+              <a:t>-   </a:t>
+            </a:r>
+            <a:r>
+              <a:rPr sz="2400" b="0">
+                <a:solidFill>
+                  <a:srgbClr val="141B2D"/>
+                </a:solidFill>
+                <a:latin typeface="Helvetica Neue"/>
+              </a:rPr>
+              <a:t>Segments with thousands of users are measurable under LDP</a:t>
+            </a:r>
+          </a:p>
+          <a:p>
+            <a:pPr marL="342900" indent="-342900">
+              <a:spcAft>
+                <a:spcPts val="2000"/>
+              </a:spcAft>
+            </a:pPr>
+            <a:r>
+              <a:rPr sz="2400" b="1">
+                <a:solidFill>
+                  <a:srgbClr val="005EB8"/>
+                </a:solidFill>
+                <a:latin typeface="Helvetica Neue"/>
+              </a:rPr>
+              <a:t>-   </a:t>
+            </a:r>
+            <a:r>
+              <a:rPr sz="2400" b="0">
+                <a:solidFill>
+                  <a:srgbClr val="141B2D"/>
+                </a:solidFill>
+                <a:latin typeface="Helvetica Neue"/>
+              </a:rPr>
+              <a:t>Segments with dozens are not measurable</a:t>
+            </a:r>
+          </a:p>
+          <a:p>
+            <a:pPr marL="342900" indent="-342900">
+              <a:spcAft>
+                <a:spcPts val="2000"/>
+              </a:spcAft>
+            </a:pPr>
+            <a:r>
+              <a:rPr sz="2400" b="1">
+                <a:solidFill>
+                  <a:srgbClr val="005EB8"/>
+                </a:solidFill>
+                <a:latin typeface="Helvetica Neue"/>
+              </a:rPr>
+              <a:t>-   </a:t>
+            </a:r>
+            <a:r>
+              <a:rPr sz="2400" b="0">
+                <a:solidFill>
+                  <a:srgbClr val="141B2D"/>
+                </a:solidFill>
+                <a:latin typeface="Helvetica Neue"/>
+              </a:rPr>
+              <a:t>Your head terms work, but your long tail does not</a:t>
             </a:r>
           </a:p>
         </p:txBody>
@@ -10311,8 +9610,8 @@
         </p:nvSpPr>
         <p:spPr>
           <a:xfrm>
-            <a:off x="822960" y="640080"/>
-            <a:ext cx="10515600" cy="960120"/>
+            <a:off x="1005840" y="2286000"/>
+            <a:ext cx="10149840" cy="2377440"/>
           </a:xfrm>
           <a:prstGeom prst="rect">
             <a:avLst/>
@@ -10325,188 +9624,42 @@
           </a:bodyPr>
           <a:lstStyle/>
           <a:p>
-            <a:r>
-              <a:rPr sz="3400" b="1">
-                <a:solidFill>
-                  <a:srgbClr val="141B2D"/>
-                </a:solidFill>
-                <a:latin typeface="Helvetica Neue"/>
-              </a:rPr>
-              <a:t>The number to take home</a:t>
-            </a:r>
-          </a:p>
-        </p:txBody>
-      </p:sp>
-      <p:sp>
-        <p:nvSpPr>
-          <p:cNvPr id="3" name="Rectangle 2"/>
-          <p:cNvSpPr/>
-          <p:nvPr/>
-        </p:nvSpPr>
-        <p:spPr>
-          <a:xfrm>
-            <a:off x="822960" y="1276603"/>
-            <a:ext cx="1463040" cy="50800"/>
-          </a:xfrm>
-          <a:prstGeom prst="rect">
-            <a:avLst/>
-          </a:prstGeom>
-          <a:solidFill>
-            <a:srgbClr val="005EB8"/>
-          </a:solidFill>
-          <a:ln>
-            <a:noFill/>
-          </a:ln>
-          <a:effectLst/>
-        </p:spPr>
-        <p:style>
-          <a:lnRef idx="1">
-            <a:schemeClr val="accent1"/>
-          </a:lnRef>
-          <a:fillRef idx="3">
-            <a:schemeClr val="accent1"/>
-          </a:fillRef>
-          <a:effectRef idx="2">
-            <a:schemeClr val="accent1"/>
-          </a:effectRef>
-          <a:fontRef idx="minor">
-            <a:schemeClr val="lt1"/>
-          </a:fontRef>
-        </p:style>
-        <p:txBody>
-          <a:bodyPr rtlCol="0" anchor="ctr"/>
-          <a:lstStyle/>
-          <a:p>
-            <a:pPr algn="ctr"/>
-          </a:p>
-        </p:txBody>
-      </p:sp>
-      <p:sp>
-        <p:nvSpPr>
-          <p:cNvPr id="4" name="TextBox 3"/>
-          <p:cNvSpPr txBox="1"/>
-          <p:nvPr/>
-        </p:nvSpPr>
-        <p:spPr>
-          <a:xfrm>
-            <a:off x="822960" y="2057400"/>
-            <a:ext cx="10515600" cy="4023360"/>
-          </a:xfrm>
-          <a:prstGeom prst="rect">
-            <a:avLst/>
-          </a:prstGeom>
-          <a:noFill/>
-        </p:spPr>
-        <p:txBody>
-          <a:bodyPr wrap="square">
-            <a:spAutoFit/>
-          </a:bodyPr>
-          <a:lstStyle/>
-          <a:p>
-            <a:pPr marL="342900" indent="-342900">
+            <a:pPr>
               <a:spcAft>
-                <a:spcPts val="2000"/>
+                <a:spcPts val="1600"/>
               </a:spcAft>
             </a:pPr>
             <a:r>
-              <a:rPr sz="2400" b="1">
-                <a:solidFill>
-                  <a:srgbClr val="005EB8"/>
-                </a:solidFill>
-                <a:latin typeface="Helvetica Neue"/>
-              </a:rPr>
-              <a:t>-   </a:t>
-            </a:r>
-            <a:r>
-              <a:rPr sz="2400" b="0">
+              <a:rPr sz="3400" b="1">
                 <a:solidFill>
                   <a:srgbClr val="141B2D"/>
                 </a:solidFill>
                 <a:latin typeface="Helvetica Neue"/>
               </a:rPr>
-              <a:t>Error drops below the spread of the index at roughly 2,500 users</a:t>
-            </a:r>
-          </a:p>
-          <a:p>
-            <a:pPr marL="342900" indent="-342900">
+              <a:t>LDP does not cost you your analytics.</a:t>
+            </a:r>
+          </a:p>
+          <a:p>
+            <a:pPr>
               <a:spcAft>
-                <a:spcPts val="2000"/>
+                <a:spcPts val="1600"/>
               </a:spcAft>
             </a:pPr>
             <a:r>
-              <a:rPr sz="2400" b="1">
+              <a:rPr sz="3400" b="0">
                 <a:solidFill>
                   <a:srgbClr val="005EB8"/>
                 </a:solidFill>
                 <a:latin typeface="Helvetica Neue"/>
               </a:rPr>
-              <a:t>-   </a:t>
-            </a:r>
-            <a:r>
-              <a:rPr sz="2400" b="0">
-                <a:solidFill>
-                  <a:srgbClr val="141B2D"/>
-                </a:solidFill>
-                <a:latin typeface="Helvetica Neue"/>
-              </a:rPr>
-              <a:t>Segments with thousands of users are measurable under LDP</a:t>
-            </a:r>
-          </a:p>
-          <a:p>
-            <a:pPr marL="342900" indent="-342900">
-              <a:spcAft>
-                <a:spcPts val="2000"/>
-              </a:spcAft>
-            </a:pPr>
-            <a:r>
-              <a:rPr sz="2400" b="1">
-                <a:solidFill>
-                  <a:srgbClr val="005EB8"/>
-                </a:solidFill>
-                <a:latin typeface="Helvetica Neue"/>
-              </a:rPr>
-              <a:t>-   </a:t>
-            </a:r>
-            <a:r>
-              <a:rPr sz="2400" b="0">
-                <a:solidFill>
-                  <a:srgbClr val="141B2D"/>
-                </a:solidFill>
-                <a:latin typeface="Helvetica Neue"/>
-              </a:rPr>
-              <a:t>Segments with dozens are not</a:t>
-            </a:r>
-          </a:p>
-          <a:p>
-            <a:pPr marL="342900" indent="-342900">
-              <a:spcAft>
-                <a:spcPts val="2000"/>
-              </a:spcAft>
-            </a:pPr>
-            <a:r>
-              <a:rPr sz="2400" b="1">
-                <a:solidFill>
-                  <a:srgbClr val="005EB8"/>
-                </a:solidFill>
-                <a:latin typeface="Helvetica Neue"/>
-              </a:rPr>
-              <a:t>-   </a:t>
-            </a:r>
-            <a:r>
-              <a:rPr sz="2400" b="0">
-                <a:solidFill>
-                  <a:srgbClr val="141B2D"/>
-                </a:solidFill>
-                <a:latin typeface="Helvetica Neue"/>
-              </a:rPr>
-              <a:t>Your head terms work. Your long tail does not</a:t>
-            </a:r>
-          </a:p>
-        </p:txBody>
-      </p:sp>
-      <p:sp>
-        <p:nvSpPr>
-          <p:cNvPr id="5" name="TextBox 4"/>
+              <a:t>It costs you the ability to ask about one person.</a:t>
+            </a:r>
+          </a:p>
+        </p:txBody>
+      </p:sp>
+      <p:sp>
+        <p:nvSpPr>
+          <p:cNvPr id="3" name="TextBox 2"/>
           <p:cNvSpPr txBox="1"/>
           <p:nvPr/>
         </p:nvSpPr>
@@ -10548,6 +9701,117 @@
 </file>
 
 <file path=ppt/slides/slide26.xml><?xml version="1.0" encoding="utf-8"?>
+<p:sld xmlns:a="http://schemas.openxmlformats.org/drawingml/2006/main" xmlns:p="http://schemas.openxmlformats.org/presentationml/2006/main" xmlns:r="http://schemas.openxmlformats.org/officeDocument/2006/relationships">
+  <p:cSld>
+    <p:bg>
+      <p:bgPr>
+        <a:solidFill>
+          <a:srgbClr val="0E1A2F"/>
+        </a:solidFill>
+        <a:effectLst/>
+      </p:bgPr>
+    </p:bg>
+    <p:spTree>
+      <p:nvGrpSpPr>
+        <p:cNvPr id="1" name=""/>
+        <p:cNvGrpSpPr/>
+        <p:nvPr/>
+      </p:nvGrpSpPr>
+      <p:grpSpPr/>
+      <p:sp>
+        <p:nvSpPr>
+          <p:cNvPr id="2" name="TextBox 1"/>
+          <p:cNvSpPr txBox="1"/>
+          <p:nvPr/>
+        </p:nvSpPr>
+        <p:spPr>
+          <a:xfrm>
+            <a:off x="822960" y="2560320"/>
+            <a:ext cx="10515600" cy="1828800"/>
+          </a:xfrm>
+          <a:prstGeom prst="rect">
+            <a:avLst/>
+          </a:prstGeom>
+          <a:noFill/>
+        </p:spPr>
+        <p:txBody>
+          <a:bodyPr wrap="square">
+            <a:spAutoFit/>
+          </a:bodyPr>
+          <a:lstStyle/>
+          <a:p>
+            <a:r>
+              <a:rPr sz="1800" b="1">
+                <a:solidFill>
+                  <a:srgbClr val="5A9BE8"/>
+                </a:solidFill>
+                <a:latin typeface="Helvetica Neue"/>
+              </a:rPr>
+              <a:t>PART 6</a:t>
+            </a:r>
+          </a:p>
+          <a:p>
+            <a:pPr>
+              <a:spcBef>
+                <a:spcPts val="1000"/>
+              </a:spcBef>
+            </a:pPr>
+            <a:r>
+              <a:rPr sz="4200" b="1">
+                <a:solidFill>
+                  <a:srgbClr val="FFFFFF"/>
+                </a:solidFill>
+                <a:latin typeface="Helvetica Neue"/>
+              </a:rPr>
+              <a:t>Back to OpenSearch, and the limits</a:t>
+            </a:r>
+          </a:p>
+        </p:txBody>
+      </p:sp>
+      <p:sp>
+        <p:nvSpPr>
+          <p:cNvPr id="3" name="TextBox 2"/>
+          <p:cNvSpPr txBox="1"/>
+          <p:nvPr/>
+        </p:nvSpPr>
+        <p:spPr>
+          <a:xfrm>
+            <a:off x="10405872" y="6144768"/>
+            <a:ext cx="960120" cy="411480"/>
+          </a:xfrm>
+          <a:prstGeom prst="rect">
+            <a:avLst/>
+          </a:prstGeom>
+          <a:noFill/>
+        </p:spPr>
+        <p:txBody>
+          <a:bodyPr wrap="square">
+            <a:spAutoFit/>
+          </a:bodyPr>
+          <a:lstStyle/>
+          <a:p>
+            <a:pPr algn="r"/>
+            <a:r>
+              <a:rPr sz="1300" b="0">
+                <a:solidFill>
+                  <a:srgbClr val="6E7C93"/>
+                </a:solidFill>
+                <a:latin typeface="Helvetica Neue"/>
+              </a:rPr>
+              <a:t>26</a:t>
+            </a:r>
+          </a:p>
+        </p:txBody>
+      </p:sp>
+    </p:spTree>
+  </p:cSld>
+  <p:clrMapOvr>
+    <a:masterClrMapping/>
+  </p:clrMapOvr>
+</p:sld>
+</file>
+
+<file path=ppt/slides/slide27.xml><?xml version="1.0" encoding="utf-8"?>
 <p:sld xmlns:a="http://schemas.openxmlformats.org/drawingml/2006/main" xmlns:p="http://schemas.openxmlformats.org/presentationml/2006/main" xmlns:r="http://schemas.openxmlformats.org/officeDocument/2006/relationships">
   <p:cSld>
     <p:bg>
@@ -10573,8 +9837,8 @@
         </p:nvSpPr>
         <p:spPr>
           <a:xfrm>
-            <a:off x="1005840" y="2286000"/>
-            <a:ext cx="10149840" cy="2377440"/>
+            <a:off x="822960" y="640080"/>
+            <a:ext cx="10515600" cy="960120"/>
           </a:xfrm>
           <a:prstGeom prst="rect">
             <a:avLst/>
@@ -10587,11 +9851,6 @@
           </a:bodyPr>
           <a:lstStyle/>
           <a:p>
-            <a:pPr>
-              <a:spcAft>
-                <a:spcPts val="1600"/>
-              </a:spcAft>
-            </a:pPr>
             <a:r>
               <a:rPr sz="3400" b="1">
                 <a:solidFill>
@@ -10599,37 +9858,65 @@
                 </a:solidFill>
                 <a:latin typeface="Helvetica Neue"/>
               </a:rPr>
-              <a:t>LDP does not cost you your analytics.</a:t>
-            </a:r>
-          </a:p>
-          <a:p>
-            <a:pPr>
-              <a:spcAft>
-                <a:spcPts val="1600"/>
-              </a:spcAft>
-            </a:pPr>
-            <a:r>
-              <a:rPr sz="3400" b="0">
-                <a:solidFill>
-                  <a:srgbClr val="005EB8"/>
-                </a:solidFill>
-                <a:latin typeface="Helvetica Neue"/>
-              </a:rPr>
-              <a:t>It costs you the ability to ask about one person.</a:t>
-            </a:r>
-          </a:p>
-        </p:txBody>
-      </p:sp>
-      <p:sp>
-        <p:nvSpPr>
-          <p:cNvPr id="3" name="TextBox 2"/>
+              <a:t>Where the noise gets injected</a:t>
+            </a:r>
+          </a:p>
+        </p:txBody>
+      </p:sp>
+      <p:sp>
+        <p:nvSpPr>
+          <p:cNvPr id="3" name="Rectangle 2"/>
+          <p:cNvSpPr/>
+          <p:nvPr/>
+        </p:nvSpPr>
+        <p:spPr>
+          <a:xfrm>
+            <a:off x="822960" y="1276603"/>
+            <a:ext cx="1463040" cy="50800"/>
+          </a:xfrm>
+          <a:prstGeom prst="rect">
+            <a:avLst/>
+          </a:prstGeom>
+          <a:solidFill>
+            <a:srgbClr val="005EB8"/>
+          </a:solidFill>
+          <a:ln>
+            <a:noFill/>
+          </a:ln>
+          <a:effectLst/>
+        </p:spPr>
+        <p:style>
+          <a:lnRef idx="1">
+            <a:schemeClr val="accent1"/>
+          </a:lnRef>
+          <a:fillRef idx="3">
+            <a:schemeClr val="accent1"/>
+          </a:fillRef>
+          <a:effectRef idx="2">
+            <a:schemeClr val="accent1"/>
+          </a:effectRef>
+          <a:fontRef idx="minor">
+            <a:schemeClr val="lt1"/>
+          </a:fontRef>
+        </p:style>
+        <p:txBody>
+          <a:bodyPr rtlCol="0" anchor="ctr"/>
+          <a:lstStyle/>
+          <a:p>
+            <a:pPr algn="ctr"/>
+          </a:p>
+        </p:txBody>
+      </p:sp>
+      <p:sp>
+        <p:nvSpPr>
+          <p:cNvPr id="4" name="TextBox 3"/>
           <p:cNvSpPr txBox="1"/>
           <p:nvPr/>
         </p:nvSpPr>
         <p:spPr>
           <a:xfrm>
-            <a:off x="10405872" y="6144768"/>
-            <a:ext cx="960120" cy="411480"/>
+            <a:off x="822960" y="2057400"/>
+            <a:ext cx="5120640" cy="4023360"/>
           </a:xfrm>
           <a:prstGeom prst="rect">
             <a:avLst/>
@@ -10642,55 +9929,202 @@
           </a:bodyPr>
           <a:lstStyle/>
           <a:p>
-            <a:pPr algn="r"/>
-            <a:r>
-              <a:rPr sz="1300" b="0">
-                <a:solidFill>
-                  <a:srgbClr val="5A647A"/>
-                </a:solidFill>
-                <a:latin typeface="Helvetica Neue"/>
-              </a:rPr>
-              <a:t>26</a:t>
-            </a:r>
-          </a:p>
-        </p:txBody>
-      </p:sp>
-    </p:spTree>
-  </p:cSld>
-  <p:clrMapOvr>
-    <a:masterClrMapping/>
-  </p:clrMapOvr>
-</p:sld>
-</file>
-
-<file path=ppt/slides/slide27.xml><?xml version="1.0" encoding="utf-8"?>
-<p:sld xmlns:a="http://schemas.openxmlformats.org/drawingml/2006/main" xmlns:p="http://schemas.openxmlformats.org/presentationml/2006/main" xmlns:r="http://schemas.openxmlformats.org/officeDocument/2006/relationships">
-  <p:cSld>
-    <p:bg>
-      <p:bgPr>
-        <a:solidFill>
-          <a:srgbClr val="0E1A2F"/>
-        </a:solidFill>
-        <a:effectLst/>
-      </p:bgPr>
-    </p:bg>
-    <p:spTree>
-      <p:nvGrpSpPr>
-        <p:cNvPr id="1" name=""/>
-        <p:cNvGrpSpPr/>
-        <p:nvPr/>
-      </p:nvGrpSpPr>
-      <p:grpSpPr/>
-      <p:sp>
-        <p:nvSpPr>
-          <p:cNvPr id="2" name="TextBox 1"/>
+            <a:pPr marL="342900" indent="-342900">
+              <a:spcAft>
+                <a:spcPts val="1400"/>
+              </a:spcAft>
+            </a:pPr>
+            <a:r>
+              <a:rPr sz="2100" b="1">
+                <a:solidFill>
+                  <a:srgbClr val="005EB8"/>
+                </a:solidFill>
+                <a:latin typeface="Helvetica Neue"/>
+              </a:rPr>
+              <a:t>-   </a:t>
+            </a:r>
+            <a:r>
+              <a:rPr sz="2100" b="0">
+                <a:solidFill>
+                  <a:srgbClr val="141B2D"/>
+                </a:solidFill>
+                <a:latin typeface="Helvetica Neue"/>
+              </a:rPr>
+              <a:t>In </a:t>
+            </a:r>
+            <a:r>
+              <a:rPr sz="1900" b="0">
+                <a:solidFill>
+                  <a:srgbClr val="141B2D"/>
+                </a:solidFill>
+                <a:latin typeface="Consolas"/>
+              </a:rPr>
+              <a:t>ubi.js</a:t>
+            </a:r>
+            <a:r>
+              <a:rPr sz="2100" b="0">
+                <a:solidFill>
+                  <a:srgbClr val="141B2D"/>
+                </a:solidFill>
+                <a:latin typeface="Helvetica Neue"/>
+              </a:rPr>
+              <a:t>, on the device, before the event is sent</a:t>
+            </a:r>
+          </a:p>
+          <a:p>
+            <a:pPr marL="342900" indent="-342900">
+              <a:spcAft>
+                <a:spcPts val="1400"/>
+              </a:spcAft>
+            </a:pPr>
+            <a:r>
+              <a:rPr sz="2100" b="1">
+                <a:solidFill>
+                  <a:srgbClr val="005EB8"/>
+                </a:solidFill>
+                <a:latin typeface="Helvetica Neue"/>
+              </a:rPr>
+              <a:t>-   </a:t>
+            </a:r>
+            <a:r>
+              <a:rPr sz="2100" b="0">
+                <a:solidFill>
+                  <a:srgbClr val="141B2D"/>
+                </a:solidFill>
+                <a:latin typeface="Helvetica Neue"/>
+              </a:rPr>
+              <a:t>The cluster stores noised vectors and never sees the raw query</a:t>
+            </a:r>
+          </a:p>
+          <a:p>
+            <a:pPr marL="342900" indent="-342900">
+              <a:spcAft>
+                <a:spcPts val="1400"/>
+              </a:spcAft>
+            </a:pPr>
+            <a:r>
+              <a:rPr sz="2100" b="1">
+                <a:solidFill>
+                  <a:srgbClr val="005EB8"/>
+                </a:solidFill>
+                <a:latin typeface="Helvetica Neue"/>
+              </a:rPr>
+              <a:t>-   </a:t>
+            </a:r>
+            <a:r>
+              <a:rPr sz="2100" b="0">
+                <a:solidFill>
+                  <a:srgbClr val="141B2D"/>
+                </a:solidFill>
+                <a:latin typeface="Helvetica Neue"/>
+              </a:rPr>
+              <a:t>Aggregation happens at query time over the noised data</a:t>
+            </a:r>
+          </a:p>
+          <a:p>
+            <a:pPr marL="342900" indent="-342900">
+              <a:spcAft>
+                <a:spcPts val="1400"/>
+              </a:spcAft>
+            </a:pPr>
+            <a:r>
+              <a:rPr sz="2100" b="1">
+                <a:solidFill>
+                  <a:srgbClr val="005EB8"/>
+                </a:solidFill>
+                <a:latin typeface="Helvetica Neue"/>
+              </a:rPr>
+              <a:t>-   </a:t>
+            </a:r>
+            <a:r>
+              <a:rPr sz="2100" b="0">
+                <a:solidFill>
+                  <a:srgbClr val="141B2D"/>
+                </a:solidFill>
+                <a:latin typeface="Helvetica Neue"/>
+              </a:rPr>
+              <a:t>Nothing downstream needs to be trusted, because nothing downstream has the original</a:t>
+            </a:r>
+          </a:p>
+          <a:p>
+            <a:pPr marL="342900" indent="-342900">
+              <a:spcAft>
+                <a:spcPts val="1400"/>
+              </a:spcAft>
+            </a:pPr>
+            <a:r>
+              <a:rPr sz="2100" b="1">
+                <a:solidFill>
+                  <a:srgbClr val="005EB8"/>
+                </a:solidFill>
+                <a:latin typeface="Helvetica Neue"/>
+              </a:rPr>
+              <a:t>-   </a:t>
+            </a:r>
+            <a:r>
+              <a:rPr sz="2100" b="0">
+                <a:solidFill>
+                  <a:srgbClr val="141B2D"/>
+                </a:solidFill>
+                <a:latin typeface="Helvetica Neue"/>
+              </a:rPr>
+              <a:t>You set epsilon in </a:t>
+            </a:r>
+            <a:r>
+              <a:rPr sz="1900" b="0">
+                <a:solidFill>
+                  <a:srgbClr val="141B2D"/>
+                </a:solidFill>
+                <a:latin typeface="Consolas"/>
+              </a:rPr>
+              <a:t>ubi.js</a:t>
+            </a:r>
+            <a:r>
+              <a:rPr sz="2100" b="0">
+                <a:solidFill>
+                  <a:srgbClr val="141B2D"/>
+                </a:solidFill>
+                <a:latin typeface="Helvetica Neue"/>
+              </a:rPr>
+              <a:t>, so anyone can read the value you shipped</a:t>
+            </a:r>
+          </a:p>
+        </p:txBody>
+      </p:sp>
+      <p:pic>
+        <p:nvPicPr>
+          <p:cNvPr id="5" name="Picture 4" descr="28_trust_boundary.png"/>
+          <p:cNvPicPr>
+            <a:picLocks noChangeAspect="1"/>
+          </p:cNvPicPr>
+          <p:nvPr/>
+        </p:nvPicPr>
+        <p:blipFill>
+          <a:blip r:embed="rId2"/>
+          <a:stretch>
+            <a:fillRect/>
+          </a:stretch>
+        </p:blipFill>
+        <p:spPr>
+          <a:xfrm>
+            <a:off x="6263640" y="2177248"/>
+            <a:ext cx="5029200" cy="3417902"/>
+          </a:xfrm>
+          <a:prstGeom prst="rect">
+            <a:avLst/>
+          </a:prstGeom>
+        </p:spPr>
+      </p:pic>
+      <p:sp>
+        <p:nvSpPr>
+          <p:cNvPr id="6" name="TextBox 5"/>
           <p:cNvSpPr txBox="1"/>
           <p:nvPr/>
         </p:nvSpPr>
         <p:spPr>
           <a:xfrm>
-            <a:off x="822960" y="2560320"/>
-            <a:ext cx="10515600" cy="1828800"/>
+            <a:off x="10405872" y="6144768"/>
+            <a:ext cx="960120" cy="411480"/>
           </a:xfrm>
           <a:prstGeom prst="rect">
             <a:avLst/>
@@ -10703,61 +10137,11 @@
           </a:bodyPr>
           <a:lstStyle/>
           <a:p>
-            <a:r>
-              <a:rPr sz="1800" b="1">
-                <a:solidFill>
-                  <a:srgbClr val="5A9BE8"/>
-                </a:solidFill>
-                <a:latin typeface="Helvetica Neue"/>
-              </a:rPr>
-              <a:t>ACT 6</a:t>
-            </a:r>
-          </a:p>
-          <a:p>
-            <a:pPr>
-              <a:spcBef>
-                <a:spcPts val="1000"/>
-              </a:spcBef>
-            </a:pPr>
-            <a:r>
-              <a:rPr sz="4200" b="1">
-                <a:solidFill>
-                  <a:srgbClr val="FFFFFF"/>
-                </a:solidFill>
-                <a:latin typeface="Helvetica Neue"/>
-              </a:rPr>
-              <a:t>Back to OpenSearch, and the limits</a:t>
-            </a:r>
-          </a:p>
-        </p:txBody>
-      </p:sp>
-      <p:sp>
-        <p:nvSpPr>
-          <p:cNvPr id="3" name="TextBox 2"/>
-          <p:cNvSpPr txBox="1"/>
-          <p:nvPr/>
-        </p:nvSpPr>
-        <p:spPr>
-          <a:xfrm>
-            <a:off x="10405872" y="6144768"/>
-            <a:ext cx="960120" cy="411480"/>
-          </a:xfrm>
-          <a:prstGeom prst="rect">
-            <a:avLst/>
-          </a:prstGeom>
-          <a:noFill/>
-        </p:spPr>
-        <p:txBody>
-          <a:bodyPr wrap="square">
-            <a:spAutoFit/>
-          </a:bodyPr>
-          <a:lstStyle/>
-          <a:p>
             <a:pPr algn="r"/>
             <a:r>
               <a:rPr sz="1300" b="0">
                 <a:solidFill>
-                  <a:srgbClr val="6E7C93"/>
+                  <a:srgbClr val="5A647A"/>
                 </a:solidFill>
                 <a:latin typeface="Helvetica Neue"/>
               </a:rPr>
@@ -10821,7 +10205,7 @@
                 </a:solidFill>
                 <a:latin typeface="Helvetica Neue"/>
               </a:rPr>
-              <a:t>Where the noise gets injected</a:t>
+              <a:t>What your dashboards can still compute</a:t>
             </a:r>
           </a:p>
         </p:txBody>
@@ -10913,7 +10297,7 @@
                 </a:solidFill>
                 <a:latin typeface="Helvetica Neue"/>
               </a:rPr>
-              <a:t>In ubi.js, on the device, before the event is sent</a:t>
+              <a:t>Aggregate query intent per segment</a:t>
             </a:r>
           </a:p>
           <a:p>
@@ -10938,7 +10322,7 @@
                 </a:solidFill>
                 <a:latin typeface="Helvetica Neue"/>
               </a:rPr>
-              <a:t>The cluster stores noised vectors and never sees the raw query</a:t>
+              <a:t>Demand trends and shifts over time</a:t>
             </a:r>
           </a:p>
           <a:p>
@@ -10963,7 +10347,7 @@
                 </a:solidFill>
                 <a:latin typeface="Helvetica Neue"/>
               </a:rPr>
-              <a:t>Aggregation happens at query time over the noised data</a:t>
+              <a:t>Cohort-level training signal for learning-to-rank</a:t>
             </a:r>
           </a:p>
           <a:p>
@@ -10988,7 +10372,7 @@
                 </a:solidFill>
                 <a:latin typeface="Helvetica Neue"/>
               </a:rPr>
-              <a:t>Nothing downstream needs to be trusted, because nothing downstream has the original</a:t>
+              <a:t>What they cannot do is show you one user's session</a:t>
             </a:r>
           </a:p>
         </p:txBody>
@@ -11083,7 +10467,7 @@
                 </a:solidFill>
                 <a:latin typeface="Helvetica Neue"/>
               </a:rPr>
-              <a:t>What your dashboards can still compute</a:t>
+              <a:t>The limitations</a:t>
             </a:r>
           </a:p>
         </p:txBody>
@@ -11103,7 +10487,7 @@
             <a:avLst/>
           </a:prstGeom>
           <a:solidFill>
-            <a:srgbClr val="005EB8"/>
+            <a:srgbClr val="B4311A"/>
           </a:solidFill>
           <a:ln>
             <a:noFill/>
@@ -11162,7 +10546,7 @@
             <a:r>
               <a:rPr sz="2400" b="1">
                 <a:solidFill>
-                  <a:srgbClr val="005EB8"/>
+                  <a:srgbClr val="B4311A"/>
                 </a:solidFill>
                 <a:latin typeface="Helvetica Neue"/>
               </a:rPr>
@@ -11175,7 +10559,7 @@
                 </a:solidFill>
                 <a:latin typeface="Helvetica Neue"/>
               </a:rPr>
-              <a:t>Aggregate query intent per segment</a:t>
+              <a:t>The category leaks. Harmless for furniture, maybe not for a medical corpus</a:t>
             </a:r>
           </a:p>
           <a:p>
@@ -11187,7 +10571,7 @@
             <a:r>
               <a:rPr sz="2400" b="1">
                 <a:solidFill>
-                  <a:srgbClr val="005EB8"/>
+                  <a:srgbClr val="B4311A"/>
                 </a:solidFill>
                 <a:latin typeface="Helvetica Neue"/>
               </a:rPr>
@@ -11200,7 +10584,7 @@
                 </a:solidFill>
                 <a:latin typeface="Helvetica Neue"/>
               </a:rPr>
-              <a:t>Demand trends and shifts over time</a:t>
+              <a:t>Epsilon does not transfer between indexes. It depends on coordinate spread</a:t>
             </a:r>
           </a:p>
           <a:p>
@@ -11212,7 +10596,7 @@
             <a:r>
               <a:rPr sz="2400" b="1">
                 <a:solidFill>
-                  <a:srgbClr val="005EB8"/>
+                  <a:srgbClr val="B4311A"/>
                 </a:solidFill>
                 <a:latin typeface="Helvetica Neue"/>
               </a:rPr>
@@ -11225,7 +10609,7 @@
                 </a:solidFill>
                 <a:latin typeface="Helvetica Neue"/>
               </a:rPr>
-              <a:t>Cohort-level training signal for learning-to-rank</a:t>
+              <a:t>Low-traffic segments stay unmeasurable</a:t>
             </a:r>
           </a:p>
           <a:p>
@@ -11237,7 +10621,7 @@
             <a:r>
               <a:rPr sz="2400" b="1">
                 <a:solidFill>
-                  <a:srgbClr val="005EB8"/>
+                  <a:srgbClr val="B4311A"/>
                 </a:solidFill>
                 <a:latin typeface="Helvetica Neue"/>
               </a:rPr>
@@ -11250,7 +10634,7 @@
                 </a:solidFill>
                 <a:latin typeface="Helvetica Neue"/>
               </a:rPr>
-              <a:t>What they cannot do is show you one user's session</a:t>
+              <a:t>Clicks are counts, not vectors, and want randomized response instead</a:t>
             </a:r>
           </a:p>
         </p:txBody>
@@ -11345,7 +10729,7 @@
                 </a:solidFill>
                 <a:latin typeface="Helvetica Neue"/>
               </a:rPr>
-              <a:t>ACT 1</a:t>
+              <a:t>PART 1</a:t>
             </a:r>
           </a:p>
           <a:p>
@@ -11456,7 +10840,7 @@
                 </a:solidFill>
                 <a:latin typeface="Helvetica Neue"/>
               </a:rPr>
-              <a:t>The limits, stated plainly</a:t>
+              <a:t>Takeaways</a:t>
             </a:r>
           </a:p>
         </p:txBody>
@@ -11476,7 +10860,7 @@
             <a:avLst/>
           </a:prstGeom>
           <a:solidFill>
-            <a:srgbClr val="B4311A"/>
+            <a:srgbClr val="005EB8"/>
           </a:solidFill>
           <a:ln>
             <a:noFill/>
@@ -11535,7 +10919,7 @@
             <a:r>
               <a:rPr sz="2400" b="1">
                 <a:solidFill>
-                  <a:srgbClr val="B4311A"/>
+                  <a:srgbClr val="005EB8"/>
                 </a:solidFill>
                 <a:latin typeface="Helvetica Neue"/>
               </a:rPr>
@@ -11548,7 +10932,7 @@
                 </a:solidFill>
                 <a:latin typeface="Helvetica Neue"/>
               </a:rPr>
-              <a:t>The category leaks. Harmless for furniture, maybe not for a medical corpus</a:t>
+              <a:t>Storing embeddings instead of text is not privacy</a:t>
             </a:r>
           </a:p>
           <a:p>
@@ -11560,7 +10944,7 @@
             <a:r>
               <a:rPr sz="2400" b="1">
                 <a:solidFill>
-                  <a:srgbClr val="B4311A"/>
+                  <a:srgbClr val="005EB8"/>
                 </a:solidFill>
                 <a:latin typeface="Helvetica Neue"/>
               </a:rPr>
@@ -11573,7 +10957,7 @@
                 </a:solidFill>
                 <a:latin typeface="Helvetica Neue"/>
               </a:rPr>
-              <a:t>Epsilon does not transfer between indexes. It depends on coordinate spread</a:t>
+              <a:t>Noise at the source beats scrubbing after the fact</a:t>
             </a:r>
           </a:p>
           <a:p>
@@ -11585,7 +10969,7 @@
             <a:r>
               <a:rPr sz="2400" b="1">
                 <a:solidFill>
-                  <a:srgbClr val="B4311A"/>
+                  <a:srgbClr val="005EB8"/>
                 </a:solidFill>
                 <a:latin typeface="Helvetica Neue"/>
               </a:rPr>
@@ -11598,7 +10982,7 @@
                 </a:solidFill>
                 <a:latin typeface="Helvetica Neue"/>
               </a:rPr>
-              <a:t>Low-traffic segments stay unmeasurable</a:t>
+              <a:t>Verify the mechanism by attacking it, not by trusting it</a:t>
             </a:r>
           </a:p>
           <a:p>
@@ -11610,7 +10994,7 @@
             <a:r>
               <a:rPr sz="2400" b="1">
                 <a:solidFill>
-                  <a:srgbClr val="B4311A"/>
+                  <a:srgbClr val="005EB8"/>
                 </a:solidFill>
                 <a:latin typeface="Helvetica Neue"/>
               </a:rPr>
@@ -11619,11 +11003,11 @@
             <a:r>
               <a:rPr sz="2400" b="0">
                 <a:solidFill>
-                  <a:srgbClr val="141B2D"/>
-                </a:solidFill>
-                <a:latin typeface="Helvetica Neue"/>
-              </a:rPr>
-              <a:t>Clicks are counts, not vectors, and want randomized response instead</a:t>
+                  <a:srgbClr val="005EB8"/>
+                </a:solidFill>
+                <a:latin typeface="Helvetica Neue"/>
+              </a:rPr>
+              <a:t>You trade individual resolution for population accuracy, and relevance only needs the latter</a:t>
             </a:r>
           </a:p>
         </p:txBody>
@@ -11672,268 +11056,6 @@
 </file>
 
 <file path=ppt/slides/slide31.xml><?xml version="1.0" encoding="utf-8"?>
-<p:sld xmlns:a="http://schemas.openxmlformats.org/drawingml/2006/main" xmlns:p="http://schemas.openxmlformats.org/presentationml/2006/main" xmlns:r="http://schemas.openxmlformats.org/officeDocument/2006/relationships">
-  <p:cSld>
-    <p:bg>
-      <p:bgPr>
-        <a:solidFill>
-          <a:srgbClr val="FFFFFF"/>
-        </a:solidFill>
-        <a:effectLst/>
-      </p:bgPr>
-    </p:bg>
-    <p:spTree>
-      <p:nvGrpSpPr>
-        <p:cNvPr id="1" name=""/>
-        <p:cNvGrpSpPr/>
-        <p:nvPr/>
-      </p:nvGrpSpPr>
-      <p:grpSpPr/>
-      <p:sp>
-        <p:nvSpPr>
-          <p:cNvPr id="2" name="TextBox 1"/>
-          <p:cNvSpPr txBox="1"/>
-          <p:nvPr/>
-        </p:nvSpPr>
-        <p:spPr>
-          <a:xfrm>
-            <a:off x="822960" y="640080"/>
-            <a:ext cx="10515600" cy="960120"/>
-          </a:xfrm>
-          <a:prstGeom prst="rect">
-            <a:avLst/>
-          </a:prstGeom>
-          <a:noFill/>
-        </p:spPr>
-        <p:txBody>
-          <a:bodyPr wrap="square">
-            <a:spAutoFit/>
-          </a:bodyPr>
-          <a:lstStyle/>
-          <a:p>
-            <a:r>
-              <a:rPr sz="3400" b="1">
-                <a:solidFill>
-                  <a:srgbClr val="141B2D"/>
-                </a:solidFill>
-                <a:latin typeface="Helvetica Neue"/>
-              </a:rPr>
-              <a:t>Takeaways</a:t>
-            </a:r>
-          </a:p>
-        </p:txBody>
-      </p:sp>
-      <p:sp>
-        <p:nvSpPr>
-          <p:cNvPr id="3" name="Rectangle 2"/>
-          <p:cNvSpPr/>
-          <p:nvPr/>
-        </p:nvSpPr>
-        <p:spPr>
-          <a:xfrm>
-            <a:off x="822960" y="1276603"/>
-            <a:ext cx="1463040" cy="50800"/>
-          </a:xfrm>
-          <a:prstGeom prst="rect">
-            <a:avLst/>
-          </a:prstGeom>
-          <a:solidFill>
-            <a:srgbClr val="005EB8"/>
-          </a:solidFill>
-          <a:ln>
-            <a:noFill/>
-          </a:ln>
-          <a:effectLst/>
-        </p:spPr>
-        <p:style>
-          <a:lnRef idx="1">
-            <a:schemeClr val="accent1"/>
-          </a:lnRef>
-          <a:fillRef idx="3">
-            <a:schemeClr val="accent1"/>
-          </a:fillRef>
-          <a:effectRef idx="2">
-            <a:schemeClr val="accent1"/>
-          </a:effectRef>
-          <a:fontRef idx="minor">
-            <a:schemeClr val="lt1"/>
-          </a:fontRef>
-        </p:style>
-        <p:txBody>
-          <a:bodyPr rtlCol="0" anchor="ctr"/>
-          <a:lstStyle/>
-          <a:p>
-            <a:pPr algn="ctr"/>
-          </a:p>
-        </p:txBody>
-      </p:sp>
-      <p:sp>
-        <p:nvSpPr>
-          <p:cNvPr id="4" name="TextBox 3"/>
-          <p:cNvSpPr txBox="1"/>
-          <p:nvPr/>
-        </p:nvSpPr>
-        <p:spPr>
-          <a:xfrm>
-            <a:off x="822960" y="2057400"/>
-            <a:ext cx="10515600" cy="4023360"/>
-          </a:xfrm>
-          <a:prstGeom prst="rect">
-            <a:avLst/>
-          </a:prstGeom>
-          <a:noFill/>
-        </p:spPr>
-        <p:txBody>
-          <a:bodyPr wrap="square">
-            <a:spAutoFit/>
-          </a:bodyPr>
-          <a:lstStyle/>
-          <a:p>
-            <a:pPr marL="342900" indent="-342900">
-              <a:spcAft>
-                <a:spcPts val="2000"/>
-              </a:spcAft>
-            </a:pPr>
-            <a:r>
-              <a:rPr sz="2400" b="1">
-                <a:solidFill>
-                  <a:srgbClr val="005EB8"/>
-                </a:solidFill>
-                <a:latin typeface="Helvetica Neue"/>
-              </a:rPr>
-              <a:t>-   </a:t>
-            </a:r>
-            <a:r>
-              <a:rPr sz="2400" b="0">
-                <a:solidFill>
-                  <a:srgbClr val="141B2D"/>
-                </a:solidFill>
-                <a:latin typeface="Helvetica Neue"/>
-              </a:rPr>
-              <a:t>Storing embeddings instead of text is not privacy</a:t>
-            </a:r>
-          </a:p>
-          <a:p>
-            <a:pPr marL="342900" indent="-342900">
-              <a:spcAft>
-                <a:spcPts val="2000"/>
-              </a:spcAft>
-            </a:pPr>
-            <a:r>
-              <a:rPr sz="2400" b="1">
-                <a:solidFill>
-                  <a:srgbClr val="005EB8"/>
-                </a:solidFill>
-                <a:latin typeface="Helvetica Neue"/>
-              </a:rPr>
-              <a:t>-   </a:t>
-            </a:r>
-            <a:r>
-              <a:rPr sz="2400" b="0">
-                <a:solidFill>
-                  <a:srgbClr val="141B2D"/>
-                </a:solidFill>
-                <a:latin typeface="Helvetica Neue"/>
-              </a:rPr>
-              <a:t>Noise at the source beats scrubbing after the fact</a:t>
-            </a:r>
-          </a:p>
-          <a:p>
-            <a:pPr marL="342900" indent="-342900">
-              <a:spcAft>
-                <a:spcPts val="2000"/>
-              </a:spcAft>
-            </a:pPr>
-            <a:r>
-              <a:rPr sz="2400" b="1">
-                <a:solidFill>
-                  <a:srgbClr val="005EB8"/>
-                </a:solidFill>
-                <a:latin typeface="Helvetica Neue"/>
-              </a:rPr>
-              <a:t>-   </a:t>
-            </a:r>
-            <a:r>
-              <a:rPr sz="2400" b="0">
-                <a:solidFill>
-                  <a:srgbClr val="141B2D"/>
-                </a:solidFill>
-                <a:latin typeface="Helvetica Neue"/>
-              </a:rPr>
-              <a:t>Verify the mechanism by attacking it, not by trusting it</a:t>
-            </a:r>
-          </a:p>
-          <a:p>
-            <a:pPr marL="342900" indent="-342900">
-              <a:spcAft>
-                <a:spcPts val="2000"/>
-              </a:spcAft>
-            </a:pPr>
-            <a:r>
-              <a:rPr sz="2400" b="1">
-                <a:solidFill>
-                  <a:srgbClr val="005EB8"/>
-                </a:solidFill>
-                <a:latin typeface="Helvetica Neue"/>
-              </a:rPr>
-              <a:t>-   </a:t>
-            </a:r>
-            <a:r>
-              <a:rPr sz="2400" b="0">
-                <a:solidFill>
-                  <a:srgbClr val="141B2D"/>
-                </a:solidFill>
-                <a:latin typeface="Helvetica Neue"/>
-              </a:rPr>
-              <a:t>You trade individual resolution for population accuracy, and relevance only needs the latter</a:t>
-            </a:r>
-          </a:p>
-        </p:txBody>
-      </p:sp>
-      <p:sp>
-        <p:nvSpPr>
-          <p:cNvPr id="5" name="TextBox 4"/>
-          <p:cNvSpPr txBox="1"/>
-          <p:nvPr/>
-        </p:nvSpPr>
-        <p:spPr>
-          <a:xfrm>
-            <a:off x="10405872" y="6144768"/>
-            <a:ext cx="960120" cy="411480"/>
-          </a:xfrm>
-          <a:prstGeom prst="rect">
-            <a:avLst/>
-          </a:prstGeom>
-          <a:noFill/>
-        </p:spPr>
-        <p:txBody>
-          <a:bodyPr wrap="square">
-            <a:spAutoFit/>
-          </a:bodyPr>
-          <a:lstStyle/>
-          <a:p>
-            <a:pPr algn="r"/>
-            <a:r>
-              <a:rPr sz="1300" b="0">
-                <a:solidFill>
-                  <a:srgbClr val="5A647A"/>
-                </a:solidFill>
-                <a:latin typeface="Helvetica Neue"/>
-              </a:rPr>
-              <a:t>31</a:t>
-            </a:r>
-          </a:p>
-        </p:txBody>
-      </p:sp>
-    </p:spTree>
-  </p:cSld>
-  <p:clrMapOvr>
-    <a:masterClrMapping/>
-  </p:clrMapOvr>
-</p:sld>
-</file>
-
-<file path=ppt/slides/slide32.xml><?xml version="1.0" encoding="utf-8"?>
 <p:sld xmlns:a="http://schemas.openxmlformats.org/drawingml/2006/main" xmlns:p="http://schemas.openxmlformats.org/presentationml/2006/main" xmlns:r="http://schemas.openxmlformats.org/officeDocument/2006/relationships">
   <p:cSld>
     <p:bg>
@@ -12046,7 +11168,7 @@
                 </a:solidFill>
                 <a:latin typeface="Helvetica Neue"/>
               </a:rPr>
-              <a:t>OpenSearchCon, San Jose</a:t>
+              <a:t>OpenSearchCon NA</a:t>
             </a:r>
           </a:p>
           <a:p>
@@ -12097,7 +11219,7 @@
                 </a:solidFill>
                 <a:latin typeface="Helvetica Neue"/>
               </a:rPr>
-              <a:t>32</a:t>
+              <a:t>31</a:t>
             </a:r>
           </a:p>
         </p:txBody>
@@ -12215,7 +11337,7 @@
         <p:spPr>
           <a:xfrm>
             <a:off x="822960" y="2057400"/>
-            <a:ext cx="10515600" cy="4023360"/>
+            <a:ext cx="5120640" cy="4023360"/>
           </a:xfrm>
           <a:prstGeom prst="rect">
             <a:avLst/>
@@ -12230,11 +11352,11 @@
           <a:p>
             <a:pPr marL="342900" indent="-342900">
               <a:spcAft>
-                <a:spcPts val="2000"/>
+                <a:spcPts val="1400"/>
               </a:spcAft>
             </a:pPr>
             <a:r>
-              <a:rPr sz="2400" b="1">
+              <a:rPr sz="2100" b="1">
                 <a:solidFill>
                   <a:srgbClr val="005EB8"/>
                 </a:solidFill>
@@ -12243,7 +11365,7 @@
               <a:t>-   </a:t>
             </a:r>
             <a:r>
-              <a:rPr sz="2400" b="0">
+              <a:rPr sz="2100" b="0">
                 <a:solidFill>
                   <a:srgbClr val="141B2D"/>
                 </a:solidFill>
@@ -12255,11 +11377,11 @@
           <a:p>
             <a:pPr marL="342900" indent="-342900">
               <a:spcAft>
-                <a:spcPts val="2000"/>
+                <a:spcPts val="1400"/>
               </a:spcAft>
             </a:pPr>
             <a:r>
-              <a:rPr sz="2400" b="1">
+              <a:rPr sz="2100" b="1">
                 <a:solidFill>
                   <a:srgbClr val="005EB8"/>
                 </a:solidFill>
@@ -12268,7 +11390,7 @@
               <a:t>-   </a:t>
             </a:r>
             <a:r>
-              <a:rPr sz="2400" b="0">
+              <a:rPr sz="2100" b="0">
                 <a:solidFill>
                   <a:srgbClr val="141B2D"/>
                 </a:solidFill>
@@ -12280,11 +11402,11 @@
           <a:p>
             <a:pPr marL="342900" indent="-342900">
               <a:spcAft>
-                <a:spcPts val="2000"/>
+                <a:spcPts val="1400"/>
               </a:spcAft>
             </a:pPr>
             <a:r>
-              <a:rPr sz="2400" b="1">
+              <a:rPr sz="2100" b="1">
                 <a:solidFill>
                   <a:srgbClr val="005EB8"/>
                 </a:solidFill>
@@ -12293,7 +11415,7 @@
               <a:t>-   </a:t>
             </a:r>
             <a:r>
-              <a:rPr sz="2400" b="0">
+              <a:rPr sz="2100" b="0">
                 <a:solidFill>
                   <a:srgbClr val="141B2D"/>
                 </a:solidFill>
@@ -12305,11 +11427,11 @@
           <a:p>
             <a:pPr marL="342900" indent="-342900">
               <a:spcAft>
-                <a:spcPts val="2000"/>
+                <a:spcPts val="1400"/>
               </a:spcAft>
             </a:pPr>
             <a:r>
-              <a:rPr sz="2400" b="1">
+              <a:rPr sz="2100" b="1">
                 <a:solidFill>
                   <a:srgbClr val="005EB8"/>
                 </a:solidFill>
@@ -12318,7 +11440,7 @@
               <a:t>-   </a:t>
             </a:r>
             <a:r>
-              <a:rPr sz="2400" b="0">
+              <a:rPr sz="2100" b="0">
                 <a:solidFill>
                   <a:srgbClr val="141B2D"/>
                 </a:solidFill>
@@ -12329,9 +11451,33 @@
           </a:p>
         </p:txBody>
       </p:sp>
-      <p:sp>
-        <p:nvSpPr>
-          <p:cNvPr id="5" name="TextBox 4"/>
+      <p:pic>
+        <p:nvPicPr>
+          <p:cNvPr id="5" name="Picture 4" descr="04_relevance_loop.png"/>
+          <p:cNvPicPr>
+            <a:picLocks noChangeAspect="1"/>
+          </p:cNvPicPr>
+          <p:nvPr/>
+        </p:nvPicPr>
+        <p:blipFill>
+          <a:blip r:embed="rId2"/>
+          <a:stretch>
+            <a:fillRect/>
+          </a:stretch>
+        </p:blipFill>
+        <p:spPr>
+          <a:xfrm>
+            <a:off x="6293825" y="1874519"/>
+            <a:ext cx="4968829" cy="4023360"/>
+          </a:xfrm>
+          <a:prstGeom prst="rect">
+            <a:avLst/>
+          </a:prstGeom>
+        </p:spPr>
+      </p:pic>
+      <p:sp>
+        <p:nvSpPr>
+          <p:cNvPr id="6" name="TextBox 5"/>
           <p:cNvSpPr txBox="1"/>
           <p:nvPr/>
         </p:nvSpPr>
@@ -12477,7 +11623,7 @@
         <p:spPr>
           <a:xfrm>
             <a:off x="822960" y="2057400"/>
-            <a:ext cx="10515600" cy="4023360"/>
+            <a:ext cx="5120640" cy="4023360"/>
           </a:xfrm>
           <a:prstGeom prst="rect">
             <a:avLst/>
@@ -12492,11 +11638,11 @@
           <a:p>
             <a:pPr marL="342900" indent="-342900">
               <a:spcAft>
-                <a:spcPts val="2000"/>
+                <a:spcPts val="1400"/>
               </a:spcAft>
             </a:pPr>
             <a:r>
-              <a:rPr sz="2400" b="1">
+              <a:rPr sz="2100" b="1">
                 <a:solidFill>
                   <a:srgbClr val="005EB8"/>
                 </a:solidFill>
@@ -12505,23 +11651,41 @@
               <a:t>-   </a:t>
             </a:r>
             <a:r>
-              <a:rPr sz="2400" b="0">
+              <a:rPr sz="1900" b="0">
                 <a:solidFill>
                   <a:srgbClr val="141B2D"/>
                 </a:solidFill>
-                <a:latin typeface="Helvetica Neue"/>
-              </a:rPr>
-              <a:t>ubi_queries:  user_query, query_id, client_id, timestamp</a:t>
+                <a:latin typeface="Consolas"/>
+              </a:rPr>
+              <a:t>ubi_queries</a:t>
+            </a:r>
+            <a:r>
+              <a:rPr sz="2100" b="0">
+                <a:solidFill>
+                  <a:srgbClr val="141B2D"/>
+                </a:solidFill>
+                <a:latin typeface="Helvetica Neue"/>
+              </a:rPr>
+              <a:t>:  </a:t>
+            </a:r>
+            <a:r>
+              <a:rPr sz="1900" b="0">
+                <a:solidFill>
+                  <a:srgbClr val="141B2D"/>
+                </a:solidFill>
+                <a:latin typeface="Consolas"/>
+              </a:rPr>
+              <a:t>user_query, query_id, client_id, timestamp</a:t>
             </a:r>
           </a:p>
           <a:p>
             <a:pPr marL="342900" indent="-342900">
               <a:spcAft>
-                <a:spcPts val="2000"/>
+                <a:spcPts val="1400"/>
               </a:spcAft>
             </a:pPr>
             <a:r>
-              <a:rPr sz="2400" b="1">
+              <a:rPr sz="2100" b="1">
                 <a:solidFill>
                   <a:srgbClr val="005EB8"/>
                 </a:solidFill>
@@ -12530,23 +11694,41 @@
               <a:t>-   </a:t>
             </a:r>
             <a:r>
-              <a:rPr sz="2400" b="0">
+              <a:rPr sz="1900" b="0">
                 <a:solidFill>
                   <a:srgbClr val="141B2D"/>
                 </a:solidFill>
-                <a:latin typeface="Helvetica Neue"/>
-              </a:rPr>
-              <a:t>ubi_events:  action_name, object_id, position, session_id, page_id</a:t>
+                <a:latin typeface="Consolas"/>
+              </a:rPr>
+              <a:t>ubi_events</a:t>
+            </a:r>
+            <a:r>
+              <a:rPr sz="2100" b="0">
+                <a:solidFill>
+                  <a:srgbClr val="141B2D"/>
+                </a:solidFill>
+                <a:latin typeface="Helvetica Neue"/>
+              </a:rPr>
+              <a:t>:  </a:t>
+            </a:r>
+            <a:r>
+              <a:rPr sz="1900" b="0">
+                <a:solidFill>
+                  <a:srgbClr val="141B2D"/>
+                </a:solidFill>
+                <a:latin typeface="Consolas"/>
+              </a:rPr>
+              <a:t>action_name, object_id, position, session_id, page_id</a:t>
             </a:r>
           </a:p>
           <a:p>
             <a:pPr marL="342900" indent="-342900">
               <a:spcAft>
-                <a:spcPts val="2000"/>
+                <a:spcPts val="1400"/>
               </a:spcAft>
             </a:pPr>
             <a:r>
-              <a:rPr sz="2400" b="1">
+              <a:rPr sz="2100" b="1">
                 <a:solidFill>
                   <a:srgbClr val="005EB8"/>
                 </a:solidFill>
@@ -12555,23 +11737,32 @@
               <a:t>-   </a:t>
             </a:r>
             <a:r>
-              <a:rPr sz="2400" b="0">
+              <a:rPr sz="1900" b="0">
                 <a:solidFill>
                   <a:srgbClr val="141B2D"/>
                 </a:solidFill>
-                <a:latin typeface="Helvetica Neue"/>
-              </a:rPr>
-              <a:t>ubi.js collects interactions in the browser and ships them to the cluster</a:t>
+                <a:latin typeface="Consolas"/>
+              </a:rPr>
+              <a:t>ubi.js</a:t>
+            </a:r>
+            <a:r>
+              <a:rPr sz="2100" b="0">
+                <a:solidFill>
+                  <a:srgbClr val="141B2D"/>
+                </a:solidFill>
+                <a:latin typeface="Helvetica Neue"/>
+              </a:rPr>
+              <a:t> collects interactions in the browser and ships them to the cluster</a:t>
             </a:r>
           </a:p>
           <a:p>
             <a:pPr marL="342900" indent="-342900">
               <a:spcAft>
-                <a:spcPts val="2000"/>
+                <a:spcPts val="1400"/>
               </a:spcAft>
             </a:pPr>
             <a:r>
-              <a:rPr sz="2400" b="1">
+              <a:rPr sz="2100" b="1">
                 <a:solidFill>
                   <a:srgbClr val="005EB8"/>
                 </a:solidFill>
@@ -12580,7 +11771,7 @@
               <a:t>-   </a:t>
             </a:r>
             <a:r>
-              <a:rPr sz="2400" b="0">
+              <a:rPr sz="2100" b="0">
                 <a:solidFill>
                   <a:srgbClr val="141B2D"/>
                 </a:solidFill>
@@ -12589,11 +11780,61 @@
               <a:t>This is the raw material relevance tuning runs on</a:t>
             </a:r>
           </a:p>
-        </p:txBody>
-      </p:sp>
-      <p:sp>
-        <p:nvSpPr>
-          <p:cNvPr id="5" name="TextBox 4"/>
+          <a:p>
+            <a:pPr>
+              <a:spcBef>
+                <a:spcPts val="800"/>
+              </a:spcBef>
+            </a:pPr>
+            <a:r>
+              <a:rPr sz="1700" b="0">
+                <a:solidFill>
+                  <a:srgbClr val="5A647A"/>
+                </a:solidFill>
+                <a:latin typeface="Helvetica Neue"/>
+              </a:rPr>
+              <a:t>For examples and code, go to </a:t>
+            </a:r>
+            <a:r>
+              <a:rPr sz="1700" b="0" u="sng">
+                <a:solidFill>
+                  <a:srgbClr val="005EB8"/>
+                </a:solidFill>
+                <a:latin typeface="Helvetica Neue"/>
+                <a:hlinkClick r:id="rId2"/>
+              </a:rPr>
+              <a:t>ubisearch.dev</a:t>
+            </a:r>
+          </a:p>
+        </p:txBody>
+      </p:sp>
+      <p:pic>
+        <p:nvPicPr>
+          <p:cNvPr id="5" name="Picture 4" descr="05_ubi_pipeline.png"/>
+          <p:cNvPicPr>
+            <a:picLocks noChangeAspect="1"/>
+          </p:cNvPicPr>
+          <p:nvPr/>
+        </p:nvPicPr>
+        <p:blipFill>
+          <a:blip r:embed="rId3"/>
+          <a:stretch>
+            <a:fillRect/>
+          </a:stretch>
+        </p:blipFill>
+        <p:spPr>
+          <a:xfrm>
+            <a:off x="6263640" y="1886319"/>
+            <a:ext cx="5029200" cy="3999760"/>
+          </a:xfrm>
+          <a:prstGeom prst="rect">
+            <a:avLst/>
+          </a:prstGeom>
+        </p:spPr>
+      </p:pic>
+      <p:sp>
+        <p:nvSpPr>
+          <p:cNvPr id="6" name="TextBox 5"/>
           <p:cNvSpPr txBox="1"/>
           <p:nvPr/>
         </p:nvSpPr>
@@ -12767,13 +12008,22 @@
               <a:t>-   </a:t>
             </a:r>
             <a:r>
+              <a:rPr sz="2200" b="0">
+                <a:solidFill>
+                  <a:srgbClr val="141B2D"/>
+                </a:solidFill>
+                <a:latin typeface="Consolas"/>
+              </a:rPr>
+              <a:t>user_query</a:t>
+            </a:r>
+            <a:r>
               <a:rPr sz="2400" b="0">
                 <a:solidFill>
                   <a:srgbClr val="141B2D"/>
                 </a:solidFill>
                 <a:latin typeface="Helvetica Neue"/>
               </a:rPr>
-              <a:t>user_query is free text a person typed. It can contain anything</a:t>
+              <a:t> is free text a person typed. It can contain anything</a:t>
             </a:r>
           </a:p>
           <a:p>
@@ -12792,13 +12042,40 @@
               <a:t>-   </a:t>
             </a:r>
             <a:r>
+              <a:rPr sz="2200" b="0">
+                <a:solidFill>
+                  <a:srgbClr val="141B2D"/>
+                </a:solidFill>
+                <a:latin typeface="Consolas"/>
+              </a:rPr>
+              <a:t>client_id</a:t>
+            </a:r>
+            <a:r>
               <a:rPr sz="2400" b="0">
                 <a:solidFill>
                   <a:srgbClr val="141B2D"/>
                 </a:solidFill>
                 <a:latin typeface="Helvetica Neue"/>
               </a:rPr>
-              <a:t>client_id and session_id make it linkable across time</a:t>
+              <a:t> and </a:t>
+            </a:r>
+            <a:r>
+              <a:rPr sz="2200" b="0">
+                <a:solidFill>
+                  <a:srgbClr val="141B2D"/>
+                </a:solidFill>
+                <a:latin typeface="Consolas"/>
+              </a:rPr>
+              <a:t>session_id</a:t>
+            </a:r>
+            <a:r>
+              <a:rPr sz="2400" b="0">
+                <a:solidFill>
+                  <a:srgbClr val="141B2D"/>
+                </a:solidFill>
+                <a:latin typeface="Helvetica Neue"/>
+              </a:rPr>
+              <a:t> make it linkable across time</a:t>
             </a:r>
           </a:p>
           <a:p>
@@ -13001,7 +12278,7 @@
         <p:spPr>
           <a:xfrm>
             <a:off x="822960" y="2057400"/>
-            <a:ext cx="10515600" cy="4023360"/>
+            <a:ext cx="5120640" cy="4023360"/>
           </a:xfrm>
           <a:prstGeom prst="rect">
             <a:avLst/>
@@ -13016,11 +12293,11 @@
           <a:p>
             <a:pPr marL="342900" indent="-342900">
               <a:spcAft>
-                <a:spcPts val="2000"/>
+                <a:spcPts val="1400"/>
               </a:spcAft>
             </a:pPr>
             <a:r>
-              <a:rPr sz="2400" b="1">
+              <a:rPr sz="2100" b="1">
                 <a:solidFill>
                   <a:srgbClr val="005EB8"/>
                 </a:solidFill>
@@ -13029,7 +12306,7 @@
               <a:t>-   </a:t>
             </a:r>
             <a:r>
-              <a:rPr sz="2400" b="0">
+              <a:rPr sz="2100" b="0">
                 <a:solidFill>
                   <a:srgbClr val="141B2D"/>
                 </a:solidFill>
@@ -13041,11 +12318,11 @@
           <a:p>
             <a:pPr marL="342900" indent="-342900">
               <a:spcAft>
-                <a:spcPts val="2000"/>
+                <a:spcPts val="1400"/>
               </a:spcAft>
             </a:pPr>
             <a:r>
-              <a:rPr sz="2400" b="1">
+              <a:rPr sz="2100" b="1">
                 <a:solidFill>
                   <a:srgbClr val="005EB8"/>
                 </a:solidFill>
@@ -13054,7 +12331,7 @@
               <a:t>-   </a:t>
             </a:r>
             <a:r>
-              <a:rPr sz="2400" b="0">
+              <a:rPr sz="2100" b="0">
                 <a:solidFill>
                   <a:srgbClr val="141B2D"/>
                 </a:solidFill>
@@ -13066,11 +12343,11 @@
           <a:p>
             <a:pPr marL="342900" indent="-342900">
               <a:spcAft>
-                <a:spcPts val="2000"/>
+                <a:spcPts val="1400"/>
               </a:spcAft>
             </a:pPr>
             <a:r>
-              <a:rPr sz="2400" b="1">
+              <a:rPr sz="2100" b="1">
                 <a:solidFill>
                   <a:srgbClr val="005EB8"/>
                 </a:solidFill>
@@ -13079,7 +12356,7 @@
               <a:t>-   </a:t>
             </a:r>
             <a:r>
-              <a:rPr sz="2400" b="0">
+              <a:rPr sz="2100" b="0">
                 <a:solidFill>
                   <a:srgbClr val="141B2D"/>
                 </a:solidFill>
@@ -13091,11 +12368,11 @@
           <a:p>
             <a:pPr marL="342900" indent="-342900">
               <a:spcAft>
-                <a:spcPts val="2000"/>
+                <a:spcPts val="1400"/>
               </a:spcAft>
             </a:pPr>
             <a:r>
-              <a:rPr sz="2400" b="1">
+              <a:rPr sz="2100" b="1">
                 <a:solidFill>
                   <a:srgbClr val="005EB8"/>
                 </a:solidFill>
@@ -13104,7 +12381,7 @@
               <a:t>-   </a:t>
             </a:r>
             <a:r>
-              <a:rPr sz="2400" b="0">
+              <a:rPr sz="2100" b="0">
                 <a:solidFill>
                   <a:srgbClr val="141B2D"/>
                 </a:solidFill>
@@ -13115,9 +12392,77 @@
           </a:p>
         </p:txBody>
       </p:sp>
-      <p:sp>
-        <p:nvSpPr>
-          <p:cNvPr id="5" name="TextBox 4"/>
+      <p:pic>
+        <p:nvPicPr>
+          <p:cNvPr id="5" name="Picture 4" descr="07_ordering.png"/>
+          <p:cNvPicPr>
+            <a:picLocks noChangeAspect="1"/>
+          </p:cNvPicPr>
+          <p:nvPr/>
+        </p:nvPicPr>
+        <p:blipFill>
+          <a:blip r:embed="rId2"/>
+          <a:stretch>
+            <a:fillRect/>
+          </a:stretch>
+        </p:blipFill>
+        <p:spPr>
+          <a:xfrm>
+            <a:off x="6276795" y="1874519"/>
+            <a:ext cx="5002890" cy="4023360"/>
+          </a:xfrm>
+          <a:prstGeom prst="rect">
+            <a:avLst/>
+          </a:prstGeom>
+        </p:spPr>
+      </p:pic>
+      <p:sp>
+        <p:nvSpPr>
+          <p:cNvPr id="6" name="TextBox 5"/>
+          <p:cNvSpPr txBox="1"/>
+          <p:nvPr/>
+        </p:nvSpPr>
+        <p:spPr>
+          <a:xfrm>
+            <a:off x="822960" y="5989320"/>
+            <a:ext cx="8961120" cy="502920"/>
+          </a:xfrm>
+          <a:prstGeom prst="rect">
+            <a:avLst/>
+          </a:prstGeom>
+          <a:noFill/>
+        </p:spPr>
+        <p:txBody>
+          <a:bodyPr wrap="square">
+            <a:spAutoFit/>
+          </a:bodyPr>
+          <a:lstStyle/>
+          <a:p>
+            <a:r>
+              <a:rPr sz="1400" b="0">
+                <a:solidFill>
+                  <a:srgbClr val="5A647A"/>
+                </a:solidFill>
+                <a:latin typeface="Helvetica Neue"/>
+              </a:rPr>
+              <a:t>Still need to redact data at rest? </a:t>
+            </a:r>
+            <a:r>
+              <a:rPr sz="1400" b="0" u="sng">
+                <a:solidFill>
+                  <a:srgbClr val="005EB8"/>
+                </a:solidFill>
+                <a:latin typeface="Helvetica Neue"/>
+                <a:hlinkClick r:id="rId3"/>
+              </a:rPr>
+              <a:t>philterd.ai</a:t>
+            </a:r>
+          </a:p>
+        </p:txBody>
+      </p:sp>
+      <p:sp>
+        <p:nvSpPr>
+          <p:cNvPr id="7" name="TextBox 6"/>
           <p:cNvSpPr txBox="1"/>
           <p:nvPr/>
         </p:nvSpPr>
@@ -13205,7 +12550,7 @@
                 </a:solidFill>
                 <a:latin typeface="Helvetica Neue"/>
               </a:rPr>
-              <a:t>ACT 2</a:t>
+              <a:t>PART 2</a:t>
             </a:r>
           </a:p>
           <a:p>
@@ -13374,7 +12719,7 @@
         <p:spPr>
           <a:xfrm>
             <a:off x="822960" y="2057400"/>
-            <a:ext cx="10515600" cy="4023360"/>
+            <a:ext cx="5120640" cy="4023360"/>
           </a:xfrm>
           <a:prstGeom prst="rect">
             <a:avLst/>
@@ -13389,11 +12734,11 @@
           <a:p>
             <a:pPr marL="342900" indent="-342900">
               <a:spcAft>
-                <a:spcPts val="2000"/>
+                <a:spcPts val="1400"/>
               </a:spcAft>
             </a:pPr>
             <a:r>
-              <a:rPr sz="2400" b="1">
+              <a:rPr sz="2100" b="1">
                 <a:solidFill>
                   <a:srgbClr val="005EB8"/>
                 </a:solidFill>
@@ -13402,7 +12747,7 @@
               <a:t>-   </a:t>
             </a:r>
             <a:r>
-              <a:rPr sz="2400" b="0">
+              <a:rPr sz="2100" b="0">
                 <a:solidFill>
                   <a:srgbClr val="141B2D"/>
                 </a:solidFill>
@@ -13414,11 +12759,11 @@
           <a:p>
             <a:pPr marL="342900" indent="-342900">
               <a:spcAft>
-                <a:spcPts val="2000"/>
+                <a:spcPts val="1400"/>
               </a:spcAft>
             </a:pPr>
             <a:r>
-              <a:rPr sz="2400" b="1">
+              <a:rPr sz="2100" b="1">
                 <a:solidFill>
                   <a:srgbClr val="005EB8"/>
                 </a:solidFill>
@@ -13427,7 +12772,7 @@
               <a:t>-   </a:t>
             </a:r>
             <a:r>
-              <a:rPr sz="2400" b="0">
+              <a:rPr sz="2100" b="0">
                 <a:solidFill>
                   <a:srgbClr val="141B2D"/>
                 </a:solidFill>
@@ -13439,11 +12784,11 @@
           <a:p>
             <a:pPr marL="342900" indent="-342900">
               <a:spcAft>
-                <a:spcPts val="2000"/>
+                <a:spcPts val="1400"/>
               </a:spcAft>
             </a:pPr>
             <a:r>
-              <a:rPr sz="2400" b="1">
+              <a:rPr sz="2100" b="1">
                 <a:solidFill>
                   <a:srgbClr val="005EB8"/>
                 </a:solidFill>
@@ -13452,7 +12797,7 @@
               <a:t>-   </a:t>
             </a:r>
             <a:r>
-              <a:rPr sz="2400" b="0">
+              <a:rPr sz="2100" b="0">
                 <a:solidFill>
                   <a:srgbClr val="141B2D"/>
                 </a:solidFill>
@@ -13464,11 +12809,11 @@
           <a:p>
             <a:pPr marL="342900" indent="-342900">
               <a:spcAft>
-                <a:spcPts val="2000"/>
+                <a:spcPts val="1400"/>
               </a:spcAft>
             </a:pPr>
             <a:r>
-              <a:rPr sz="2400" b="1">
+              <a:rPr sz="2100" b="1">
                 <a:solidFill>
                   <a:srgbClr val="005EB8"/>
                 </a:solidFill>
@@ -13477,7 +12822,7 @@
               <a:t>-   </a:t>
             </a:r>
             <a:r>
-              <a:rPr sz="2400" b="0">
+              <a:rPr sz="2100" b="0">
                 <a:solidFill>
                   <a:srgbClr val="141B2D"/>
                 </a:solidFill>
@@ -13488,9 +12833,77 @@
           </a:p>
         </p:txBody>
       </p:sp>
-      <p:sp>
-        <p:nvSpPr>
-          <p:cNvPr id="5" name="TextBox 4"/>
+      <p:pic>
+        <p:nvPicPr>
+          <p:cNvPr id="5" name="Picture 4" descr="09_vector_inversion.png"/>
+          <p:cNvPicPr>
+            <a:picLocks noChangeAspect="1"/>
+          </p:cNvPicPr>
+          <p:nvPr/>
+        </p:nvPicPr>
+        <p:blipFill>
+          <a:blip r:embed="rId2"/>
+          <a:stretch>
+            <a:fillRect/>
+          </a:stretch>
+        </p:blipFill>
+        <p:spPr>
+          <a:xfrm>
+            <a:off x="6276795" y="1874519"/>
+            <a:ext cx="5002890" cy="4023360"/>
+          </a:xfrm>
+          <a:prstGeom prst="rect">
+            <a:avLst/>
+          </a:prstGeom>
+        </p:spPr>
+      </p:pic>
+      <p:sp>
+        <p:nvSpPr>
+          <p:cNvPr id="6" name="TextBox 5"/>
+          <p:cNvSpPr txBox="1"/>
+          <p:nvPr/>
+        </p:nvSpPr>
+        <p:spPr>
+          <a:xfrm>
+            <a:off x="822960" y="5989320"/>
+            <a:ext cx="8961120" cy="502920"/>
+          </a:xfrm>
+          <a:prstGeom prst="rect">
+            <a:avLst/>
+          </a:prstGeom>
+          <a:noFill/>
+        </p:spPr>
+        <p:txBody>
+          <a:bodyPr wrap="square">
+            <a:spAutoFit/>
+          </a:bodyPr>
+          <a:lstStyle/>
+          <a:p>
+            <a:r>
+              <a:rPr sz="1400" b="0">
+                <a:solidFill>
+                  <a:srgbClr val="5A647A"/>
+                </a:solidFill>
+                <a:latin typeface="Helvetica Neue"/>
+              </a:rPr>
+              <a:t>Morris et al., Text Embeddings Reveal (Almost) As Much As Text: </a:t>
+            </a:r>
+            <a:r>
+              <a:rPr sz="1400" b="0" u="sng">
+                <a:solidFill>
+                  <a:srgbClr val="005EB8"/>
+                </a:solidFill>
+                <a:latin typeface="Helvetica Neue"/>
+                <a:hlinkClick r:id="rId3"/>
+              </a:rPr>
+              <a:t>arxiv.org/abs/2310.06816</a:t>
+            </a:r>
+          </a:p>
+        </p:txBody>
+      </p:sp>
+      <p:sp>
+        <p:nvSpPr>
+          <p:cNvPr id="7" name="TextBox 6"/>
           <p:cNvSpPr txBox="1"/>
           <p:nvPr/>
         </p:nvSpPr>
@@ -13566,10 +12979,10 @@
         <a:srgbClr val="F79646"/>
       </a:accent6>
       <a:hlink>
-        <a:srgbClr val="0000FF"/>
+        <a:srgbClr val="4A90D9"/>
       </a:hlink>
       <a:folHlink>
-        <a:srgbClr val="800080"/>
+        <a:srgbClr val="4A90D9"/>
       </a:folHlink>
     </a:clrScheme>
     <a:fontScheme name="Office">

--- a/ldp_for_search_slides.pptx
+++ b/ldp_for_search_slides.pptx
@@ -812,7 +812,7 @@
           <a:lstStyle/>
           <a:p>
             <a:r>
-              <a:t>One slide only. Resist the urge to teach differential privacy properly, there is not time and it is not the point of the talk. The noise is Laplace, but the word can wait for the next slide, where the shape is on screen and does the explaining for you. If someone asks here, one sentence: symmetric noise, equally likely to push the value up or down, centred on the truth.</a:t>
+              <a:t>One slide only. Resist the urge to teach differential privacy properly, there is not time and it is not the point of the talk. The noise is Laplace, but the word can wait for the next slide, where the shape is on screen and does the explaining for you. If someone asks here, one sentence: symmetric noise, equally likely to push the value up or down, centered on the truth. The formula is deliberately off the slide. If someone asks, the noise scale is sensitivity over epsilon, and sensitivity here is 1.0 per coordinate on vectors whose whole norm is 1, which is conservative rather than tight. The notes file has the longer answer. Do not volunteer the word, it is the only term in the deck with no definition behind it.</a:t>
             </a:r>
           </a:p>
         </p:txBody>
@@ -1442,7 +1442,7 @@
           <a:lstStyle/>
           <a:p>
             <a:r>
-              <a:t>Stress that no cohort member sends a readable query, and the server does the aggregation on noised vectors only. There is no trusted intermediate step.</a:t>
+              <a:t>Stress that no one in a segment sends a readable query, and the server does the aggregation on noised vectors only. There is no trusted intermediate step. Read the result off the notebook rather than a slide, because both halves matter. Individual recovery per segment runs 0.020, 0.020, 0.063, 0.070 and 0.030 against chance of 0.014 to 0.031, so roughly one to two and a half times chance, which is not usable. Segment identification is 5 of 5, exact. Same data, same epsilon of 1.0, two different questions.</a:t>
             </a:r>
           </a:p>
         </p:txBody>
@@ -1512,7 +1512,7 @@
           <a:lstStyle/>
           <a:p>
             <a:r>
-              <a:t>Individual recovery runs at roughly 1x to 2.5x chance, which is not usable. Aggregate recovery is exact. Same data, same epsilon, two different questions.</a:t>
+              <a:t>The centerpiece. Measured error tracks theory across four orders of magnitude. The title no longer says this is ordinary statistics, so say it: averaging n independent things shrinks the noise as one over root n, the same reason a poll of four thousand beats one of one thousand. Nothing here is special to privacy. Point at the crossing with the red line, that is the next slide. Spell the crossing out, because it is the one thing on this slide that is not self-evident. The red line is not a distance. It is the mean per-coordinate standard deviation of the index, 0.128, used as a deliberately strict accuracy target. The typical Euclidean distance between two products is about 0.82, so this bar is roughly six times stricter than merely telling products apart. If asked, say conservative, and do not call it a distance.</a:t>
             </a:r>
           </a:p>
         </p:txBody>
@@ -1582,7 +1582,7 @@
           <a:lstStyle/>
           <a:p>
             <a:r>
-              <a:t>The centrepiece. Measured error tracks theory across four orders of magnitude. Point at the crossing with the red line, that is the next slide.</a:t>
+              <a:t>Give the audience one operational number they can apply on Monday. This is it. The 2,500 is where the measured error crosses the spread of the index, 0.128, on the convergence plot. It is not a constant: error goes as one over epsilon times one over root n, so the threshold scales as one over epsilon squared. At epsilon 0.5 it is 10,000 users, at epsilon 2 it is about 625.</a:t>
             </a:r>
           </a:p>
         </p:txBody>
@@ -1652,7 +1652,7 @@
           <a:lstStyle/>
           <a:p>
             <a:r>
-              <a:t>Give the audience one operational number they can apply on Monday. This is it. The 2,500 is where the measured error crosses the spread of the index, 0.128, on the convergence plot. It is not a constant: error goes as one over epsilon times one over root n, so the threshold scales as one over epsilon squared. At epsilon 0.5 it is 10,000 users, at epsilon 2 it is about 625.</a:t>
+              <a:t>The reframe. Every input relevance tuning actually needs is a population statistic. Let this sit on screen for a beat before moving on.</a:t>
             </a:r>
           </a:p>
         </p:txBody>
@@ -1722,7 +1722,7 @@
           <a:lstStyle/>
           <a:p>
             <a:r>
-              <a:t>The reframe. Every input relevance tuning actually needs is a population statistic. Let this sit on screen for a beat before moving on.</a:t>
+              <a:t>About 7 minutes. Land the integration, then be honest about what does not work.</a:t>
             </a:r>
           </a:p>
         </p:txBody>
@@ -1792,7 +1792,7 @@
           <a:lstStyle/>
           <a:p>
             <a:r>
-              <a:t>About 7 minutes. Land the integration, then be honest about what does not work.</a:t>
+              <a:t>Say up front that none of this is built into UBI today. ubi.js is a serializer, and the embedding, the projection and the noise are code the adopter writes and runs before handing the request to trackQuery. The notes file has the call shape and the two ways to get it wrong. The architectural payoff. The trust boundary moves to the device, which is the only place the raw query legitimately exists. The last bullet answers the obvious objection, that the people collecting the data are the ones choosing how much privacy users get. True, and the standing critique of deployed LDP. The web deployment is the answer: because the mechanism ships as JavaScript, a user, an auditor or a regulator can open devtools and check the epsilon. A server-side pipeline or a native app cannot make that claim. It turns trust us into check us, which is the same promise as the rest of the talk.</a:t>
             </a:r>
           </a:p>
         </p:txBody>
@@ -1862,7 +1862,7 @@
           <a:lstStyle/>
           <a:p>
             <a:r>
-              <a:t>The architectural payoff. The trust boundary moves to the device, which is the only place the raw query legitimately exists. The last bullet answers the obvious objection, that the people collecting the data are the ones choosing how much privacy users get. True, and the standing critique of deployed LDP. The web deployment is the answer: because the mechanism ships as JavaScript, a user, an auditor or a regulator can open devtools and check the epsilon. A server-side pipeline or a native app cannot make that claim. It turns trust us into check us, which is the same promise as the rest of the talk.</a:t>
+              <a:t>The integration question, answered concretely, and it needs no change to the UBI spec. query_attributes is typed as a free-form object for exactly this kind of thing, and the epsilon travels with the record so a reader knows the budget it was collected under. user_query is emptied rather than dropped because the published schema lists it as required. Worth knowing if someone asks: the schema contradicts itself there, since the field also carries a comment saying it is not required, for recommendation systems with no typed query. Two things to volunteer: the identifiers are deliberately identical on both sides, which is the limitation two slides later, and every dashboard that reads user_query breaks, which is the real migration cost. A float array in an object is not a knn_vector either, so averaging these at query time needs a scripted aggregation or an explicit vector mapping.</a:t>
             </a:r>
           </a:p>
         </p:txBody>
@@ -1932,7 +1932,7 @@
           <a:lstStyle/>
           <a:p>
             <a:r>
-              <a:t>Tie back to the abstract's promise about LTR and query-intent analysis. Then name the thing that genuinely goes away.</a:t>
+              <a:t>Tie back to the abstract's promise about LTR and query-intent analysis. Then name the thing that genuinely goes away. If anyone presses on the learning-to-rank bullet, be straight: LTR judgments come from clicks, and this mechanism does not touch clicks, so that signal survives because it was never protected rather than because LDP preserved it. The limitations slide says so.</a:t>
             </a:r>
           </a:p>
         </p:txBody>
@@ -2002,7 +2002,7 @@
           <a:lstStyle/>
           <a:p>
             <a:r>
-              <a:t>Every one of these is a question someone will ask. Answering them first is cheaper than answering them under pressure. Also mention that a formal epsilon-DP claim needs sensitivity calibrated to the true coordinate range. Here the vectors are L2-normalized before PCA, so the whole 20-dimensional vector has norm 1, which makes sensitivity 1.0 per coordinate conservative rather than tight. That is the answer if someone asks how sensitivity was set. On the long tail, which someone will ask about: the workarounds are coarser segments and longer time windows, and both are the same trade at lower resolution, because they only raise n. The genuinely different answer is shuffle DP or secure aggregation, which buys far more utility at the same epsilon but changes the architecture rather than the parameter. Worth adding that tail relevance is usually improved by retrieval work rather than behavioural signal anyway.</a:t>
+              <a:t>Every one of these is a question someone will ask. Answering them first is cheaper than answering them under pressure. Also mention that a formal epsilon-DP claim needs sensitivity calibrated to the true coordinate range. Here the vectors are L2-normalized before PCA, so the whole 20-dimensional vector has norm 1, which makes sensitivity 1.0 per coordinate conservative rather than tight. That is the answer if someone asks how sensitivity was set. On the long tail, which someone will ask about: the workarounds are coarser segments and longer time windows, and both are the same trade at lower resolution, because they only raise n. The genuinely different answer is shuffle DP or secure aggregation, which buys far more utility at the same epsilon but changes the architecture rather than the parameter. Worth adding that tail relevance is usually improved by retrieval work rather than behavioural signal anyway. On the last bullet, be direct: this is scoped work, not a finished privacy story for all of UBI. The query text is covered. Clicks are counts rather than vectors and want randomized response, and client_id and session_id would need rotating or dropping. That is the honest answer to the linkability half of the problem raised in Part 1.</a:t>
             </a:r>
           </a:p>
         </p:txBody>
@@ -2422,7 +2422,7 @@
           <a:lstStyle/>
           <a:p>
             <a:r>
-              <a:t>Be specific. Legal does not object to 'search data' in the abstract. They object to these fields. Naming them makes the rest of the talk concrete.</a:t>
+              <a:t>Be specific. Legal does not object to 'search data' in the abstract. They object to these fields. Naming them makes the rest of the talk concrete. Know which half you are about to solve: everything after this addresses user_query. The identifiers are dealt with on the limitations slide, so do not imply here that they go away too.</a:t>
             </a:r>
           </a:p>
         </p:txBody>
@@ -6358,7 +6358,7 @@
                 </a:solidFill>
                 <a:latin typeface="Helvetica Neue"/>
               </a:rPr>
-              <a:t>Local Differential Privacy, in one slide</a:t>
+              <a:t>Local Differential Privacy</a:t>
             </a:r>
           </a:p>
         </p:txBody>
@@ -6450,7 +6450,7 @@
                 </a:solidFill>
                 <a:latin typeface="Helvetica Neue"/>
               </a:rPr>
-              <a:t>Add calibrated noise to the query vector on the device</a:t>
+              <a:t>The vector was never the problem, storing it readable was</a:t>
             </a:r>
           </a:p>
           <a:p>
@@ -6475,7 +6475,7 @@
                 </a:solidFill>
                 <a:latin typeface="Helvetica Neue"/>
               </a:rPr>
-              <a:t>Noise scale = sensitivity / epsilon</a:t>
+              <a:t>Add calibrated noise to the query vector on the device</a:t>
             </a:r>
           </a:p>
           <a:p>
@@ -6747,7 +6747,7 @@
                 </a:solidFill>
                 <a:latin typeface="Helvetica Neue"/>
               </a:rPr>
-              <a:t>The peak sits on the true value, and the width of the tent is the privacy.</a:t>
+              <a:t>A biased mechanism would put the peak off the red line. The width is the privacy.</a:t>
             </a:r>
           </a:p>
         </p:txBody>
@@ -7224,56 +7224,6 @@
                 </a:solidFill>
                 <a:latin typeface="Helvetica Neue"/>
               </a:rPr>
-              <a:t>Privacy was excellent. Utility was destroyed</a:t>
-            </a:r>
-          </a:p>
-          <a:p>
-            <a:pPr marL="342900" indent="-342900">
-              <a:spcAft>
-                <a:spcPts val="2000"/>
-              </a:spcAft>
-            </a:pPr>
-            <a:r>
-              <a:rPr sz="2400" b="1">
-                <a:solidFill>
-                  <a:srgbClr val="B4311A"/>
-                </a:solidFill>
-                <a:latin typeface="Helvetica Neue"/>
-              </a:rPr>
-              <a:t>-   </a:t>
-            </a:r>
-            <a:r>
-              <a:rPr sz="2400" b="0">
-                <a:solidFill>
-                  <a:srgbClr val="141B2D"/>
-                </a:solidFill>
-                <a:latin typeface="Helvetica Neue"/>
-              </a:rPr>
-              <a:t>P@1 of 0.07 against a random baseline of 0.05</a:t>
-            </a:r>
-          </a:p>
-          <a:p>
-            <a:pPr marL="342900" indent="-342900">
-              <a:spcAft>
-                <a:spcPts val="2000"/>
-              </a:spcAft>
-            </a:pPr>
-            <a:r>
-              <a:rPr sz="2400" b="1">
-                <a:solidFill>
-                  <a:srgbClr val="B4311A"/>
-                </a:solidFill>
-                <a:latin typeface="Helvetica Neue"/>
-              </a:rPr>
-              <a:t>-   </a:t>
-            </a:r>
-            <a:r>
-              <a:rPr sz="2400" b="0">
-                <a:solidFill>
-                  <a:srgbClr val="141B2D"/>
-                </a:solidFill>
-                <a:latin typeface="Helvetica Neue"/>
-              </a:rPr>
               <a:t>The attacker learned nothing, and neither did the user</a:t>
             </a:r>
           </a:p>
@@ -8258,7 +8208,7 @@
                 </a:solidFill>
                 <a:latin typeface="Helvetica Neue"/>
               </a:rPr>
-              <a:t>Demo: cohorts of real users</a:t>
+              <a:t>Demo: segments of real users</a:t>
             </a:r>
           </a:p>
         </p:txBody>
@@ -8313,7 +8263,7 @@
                 </a:solidFill>
                 <a:latin typeface="Helvetica Neue"/>
               </a:rPr>
-              <a:t>480 real WANDS queries, grouped into 5 cohorts</a:t>
+              <a:t>480 real queries from Wayfair's WANDS dataset, grouped into 5 segments</a:t>
             </a:r>
           </a:p>
           <a:p>
@@ -8403,8 +8353,8 @@
         </p:nvSpPr>
         <p:spPr>
           <a:xfrm>
-            <a:off x="822960" y="640080"/>
-            <a:ext cx="10515600" cy="960120"/>
+            <a:off x="822960" y="411480"/>
+            <a:ext cx="10515600" cy="822960"/>
           </a:xfrm>
           <a:prstGeom prst="rect">
             <a:avLst/>
@@ -8418,663 +8368,27 @@
           <a:lstStyle/>
           <a:p>
             <a:r>
-              <a:rPr sz="3200" b="1">
+              <a:rPr sz="3000" b="1">
                 <a:solidFill>
                   <a:srgbClr val="141B2D"/>
                 </a:solidFill>
                 <a:latin typeface="Helvetica Neue"/>
               </a:rPr>
-              <a:t>Individuals hide. The crowd does not.</a:t>
-            </a:r>
-          </a:p>
-        </p:txBody>
-      </p:sp>
-      <p:sp>
-        <p:nvSpPr>
-          <p:cNvPr id="3" name="Rectangle 2"/>
-          <p:cNvSpPr/>
-          <p:nvPr/>
-        </p:nvSpPr>
-        <p:spPr>
-          <a:xfrm>
-            <a:off x="822960" y="1245615"/>
-            <a:ext cx="1463040" cy="50800"/>
-          </a:xfrm>
-          <a:prstGeom prst="rect">
-            <a:avLst/>
-          </a:prstGeom>
-          <a:solidFill>
-            <a:srgbClr val="005EB8"/>
-          </a:solidFill>
-          <a:ln>
-            <a:noFill/>
-          </a:ln>
-          <a:effectLst/>
-        </p:spPr>
-        <p:style>
-          <a:lnRef idx="1">
-            <a:schemeClr val="accent1"/>
-          </a:lnRef>
-          <a:fillRef idx="3">
-            <a:schemeClr val="accent1"/>
-          </a:fillRef>
-          <a:effectRef idx="2">
-            <a:schemeClr val="accent1"/>
-          </a:effectRef>
-          <a:fontRef idx="minor">
-            <a:schemeClr val="lt1"/>
-          </a:fontRef>
-        </p:style>
-        <p:txBody>
-          <a:bodyPr rtlCol="0" anchor="ctr"/>
-          <a:lstStyle/>
-          <a:p>
-            <a:pPr algn="ctr"/>
-          </a:p>
-        </p:txBody>
-      </p:sp>
-      <p:graphicFrame>
-        <p:nvGraphicFramePr>
-          <p:cNvPr id="4" name="Table 3"/>
-          <p:cNvGraphicFramePr>
-            <a:graphicFrameLocks noGrp="1"/>
-          </p:cNvGraphicFramePr>
-          <p:nvPr/>
-        </p:nvGraphicFramePr>
-        <p:xfrm>
-          <a:off x="1523847" y="2103120"/>
-          <a:ext cx="9144000" cy="3401568"/>
-        </p:xfrm>
-        <a:graphic>
-          <a:graphicData uri="http://schemas.openxmlformats.org/drawingml/2006/table">
-            <a:tbl>
-              <a:tblPr firstRow="1" bandRow="1">
-                <a:tableStyleId>{5C22544A-7EE6-4342-B048-85BDC9FD1C3A}</a:tableStyleId>
-              </a:tblPr>
-              <a:tblGrid>
-                <a:gridCol w="2286000"/>
-                <a:gridCol w="2286000"/>
-                <a:gridCol w="2286000"/>
-                <a:gridCol w="2286000"/>
-              </a:tblGrid>
-              <a:tr h="566928">
-                <a:tc>
-                  <a:txBody>
-                    <a:bodyPr/>
-                    <a:lstStyle/>
-                    <a:p>
-                      <a:pPr algn="l"/>
-                      <a:r>
-                        <a:rPr sz="1800" b="1">
-                          <a:solidFill>
-                            <a:srgbClr val="FFFFFF"/>
-                          </a:solidFill>
-                          <a:latin typeface="Helvetica Neue"/>
-                        </a:rPr>
-                        <a:t>cohort</a:t>
-                      </a:r>
-                    </a:p>
-                  </a:txBody>
-                  <a:tcPr anchor="ctr">
-                    <a:solidFill>
-                      <a:srgbClr val="005EB8"/>
-                    </a:solidFill>
-                  </a:tcPr>
-                </a:tc>
-                <a:tc>
-                  <a:txBody>
-                    <a:bodyPr/>
-                    <a:lstStyle/>
-                    <a:p>
-                      <a:pPr algn="ctr"/>
-                      <a:r>
-                        <a:rPr sz="1800" b="1">
-                          <a:solidFill>
-                            <a:srgbClr val="FFFFFF"/>
-                          </a:solidFill>
-                          <a:latin typeface="Helvetica Neue"/>
-                        </a:rPr>
-                        <a:t>individual</a:t>
-                      </a:r>
-                    </a:p>
-                  </a:txBody>
-                  <a:tcPr anchor="ctr">
-                    <a:solidFill>
-                      <a:srgbClr val="005EB8"/>
-                    </a:solidFill>
-                  </a:tcPr>
-                </a:tc>
-                <a:tc>
-                  <a:txBody>
-                    <a:bodyPr/>
-                    <a:lstStyle/>
-                    <a:p>
-                      <a:pPr algn="ctr"/>
-                      <a:r>
-                        <a:rPr sz="1800" b="1">
-                          <a:solidFill>
-                            <a:srgbClr val="FFFFFF"/>
-                          </a:solidFill>
-                          <a:latin typeface="Helvetica Neue"/>
-                        </a:rPr>
-                        <a:t>chance</a:t>
-                      </a:r>
-                    </a:p>
-                  </a:txBody>
-                  <a:tcPr anchor="ctr">
-                    <a:solidFill>
-                      <a:srgbClr val="005EB8"/>
-                    </a:solidFill>
-                  </a:tcPr>
-                </a:tc>
-                <a:tc>
-                  <a:txBody>
-                    <a:bodyPr/>
-                    <a:lstStyle/>
-                    <a:p>
-                      <a:pPr algn="ctr"/>
-                      <a:r>
-                        <a:rPr sz="1800" b="1">
-                          <a:solidFill>
-                            <a:srgbClr val="FFFFFF"/>
-                          </a:solidFill>
-                          <a:latin typeface="Helvetica Neue"/>
-                        </a:rPr>
-                        <a:t>cohort ID</a:t>
-                      </a:r>
-                    </a:p>
-                  </a:txBody>
-                  <a:tcPr anchor="ctr">
-                    <a:solidFill>
-                      <a:srgbClr val="005EB8"/>
-                    </a:solidFill>
-                  </a:tcPr>
-                </a:tc>
-              </a:tr>
-              <a:tr h="566928">
-                <a:tc>
-                  <a:txBody>
-                    <a:bodyPr/>
-                    <a:lstStyle/>
-                    <a:p>
-                      <a:pPr algn="l"/>
-                      <a:r>
-                        <a:rPr sz="1800" b="0">
-                          <a:solidFill>
-                            <a:srgbClr val="141B2D"/>
-                          </a:solidFill>
-                          <a:latin typeface="Helvetica Neue"/>
-                        </a:rPr>
-                        <a:t>Wall Art</a:t>
-                      </a:r>
-                    </a:p>
-                  </a:txBody>
-                  <a:tcPr anchor="ctr">
-                    <a:solidFill>
-                      <a:srgbClr val="F4F7FB"/>
-                    </a:solidFill>
-                  </a:tcPr>
-                </a:tc>
-                <a:tc>
-                  <a:txBody>
-                    <a:bodyPr/>
-                    <a:lstStyle/>
-                    <a:p>
-                      <a:pPr algn="ctr"/>
-                      <a:r>
-                        <a:rPr sz="1800" b="0">
-                          <a:solidFill>
-                            <a:srgbClr val="141B2D"/>
-                          </a:solidFill>
-                          <a:latin typeface="Helvetica Neue"/>
-                        </a:rPr>
-                        <a:t>0.020</a:t>
-                      </a:r>
-                    </a:p>
-                  </a:txBody>
-                  <a:tcPr anchor="ctr">
-                    <a:solidFill>
-                      <a:srgbClr val="F4F7FB"/>
-                    </a:solidFill>
-                  </a:tcPr>
-                </a:tc>
-                <a:tc>
-                  <a:txBody>
-                    <a:bodyPr/>
-                    <a:lstStyle/>
-                    <a:p>
-                      <a:pPr algn="ctr"/>
-                      <a:r>
-                        <a:rPr sz="1800" b="0">
-                          <a:solidFill>
-                            <a:srgbClr val="141B2D"/>
-                          </a:solidFill>
-                          <a:latin typeface="Helvetica Neue"/>
-                        </a:rPr>
-                        <a:t>0.014</a:t>
-                      </a:r>
-                    </a:p>
-                  </a:txBody>
-                  <a:tcPr anchor="ctr">
-                    <a:solidFill>
-                      <a:srgbClr val="F4F7FB"/>
-                    </a:solidFill>
-                  </a:tcPr>
-                </a:tc>
-                <a:tc>
-                  <a:txBody>
-                    <a:bodyPr/>
-                    <a:lstStyle/>
-                    <a:p>
-                      <a:pPr algn="ctr"/>
-                      <a:r>
-                        <a:rPr sz="1800" b="0">
-                          <a:solidFill>
-                            <a:srgbClr val="141B2D"/>
-                          </a:solidFill>
-                          <a:latin typeface="Helvetica Neue"/>
-                        </a:rPr>
-                        <a:t>OK</a:t>
-                      </a:r>
-                    </a:p>
-                  </a:txBody>
-                  <a:tcPr anchor="ctr">
-                    <a:solidFill>
-                      <a:srgbClr val="F4F7FB"/>
-                    </a:solidFill>
-                  </a:tcPr>
-                </a:tc>
-              </a:tr>
-              <a:tr h="566928">
-                <a:tc>
-                  <a:txBody>
-                    <a:bodyPr/>
-                    <a:lstStyle/>
-                    <a:p>
-                      <a:pPr algn="l"/>
-                      <a:r>
-                        <a:rPr sz="1800" b="0">
-                          <a:solidFill>
-                            <a:srgbClr val="141B2D"/>
-                          </a:solidFill>
-                          <a:latin typeface="Helvetica Neue"/>
-                        </a:rPr>
-                        <a:t>Accent Chairs</a:t>
-                      </a:r>
-                    </a:p>
-                  </a:txBody>
-                  <a:tcPr anchor="ctr">
-                    <a:solidFill>
-                      <a:srgbClr val="FFFFFF"/>
-                    </a:solidFill>
-                  </a:tcPr>
-                </a:tc>
-                <a:tc>
-                  <a:txBody>
-                    <a:bodyPr/>
-                    <a:lstStyle/>
-                    <a:p>
-                      <a:pPr algn="ctr"/>
-                      <a:r>
-                        <a:rPr sz="1800" b="0">
-                          <a:solidFill>
-                            <a:srgbClr val="141B2D"/>
-                          </a:solidFill>
-                          <a:latin typeface="Helvetica Neue"/>
-                        </a:rPr>
-                        <a:t>0.020</a:t>
-                      </a:r>
-                    </a:p>
-                  </a:txBody>
-                  <a:tcPr anchor="ctr">
-                    <a:solidFill>
-                      <a:srgbClr val="FFFFFF"/>
-                    </a:solidFill>
-                  </a:tcPr>
-                </a:tc>
-                <a:tc>
-                  <a:txBody>
-                    <a:bodyPr/>
-                    <a:lstStyle/>
-                    <a:p>
-                      <a:pPr algn="ctr"/>
-                      <a:r>
-                        <a:rPr sz="1800" b="0">
-                          <a:solidFill>
-                            <a:srgbClr val="141B2D"/>
-                          </a:solidFill>
-                          <a:latin typeface="Helvetica Neue"/>
-                        </a:rPr>
-                        <a:t>0.027</a:t>
-                      </a:r>
-                    </a:p>
-                  </a:txBody>
-                  <a:tcPr anchor="ctr">
-                    <a:solidFill>
-                      <a:srgbClr val="FFFFFF"/>
-                    </a:solidFill>
-                  </a:tcPr>
-                </a:tc>
-                <a:tc>
-                  <a:txBody>
-                    <a:bodyPr/>
-                    <a:lstStyle/>
-                    <a:p>
-                      <a:pPr algn="ctr"/>
-                      <a:r>
-                        <a:rPr sz="1800" b="0">
-                          <a:solidFill>
-                            <a:srgbClr val="141B2D"/>
-                          </a:solidFill>
-                          <a:latin typeface="Helvetica Neue"/>
-                        </a:rPr>
-                        <a:t>OK</a:t>
-                      </a:r>
-                    </a:p>
-                  </a:txBody>
-                  <a:tcPr anchor="ctr">
-                    <a:solidFill>
-                      <a:srgbClr val="FFFFFF"/>
-                    </a:solidFill>
-                  </a:tcPr>
-                </a:tc>
-              </a:tr>
-              <a:tr h="566928">
-                <a:tc>
-                  <a:txBody>
-                    <a:bodyPr/>
-                    <a:lstStyle/>
-                    <a:p>
-                      <a:pPr algn="l"/>
-                      <a:r>
-                        <a:rPr sz="1800" b="0">
-                          <a:solidFill>
-                            <a:srgbClr val="141B2D"/>
-                          </a:solidFill>
-                          <a:latin typeface="Helvetica Neue"/>
-                        </a:rPr>
-                        <a:t>Beds</a:t>
-                      </a:r>
-                    </a:p>
-                  </a:txBody>
-                  <a:tcPr anchor="ctr">
-                    <a:solidFill>
-                      <a:srgbClr val="F4F7FB"/>
-                    </a:solidFill>
-                  </a:tcPr>
-                </a:tc>
-                <a:tc>
-                  <a:txBody>
-                    <a:bodyPr/>
-                    <a:lstStyle/>
-                    <a:p>
-                      <a:pPr algn="ctr"/>
-                      <a:r>
-                        <a:rPr sz="1800" b="0">
-                          <a:solidFill>
-                            <a:srgbClr val="141B2D"/>
-                          </a:solidFill>
-                          <a:latin typeface="Helvetica Neue"/>
-                        </a:rPr>
-                        <a:t>0.063</a:t>
-                      </a:r>
-                    </a:p>
-                  </a:txBody>
-                  <a:tcPr anchor="ctr">
-                    <a:solidFill>
-                      <a:srgbClr val="F4F7FB"/>
-                    </a:solidFill>
-                  </a:tcPr>
-                </a:tc>
-                <a:tc>
-                  <a:txBody>
-                    <a:bodyPr/>
-                    <a:lstStyle/>
-                    <a:p>
-                      <a:pPr algn="ctr"/>
-                      <a:r>
-                        <a:rPr sz="1800" b="0">
-                          <a:solidFill>
-                            <a:srgbClr val="141B2D"/>
-                          </a:solidFill>
-                          <a:latin typeface="Helvetica Neue"/>
-                        </a:rPr>
-                        <a:t>0.026</a:t>
-                      </a:r>
-                    </a:p>
-                  </a:txBody>
-                  <a:tcPr anchor="ctr">
-                    <a:solidFill>
-                      <a:srgbClr val="F4F7FB"/>
-                    </a:solidFill>
-                  </a:tcPr>
-                </a:tc>
-                <a:tc>
-                  <a:txBody>
-                    <a:bodyPr/>
-                    <a:lstStyle/>
-                    <a:p>
-                      <a:pPr algn="ctr"/>
-                      <a:r>
-                        <a:rPr sz="1800" b="0">
-                          <a:solidFill>
-                            <a:srgbClr val="141B2D"/>
-                          </a:solidFill>
-                          <a:latin typeface="Helvetica Neue"/>
-                        </a:rPr>
-                        <a:t>OK</a:t>
-                      </a:r>
-                    </a:p>
-                  </a:txBody>
-                  <a:tcPr anchor="ctr">
-                    <a:solidFill>
-                      <a:srgbClr val="F4F7FB"/>
-                    </a:solidFill>
-                  </a:tcPr>
-                </a:tc>
-              </a:tr>
-              <a:tr h="566928">
-                <a:tc>
-                  <a:txBody>
-                    <a:bodyPr/>
-                    <a:lstStyle/>
-                    <a:p>
-                      <a:pPr algn="l"/>
-                      <a:r>
-                        <a:rPr sz="1800" b="0">
-                          <a:solidFill>
-                            <a:srgbClr val="141B2D"/>
-                          </a:solidFill>
-                          <a:latin typeface="Helvetica Neue"/>
-                        </a:rPr>
-                        <a:t>Area Rugs</a:t>
-                      </a:r>
-                    </a:p>
-                  </a:txBody>
-                  <a:tcPr anchor="ctr">
-                    <a:solidFill>
-                      <a:srgbClr val="FFFFFF"/>
-                    </a:solidFill>
-                  </a:tcPr>
-                </a:tc>
-                <a:tc>
-                  <a:txBody>
-                    <a:bodyPr/>
-                    <a:lstStyle/>
-                    <a:p>
-                      <a:pPr algn="ctr"/>
-                      <a:r>
-                        <a:rPr sz="1800" b="0">
-                          <a:solidFill>
-                            <a:srgbClr val="141B2D"/>
-                          </a:solidFill>
-                          <a:latin typeface="Helvetica Neue"/>
-                        </a:rPr>
-                        <a:t>0.070</a:t>
-                      </a:r>
-                    </a:p>
-                  </a:txBody>
-                  <a:tcPr anchor="ctr">
-                    <a:solidFill>
-                      <a:srgbClr val="FFFFFF"/>
-                    </a:solidFill>
-                  </a:tcPr>
-                </a:tc>
-                <a:tc>
-                  <a:txBody>
-                    <a:bodyPr/>
-                    <a:lstStyle/>
-                    <a:p>
-                      <a:pPr algn="ctr"/>
-                      <a:r>
-                        <a:rPr sz="1800" b="0">
-                          <a:solidFill>
-                            <a:srgbClr val="141B2D"/>
-                          </a:solidFill>
-                          <a:latin typeface="Helvetica Neue"/>
-                        </a:rPr>
-                        <a:t>0.031</a:t>
-                      </a:r>
-                    </a:p>
-                  </a:txBody>
-                  <a:tcPr anchor="ctr">
-                    <a:solidFill>
-                      <a:srgbClr val="FFFFFF"/>
-                    </a:solidFill>
-                  </a:tcPr>
-                </a:tc>
-                <a:tc>
-                  <a:txBody>
-                    <a:bodyPr/>
-                    <a:lstStyle/>
-                    <a:p>
-                      <a:pPr algn="ctr"/>
-                      <a:r>
-                        <a:rPr sz="1800" b="0">
-                          <a:solidFill>
-                            <a:srgbClr val="141B2D"/>
-                          </a:solidFill>
-                          <a:latin typeface="Helvetica Neue"/>
-                        </a:rPr>
-                        <a:t>OK</a:t>
-                      </a:r>
-                    </a:p>
-                  </a:txBody>
-                  <a:tcPr anchor="ctr">
-                    <a:solidFill>
-                      <a:srgbClr val="FFFFFF"/>
-                    </a:solidFill>
-                  </a:tcPr>
-                </a:tc>
-              </a:tr>
-              <a:tr h="566928">
-                <a:tc>
-                  <a:txBody>
-                    <a:bodyPr/>
-                    <a:lstStyle/>
-                    <a:p>
-                      <a:pPr algn="l"/>
-                      <a:r>
-                        <a:rPr sz="1800" b="0">
-                          <a:solidFill>
-                            <a:srgbClr val="141B2D"/>
-                          </a:solidFill>
-                          <a:latin typeface="Helvetica Neue"/>
-                        </a:rPr>
-                        <a:t>Coffee &amp; Cocktail Tables</a:t>
-                      </a:r>
-                    </a:p>
-                  </a:txBody>
-                  <a:tcPr anchor="ctr">
-                    <a:solidFill>
-                      <a:srgbClr val="F4F7FB"/>
-                    </a:solidFill>
-                  </a:tcPr>
-                </a:tc>
-                <a:tc>
-                  <a:txBody>
-                    <a:bodyPr/>
-                    <a:lstStyle/>
-                    <a:p>
-                      <a:pPr algn="ctr"/>
-                      <a:r>
-                        <a:rPr sz="1800" b="0">
-                          <a:solidFill>
-                            <a:srgbClr val="141B2D"/>
-                          </a:solidFill>
-                          <a:latin typeface="Helvetica Neue"/>
-                        </a:rPr>
-                        <a:t>0.030</a:t>
-                      </a:r>
-                    </a:p>
-                  </a:txBody>
-                  <a:tcPr anchor="ctr">
-                    <a:solidFill>
-                      <a:srgbClr val="F4F7FB"/>
-                    </a:solidFill>
-                  </a:tcPr>
-                </a:tc>
-                <a:tc>
-                  <a:txBody>
-                    <a:bodyPr/>
-                    <a:lstStyle/>
-                    <a:p>
-                      <a:pPr algn="ctr"/>
-                      <a:r>
-                        <a:rPr sz="1800" b="0">
-                          <a:solidFill>
-                            <a:srgbClr val="141B2D"/>
-                          </a:solidFill>
-                          <a:latin typeface="Helvetica Neue"/>
-                        </a:rPr>
-                        <a:t>0.025</a:t>
-                      </a:r>
-                    </a:p>
-                  </a:txBody>
-                  <a:tcPr anchor="ctr">
-                    <a:solidFill>
-                      <a:srgbClr val="F4F7FB"/>
-                    </a:solidFill>
-                  </a:tcPr>
-                </a:tc>
-                <a:tc>
-                  <a:txBody>
-                    <a:bodyPr/>
-                    <a:lstStyle/>
-                    <a:p>
-                      <a:pPr algn="ctr"/>
-                      <a:r>
-                        <a:rPr sz="1800" b="0">
-                          <a:solidFill>
-                            <a:srgbClr val="141B2D"/>
-                          </a:solidFill>
-                          <a:latin typeface="Helvetica Neue"/>
-                        </a:rPr>
-                        <a:t>OK</a:t>
-                      </a:r>
-                    </a:p>
-                  </a:txBody>
-                  <a:tcPr anchor="ctr">
-                    <a:solidFill>
-                      <a:srgbClr val="F4F7FB"/>
-                    </a:solidFill>
-                  </a:tcPr>
-                </a:tc>
-              </a:tr>
-            </a:tbl>
-          </a:graphicData>
-        </a:graphic>
-      </p:graphicFrame>
-      <p:sp>
-        <p:nvSpPr>
-          <p:cNvPr id="5" name="TextBox 4"/>
+              <a:t>Error falls as 1 / sqrt(users)</a:t>
+            </a:r>
+          </a:p>
+        </p:txBody>
+      </p:sp>
+      <p:sp>
+        <p:nvSpPr>
+          <p:cNvPr id="3" name="TextBox 2"/>
           <p:cNvSpPr txBox="1"/>
           <p:nvPr/>
         </p:nvSpPr>
         <p:spPr>
           <a:xfrm>
-            <a:off x="822960" y="5943600"/>
-            <a:ext cx="10515600" cy="640080"/>
+            <a:off x="822960" y="1097280"/>
+            <a:ext cx="10515600" cy="457200"/>
           </a:xfrm>
           <a:prstGeom prst="rect">
             <a:avLst/>
@@ -9095,7 +8409,84 @@
                 </a:solidFill>
                 <a:latin typeface="Helvetica Neue"/>
               </a:rPr>
-              <a:t>epsilon 1.0, heavier noise than anything in Part 4. 20,000 users per cohort. 5 of 5 recovered.</a:t>
+              <a:t>Average the noised queries of </a:t>
+            </a:r>
+            <a:r>
+              <a:rPr sz="1300" b="0">
+                <a:solidFill>
+                  <a:srgbClr val="5A647A"/>
+                </a:solidFill>
+                <a:latin typeface="Consolas"/>
+              </a:rPr>
+              <a:t>n</a:t>
+            </a:r>
+            <a:r>
+              <a:rPr sz="1500" b="0">
+                <a:solidFill>
+                  <a:srgbClr val="5A647A"/>
+                </a:solidFill>
+                <a:latin typeface="Helvetica Neue"/>
+              </a:rPr>
+              <a:t> users in one segment, then see how far that average lands from the truth.</a:t>
+            </a:r>
+          </a:p>
+        </p:txBody>
+      </p:sp>
+      <p:pic>
+        <p:nvPicPr>
+          <p:cNvPr id="4" name="Picture 3" descr="11_aggregate_convergence.png"/>
+          <p:cNvPicPr>
+            <a:picLocks noChangeAspect="1"/>
+          </p:cNvPicPr>
+          <p:nvPr/>
+        </p:nvPicPr>
+        <p:blipFill>
+          <a:blip r:embed="rId2"/>
+          <a:stretch>
+            <a:fillRect/>
+          </a:stretch>
+        </p:blipFill>
+        <p:spPr>
+          <a:xfrm>
+            <a:off x="2789022" y="1828800"/>
+            <a:ext cx="6613651" cy="3931920"/>
+          </a:xfrm>
+          <a:prstGeom prst="rect">
+            <a:avLst/>
+          </a:prstGeom>
+        </p:spPr>
+      </p:pic>
+      <p:sp>
+        <p:nvSpPr>
+          <p:cNvPr id="5" name="TextBox 4"/>
+          <p:cNvSpPr txBox="1"/>
+          <p:nvPr/>
+        </p:nvSpPr>
+        <p:spPr>
+          <a:xfrm>
+            <a:off x="1325880" y="5989320"/>
+            <a:ext cx="9509760" cy="640080"/>
+          </a:xfrm>
+          <a:prstGeom prst="rect">
+            <a:avLst/>
+          </a:prstGeom>
+          <a:noFill/>
+        </p:spPr>
+        <p:txBody>
+          <a:bodyPr wrap="square">
+            <a:spAutoFit/>
+          </a:bodyPr>
+          <a:lstStyle/>
+          <a:p>
+            <a:pPr algn="ctr"/>
+            <a:r>
+              <a:rPr sz="1600" b="0">
+                <a:solidFill>
+                  <a:srgbClr val="5A647A"/>
+                </a:solidFill>
+                <a:latin typeface="Helvetica Neue"/>
+              </a:rPr>
+              <a:t>Once the green error line drops under the red line, the privacy noise has become smaller than one coordinate's typical spread.</a:t>
             </a:r>
           </a:p>
         </p:txBody>
@@ -9169,8 +8560,8 @@
         </p:nvSpPr>
         <p:spPr>
           <a:xfrm>
-            <a:off x="822960" y="411480"/>
-            <a:ext cx="10515600" cy="822960"/>
+            <a:off x="822960" y="640080"/>
+            <a:ext cx="10515600" cy="960120"/>
           </a:xfrm>
           <a:prstGeom prst="rect">
             <a:avLst/>
@@ -9184,41 +8575,61 @@
           <a:lstStyle/>
           <a:p>
             <a:r>
-              <a:rPr sz="3000" b="1">
+              <a:rPr sz="3400" b="1">
                 <a:solidFill>
                   <a:srgbClr val="141B2D"/>
                 </a:solidFill>
                 <a:latin typeface="Helvetica Neue"/>
               </a:rPr>
-              <a:t>Error falls as 1 / sqrt(n), exactly as theory says</a:t>
-            </a:r>
-          </a:p>
-        </p:txBody>
-      </p:sp>
-      <p:pic>
-        <p:nvPicPr>
-          <p:cNvPr id="3" name="Picture 2" descr="11_aggregate_convergence.png"/>
-          <p:cNvPicPr>
-            <a:picLocks noChangeAspect="1"/>
-          </p:cNvPicPr>
+              <a:t>How big a segment has to be</a:t>
+            </a:r>
+          </a:p>
+        </p:txBody>
+      </p:sp>
+      <p:sp>
+        <p:nvSpPr>
+          <p:cNvPr id="3" name="Rectangle 2"/>
+          <p:cNvSpPr/>
           <p:nvPr/>
-        </p:nvPicPr>
-        <p:blipFill>
-          <a:blip r:embed="rId2"/>
-          <a:stretch>
-            <a:fillRect/>
-          </a:stretch>
-        </p:blipFill>
-        <p:spPr>
-          <a:xfrm>
-            <a:off x="2442959" y="1417320"/>
-            <a:ext cx="7305777" cy="4343400"/>
+        </p:nvSpPr>
+        <p:spPr>
+          <a:xfrm>
+            <a:off x="822960" y="1276603"/>
+            <a:ext cx="1463040" cy="50800"/>
           </a:xfrm>
           <a:prstGeom prst="rect">
             <a:avLst/>
           </a:prstGeom>
-        </p:spPr>
-      </p:pic>
+          <a:solidFill>
+            <a:srgbClr val="005EB8"/>
+          </a:solidFill>
+          <a:ln>
+            <a:noFill/>
+          </a:ln>
+          <a:effectLst/>
+        </p:spPr>
+        <p:style>
+          <a:lnRef idx="1">
+            <a:schemeClr val="accent1"/>
+          </a:lnRef>
+          <a:fillRef idx="3">
+            <a:schemeClr val="accent1"/>
+          </a:fillRef>
+          <a:effectRef idx="2">
+            <a:schemeClr val="accent1"/>
+          </a:effectRef>
+          <a:fontRef idx="minor">
+            <a:schemeClr val="lt1"/>
+          </a:fontRef>
+        </p:style>
+        <p:txBody>
+          <a:bodyPr rtlCol="0" anchor="ctr"/>
+          <a:lstStyle/>
+          <a:p>
+            <a:pPr algn="ctr"/>
+          </a:p>
+        </p:txBody>
+      </p:sp>
       <p:sp>
         <p:nvSpPr>
           <p:cNvPr id="4" name="TextBox 3"/>
@@ -9227,8 +8638,8 @@
         </p:nvSpPr>
         <p:spPr>
           <a:xfrm>
-            <a:off x="1325880" y="5989320"/>
-            <a:ext cx="9509760" cy="640080"/>
+            <a:off x="822960" y="2057400"/>
+            <a:ext cx="10515600" cy="4023360"/>
           </a:xfrm>
           <a:prstGeom prst="rect">
             <a:avLst/>
@@ -9241,15 +8652,128 @@
           </a:bodyPr>
           <a:lstStyle/>
           <a:p>
-            <a:pPr algn="ctr"/>
-            <a:r>
-              <a:rPr sz="1600" b="0">
-                <a:solidFill>
-                  <a:srgbClr val="5A647A"/>
-                </a:solidFill>
-                <a:latin typeface="Helvetica Neue"/>
-              </a:rPr>
-              <a:t>Doubling the privacy budget is expensive. Four times the users is free.</a:t>
+            <a:pPr marL="342900" indent="-342900">
+              <a:spcAft>
+                <a:spcPts val="2000"/>
+              </a:spcAft>
+            </a:pPr>
+            <a:r>
+              <a:rPr sz="2400" b="1">
+                <a:solidFill>
+                  <a:srgbClr val="005EB8"/>
+                </a:solidFill>
+                <a:latin typeface="Helvetica Neue"/>
+              </a:rPr>
+              <a:t>-   </a:t>
+            </a:r>
+            <a:r>
+              <a:rPr sz="2400" b="0">
+                <a:solidFill>
+                  <a:srgbClr val="141B2D"/>
+                </a:solidFill>
+                <a:latin typeface="Helvetica Neue"/>
+              </a:rPr>
+              <a:t>Error drops below the spread of the index at roughly 2,500 users</a:t>
+            </a:r>
+          </a:p>
+          <a:p>
+            <a:pPr marL="342900" indent="-342900">
+              <a:spcAft>
+                <a:spcPts val="2000"/>
+              </a:spcAft>
+            </a:pPr>
+            <a:r>
+              <a:rPr sz="2400" b="1">
+                <a:solidFill>
+                  <a:srgbClr val="005EB8"/>
+                </a:solidFill>
+                <a:latin typeface="Helvetica Neue"/>
+              </a:rPr>
+              <a:t>-   </a:t>
+            </a:r>
+            <a:r>
+              <a:rPr sz="2400" b="0">
+                <a:solidFill>
+                  <a:srgbClr val="141B2D"/>
+                </a:solidFill>
+                <a:latin typeface="Helvetica Neue"/>
+              </a:rPr>
+              <a:t>That is at epsilon 1, and halving epsilon needs four times the users</a:t>
+            </a:r>
+          </a:p>
+          <a:p>
+            <a:pPr marL="342900" indent="-342900">
+              <a:spcAft>
+                <a:spcPts val="2000"/>
+              </a:spcAft>
+            </a:pPr>
+            <a:r>
+              <a:rPr sz="2400" b="1">
+                <a:solidFill>
+                  <a:srgbClr val="005EB8"/>
+                </a:solidFill>
+                <a:latin typeface="Helvetica Neue"/>
+              </a:rPr>
+              <a:t>-   </a:t>
+            </a:r>
+            <a:r>
+              <a:rPr sz="2400" b="0">
+                <a:solidFill>
+                  <a:srgbClr val="141B2D"/>
+                </a:solidFill>
+                <a:latin typeface="Helvetica Neue"/>
+              </a:rPr>
+              <a:t>Segments with thousands of users are measurable under LDP</a:t>
+            </a:r>
+          </a:p>
+          <a:p>
+            <a:pPr marL="342900" indent="-342900">
+              <a:spcAft>
+                <a:spcPts val="2000"/>
+              </a:spcAft>
+            </a:pPr>
+            <a:r>
+              <a:rPr sz="2400" b="1">
+                <a:solidFill>
+                  <a:srgbClr val="005EB8"/>
+                </a:solidFill>
+                <a:latin typeface="Helvetica Neue"/>
+              </a:rPr>
+              <a:t>-   </a:t>
+            </a:r>
+            <a:r>
+              <a:rPr sz="2400" b="0">
+                <a:solidFill>
+                  <a:srgbClr val="141B2D"/>
+                </a:solidFill>
+                <a:latin typeface="Helvetica Neue"/>
+              </a:rPr>
+              <a:t>Segments with dozens are not measurable</a:t>
+            </a:r>
+          </a:p>
+          <a:p>
+            <a:pPr marL="342900" indent="-342900">
+              <a:spcAft>
+                <a:spcPts val="2000"/>
+              </a:spcAft>
+            </a:pPr>
+            <a:r>
+              <a:rPr sz="2400" b="1">
+                <a:solidFill>
+                  <a:srgbClr val="005EB8"/>
+                </a:solidFill>
+                <a:latin typeface="Helvetica Neue"/>
+              </a:rPr>
+              <a:t>-   </a:t>
+            </a:r>
+            <a:r>
+              <a:rPr sz="2400" b="0">
+                <a:solidFill>
+                  <a:srgbClr val="141B2D"/>
+                </a:solidFill>
+                <a:latin typeface="Helvetica Neue"/>
+              </a:rPr>
+              <a:t>Your head terms work, but your long tail does not</a:t>
             </a:r>
           </a:p>
         </p:txBody>
@@ -9323,8 +8847,8 @@
         </p:nvSpPr>
         <p:spPr>
           <a:xfrm>
-            <a:off x="822960" y="640080"/>
-            <a:ext cx="10515600" cy="960120"/>
+            <a:off x="1005840" y="2286000"/>
+            <a:ext cx="10149840" cy="2377440"/>
           </a:xfrm>
           <a:prstGeom prst="rect">
             <a:avLst/>
@@ -9337,213 +8861,42 @@
           </a:bodyPr>
           <a:lstStyle/>
           <a:p>
-            <a:r>
-              <a:rPr sz="3400" b="1">
-                <a:solidFill>
-                  <a:srgbClr val="141B2D"/>
-                </a:solidFill>
-                <a:latin typeface="Helvetica Neue"/>
-              </a:rPr>
-              <a:t>How big a segment has to be</a:t>
-            </a:r>
-          </a:p>
-        </p:txBody>
-      </p:sp>
-      <p:sp>
-        <p:nvSpPr>
-          <p:cNvPr id="3" name="Rectangle 2"/>
-          <p:cNvSpPr/>
-          <p:nvPr/>
-        </p:nvSpPr>
-        <p:spPr>
-          <a:xfrm>
-            <a:off x="822960" y="1276603"/>
-            <a:ext cx="1463040" cy="50800"/>
-          </a:xfrm>
-          <a:prstGeom prst="rect">
-            <a:avLst/>
-          </a:prstGeom>
-          <a:solidFill>
-            <a:srgbClr val="005EB8"/>
-          </a:solidFill>
-          <a:ln>
-            <a:noFill/>
-          </a:ln>
-          <a:effectLst/>
-        </p:spPr>
-        <p:style>
-          <a:lnRef idx="1">
-            <a:schemeClr val="accent1"/>
-          </a:lnRef>
-          <a:fillRef idx="3">
-            <a:schemeClr val="accent1"/>
-          </a:fillRef>
-          <a:effectRef idx="2">
-            <a:schemeClr val="accent1"/>
-          </a:effectRef>
-          <a:fontRef idx="minor">
-            <a:schemeClr val="lt1"/>
-          </a:fontRef>
-        </p:style>
-        <p:txBody>
-          <a:bodyPr rtlCol="0" anchor="ctr"/>
-          <a:lstStyle/>
-          <a:p>
-            <a:pPr algn="ctr"/>
-          </a:p>
-        </p:txBody>
-      </p:sp>
-      <p:sp>
-        <p:nvSpPr>
-          <p:cNvPr id="4" name="TextBox 3"/>
-          <p:cNvSpPr txBox="1"/>
-          <p:nvPr/>
-        </p:nvSpPr>
-        <p:spPr>
-          <a:xfrm>
-            <a:off x="822960" y="2057400"/>
-            <a:ext cx="10515600" cy="4023360"/>
-          </a:xfrm>
-          <a:prstGeom prst="rect">
-            <a:avLst/>
-          </a:prstGeom>
-          <a:noFill/>
-        </p:spPr>
-        <p:txBody>
-          <a:bodyPr wrap="square">
-            <a:spAutoFit/>
-          </a:bodyPr>
-          <a:lstStyle/>
-          <a:p>
-            <a:pPr marL="342900" indent="-342900">
+            <a:pPr>
               <a:spcAft>
-                <a:spcPts val="2000"/>
+                <a:spcPts val="1600"/>
               </a:spcAft>
             </a:pPr>
             <a:r>
-              <a:rPr sz="2400" b="1">
-                <a:solidFill>
-                  <a:srgbClr val="005EB8"/>
-                </a:solidFill>
-                <a:latin typeface="Helvetica Neue"/>
-              </a:rPr>
-              <a:t>-   </a:t>
-            </a:r>
-            <a:r>
-              <a:rPr sz="2400" b="0">
+              <a:rPr sz="3400" b="1">
                 <a:solidFill>
                   <a:srgbClr val="141B2D"/>
                 </a:solidFill>
                 <a:latin typeface="Helvetica Neue"/>
               </a:rPr>
-              <a:t>Error drops below the spread of the index at roughly 2,500 users</a:t>
-            </a:r>
-          </a:p>
-          <a:p>
-            <a:pPr marL="342900" indent="-342900">
+              <a:t>LDP does not cost you your analytics.</a:t>
+            </a:r>
+          </a:p>
+          <a:p>
+            <a:pPr>
               <a:spcAft>
-                <a:spcPts val="2000"/>
+                <a:spcPts val="1600"/>
               </a:spcAft>
             </a:pPr>
             <a:r>
-              <a:rPr sz="2400" b="1">
+              <a:rPr sz="3400" b="0">
                 <a:solidFill>
                   <a:srgbClr val="005EB8"/>
                 </a:solidFill>
                 <a:latin typeface="Helvetica Neue"/>
               </a:rPr>
-              <a:t>-   </a:t>
-            </a:r>
-            <a:r>
-              <a:rPr sz="2400" b="0">
-                <a:solidFill>
-                  <a:srgbClr val="141B2D"/>
-                </a:solidFill>
-                <a:latin typeface="Helvetica Neue"/>
-              </a:rPr>
-              <a:t>That is at epsilon 1, and halving epsilon needs four times the users</a:t>
-            </a:r>
-          </a:p>
-          <a:p>
-            <a:pPr marL="342900" indent="-342900">
-              <a:spcAft>
-                <a:spcPts val="2000"/>
-              </a:spcAft>
-            </a:pPr>
-            <a:r>
-              <a:rPr sz="2400" b="1">
-                <a:solidFill>
-                  <a:srgbClr val="005EB8"/>
-                </a:solidFill>
-                <a:latin typeface="Helvetica Neue"/>
-              </a:rPr>
-              <a:t>-   </a:t>
-            </a:r>
-            <a:r>
-              <a:rPr sz="2400" b="0">
-                <a:solidFill>
-                  <a:srgbClr val="141B2D"/>
-                </a:solidFill>
-                <a:latin typeface="Helvetica Neue"/>
-              </a:rPr>
-              <a:t>Segments with thousands of users are measurable under LDP</a:t>
-            </a:r>
-          </a:p>
-          <a:p>
-            <a:pPr marL="342900" indent="-342900">
-              <a:spcAft>
-                <a:spcPts val="2000"/>
-              </a:spcAft>
-            </a:pPr>
-            <a:r>
-              <a:rPr sz="2400" b="1">
-                <a:solidFill>
-                  <a:srgbClr val="005EB8"/>
-                </a:solidFill>
-                <a:latin typeface="Helvetica Neue"/>
-              </a:rPr>
-              <a:t>-   </a:t>
-            </a:r>
-            <a:r>
-              <a:rPr sz="2400" b="0">
-                <a:solidFill>
-                  <a:srgbClr val="141B2D"/>
-                </a:solidFill>
-                <a:latin typeface="Helvetica Neue"/>
-              </a:rPr>
-              <a:t>Segments with dozens are not measurable</a:t>
-            </a:r>
-          </a:p>
-          <a:p>
-            <a:pPr marL="342900" indent="-342900">
-              <a:spcAft>
-                <a:spcPts val="2000"/>
-              </a:spcAft>
-            </a:pPr>
-            <a:r>
-              <a:rPr sz="2400" b="1">
-                <a:solidFill>
-                  <a:srgbClr val="005EB8"/>
-                </a:solidFill>
-                <a:latin typeface="Helvetica Neue"/>
-              </a:rPr>
-              <a:t>-   </a:t>
-            </a:r>
-            <a:r>
-              <a:rPr sz="2400" b="0">
-                <a:solidFill>
-                  <a:srgbClr val="141B2D"/>
-                </a:solidFill>
-                <a:latin typeface="Helvetica Neue"/>
-              </a:rPr>
-              <a:t>Your head terms work, but your long tail does not</a:t>
-            </a:r>
-          </a:p>
-        </p:txBody>
-      </p:sp>
-      <p:sp>
-        <p:nvSpPr>
-          <p:cNvPr id="5" name="TextBox 4"/>
+              <a:t>It costs you the ability to ask about one person.</a:t>
+            </a:r>
+          </a:p>
+        </p:txBody>
+      </p:sp>
+      <p:sp>
+        <p:nvSpPr>
+          <p:cNvPr id="3" name="TextBox 2"/>
           <p:cNvSpPr txBox="1"/>
           <p:nvPr/>
         </p:nvSpPr>
@@ -9585,6 +8938,117 @@
 </file>
 
 <file path=ppt/slides/slide25.xml><?xml version="1.0" encoding="utf-8"?>
+<p:sld xmlns:a="http://schemas.openxmlformats.org/drawingml/2006/main" xmlns:p="http://schemas.openxmlformats.org/presentationml/2006/main" xmlns:r="http://schemas.openxmlformats.org/officeDocument/2006/relationships">
+  <p:cSld>
+    <p:bg>
+      <p:bgPr>
+        <a:solidFill>
+          <a:srgbClr val="0E1A2F"/>
+        </a:solidFill>
+        <a:effectLst/>
+      </p:bgPr>
+    </p:bg>
+    <p:spTree>
+      <p:nvGrpSpPr>
+        <p:cNvPr id="1" name=""/>
+        <p:cNvGrpSpPr/>
+        <p:nvPr/>
+      </p:nvGrpSpPr>
+      <p:grpSpPr/>
+      <p:sp>
+        <p:nvSpPr>
+          <p:cNvPr id="2" name="TextBox 1"/>
+          <p:cNvSpPr txBox="1"/>
+          <p:nvPr/>
+        </p:nvSpPr>
+        <p:spPr>
+          <a:xfrm>
+            <a:off x="822960" y="2560320"/>
+            <a:ext cx="10515600" cy="1828800"/>
+          </a:xfrm>
+          <a:prstGeom prst="rect">
+            <a:avLst/>
+          </a:prstGeom>
+          <a:noFill/>
+        </p:spPr>
+        <p:txBody>
+          <a:bodyPr wrap="square">
+            <a:spAutoFit/>
+          </a:bodyPr>
+          <a:lstStyle/>
+          <a:p>
+            <a:r>
+              <a:rPr sz="1800" b="1">
+                <a:solidFill>
+                  <a:srgbClr val="5A9BE8"/>
+                </a:solidFill>
+                <a:latin typeface="Helvetica Neue"/>
+              </a:rPr>
+              <a:t>PART 6</a:t>
+            </a:r>
+          </a:p>
+          <a:p>
+            <a:pPr>
+              <a:spcBef>
+                <a:spcPts val="1000"/>
+              </a:spcBef>
+            </a:pPr>
+            <a:r>
+              <a:rPr sz="4200" b="1">
+                <a:solidFill>
+                  <a:srgbClr val="FFFFFF"/>
+                </a:solidFill>
+                <a:latin typeface="Helvetica Neue"/>
+              </a:rPr>
+              <a:t>Back to OpenSearch, and the limits</a:t>
+            </a:r>
+          </a:p>
+        </p:txBody>
+      </p:sp>
+      <p:sp>
+        <p:nvSpPr>
+          <p:cNvPr id="3" name="TextBox 2"/>
+          <p:cNvSpPr txBox="1"/>
+          <p:nvPr/>
+        </p:nvSpPr>
+        <p:spPr>
+          <a:xfrm>
+            <a:off x="10405872" y="6144768"/>
+            <a:ext cx="960120" cy="411480"/>
+          </a:xfrm>
+          <a:prstGeom prst="rect">
+            <a:avLst/>
+          </a:prstGeom>
+          <a:noFill/>
+        </p:spPr>
+        <p:txBody>
+          <a:bodyPr wrap="square">
+            <a:spAutoFit/>
+          </a:bodyPr>
+          <a:lstStyle/>
+          <a:p>
+            <a:pPr algn="r"/>
+            <a:r>
+              <a:rPr sz="1300" b="0">
+                <a:solidFill>
+                  <a:srgbClr val="6E7C93"/>
+                </a:solidFill>
+                <a:latin typeface="Helvetica Neue"/>
+              </a:rPr>
+              <a:t>25</a:t>
+            </a:r>
+          </a:p>
+        </p:txBody>
+      </p:sp>
+    </p:spTree>
+  </p:cSld>
+  <p:clrMapOvr>
+    <a:masterClrMapping/>
+  </p:clrMapOvr>
+</p:sld>
+</file>
+
+<file path=ppt/slides/slide26.xml><?xml version="1.0" encoding="utf-8"?>
 <p:sld xmlns:a="http://schemas.openxmlformats.org/drawingml/2006/main" xmlns:p="http://schemas.openxmlformats.org/presentationml/2006/main" xmlns:r="http://schemas.openxmlformats.org/officeDocument/2006/relationships">
   <p:cSld>
     <p:bg>
@@ -9610,8 +9074,8 @@
         </p:nvSpPr>
         <p:spPr>
           <a:xfrm>
-            <a:off x="1005840" y="2286000"/>
-            <a:ext cx="10149840" cy="2377440"/>
+            <a:off x="822960" y="640080"/>
+            <a:ext cx="10515600" cy="960120"/>
           </a:xfrm>
           <a:prstGeom prst="rect">
             <a:avLst/>
@@ -9624,11 +9088,6 @@
           </a:bodyPr>
           <a:lstStyle/>
           <a:p>
-            <a:pPr>
-              <a:spcAft>
-                <a:spcPts val="1600"/>
-              </a:spcAft>
-            </a:pPr>
             <a:r>
               <a:rPr sz="3400" b="1">
                 <a:solidFill>
@@ -9636,37 +9095,65 @@
                 </a:solidFill>
                 <a:latin typeface="Helvetica Neue"/>
               </a:rPr>
-              <a:t>LDP does not cost you your analytics.</a:t>
-            </a:r>
-          </a:p>
-          <a:p>
-            <a:pPr>
-              <a:spcAft>
-                <a:spcPts val="1600"/>
-              </a:spcAft>
-            </a:pPr>
-            <a:r>
-              <a:rPr sz="3400" b="0">
-                <a:solidFill>
-                  <a:srgbClr val="005EB8"/>
-                </a:solidFill>
-                <a:latin typeface="Helvetica Neue"/>
-              </a:rPr>
-              <a:t>It costs you the ability to ask about one person.</a:t>
-            </a:r>
-          </a:p>
-        </p:txBody>
-      </p:sp>
-      <p:sp>
-        <p:nvSpPr>
-          <p:cNvPr id="3" name="TextBox 2"/>
+              <a:t>Where the noise gets injected</a:t>
+            </a:r>
+          </a:p>
+        </p:txBody>
+      </p:sp>
+      <p:sp>
+        <p:nvSpPr>
+          <p:cNvPr id="3" name="Rectangle 2"/>
+          <p:cNvSpPr/>
+          <p:nvPr/>
+        </p:nvSpPr>
+        <p:spPr>
+          <a:xfrm>
+            <a:off x="822960" y="1276603"/>
+            <a:ext cx="1463040" cy="50800"/>
+          </a:xfrm>
+          <a:prstGeom prst="rect">
+            <a:avLst/>
+          </a:prstGeom>
+          <a:solidFill>
+            <a:srgbClr val="005EB8"/>
+          </a:solidFill>
+          <a:ln>
+            <a:noFill/>
+          </a:ln>
+          <a:effectLst/>
+        </p:spPr>
+        <p:style>
+          <a:lnRef idx="1">
+            <a:schemeClr val="accent1"/>
+          </a:lnRef>
+          <a:fillRef idx="3">
+            <a:schemeClr val="accent1"/>
+          </a:fillRef>
+          <a:effectRef idx="2">
+            <a:schemeClr val="accent1"/>
+          </a:effectRef>
+          <a:fontRef idx="minor">
+            <a:schemeClr val="lt1"/>
+          </a:fontRef>
+        </p:style>
+        <p:txBody>
+          <a:bodyPr rtlCol="0" anchor="ctr"/>
+          <a:lstStyle/>
+          <a:p>
+            <a:pPr algn="ctr"/>
+          </a:p>
+        </p:txBody>
+      </p:sp>
+      <p:sp>
+        <p:nvSpPr>
+          <p:cNvPr id="4" name="TextBox 3"/>
           <p:cNvSpPr txBox="1"/>
           <p:nvPr/>
         </p:nvSpPr>
         <p:spPr>
           <a:xfrm>
-            <a:off x="10405872" y="6144768"/>
-            <a:ext cx="960120" cy="411480"/>
+            <a:off x="822960" y="2057400"/>
+            <a:ext cx="5120640" cy="4023360"/>
           </a:xfrm>
           <a:prstGeom prst="rect">
             <a:avLst/>
@@ -9679,55 +9166,159 @@
           </a:bodyPr>
           <a:lstStyle/>
           <a:p>
-            <a:pPr algn="r"/>
-            <a:r>
-              <a:rPr sz="1300" b="0">
-                <a:solidFill>
-                  <a:srgbClr val="5A647A"/>
-                </a:solidFill>
-                <a:latin typeface="Helvetica Neue"/>
-              </a:rPr>
-              <a:t>25</a:t>
-            </a:r>
-          </a:p>
-        </p:txBody>
-      </p:sp>
-    </p:spTree>
-  </p:cSld>
-  <p:clrMapOvr>
-    <a:masterClrMapping/>
-  </p:clrMapOvr>
-</p:sld>
-</file>
-
-<file path=ppt/slides/slide26.xml><?xml version="1.0" encoding="utf-8"?>
-<p:sld xmlns:a="http://schemas.openxmlformats.org/drawingml/2006/main" xmlns:p="http://schemas.openxmlformats.org/presentationml/2006/main" xmlns:r="http://schemas.openxmlformats.org/officeDocument/2006/relationships">
-  <p:cSld>
-    <p:bg>
-      <p:bgPr>
-        <a:solidFill>
-          <a:srgbClr val="0E1A2F"/>
-        </a:solidFill>
-        <a:effectLst/>
-      </p:bgPr>
-    </p:bg>
-    <p:spTree>
-      <p:nvGrpSpPr>
-        <p:cNvPr id="1" name=""/>
-        <p:cNvGrpSpPr/>
-        <p:nvPr/>
-      </p:nvGrpSpPr>
-      <p:grpSpPr/>
-      <p:sp>
-        <p:nvSpPr>
-          <p:cNvPr id="2" name="TextBox 1"/>
+            <a:pPr marL="342900" indent="-342900">
+              <a:spcAft>
+                <a:spcPts val="1400"/>
+              </a:spcAft>
+            </a:pPr>
+            <a:r>
+              <a:rPr sz="2100" b="1">
+                <a:solidFill>
+                  <a:srgbClr val="005EB8"/>
+                </a:solidFill>
+                <a:latin typeface="Helvetica Neue"/>
+              </a:rPr>
+              <a:t>-   </a:t>
+            </a:r>
+            <a:r>
+              <a:rPr sz="2100" b="0">
+                <a:solidFill>
+                  <a:srgbClr val="141B2D"/>
+                </a:solidFill>
+                <a:latin typeface="Helvetica Neue"/>
+              </a:rPr>
+              <a:t>On the device, before </a:t>
+            </a:r>
+            <a:r>
+              <a:rPr sz="1900" b="0">
+                <a:solidFill>
+                  <a:srgbClr val="141B2D"/>
+                </a:solidFill>
+                <a:latin typeface="Consolas"/>
+              </a:rPr>
+              <a:t>ubi.js</a:t>
+            </a:r>
+            <a:r>
+              <a:rPr sz="2100" b="0">
+                <a:solidFill>
+                  <a:srgbClr val="141B2D"/>
+                </a:solidFill>
+                <a:latin typeface="Helvetica Neue"/>
+              </a:rPr>
+              <a:t> sends the event</a:t>
+            </a:r>
+          </a:p>
+          <a:p>
+            <a:pPr marL="342900" indent="-342900">
+              <a:spcAft>
+                <a:spcPts val="1400"/>
+              </a:spcAft>
+            </a:pPr>
+            <a:r>
+              <a:rPr sz="2100" b="1">
+                <a:solidFill>
+                  <a:srgbClr val="005EB8"/>
+                </a:solidFill>
+                <a:latin typeface="Helvetica Neue"/>
+              </a:rPr>
+              <a:t>-   </a:t>
+            </a:r>
+            <a:r>
+              <a:rPr sz="2100" b="0">
+                <a:solidFill>
+                  <a:srgbClr val="141B2D"/>
+                </a:solidFill>
+                <a:latin typeface="Helvetica Neue"/>
+              </a:rPr>
+              <a:t>Aggregation happens at query time over the noised data</a:t>
+            </a:r>
+          </a:p>
+          <a:p>
+            <a:pPr marL="342900" indent="-342900">
+              <a:spcAft>
+                <a:spcPts val="1400"/>
+              </a:spcAft>
+            </a:pPr>
+            <a:r>
+              <a:rPr sz="2100" b="1">
+                <a:solidFill>
+                  <a:srgbClr val="005EB8"/>
+                </a:solidFill>
+                <a:latin typeface="Helvetica Neue"/>
+              </a:rPr>
+              <a:t>-   </a:t>
+            </a:r>
+            <a:r>
+              <a:rPr sz="2100" b="0">
+                <a:solidFill>
+                  <a:srgbClr val="141B2D"/>
+                </a:solidFill>
+                <a:latin typeface="Helvetica Neue"/>
+              </a:rPr>
+              <a:t>Nothing downstream needs to be trusted, because nothing downstream has the original</a:t>
+            </a:r>
+          </a:p>
+          <a:p>
+            <a:pPr marL="342900" indent="-342900">
+              <a:spcAft>
+                <a:spcPts val="1400"/>
+              </a:spcAft>
+            </a:pPr>
+            <a:r>
+              <a:rPr sz="2100" b="1">
+                <a:solidFill>
+                  <a:srgbClr val="005EB8"/>
+                </a:solidFill>
+                <a:latin typeface="Helvetica Neue"/>
+              </a:rPr>
+              <a:t>-   </a:t>
+            </a:r>
+            <a:r>
+              <a:rPr sz="2100" b="0">
+                <a:solidFill>
+                  <a:srgbClr val="141B2D"/>
+                </a:solidFill>
+                <a:latin typeface="Helvetica Neue"/>
+              </a:rPr>
+              <a:t>You set epsilon in the client you ship</a:t>
+            </a:r>
+          </a:p>
+        </p:txBody>
+      </p:sp>
+      <p:pic>
+        <p:nvPicPr>
+          <p:cNvPr id="5" name="Picture 4" descr="28_trust_boundary.png"/>
+          <p:cNvPicPr>
+            <a:picLocks noChangeAspect="1"/>
+          </p:cNvPicPr>
+          <p:nvPr/>
+        </p:nvPicPr>
+        <p:blipFill>
+          <a:blip r:embed="rId2"/>
+          <a:stretch>
+            <a:fillRect/>
+          </a:stretch>
+        </p:blipFill>
+        <p:spPr>
+          <a:xfrm>
+            <a:off x="6263640" y="2177248"/>
+            <a:ext cx="5029200" cy="3417902"/>
+          </a:xfrm>
+          <a:prstGeom prst="rect">
+            <a:avLst/>
+          </a:prstGeom>
+        </p:spPr>
+      </p:pic>
+      <p:sp>
+        <p:nvSpPr>
+          <p:cNvPr id="6" name="TextBox 5"/>
           <p:cNvSpPr txBox="1"/>
           <p:nvPr/>
         </p:nvSpPr>
         <p:spPr>
           <a:xfrm>
-            <a:off x="822960" y="2560320"/>
-            <a:ext cx="10515600" cy="1828800"/>
+            <a:off x="822960" y="5989320"/>
+            <a:ext cx="8961120" cy="502920"/>
           </a:xfrm>
           <a:prstGeom prst="rect">
             <a:avLst/>
@@ -9741,36 +9332,29 @@
           <a:lstStyle/>
           <a:p>
             <a:r>
-              <a:rPr sz="1800" b="1">
-                <a:solidFill>
-                  <a:srgbClr val="5A9BE8"/>
-                </a:solidFill>
-                <a:latin typeface="Helvetica Neue"/>
-              </a:rPr>
-              <a:t>PART 6</a:t>
-            </a:r>
-          </a:p>
-          <a:p>
-            <a:pPr>
-              <a:spcBef>
-                <a:spcPts val="1000"/>
-              </a:spcBef>
-            </a:pPr>
-            <a:r>
-              <a:rPr sz="4200" b="1">
-                <a:solidFill>
-                  <a:srgbClr val="FFFFFF"/>
-                </a:solidFill>
-                <a:latin typeface="Helvetica Neue"/>
-              </a:rPr>
-              <a:t>Back to OpenSearch, and the limits</a:t>
-            </a:r>
-          </a:p>
-        </p:txBody>
-      </p:sp>
-      <p:sp>
-        <p:nvSpPr>
-          <p:cNvPr id="3" name="TextBox 2"/>
+              <a:rPr sz="1400" b="0">
+                <a:solidFill>
+                  <a:srgbClr val="5A647A"/>
+                </a:solidFill>
+                <a:latin typeface="Helvetica Neue"/>
+              </a:rPr>
+              <a:t>An upcoming UBI RFC will bring this capability into </a:t>
+            </a:r>
+            <a:r>
+              <a:rPr sz="1200" b="0">
+                <a:solidFill>
+                  <a:srgbClr val="5A647A"/>
+                </a:solidFill>
+                <a:latin typeface="Consolas"/>
+              </a:rPr>
+              <a:t>ubi.js</a:t>
+            </a:r>
+          </a:p>
+        </p:txBody>
+      </p:sp>
+      <p:sp>
+        <p:nvSpPr>
+          <p:cNvPr id="7" name="TextBox 6"/>
           <p:cNvSpPr txBox="1"/>
           <p:nvPr/>
         </p:nvSpPr>
@@ -9794,7 +9378,7 @@
             <a:r>
               <a:rPr sz="1300" b="0">
                 <a:solidFill>
-                  <a:srgbClr val="6E7C93"/>
+                  <a:srgbClr val="5A647A"/>
                 </a:solidFill>
                 <a:latin typeface="Helvetica Neue"/>
               </a:rPr>
@@ -9837,8 +9421,8 @@
         </p:nvSpPr>
         <p:spPr>
           <a:xfrm>
-            <a:off x="822960" y="640080"/>
-            <a:ext cx="10515600" cy="960120"/>
+            <a:off x="822960" y="411480"/>
+            <a:ext cx="10515600" cy="822960"/>
           </a:xfrm>
           <a:prstGeom prst="rect">
             <a:avLst/>
@@ -9852,248 +9436,20 @@
           <a:lstStyle/>
           <a:p>
             <a:r>
-              <a:rPr sz="3400" b="1">
+              <a:rPr sz="3000" b="1">
                 <a:solidFill>
                   <a:srgbClr val="141B2D"/>
                 </a:solidFill>
                 <a:latin typeface="Helvetica Neue"/>
               </a:rPr>
-              <a:t>Where the noise gets injected</a:t>
-            </a:r>
-          </a:p>
-        </p:txBody>
-      </p:sp>
-      <p:sp>
-        <p:nvSpPr>
-          <p:cNvPr id="3" name="Rectangle 2"/>
-          <p:cNvSpPr/>
-          <p:nvPr/>
-        </p:nvSpPr>
-        <p:spPr>
-          <a:xfrm>
-            <a:off x="822960" y="1276603"/>
-            <a:ext cx="1463040" cy="50800"/>
-          </a:xfrm>
-          <a:prstGeom prst="rect">
-            <a:avLst/>
-          </a:prstGeom>
-          <a:solidFill>
-            <a:srgbClr val="005EB8"/>
-          </a:solidFill>
-          <a:ln>
-            <a:noFill/>
-          </a:ln>
-          <a:effectLst/>
-        </p:spPr>
-        <p:style>
-          <a:lnRef idx="1">
-            <a:schemeClr val="accent1"/>
-          </a:lnRef>
-          <a:fillRef idx="3">
-            <a:schemeClr val="accent1"/>
-          </a:fillRef>
-          <a:effectRef idx="2">
-            <a:schemeClr val="accent1"/>
-          </a:effectRef>
-          <a:fontRef idx="minor">
-            <a:schemeClr val="lt1"/>
-          </a:fontRef>
-        </p:style>
-        <p:txBody>
-          <a:bodyPr rtlCol="0" anchor="ctr"/>
-          <a:lstStyle/>
-          <a:p>
-            <a:pPr algn="ctr"/>
-          </a:p>
-        </p:txBody>
-      </p:sp>
-      <p:sp>
-        <p:nvSpPr>
-          <p:cNvPr id="4" name="TextBox 3"/>
-          <p:cNvSpPr txBox="1"/>
-          <p:nvPr/>
-        </p:nvSpPr>
-        <p:spPr>
-          <a:xfrm>
-            <a:off x="822960" y="2057400"/>
-            <a:ext cx="5120640" cy="4023360"/>
-          </a:xfrm>
-          <a:prstGeom prst="rect">
-            <a:avLst/>
-          </a:prstGeom>
-          <a:noFill/>
-        </p:spPr>
-        <p:txBody>
-          <a:bodyPr wrap="square">
-            <a:spAutoFit/>
-          </a:bodyPr>
-          <a:lstStyle/>
-          <a:p>
-            <a:pPr marL="342900" indent="-342900">
-              <a:spcAft>
-                <a:spcPts val="1400"/>
-              </a:spcAft>
-            </a:pPr>
-            <a:r>
-              <a:rPr sz="2100" b="1">
-                <a:solidFill>
-                  <a:srgbClr val="005EB8"/>
-                </a:solidFill>
-                <a:latin typeface="Helvetica Neue"/>
-              </a:rPr>
-              <a:t>-   </a:t>
-            </a:r>
-            <a:r>
-              <a:rPr sz="2100" b="0">
-                <a:solidFill>
-                  <a:srgbClr val="141B2D"/>
-                </a:solidFill>
-                <a:latin typeface="Helvetica Neue"/>
-              </a:rPr>
-              <a:t>In </a:t>
-            </a:r>
-            <a:r>
-              <a:rPr sz="1900" b="0">
-                <a:solidFill>
-                  <a:srgbClr val="141B2D"/>
-                </a:solidFill>
-                <a:latin typeface="Consolas"/>
-              </a:rPr>
-              <a:t>ubi.js</a:t>
-            </a:r>
-            <a:r>
-              <a:rPr sz="2100" b="0">
-                <a:solidFill>
-                  <a:srgbClr val="141B2D"/>
-                </a:solidFill>
-                <a:latin typeface="Helvetica Neue"/>
-              </a:rPr>
-              <a:t>, on the device, before the event is sent</a:t>
-            </a:r>
-          </a:p>
-          <a:p>
-            <a:pPr marL="342900" indent="-342900">
-              <a:spcAft>
-                <a:spcPts val="1400"/>
-              </a:spcAft>
-            </a:pPr>
-            <a:r>
-              <a:rPr sz="2100" b="1">
-                <a:solidFill>
-                  <a:srgbClr val="005EB8"/>
-                </a:solidFill>
-                <a:latin typeface="Helvetica Neue"/>
-              </a:rPr>
-              <a:t>-   </a:t>
-            </a:r>
-            <a:r>
-              <a:rPr sz="2100" b="0">
-                <a:solidFill>
-                  <a:srgbClr val="141B2D"/>
-                </a:solidFill>
-                <a:latin typeface="Helvetica Neue"/>
-              </a:rPr>
-              <a:t>The cluster stores noised vectors and never sees the raw query</a:t>
-            </a:r>
-          </a:p>
-          <a:p>
-            <a:pPr marL="342900" indent="-342900">
-              <a:spcAft>
-                <a:spcPts val="1400"/>
-              </a:spcAft>
-            </a:pPr>
-            <a:r>
-              <a:rPr sz="2100" b="1">
-                <a:solidFill>
-                  <a:srgbClr val="005EB8"/>
-                </a:solidFill>
-                <a:latin typeface="Helvetica Neue"/>
-              </a:rPr>
-              <a:t>-   </a:t>
-            </a:r>
-            <a:r>
-              <a:rPr sz="2100" b="0">
-                <a:solidFill>
-                  <a:srgbClr val="141B2D"/>
-                </a:solidFill>
-                <a:latin typeface="Helvetica Neue"/>
-              </a:rPr>
-              <a:t>Aggregation happens at query time over the noised data</a:t>
-            </a:r>
-          </a:p>
-          <a:p>
-            <a:pPr marL="342900" indent="-342900">
-              <a:spcAft>
-                <a:spcPts val="1400"/>
-              </a:spcAft>
-            </a:pPr>
-            <a:r>
-              <a:rPr sz="2100" b="1">
-                <a:solidFill>
-                  <a:srgbClr val="005EB8"/>
-                </a:solidFill>
-                <a:latin typeface="Helvetica Neue"/>
-              </a:rPr>
-              <a:t>-   </a:t>
-            </a:r>
-            <a:r>
-              <a:rPr sz="2100" b="0">
-                <a:solidFill>
-                  <a:srgbClr val="141B2D"/>
-                </a:solidFill>
-                <a:latin typeface="Helvetica Neue"/>
-              </a:rPr>
-              <a:t>Nothing downstream needs to be trusted, because nothing downstream has the original</a:t>
-            </a:r>
-          </a:p>
-          <a:p>
-            <a:pPr marL="342900" indent="-342900">
-              <a:spcAft>
-                <a:spcPts val="1400"/>
-              </a:spcAft>
-            </a:pPr>
-            <a:r>
-              <a:rPr sz="2100" b="1">
-                <a:solidFill>
-                  <a:srgbClr val="005EB8"/>
-                </a:solidFill>
-                <a:latin typeface="Helvetica Neue"/>
-              </a:rPr>
-              <a:t>-   </a:t>
-            </a:r>
-            <a:r>
-              <a:rPr sz="2100" b="0">
-                <a:solidFill>
-                  <a:srgbClr val="141B2D"/>
-                </a:solidFill>
-                <a:latin typeface="Helvetica Neue"/>
-              </a:rPr>
-              <a:t>You set epsilon in </a:t>
-            </a:r>
-            <a:r>
-              <a:rPr sz="1900" b="0">
-                <a:solidFill>
-                  <a:srgbClr val="141B2D"/>
-                </a:solidFill>
-                <a:latin typeface="Consolas"/>
-              </a:rPr>
-              <a:t>ubi.js</a:t>
-            </a:r>
-            <a:r>
-              <a:rPr sz="2100" b="0">
-                <a:solidFill>
-                  <a:srgbClr val="141B2D"/>
-                </a:solidFill>
-                <a:latin typeface="Helvetica Neue"/>
-              </a:rPr>
-              <a:t>, so anyone can read the value you shipped</a:t>
+              <a:t>What changes in ubi_queries</a:t>
             </a:r>
           </a:p>
         </p:txBody>
       </p:sp>
       <p:pic>
         <p:nvPicPr>
-          <p:cNvPr id="5" name="Picture 4" descr="28_trust_boundary.png"/>
+          <p:cNvPr id="3" name="Picture 2" descr="28_ubi_document.png"/>
           <p:cNvPicPr>
             <a:picLocks noChangeAspect="1"/>
           </p:cNvPicPr>
@@ -10107,8 +9463,8 @@
         </p:blipFill>
         <p:spPr>
           <a:xfrm>
-            <a:off x="6263640" y="2177248"/>
-            <a:ext cx="5029200" cy="3417902"/>
+            <a:off x="1070391" y="1417320"/>
+            <a:ext cx="10050912" cy="4343400"/>
           </a:xfrm>
           <a:prstGeom prst="rect">
             <a:avLst/>
@@ -10117,7 +9473,59 @@
       </p:pic>
       <p:sp>
         <p:nvSpPr>
-          <p:cNvPr id="6" name="TextBox 5"/>
+          <p:cNvPr id="4" name="TextBox 3"/>
+          <p:cNvSpPr txBox="1"/>
+          <p:nvPr/>
+        </p:nvSpPr>
+        <p:spPr>
+          <a:xfrm>
+            <a:off x="822960" y="5989320"/>
+            <a:ext cx="8961120" cy="502920"/>
+          </a:xfrm>
+          <a:prstGeom prst="rect">
+            <a:avLst/>
+          </a:prstGeom>
+          <a:noFill/>
+        </p:spPr>
+        <p:txBody>
+          <a:bodyPr wrap="square">
+            <a:spAutoFit/>
+          </a:bodyPr>
+          <a:lstStyle/>
+          <a:p>
+            <a:r>
+              <a:rPr sz="1400" b="0">
+                <a:solidFill>
+                  <a:srgbClr val="5A647A"/>
+                </a:solidFill>
+                <a:latin typeface="Helvetica Neue"/>
+              </a:rPr>
+              <a:t>UBI supports this today through </a:t>
+            </a:r>
+            <a:r>
+              <a:rPr sz="1200" b="0">
+                <a:solidFill>
+                  <a:srgbClr val="5A647A"/>
+                </a:solidFill>
+                <a:latin typeface="Consolas"/>
+              </a:rPr>
+              <a:t>query_attributes</a:t>
+            </a:r>
+            <a:r>
+              <a:rPr sz="1400" b="0">
+                <a:solidFill>
+                  <a:srgbClr val="5A647A"/>
+                </a:solidFill>
+                <a:latin typeface="Helvetica Neue"/>
+              </a:rPr>
+              <a:t>, and the RFC will make it first-class</a:t>
+            </a:r>
+          </a:p>
+        </p:txBody>
+      </p:sp>
+      <p:sp>
+        <p:nvSpPr>
+          <p:cNvPr id="5" name="TextBox 4"/>
           <p:cNvSpPr txBox="1"/>
           <p:nvPr/>
         </p:nvSpPr>
@@ -10347,7 +9755,7 @@
                 </a:solidFill>
                 <a:latin typeface="Helvetica Neue"/>
               </a:rPr>
-              <a:t>Cohort-level training signal for learning-to-rank</a:t>
+              <a:t>Segment-level training signal for learning-to-rank</a:t>
             </a:r>
           </a:p>
           <a:p>
@@ -10634,7 +10042,43 @@
                 </a:solidFill>
                 <a:latin typeface="Helvetica Neue"/>
               </a:rPr>
-              <a:t>Clicks are counts, not vectors, and want randomized response instead</a:t>
+              <a:t>This protects </a:t>
+            </a:r>
+            <a:r>
+              <a:rPr sz="2200" b="0">
+                <a:solidFill>
+                  <a:srgbClr val="141B2D"/>
+                </a:solidFill>
+                <a:latin typeface="Consolas"/>
+              </a:rPr>
+              <a:t>user_query</a:t>
+            </a:r>
+            <a:r>
+              <a:rPr sz="2400" b="0">
+                <a:solidFill>
+                  <a:srgbClr val="141B2D"/>
+                </a:solidFill>
+                <a:latin typeface="Helvetica Neue"/>
+              </a:rPr>
+              <a:t>, while </a:t>
+            </a:r>
+            <a:r>
+              <a:rPr sz="2200" b="0">
+                <a:solidFill>
+                  <a:srgbClr val="141B2D"/>
+                </a:solidFill>
+                <a:latin typeface="Consolas"/>
+              </a:rPr>
+              <a:t>ubi_events</a:t>
+            </a:r>
+            <a:r>
+              <a:rPr sz="2400" b="0">
+                <a:solidFill>
+                  <a:srgbClr val="141B2D"/>
+                </a:solidFill>
+                <a:latin typeface="Helvetica Neue"/>
+              </a:rPr>
+              <a:t> still holds clicks and ids in the clear</a:t>
             </a:r>
           </a:p>
         </p:txBody>

--- a/ldp_for_search_slides.pptx
+++ b/ldp_for_search_slides.pptx
@@ -10635,7 +10635,110 @@
       </p:sp>
       <p:sp>
         <p:nvSpPr>
-          <p:cNvPr id="4" name="TextBox 3"/>
+          <p:cNvPr id="4" name="Rectangle 3"/>
+          <p:cNvSpPr/>
+          <p:nvPr/>
+        </p:nvSpPr>
+        <p:spPr>
+          <a:xfrm>
+            <a:off x="8771839" y="1975104"/>
+            <a:ext cx="2724912" cy="2724912"/>
+          </a:xfrm>
+          <a:prstGeom prst="rect">
+            <a:avLst/>
+          </a:prstGeom>
+          <a:solidFill>
+            <a:srgbClr val="FFFFFF"/>
+          </a:solidFill>
+          <a:ln>
+            <a:noFill/>
+          </a:ln>
+          <a:effectLst/>
+        </p:spPr>
+        <p:style>
+          <a:lnRef idx="1">
+            <a:schemeClr val="accent1"/>
+          </a:lnRef>
+          <a:fillRef idx="3">
+            <a:schemeClr val="accent1"/>
+          </a:fillRef>
+          <a:effectRef idx="2">
+            <a:schemeClr val="accent1"/>
+          </a:effectRef>
+          <a:fontRef idx="minor">
+            <a:schemeClr val="lt1"/>
+          </a:fontRef>
+        </p:style>
+        <p:txBody>
+          <a:bodyPr rtlCol="0" anchor="ctr"/>
+          <a:lstStyle/>
+          <a:p>
+            <a:pPr algn="ctr"/>
+          </a:p>
+        </p:txBody>
+      </p:sp>
+      <p:pic>
+        <p:nvPicPr>
+          <p:cNvPr id="5" name="Picture 4" descr="leveraging-ldp-for-high-trust-opensearch-ubi_zemerick_1212636_feedback-code.png"/>
+          <p:cNvPicPr>
+            <a:picLocks noChangeAspect="1"/>
+          </p:cNvPicPr>
+          <p:nvPr/>
+        </p:nvPicPr>
+        <p:blipFill>
+          <a:blip r:embed="rId2"/>
+          <a:stretch>
+            <a:fillRect/>
+          </a:stretch>
+        </p:blipFill>
+        <p:spPr>
+          <a:xfrm>
+            <a:off x="8899855" y="2103120"/>
+            <a:ext cx="2468880" cy="2468880"/>
+          </a:xfrm>
+          <a:prstGeom prst="rect">
+            <a:avLst/>
+          </a:prstGeom>
+        </p:spPr>
+      </p:pic>
+      <p:sp>
+        <p:nvSpPr>
+          <p:cNvPr id="6" name="TextBox 5"/>
+          <p:cNvSpPr txBox="1"/>
+          <p:nvPr/>
+        </p:nvSpPr>
+        <p:spPr>
+          <a:xfrm>
+            <a:off x="8771839" y="4809744"/>
+            <a:ext cx="2724912" cy="365760"/>
+          </a:xfrm>
+          <a:prstGeom prst="rect">
+            <a:avLst/>
+          </a:prstGeom>
+          <a:noFill/>
+        </p:spPr>
+        <p:txBody>
+          <a:bodyPr wrap="square">
+            <a:spAutoFit/>
+          </a:bodyPr>
+          <a:lstStyle/>
+          <a:p>
+            <a:pPr algn="ctr"/>
+            <a:r>
+              <a:rPr sz="1400" b="0">
+                <a:solidFill>
+                  <a:srgbClr val="8EB8E8"/>
+                </a:solidFill>
+                <a:latin typeface="Helvetica Neue"/>
+              </a:rPr>
+              <a:t>Session feedback</a:t>
+            </a:r>
+          </a:p>
+        </p:txBody>
+      </p:sp>
+      <p:sp>
+        <p:nvSpPr>
+          <p:cNvPr id="7" name="TextBox 6"/>
           <p:cNvSpPr txBox="1"/>
           <p:nvPr/>
         </p:nvSpPr>

--- a/ldp_for_search_slides.pptx
+++ b/ldp_for_search_slides.pptx
@@ -1512,7 +1512,7 @@
           <a:lstStyle/>
           <a:p>
             <a:r>
-              <a:t>The centerpiece. Measured error tracks theory across four orders of magnitude. The title no longer says this is ordinary statistics, so say it: averaging n independent things shrinks the noise as one over root n, the same reason a poll of four thousand beats one of one thousand. Nothing here is special to privacy. Point at the crossing with the red line, that is the next slide. Spell the crossing out, because it is the one thing on this slide that is not self-evident. The red line is not a distance. It is the mean per-coordinate standard deviation of the index, 0.128, used as a deliberately strict accuracy target. The typical Euclidean distance between two products is about 0.82, so this bar is roughly six times stricter than merely telling products apart. If asked, say conservative, and do not call it a distance.</a:t>
+              <a:t>The centerpiece. Take the shape first. More users, less error. The measured green line tracks the predicted grey one across four orders of magnitude. This is ordinary statistics, so say so: averaging n independent things shrinks the noise as one over root n, the same reason a poll of four thousand beats one of one thousand. Nothing here is special to privacy. Then the red line. Read it off the bottom axis: 2,300 users. That is the answer, and it is the next slide. If asked where 2,300 comes from, it is where the measured error drops under 0.128, the average spread of one coordinate across the index. That bar is strict on purpose. Two typical products sit about 0.82 apart, so the line is roughly six times stricter than just telling products apart.</a:t>
             </a:r>
           </a:p>
         </p:txBody>
@@ -1582,7 +1582,7 @@
           <a:lstStyle/>
           <a:p>
             <a:r>
-              <a:t>Give the audience one operational number they can apply on Monday. This is it. The 2,500 is where the measured error crosses the spread of the index, 0.128, on the convergence plot. It is not a constant: error goes as one over epsilon times one over root n, so the threshold scales as one over epsilon squared. At epsilon 0.5 it is 10,000 users, at epsilon 2 it is about 625.</a:t>
+              <a:t>Give the audience one operational number they can apply on Monday. This is it. The 2,300 is where the measured error crosses the spread of the index, 0.128, on the convergence plot. It is not a constant: error goes as one over epsilon times one over root n, so the threshold scales as one over epsilon squared. At epsilon 0.5 it is about 9,200 users, at epsilon 2 it is about 575.</a:t>
             </a:r>
           </a:p>
         </p:txBody>
@@ -2002,7 +2002,7 @@
           <a:lstStyle/>
           <a:p>
             <a:r>
-              <a:t>Every one of these is a question someone will ask. Answering them first is cheaper than answering them under pressure. Also mention that a formal epsilon-DP claim needs sensitivity calibrated to the true coordinate range. Here the vectors are L2-normalized before PCA, so the whole 20-dimensional vector has norm 1, which makes sensitivity 1.0 per coordinate conservative rather than tight. That is the answer if someone asks how sensitivity was set. On the long tail, which someone will ask about: the workarounds are coarser segments and longer time windows, and both are the same trade at lower resolution, because they only raise n. The genuinely different answer is shuffle DP or secure aggregation, which buys far more utility at the same epsilon but changes the architecture rather than the parameter. Worth adding that tail relevance is usually improved by retrieval work rather than behavioural signal anyway. On the last bullet, be direct: this is scoped work, not a finished privacy story for all of UBI. The query text is covered. Clicks are counts rather than vectors and want randomized response, and client_id and session_id would need rotating or dropping. That is the honest answer to the linkability half of the problem raised in Part 1.</a:t>
+              <a:t>Every one of these is a question someone will ask. Answering them first is cheaper than answering them under pressure. Also mention that a formal epsilon-DP claim needs sensitivity calibrated to the true coordinate range. Here the vectors are L2-normalized before PCA, so the whole 20-dimensional vector has norm 1, which makes sensitivity 1.0 per coordinate conservative rather than tight. That is the answer if someone asks how sensitivity was set. Two follow-ups come off that bullet. Asked how often epsilon needs re-tuning, say when you re-embed or refit PCA, because routine additions to a large index do not move the coordinate spread, and normalizing before PCA keeps sensitivity itself stable whatever the catalogue holds. Asked whether privacy decays over time, say yes but not through epsilon: one user's repeated queries compose, and an attacker who averages that one user's own noised draws recovers the intent, which is the asymmetry from Part 5 turned around. Epsilon is a budget per release rather than a standing property, so the fix is rotating or dropping client_id and session_id, not a smaller epsilon. On the long tail, which someone will ask about: the workarounds are coarser segments and longer time windows, and both are the same trade at lower resolution, because they only raise n. The genuinely different answer is shuffle DP or secure aggregation, which buys far more utility at the same epsilon but changes the architecture rather than the parameter. Worth adding that tail relevance is usually improved by retrieval work rather than behavioural signal anyway. On the last bullet, be direct: this is scoped work, not a finished privacy story for all of UBI. The query text is covered. Clicks are counts rather than vectors and want randomized response, and client_id and session_id would need rotating or dropping. That is the honest answer to the linkability half of the problem raised in Part 1.</a:t>
             </a:r>
           </a:p>
         </p:txBody>
@@ -5691,7 +5691,7 @@
                 </a:solidFill>
                 <a:latin typeface="Helvetica Neue"/>
               </a:rPr>
-              <a:t>Keeping relevance work alive when you cannot store the queries</a:t>
+              <a:t>Tuning search when you can't store the queries</a:t>
             </a:r>
           </a:p>
         </p:txBody>
@@ -6146,7 +6146,7 @@
               <a:t>-   </a:t>
             </a:r>
             <a:r>
-              <a:rPr sz="2400" b="0">
+              <a:rPr sz="2400" b="1">
                 <a:solidFill>
                   <a:srgbClr val="141B2D"/>
                 </a:solidFill>
@@ -6263,7 +6263,7 @@
                 </a:solidFill>
                 <a:latin typeface="Helvetica Neue"/>
               </a:rPr>
-              <a:t>The mechanism, and how to verify it</a:t>
+              <a:t>The fix and the proof</a:t>
             </a:r>
           </a:p>
         </p:txBody>
@@ -6863,8 +6863,8 @@
         </p:blipFill>
         <p:spPr>
           <a:xfrm>
-            <a:off x="2487714" y="1417320"/>
-            <a:ext cx="7216267" cy="4343400"/>
+            <a:off x="2479197" y="1417320"/>
+            <a:ext cx="7233300" cy="4343400"/>
           </a:xfrm>
           <a:prstGeom prst="rect">
             <a:avLst/>
@@ -6901,7 +6901,7 @@
                 </a:solidFill>
                 <a:latin typeface="Helvetica Neue"/>
               </a:rPr>
-              <a:t>The category leaks well before the item does. At epsilon 1, neither is recoverable.</a:t>
+              <a:t>The category leaks well before the item does. At epsilon 1, neither is usable.</a:t>
             </a:r>
           </a:p>
         </p:txBody>
@@ -6909,6 +6909,51 @@
       <p:sp>
         <p:nvSpPr>
           <p:cNvPr id="5" name="TextBox 4"/>
+          <p:cNvSpPr txBox="1"/>
+          <p:nvPr/>
+        </p:nvSpPr>
+        <p:spPr>
+          <a:xfrm>
+            <a:off x="1325880" y="6355080"/>
+            <a:ext cx="9509760" cy="502920"/>
+          </a:xfrm>
+          <a:prstGeom prst="rect">
+            <a:avLst/>
+          </a:prstGeom>
+          <a:noFill/>
+        </p:spPr>
+        <p:txBody>
+          <a:bodyPr wrap="square">
+            <a:spAutoFit/>
+          </a:bodyPr>
+          <a:lstStyle/>
+          <a:p>
+            <a:pPr algn="ctr"/>
+            <a:r>
+              <a:rPr sz="1400" b="0">
+                <a:solidFill>
+                  <a:srgbClr val="5A647A"/>
+                </a:solidFill>
+                <a:latin typeface="Helvetica Neue"/>
+              </a:rPr>
+              <a:t>Data: WANDS, Wayfair product search relevance (ECIR 2022), MIT licensed: </a:t>
+            </a:r>
+            <a:r>
+              <a:rPr sz="1400" b="0" u="sng">
+                <a:solidFill>
+                  <a:srgbClr val="005EB8"/>
+                </a:solidFill>
+                <a:latin typeface="Helvetica Neue"/>
+                <a:hlinkClick r:id="rId3"/>
+              </a:rPr>
+              <a:t>github.com/wayfair/WANDS</a:t>
+            </a:r>
+          </a:p>
+        </p:txBody>
+      </p:sp>
+      <p:sp>
+        <p:nvSpPr>
+          <p:cNvPr id="6" name="TextBox 5"/>
           <p:cNvSpPr txBox="1"/>
           <p:nvPr/>
         </p:nvSpPr>
@@ -7319,7 +7364,7 @@
                 </a:solidFill>
                 <a:latin typeface="Helvetica Neue"/>
               </a:rPr>
-              <a:t>At epsilon 1.2, barely better than guessing</a:t>
+              <a:t>Epsilon 1.2 is barely better than guessing</a:t>
             </a:r>
           </a:p>
         </p:txBody>
@@ -7340,8 +7385,8 @@
         </p:blipFill>
         <p:spPr>
           <a:xfrm>
-            <a:off x="2192782" y="1417320"/>
-            <a:ext cx="7806131" cy="4343400"/>
+            <a:off x="2182624" y="1417320"/>
+            <a:ext cx="7826446" cy="4343400"/>
           </a:xfrm>
           <a:prstGeom prst="rect">
             <a:avLst/>
@@ -8058,6 +8103,31 @@
               <a:t>The trend across ten thousand people is not</a:t>
             </a:r>
           </a:p>
+          <a:p>
+            <a:pPr marL="342900" indent="-342900">
+              <a:spcAft>
+                <a:spcPts val="1400"/>
+              </a:spcAft>
+            </a:pPr>
+            <a:r>
+              <a:rPr sz="2100" b="1">
+                <a:solidFill>
+                  <a:srgbClr val="005EB8"/>
+                </a:solidFill>
+                <a:latin typeface="Helvetica Neue"/>
+              </a:rPr>
+              <a:t>-   </a:t>
+            </a:r>
+            <a:r>
+              <a:rPr sz="2100" b="0">
+                <a:solidFill>
+                  <a:srgbClr val="141B2D"/>
+                </a:solidFill>
+                <a:latin typeface="Helvetica Neue"/>
+              </a:rPr>
+              <a:t>That trend is all UBI needs to tune relevance</a:t>
+            </a:r>
+          </a:p>
         </p:txBody>
       </p:sp>
       <p:pic>
@@ -8448,8 +8518,8 @@
         </p:blipFill>
         <p:spPr>
           <a:xfrm>
-            <a:off x="2789022" y="1828800"/>
-            <a:ext cx="6613651" cy="3931920"/>
+            <a:off x="2781192" y="1828800"/>
+            <a:ext cx="6629310" cy="3931920"/>
           </a:xfrm>
           <a:prstGeom prst="rect">
             <a:avLst/>
@@ -8486,7 +8556,7 @@
                 </a:solidFill>
                 <a:latin typeface="Helvetica Neue"/>
               </a:rPr>
-              <a:t>Once the green error line drops under the red line, the privacy noise has become smaller than one coordinate's typical spread.</a:t>
+              <a:t>The red line is the smallest segment you can measure.</a:t>
             </a:r>
           </a:p>
         </p:txBody>
@@ -8673,7 +8743,7 @@
                 </a:solidFill>
                 <a:latin typeface="Helvetica Neue"/>
               </a:rPr>
-              <a:t>Error drops below the spread of the index at roughly 2,500 users</a:t>
+              <a:t>Error drops below the spread of the index at roughly 2,300 users</a:t>
             </a:r>
           </a:p>
           <a:p>
@@ -9000,7 +9070,7 @@
                 </a:solidFill>
                 <a:latin typeface="Helvetica Neue"/>
               </a:rPr>
-              <a:t>Back to OpenSearch, and the limits</a:t>
+              <a:t>Back in OpenSearch</a:t>
             </a:r>
           </a:p>
         </p:txBody>
@@ -9518,7 +9588,7 @@
                 </a:solidFill>
                 <a:latin typeface="Helvetica Neue"/>
               </a:rPr>
-              <a:t>, and the RFC will make it first-class</a:t>
+              <a:t>, and the RFC will propose making it first-class</a:t>
             </a:r>
           </a:p>
         </p:txBody>
@@ -9967,7 +10037,7 @@
                 </a:solidFill>
                 <a:latin typeface="Helvetica Neue"/>
               </a:rPr>
-              <a:t>The category leaks. Harmless for furniture, maybe not for a medical corpus</a:t>
+              <a:t>The category leaks and that is worse for medicine than furniture</a:t>
             </a:r>
           </a:p>
           <a:p>
@@ -9992,7 +10062,7 @@
                 </a:solidFill>
                 <a:latin typeface="Helvetica Neue"/>
               </a:rPr>
-              <a:t>Epsilon does not transfer between indexes. It depends on coordinate spread</a:t>
+              <a:t>What a given epsilon buys you depends on coordinate spread so it does not transfer between indexes</a:t>
             </a:r>
           </a:p>
           <a:p>
@@ -10060,7 +10130,7 @@
                 </a:solidFill>
                 <a:latin typeface="Helvetica Neue"/>
               </a:rPr>
-              <a:t>, while </a:t>
+              <a:t> but </a:t>
             </a:r>
             <a:r>
               <a:rPr sz="2200" b="0">
@@ -10189,7 +10259,7 @@
                 </a:solidFill>
                 <a:latin typeface="Helvetica Neue"/>
               </a:rPr>
-              <a:t>The blocker</a:t>
+              <a:t>The problem</a:t>
             </a:r>
           </a:p>
         </p:txBody>
@@ -10401,7 +10471,7 @@
                 </a:solidFill>
                 <a:latin typeface="Helvetica Neue"/>
               </a:rPr>
-              <a:t>Noise at the source beats scrubbing after the fact</a:t>
+              <a:t>Keeping sensitive data out of the index beats redacting it later</a:t>
             </a:r>
           </a:p>
           <a:p>
@@ -10826,7 +10896,7 @@
                 </a:solidFill>
                 <a:latin typeface="Helvetica Neue"/>
               </a:rPr>
-              <a:t>To tune search, you have to see what users do</a:t>
+              <a:t>To tune search you have to see what users do</a:t>
             </a:r>
           </a:p>
         </p:txBody>
@@ -10918,7 +10988,7 @@
                 </a:solidFill>
                 <a:latin typeface="Helvetica Neue"/>
               </a:rPr>
-              <a:t>Relevance work is empirical, not theoretical</a:t>
+              <a:t>Relevance is measured</a:t>
             </a:r>
           </a:p>
           <a:p>
@@ -11469,7 +11539,7 @@
                 </a:solidFill>
                 <a:latin typeface="Helvetica Neue"/>
               </a:rPr>
-              <a:t>Then legal reads the schema</a:t>
+              <a:t>Legal department sees the schema</a:t>
             </a:r>
           </a:p>
         </p:txBody>

--- a/ldp_for_search_slides.pptx
+++ b/ldp_for_search_slides.pptx
@@ -602,7 +602,7 @@
           <a:lstStyle/>
           <a:p>
             <a:r>
-              <a:t>Read the 20 documents aloud. They fit in one breath. Then run section 9 and let the raw result speak. Do not rush this, it is the hinge of the talk.</a:t>
+              <a:t>Read the 20 documents aloud. They fit in one breath. Then run section 9 and let the raw result speak. Do not rush this, it is the hinge of the talk. Before you leave the notebook, run section 10a as well. It only loads the cached dataset, and having it already in the kernel is what keeps the Part 5 demo instant.</a:t>
             </a:r>
           </a:p>
         </p:txBody>
@@ -1442,7 +1442,7 @@
           <a:lstStyle/>
           <a:p>
             <a:r>
-              <a:t>Stress that no one in a segment sends a readable query, and the server does the aggregation on noised vectors only. There is no trusted intermediate step. Read the result off the notebook rather than a slide, because both halves matter. Individual recovery per segment runs 0.020, 0.020, 0.063, 0.070 and 0.030 against chance of 0.014 to 0.031, so roughly one to two and a half times chance, which is not usable. Segment identification is 5 of 5, exact. Same data, same epsilon of 1.0, two different questions.</a:t>
+              <a:t>Section 10a only loads the cached WANDS data, and section 11 raises a NameError without it, so run it first if you did not already run it back in Part 2. Stress that no one in a segment sends a readable query, and the server does the aggregation on noised vectors only. There is no trusted intermediate step. Read the result off the notebook rather than a slide, because both halves matter. Individual recovery per segment runs 0.020, 0.020, 0.063, 0.070 and 0.030 against chance of 0.014 to 0.031, so roughly one to two and a half times chance, which is not usable. Segment identification is 5 of 5, exact. Same data, same epsilon of 1.0, two different questions.</a:t>
             </a:r>
           </a:p>
         </p:txBody>
@@ -8317,7 +8317,7 @@
                 </a:solidFill>
                 <a:latin typeface="Helvetica Neue"/>
               </a:rPr>
-              <a:t>Notebook section 11</a:t>
+              <a:t>Notebook sections 10a and 11</a:t>
             </a:r>
           </a:p>
           <a:p>

--- a/ldp_for_search_slides.pptx
+++ b/ldp_for_search_slides.pptx
@@ -602,7 +602,7 @@
           <a:lstStyle/>
           <a:p>
             <a:r>
-              <a:t>Read the 20 documents aloud. They fit in one breath. Then run section 9 and let the raw result speak. Do not rush this, it is the hinge of the talk. Before you leave the notebook, run section 10a as well. It only loads the cached dataset, and having it already in the kernel is what keeps the Part 5 demo instant.</a:t>
+              <a:t>Notebook section 9, run beforehand rather than live. Read the 20 documents aloud first, they fit in one breath, so the room can hold the whole index in their heads. Then let the top row speak: the raw vector hands over the intent. Do not rush this, it is the hinge of the talk. The distance column is the part people miss, so point at it. The noised vector is not merely wrong, it is 4.9 away from everything, so which document wins is close to arbitrary. The number to have ready if someone wants it: its top five candidates all sit within 0.15 of each other, while real documents in this index are at least 0.89 apart, so the ranking is a tie rather than a wrong answer. Two things to be straight about if asked. This is a nearest-neighbour lookup against the index rather than literal text inversion, which is a weaker attacker than the Morris paper on the previous slide assumes, and it still succeeds. And epsilon 1.2 is the rigged setting Part 4 comes back and confesses to.</a:t>
             </a:r>
           </a:p>
         </p:txBody>
@@ -1442,7 +1442,7 @@
           <a:lstStyle/>
           <a:p>
             <a:r>
-              <a:t>Section 10a only loads the cached WANDS data, and section 11 raises a NameError without it, so run it first if you did not already run it back in Part 2. Stress that no one in a segment sends a readable query, and the server does the aggregation on noised vectors only. There is no trusted intermediate step. Read the result off the notebook rather than a slide, because both halves matter. Individual recovery per segment runs 0.020, 0.020, 0.063, 0.070 and 0.030 against chance of 0.014 to 0.031, so roughly one to two and a half times chance, which is not usable. Segment identification is 5 of 5, exact. Same data, same epsilon of 1.0, two different questions.</a:t>
+              <a:t>This is the only live notebook moment in the talk, so have the kernel primed before you walk on: run sections 1 and 2 for the model, then 10a for the cached data. Section 11 raises a NameError without 10a. If the kernel died, those three take about five seconds. Stress that no one in a segment sends a readable query, and the server does the aggregation on noised vectors only. There is no trusted intermediate step. Read the result off the notebook rather than a slide, because both halves matter. Individual recovery per segment runs 0.020, 0.020, 0.063, 0.070 and 0.030 against chance of 0.014 to 0.031, so roughly one to two and a half times chance, which is not usable. Segment identification is 5 of 5, exact. Same data, same epsilon of 1.0, two different questions.</a:t>
             </a:r>
           </a:p>
         </p:txBody>
@@ -5776,7 +5776,7 @@
     <p:bg>
       <p:bgPr>
         <a:solidFill>
-          <a:srgbClr val="0E1A2F"/>
+          <a:srgbClr val="FFFFFF"/>
         </a:solidFill>
         <a:effectLst/>
       </p:bgPr>
@@ -5796,8 +5796,8 @@
         </p:nvSpPr>
         <p:spPr>
           <a:xfrm>
-            <a:off x="822960" y="1737360"/>
-            <a:ext cx="10515600" cy="548640"/>
+            <a:off x="822960" y="640080"/>
+            <a:ext cx="10515600" cy="960120"/>
           </a:xfrm>
           <a:prstGeom prst="rect">
             <a:avLst/>
@@ -5811,27 +5811,71 @@
           <a:lstStyle/>
           <a:p>
             <a:r>
-              <a:rPr sz="1800" b="1">
-                <a:solidFill>
-                  <a:srgbClr val="5A9BE8"/>
-                </a:solidFill>
-                <a:latin typeface="Helvetica Neue"/>
-              </a:rPr>
-              <a:t>LIVE NOTEBOOK</a:t>
-            </a:r>
-          </a:p>
-        </p:txBody>
-      </p:sp>
-      <p:sp>
-        <p:nvSpPr>
-          <p:cNvPr id="3" name="TextBox 2"/>
+              <a:rPr sz="3200" b="1">
+                <a:solidFill>
+                  <a:srgbClr val="141B2D"/>
+                </a:solidFill>
+                <a:latin typeface="Helvetica Neue"/>
+              </a:rPr>
+              <a:t>The same attack on both vectors</a:t>
+            </a:r>
+          </a:p>
+        </p:txBody>
+      </p:sp>
+      <p:sp>
+        <p:nvSpPr>
+          <p:cNvPr id="3" name="Rectangle 2"/>
+          <p:cNvSpPr/>
+          <p:nvPr/>
+        </p:nvSpPr>
+        <p:spPr>
+          <a:xfrm>
+            <a:off x="822960" y="1245615"/>
+            <a:ext cx="1463040" cy="50800"/>
+          </a:xfrm>
+          <a:prstGeom prst="rect">
+            <a:avLst/>
+          </a:prstGeom>
+          <a:solidFill>
+            <a:srgbClr val="005EB8"/>
+          </a:solidFill>
+          <a:ln>
+            <a:noFill/>
+          </a:ln>
+          <a:effectLst/>
+        </p:spPr>
+        <p:style>
+          <a:lnRef idx="1">
+            <a:schemeClr val="accent1"/>
+          </a:lnRef>
+          <a:fillRef idx="3">
+            <a:schemeClr val="accent1"/>
+          </a:fillRef>
+          <a:effectRef idx="2">
+            <a:schemeClr val="accent1"/>
+          </a:effectRef>
+          <a:fontRef idx="minor">
+            <a:schemeClr val="lt1"/>
+          </a:fontRef>
+        </p:style>
+        <p:txBody>
+          <a:bodyPr rtlCol="0" anchor="ctr"/>
+          <a:lstStyle/>
+          <a:p>
+            <a:pPr algn="ctr"/>
+          </a:p>
+        </p:txBody>
+      </p:sp>
+      <p:sp>
+        <p:nvSpPr>
+          <p:cNvPr id="4" name="TextBox 3"/>
           <p:cNvSpPr txBox="1"/>
           <p:nvPr/>
         </p:nvSpPr>
         <p:spPr>
           <a:xfrm>
-            <a:off x="822960" y="2377440"/>
-            <a:ext cx="10515600" cy="1097280"/>
+            <a:off x="822960" y="1691640"/>
+            <a:ext cx="10515600" cy="548640"/>
           </a:xfrm>
           <a:prstGeom prst="rect">
             <a:avLst/>
@@ -5845,27 +5889,267 @@
           <a:lstStyle/>
           <a:p>
             <a:r>
-              <a:rPr sz="3800" b="1">
-                <a:solidFill>
-                  <a:srgbClr val="FFFFFF"/>
-                </a:solidFill>
-                <a:latin typeface="Helvetica Neue"/>
-              </a:rPr>
-              <a:t>Demo: invert a raw query vector</a:t>
-            </a:r>
-          </a:p>
-        </p:txBody>
-      </p:sp>
-      <p:sp>
-        <p:nvSpPr>
-          <p:cNvPr id="4" name="TextBox 3"/>
+              <a:rPr sz="2100" b="0">
+                <a:solidFill>
+                  <a:srgbClr val="5A647A"/>
+                </a:solidFill>
+                <a:latin typeface="Helvetica Neue"/>
+              </a:rPr>
+              <a:t>The attacker looks up the nearest documents to whatever vector they intercepted</a:t>
+            </a:r>
+          </a:p>
+        </p:txBody>
+      </p:sp>
+      <p:graphicFrame>
+        <p:nvGraphicFramePr>
+          <p:cNvPr id="5" name="Table 4"/>
+          <p:cNvGraphicFramePr>
+            <a:graphicFrameLocks noGrp="1"/>
+          </p:cNvGraphicFramePr>
+          <p:nvPr/>
+        </p:nvGraphicFramePr>
+        <p:xfrm>
+          <a:off x="1523847" y="2514600"/>
+          <a:ext cx="9144000" cy="1700784"/>
+        </p:xfrm>
+        <a:graphic>
+          <a:graphicData uri="http://schemas.openxmlformats.org/drawingml/2006/table">
+            <a:tbl>
+              <a:tblPr firstRow="1" bandRow="1">
+                <a:tableStyleId>{5C22544A-7EE6-4342-B048-85BDC9FD1C3A}</a:tableStyleId>
+              </a:tblPr>
+              <a:tblGrid>
+                <a:gridCol w="3048000"/>
+                <a:gridCol w="3048000"/>
+                <a:gridCol w="3048000"/>
+              </a:tblGrid>
+              <a:tr h="566928">
+                <a:tc>
+                  <a:txBody>
+                    <a:bodyPr/>
+                    <a:lstStyle/>
+                    <a:p>
+                      <a:pPr algn="l"/>
+                      <a:r>
+                        <a:rPr sz="1800" b="1">
+                          <a:solidFill>
+                            <a:srgbClr val="FFFFFF"/>
+                          </a:solidFill>
+                          <a:latin typeface="Helvetica Neue"/>
+                        </a:rPr>
+                        <a:t>Attacker intercepts</a:t>
+                      </a:r>
+                    </a:p>
+                  </a:txBody>
+                  <a:tcPr anchor="ctr">
+                    <a:solidFill>
+                      <a:srgbClr val="005EB8"/>
+                    </a:solidFill>
+                  </a:tcPr>
+                </a:tc>
+                <a:tc>
+                  <a:txBody>
+                    <a:bodyPr/>
+                    <a:lstStyle/>
+                    <a:p>
+                      <a:pPr algn="ctr"/>
+                      <a:r>
+                        <a:rPr sz="1800" b="1">
+                          <a:solidFill>
+                            <a:srgbClr val="FFFFFF"/>
+                          </a:solidFill>
+                          <a:latin typeface="Helvetica Neue"/>
+                        </a:rPr>
+                        <a:t>Their best guess</a:t>
+                      </a:r>
+                    </a:p>
+                  </a:txBody>
+                  <a:tcPr anchor="ctr">
+                    <a:solidFill>
+                      <a:srgbClr val="005EB8"/>
+                    </a:solidFill>
+                  </a:tcPr>
+                </a:tc>
+                <a:tc>
+                  <a:txBody>
+                    <a:bodyPr/>
+                    <a:lstStyle/>
+                    <a:p>
+                      <a:pPr algn="ctr"/>
+                      <a:r>
+                        <a:rPr sz="1800" b="1">
+                          <a:solidFill>
+                            <a:srgbClr val="FFFFFF"/>
+                          </a:solidFill>
+                          <a:latin typeface="Helvetica Neue"/>
+                        </a:rPr>
+                        <a:t>Distance</a:t>
+                      </a:r>
+                    </a:p>
+                  </a:txBody>
+                  <a:tcPr anchor="ctr">
+                    <a:solidFill>
+                      <a:srgbClr val="005EB8"/>
+                    </a:solidFill>
+                  </a:tcPr>
+                </a:tc>
+              </a:tr>
+              <a:tr h="566928">
+                <a:tc>
+                  <a:txBody>
+                    <a:bodyPr/>
+                    <a:lstStyle/>
+                    <a:p>
+                      <a:pPr algn="l"/>
+                      <a:r>
+                        <a:rPr sz="1800" b="0">
+                          <a:solidFill>
+                            <a:srgbClr val="141B2D"/>
+                          </a:solidFill>
+                          <a:latin typeface="Helvetica Neue"/>
+                        </a:rPr>
+                        <a:t>The raw vector</a:t>
+                      </a:r>
+                    </a:p>
+                  </a:txBody>
+                  <a:tcPr anchor="ctr">
+                    <a:solidFill>
+                      <a:srgbClr val="F4F7FB"/>
+                    </a:solidFill>
+                  </a:tcPr>
+                </a:tc>
+                <a:tc>
+                  <a:txBody>
+                    <a:bodyPr/>
+                    <a:lstStyle/>
+                    <a:p>
+                      <a:pPr algn="ctr"/>
+                      <a:r>
+                        <a:rPr sz="1800" b="0">
+                          <a:solidFill>
+                            <a:srgbClr val="141B2D"/>
+                          </a:solidFill>
+                          <a:latin typeface="Helvetica Neue"/>
+                        </a:rPr>
+                        <a:t>Laptop</a:t>
+                      </a:r>
+                    </a:p>
+                  </a:txBody>
+                  <a:tcPr anchor="ctr">
+                    <a:solidFill>
+                      <a:srgbClr val="F4F7FB"/>
+                    </a:solidFill>
+                  </a:tcPr>
+                </a:tc>
+                <a:tc>
+                  <a:txBody>
+                    <a:bodyPr/>
+                    <a:lstStyle/>
+                    <a:p>
+                      <a:pPr algn="ctr"/>
+                      <a:r>
+                        <a:rPr sz="1800" b="0">
+                          <a:solidFill>
+                            <a:srgbClr val="141B2D"/>
+                          </a:solidFill>
+                          <a:latin typeface="Helvetica Neue"/>
+                        </a:rPr>
+                        <a:t>0.2092</a:t>
+                      </a:r>
+                    </a:p>
+                  </a:txBody>
+                  <a:tcPr anchor="ctr">
+                    <a:solidFill>
+                      <a:srgbClr val="F4F7FB"/>
+                    </a:solidFill>
+                  </a:tcPr>
+                </a:tc>
+              </a:tr>
+              <a:tr h="566928">
+                <a:tc>
+                  <a:txBody>
+                    <a:bodyPr/>
+                    <a:lstStyle/>
+                    <a:p>
+                      <a:pPr algn="l"/>
+                      <a:r>
+                        <a:rPr sz="1800" b="0">
+                          <a:solidFill>
+                            <a:srgbClr val="141B2D"/>
+                          </a:solidFill>
+                          <a:latin typeface="Helvetica Neue"/>
+                        </a:rPr>
+                        <a:t>The noised vector</a:t>
+                      </a:r>
+                    </a:p>
+                  </a:txBody>
+                  <a:tcPr anchor="ctr">
+                    <a:solidFill>
+                      <a:srgbClr val="FFFFFF"/>
+                    </a:solidFill>
+                  </a:tcPr>
+                </a:tc>
+                <a:tc>
+                  <a:txBody>
+                    <a:bodyPr/>
+                    <a:lstStyle/>
+                    <a:p>
+                      <a:pPr algn="ctr"/>
+                      <a:r>
+                        <a:rPr sz="1800" b="0">
+                          <a:solidFill>
+                            <a:srgbClr val="141B2D"/>
+                          </a:solidFill>
+                          <a:latin typeface="Helvetica Neue"/>
+                        </a:rPr>
+                        <a:t>Gaming Console</a:t>
+                      </a:r>
+                    </a:p>
+                  </a:txBody>
+                  <a:tcPr anchor="ctr">
+                    <a:solidFill>
+                      <a:srgbClr val="FFFFFF"/>
+                    </a:solidFill>
+                  </a:tcPr>
+                </a:tc>
+                <a:tc>
+                  <a:txBody>
+                    <a:bodyPr/>
+                    <a:lstStyle/>
+                    <a:p>
+                      <a:pPr algn="ctr"/>
+                      <a:r>
+                        <a:rPr sz="1800" b="0">
+                          <a:solidFill>
+                            <a:srgbClr val="141B2D"/>
+                          </a:solidFill>
+                          <a:latin typeface="Helvetica Neue"/>
+                        </a:rPr>
+                        <a:t>4.8870</a:t>
+                      </a:r>
+                    </a:p>
+                  </a:txBody>
+                  <a:tcPr anchor="ctr">
+                    <a:solidFill>
+                      <a:srgbClr val="FFFFFF"/>
+                    </a:solidFill>
+                  </a:tcPr>
+                </a:tc>
+              </a:tr>
+            </a:tbl>
+          </a:graphicData>
+        </a:graphic>
+      </p:graphicFrame>
+      <p:sp>
+        <p:nvSpPr>
+          <p:cNvPr id="6" name="TextBox 5"/>
           <p:cNvSpPr txBox="1"/>
           <p:nvPr/>
         </p:nvSpPr>
         <p:spPr>
           <a:xfrm>
-            <a:off x="822960" y="3749039"/>
-            <a:ext cx="10515600" cy="1828800"/>
+            <a:off x="822960" y="5943600"/>
+            <a:ext cx="10515600" cy="640080"/>
           </a:xfrm>
           <a:prstGeom prst="rect">
             <a:avLst/>
@@ -5878,26 +6162,22 @@
           </a:bodyPr>
           <a:lstStyle/>
           <a:p>
-            <a:pPr>
-              <a:spcAft>
-                <a:spcPts val="1200"/>
-              </a:spcAft>
-            </a:pPr>
-            <a:r>
-              <a:rPr sz="2200" b="0">
-                <a:solidFill>
-                  <a:srgbClr val="B8C2D4"/>
-                </a:solidFill>
-                <a:latin typeface="Helvetica Neue"/>
-              </a:rPr>
-              <a:t>Notebook sections 1 to 6, then section 9</a:t>
-            </a:r>
-          </a:p>
-        </p:txBody>
-      </p:sp>
-      <p:sp>
-        <p:nvSpPr>
-          <p:cNvPr id="5" name="TextBox 4"/>
+            <a:pPr algn="ctr"/>
+            <a:r>
+              <a:rPr sz="1500" b="0">
+                <a:solidFill>
+                  <a:srgbClr val="5A647A"/>
+                </a:solidFill>
+                <a:latin typeface="Helvetica Neue"/>
+              </a:rPr>
+              <a:t>Query "laptop computer" at epsilon 1.2, from notebook section 9</a:t>
+            </a:r>
+          </a:p>
+        </p:txBody>
+      </p:sp>
+      <p:sp>
+        <p:nvSpPr>
+          <p:cNvPr id="7" name="TextBox 6"/>
           <p:cNvSpPr txBox="1"/>
           <p:nvPr/>
         </p:nvSpPr>
@@ -5921,7 +6201,7 @@
             <a:r>
               <a:rPr sz="1300" b="0">
                 <a:solidFill>
-                  <a:srgbClr val="6E7C93"/>
+                  <a:srgbClr val="5A647A"/>
                 </a:solidFill>
                 <a:latin typeface="Helvetica Neue"/>
               </a:rPr>
@@ -6071,7 +6351,7 @@
               <a:t>-   </a:t>
             </a:r>
             <a:r>
-              <a:rPr sz="2400" b="0">
+              <a:rPr sz="2400" b="0" i="0">
                 <a:solidFill>
                   <a:srgbClr val="141B2D"/>
                 </a:solidFill>
@@ -6096,7 +6376,7 @@
               <a:t>-   </a:t>
             </a:r>
             <a:r>
-              <a:rPr sz="2400" b="0">
+              <a:rPr sz="2400" b="0" i="0">
                 <a:solidFill>
                   <a:srgbClr val="141B2D"/>
                 </a:solidFill>
@@ -6121,13 +6401,13 @@
               <a:t>-   </a:t>
             </a:r>
             <a:r>
-              <a:rPr sz="2400" b="0">
+              <a:rPr sz="2400" b="0" i="0">
                 <a:solidFill>
                   <a:srgbClr val="141B2D"/>
                 </a:solidFill>
                 <a:latin typeface="Helvetica Neue"/>
               </a:rPr>
-              <a:t>No text was stored, and the intent leaked anyway</a:t>
+              <a:t>Intent was leaked even though no text was stored</a:t>
             </a:r>
           </a:p>
           <a:p>
@@ -6146,7 +6426,7 @@
               <a:t>-   </a:t>
             </a:r>
             <a:r>
-              <a:rPr sz="2400" b="1">
+              <a:rPr sz="2400" b="1" i="0">
                 <a:solidFill>
                   <a:srgbClr val="141B2D"/>
                 </a:solidFill>
@@ -6444,7 +6724,7 @@
               <a:t>-   </a:t>
             </a:r>
             <a:r>
-              <a:rPr sz="2100" b="0">
+              <a:rPr sz="2100" b="0" i="0">
                 <a:solidFill>
                   <a:srgbClr val="141B2D"/>
                 </a:solidFill>
@@ -6469,7 +6749,7 @@
               <a:t>-   </a:t>
             </a:r>
             <a:r>
-              <a:rPr sz="2100" b="0">
+              <a:rPr sz="2100" b="0" i="0">
                 <a:solidFill>
                   <a:srgbClr val="141B2D"/>
                 </a:solidFill>
@@ -6494,7 +6774,7 @@
               <a:t>-   </a:t>
             </a:r>
             <a:r>
-              <a:rPr sz="2100" b="0">
+              <a:rPr sz="2100" b="0" i="0">
                 <a:solidFill>
                   <a:srgbClr val="141B2D"/>
                 </a:solidFill>
@@ -6519,13 +6799,13 @@
               <a:t>-   </a:t>
             </a:r>
             <a:r>
-              <a:rPr sz="2100" b="0">
+              <a:rPr sz="2100" b="0" i="0">
                 <a:solidFill>
                   <a:srgbClr val="141B2D"/>
                 </a:solidFill>
                 <a:latin typeface="Helvetica Neue"/>
               </a:rPr>
-              <a:t>The cluster never receives a readable query, so there is nothing to scrub</a:t>
+              <a:t>The user's query is not stored so there is nothing to redact</a:t>
             </a:r>
           </a:p>
         </p:txBody>
@@ -6577,7 +6857,7 @@
           <a:lstStyle/>
           <a:p>
             <a:r>
-              <a:rPr sz="1400" b="0">
+              <a:rPr sz="1400" b="0" i="0">
                 <a:solidFill>
                   <a:srgbClr val="5A647A"/>
                 </a:solidFill>
@@ -6709,8 +6989,8 @@
         </p:blipFill>
         <p:spPr>
           <a:xfrm>
-            <a:off x="2155300" y="1417320"/>
-            <a:ext cx="7881094" cy="4343400"/>
+            <a:off x="2161809" y="1417320"/>
+            <a:ext cx="7868076" cy="4343400"/>
           </a:xfrm>
           <a:prstGeom prst="rect">
             <a:avLst/>
@@ -6741,13 +7021,13 @@
           <a:p>
             <a:pPr algn="ctr"/>
             <a:r>
-              <a:rPr sz="1600" b="0">
+              <a:rPr sz="1600" b="0" i="0">
                 <a:solidFill>
                   <a:srgbClr val="5A647A"/>
                 </a:solidFill>
                 <a:latin typeface="Helvetica Neue"/>
               </a:rPr>
-              <a:t>A biased mechanism would put the peak off the red line. The width is the privacy.</a:t>
+              <a:t>A biased mechanism would put the peak off the red line, and the width is the privacy.</a:t>
             </a:r>
           </a:p>
         </p:txBody>
@@ -6895,7 +7175,7 @@
           <a:p>
             <a:pPr algn="ctr"/>
             <a:r>
-              <a:rPr sz="1600" b="0">
+              <a:rPr sz="1600" b="0" i="0">
                 <a:solidFill>
                   <a:srgbClr val="5A647A"/>
                 </a:solidFill>
@@ -6930,7 +7210,7 @@
           <a:p>
             <a:pPr algn="ctr"/>
             <a:r>
-              <a:rPr sz="1400" b="0">
+              <a:rPr sz="1400" b="0" i="0">
                 <a:solidFill>
                   <a:srgbClr val="5A647A"/>
                 </a:solidFill>
@@ -7238,7 +7518,7 @@
               <a:t>-   </a:t>
             </a:r>
             <a:r>
-              <a:rPr sz="2400" b="0">
+              <a:rPr sz="2400" b="0" i="0">
                 <a:solidFill>
                   <a:srgbClr val="141B2D"/>
                 </a:solidFill>
@@ -7263,7 +7543,7 @@
               <a:t>-   </a:t>
             </a:r>
             <a:r>
-              <a:rPr sz="2400" b="0">
+              <a:rPr sz="2400" b="0" i="0">
                 <a:solidFill>
                   <a:srgbClr val="141B2D"/>
                 </a:solidFill>
@@ -7417,7 +7697,7 @@
           <a:p>
             <a:pPr algn="ctr"/>
             <a:r>
-              <a:rPr sz="1600" b="0">
+              <a:rPr sz="1600" b="0" i="0">
                 <a:solidFill>
                   <a:srgbClr val="5A647A"/>
                 </a:solidFill>
@@ -7715,13 +7995,13 @@
               <a:t>-   </a:t>
             </a:r>
             <a:r>
-              <a:rPr sz="2400" b="0">
+              <a:rPr sz="2400" b="0" i="0">
                 <a:solidFill>
                   <a:srgbClr val="141B2D"/>
                 </a:solidFill>
                 <a:latin typeface="Helvetica Neue"/>
               </a:rPr>
-              <a:t>Independent consultant, Mountain Fog</a:t>
+              <a:t>Independent consultant at Mountain Fog</a:t>
             </a:r>
           </a:p>
           <a:p>
@@ -7740,7 +8020,7 @@
               <a:t>-   </a:t>
             </a:r>
             <a:r>
-              <a:rPr sz="2400" b="0">
+              <a:rPr sz="2400" b="0" i="0">
                 <a:solidFill>
                   <a:srgbClr val="141B2D"/>
                 </a:solidFill>
@@ -7765,7 +8045,7 @@
               <a:t>-   </a:t>
             </a:r>
             <a:r>
-              <a:rPr sz="2400" b="0">
+              <a:rPr sz="2400" b="0" i="0">
                 <a:solidFill>
                   <a:srgbClr val="141B2D"/>
                 </a:solidFill>
@@ -7790,7 +8070,7 @@
               <a:t>-   </a:t>
             </a:r>
             <a:r>
-              <a:rPr sz="2400" b="0">
+              <a:rPr sz="2400" b="0" i="0">
                 <a:solidFill>
                   <a:srgbClr val="141B2D"/>
                 </a:solidFill>
@@ -7815,7 +8095,7 @@
               <a:t>-   </a:t>
             </a:r>
             <a:r>
-              <a:rPr sz="2400" b="0">
+              <a:rPr sz="2400" b="0" i="0">
                 <a:solidFill>
                   <a:srgbClr val="141B2D"/>
                 </a:solidFill>
@@ -8019,7 +8299,7 @@
               <a:t>-   </a:t>
             </a:r>
             <a:r>
-              <a:rPr sz="2100" b="0">
+              <a:rPr sz="2100" b="0" i="0">
                 <a:solidFill>
                   <a:srgbClr val="141B2D"/>
                 </a:solidFill>
@@ -8044,7 +8324,7 @@
               <a:t>-   </a:t>
             </a:r>
             <a:r>
-              <a:rPr sz="2100" b="0">
+              <a:rPr sz="2100" b="0" i="0">
                 <a:solidFill>
                   <a:srgbClr val="141B2D"/>
                 </a:solidFill>
@@ -8069,7 +8349,7 @@
               <a:t>-   </a:t>
             </a:r>
             <a:r>
-              <a:rPr sz="2100" b="0">
+              <a:rPr sz="2100" b="0" i="0">
                 <a:solidFill>
                   <a:srgbClr val="141B2D"/>
                 </a:solidFill>
@@ -8094,7 +8374,7 @@
               <a:t>-   </a:t>
             </a:r>
             <a:r>
-              <a:rPr sz="2100" b="0">
+              <a:rPr sz="2100" b="0" i="0">
                 <a:solidFill>
                   <a:srgbClr val="141B2D"/>
                 </a:solidFill>
@@ -8119,7 +8399,7 @@
               <a:t>-   </a:t>
             </a:r>
             <a:r>
-              <a:rPr sz="2100" b="0">
+              <a:rPr sz="2100" b="0" i="0">
                 <a:solidFill>
                   <a:srgbClr val="141B2D"/>
                 </a:solidFill>
@@ -8317,7 +8597,7 @@
                 </a:solidFill>
                 <a:latin typeface="Helvetica Neue"/>
               </a:rPr>
-              <a:t>Notebook sections 10a and 11</a:t>
+              <a:t>Notebook section 11</a:t>
             </a:r>
           </a:p>
           <a:p>
@@ -8473,7 +8753,7 @@
           <a:p>
             <a:pPr algn="ctr"/>
             <a:r>
-              <a:rPr sz="1500" b="0">
+              <a:rPr sz="1500" b="0" i="0">
                 <a:solidFill>
                   <a:srgbClr val="5A647A"/>
                 </a:solidFill>
@@ -8491,7 +8771,7 @@
               <a:t>n</a:t>
             </a:r>
             <a:r>
-              <a:rPr sz="1500" b="0">
+              <a:rPr sz="1500" b="0" i="0">
                 <a:solidFill>
                   <a:srgbClr val="5A647A"/>
                 </a:solidFill>
@@ -8550,7 +8830,7 @@
           <a:p>
             <a:pPr algn="ctr"/>
             <a:r>
-              <a:rPr sz="1600" b="0">
+              <a:rPr sz="1600" b="0" i="0">
                 <a:solidFill>
                   <a:srgbClr val="5A647A"/>
                 </a:solidFill>
@@ -8737,7 +9017,7 @@
               <a:t>-   </a:t>
             </a:r>
             <a:r>
-              <a:rPr sz="2400" b="0">
+              <a:rPr sz="2400" b="0" i="0">
                 <a:solidFill>
                   <a:srgbClr val="141B2D"/>
                 </a:solidFill>
@@ -8762,7 +9042,7 @@
               <a:t>-   </a:t>
             </a:r>
             <a:r>
-              <a:rPr sz="2400" b="0">
+              <a:rPr sz="2400" b="0" i="0">
                 <a:solidFill>
                   <a:srgbClr val="141B2D"/>
                 </a:solidFill>
@@ -8787,7 +9067,7 @@
               <a:t>-   </a:t>
             </a:r>
             <a:r>
-              <a:rPr sz="2400" b="0">
+              <a:rPr sz="2400" b="0" i="0">
                 <a:solidFill>
                   <a:srgbClr val="141B2D"/>
                 </a:solidFill>
@@ -8812,7 +9092,7 @@
               <a:t>-   </a:t>
             </a:r>
             <a:r>
-              <a:rPr sz="2400" b="0">
+              <a:rPr sz="2400" b="0" i="0">
                 <a:solidFill>
                   <a:srgbClr val="141B2D"/>
                 </a:solidFill>
@@ -8837,7 +9117,7 @@
               <a:t>-   </a:t>
             </a:r>
             <a:r>
-              <a:rPr sz="2400" b="0">
+              <a:rPr sz="2400" b="0" i="0">
                 <a:solidFill>
                   <a:srgbClr val="141B2D"/>
                 </a:solidFill>
@@ -9251,7 +9531,7 @@
               <a:t>-   </a:t>
             </a:r>
             <a:r>
-              <a:rPr sz="2100" b="0">
+              <a:rPr sz="2100" b="0" i="0">
                 <a:solidFill>
                   <a:srgbClr val="141B2D"/>
                 </a:solidFill>
@@ -9269,7 +9549,7 @@
               <a:t>ubi.js</a:t>
             </a:r>
             <a:r>
-              <a:rPr sz="2100" b="0">
+              <a:rPr sz="2100" b="0" i="0">
                 <a:solidFill>
                   <a:srgbClr val="141B2D"/>
                 </a:solidFill>
@@ -9294,7 +9574,7 @@
               <a:t>-   </a:t>
             </a:r>
             <a:r>
-              <a:rPr sz="2100" b="0">
+              <a:rPr sz="2100" b="0" i="0">
                 <a:solidFill>
                   <a:srgbClr val="141B2D"/>
                 </a:solidFill>
@@ -9319,7 +9599,7 @@
               <a:t>-   </a:t>
             </a:r>
             <a:r>
-              <a:rPr sz="2100" b="0">
+              <a:rPr sz="2100" b="0" i="0">
                 <a:solidFill>
                   <a:srgbClr val="141B2D"/>
                 </a:solidFill>
@@ -9344,7 +9624,7 @@
               <a:t>-   </a:t>
             </a:r>
             <a:r>
-              <a:rPr sz="2100" b="0">
+              <a:rPr sz="2100" b="0" i="0">
                 <a:solidFill>
                   <a:srgbClr val="141B2D"/>
                 </a:solidFill>
@@ -9402,7 +9682,7 @@
           <a:lstStyle/>
           <a:p>
             <a:r>
-              <a:rPr sz="1400" b="0">
+              <a:rPr sz="1400" b="0" i="0">
                 <a:solidFill>
                   <a:srgbClr val="5A647A"/>
                 </a:solidFill>
@@ -9564,7 +9844,7 @@
           <a:lstStyle/>
           <a:p>
             <a:r>
-              <a:rPr sz="1400" b="0">
+              <a:rPr sz="1400" b="0" i="0">
                 <a:solidFill>
                   <a:srgbClr val="5A647A"/>
                 </a:solidFill>
@@ -9582,7 +9862,7 @@
               <a:t>query_attributes</a:t>
             </a:r>
             <a:r>
-              <a:rPr sz="1400" b="0">
+              <a:rPr sz="1400" b="0" i="0">
                 <a:solidFill>
                   <a:srgbClr val="5A647A"/>
                 </a:solidFill>
@@ -9769,7 +10049,7 @@
               <a:t>-   </a:t>
             </a:r>
             <a:r>
-              <a:rPr sz="2400" b="0">
+              <a:rPr sz="2400" b="0" i="0">
                 <a:solidFill>
                   <a:srgbClr val="141B2D"/>
                 </a:solidFill>
@@ -9794,7 +10074,7 @@
               <a:t>-   </a:t>
             </a:r>
             <a:r>
-              <a:rPr sz="2400" b="0">
+              <a:rPr sz="2400" b="0" i="0">
                 <a:solidFill>
                   <a:srgbClr val="141B2D"/>
                 </a:solidFill>
@@ -9819,7 +10099,7 @@
               <a:t>-   </a:t>
             </a:r>
             <a:r>
-              <a:rPr sz="2400" b="0">
+              <a:rPr sz="2400" b="0" i="0">
                 <a:solidFill>
                   <a:srgbClr val="141B2D"/>
                 </a:solidFill>
@@ -9844,7 +10124,7 @@
               <a:t>-   </a:t>
             </a:r>
             <a:r>
-              <a:rPr sz="2400" b="0">
+              <a:rPr sz="2400" b="0" i="0">
                 <a:solidFill>
                   <a:srgbClr val="141B2D"/>
                 </a:solidFill>
@@ -10031,7 +10311,7 @@
               <a:t>-   </a:t>
             </a:r>
             <a:r>
-              <a:rPr sz="2400" b="0">
+              <a:rPr sz="2400" b="0" i="0">
                 <a:solidFill>
                   <a:srgbClr val="141B2D"/>
                 </a:solidFill>
@@ -10056,7 +10336,7 @@
               <a:t>-   </a:t>
             </a:r>
             <a:r>
-              <a:rPr sz="2400" b="0">
+              <a:rPr sz="2400" b="0" i="0">
                 <a:solidFill>
                   <a:srgbClr val="141B2D"/>
                 </a:solidFill>
@@ -10081,7 +10361,7 @@
               <a:t>-   </a:t>
             </a:r>
             <a:r>
-              <a:rPr sz="2400" b="0">
+              <a:rPr sz="2400" b="0" i="0">
                 <a:solidFill>
                   <a:srgbClr val="141B2D"/>
                 </a:solidFill>
@@ -10106,7 +10386,7 @@
               <a:t>-   </a:t>
             </a:r>
             <a:r>
-              <a:rPr sz="2400" b="0">
+              <a:rPr sz="2400" b="0" i="0">
                 <a:solidFill>
                   <a:srgbClr val="141B2D"/>
                 </a:solidFill>
@@ -10124,7 +10404,7 @@
               <a:t>user_query</a:t>
             </a:r>
             <a:r>
-              <a:rPr sz="2400" b="0">
+              <a:rPr sz="2400" b="0" i="0">
                 <a:solidFill>
                   <a:srgbClr val="141B2D"/>
                 </a:solidFill>
@@ -10142,7 +10422,7 @@
               <a:t>ubi_events</a:t>
             </a:r>
             <a:r>
-              <a:rPr sz="2400" b="0">
+              <a:rPr sz="2400" b="0" i="0">
                 <a:solidFill>
                   <a:srgbClr val="141B2D"/>
                 </a:solidFill>
@@ -10440,7 +10720,7 @@
               <a:t>-   </a:t>
             </a:r>
             <a:r>
-              <a:rPr sz="2400" b="0">
+              <a:rPr sz="2400" b="0" i="0">
                 <a:solidFill>
                   <a:srgbClr val="141B2D"/>
                 </a:solidFill>
@@ -10465,7 +10745,7 @@
               <a:t>-   </a:t>
             </a:r>
             <a:r>
-              <a:rPr sz="2400" b="0">
+              <a:rPr sz="2400" b="0" i="0">
                 <a:solidFill>
                   <a:srgbClr val="141B2D"/>
                 </a:solidFill>
@@ -10490,7 +10770,7 @@
               <a:t>-   </a:t>
             </a:r>
             <a:r>
-              <a:rPr sz="2400" b="0">
+              <a:rPr sz="2400" b="0" i="0">
                 <a:solidFill>
                   <a:srgbClr val="141B2D"/>
                 </a:solidFill>
@@ -10515,7 +10795,7 @@
               <a:t>-   </a:t>
             </a:r>
             <a:r>
-              <a:rPr sz="2400" b="0">
+              <a:rPr sz="2400" b="0" i="0">
                 <a:solidFill>
                   <a:srgbClr val="005EB8"/>
                 </a:solidFill>
@@ -10982,7 +11262,7 @@
               <a:t>-   </a:t>
             </a:r>
             <a:r>
-              <a:rPr sz="2100" b="0">
+              <a:rPr sz="2100" b="0" i="0">
                 <a:solidFill>
                   <a:srgbClr val="141B2D"/>
                 </a:solidFill>
@@ -11007,7 +11287,7 @@
               <a:t>-   </a:t>
             </a:r>
             <a:r>
-              <a:rPr sz="2100" b="0">
+              <a:rPr sz="2100" b="0" i="0">
                 <a:solidFill>
                   <a:srgbClr val="141B2D"/>
                 </a:solidFill>
@@ -11032,7 +11312,7 @@
               <a:t>-   </a:t>
             </a:r>
             <a:r>
-              <a:rPr sz="2100" b="0">
+              <a:rPr sz="2100" b="0" i="0">
                 <a:solidFill>
                   <a:srgbClr val="141B2D"/>
                 </a:solidFill>
@@ -11057,7 +11337,7 @@
               <a:t>-   </a:t>
             </a:r>
             <a:r>
-              <a:rPr sz="2100" b="0">
+              <a:rPr sz="2100" b="0" i="0">
                 <a:solidFill>
                   <a:srgbClr val="141B2D"/>
                 </a:solidFill>
@@ -11277,7 +11557,7 @@
               <a:t>ubi_queries</a:t>
             </a:r>
             <a:r>
-              <a:rPr sz="2100" b="0">
+              <a:rPr sz="2100" b="0" i="0">
                 <a:solidFill>
                   <a:srgbClr val="141B2D"/>
                 </a:solidFill>
@@ -11320,7 +11600,7 @@
               <a:t>ubi_events</a:t>
             </a:r>
             <a:r>
-              <a:rPr sz="2100" b="0">
+              <a:rPr sz="2100" b="0" i="0">
                 <a:solidFill>
                   <a:srgbClr val="141B2D"/>
                 </a:solidFill>
@@ -11363,7 +11643,7 @@
               <a:t>ubi.js</a:t>
             </a:r>
             <a:r>
-              <a:rPr sz="2100" b="0">
+              <a:rPr sz="2100" b="0" i="0">
                 <a:solidFill>
                   <a:srgbClr val="141B2D"/>
                 </a:solidFill>
@@ -11388,7 +11668,7 @@
               <a:t>-   </a:t>
             </a:r>
             <a:r>
-              <a:rPr sz="2100" b="0">
+              <a:rPr sz="2100" b="0" i="0">
                 <a:solidFill>
                   <a:srgbClr val="141B2D"/>
                 </a:solidFill>
@@ -11539,7 +11819,7 @@
                 </a:solidFill>
                 <a:latin typeface="Helvetica Neue"/>
               </a:rPr>
-              <a:t>Legal department sees the schema</a:t>
+              <a:t>Legal rules won't let us see the user queries</a:t>
             </a:r>
           </a:p>
         </p:txBody>
@@ -11634,13 +11914,22 @@
               <a:t>user_query</a:t>
             </a:r>
             <a:r>
-              <a:rPr sz="2400" b="0">
+              <a:rPr sz="2400" b="0" i="0">
                 <a:solidFill>
                   <a:srgbClr val="141B2D"/>
                 </a:solidFill>
                 <a:latin typeface="Helvetica Neue"/>
               </a:rPr>
-              <a:t> is free text a person typed. It can contain anything</a:t>
+              <a:t> is free text and can contain </a:t>
+            </a:r>
+            <a:r>
+              <a:rPr sz="2400" b="0" i="1">
+                <a:solidFill>
+                  <a:srgbClr val="141B2D"/>
+                </a:solidFill>
+                <a:latin typeface="Helvetica Neue"/>
+              </a:rPr>
+              <a:t>anything</a:t>
             </a:r>
           </a:p>
           <a:p>
@@ -11659,40 +11948,13 @@
               <a:t>-   </a:t>
             </a:r>
             <a:r>
-              <a:rPr sz="2200" b="0">
+              <a:rPr sz="2400" b="0" i="0">
                 <a:solidFill>
                   <a:srgbClr val="141B2D"/>
                 </a:solidFill>
-                <a:latin typeface="Consolas"/>
-              </a:rPr>
-              <a:t>client_id</a:t>
-            </a:r>
-            <a:r>
-              <a:rPr sz="2400" b="0">
-                <a:solidFill>
-                  <a:srgbClr val="141B2D"/>
-                </a:solidFill>
-                <a:latin typeface="Helvetica Neue"/>
-              </a:rPr>
-              <a:t> and </a:t>
-            </a:r>
-            <a:r>
-              <a:rPr sz="2200" b="0">
-                <a:solidFill>
-                  <a:srgbClr val="141B2D"/>
-                </a:solidFill>
-                <a:latin typeface="Consolas"/>
-              </a:rPr>
-              <a:t>session_id</a:t>
-            </a:r>
-            <a:r>
-              <a:rPr sz="2400" b="0">
-                <a:solidFill>
-                  <a:srgbClr val="141B2D"/>
-                </a:solidFill>
-                <a:latin typeface="Helvetica Neue"/>
-              </a:rPr>
-              <a:t> make it linkable across time</a:t>
+                <a:latin typeface="Helvetica Neue"/>
+              </a:rPr>
+              <a:t>Telling users not to enter PII or PHI does not stop them</a:t>
             </a:r>
           </a:p>
           <a:p>
@@ -11711,13 +11973,40 @@
               <a:t>-   </a:t>
             </a:r>
             <a:r>
-              <a:rPr sz="2400" b="0">
+              <a:rPr sz="2200" b="0">
                 <a:solidFill>
                   <a:srgbClr val="141B2D"/>
                 </a:solidFill>
-                <a:latin typeface="Helvetica Neue"/>
-              </a:rPr>
-              <a:t>In healthcare and finance, that combination is a hard stop</a:t>
+                <a:latin typeface="Consolas"/>
+              </a:rPr>
+              <a:t>client_id</a:t>
+            </a:r>
+            <a:r>
+              <a:rPr sz="2400" b="0" i="0">
+                <a:solidFill>
+                  <a:srgbClr val="141B2D"/>
+                </a:solidFill>
+                <a:latin typeface="Helvetica Neue"/>
+              </a:rPr>
+              <a:t> and </a:t>
+            </a:r>
+            <a:r>
+              <a:rPr sz="2200" b="0">
+                <a:solidFill>
+                  <a:srgbClr val="141B2D"/>
+                </a:solidFill>
+                <a:latin typeface="Consolas"/>
+              </a:rPr>
+              <a:t>session_id</a:t>
+            </a:r>
+            <a:r>
+              <a:rPr sz="2400" b="0" i="0">
+                <a:solidFill>
+                  <a:srgbClr val="141B2D"/>
+                </a:solidFill>
+                <a:latin typeface="Helvetica Neue"/>
+              </a:rPr>
+              <a:t> make it linkable across time</a:t>
             </a:r>
           </a:p>
           <a:p>
@@ -11736,13 +12025,13 @@
               <a:t>-   </a:t>
             </a:r>
             <a:r>
-              <a:rPr sz="2400" b="0">
+              <a:rPr sz="2400" b="0" i="0">
                 <a:solidFill>
                   <a:srgbClr val="141B2D"/>
                 </a:solidFill>
                 <a:latin typeface="Helvetica Neue"/>
               </a:rPr>
-              <a:t>Zero-trust stopped being a buzzword and became a blocker to relevance tuning</a:t>
+              <a:t>Zero-trust becomes a blocker to relevance tuning</a:t>
             </a:r>
           </a:p>
         </p:txBody>
@@ -11837,7 +12126,7 @@
                 </a:solidFill>
                 <a:latin typeface="Helvetica Neue"/>
               </a:rPr>
-              <a:t>Redaction is reactive by construction</a:t>
+              <a:t>Redaction is reactive and sometimes too late</a:t>
             </a:r>
           </a:p>
         </p:txBody>
@@ -11923,7 +12212,7 @@
               <a:t>-   </a:t>
             </a:r>
             <a:r>
-              <a:rPr sz="2100" b="0">
+              <a:rPr sz="2100" b="0" i="0">
                 <a:solidFill>
                   <a:srgbClr val="141B2D"/>
                 </a:solidFill>
@@ -11948,13 +12237,13 @@
               <a:t>-   </a:t>
             </a:r>
             <a:r>
-              <a:rPr sz="2100" b="0">
+              <a:rPr sz="2100" b="0" i="0">
                 <a:solidFill>
                   <a:srgbClr val="141B2D"/>
                 </a:solidFill>
                 <a:latin typeface="Helvetica Neue"/>
               </a:rPr>
-              <a:t>You discover the failure after the fact, if at all</a:t>
+              <a:t>Leaked PII is discovered later</a:t>
             </a:r>
           </a:p>
           <a:p>
@@ -11973,7 +12262,7 @@
               <a:t>-   </a:t>
             </a:r>
             <a:r>
-              <a:rPr sz="2100" b="0">
+              <a:rPr sz="2100" b="0" i="0">
                 <a:solidFill>
                   <a:srgbClr val="141B2D"/>
                 </a:solidFill>
@@ -11998,7 +12287,7 @@
               <a:t>-   </a:t>
             </a:r>
             <a:r>
-              <a:rPr sz="2100" b="0">
+              <a:rPr sz="2100" b="0" i="0">
                 <a:solidFill>
                   <a:srgbClr val="141B2D"/>
                 </a:solidFill>
@@ -12056,7 +12345,7 @@
           <a:lstStyle/>
           <a:p>
             <a:r>
-              <a:rPr sz="1400" b="0">
+              <a:rPr sz="1400" b="0" i="0">
                 <a:solidFill>
                   <a:srgbClr val="5A647A"/>
                 </a:solidFill>
@@ -12364,7 +12653,7 @@
               <a:t>-   </a:t>
             </a:r>
             <a:r>
-              <a:rPr sz="2100" b="0">
+              <a:rPr sz="2100" b="0" i="0">
                 <a:solidFill>
                   <a:srgbClr val="141B2D"/>
                 </a:solidFill>
@@ -12389,13 +12678,13 @@
               <a:t>-   </a:t>
             </a:r>
             <a:r>
-              <a:rPr sz="2100" b="0">
+              <a:rPr sz="2100" b="0" i="0">
                 <a:solidFill>
                   <a:srgbClr val="141B2D"/>
                 </a:solidFill>
                 <a:latin typeface="Helvetica Neue"/>
               </a:rPr>
-              <a:t>It feels private. It is a vector of floats, not words</a:t>
+              <a:t>It's numbers, not words</a:t>
             </a:r>
           </a:p>
           <a:p>
@@ -12414,13 +12703,13 @@
               <a:t>-   </a:t>
             </a:r>
             <a:r>
-              <a:rPr sz="2100" b="0">
+              <a:rPr sz="2100" b="0" i="0">
                 <a:solidFill>
                   <a:srgbClr val="141B2D"/>
                 </a:solidFill>
                 <a:latin typeface="Helvetica Neue"/>
               </a:rPr>
-              <a:t>It is not private. It is a lossy encoding</a:t>
+              <a:t>It is not private, just a lossy encoding</a:t>
             </a:r>
           </a:p>
           <a:p>
@@ -12439,7 +12728,7 @@
               <a:t>-   </a:t>
             </a:r>
             <a:r>
-              <a:rPr sz="2100" b="0">
+              <a:rPr sz="2100" b="0" i="0">
                 <a:solidFill>
                   <a:srgbClr val="141B2D"/>
                 </a:solidFill>
@@ -12497,7 +12786,7 @@
           <a:lstStyle/>
           <a:p>
             <a:r>
-              <a:rPr sz="1400" b="0">
+              <a:rPr sz="1400" b="0" i="0">
                 <a:solidFill>
                   <a:srgbClr val="5A647A"/>
                 </a:solidFill>

--- a/ldp_for_search_slides.pptx
+++ b/ldp_for_search_slides.pptx
@@ -34,8 +34,6 @@
     <p:sldId id="282" r:id="rId34"/>
     <p:sldId id="283" r:id="rId35"/>
     <p:sldId id="284" r:id="rId36"/>
-    <p:sldId id="285" r:id="rId37"/>
-    <p:sldId id="286" r:id="rId38"/>
   </p:sldIdLst>
   <p:sldSz cx="12191695" cy="6858000" type="screen4x3"/>
   <p:notesSz cx="6858000" cy="9144000"/>
@@ -602,7 +600,7 @@
           <a:lstStyle/>
           <a:p>
             <a:r>
-              <a:t>Notebook section 9, run beforehand rather than live. Read the 20 documents aloud first, they fit in one breath, so the room can hold the whole index in their heads. Then let the top row speak: the raw vector hands over the intent. Do not rush this, it is the hinge of the talk. The distance column is the part people miss, so point at it. The noised vector is not merely wrong, it is 4.9 away from everything, so which document wins is close to arbitrary. The number to have ready if someone wants it: its top five candidates all sit within 0.15 of each other, while real documents in this index are at least 0.89 apart, so the ranking is a tie rather than a wrong answer. Two things to be straight about if asked. This is a nearest-neighbour lookup against the index rather than literal text inversion, which is a weaker attacker than the Morris paper on the previous slide assumes, and it still succeeds. And epsilon 1.2 is the rigged setting Part 4 comes back and confesses to.</a:t>
+              <a:t>Notebook section 9, run beforehand rather than live. Read the 20 documents aloud first, they fit in one breath, so the room can hold the whole index in their heads. Then let the top row speak: the raw vector hands over the intent. Do not rush this, it is the hinge of the talk. The distance column is the part people miss, so point at it. The noised vector is not merely wrong, it is 4.9 away from everything, so which document wins is close to arbitrary. The number to have ready if someone wants it: its top five candidates all sit within 0.15 of each other, while real documents in this index are at least 0.89 apart, so the ranking is a tie rather than a wrong answer. Two things to be straight about if asked. This is a nearest-neighbour lookup against the index rather than literal text inversion, which is a weaker attacker than the Morris paper on the previous slide assumes, and it still succeeds. And epsilon 1.2 is the rigged setting the epsilon sweep later confesses to.</a:t>
             </a:r>
           </a:p>
         </p:txBody>
@@ -882,7 +880,7 @@
           <a:lstStyle/>
           <a:p>
             <a:r>
-              <a:t>This is the distributional check. It proves the mechanism is implemented correctly. It does not prove an attacker fails, which is why the next slide exists.</a:t>
+              <a:t>This is the distributional check. It proves the mechanism is implemented correctly. It does not prove an attacker fails, which is why the next slide exists. Say what the thousand is, because the title does not: one query, one coordinate of its vector, and a thousand independent noise draws on that same true value. You cannot audit a random mechanism from one sample, so you repeat it until the shape shows. Then head off the objection someone in the room is already forming. Yes, averaging those thousand draws recovers the true value, which is exactly what the peak landing on the red line shows. That is the auditor's view rather than a usage pattern: a query is privatized once, on submit. The moment one person emits the same query a thousand times, an attacker can average it back, which is why the appendix says privatize on submit and never per keystroke. It is the asymmetry the payoff rests on, pointed the other way. Many draws from one person breaks privacy, one draw each from many people preserves it.</a:t>
             </a:r>
           </a:p>
         </p:txBody>
@@ -952,7 +950,7 @@
           <a:lstStyle/>
           <a:p>
             <a:r>
-              <a:t>Stronger evidence than the histogram, because it measures an adversary rather than a distribution. This discharges the 'verify, do not hope' promise in the abstract. Head off the obvious confusion: the previous slide used epsilon 1.2 and this axis runs to 200. Epsilon is not portable between indexes, because what matters is the noise scale relative to the spread of the coordinates, and that spread differs between the 20-document PCA and this 43,000-document one. On the baselines: the query is 'solid wood platform bed', whose class Beds holds 1,112 of the 42,994 products, so class chance is 2.6 percent and item chance 0.002 percent. Class recovery of 6 percent at epsilon 1 is low but not nothing. Do not oversell the item curve either: 13 percent at epsilon 10 is still about 5,600 times chance, so the claim is that the category leaks first, not that the item is safe. This is where the limitations slide gets its first bullet, so it lands later as a callback rather than a new admission.</a:t>
+              <a:t>The dial, made visible. Same query, same coordinate, same thousand draws. Only epsilon differs. The scale is one over epsilon, so 1.2 gives 0.833 and 10 gives 0.100, about eight times narrower. Say why the shared x axis matters: let each panel scale itself and they look identical, which is the opposite of the point. Then land both halves of the trade. At epsilon 10 the noise is finally smaller than the index itself, 0.141 against a coordinate spread of 0.171, which is why the next part shows utility jumping from 0.72 to 0.98 between epsilon 5 and 10. And that is also the cost: a spread this narrow means someone reading a single sample is reading the true value. There is no setting that is private and accurate for one query, which is what the payoff slides exist to answer.</a:t>
             </a:r>
           </a:p>
         </p:txBody>
@@ -1022,7 +1020,7 @@
           <a:lstStyle/>
           <a:p>
             <a:r>
-              <a:t>About 7 minutes. Volunteer the weakness before anyone asks. This buys credibility for Part 5.</a:t>
+              <a:t>Stronger evidence than the histogram, because it measures an adversary rather than a distribution. This discharges the 'verify, do not hope' promise in the abstract. Head off the obvious confusion: the previous slide used epsilon 1.2 and this axis runs to 200. Epsilon is not portable between indexes, because what matters is the noise scale relative to the spread of the coordinates, and that spread differs between the 20-document PCA and this 43,000-document one. On the baselines: the query is 'solid wood platform bed', whose class Beds holds 1,112 of the 42,994 products, so class chance is 2.6 percent and item chance 0.002 percent. Class recovery of 6 percent at epsilon 1 is low but not nothing. Do not oversell the item curve either: 13 percent at epsilon 10 is still about 5,600 times chance, so the claim is that the category leaks first, not that the item is safe. This is where the limitations slide gets its first bullet, so it lands later as a callback rather than a new admission.</a:t>
             </a:r>
           </a:p>
         </p:txBody>
@@ -1092,7 +1090,7 @@
           <a:lstStyle/>
           <a:p>
             <a:r>
-              <a:t>Say this yourself. If it comes out in Q&amp;A instead, the talk loses. Volunteering it is what makes Part 5 believable.</a:t>
+              <a:t>Volunteer the confession here, because no slide makes it for you any more. That demo back in Part 2 was rigged: epsilon 1.2 on a twenty document index, where the attacker learned nothing and neither did the user. Say it yourself. If it comes out in Q&amp;A instead, the talk loses, and volunteering it is what makes the payoff believable. Go to the red line first and stay there. That is the demo from Part 2, with the top hit correct 7 percent of the time against a 5 percent baseline, and the top five 45 against 25. Barely above guessing. Then sweep right to make the second point, that utility only returns as epsilon rises, and by then the attacker is reading the query too. Note the curves rise here where slide 16's rose for the attacker: up means the search still works. Exact values if asked: at epsilon 1.2, P@1 0.07 and R@5 0.45; at 3, 0.38 and 0.75; at 5, 0.72 and 0.95; at 10, 0.98 and 1.00. Resist calling epsilon 3 to 5 a usable window. P@1 of 0.38 is eight times chance, so the attacker is already doing well there. The honest version of that argument needs the real index, which is the next slide.</a:t>
             </a:r>
           </a:p>
         </p:txBody>
@@ -1162,7 +1160,7 @@
           <a:lstStyle/>
           <a:p>
             <a:r>
-              <a:t>Go to the red line first and stay there. That is the demo from Part 2, with the top hit correct 7 percent of the time against a 5 percent baseline, and the top five 45 against 25. Barely above guessing, which is the confession from the previous slide made visible. Then sweep right to make the second point, that utility only returns as epsilon rises, and by then the attacker is reading the query too. Note the curves rise here where slide 15's rose for the attacker: up means the search still works. Exact values if asked: at epsilon 1.2, P@1 0.07 and R@5 0.45; at 3, 0.38 and 0.75; at 5, 0.72 and 0.95; at 10, 0.98 and 1.00. Resist calling epsilon 3 to 5 a usable window. P@1 of 0.38 is eight times chance, so the attacker is already doing well there. The honest version of that argument needs the real index, which is the next slide.</a:t>
+              <a:t>This is the conceptual core of the talk. Everything before it was setup. LDP is not a privacy tax, it is a trade of individual resolution for population accuracy.</a:t>
             </a:r>
           </a:p>
         </p:txBody>
@@ -1232,7 +1230,7 @@
           <a:lstStyle/>
           <a:p>
             <a:r>
-              <a:t>About 8 minutes. This is the payoff and the answer to Part 4. Give it the most room.</a:t>
+              <a:t>The centerpiece, and now the only place section 11's result appears, so open with it. 480 real WANDS queries in five segments, every user privatizing independently on their own device, no readable query anywhere and no trusted intermediate step. Individual recovery per segment runs 0.020, 0.020, 0.063, 0.070 and 0.030 against chance of 0.014 to 0.031, roughly one to two and a half times chance, which is not usable. Segment identification is 5 of 5, exact. Same data, same epsilon of 1.0, two different questions. Then the plot. Take the shape first. More users, less error. The measured green line tracks the predicted grey one across four orders of magnitude. This is ordinary statistics, so say so: averaging n independent things shrinks the noise as one over root n, the same reason a poll of four thousand beats one of one thousand. Nothing here is special to privacy. Then the red line. Read it off the bottom axis: 2,300 users. That is the answer, and it is the next slide. If asked where 2,300 comes from, it is where the measured error drops under 0.128, the average spread of one coordinate across the index. That bar is strict on purpose. Two typical products sit about 0.82 apart, so the line is roughly six times stricter than just telling products apart.</a:t>
             </a:r>
           </a:p>
         </p:txBody>
@@ -1372,7 +1370,7 @@
           <a:lstStyle/>
           <a:p>
             <a:r>
-              <a:t>This is the conceptual core of the talk. Everything before it was setup. LDP is not a privacy tax, it is a trade of individual resolution for population accuracy.</a:t>
+              <a:t>Give the audience one operational number they can apply on Monday. This is it. The 2,300 is where the measured error crosses the spread of the index, 0.128, on the convergence plot. It is not a constant: error goes as one over epsilon times one over root n, so the threshold scales as one over epsilon squared. At epsilon 0.5 it is about 9,200 users, at epsilon 2 it is about 575.</a:t>
             </a:r>
           </a:p>
         </p:txBody>
@@ -1442,7 +1440,7 @@
           <a:lstStyle/>
           <a:p>
             <a:r>
-              <a:t>This is the only live notebook moment in the talk, so have the kernel primed before you walk on: run sections 1 and 2 for the model, then 10a for the cached data. Section 11 raises a NameError without 10a. If the kernel died, those three take about five seconds. Stress that no one in a segment sends a readable query, and the server does the aggregation on noised vectors only. There is no trusted intermediate step. Read the result off the notebook rather than a slide, because both halves matter. Individual recovery per segment runs 0.020, 0.020, 0.063, 0.070 and 0.030 against chance of 0.014 to 0.031, so roughly one to two and a half times chance, which is not usable. Segment identification is 5 of 5, exact. Same data, same epsilon of 1.0, two different questions.</a:t>
+              <a:t>The question everyone is holding, answered now that they have seen the evidence for every step. Step one is the reframe: there is no epsilon that is private and accurate for one query, so stop looking for it on the tradeoff curve. Point back to the attack curve for step two, because that is how you measure what an epsilon buys on an index you actually run. Step three is the convergence plot and the previous slide. Step four is the whole talk in one line: error goes as one over epsilon times one over root n, so privacy rides on epsilon alone while accuracy has two dials, and n is the one that costs nothing. If someone wants a starting number, say epsilon 1 on an index like this one and then measure, rather than giving them a figure to carry home unexamined.</a:t>
             </a:r>
           </a:p>
         </p:txBody>
@@ -1512,7 +1510,7 @@
           <a:lstStyle/>
           <a:p>
             <a:r>
-              <a:t>The centerpiece. Take the shape first. More users, less error. The measured green line tracks the predicted grey one across four orders of magnitude. This is ordinary statistics, so say so: averaging n independent things shrinks the noise as one over root n, the same reason a poll of four thousand beats one of one thousand. Nothing here is special to privacy. Then the red line. Read it off the bottom axis: 2,300 users. That is the answer, and it is the next slide. If asked where 2,300 comes from, it is where the measured error drops under 0.128, the average spread of one coordinate across the index. That bar is strict on purpose. Two typical products sit about 0.82 apart, so the line is roughly six times stricter than just telling products apart.</a:t>
+              <a:t>The reframe. Every input relevance tuning actually needs is a population statistic. Let this sit on screen for a beat before moving on.</a:t>
             </a:r>
           </a:p>
         </p:txBody>
@@ -1582,7 +1580,7 @@
           <a:lstStyle/>
           <a:p>
             <a:r>
-              <a:t>Give the audience one operational number they can apply on Monday. This is it. The 2,300 is where the measured error crosses the spread of the index, 0.128, on the convergence plot. It is not a constant: error goes as one over epsilon times one over root n, so the threshold scales as one over epsilon squared. At epsilon 0.5 it is about 9,200 users, at epsilon 2 it is about 575.</a:t>
+              <a:t>About 7 minutes. Land the integration, then be honest about what does not work.</a:t>
             </a:r>
           </a:p>
         </p:txBody>
@@ -1652,7 +1650,7 @@
           <a:lstStyle/>
           <a:p>
             <a:r>
-              <a:t>The reframe. Every input relevance tuning actually needs is a population statistic. Let this sit on screen for a beat before moving on.</a:t>
+              <a:t>Say up front that none of this is built into UBI today. ubi.js is a serializer, and the embedding, the projection and the noise are code the adopter writes and runs before handing the request to trackQuery. The notes file has the call shape and the two ways to get it wrong. The architectural payoff. The trust boundary moves to the device, which is the only place the raw query legitimately exists. The last bullet answers the obvious objection, that the people collecting the data are the ones choosing how much privacy users get. True, and the standing critique of deployed LDP. The web deployment is the answer: because the mechanism ships as JavaScript, a user, an auditor or a regulator can open devtools and check the epsilon. A server-side pipeline or a native app cannot make that claim. It turns trust us into check us, which is the same promise as the rest of the talk.</a:t>
             </a:r>
           </a:p>
         </p:txBody>
@@ -1722,7 +1720,7 @@
           <a:lstStyle/>
           <a:p>
             <a:r>
-              <a:t>About 7 minutes. Land the integration, then be honest about what does not work.</a:t>
+              <a:t>The integration question, answered concretely, and it needs no change to the UBI spec. query_attributes is typed as a free-form object for exactly this kind of thing, and the epsilon travels with the record so a reader knows the budget it was collected under. user_query is emptied rather than dropped because the published schema lists it as required. Worth knowing if someone asks: the schema contradicts itself there, since the field also carries a comment saying it is not required, for recommendation systems with no typed query. Two things to volunteer: the identifiers are deliberately identical on both sides, which is the limitation two slides later, and every dashboard that reads user_query breaks, which is the real migration cost. A float array in an object is not a knn_vector either, so averaging these at query time needs a scripted aggregation or an explicit vector mapping.</a:t>
             </a:r>
           </a:p>
         </p:txBody>
@@ -1792,7 +1790,7 @@
           <a:lstStyle/>
           <a:p>
             <a:r>
-              <a:t>Say up front that none of this is built into UBI today. ubi.js is a serializer, and the embedding, the projection and the noise are code the adopter writes and runs before handing the request to trackQuery. The notes file has the call shape and the two ways to get it wrong. The architectural payoff. The trust boundary moves to the device, which is the only place the raw query legitimately exists. The last bullet answers the obvious objection, that the people collecting the data are the ones choosing how much privacy users get. True, and the standing critique of deployed LDP. The web deployment is the answer: because the mechanism ships as JavaScript, a user, an auditor or a regulator can open devtools and check the epsilon. A server-side pipeline or a native app cannot make that claim. It turns trust us into check us, which is the same promise as the rest of the talk.</a:t>
+              <a:t>Tie back to the abstract's promise about LTR and query-intent analysis. Then name the thing that genuinely goes away. If anyone presses on the learning-to-rank bullet, be straight: LTR judgments come from clicks, and this mechanism does not touch clicks, so that signal survives because it was never protected rather than because LDP preserved it. The limitations slide says so.</a:t>
             </a:r>
           </a:p>
         </p:txBody>
@@ -1862,7 +1860,7 @@
           <a:lstStyle/>
           <a:p>
             <a:r>
-              <a:t>The integration question, answered concretely, and it needs no change to the UBI spec. query_attributes is typed as a free-form object for exactly this kind of thing, and the epsilon travels with the record so a reader knows the budget it was collected under. user_query is emptied rather than dropped because the published schema lists it as required. Worth knowing if someone asks: the schema contradicts itself there, since the field also carries a comment saying it is not required, for recommendation systems with no typed query. Two things to volunteer: the identifiers are deliberately identical on both sides, which is the limitation two slides later, and every dashboard that reads user_query breaks, which is the real migration cost. A float array in an object is not a knn_vector either, so averaging these at query time needs a scripted aggregation or an explicit vector mapping.</a:t>
+              <a:t>Every one of these is a question someone will ask. Answering them first is cheaper than answering them under pressure. Also mention that a formal epsilon-DP claim needs sensitivity calibrated to the true coordinate range. Here the vectors are L2-normalized before PCA, so the whole 20-dimensional vector has norm 1, which makes sensitivity 1.0 per coordinate conservative rather than tight. That is the answer if someone asks how sensitivity was set. Two follow-ups come off that bullet. Asked how often epsilon needs re-tuning, say when you re-embed or refit PCA, because routine additions to a large index do not move the coordinate spread, and normalizing before PCA keeps sensitivity itself stable whatever the catalogue holds. Asked whether privacy decays over time, say yes but not through epsilon: one user's repeated queries compose, and an attacker who averages that one user's own noised draws recovers the intent, which is the asymmetry of the payoff turned around. Epsilon is a budget per release rather than a standing property, so the fix is rotating or dropping client_id and session_id, not a smaller epsilon. On the long tail, which someone will ask about: the workarounds are coarser segments and longer time windows, and both are the same trade at lower resolution, because they only raise n. The genuinely different answer is shuffle DP or secure aggregation, which buys far more utility at the same epsilon but changes the architecture rather than the parameter. Worth adding that tail relevance is usually improved by retrieval work rather than behavioural signal anyway. On the last bullet, be direct: this is scoped work, not a finished privacy story for all of UBI. The query text is covered. Clicks are counts rather than vectors and want randomized response, and client_id and session_id would need rotating or dropping. That is the honest answer to the linkability half of the problem raised in Part 1.</a:t>
             </a:r>
           </a:p>
         </p:txBody>
@@ -1932,7 +1930,7 @@
           <a:lstStyle/>
           <a:p>
             <a:r>
-              <a:t>Tie back to the abstract's promise about LTR and query-intent analysis. Then name the thing that genuinely goes away. If anyone presses on the learning-to-rank bullet, be straight: LTR judgments come from clicks, and this mechanism does not touch clicks, so that signal survives because it was never protected rather than because LDP preserved it. The limitations slide says so.</a:t>
+              <a:t>Four sentences. If someone remembers only one, it should be the last.</a:t>
             </a:r>
           </a:p>
         </p:txBody>
@@ -2002,7 +2000,7 @@
           <a:lstStyle/>
           <a:p>
             <a:r>
-              <a:t>Every one of these is a question someone will ask. Answering them first is cheaper than answering them under pressure. Also mention that a formal epsilon-DP claim needs sensitivity calibrated to the true coordinate range. Here the vectors are L2-normalized before PCA, so the whole 20-dimensional vector has norm 1, which makes sensitivity 1.0 per coordinate conservative rather than tight. That is the answer if someone asks how sensitivity was set. Two follow-ups come off that bullet. Asked how often epsilon needs re-tuning, say when you re-embed or refit PCA, because routine additions to a large index do not move the coordinate spread, and normalizing before PCA keeps sensitivity itself stable whatever the catalogue holds. Asked whether privacy decays over time, say yes but not through epsilon: one user's repeated queries compose, and an attacker who averages that one user's own noised draws recovers the intent, which is the asymmetry from Part 5 turned around. Epsilon is a budget per release rather than a standing property, so the fix is rotating or dropping client_id and session_id, not a smaller epsilon. On the long tail, which someone will ask about: the workarounds are coarser segments and longer time windows, and both are the same trade at lower resolution, because they only raise n. The genuinely different answer is shuffle DP or secure aggregation, which buys far more utility at the same epsilon but changes the architecture rather than the parameter. Worth adding that tail relevance is usually improved by retrieval work rather than behavioural signal anyway. On the last bullet, be direct: this is scoped work, not a finished privacy story for all of UBI. The query text is covered. Clicks are counts rather than vectors and want randomized response, and client_id and session_id would need rotating or dropping. That is the honest answer to the linkability half of the problem raised in Part 1.</a:t>
+              <a:t>Have the notebook open on the convergence plot behind you during Q&amp;A. Likely questions: formal DP guarantee, why PCA, composition across repeated queries from one user, why not just hash the query, and how you actually test the mechanism. That last one is the takeaway slide's promise, so have the four checks ready, each catching something different. One, audit the distribution, section 8: privatize one coordinate a thousand times and confirm the peak sits on the true value and the spread is sensitivity over epsilon. That catches a mechanism that is not what you claim, a wrong scale or a sign error, and it is cheap. Two, run an actual attacker, section 10: noise a query, do nearest neighbour against your real index, and score item and class recovery against chance across an epsilon sweep. That catches correctly implemented but still leaking, which is the one that matters. Three, measure the utility cost, section 7, so you know what the epsilon test two approved leaves you. Four, check the convergence, section 11: confirm error falls as one over root n. That catches noise that is not independent across users, a reused seed or a per-session draw, because correlated noise does not cancel and the measured line flattens away from theory. Two things worth saying: none of this needs production data, and tests two and four are the ones people skip and the ones that find real problems.</a:t>
             </a:r>
           </a:p>
         </p:txBody>
@@ -2073,146 +2071,6 @@
           <a:p>
             <a:r>
               <a:t>About 8 minutes. Goal is that everyone understands the problem before any code appears.</a:t>
-            </a:r>
-          </a:p>
-        </p:txBody>
-      </p:sp>
-      <p:sp>
-        <p:nvSpPr>
-          <p:cNvPr id="4" name="Slide Number Placeholder 3"/>
-          <p:cNvSpPr>
-            <a:spLocks noGrp="1"/>
-          </p:cNvSpPr>
-          <p:nvPr>
-            <p:ph type="sldNum" idx="5" sz="quarter"/>
-          </p:nvPr>
-        </p:nvSpPr>
-        <p:spPr/>
-      </p:sp>
-    </p:spTree>
-  </p:cSld>
-  <p:clrMapOvr>
-    <a:masterClrMapping/>
-  </p:clrMapOvr>
-</p:notes>
-</file>
-
-<file path=ppt/notesSlides/notesSlide30.xml><?xml version="1.0" encoding="utf-8"?>
-<p:notes xmlns:a="http://schemas.openxmlformats.org/drawingml/2006/main" xmlns:p="http://schemas.openxmlformats.org/presentationml/2006/main" xmlns:r="http://schemas.openxmlformats.org/officeDocument/2006/relationships">
-  <p:cSld>
-    <p:spTree>
-      <p:nvGrpSpPr>
-        <p:cNvPr id="1" name=""/>
-        <p:cNvGrpSpPr/>
-        <p:nvPr/>
-      </p:nvGrpSpPr>
-      <p:grpSpPr>
-        <a:xfrm>
-          <a:off x="0" y="0"/>
-          <a:ext cx="0" cy="0"/>
-          <a:chOff x="0" y="0"/>
-          <a:chExt cx="0" cy="0"/>
-        </a:xfrm>
-      </p:grpSpPr>
-      <p:sp>
-        <p:nvSpPr>
-          <p:cNvPr id="2" name="Slide Image Placeholder 1"/>
-          <p:cNvSpPr>
-            <a:spLocks noGrp="1"/>
-          </p:cNvSpPr>
-          <p:nvPr>
-            <p:ph type="sldImg" idx="2"/>
-          </p:nvPr>
-        </p:nvSpPr>
-        <p:spPr/>
-      </p:sp>
-      <p:sp>
-        <p:nvSpPr>
-          <p:cNvPr id="3" name="Notes Placeholder 2"/>
-          <p:cNvSpPr>
-            <a:spLocks noGrp="1"/>
-          </p:cNvSpPr>
-          <p:nvPr>
-            <p:ph type="body" idx="3" sz="quarter"/>
-          </p:nvPr>
-        </p:nvSpPr>
-        <p:spPr/>
-        <p:txBody>
-          <a:bodyPr/>
-          <a:lstStyle/>
-          <a:p>
-            <a:r>
-              <a:t>Four sentences. If someone remembers only one, it should be the last.</a:t>
-            </a:r>
-          </a:p>
-        </p:txBody>
-      </p:sp>
-      <p:sp>
-        <p:nvSpPr>
-          <p:cNvPr id="4" name="Slide Number Placeholder 3"/>
-          <p:cNvSpPr>
-            <a:spLocks noGrp="1"/>
-          </p:cNvSpPr>
-          <p:nvPr>
-            <p:ph type="sldNum" idx="5" sz="quarter"/>
-          </p:nvPr>
-        </p:nvSpPr>
-        <p:spPr/>
-      </p:sp>
-    </p:spTree>
-  </p:cSld>
-  <p:clrMapOvr>
-    <a:masterClrMapping/>
-  </p:clrMapOvr>
-</p:notes>
-</file>
-
-<file path=ppt/notesSlides/notesSlide31.xml><?xml version="1.0" encoding="utf-8"?>
-<p:notes xmlns:a="http://schemas.openxmlformats.org/drawingml/2006/main" xmlns:p="http://schemas.openxmlformats.org/presentationml/2006/main" xmlns:r="http://schemas.openxmlformats.org/officeDocument/2006/relationships">
-  <p:cSld>
-    <p:spTree>
-      <p:nvGrpSpPr>
-        <p:cNvPr id="1" name=""/>
-        <p:cNvGrpSpPr/>
-        <p:nvPr/>
-      </p:nvGrpSpPr>
-      <p:grpSpPr>
-        <a:xfrm>
-          <a:off x="0" y="0"/>
-          <a:ext cx="0" cy="0"/>
-          <a:chOff x="0" y="0"/>
-          <a:chExt cx="0" cy="0"/>
-        </a:xfrm>
-      </p:grpSpPr>
-      <p:sp>
-        <p:nvSpPr>
-          <p:cNvPr id="2" name="Slide Image Placeholder 1"/>
-          <p:cNvSpPr>
-            <a:spLocks noGrp="1"/>
-          </p:cNvSpPr>
-          <p:nvPr>
-            <p:ph type="sldImg" idx="2"/>
-          </p:nvPr>
-        </p:nvSpPr>
-        <p:spPr/>
-      </p:sp>
-      <p:sp>
-        <p:nvSpPr>
-          <p:cNvPr id="3" name="Notes Placeholder 2"/>
-          <p:cNvSpPr>
-            <a:spLocks noGrp="1"/>
-          </p:cNvSpPr>
-          <p:nvPr>
-            <p:ph type="body" idx="3" sz="quarter"/>
-          </p:nvPr>
-        </p:nvSpPr>
-        <p:spPr/>
-        <p:txBody>
-          <a:bodyPr/>
-          <a:lstStyle/>
-          <a:p>
-            <a:r>
-              <a:t>Have the notebook open on the convergence plot behind you during Q&amp;A. Likely questions: formal DP guarantee, why PCA, composition across repeated queries from one user, why not just hash the query.</a:t>
             </a:r>
           </a:p>
         </p:txBody>
@@ -6968,7 +6826,7 @@
                 </a:solidFill>
                 <a:latin typeface="Helvetica Neue"/>
               </a:rPr>
-              <a:t>Verification 1: the noise is what we claim</a:t>
+              <a:t>Verification 1: the noise</a:t>
             </a:r>
           </a:p>
         </p:txBody>
@@ -7027,7 +6885,7 @@
                 </a:solidFill>
                 <a:latin typeface="Helvetica Neue"/>
               </a:rPr>
-              <a:t>A biased mechanism would put the peak off the red line, and the width is the privacy.</a:t>
+              <a:t>A biased mechanism would put the peak off the red line, and the spread is the privacy.</a:t>
             </a:r>
           </a:p>
         </p:txBody>
@@ -7122,6 +6980,160 @@
                 </a:solidFill>
                 <a:latin typeface="Helvetica Neue"/>
               </a:rPr>
+              <a:t>A higher epsilon is a narrower spread</a:t>
+            </a:r>
+          </a:p>
+        </p:txBody>
+      </p:sp>
+      <p:pic>
+        <p:nvPicPr>
+          <p:cNvPr id="3" name="Picture 2" descr="08b_epsilon_spread_comparison.png"/>
+          <p:cNvPicPr>
+            <a:picLocks noChangeAspect="1"/>
+          </p:cNvPicPr>
+          <p:nvPr/>
+        </p:nvPicPr>
+        <p:blipFill>
+          <a:blip r:embed="rId2"/>
+          <a:stretch>
+            <a:fillRect/>
+          </a:stretch>
+        </p:blipFill>
+        <p:spPr>
+          <a:xfrm>
+            <a:off x="883767" y="1417320"/>
+            <a:ext cx="10424160" cy="3906870"/>
+          </a:xfrm>
+          <a:prstGeom prst="rect">
+            <a:avLst/>
+          </a:prstGeom>
+        </p:spPr>
+      </p:pic>
+      <p:sp>
+        <p:nvSpPr>
+          <p:cNvPr id="4" name="TextBox 3"/>
+          <p:cNvSpPr txBox="1"/>
+          <p:nvPr/>
+        </p:nvSpPr>
+        <p:spPr>
+          <a:xfrm>
+            <a:off x="1325880" y="5989320"/>
+            <a:ext cx="9509760" cy="640080"/>
+          </a:xfrm>
+          <a:prstGeom prst="rect">
+            <a:avLst/>
+          </a:prstGeom>
+          <a:noFill/>
+        </p:spPr>
+        <p:txBody>
+          <a:bodyPr wrap="square">
+            <a:spAutoFit/>
+          </a:bodyPr>
+          <a:lstStyle/>
+          <a:p>
+            <a:pPr algn="ctr"/>
+            <a:r>
+              <a:rPr sz="1600" b="0" i="0">
+                <a:solidFill>
+                  <a:srgbClr val="5A647A"/>
+                </a:solidFill>
+                <a:latin typeface="Helvetica Neue"/>
+              </a:rPr>
+              <a:t>Both panels share one x axis. At epsilon 10 almost every draw lands on the red line.</a:t>
+            </a:r>
+          </a:p>
+        </p:txBody>
+      </p:sp>
+      <p:sp>
+        <p:nvSpPr>
+          <p:cNvPr id="5" name="TextBox 4"/>
+          <p:cNvSpPr txBox="1"/>
+          <p:nvPr/>
+        </p:nvSpPr>
+        <p:spPr>
+          <a:xfrm>
+            <a:off x="10405872" y="6144768"/>
+            <a:ext cx="960120" cy="411480"/>
+          </a:xfrm>
+          <a:prstGeom prst="rect">
+            <a:avLst/>
+          </a:prstGeom>
+          <a:noFill/>
+        </p:spPr>
+        <p:txBody>
+          <a:bodyPr wrap="square">
+            <a:spAutoFit/>
+          </a:bodyPr>
+          <a:lstStyle/>
+          <a:p>
+            <a:pPr algn="r"/>
+            <a:r>
+              <a:rPr sz="1300" b="0">
+                <a:solidFill>
+                  <a:srgbClr val="5A647A"/>
+                </a:solidFill>
+                <a:latin typeface="Helvetica Neue"/>
+              </a:rPr>
+              <a:t>15</a:t>
+            </a:r>
+          </a:p>
+        </p:txBody>
+      </p:sp>
+    </p:spTree>
+  </p:cSld>
+  <p:clrMapOvr>
+    <a:masterClrMapping/>
+  </p:clrMapOvr>
+</p:sld>
+</file>
+
+<file path=ppt/slides/slide16.xml><?xml version="1.0" encoding="utf-8"?>
+<p:sld xmlns:a="http://schemas.openxmlformats.org/drawingml/2006/main" xmlns:p="http://schemas.openxmlformats.org/presentationml/2006/main" xmlns:r="http://schemas.openxmlformats.org/officeDocument/2006/relationships">
+  <p:cSld>
+    <p:bg>
+      <p:bgPr>
+        <a:solidFill>
+          <a:srgbClr val="FFFFFF"/>
+        </a:solidFill>
+        <a:effectLst/>
+      </p:bgPr>
+    </p:bg>
+    <p:spTree>
+      <p:nvGrpSpPr>
+        <p:cNvPr id="1" name=""/>
+        <p:cNvGrpSpPr/>
+        <p:nvPr/>
+      </p:nvGrpSpPr>
+      <p:grpSpPr/>
+      <p:sp>
+        <p:nvSpPr>
+          <p:cNvPr id="2" name="TextBox 1"/>
+          <p:cNvSpPr txBox="1"/>
+          <p:nvPr/>
+        </p:nvSpPr>
+        <p:spPr>
+          <a:xfrm>
+            <a:off x="822960" y="411480"/>
+            <a:ext cx="10515600" cy="822960"/>
+          </a:xfrm>
+          <a:prstGeom prst="rect">
+            <a:avLst/>
+          </a:prstGeom>
+          <a:noFill/>
+        </p:spPr>
+        <p:txBody>
+          <a:bodyPr wrap="square">
+            <a:spAutoFit/>
+          </a:bodyPr>
+          <a:lstStyle/>
+          <a:p>
+            <a:r>
+              <a:rPr sz="3000" b="1">
+                <a:solidFill>
+                  <a:srgbClr val="141B2D"/>
+                </a:solidFill>
+                <a:latin typeface="Helvetica Neue"/>
+              </a:rPr>
               <a:t>Verification 2: measure an actual attacker</a:t>
             </a:r>
           </a:p>
@@ -7181,7 +7193,7 @@
                 </a:solidFill>
                 <a:latin typeface="Helvetica Neue"/>
               </a:rPr>
-              <a:t>The category leaks well before the item does. At epsilon 1, neither is usable.</a:t>
+              <a:t>The category leaks well before the item does.</a:t>
             </a:r>
           </a:p>
         </p:txBody>
@@ -7258,117 +7270,6 @@
               <a:rPr sz="1300" b="0">
                 <a:solidFill>
                   <a:srgbClr val="5A647A"/>
-                </a:solidFill>
-                <a:latin typeface="Helvetica Neue"/>
-              </a:rPr>
-              <a:t>15</a:t>
-            </a:r>
-          </a:p>
-        </p:txBody>
-      </p:sp>
-    </p:spTree>
-  </p:cSld>
-  <p:clrMapOvr>
-    <a:masterClrMapping/>
-  </p:clrMapOvr>
-</p:sld>
-</file>
-
-<file path=ppt/slides/slide16.xml><?xml version="1.0" encoding="utf-8"?>
-<p:sld xmlns:a="http://schemas.openxmlformats.org/drawingml/2006/main" xmlns:p="http://schemas.openxmlformats.org/presentationml/2006/main" xmlns:r="http://schemas.openxmlformats.org/officeDocument/2006/relationships">
-  <p:cSld>
-    <p:bg>
-      <p:bgPr>
-        <a:solidFill>
-          <a:srgbClr val="0E1A2F"/>
-        </a:solidFill>
-        <a:effectLst/>
-      </p:bgPr>
-    </p:bg>
-    <p:spTree>
-      <p:nvGrpSpPr>
-        <p:cNvPr id="1" name=""/>
-        <p:cNvGrpSpPr/>
-        <p:nvPr/>
-      </p:nvGrpSpPr>
-      <p:grpSpPr/>
-      <p:sp>
-        <p:nvSpPr>
-          <p:cNvPr id="2" name="TextBox 1"/>
-          <p:cNvSpPr txBox="1"/>
-          <p:nvPr/>
-        </p:nvSpPr>
-        <p:spPr>
-          <a:xfrm>
-            <a:off x="822960" y="2560320"/>
-            <a:ext cx="10515600" cy="1828800"/>
-          </a:xfrm>
-          <a:prstGeom prst="rect">
-            <a:avLst/>
-          </a:prstGeom>
-          <a:noFill/>
-        </p:spPr>
-        <p:txBody>
-          <a:bodyPr wrap="square">
-            <a:spAutoFit/>
-          </a:bodyPr>
-          <a:lstStyle/>
-          <a:p>
-            <a:r>
-              <a:rPr sz="1800" b="1">
-                <a:solidFill>
-                  <a:srgbClr val="5A9BE8"/>
-                </a:solidFill>
-                <a:latin typeface="Helvetica Neue"/>
-              </a:rPr>
-              <a:t>PART 4</a:t>
-            </a:r>
-          </a:p>
-          <a:p>
-            <a:pPr>
-              <a:spcBef>
-                <a:spcPts val="1000"/>
-              </a:spcBef>
-            </a:pPr>
-            <a:r>
-              <a:rPr sz="4200" b="1">
-                <a:solidFill>
-                  <a:srgbClr val="FFFFFF"/>
-                </a:solidFill>
-                <a:latin typeface="Helvetica Neue"/>
-              </a:rPr>
-              <a:t>What it costs</a:t>
-            </a:r>
-          </a:p>
-        </p:txBody>
-      </p:sp>
-      <p:sp>
-        <p:nvSpPr>
-          <p:cNvPr id="3" name="TextBox 2"/>
-          <p:cNvSpPr txBox="1"/>
-          <p:nvPr/>
-        </p:nvSpPr>
-        <p:spPr>
-          <a:xfrm>
-            <a:off x="10405872" y="6144768"/>
-            <a:ext cx="960120" cy="411480"/>
-          </a:xfrm>
-          <a:prstGeom prst="rect">
-            <a:avLst/>
-          </a:prstGeom>
-          <a:noFill/>
-        </p:spPr>
-        <p:txBody>
-          <a:bodyPr wrap="square">
-            <a:spAutoFit/>
-          </a:bodyPr>
-          <a:lstStyle/>
-          <a:p>
-            <a:pPr algn="r"/>
-            <a:r>
-              <a:rPr sz="1300" b="0">
-                <a:solidFill>
-                  <a:srgbClr val="6E7C93"/>
                 </a:solidFill>
                 <a:latin typeface="Helvetica Neue"/>
               </a:rPr>
@@ -7411,8 +7312,8 @@
         </p:nvSpPr>
         <p:spPr>
           <a:xfrm>
-            <a:off x="822960" y="640080"/>
-            <a:ext cx="10515600" cy="960120"/>
+            <a:off x="822960" y="411480"/>
+            <a:ext cx="10515600" cy="822960"/>
           </a:xfrm>
           <a:prstGeom prst="rect">
             <a:avLst/>
@@ -7426,61 +7327,41 @@
           <a:lstStyle/>
           <a:p>
             <a:r>
-              <a:rPr sz="3400" b="1">
+              <a:rPr sz="3000" b="1">
                 <a:solidFill>
                   <a:srgbClr val="141B2D"/>
                 </a:solidFill>
                 <a:latin typeface="Helvetica Neue"/>
               </a:rPr>
-              <a:t>That first demo was rigged</a:t>
-            </a:r>
-          </a:p>
-        </p:txBody>
-      </p:sp>
-      <p:sp>
-        <p:nvSpPr>
-          <p:cNvPr id="3" name="Rectangle 2"/>
-          <p:cNvSpPr/>
+              <a:t>Epsilon 1.2 is barely better than guessing</a:t>
+            </a:r>
+          </a:p>
+        </p:txBody>
+      </p:sp>
+      <p:pic>
+        <p:nvPicPr>
+          <p:cNvPr id="3" name="Picture 2" descr="07_epsilon_tradeoff_toy_index.png"/>
+          <p:cNvPicPr>
+            <a:picLocks noChangeAspect="1"/>
+          </p:cNvPicPr>
           <p:nvPr/>
-        </p:nvSpPr>
-        <p:spPr>
-          <a:xfrm>
-            <a:off x="822960" y="1276603"/>
-            <a:ext cx="1463040" cy="50800"/>
+        </p:nvPicPr>
+        <p:blipFill>
+          <a:blip r:embed="rId2"/>
+          <a:stretch>
+            <a:fillRect/>
+          </a:stretch>
+        </p:blipFill>
+        <p:spPr>
+          <a:xfrm>
+            <a:off x="2182624" y="1417320"/>
+            <a:ext cx="7826446" cy="4343400"/>
           </a:xfrm>
           <a:prstGeom prst="rect">
             <a:avLst/>
           </a:prstGeom>
-          <a:solidFill>
-            <a:srgbClr val="B4311A"/>
-          </a:solidFill>
-          <a:ln>
-            <a:noFill/>
-          </a:ln>
-          <a:effectLst/>
-        </p:spPr>
-        <p:style>
-          <a:lnRef idx="1">
-            <a:schemeClr val="accent1"/>
-          </a:lnRef>
-          <a:fillRef idx="3">
-            <a:schemeClr val="accent1"/>
-          </a:fillRef>
-          <a:effectRef idx="2">
-            <a:schemeClr val="accent1"/>
-          </a:effectRef>
-          <a:fontRef idx="minor">
-            <a:schemeClr val="lt1"/>
-          </a:fontRef>
-        </p:style>
-        <p:txBody>
-          <a:bodyPr rtlCol="0" anchor="ctr"/>
-          <a:lstStyle/>
-          <a:p>
-            <a:pPr algn="ctr"/>
-          </a:p>
-        </p:txBody>
-      </p:sp>
+        </p:spPr>
+      </p:pic>
       <p:sp>
         <p:nvSpPr>
           <p:cNvPr id="4" name="TextBox 3"/>
@@ -7489,8 +7370,8 @@
         </p:nvSpPr>
         <p:spPr>
           <a:xfrm>
-            <a:off x="822960" y="2057400"/>
-            <a:ext cx="10515600" cy="4023360"/>
+            <a:off x="1325880" y="5989320"/>
+            <a:ext cx="9509760" cy="640080"/>
           </a:xfrm>
           <a:prstGeom prst="rect">
             <a:avLst/>
@@ -7503,53 +7384,15 @@
           </a:bodyPr>
           <a:lstStyle/>
           <a:p>
-            <a:pPr marL="342900" indent="-342900">
-              <a:spcAft>
-                <a:spcPts val="2000"/>
-              </a:spcAft>
-            </a:pPr>
-            <a:r>
-              <a:rPr sz="2400" b="1">
-                <a:solidFill>
-                  <a:srgbClr val="B4311A"/>
-                </a:solidFill>
-                <a:latin typeface="Helvetica Neue"/>
-              </a:rPr>
-              <a:t>-   </a:t>
-            </a:r>
-            <a:r>
-              <a:rPr sz="2400" b="0" i="0">
-                <a:solidFill>
-                  <a:srgbClr val="141B2D"/>
-                </a:solidFill>
-                <a:latin typeface="Helvetica Neue"/>
-              </a:rPr>
-              <a:t>It ran at epsilon 1.2 on a 20 document index</a:t>
-            </a:r>
-          </a:p>
-          <a:p>
-            <a:pPr marL="342900" indent="-342900">
-              <a:spcAft>
-                <a:spcPts val="2000"/>
-              </a:spcAft>
-            </a:pPr>
-            <a:r>
-              <a:rPr sz="2400" b="1">
-                <a:solidFill>
-                  <a:srgbClr val="B4311A"/>
-                </a:solidFill>
-                <a:latin typeface="Helvetica Neue"/>
-              </a:rPr>
-              <a:t>-   </a:t>
-            </a:r>
-            <a:r>
-              <a:rPr sz="2400" b="0" i="0">
-                <a:solidFill>
-                  <a:srgbClr val="141B2D"/>
-                </a:solidFill>
-                <a:latin typeface="Helvetica Neue"/>
-              </a:rPr>
-              <a:t>The attacker learned nothing, and neither did the user</a:t>
+            <a:pPr algn="ctr"/>
+            <a:r>
+              <a:rPr sz="1600" b="0" i="0">
+                <a:solidFill>
+                  <a:srgbClr val="5A647A"/>
+                </a:solidFill>
+                <a:latin typeface="Helvetica Neue"/>
+              </a:rPr>
+              <a:t>The red line is where the Part 2 demo ran. Utility only comes back where the attacker wins too.</a:t>
             </a:r>
           </a:p>
         </p:txBody>
@@ -7623,8 +7466,8 @@
         </p:nvSpPr>
         <p:spPr>
           <a:xfrm>
-            <a:off x="822960" y="411480"/>
-            <a:ext cx="10515600" cy="822960"/>
+            <a:off x="822960" y="640080"/>
+            <a:ext cx="10515600" cy="960120"/>
           </a:xfrm>
           <a:prstGeom prst="rect">
             <a:avLst/>
@@ -7638,20 +7481,187 @@
           <a:lstStyle/>
           <a:p>
             <a:r>
-              <a:rPr sz="3000" b="1">
+              <a:rPr sz="3400" b="1">
                 <a:solidFill>
                   <a:srgbClr val="141B2D"/>
                 </a:solidFill>
                 <a:latin typeface="Helvetica Neue"/>
               </a:rPr>
-              <a:t>Epsilon 1.2 is barely better than guessing</a:t>
+              <a:t>You lose the person and keep the pattern</a:t>
+            </a:r>
+          </a:p>
+        </p:txBody>
+      </p:sp>
+      <p:sp>
+        <p:nvSpPr>
+          <p:cNvPr id="3" name="Rectangle 2"/>
+          <p:cNvSpPr/>
+          <p:nvPr/>
+        </p:nvSpPr>
+        <p:spPr>
+          <a:xfrm>
+            <a:off x="822960" y="1276603"/>
+            <a:ext cx="1463040" cy="50800"/>
+          </a:xfrm>
+          <a:prstGeom prst="rect">
+            <a:avLst/>
+          </a:prstGeom>
+          <a:solidFill>
+            <a:srgbClr val="005EB8"/>
+          </a:solidFill>
+          <a:ln>
+            <a:noFill/>
+          </a:ln>
+          <a:effectLst/>
+        </p:spPr>
+        <p:style>
+          <a:lnRef idx="1">
+            <a:schemeClr val="accent1"/>
+          </a:lnRef>
+          <a:fillRef idx="3">
+            <a:schemeClr val="accent1"/>
+          </a:fillRef>
+          <a:effectRef idx="2">
+            <a:schemeClr val="accent1"/>
+          </a:effectRef>
+          <a:fontRef idx="minor">
+            <a:schemeClr val="lt1"/>
+          </a:fontRef>
+        </p:style>
+        <p:txBody>
+          <a:bodyPr rtlCol="0" anchor="ctr"/>
+          <a:lstStyle/>
+          <a:p>
+            <a:pPr algn="ctr"/>
+          </a:p>
+        </p:txBody>
+      </p:sp>
+      <p:sp>
+        <p:nvSpPr>
+          <p:cNvPr id="4" name="TextBox 3"/>
+          <p:cNvSpPr txBox="1"/>
+          <p:nvPr/>
+        </p:nvSpPr>
+        <p:spPr>
+          <a:xfrm>
+            <a:off x="822960" y="2057400"/>
+            <a:ext cx="5120640" cy="4023360"/>
+          </a:xfrm>
+          <a:prstGeom prst="rect">
+            <a:avLst/>
+          </a:prstGeom>
+          <a:noFill/>
+        </p:spPr>
+        <p:txBody>
+          <a:bodyPr wrap="square">
+            <a:spAutoFit/>
+          </a:bodyPr>
+          <a:lstStyle/>
+          <a:p>
+            <a:pPr marL="342900" indent="-342900">
+              <a:spcAft>
+                <a:spcPts val="1400"/>
+              </a:spcAft>
+            </a:pPr>
+            <a:r>
+              <a:rPr sz="2100" b="1">
+                <a:solidFill>
+                  <a:srgbClr val="005EB8"/>
+                </a:solidFill>
+                <a:latin typeface="Helvetica Neue"/>
+              </a:rPr>
+              <a:t>-   </a:t>
+            </a:r>
+            <a:r>
+              <a:rPr sz="2100" b="0" i="0">
+                <a:solidFill>
+                  <a:srgbClr val="141B2D"/>
+                </a:solidFill>
+                <a:latin typeface="Helvetica Neue"/>
+              </a:rPr>
+              <a:t>The noise cancels when you average over many users</a:t>
+            </a:r>
+          </a:p>
+          <a:p>
+            <a:pPr marL="342900" indent="-342900">
+              <a:spcAft>
+                <a:spcPts val="1400"/>
+              </a:spcAft>
+            </a:pPr>
+            <a:r>
+              <a:rPr sz="2100" b="1">
+                <a:solidFill>
+                  <a:srgbClr val="005EB8"/>
+                </a:solidFill>
+                <a:latin typeface="Helvetica Neue"/>
+              </a:rPr>
+              <a:t>-   </a:t>
+            </a:r>
+            <a:r>
+              <a:rPr sz="2100" b="0" i="0">
+                <a:solidFill>
+                  <a:srgbClr val="141B2D"/>
+                </a:solidFill>
+                <a:latin typeface="Helvetica Neue"/>
+              </a:rPr>
+              <a:t>One person's query is unrecoverable</a:t>
+            </a:r>
+          </a:p>
+          <a:p>
+            <a:pPr marL="342900" indent="-342900">
+              <a:spcAft>
+                <a:spcPts val="1400"/>
+              </a:spcAft>
+            </a:pPr>
+            <a:r>
+              <a:rPr sz="2100" b="1">
+                <a:solidFill>
+                  <a:srgbClr val="005EB8"/>
+                </a:solidFill>
+                <a:latin typeface="Helvetica Neue"/>
+              </a:rPr>
+              <a:t>-   </a:t>
+            </a:r>
+            <a:r>
+              <a:rPr sz="2100" b="0" i="0">
+                <a:solidFill>
+                  <a:srgbClr val="141B2D"/>
+                </a:solidFill>
+                <a:latin typeface="Helvetica Neue"/>
+              </a:rPr>
+              <a:t>The trend across ten thousand people is not</a:t>
+            </a:r>
+          </a:p>
+          <a:p>
+            <a:pPr marL="342900" indent="-342900">
+              <a:spcAft>
+                <a:spcPts val="1400"/>
+              </a:spcAft>
+            </a:pPr>
+            <a:r>
+              <a:rPr sz="2100" b="1">
+                <a:solidFill>
+                  <a:srgbClr val="005EB8"/>
+                </a:solidFill>
+                <a:latin typeface="Helvetica Neue"/>
+              </a:rPr>
+              <a:t>-   </a:t>
+            </a:r>
+            <a:r>
+              <a:rPr sz="2100" b="0" i="0">
+                <a:solidFill>
+                  <a:srgbClr val="141B2D"/>
+                </a:solidFill>
+                <a:latin typeface="Helvetica Neue"/>
+              </a:rPr>
+              <a:t>That trend is all UBI needs to tune relevance</a:t>
             </a:r>
           </a:p>
         </p:txBody>
       </p:sp>
       <p:pic>
         <p:nvPicPr>
-          <p:cNvPr id="3" name="Picture 2" descr="07_epsilon_tradeoff_toy_index.png"/>
+          <p:cNvPr id="5" name="Picture 4" descr="21_cancellation.png"/>
           <p:cNvPicPr>
             <a:picLocks noChangeAspect="1"/>
           </p:cNvPicPr>
@@ -7665,8 +7675,8 @@
         </p:blipFill>
         <p:spPr>
           <a:xfrm>
-            <a:off x="2182624" y="1417320"/>
-            <a:ext cx="7826446" cy="4343400"/>
+            <a:off x="6600990" y="1874519"/>
+            <a:ext cx="4354500" cy="4023360"/>
           </a:xfrm>
           <a:prstGeom prst="rect">
             <a:avLst/>
@@ -7675,42 +7685,7 @@
       </p:pic>
       <p:sp>
         <p:nvSpPr>
-          <p:cNvPr id="4" name="TextBox 3"/>
-          <p:cNvSpPr txBox="1"/>
-          <p:nvPr/>
-        </p:nvSpPr>
-        <p:spPr>
-          <a:xfrm>
-            <a:off x="1325880" y="5989320"/>
-            <a:ext cx="9509760" cy="640080"/>
-          </a:xfrm>
-          <a:prstGeom prst="rect">
-            <a:avLst/>
-          </a:prstGeom>
-          <a:noFill/>
-        </p:spPr>
-        <p:txBody>
-          <a:bodyPr wrap="square">
-            <a:spAutoFit/>
-          </a:bodyPr>
-          <a:lstStyle/>
-          <a:p>
-            <a:pPr algn="ctr"/>
-            <a:r>
-              <a:rPr sz="1600" b="0" i="0">
-                <a:solidFill>
-                  <a:srgbClr val="5A647A"/>
-                </a:solidFill>
-                <a:latin typeface="Helvetica Neue"/>
-              </a:rPr>
-              <a:t>The red line is where the first demo ran. Utility only comes back where the attacker wins too.</a:t>
-            </a:r>
-          </a:p>
-        </p:txBody>
-      </p:sp>
-      <p:sp>
-        <p:nvSpPr>
-          <p:cNvPr id="5" name="TextBox 4"/>
+          <p:cNvPr id="6" name="TextBox 5"/>
           <p:cNvSpPr txBox="1"/>
           <p:nvPr/>
         </p:nvSpPr>
@@ -7757,7 +7732,7 @@
     <p:bg>
       <p:bgPr>
         <a:solidFill>
-          <a:srgbClr val="0E1A2F"/>
+          <a:srgbClr val="FFFFFF"/>
         </a:solidFill>
         <a:effectLst/>
       </p:bgPr>
@@ -7777,8 +7752,8 @@
         </p:nvSpPr>
         <p:spPr>
           <a:xfrm>
-            <a:off x="822960" y="2560320"/>
-            <a:ext cx="10515600" cy="1828800"/>
+            <a:off x="822960" y="411480"/>
+            <a:ext cx="10515600" cy="822960"/>
           </a:xfrm>
           <a:prstGeom prst="rect">
             <a:avLst/>
@@ -7792,29 +7767,13 @@
           <a:lstStyle/>
           <a:p>
             <a:r>
-              <a:rPr sz="1800" b="1">
-                <a:solidFill>
-                  <a:srgbClr val="5A9BE8"/>
-                </a:solidFill>
-                <a:latin typeface="Helvetica Neue"/>
-              </a:rPr>
-              <a:t>PART 5</a:t>
-            </a:r>
-          </a:p>
-          <a:p>
-            <a:pPr>
-              <a:spcBef>
-                <a:spcPts val="1000"/>
-              </a:spcBef>
-            </a:pPr>
-            <a:r>
-              <a:rPr sz="4200" b="1">
-                <a:solidFill>
-                  <a:srgbClr val="FFFFFF"/>
-                </a:solidFill>
-                <a:latin typeface="Helvetica Neue"/>
-              </a:rPr>
-              <a:t>What you keep</a:t>
+              <a:rPr sz="3000" b="1">
+                <a:solidFill>
+                  <a:srgbClr val="141B2D"/>
+                </a:solidFill>
+                <a:latin typeface="Helvetica Neue"/>
+              </a:rPr>
+              <a:t>Error falls as 1 / sqrt(users)</a:t>
             </a:r>
           </a:p>
         </p:txBody>
@@ -7827,8 +7786,8 @@
         </p:nvSpPr>
         <p:spPr>
           <a:xfrm>
-            <a:off x="10405872" y="6144768"/>
-            <a:ext cx="960120" cy="411480"/>
+            <a:off x="822960" y="1097280"/>
+            <a:ext cx="10515600" cy="457200"/>
           </a:xfrm>
           <a:prstGeom prst="rect">
             <a:avLst/>
@@ -7841,11 +7800,123 @@
           </a:bodyPr>
           <a:lstStyle/>
           <a:p>
+            <a:pPr algn="ctr"/>
+            <a:r>
+              <a:rPr sz="1500" b="0" i="0">
+                <a:solidFill>
+                  <a:srgbClr val="5A647A"/>
+                </a:solidFill>
+                <a:latin typeface="Helvetica Neue"/>
+              </a:rPr>
+              <a:t>Average the noised queries of </a:t>
+            </a:r>
+            <a:r>
+              <a:rPr sz="1300" b="0">
+                <a:solidFill>
+                  <a:srgbClr val="5A647A"/>
+                </a:solidFill>
+                <a:latin typeface="Consolas"/>
+              </a:rPr>
+              <a:t>n</a:t>
+            </a:r>
+            <a:r>
+              <a:rPr sz="1500" b="0" i="0">
+                <a:solidFill>
+                  <a:srgbClr val="5A647A"/>
+                </a:solidFill>
+                <a:latin typeface="Helvetica Neue"/>
+              </a:rPr>
+              <a:t> users in one segment, then see how far that average lands from the truth.</a:t>
+            </a:r>
+          </a:p>
+        </p:txBody>
+      </p:sp>
+      <p:pic>
+        <p:nvPicPr>
+          <p:cNvPr id="4" name="Picture 3" descr="11_aggregate_convergence.png"/>
+          <p:cNvPicPr>
+            <a:picLocks noChangeAspect="1"/>
+          </p:cNvPicPr>
+          <p:nvPr/>
+        </p:nvPicPr>
+        <p:blipFill>
+          <a:blip r:embed="rId2"/>
+          <a:stretch>
+            <a:fillRect/>
+          </a:stretch>
+        </p:blipFill>
+        <p:spPr>
+          <a:xfrm>
+            <a:off x="2781192" y="1828800"/>
+            <a:ext cx="6629310" cy="3931920"/>
+          </a:xfrm>
+          <a:prstGeom prst="rect">
+            <a:avLst/>
+          </a:prstGeom>
+        </p:spPr>
+      </p:pic>
+      <p:sp>
+        <p:nvSpPr>
+          <p:cNvPr id="5" name="TextBox 4"/>
+          <p:cNvSpPr txBox="1"/>
+          <p:nvPr/>
+        </p:nvSpPr>
+        <p:spPr>
+          <a:xfrm>
+            <a:off x="1325880" y="5989320"/>
+            <a:ext cx="9509760" cy="640080"/>
+          </a:xfrm>
+          <a:prstGeom prst="rect">
+            <a:avLst/>
+          </a:prstGeom>
+          <a:noFill/>
+        </p:spPr>
+        <p:txBody>
+          <a:bodyPr wrap="square">
+            <a:spAutoFit/>
+          </a:bodyPr>
+          <a:lstStyle/>
+          <a:p>
+            <a:pPr algn="ctr"/>
+            <a:r>
+              <a:rPr sz="1600" b="0" i="0">
+                <a:solidFill>
+                  <a:srgbClr val="5A647A"/>
+                </a:solidFill>
+                <a:latin typeface="Helvetica Neue"/>
+              </a:rPr>
+              <a:t>The red line is the smallest segment you can measure.</a:t>
+            </a:r>
+          </a:p>
+        </p:txBody>
+      </p:sp>
+      <p:sp>
+        <p:nvSpPr>
+          <p:cNvPr id="6" name="TextBox 5"/>
+          <p:cNvSpPr txBox="1"/>
+          <p:nvPr/>
+        </p:nvSpPr>
+        <p:spPr>
+          <a:xfrm>
+            <a:off x="10405872" y="6144768"/>
+            <a:ext cx="960120" cy="411480"/>
+          </a:xfrm>
+          <a:prstGeom prst="rect">
+            <a:avLst/>
+          </a:prstGeom>
+          <a:noFill/>
+        </p:spPr>
+        <p:txBody>
+          <a:bodyPr wrap="square">
+            <a:spAutoFit/>
+          </a:bodyPr>
+          <a:lstStyle/>
+          <a:p>
             <a:pPr algn="r"/>
             <a:r>
               <a:rPr sz="1300" b="0">
                 <a:solidFill>
-                  <a:srgbClr val="6E7C93"/>
+                  <a:srgbClr val="5A647A"/>
                 </a:solidFill>
                 <a:latin typeface="Helvetica Neue"/>
               </a:rPr>
@@ -8213,7 +8284,7 @@
                 </a:solidFill>
                 <a:latin typeface="Helvetica Neue"/>
               </a:rPr>
-              <a:t>The asymmetry is the whole point</a:t>
+              <a:t>How big a segment has to be</a:t>
             </a:r>
           </a:p>
         </p:txBody>
@@ -8271,7 +8342,7 @@
         <p:spPr>
           <a:xfrm>
             <a:off x="822960" y="2057400"/>
-            <a:ext cx="5120640" cy="4023360"/>
+            <a:ext cx="10515600" cy="4023360"/>
           </a:xfrm>
           <a:prstGeom prst="rect">
             <a:avLst/>
@@ -8286,11 +8357,11 @@
           <a:p>
             <a:pPr marL="342900" indent="-342900">
               <a:spcAft>
-                <a:spcPts val="1400"/>
+                <a:spcPts val="2000"/>
               </a:spcAft>
             </a:pPr>
             <a:r>
-              <a:rPr sz="2100" b="1">
+              <a:rPr sz="2400" b="1">
                 <a:solidFill>
                   <a:srgbClr val="005EB8"/>
                 </a:solidFill>
@@ -8299,23 +8370,23 @@
               <a:t>-   </a:t>
             </a:r>
             <a:r>
-              <a:rPr sz="2100" b="0" i="0">
+              <a:rPr sz="2400" b="0" i="0">
                 <a:solidFill>
                   <a:srgbClr val="141B2D"/>
                 </a:solidFill>
                 <a:latin typeface="Helvetica Neue"/>
               </a:rPr>
-              <a:t>Laplace noise is zero-mean</a:t>
+              <a:t>Error drops below the spread of the index at roughly 2,300 users</a:t>
             </a:r>
           </a:p>
           <a:p>
             <a:pPr marL="342900" indent="-342900">
               <a:spcAft>
-                <a:spcPts val="1400"/>
+                <a:spcPts val="2000"/>
               </a:spcAft>
             </a:pPr>
             <a:r>
-              <a:rPr sz="2100" b="1">
+              <a:rPr sz="2400" b="1">
                 <a:solidFill>
                   <a:srgbClr val="005EB8"/>
                 </a:solidFill>
@@ -8324,23 +8395,23 @@
               <a:t>-   </a:t>
             </a:r>
             <a:r>
-              <a:rPr sz="2100" b="0" i="0">
+              <a:rPr sz="2400" b="0" i="0">
                 <a:solidFill>
                   <a:srgbClr val="141B2D"/>
                 </a:solidFill>
                 <a:latin typeface="Helvetica Neue"/>
               </a:rPr>
-              <a:t>It cancels when you average over many independent users</a:t>
+              <a:t>That is at epsilon 1, and halving epsilon needs four times the users</a:t>
             </a:r>
           </a:p>
           <a:p>
             <a:pPr marL="342900" indent="-342900">
               <a:spcAft>
-                <a:spcPts val="1400"/>
+                <a:spcPts val="2000"/>
               </a:spcAft>
             </a:pPr>
             <a:r>
-              <a:rPr sz="2100" b="1">
+              <a:rPr sz="2400" b="1">
                 <a:solidFill>
                   <a:srgbClr val="005EB8"/>
                 </a:solidFill>
@@ -8349,23 +8420,23 @@
               <a:t>-   </a:t>
             </a:r>
             <a:r>
-              <a:rPr sz="2100" b="0" i="0">
+              <a:rPr sz="2400" b="0" i="0">
                 <a:solidFill>
                   <a:srgbClr val="141B2D"/>
                 </a:solidFill>
                 <a:latin typeface="Helvetica Neue"/>
               </a:rPr>
-              <a:t>One person's query is unrecoverable</a:t>
+              <a:t>Segments with thousands of users are measurable under LDP</a:t>
             </a:r>
           </a:p>
           <a:p>
             <a:pPr marL="342900" indent="-342900">
               <a:spcAft>
-                <a:spcPts val="1400"/>
+                <a:spcPts val="2000"/>
               </a:spcAft>
             </a:pPr>
             <a:r>
-              <a:rPr sz="2100" b="1">
+              <a:rPr sz="2400" b="1">
                 <a:solidFill>
                   <a:srgbClr val="005EB8"/>
                 </a:solidFill>
@@ -8374,23 +8445,23 @@
               <a:t>-   </a:t>
             </a:r>
             <a:r>
-              <a:rPr sz="2100" b="0" i="0">
+              <a:rPr sz="2400" b="0" i="0">
                 <a:solidFill>
                   <a:srgbClr val="141B2D"/>
                 </a:solidFill>
                 <a:latin typeface="Helvetica Neue"/>
               </a:rPr>
-              <a:t>The trend across ten thousand people is not</a:t>
+              <a:t>Segments with dozens are not measurable</a:t>
             </a:r>
           </a:p>
           <a:p>
             <a:pPr marL="342900" indent="-342900">
               <a:spcAft>
-                <a:spcPts val="1400"/>
+                <a:spcPts val="2000"/>
               </a:spcAft>
             </a:pPr>
             <a:r>
-              <a:rPr sz="2100" b="1">
+              <a:rPr sz="2400" b="1">
                 <a:solidFill>
                   <a:srgbClr val="005EB8"/>
                 </a:solidFill>
@@ -8399,44 +8470,20 @@
               <a:t>-   </a:t>
             </a:r>
             <a:r>
-              <a:rPr sz="2100" b="0" i="0">
+              <a:rPr sz="2400" b="0" i="0">
                 <a:solidFill>
                   <a:srgbClr val="141B2D"/>
                 </a:solidFill>
                 <a:latin typeface="Helvetica Neue"/>
               </a:rPr>
-              <a:t>That trend is all UBI needs to tune relevance</a:t>
-            </a:r>
-          </a:p>
-        </p:txBody>
-      </p:sp>
-      <p:pic>
-        <p:nvPicPr>
-          <p:cNvPr id="5" name="Picture 4" descr="21_cancellation.png"/>
-          <p:cNvPicPr>
-            <a:picLocks noChangeAspect="1"/>
-          </p:cNvPicPr>
-          <p:nvPr/>
-        </p:nvPicPr>
-        <p:blipFill>
-          <a:blip r:embed="rId2"/>
-          <a:stretch>
-            <a:fillRect/>
-          </a:stretch>
-        </p:blipFill>
-        <p:spPr>
-          <a:xfrm>
-            <a:off x="6600990" y="1874519"/>
-            <a:ext cx="4354500" cy="4023360"/>
-          </a:xfrm>
-          <a:prstGeom prst="rect">
-            <a:avLst/>
-          </a:prstGeom>
-        </p:spPr>
-      </p:pic>
-      <p:sp>
-        <p:nvSpPr>
-          <p:cNvPr id="6" name="TextBox 5"/>
+              <a:t>Your head terms work, but your long tail does not</a:t>
+            </a:r>
+          </a:p>
+        </p:txBody>
+      </p:sp>
+      <p:sp>
+        <p:nvSpPr>
+          <p:cNvPr id="5" name="TextBox 4"/>
           <p:cNvSpPr txBox="1"/>
           <p:nvPr/>
         </p:nvSpPr>
@@ -8483,7 +8530,7 @@
     <p:bg>
       <p:bgPr>
         <a:solidFill>
-          <a:srgbClr val="0E1A2F"/>
+          <a:srgbClr val="FFFFFF"/>
         </a:solidFill>
         <a:effectLst/>
       </p:bgPr>
@@ -8503,8 +8550,8 @@
         </p:nvSpPr>
         <p:spPr>
           <a:xfrm>
-            <a:off x="822960" y="1737360"/>
-            <a:ext cx="10515600" cy="548640"/>
+            <a:off x="822960" y="640080"/>
+            <a:ext cx="10515600" cy="960120"/>
           </a:xfrm>
           <a:prstGeom prst="rect">
             <a:avLst/>
@@ -8518,27 +8565,71 @@
           <a:lstStyle/>
           <a:p>
             <a:r>
-              <a:rPr sz="1800" b="1">
-                <a:solidFill>
-                  <a:srgbClr val="5A9BE8"/>
-                </a:solidFill>
-                <a:latin typeface="Helvetica Neue"/>
-              </a:rPr>
-              <a:t>LIVE NOTEBOOK</a:t>
-            </a:r>
-          </a:p>
-        </p:txBody>
-      </p:sp>
-      <p:sp>
-        <p:nvSpPr>
-          <p:cNvPr id="3" name="TextBox 2"/>
+              <a:rPr sz="3400" b="1">
+                <a:solidFill>
+                  <a:srgbClr val="141B2D"/>
+                </a:solidFill>
+                <a:latin typeface="Helvetica Neue"/>
+              </a:rPr>
+              <a:t>So how do you pick epsilon</a:t>
+            </a:r>
+          </a:p>
+        </p:txBody>
+      </p:sp>
+      <p:sp>
+        <p:nvSpPr>
+          <p:cNvPr id="3" name="Rectangle 2"/>
+          <p:cNvSpPr/>
+          <p:nvPr/>
+        </p:nvSpPr>
+        <p:spPr>
+          <a:xfrm>
+            <a:off x="822960" y="1276603"/>
+            <a:ext cx="1463040" cy="50800"/>
+          </a:xfrm>
+          <a:prstGeom prst="rect">
+            <a:avLst/>
+          </a:prstGeom>
+          <a:solidFill>
+            <a:srgbClr val="005EB8"/>
+          </a:solidFill>
+          <a:ln>
+            <a:noFill/>
+          </a:ln>
+          <a:effectLst/>
+        </p:spPr>
+        <p:style>
+          <a:lnRef idx="1">
+            <a:schemeClr val="accent1"/>
+          </a:lnRef>
+          <a:fillRef idx="3">
+            <a:schemeClr val="accent1"/>
+          </a:fillRef>
+          <a:effectRef idx="2">
+            <a:schemeClr val="accent1"/>
+          </a:effectRef>
+          <a:fontRef idx="minor">
+            <a:schemeClr val="lt1"/>
+          </a:fontRef>
+        </p:style>
+        <p:txBody>
+          <a:bodyPr rtlCol="0" anchor="ctr"/>
+          <a:lstStyle/>
+          <a:p>
+            <a:pPr algn="ctr"/>
+          </a:p>
+        </p:txBody>
+      </p:sp>
+      <p:sp>
+        <p:nvSpPr>
+          <p:cNvPr id="4" name="TextBox 3"/>
           <p:cNvSpPr txBox="1"/>
           <p:nvPr/>
         </p:nvSpPr>
         <p:spPr>
           <a:xfrm>
-            <a:off x="822960" y="2377440"/>
-            <a:ext cx="10515600" cy="1097280"/>
+            <a:off x="822960" y="2057400"/>
+            <a:ext cx="10515600" cy="4023360"/>
           </a:xfrm>
           <a:prstGeom prst="rect">
             <a:avLst/>
@@ -8551,28 +8642,92 @@
           </a:bodyPr>
           <a:lstStyle/>
           <a:p>
-            <a:r>
-              <a:rPr sz="3800" b="1">
-                <a:solidFill>
-                  <a:srgbClr val="FFFFFF"/>
-                </a:solidFill>
-                <a:latin typeface="Helvetica Neue"/>
-              </a:rPr>
-              <a:t>Demo: segments of real users</a:t>
-            </a:r>
-          </a:p>
-        </p:txBody>
-      </p:sp>
-      <p:sp>
-        <p:nvSpPr>
-          <p:cNvPr id="4" name="TextBox 3"/>
+            <a:pPr marL="342900" indent="-342900">
+              <a:spcAft>
+                <a:spcPts val="2000"/>
+              </a:spcAft>
+            </a:pPr>
+            <a:r>
+              <a:rPr sz="2400" b="1">
+                <a:solidFill>
+                  <a:srgbClr val="005EB8"/>
+                </a:solidFill>
+                <a:latin typeface="Helvetica Neue"/>
+              </a:rPr>
+              <a:t>-   </a:t>
+            </a:r>
+            <a:r>
+              <a:rPr sz="2400" b="0" i="0">
+                <a:solidFill>
+                  <a:srgbClr val="141B2D"/>
+                </a:solidFill>
+                <a:latin typeface="Helvetica Neue"/>
+              </a:rPr>
+              <a:t>Start at epsilon 1, then measure</a:t>
+            </a:r>
+          </a:p>
+          <a:p>
+            <a:pPr marL="342900" indent="-342900">
+              <a:spcAft>
+                <a:spcPts val="2000"/>
+              </a:spcAft>
+            </a:pPr>
+            <a:r>
+              <a:rPr sz="2400" b="1">
+                <a:solidFill>
+                  <a:srgbClr val="005EB8"/>
+                </a:solidFill>
+                <a:latin typeface="Helvetica Neue"/>
+              </a:rPr>
+              <a:t>-   </a:t>
+            </a:r>
+            <a:r>
+              <a:rPr sz="2400" b="0" i="0">
+                <a:solidFill>
+                  <a:srgbClr val="141B2D"/>
+                </a:solidFill>
+                <a:latin typeface="Helvetica Neue"/>
+              </a:rPr>
+              <a:t>Pick it for the privacy you need, because utility also depends on the number of users</a:t>
+            </a:r>
+          </a:p>
+          <a:p>
+            <a:pPr marL="342900" indent="-342900">
+              <a:spcAft>
+                <a:spcPts val="2000"/>
+              </a:spcAft>
+            </a:pPr>
+            <a:r>
+              <a:rPr sz="2400" b="1">
+                <a:solidFill>
+                  <a:srgbClr val="005EB8"/>
+                </a:solidFill>
+                <a:latin typeface="Helvetica Neue"/>
+              </a:rPr>
+              <a:t>-   </a:t>
+            </a:r>
+            <a:r>
+              <a:rPr sz="2400" b="0" i="0">
+                <a:solidFill>
+                  <a:srgbClr val="005EB8"/>
+                </a:solidFill>
+                <a:latin typeface="Helvetica Neue"/>
+              </a:rPr>
+              <a:t>Segments too small? Add users or widen them, and leave epsilon alone</a:t>
+            </a:r>
+          </a:p>
+        </p:txBody>
+      </p:sp>
+      <p:sp>
+        <p:nvSpPr>
+          <p:cNvPr id="5" name="TextBox 4"/>
           <p:cNvSpPr txBox="1"/>
           <p:nvPr/>
         </p:nvSpPr>
         <p:spPr>
           <a:xfrm>
-            <a:off x="822960" y="3749039"/>
-            <a:ext cx="10515600" cy="1828800"/>
+            <a:off x="10405872" y="6144768"/>
+            <a:ext cx="960120" cy="411480"/>
           </a:xfrm>
           <a:prstGeom prst="rect">
             <a:avLst/>
@@ -8585,82 +8740,11 @@
           </a:bodyPr>
           <a:lstStyle/>
           <a:p>
-            <a:pPr>
-              <a:spcAft>
-                <a:spcPts val="1200"/>
-              </a:spcAft>
-            </a:pPr>
-            <a:r>
-              <a:rPr sz="2200" b="0">
-                <a:solidFill>
-                  <a:srgbClr val="B8C2D4"/>
-                </a:solidFill>
-                <a:latin typeface="Helvetica Neue"/>
-              </a:rPr>
-              <a:t>Notebook section 11</a:t>
-            </a:r>
-          </a:p>
-          <a:p>
-            <a:pPr>
-              <a:spcAft>
-                <a:spcPts val="1200"/>
-              </a:spcAft>
-            </a:pPr>
-            <a:r>
-              <a:rPr sz="2200" b="0">
-                <a:solidFill>
-                  <a:srgbClr val="B8C2D4"/>
-                </a:solidFill>
-                <a:latin typeface="Helvetica Neue"/>
-              </a:rPr>
-              <a:t>480 real queries from Wayfair's WANDS dataset, grouped into 5 segments</a:t>
-            </a:r>
-          </a:p>
-          <a:p>
-            <a:pPr>
-              <a:spcAft>
-                <a:spcPts val="1200"/>
-              </a:spcAft>
-            </a:pPr>
-            <a:r>
-              <a:rPr sz="2200" b="0">
-                <a:solidFill>
-                  <a:srgbClr val="B8C2D4"/>
-                </a:solidFill>
-                <a:latin typeface="Helvetica Neue"/>
-              </a:rPr>
-              <a:t>Every user privatizes independently, on their own device</a:t>
-            </a:r>
-          </a:p>
-        </p:txBody>
-      </p:sp>
-      <p:sp>
-        <p:nvSpPr>
-          <p:cNvPr id="5" name="TextBox 4"/>
-          <p:cNvSpPr txBox="1"/>
-          <p:nvPr/>
-        </p:nvSpPr>
-        <p:spPr>
-          <a:xfrm>
-            <a:off x="10405872" y="6144768"/>
-            <a:ext cx="960120" cy="411480"/>
-          </a:xfrm>
-          <a:prstGeom prst="rect">
-            <a:avLst/>
-          </a:prstGeom>
-          <a:noFill/>
-        </p:spPr>
-        <p:txBody>
-          <a:bodyPr wrap="square">
-            <a:spAutoFit/>
-          </a:bodyPr>
-          <a:lstStyle/>
-          <a:p>
             <a:pPr algn="r"/>
             <a:r>
               <a:rPr sz="1300" b="0">
                 <a:solidFill>
-                  <a:srgbClr val="6E7C93"/>
+                  <a:srgbClr val="5A647A"/>
                 </a:solidFill>
                 <a:latin typeface="Helvetica Neue"/>
               </a:rPr>
@@ -8703,8 +8787,8 @@
         </p:nvSpPr>
         <p:spPr>
           <a:xfrm>
-            <a:off x="822960" y="411480"/>
-            <a:ext cx="10515600" cy="822960"/>
+            <a:off x="1005840" y="2286000"/>
+            <a:ext cx="10149840" cy="2377440"/>
           </a:xfrm>
           <a:prstGeom prst="rect">
             <a:avLst/>
@@ -8717,14 +8801,35 @@
           </a:bodyPr>
           <a:lstStyle/>
           <a:p>
-            <a:r>
-              <a:rPr sz="3000" b="1">
+            <a:pPr>
+              <a:spcAft>
+                <a:spcPts val="1600"/>
+              </a:spcAft>
+            </a:pPr>
+            <a:r>
+              <a:rPr sz="3400" b="1">
                 <a:solidFill>
                   <a:srgbClr val="141B2D"/>
                 </a:solidFill>
                 <a:latin typeface="Helvetica Neue"/>
               </a:rPr>
-              <a:t>Error falls as 1 / sqrt(users)</a:t>
+              <a:t>LDP does not cost you your analytics.</a:t>
+            </a:r>
+          </a:p>
+          <a:p>
+            <a:pPr>
+              <a:spcAft>
+                <a:spcPts val="1600"/>
+              </a:spcAft>
+            </a:pPr>
+            <a:r>
+              <a:rPr sz="3400" b="0">
+                <a:solidFill>
+                  <a:srgbClr val="005EB8"/>
+                </a:solidFill>
+                <a:latin typeface="Helvetica Neue"/>
+              </a:rPr>
+              <a:t>It costs you the ability to ask about one person.</a:t>
             </a:r>
           </a:p>
         </p:txBody>
@@ -8732,118 +8837,6 @@
       <p:sp>
         <p:nvSpPr>
           <p:cNvPr id="3" name="TextBox 2"/>
-          <p:cNvSpPr txBox="1"/>
-          <p:nvPr/>
-        </p:nvSpPr>
-        <p:spPr>
-          <a:xfrm>
-            <a:off x="822960" y="1097280"/>
-            <a:ext cx="10515600" cy="457200"/>
-          </a:xfrm>
-          <a:prstGeom prst="rect">
-            <a:avLst/>
-          </a:prstGeom>
-          <a:noFill/>
-        </p:spPr>
-        <p:txBody>
-          <a:bodyPr wrap="square">
-            <a:spAutoFit/>
-          </a:bodyPr>
-          <a:lstStyle/>
-          <a:p>
-            <a:pPr algn="ctr"/>
-            <a:r>
-              <a:rPr sz="1500" b="0" i="0">
-                <a:solidFill>
-                  <a:srgbClr val="5A647A"/>
-                </a:solidFill>
-                <a:latin typeface="Helvetica Neue"/>
-              </a:rPr>
-              <a:t>Average the noised queries of </a:t>
-            </a:r>
-            <a:r>
-              <a:rPr sz="1300" b="0">
-                <a:solidFill>
-                  <a:srgbClr val="5A647A"/>
-                </a:solidFill>
-                <a:latin typeface="Consolas"/>
-              </a:rPr>
-              <a:t>n</a:t>
-            </a:r>
-            <a:r>
-              <a:rPr sz="1500" b="0" i="0">
-                <a:solidFill>
-                  <a:srgbClr val="5A647A"/>
-                </a:solidFill>
-                <a:latin typeface="Helvetica Neue"/>
-              </a:rPr>
-              <a:t> users in one segment, then see how far that average lands from the truth.</a:t>
-            </a:r>
-          </a:p>
-        </p:txBody>
-      </p:sp>
-      <p:pic>
-        <p:nvPicPr>
-          <p:cNvPr id="4" name="Picture 3" descr="11_aggregate_convergence.png"/>
-          <p:cNvPicPr>
-            <a:picLocks noChangeAspect="1"/>
-          </p:cNvPicPr>
-          <p:nvPr/>
-        </p:nvPicPr>
-        <p:blipFill>
-          <a:blip r:embed="rId2"/>
-          <a:stretch>
-            <a:fillRect/>
-          </a:stretch>
-        </p:blipFill>
-        <p:spPr>
-          <a:xfrm>
-            <a:off x="2781192" y="1828800"/>
-            <a:ext cx="6629310" cy="3931920"/>
-          </a:xfrm>
-          <a:prstGeom prst="rect">
-            <a:avLst/>
-          </a:prstGeom>
-        </p:spPr>
-      </p:pic>
-      <p:sp>
-        <p:nvSpPr>
-          <p:cNvPr id="5" name="TextBox 4"/>
-          <p:cNvSpPr txBox="1"/>
-          <p:nvPr/>
-        </p:nvSpPr>
-        <p:spPr>
-          <a:xfrm>
-            <a:off x="1325880" y="5989320"/>
-            <a:ext cx="9509760" cy="640080"/>
-          </a:xfrm>
-          <a:prstGeom prst="rect">
-            <a:avLst/>
-          </a:prstGeom>
-          <a:noFill/>
-        </p:spPr>
-        <p:txBody>
-          <a:bodyPr wrap="square">
-            <a:spAutoFit/>
-          </a:bodyPr>
-          <a:lstStyle/>
-          <a:p>
-            <a:pPr algn="ctr"/>
-            <a:r>
-              <a:rPr sz="1600" b="0" i="0">
-                <a:solidFill>
-                  <a:srgbClr val="5A647A"/>
-                </a:solidFill>
-                <a:latin typeface="Helvetica Neue"/>
-              </a:rPr>
-              <a:t>The red line is the smallest segment you can measure.</a:t>
-            </a:r>
-          </a:p>
-        </p:txBody>
-      </p:sp>
-      <p:sp>
-        <p:nvSpPr>
-          <p:cNvPr id="6" name="TextBox 5"/>
           <p:cNvSpPr txBox="1"/>
           <p:nvPr/>
         </p:nvSpPr>
@@ -8890,7 +8883,7 @@
     <p:bg>
       <p:bgPr>
         <a:solidFill>
-          <a:srgbClr val="FFFFFF"/>
+          <a:srgbClr val="0E1A2F"/>
         </a:solidFill>
         <a:effectLst/>
       </p:bgPr>
@@ -8910,8 +8903,8 @@
         </p:nvSpPr>
         <p:spPr>
           <a:xfrm>
-            <a:off x="822960" y="640080"/>
-            <a:ext cx="10515600" cy="960120"/>
+            <a:off x="822960" y="2560320"/>
+            <a:ext cx="10515600" cy="1828800"/>
           </a:xfrm>
           <a:prstGeom prst="rect">
             <a:avLst/>
@@ -8925,71 +8918,43 @@
           <a:lstStyle/>
           <a:p>
             <a:r>
-              <a:rPr sz="3400" b="1">
-                <a:solidFill>
-                  <a:srgbClr val="141B2D"/>
-                </a:solidFill>
-                <a:latin typeface="Helvetica Neue"/>
-              </a:rPr>
-              <a:t>How big a segment has to be</a:t>
-            </a:r>
-          </a:p>
-        </p:txBody>
-      </p:sp>
-      <p:sp>
-        <p:nvSpPr>
-          <p:cNvPr id="3" name="Rectangle 2"/>
-          <p:cNvSpPr/>
-          <p:nvPr/>
-        </p:nvSpPr>
-        <p:spPr>
-          <a:xfrm>
-            <a:off x="822960" y="1276603"/>
-            <a:ext cx="1463040" cy="50800"/>
-          </a:xfrm>
-          <a:prstGeom prst="rect">
-            <a:avLst/>
-          </a:prstGeom>
-          <a:solidFill>
-            <a:srgbClr val="005EB8"/>
-          </a:solidFill>
-          <a:ln>
-            <a:noFill/>
-          </a:ln>
-          <a:effectLst/>
-        </p:spPr>
-        <p:style>
-          <a:lnRef idx="1">
-            <a:schemeClr val="accent1"/>
-          </a:lnRef>
-          <a:fillRef idx="3">
-            <a:schemeClr val="accent1"/>
-          </a:fillRef>
-          <a:effectRef idx="2">
-            <a:schemeClr val="accent1"/>
-          </a:effectRef>
-          <a:fontRef idx="minor">
-            <a:schemeClr val="lt1"/>
-          </a:fontRef>
-        </p:style>
-        <p:txBody>
-          <a:bodyPr rtlCol="0" anchor="ctr"/>
-          <a:lstStyle/>
-          <a:p>
-            <a:pPr algn="ctr"/>
-          </a:p>
-        </p:txBody>
-      </p:sp>
-      <p:sp>
-        <p:nvSpPr>
-          <p:cNvPr id="4" name="TextBox 3"/>
+              <a:rPr sz="1800" b="1">
+                <a:solidFill>
+                  <a:srgbClr val="5A9BE8"/>
+                </a:solidFill>
+                <a:latin typeface="Helvetica Neue"/>
+              </a:rPr>
+              <a:t>PART 4</a:t>
+            </a:r>
+          </a:p>
+          <a:p>
+            <a:pPr>
+              <a:spcBef>
+                <a:spcPts val="1000"/>
+              </a:spcBef>
+            </a:pPr>
+            <a:r>
+              <a:rPr sz="4200" b="1">
+                <a:solidFill>
+                  <a:srgbClr val="FFFFFF"/>
+                </a:solidFill>
+                <a:latin typeface="Helvetica Neue"/>
+              </a:rPr>
+              <a:t>Back in OpenSearch</a:t>
+            </a:r>
+          </a:p>
+        </p:txBody>
+      </p:sp>
+      <p:sp>
+        <p:nvSpPr>
+          <p:cNvPr id="3" name="TextBox 2"/>
           <p:cNvSpPr txBox="1"/>
           <p:nvPr/>
         </p:nvSpPr>
         <p:spPr>
           <a:xfrm>
-            <a:off x="822960" y="2057400"/>
-            <a:ext cx="10515600" cy="4023360"/>
+            <a:off x="10405872" y="6144768"/>
+            <a:ext cx="960120" cy="411480"/>
           </a:xfrm>
           <a:prstGeom prst="rect">
             <a:avLst/>
@@ -9002,159 +8967,11 @@
           </a:bodyPr>
           <a:lstStyle/>
           <a:p>
-            <a:pPr marL="342900" indent="-342900">
-              <a:spcAft>
-                <a:spcPts val="2000"/>
-              </a:spcAft>
-            </a:pPr>
-            <a:r>
-              <a:rPr sz="2400" b="1">
-                <a:solidFill>
-                  <a:srgbClr val="005EB8"/>
-                </a:solidFill>
-                <a:latin typeface="Helvetica Neue"/>
-              </a:rPr>
-              <a:t>-   </a:t>
-            </a:r>
-            <a:r>
-              <a:rPr sz="2400" b="0" i="0">
-                <a:solidFill>
-                  <a:srgbClr val="141B2D"/>
-                </a:solidFill>
-                <a:latin typeface="Helvetica Neue"/>
-              </a:rPr>
-              <a:t>Error drops below the spread of the index at roughly 2,300 users</a:t>
-            </a:r>
-          </a:p>
-          <a:p>
-            <a:pPr marL="342900" indent="-342900">
-              <a:spcAft>
-                <a:spcPts val="2000"/>
-              </a:spcAft>
-            </a:pPr>
-            <a:r>
-              <a:rPr sz="2400" b="1">
-                <a:solidFill>
-                  <a:srgbClr val="005EB8"/>
-                </a:solidFill>
-                <a:latin typeface="Helvetica Neue"/>
-              </a:rPr>
-              <a:t>-   </a:t>
-            </a:r>
-            <a:r>
-              <a:rPr sz="2400" b="0" i="0">
-                <a:solidFill>
-                  <a:srgbClr val="141B2D"/>
-                </a:solidFill>
-                <a:latin typeface="Helvetica Neue"/>
-              </a:rPr>
-              <a:t>That is at epsilon 1, and halving epsilon needs four times the users</a:t>
-            </a:r>
-          </a:p>
-          <a:p>
-            <a:pPr marL="342900" indent="-342900">
-              <a:spcAft>
-                <a:spcPts val="2000"/>
-              </a:spcAft>
-            </a:pPr>
-            <a:r>
-              <a:rPr sz="2400" b="1">
-                <a:solidFill>
-                  <a:srgbClr val="005EB8"/>
-                </a:solidFill>
-                <a:latin typeface="Helvetica Neue"/>
-              </a:rPr>
-              <a:t>-   </a:t>
-            </a:r>
-            <a:r>
-              <a:rPr sz="2400" b="0" i="0">
-                <a:solidFill>
-                  <a:srgbClr val="141B2D"/>
-                </a:solidFill>
-                <a:latin typeface="Helvetica Neue"/>
-              </a:rPr>
-              <a:t>Segments with thousands of users are measurable under LDP</a:t>
-            </a:r>
-          </a:p>
-          <a:p>
-            <a:pPr marL="342900" indent="-342900">
-              <a:spcAft>
-                <a:spcPts val="2000"/>
-              </a:spcAft>
-            </a:pPr>
-            <a:r>
-              <a:rPr sz="2400" b="1">
-                <a:solidFill>
-                  <a:srgbClr val="005EB8"/>
-                </a:solidFill>
-                <a:latin typeface="Helvetica Neue"/>
-              </a:rPr>
-              <a:t>-   </a:t>
-            </a:r>
-            <a:r>
-              <a:rPr sz="2400" b="0" i="0">
-                <a:solidFill>
-                  <a:srgbClr val="141B2D"/>
-                </a:solidFill>
-                <a:latin typeface="Helvetica Neue"/>
-              </a:rPr>
-              <a:t>Segments with dozens are not measurable</a:t>
-            </a:r>
-          </a:p>
-          <a:p>
-            <a:pPr marL="342900" indent="-342900">
-              <a:spcAft>
-                <a:spcPts val="2000"/>
-              </a:spcAft>
-            </a:pPr>
-            <a:r>
-              <a:rPr sz="2400" b="1">
-                <a:solidFill>
-                  <a:srgbClr val="005EB8"/>
-                </a:solidFill>
-                <a:latin typeface="Helvetica Neue"/>
-              </a:rPr>
-              <a:t>-   </a:t>
-            </a:r>
-            <a:r>
-              <a:rPr sz="2400" b="0" i="0">
-                <a:solidFill>
-                  <a:srgbClr val="141B2D"/>
-                </a:solidFill>
-                <a:latin typeface="Helvetica Neue"/>
-              </a:rPr>
-              <a:t>Your head terms work, but your long tail does not</a:t>
-            </a:r>
-          </a:p>
-        </p:txBody>
-      </p:sp>
-      <p:sp>
-        <p:nvSpPr>
-          <p:cNvPr id="5" name="TextBox 4"/>
-          <p:cNvSpPr txBox="1"/>
-          <p:nvPr/>
-        </p:nvSpPr>
-        <p:spPr>
-          <a:xfrm>
-            <a:off x="10405872" y="6144768"/>
-            <a:ext cx="960120" cy="411480"/>
-          </a:xfrm>
-          <a:prstGeom prst="rect">
-            <a:avLst/>
-          </a:prstGeom>
-          <a:noFill/>
-        </p:spPr>
-        <p:txBody>
-          <a:bodyPr wrap="square">
-            <a:spAutoFit/>
-          </a:bodyPr>
-          <a:lstStyle/>
-          <a:p>
             <a:pPr algn="r"/>
             <a:r>
               <a:rPr sz="1300" b="0">
                 <a:solidFill>
-                  <a:srgbClr val="5A647A"/>
+                  <a:srgbClr val="6E7C93"/>
                 </a:solidFill>
                 <a:latin typeface="Helvetica Neue"/>
               </a:rPr>
@@ -9197,8 +9014,8 @@
         </p:nvSpPr>
         <p:spPr>
           <a:xfrm>
-            <a:off x="1005840" y="2286000"/>
-            <a:ext cx="10149840" cy="2377440"/>
+            <a:off x="822960" y="640080"/>
+            <a:ext cx="10515600" cy="960120"/>
           </a:xfrm>
           <a:prstGeom prst="rect">
             <a:avLst/>
@@ -9211,42 +9028,273 @@
           </a:bodyPr>
           <a:lstStyle/>
           <a:p>
-            <a:pPr>
+            <a:r>
+              <a:rPr sz="3400" b="1">
+                <a:solidFill>
+                  <a:srgbClr val="141B2D"/>
+                </a:solidFill>
+                <a:latin typeface="Helvetica Neue"/>
+              </a:rPr>
+              <a:t>Where the noise gets injected</a:t>
+            </a:r>
+          </a:p>
+        </p:txBody>
+      </p:sp>
+      <p:sp>
+        <p:nvSpPr>
+          <p:cNvPr id="3" name="Rectangle 2"/>
+          <p:cNvSpPr/>
+          <p:nvPr/>
+        </p:nvSpPr>
+        <p:spPr>
+          <a:xfrm>
+            <a:off x="822960" y="1276603"/>
+            <a:ext cx="1463040" cy="50800"/>
+          </a:xfrm>
+          <a:prstGeom prst="rect">
+            <a:avLst/>
+          </a:prstGeom>
+          <a:solidFill>
+            <a:srgbClr val="005EB8"/>
+          </a:solidFill>
+          <a:ln>
+            <a:noFill/>
+          </a:ln>
+          <a:effectLst/>
+        </p:spPr>
+        <p:style>
+          <a:lnRef idx="1">
+            <a:schemeClr val="accent1"/>
+          </a:lnRef>
+          <a:fillRef idx="3">
+            <a:schemeClr val="accent1"/>
+          </a:fillRef>
+          <a:effectRef idx="2">
+            <a:schemeClr val="accent1"/>
+          </a:effectRef>
+          <a:fontRef idx="minor">
+            <a:schemeClr val="lt1"/>
+          </a:fontRef>
+        </p:style>
+        <p:txBody>
+          <a:bodyPr rtlCol="0" anchor="ctr"/>
+          <a:lstStyle/>
+          <a:p>
+            <a:pPr algn="ctr"/>
+          </a:p>
+        </p:txBody>
+      </p:sp>
+      <p:sp>
+        <p:nvSpPr>
+          <p:cNvPr id="4" name="TextBox 3"/>
+          <p:cNvSpPr txBox="1"/>
+          <p:nvPr/>
+        </p:nvSpPr>
+        <p:spPr>
+          <a:xfrm>
+            <a:off x="822960" y="2057400"/>
+            <a:ext cx="5120640" cy="4023360"/>
+          </a:xfrm>
+          <a:prstGeom prst="rect">
+            <a:avLst/>
+          </a:prstGeom>
+          <a:noFill/>
+        </p:spPr>
+        <p:txBody>
+          <a:bodyPr wrap="square">
+            <a:spAutoFit/>
+          </a:bodyPr>
+          <a:lstStyle/>
+          <a:p>
+            <a:pPr marL="342900" indent="-342900">
               <a:spcAft>
-                <a:spcPts val="1600"/>
+                <a:spcPts val="1400"/>
               </a:spcAft>
             </a:pPr>
             <a:r>
-              <a:rPr sz="3400" b="1">
+              <a:rPr sz="2100" b="1">
+                <a:solidFill>
+                  <a:srgbClr val="005EB8"/>
+                </a:solidFill>
+                <a:latin typeface="Helvetica Neue"/>
+              </a:rPr>
+              <a:t>-   </a:t>
+            </a:r>
+            <a:r>
+              <a:rPr sz="2100" b="0" i="0">
                 <a:solidFill>
                   <a:srgbClr val="141B2D"/>
                 </a:solidFill>
                 <a:latin typeface="Helvetica Neue"/>
               </a:rPr>
-              <a:t>LDP does not cost you your analytics.</a:t>
-            </a:r>
-          </a:p>
-          <a:p>
-            <a:pPr>
+              <a:t>On the device, before </a:t>
+            </a:r>
+            <a:r>
+              <a:rPr sz="1900" b="0">
+                <a:solidFill>
+                  <a:srgbClr val="141B2D"/>
+                </a:solidFill>
+                <a:latin typeface="Consolas"/>
+              </a:rPr>
+              <a:t>ubi.js</a:t>
+            </a:r>
+            <a:r>
+              <a:rPr sz="2100" b="0" i="0">
+                <a:solidFill>
+                  <a:srgbClr val="141B2D"/>
+                </a:solidFill>
+                <a:latin typeface="Helvetica Neue"/>
+              </a:rPr>
+              <a:t> sends the event</a:t>
+            </a:r>
+          </a:p>
+          <a:p>
+            <a:pPr marL="342900" indent="-342900">
               <a:spcAft>
-                <a:spcPts val="1600"/>
+                <a:spcPts val="1400"/>
               </a:spcAft>
             </a:pPr>
             <a:r>
-              <a:rPr sz="3400" b="0">
+              <a:rPr sz="2100" b="1">
                 <a:solidFill>
                   <a:srgbClr val="005EB8"/>
                 </a:solidFill>
                 <a:latin typeface="Helvetica Neue"/>
               </a:rPr>
-              <a:t>It costs you the ability to ask about one person.</a:t>
-            </a:r>
-          </a:p>
-        </p:txBody>
-      </p:sp>
-      <p:sp>
-        <p:nvSpPr>
-          <p:cNvPr id="3" name="TextBox 2"/>
+              <a:t>-   </a:t>
+            </a:r>
+            <a:r>
+              <a:rPr sz="2100" b="0" i="0">
+                <a:solidFill>
+                  <a:srgbClr val="141B2D"/>
+                </a:solidFill>
+                <a:latin typeface="Helvetica Neue"/>
+              </a:rPr>
+              <a:t>Aggregation happens at query time over the noised data</a:t>
+            </a:r>
+          </a:p>
+          <a:p>
+            <a:pPr marL="342900" indent="-342900">
+              <a:spcAft>
+                <a:spcPts val="1400"/>
+              </a:spcAft>
+            </a:pPr>
+            <a:r>
+              <a:rPr sz="2100" b="1">
+                <a:solidFill>
+                  <a:srgbClr val="005EB8"/>
+                </a:solidFill>
+                <a:latin typeface="Helvetica Neue"/>
+              </a:rPr>
+              <a:t>-   </a:t>
+            </a:r>
+            <a:r>
+              <a:rPr sz="2100" b="0" i="0">
+                <a:solidFill>
+                  <a:srgbClr val="141B2D"/>
+                </a:solidFill>
+                <a:latin typeface="Helvetica Neue"/>
+              </a:rPr>
+              <a:t>Nothing downstream needs to be trusted, because nothing downstream has the original</a:t>
+            </a:r>
+          </a:p>
+          <a:p>
+            <a:pPr marL="342900" indent="-342900">
+              <a:spcAft>
+                <a:spcPts val="1400"/>
+              </a:spcAft>
+            </a:pPr>
+            <a:r>
+              <a:rPr sz="2100" b="1">
+                <a:solidFill>
+                  <a:srgbClr val="005EB8"/>
+                </a:solidFill>
+                <a:latin typeface="Helvetica Neue"/>
+              </a:rPr>
+              <a:t>-   </a:t>
+            </a:r>
+            <a:r>
+              <a:rPr sz="2100" b="0" i="0">
+                <a:solidFill>
+                  <a:srgbClr val="141B2D"/>
+                </a:solidFill>
+                <a:latin typeface="Helvetica Neue"/>
+              </a:rPr>
+              <a:t>You set epsilon in the client you ship</a:t>
+            </a:r>
+          </a:p>
+        </p:txBody>
+      </p:sp>
+      <p:pic>
+        <p:nvPicPr>
+          <p:cNvPr id="5" name="Picture 4" descr="28_trust_boundary.png"/>
+          <p:cNvPicPr>
+            <a:picLocks noChangeAspect="1"/>
+          </p:cNvPicPr>
+          <p:nvPr/>
+        </p:nvPicPr>
+        <p:blipFill>
+          <a:blip r:embed="rId2"/>
+          <a:stretch>
+            <a:fillRect/>
+          </a:stretch>
+        </p:blipFill>
+        <p:spPr>
+          <a:xfrm>
+            <a:off x="6263640" y="2177248"/>
+            <a:ext cx="5029200" cy="3417902"/>
+          </a:xfrm>
+          <a:prstGeom prst="rect">
+            <a:avLst/>
+          </a:prstGeom>
+        </p:spPr>
+      </p:pic>
+      <p:sp>
+        <p:nvSpPr>
+          <p:cNvPr id="6" name="TextBox 5"/>
+          <p:cNvSpPr txBox="1"/>
+          <p:nvPr/>
+        </p:nvSpPr>
+        <p:spPr>
+          <a:xfrm>
+            <a:off x="822960" y="5989320"/>
+            <a:ext cx="8961120" cy="502920"/>
+          </a:xfrm>
+          <a:prstGeom prst="rect">
+            <a:avLst/>
+          </a:prstGeom>
+          <a:noFill/>
+        </p:spPr>
+        <p:txBody>
+          <a:bodyPr wrap="square">
+            <a:spAutoFit/>
+          </a:bodyPr>
+          <a:lstStyle/>
+          <a:p>
+            <a:r>
+              <a:rPr sz="1400" b="0" i="0">
+                <a:solidFill>
+                  <a:srgbClr val="5A647A"/>
+                </a:solidFill>
+                <a:latin typeface="Helvetica Neue"/>
+              </a:rPr>
+              <a:t>An upcoming UBI RFC will bring this capability into </a:t>
+            </a:r>
+            <a:r>
+              <a:rPr sz="1200" b="0">
+                <a:solidFill>
+                  <a:srgbClr val="5A647A"/>
+                </a:solidFill>
+                <a:latin typeface="Consolas"/>
+              </a:rPr>
+              <a:t>ubi.js</a:t>
+            </a:r>
+          </a:p>
+        </p:txBody>
+      </p:sp>
+      <p:sp>
+        <p:nvSpPr>
+          <p:cNvPr id="7" name="TextBox 6"/>
           <p:cNvSpPr txBox="1"/>
           <p:nvPr/>
         </p:nvSpPr>
@@ -9293,7 +9341,7 @@
     <p:bg>
       <p:bgPr>
         <a:solidFill>
-          <a:srgbClr val="0E1A2F"/>
+          <a:srgbClr val="FFFFFF"/>
         </a:solidFill>
         <a:effectLst/>
       </p:bgPr>
@@ -9313,8 +9361,8 @@
         </p:nvSpPr>
         <p:spPr>
           <a:xfrm>
-            <a:off x="822960" y="2560320"/>
-            <a:ext cx="10515600" cy="1828800"/>
+            <a:off x="822960" y="411480"/>
+            <a:ext cx="10515600" cy="822960"/>
           </a:xfrm>
           <a:prstGeom prst="rect">
             <a:avLst/>
@@ -9328,43 +9376,51 @@
           <a:lstStyle/>
           <a:p>
             <a:r>
-              <a:rPr sz="1800" b="1">
-                <a:solidFill>
-                  <a:srgbClr val="5A9BE8"/>
-                </a:solidFill>
-                <a:latin typeface="Helvetica Neue"/>
-              </a:rPr>
-              <a:t>PART 6</a:t>
-            </a:r>
-          </a:p>
-          <a:p>
-            <a:pPr>
-              <a:spcBef>
-                <a:spcPts val="1000"/>
-              </a:spcBef>
-            </a:pPr>
-            <a:r>
-              <a:rPr sz="4200" b="1">
-                <a:solidFill>
-                  <a:srgbClr val="FFFFFF"/>
-                </a:solidFill>
-                <a:latin typeface="Helvetica Neue"/>
-              </a:rPr>
-              <a:t>Back in OpenSearch</a:t>
-            </a:r>
-          </a:p>
-        </p:txBody>
-      </p:sp>
-      <p:sp>
-        <p:nvSpPr>
-          <p:cNvPr id="3" name="TextBox 2"/>
+              <a:rPr sz="3000" b="1">
+                <a:solidFill>
+                  <a:srgbClr val="141B2D"/>
+                </a:solidFill>
+                <a:latin typeface="Helvetica Neue"/>
+              </a:rPr>
+              <a:t>What changes in ubi_queries</a:t>
+            </a:r>
+          </a:p>
+        </p:txBody>
+      </p:sp>
+      <p:pic>
+        <p:nvPicPr>
+          <p:cNvPr id="3" name="Picture 2" descr="28_ubi_document.png"/>
+          <p:cNvPicPr>
+            <a:picLocks noChangeAspect="1"/>
+          </p:cNvPicPr>
+          <p:nvPr/>
+        </p:nvPicPr>
+        <p:blipFill>
+          <a:blip r:embed="rId2"/>
+          <a:stretch>
+            <a:fillRect/>
+          </a:stretch>
+        </p:blipFill>
+        <p:spPr>
+          <a:xfrm>
+            <a:off x="1070391" y="1417320"/>
+            <a:ext cx="10050912" cy="4343400"/>
+          </a:xfrm>
+          <a:prstGeom prst="rect">
+            <a:avLst/>
+          </a:prstGeom>
+        </p:spPr>
+      </p:pic>
+      <p:sp>
+        <p:nvSpPr>
+          <p:cNvPr id="4" name="TextBox 3"/>
           <p:cNvSpPr txBox="1"/>
           <p:nvPr/>
         </p:nvSpPr>
         <p:spPr>
           <a:xfrm>
-            <a:off x="10405872" y="6144768"/>
-            <a:ext cx="960120" cy="411480"/>
+            <a:off x="822960" y="5989320"/>
+            <a:ext cx="8961120" cy="502920"/>
           </a:xfrm>
           <a:prstGeom prst="rect">
             <a:avLst/>
@@ -9377,11 +9433,63 @@
           </a:bodyPr>
           <a:lstStyle/>
           <a:p>
+            <a:r>
+              <a:rPr sz="1400" b="0" i="0">
+                <a:solidFill>
+                  <a:srgbClr val="5A647A"/>
+                </a:solidFill>
+                <a:latin typeface="Helvetica Neue"/>
+              </a:rPr>
+              <a:t>UBI supports this today through </a:t>
+            </a:r>
+            <a:r>
+              <a:rPr sz="1200" b="0">
+                <a:solidFill>
+                  <a:srgbClr val="5A647A"/>
+                </a:solidFill>
+                <a:latin typeface="Consolas"/>
+              </a:rPr>
+              <a:t>query_attributes</a:t>
+            </a:r>
+            <a:r>
+              <a:rPr sz="1400" b="0" i="0">
+                <a:solidFill>
+                  <a:srgbClr val="5A647A"/>
+                </a:solidFill>
+                <a:latin typeface="Helvetica Neue"/>
+              </a:rPr>
+              <a:t>, and the RFC will propose making it first-class</a:t>
+            </a:r>
+          </a:p>
+        </p:txBody>
+      </p:sp>
+      <p:sp>
+        <p:nvSpPr>
+          <p:cNvPr id="5" name="TextBox 4"/>
+          <p:cNvSpPr txBox="1"/>
+          <p:nvPr/>
+        </p:nvSpPr>
+        <p:spPr>
+          <a:xfrm>
+            <a:off x="10405872" y="6144768"/>
+            <a:ext cx="960120" cy="411480"/>
+          </a:xfrm>
+          <a:prstGeom prst="rect">
+            <a:avLst/>
+          </a:prstGeom>
+          <a:noFill/>
+        </p:spPr>
+        <p:txBody>
+          <a:bodyPr wrap="square">
+            <a:spAutoFit/>
+          </a:bodyPr>
+          <a:lstStyle/>
+          <a:p>
             <a:pPr algn="r"/>
             <a:r>
               <a:rPr sz="1300" b="0">
                 <a:solidFill>
-                  <a:srgbClr val="6E7C93"/>
+                  <a:srgbClr val="5A647A"/>
                 </a:solidFill>
                 <a:latin typeface="Helvetica Neue"/>
               </a:rPr>
@@ -9445,7 +9553,7 @@
                 </a:solidFill>
                 <a:latin typeface="Helvetica Neue"/>
               </a:rPr>
-              <a:t>Where the noise gets injected</a:t>
+              <a:t>What your dashboards can still compute</a:t>
             </a:r>
           </a:p>
         </p:txBody>
@@ -9503,7 +9611,7 @@
         <p:spPr>
           <a:xfrm>
             <a:off x="822960" y="2057400"/>
-            <a:ext cx="5120640" cy="4023360"/>
+            <a:ext cx="10515600" cy="4023360"/>
           </a:xfrm>
           <a:prstGeom prst="rect">
             <a:avLst/>
@@ -9518,11 +9626,11 @@
           <a:p>
             <a:pPr marL="342900" indent="-342900">
               <a:spcAft>
-                <a:spcPts val="1400"/>
+                <a:spcPts val="2000"/>
               </a:spcAft>
             </a:pPr>
             <a:r>
-              <a:rPr sz="2100" b="1">
+              <a:rPr sz="2400" b="1">
                 <a:solidFill>
                   <a:srgbClr val="005EB8"/>
                 </a:solidFill>
@@ -9531,41 +9639,23 @@
               <a:t>-   </a:t>
             </a:r>
             <a:r>
-              <a:rPr sz="2100" b="0" i="0">
+              <a:rPr sz="2400" b="0" i="0">
                 <a:solidFill>
                   <a:srgbClr val="141B2D"/>
                 </a:solidFill>
                 <a:latin typeface="Helvetica Neue"/>
               </a:rPr>
-              <a:t>On the device, before </a:t>
-            </a:r>
-            <a:r>
-              <a:rPr sz="1900" b="0">
-                <a:solidFill>
-                  <a:srgbClr val="141B2D"/>
-                </a:solidFill>
-                <a:latin typeface="Consolas"/>
-              </a:rPr>
-              <a:t>ubi.js</a:t>
-            </a:r>
-            <a:r>
-              <a:rPr sz="2100" b="0" i="0">
-                <a:solidFill>
-                  <a:srgbClr val="141B2D"/>
-                </a:solidFill>
-                <a:latin typeface="Helvetica Neue"/>
-              </a:rPr>
-              <a:t> sends the event</a:t>
+              <a:t>Aggregate query intent per segment</a:t>
             </a:r>
           </a:p>
           <a:p>
             <a:pPr marL="342900" indent="-342900">
               <a:spcAft>
-                <a:spcPts val="1400"/>
+                <a:spcPts val="2000"/>
               </a:spcAft>
             </a:pPr>
             <a:r>
-              <a:rPr sz="2100" b="1">
+              <a:rPr sz="2400" b="1">
                 <a:solidFill>
                   <a:srgbClr val="005EB8"/>
                 </a:solidFill>
@@ -9574,23 +9664,23 @@
               <a:t>-   </a:t>
             </a:r>
             <a:r>
-              <a:rPr sz="2100" b="0" i="0">
+              <a:rPr sz="2400" b="0" i="0">
                 <a:solidFill>
                   <a:srgbClr val="141B2D"/>
                 </a:solidFill>
                 <a:latin typeface="Helvetica Neue"/>
               </a:rPr>
-              <a:t>Aggregation happens at query time over the noised data</a:t>
+              <a:t>Demand trends and shifts over time</a:t>
             </a:r>
           </a:p>
           <a:p>
             <a:pPr marL="342900" indent="-342900">
               <a:spcAft>
-                <a:spcPts val="1400"/>
+                <a:spcPts val="2000"/>
               </a:spcAft>
             </a:pPr>
             <a:r>
-              <a:rPr sz="2100" b="1">
+              <a:rPr sz="2400" b="1">
                 <a:solidFill>
                   <a:srgbClr val="005EB8"/>
                 </a:solidFill>
@@ -9599,23 +9689,23 @@
               <a:t>-   </a:t>
             </a:r>
             <a:r>
-              <a:rPr sz="2100" b="0" i="0">
+              <a:rPr sz="2400" b="0" i="0">
                 <a:solidFill>
                   <a:srgbClr val="141B2D"/>
                 </a:solidFill>
                 <a:latin typeface="Helvetica Neue"/>
               </a:rPr>
-              <a:t>Nothing downstream needs to be trusted, because nothing downstream has the original</a:t>
+              <a:t>Segment-level training signal for learning-to-rank</a:t>
             </a:r>
           </a:p>
           <a:p>
             <a:pPr marL="342900" indent="-342900">
               <a:spcAft>
-                <a:spcPts val="1400"/>
+                <a:spcPts val="2000"/>
               </a:spcAft>
             </a:pPr>
             <a:r>
-              <a:rPr sz="2100" b="1">
+              <a:rPr sz="2400" b="1">
                 <a:solidFill>
                   <a:srgbClr val="005EB8"/>
                 </a:solidFill>
@@ -9624,87 +9714,20 @@
               <a:t>-   </a:t>
             </a:r>
             <a:r>
-              <a:rPr sz="2100" b="0" i="0">
+              <a:rPr sz="2400" b="0" i="0">
                 <a:solidFill>
                   <a:srgbClr val="141B2D"/>
                 </a:solidFill>
                 <a:latin typeface="Helvetica Neue"/>
               </a:rPr>
-              <a:t>You set epsilon in the client you ship</a:t>
-            </a:r>
-          </a:p>
-        </p:txBody>
-      </p:sp>
-      <p:pic>
-        <p:nvPicPr>
-          <p:cNvPr id="5" name="Picture 4" descr="28_trust_boundary.png"/>
-          <p:cNvPicPr>
-            <a:picLocks noChangeAspect="1"/>
-          </p:cNvPicPr>
-          <p:nvPr/>
-        </p:nvPicPr>
-        <p:blipFill>
-          <a:blip r:embed="rId2"/>
-          <a:stretch>
-            <a:fillRect/>
-          </a:stretch>
-        </p:blipFill>
-        <p:spPr>
-          <a:xfrm>
-            <a:off x="6263640" y="2177248"/>
-            <a:ext cx="5029200" cy="3417902"/>
-          </a:xfrm>
-          <a:prstGeom prst="rect">
-            <a:avLst/>
-          </a:prstGeom>
-        </p:spPr>
-      </p:pic>
-      <p:sp>
-        <p:nvSpPr>
-          <p:cNvPr id="6" name="TextBox 5"/>
-          <p:cNvSpPr txBox="1"/>
-          <p:nvPr/>
-        </p:nvSpPr>
-        <p:spPr>
-          <a:xfrm>
-            <a:off x="822960" y="5989320"/>
-            <a:ext cx="8961120" cy="502920"/>
-          </a:xfrm>
-          <a:prstGeom prst="rect">
-            <a:avLst/>
-          </a:prstGeom>
-          <a:noFill/>
-        </p:spPr>
-        <p:txBody>
-          <a:bodyPr wrap="square">
-            <a:spAutoFit/>
-          </a:bodyPr>
-          <a:lstStyle/>
-          <a:p>
-            <a:r>
-              <a:rPr sz="1400" b="0" i="0">
-                <a:solidFill>
-                  <a:srgbClr val="5A647A"/>
-                </a:solidFill>
-                <a:latin typeface="Helvetica Neue"/>
-              </a:rPr>
-              <a:t>An upcoming UBI RFC will bring this capability into </a:t>
-            </a:r>
-            <a:r>
-              <a:rPr sz="1200" b="0">
-                <a:solidFill>
-                  <a:srgbClr val="5A647A"/>
-                </a:solidFill>
-                <a:latin typeface="Consolas"/>
-              </a:rPr>
-              <a:t>ubi.js</a:t>
-            </a:r>
-          </a:p>
-        </p:txBody>
-      </p:sp>
-      <p:sp>
-        <p:nvSpPr>
-          <p:cNvPr id="7" name="TextBox 6"/>
+              <a:t>What they cannot do is show you one user's session</a:t>
+            </a:r>
+          </a:p>
+        </p:txBody>
+      </p:sp>
+      <p:sp>
+        <p:nvSpPr>
+          <p:cNvPr id="5" name="TextBox 4"/>
           <p:cNvSpPr txBox="1"/>
           <p:nvPr/>
         </p:nvSpPr>
@@ -9771,8 +9794,8 @@
         </p:nvSpPr>
         <p:spPr>
           <a:xfrm>
-            <a:off x="822960" y="411480"/>
-            <a:ext cx="10515600" cy="822960"/>
+            <a:off x="822960" y="640080"/>
+            <a:ext cx="10515600" cy="960120"/>
           </a:xfrm>
           <a:prstGeom prst="rect">
             <a:avLst/>
@@ -9786,41 +9809,61 @@
           <a:lstStyle/>
           <a:p>
             <a:r>
-              <a:rPr sz="3000" b="1">
+              <a:rPr sz="3400" b="1">
                 <a:solidFill>
                   <a:srgbClr val="141B2D"/>
                 </a:solidFill>
                 <a:latin typeface="Helvetica Neue"/>
               </a:rPr>
-              <a:t>What changes in ubi_queries</a:t>
-            </a:r>
-          </a:p>
-        </p:txBody>
-      </p:sp>
-      <p:pic>
-        <p:nvPicPr>
-          <p:cNvPr id="3" name="Picture 2" descr="28_ubi_document.png"/>
-          <p:cNvPicPr>
-            <a:picLocks noChangeAspect="1"/>
-          </p:cNvPicPr>
+              <a:t>The limitations</a:t>
+            </a:r>
+          </a:p>
+        </p:txBody>
+      </p:sp>
+      <p:sp>
+        <p:nvSpPr>
+          <p:cNvPr id="3" name="Rectangle 2"/>
+          <p:cNvSpPr/>
           <p:nvPr/>
-        </p:nvPicPr>
-        <p:blipFill>
-          <a:blip r:embed="rId2"/>
-          <a:stretch>
-            <a:fillRect/>
-          </a:stretch>
-        </p:blipFill>
-        <p:spPr>
-          <a:xfrm>
-            <a:off x="1070391" y="1417320"/>
-            <a:ext cx="10050912" cy="4343400"/>
+        </p:nvSpPr>
+        <p:spPr>
+          <a:xfrm>
+            <a:off x="822960" y="1276603"/>
+            <a:ext cx="1463040" cy="50800"/>
           </a:xfrm>
           <a:prstGeom prst="rect">
             <a:avLst/>
           </a:prstGeom>
-        </p:spPr>
-      </p:pic>
+          <a:solidFill>
+            <a:srgbClr val="B4311A"/>
+          </a:solidFill>
+          <a:ln>
+            <a:noFill/>
+          </a:ln>
+          <a:effectLst/>
+        </p:spPr>
+        <p:style>
+          <a:lnRef idx="1">
+            <a:schemeClr val="accent1"/>
+          </a:lnRef>
+          <a:fillRef idx="3">
+            <a:schemeClr val="accent1"/>
+          </a:fillRef>
+          <a:effectRef idx="2">
+            <a:schemeClr val="accent1"/>
+          </a:effectRef>
+          <a:fontRef idx="minor">
+            <a:schemeClr val="lt1"/>
+          </a:fontRef>
+        </p:style>
+        <p:txBody>
+          <a:bodyPr rtlCol="0" anchor="ctr"/>
+          <a:lstStyle/>
+          <a:p>
+            <a:pPr algn="ctr"/>
+          </a:p>
+        </p:txBody>
+      </p:sp>
       <p:sp>
         <p:nvSpPr>
           <p:cNvPr id="4" name="TextBox 3"/>
@@ -9829,8 +9872,8 @@
         </p:nvSpPr>
         <p:spPr>
           <a:xfrm>
-            <a:off x="822960" y="5989320"/>
-            <a:ext cx="8961120" cy="502920"/>
+            <a:off x="822960" y="2057400"/>
+            <a:ext cx="10515600" cy="4023360"/>
           </a:xfrm>
           <a:prstGeom prst="rect">
             <a:avLst/>
@@ -9843,32 +9886,139 @@
           </a:bodyPr>
           <a:lstStyle/>
           <a:p>
-            <a:r>
-              <a:rPr sz="1400" b="0" i="0">
-                <a:solidFill>
-                  <a:srgbClr val="5A647A"/>
-                </a:solidFill>
-                <a:latin typeface="Helvetica Neue"/>
-              </a:rPr>
-              <a:t>UBI supports this today through </a:t>
-            </a:r>
-            <a:r>
-              <a:rPr sz="1200" b="0">
-                <a:solidFill>
-                  <a:srgbClr val="5A647A"/>
+            <a:pPr marL="342900" indent="-342900">
+              <a:spcAft>
+                <a:spcPts val="2000"/>
+              </a:spcAft>
+            </a:pPr>
+            <a:r>
+              <a:rPr sz="2400" b="1">
+                <a:solidFill>
+                  <a:srgbClr val="B4311A"/>
+                </a:solidFill>
+                <a:latin typeface="Helvetica Neue"/>
+              </a:rPr>
+              <a:t>-   </a:t>
+            </a:r>
+            <a:r>
+              <a:rPr sz="2400" b="0" i="0">
+                <a:solidFill>
+                  <a:srgbClr val="141B2D"/>
+                </a:solidFill>
+                <a:latin typeface="Helvetica Neue"/>
+              </a:rPr>
+              <a:t>The category leaks and that is worse for healthcare than furniture</a:t>
+            </a:r>
+          </a:p>
+          <a:p>
+            <a:pPr marL="342900" indent="-342900">
+              <a:spcAft>
+                <a:spcPts val="2000"/>
+              </a:spcAft>
+            </a:pPr>
+            <a:r>
+              <a:rPr sz="2400" b="1">
+                <a:solidFill>
+                  <a:srgbClr val="B4311A"/>
+                </a:solidFill>
+                <a:latin typeface="Helvetica Neue"/>
+              </a:rPr>
+              <a:t>-   </a:t>
+            </a:r>
+            <a:r>
+              <a:rPr sz="2400" b="0" i="0">
+                <a:solidFill>
+                  <a:srgbClr val="141B2D"/>
+                </a:solidFill>
+                <a:latin typeface="Helvetica Neue"/>
+              </a:rPr>
+              <a:t>Epsilon values don't transfer between indexes</a:t>
+            </a:r>
+          </a:p>
+          <a:p>
+            <a:pPr marL="342900" indent="-342900">
+              <a:spcAft>
+                <a:spcPts val="2000"/>
+              </a:spcAft>
+            </a:pPr>
+            <a:r>
+              <a:rPr sz="2400" b="1">
+                <a:solidFill>
+                  <a:srgbClr val="B4311A"/>
+                </a:solidFill>
+                <a:latin typeface="Helvetica Neue"/>
+              </a:rPr>
+              <a:t>-   </a:t>
+            </a:r>
+            <a:r>
+              <a:rPr sz="2400" b="0" i="0">
+                <a:solidFill>
+                  <a:srgbClr val="141B2D"/>
+                </a:solidFill>
+                <a:latin typeface="Helvetica Neue"/>
+              </a:rPr>
+              <a:t>Long tail queries stay unmeasurable</a:t>
+            </a:r>
+          </a:p>
+          <a:p>
+            <a:pPr marL="342900" indent="-342900">
+              <a:spcAft>
+                <a:spcPts val="2000"/>
+              </a:spcAft>
+            </a:pPr>
+            <a:r>
+              <a:rPr sz="2400" b="1">
+                <a:solidFill>
+                  <a:srgbClr val="B4311A"/>
+                </a:solidFill>
+                <a:latin typeface="Helvetica Neue"/>
+              </a:rPr>
+              <a:t>-   </a:t>
+            </a:r>
+            <a:r>
+              <a:rPr sz="2400" b="0" i="0">
+                <a:solidFill>
+                  <a:srgbClr val="141B2D"/>
+                </a:solidFill>
+                <a:latin typeface="Helvetica Neue"/>
+              </a:rPr>
+              <a:t>This protects </a:t>
+            </a:r>
+            <a:r>
+              <a:rPr sz="2200" b="0">
+                <a:solidFill>
+                  <a:srgbClr val="141B2D"/>
                 </a:solidFill>
                 <a:latin typeface="Consolas"/>
               </a:rPr>
-              <a:t>query_attributes</a:t>
-            </a:r>
-            <a:r>
-              <a:rPr sz="1400" b="0" i="0">
-                <a:solidFill>
-                  <a:srgbClr val="5A647A"/>
-                </a:solidFill>
-                <a:latin typeface="Helvetica Neue"/>
-              </a:rPr>
-              <a:t>, and the RFC will propose making it first-class</a:t>
+              <a:t>user_query</a:t>
+            </a:r>
+            <a:r>
+              <a:rPr sz="2400" b="0" i="0">
+                <a:solidFill>
+                  <a:srgbClr val="141B2D"/>
+                </a:solidFill>
+                <a:latin typeface="Helvetica Neue"/>
+              </a:rPr>
+              <a:t> but </a:t>
+            </a:r>
+            <a:r>
+              <a:rPr sz="2200" b="0">
+                <a:solidFill>
+                  <a:srgbClr val="141B2D"/>
+                </a:solidFill>
+                <a:latin typeface="Consolas"/>
+              </a:rPr>
+              <a:t>ubi_events</a:t>
+            </a:r>
+            <a:r>
+              <a:rPr sz="2400" b="0" i="0">
+                <a:solidFill>
+                  <a:srgbClr val="141B2D"/>
+                </a:solidFill>
+                <a:latin typeface="Helvetica Neue"/>
+              </a:rPr>
+              <a:t> still holds clicks and ids in the clear</a:t>
             </a:r>
           </a:p>
         </p:txBody>
@@ -9963,7 +10113,7 @@
                 </a:solidFill>
                 <a:latin typeface="Helvetica Neue"/>
               </a:rPr>
-              <a:t>What your dashboards can still compute</a:t>
+              <a:t>Takeaways</a:t>
             </a:r>
           </a:p>
         </p:txBody>
@@ -10055,7 +10205,7 @@
                 </a:solidFill>
                 <a:latin typeface="Helvetica Neue"/>
               </a:rPr>
-              <a:t>Aggregate query intent per segment</a:t>
+              <a:t>Storing embeddings instead of text is not privacy</a:t>
             </a:r>
           </a:p>
           <a:p>
@@ -10080,7 +10230,7 @@
                 </a:solidFill>
                 <a:latin typeface="Helvetica Neue"/>
               </a:rPr>
-              <a:t>Demand trends and shifts over time</a:t>
+              <a:t>Keeping sensitive data out of the index beats redacting it later</a:t>
             </a:r>
           </a:p>
           <a:p>
@@ -10105,7 +10255,7 @@
                 </a:solidFill>
                 <a:latin typeface="Helvetica Neue"/>
               </a:rPr>
-              <a:t>Segment-level training signal for learning-to-rank</a:t>
+              <a:t>Verify the mechanism by testing it, not by trusting it</a:t>
             </a:r>
           </a:p>
           <a:p>
@@ -10126,11 +10276,11 @@
             <a:r>
               <a:rPr sz="2400" b="0" i="0">
                 <a:solidFill>
-                  <a:srgbClr val="141B2D"/>
-                </a:solidFill>
-                <a:latin typeface="Helvetica Neue"/>
-              </a:rPr>
-              <a:t>What they cannot do is show you one user's session</a:t>
+                  <a:srgbClr val="005EB8"/>
+                </a:solidFill>
+                <a:latin typeface="Helvetica Neue"/>
+              </a:rPr>
+              <a:t>You trade individual resolution for population accuracy but that's what relevance tuning needs</a:t>
             </a:r>
           </a:p>
         </p:txBody>
@@ -10184,7 +10334,7 @@
     <p:bg>
       <p:bgPr>
         <a:solidFill>
-          <a:srgbClr val="FFFFFF"/>
+          <a:srgbClr val="0E1A2F"/>
         </a:solidFill>
         <a:effectLst/>
       </p:bgPr>
@@ -10204,8 +10354,8 @@
         </p:nvSpPr>
         <p:spPr>
           <a:xfrm>
-            <a:off x="822960" y="640080"/>
-            <a:ext cx="10515600" cy="960120"/>
+            <a:off x="822960" y="2103120"/>
+            <a:ext cx="10515600" cy="2377440"/>
           </a:xfrm>
           <a:prstGeom prst="rect">
             <a:avLst/>
@@ -10219,33 +10369,115 @@
           <a:lstStyle/>
           <a:p>
             <a:r>
-              <a:rPr sz="3400" b="1">
-                <a:solidFill>
-                  <a:srgbClr val="141B2D"/>
-                </a:solidFill>
-                <a:latin typeface="Helvetica Neue"/>
-              </a:rPr>
-              <a:t>The limitations</a:t>
-            </a:r>
-          </a:p>
-        </p:txBody>
-      </p:sp>
-      <p:sp>
-        <p:nvSpPr>
-          <p:cNvPr id="3" name="Rectangle 2"/>
+              <a:rPr sz="4800" b="1">
+                <a:solidFill>
+                  <a:srgbClr val="FFFFFF"/>
+                </a:solidFill>
+                <a:latin typeface="Helvetica Neue"/>
+              </a:rPr>
+              <a:t>Questions</a:t>
+            </a:r>
+          </a:p>
+          <a:p>
+            <a:pPr>
+              <a:spcBef>
+                <a:spcPts val="1400"/>
+              </a:spcBef>
+            </a:pPr>
+            <a:r>
+              <a:rPr sz="2600" b="0">
+                <a:solidFill>
+                  <a:srgbClr val="8EB8E8"/>
+                </a:solidFill>
+                <a:latin typeface="Helvetica Neue"/>
+              </a:rPr>
+              <a:t>github.com/jzonthemtn/ldp-for-search</a:t>
+            </a:r>
+          </a:p>
+        </p:txBody>
+      </p:sp>
+      <p:sp>
+        <p:nvSpPr>
+          <p:cNvPr id="3" name="TextBox 2"/>
+          <p:cNvSpPr txBox="1"/>
+          <p:nvPr/>
+        </p:nvSpPr>
+        <p:spPr>
+          <a:xfrm>
+            <a:off x="822960" y="5532120"/>
+            <a:ext cx="10515600" cy="914400"/>
+          </a:xfrm>
+          <a:prstGeom prst="rect">
+            <a:avLst/>
+          </a:prstGeom>
+          <a:noFill/>
+        </p:spPr>
+        <p:txBody>
+          <a:bodyPr wrap="square">
+            <a:spAutoFit/>
+          </a:bodyPr>
+          <a:lstStyle/>
+          <a:p>
+            <a:r>
+              <a:rPr sz="1800" b="1">
+                <a:solidFill>
+                  <a:srgbClr val="C5CFE0"/>
+                </a:solidFill>
+                <a:latin typeface="Helvetica Neue"/>
+              </a:rPr>
+              <a:t>Jeff Zemerick</a:t>
+            </a:r>
+          </a:p>
+          <a:p>
+            <a:pPr>
+              <a:spcBef>
+                <a:spcPts val="400"/>
+              </a:spcBef>
+            </a:pPr>
+            <a:r>
+              <a:rPr sz="1500" b="0">
+                <a:solidFill>
+                  <a:srgbClr val="7C889E"/>
+                </a:solidFill>
+                <a:latin typeface="Helvetica Neue"/>
+              </a:rPr>
+              <a:t>OpenSearchCon NA</a:t>
+            </a:r>
+          </a:p>
+          <a:p>
+            <a:pPr>
+              <a:spcBef>
+                <a:spcPts val="100"/>
+              </a:spcBef>
+            </a:pPr>
+            <a:r>
+              <a:rPr sz="1500" b="0">
+                <a:solidFill>
+                  <a:srgbClr val="7C889E"/>
+                </a:solidFill>
+                <a:latin typeface="Helvetica Neue"/>
+              </a:rPr>
+              <a:t>September 24, 2026</a:t>
+            </a:r>
+          </a:p>
+        </p:txBody>
+      </p:sp>
+      <p:sp>
+        <p:nvSpPr>
+          <p:cNvPr id="4" name="Rectangle 3"/>
           <p:cNvSpPr/>
           <p:nvPr/>
         </p:nvSpPr>
         <p:spPr>
           <a:xfrm>
-            <a:off x="822960" y="1276603"/>
-            <a:ext cx="1463040" cy="50800"/>
+            <a:off x="8771839" y="1975104"/>
+            <a:ext cx="2724912" cy="2724912"/>
           </a:xfrm>
           <a:prstGeom prst="rect">
             <a:avLst/>
           </a:prstGeom>
           <a:solidFill>
-            <a:srgbClr val="B4311A"/>
+            <a:srgbClr val="FFFFFF"/>
           </a:solidFill>
           <a:ln>
             <a:noFill/>
@@ -10274,16 +10506,40 @@
           </a:p>
         </p:txBody>
       </p:sp>
-      <p:sp>
-        <p:nvSpPr>
-          <p:cNvPr id="4" name="TextBox 3"/>
+      <p:pic>
+        <p:nvPicPr>
+          <p:cNvPr id="5" name="Picture 4" descr="leveraging-ldp-for-high-trust-opensearch-ubi_zemerick_1212636_feedback-code.png"/>
+          <p:cNvPicPr>
+            <a:picLocks noChangeAspect="1"/>
+          </p:cNvPicPr>
+          <p:nvPr/>
+        </p:nvPicPr>
+        <p:blipFill>
+          <a:blip r:embed="rId2"/>
+          <a:stretch>
+            <a:fillRect/>
+          </a:stretch>
+        </p:blipFill>
+        <p:spPr>
+          <a:xfrm>
+            <a:off x="8899855" y="2103120"/>
+            <a:ext cx="2468880" cy="2468880"/>
+          </a:xfrm>
+          <a:prstGeom prst="rect">
+            <a:avLst/>
+          </a:prstGeom>
+        </p:spPr>
+      </p:pic>
+      <p:sp>
+        <p:nvSpPr>
+          <p:cNvPr id="6" name="TextBox 5"/>
           <p:cNvSpPr txBox="1"/>
           <p:nvPr/>
         </p:nvSpPr>
         <p:spPr>
           <a:xfrm>
-            <a:off x="822960" y="2057400"/>
-            <a:ext cx="10515600" cy="4023360"/>
+            <a:off x="8771839" y="4809744"/>
+            <a:ext cx="2724912" cy="365760"/>
           </a:xfrm>
           <a:prstGeom prst="rect">
             <a:avLst/>
@@ -10296,146 +10552,22 @@
           </a:bodyPr>
           <a:lstStyle/>
           <a:p>
-            <a:pPr marL="342900" indent="-342900">
-              <a:spcAft>
-                <a:spcPts val="2000"/>
-              </a:spcAft>
-            </a:pPr>
-            <a:r>
-              <a:rPr sz="2400" b="1">
-                <a:solidFill>
-                  <a:srgbClr val="B4311A"/>
-                </a:solidFill>
-                <a:latin typeface="Helvetica Neue"/>
-              </a:rPr>
-              <a:t>-   </a:t>
-            </a:r>
-            <a:r>
-              <a:rPr sz="2400" b="0" i="0">
-                <a:solidFill>
-                  <a:srgbClr val="141B2D"/>
-                </a:solidFill>
-                <a:latin typeface="Helvetica Neue"/>
-              </a:rPr>
-              <a:t>The category leaks and that is worse for medicine than furniture</a:t>
-            </a:r>
-          </a:p>
-          <a:p>
-            <a:pPr marL="342900" indent="-342900">
-              <a:spcAft>
-                <a:spcPts val="2000"/>
-              </a:spcAft>
-            </a:pPr>
-            <a:r>
-              <a:rPr sz="2400" b="1">
-                <a:solidFill>
-                  <a:srgbClr val="B4311A"/>
-                </a:solidFill>
-                <a:latin typeface="Helvetica Neue"/>
-              </a:rPr>
-              <a:t>-   </a:t>
-            </a:r>
-            <a:r>
-              <a:rPr sz="2400" b="0" i="0">
-                <a:solidFill>
-                  <a:srgbClr val="141B2D"/>
-                </a:solidFill>
-                <a:latin typeface="Helvetica Neue"/>
-              </a:rPr>
-              <a:t>What a given epsilon buys you depends on coordinate spread so it does not transfer between indexes</a:t>
-            </a:r>
-          </a:p>
-          <a:p>
-            <a:pPr marL="342900" indent="-342900">
-              <a:spcAft>
-                <a:spcPts val="2000"/>
-              </a:spcAft>
-            </a:pPr>
-            <a:r>
-              <a:rPr sz="2400" b="1">
-                <a:solidFill>
-                  <a:srgbClr val="B4311A"/>
-                </a:solidFill>
-                <a:latin typeface="Helvetica Neue"/>
-              </a:rPr>
-              <a:t>-   </a:t>
-            </a:r>
-            <a:r>
-              <a:rPr sz="2400" b="0" i="0">
-                <a:solidFill>
-                  <a:srgbClr val="141B2D"/>
-                </a:solidFill>
-                <a:latin typeface="Helvetica Neue"/>
-              </a:rPr>
-              <a:t>Low-traffic segments stay unmeasurable</a:t>
-            </a:r>
-          </a:p>
-          <a:p>
-            <a:pPr marL="342900" indent="-342900">
-              <a:spcAft>
-                <a:spcPts val="2000"/>
-              </a:spcAft>
-            </a:pPr>
-            <a:r>
-              <a:rPr sz="2400" b="1">
-                <a:solidFill>
-                  <a:srgbClr val="B4311A"/>
-                </a:solidFill>
-                <a:latin typeface="Helvetica Neue"/>
-              </a:rPr>
-              <a:t>-   </a:t>
-            </a:r>
-            <a:r>
-              <a:rPr sz="2400" b="0" i="0">
-                <a:solidFill>
-                  <a:srgbClr val="141B2D"/>
-                </a:solidFill>
-                <a:latin typeface="Helvetica Neue"/>
-              </a:rPr>
-              <a:t>This protects </a:t>
-            </a:r>
-            <a:r>
-              <a:rPr sz="2200" b="0">
-                <a:solidFill>
-                  <a:srgbClr val="141B2D"/>
-                </a:solidFill>
-                <a:latin typeface="Consolas"/>
-              </a:rPr>
-              <a:t>user_query</a:t>
-            </a:r>
-            <a:r>
-              <a:rPr sz="2400" b="0" i="0">
-                <a:solidFill>
-                  <a:srgbClr val="141B2D"/>
-                </a:solidFill>
-                <a:latin typeface="Helvetica Neue"/>
-              </a:rPr>
-              <a:t> but </a:t>
-            </a:r>
-            <a:r>
-              <a:rPr sz="2200" b="0">
-                <a:solidFill>
-                  <a:srgbClr val="141B2D"/>
-                </a:solidFill>
-                <a:latin typeface="Consolas"/>
-              </a:rPr>
-              <a:t>ubi_events</a:t>
-            </a:r>
-            <a:r>
-              <a:rPr sz="2400" b="0" i="0">
-                <a:solidFill>
-                  <a:srgbClr val="141B2D"/>
-                </a:solidFill>
-                <a:latin typeface="Helvetica Neue"/>
-              </a:rPr>
-              <a:t> still holds clicks and ids in the clear</a:t>
-            </a:r>
-          </a:p>
-        </p:txBody>
-      </p:sp>
-      <p:sp>
-        <p:nvSpPr>
-          <p:cNvPr id="5" name="TextBox 4"/>
+            <a:pPr algn="ctr"/>
+            <a:r>
+              <a:rPr sz="1400" b="0">
+                <a:solidFill>
+                  <a:srgbClr val="8EB8E8"/>
+                </a:solidFill>
+                <a:latin typeface="Helvetica Neue"/>
+              </a:rPr>
+              <a:t>Session feedback</a:t>
+            </a:r>
+          </a:p>
+        </p:txBody>
+      </p:sp>
+      <p:sp>
+        <p:nvSpPr>
+          <p:cNvPr id="7" name="TextBox 6"/>
           <p:cNvSpPr txBox="1"/>
           <p:nvPr/>
         </p:nvSpPr>
@@ -10459,7 +10591,7 @@
             <a:r>
               <a:rPr sz="1300" b="0">
                 <a:solidFill>
-                  <a:srgbClr val="5A647A"/>
+                  <a:srgbClr val="6E7C93"/>
                 </a:solidFill>
                 <a:latin typeface="Helvetica Neue"/>
               </a:rPr>
@@ -10587,548 +10719,6 @@
 </p:sld>
 </file>
 
-<file path=ppt/slides/slide30.xml><?xml version="1.0" encoding="utf-8"?>
-<p:sld xmlns:a="http://schemas.openxmlformats.org/drawingml/2006/main" xmlns:p="http://schemas.openxmlformats.org/presentationml/2006/main" xmlns:r="http://schemas.openxmlformats.org/officeDocument/2006/relationships">
-  <p:cSld>
-    <p:bg>
-      <p:bgPr>
-        <a:solidFill>
-          <a:srgbClr val="FFFFFF"/>
-        </a:solidFill>
-        <a:effectLst/>
-      </p:bgPr>
-    </p:bg>
-    <p:spTree>
-      <p:nvGrpSpPr>
-        <p:cNvPr id="1" name=""/>
-        <p:cNvGrpSpPr/>
-        <p:nvPr/>
-      </p:nvGrpSpPr>
-      <p:grpSpPr/>
-      <p:sp>
-        <p:nvSpPr>
-          <p:cNvPr id="2" name="TextBox 1"/>
-          <p:cNvSpPr txBox="1"/>
-          <p:nvPr/>
-        </p:nvSpPr>
-        <p:spPr>
-          <a:xfrm>
-            <a:off x="822960" y="640080"/>
-            <a:ext cx="10515600" cy="960120"/>
-          </a:xfrm>
-          <a:prstGeom prst="rect">
-            <a:avLst/>
-          </a:prstGeom>
-          <a:noFill/>
-        </p:spPr>
-        <p:txBody>
-          <a:bodyPr wrap="square">
-            <a:spAutoFit/>
-          </a:bodyPr>
-          <a:lstStyle/>
-          <a:p>
-            <a:r>
-              <a:rPr sz="3400" b="1">
-                <a:solidFill>
-                  <a:srgbClr val="141B2D"/>
-                </a:solidFill>
-                <a:latin typeface="Helvetica Neue"/>
-              </a:rPr>
-              <a:t>Takeaways</a:t>
-            </a:r>
-          </a:p>
-        </p:txBody>
-      </p:sp>
-      <p:sp>
-        <p:nvSpPr>
-          <p:cNvPr id="3" name="Rectangle 2"/>
-          <p:cNvSpPr/>
-          <p:nvPr/>
-        </p:nvSpPr>
-        <p:spPr>
-          <a:xfrm>
-            <a:off x="822960" y="1276603"/>
-            <a:ext cx="1463040" cy="50800"/>
-          </a:xfrm>
-          <a:prstGeom prst="rect">
-            <a:avLst/>
-          </a:prstGeom>
-          <a:solidFill>
-            <a:srgbClr val="005EB8"/>
-          </a:solidFill>
-          <a:ln>
-            <a:noFill/>
-          </a:ln>
-          <a:effectLst/>
-        </p:spPr>
-        <p:style>
-          <a:lnRef idx="1">
-            <a:schemeClr val="accent1"/>
-          </a:lnRef>
-          <a:fillRef idx="3">
-            <a:schemeClr val="accent1"/>
-          </a:fillRef>
-          <a:effectRef idx="2">
-            <a:schemeClr val="accent1"/>
-          </a:effectRef>
-          <a:fontRef idx="minor">
-            <a:schemeClr val="lt1"/>
-          </a:fontRef>
-        </p:style>
-        <p:txBody>
-          <a:bodyPr rtlCol="0" anchor="ctr"/>
-          <a:lstStyle/>
-          <a:p>
-            <a:pPr algn="ctr"/>
-          </a:p>
-        </p:txBody>
-      </p:sp>
-      <p:sp>
-        <p:nvSpPr>
-          <p:cNvPr id="4" name="TextBox 3"/>
-          <p:cNvSpPr txBox="1"/>
-          <p:nvPr/>
-        </p:nvSpPr>
-        <p:spPr>
-          <a:xfrm>
-            <a:off x="822960" y="2057400"/>
-            <a:ext cx="10515600" cy="4023360"/>
-          </a:xfrm>
-          <a:prstGeom prst="rect">
-            <a:avLst/>
-          </a:prstGeom>
-          <a:noFill/>
-        </p:spPr>
-        <p:txBody>
-          <a:bodyPr wrap="square">
-            <a:spAutoFit/>
-          </a:bodyPr>
-          <a:lstStyle/>
-          <a:p>
-            <a:pPr marL="342900" indent="-342900">
-              <a:spcAft>
-                <a:spcPts val="2000"/>
-              </a:spcAft>
-            </a:pPr>
-            <a:r>
-              <a:rPr sz="2400" b="1">
-                <a:solidFill>
-                  <a:srgbClr val="005EB8"/>
-                </a:solidFill>
-                <a:latin typeface="Helvetica Neue"/>
-              </a:rPr>
-              <a:t>-   </a:t>
-            </a:r>
-            <a:r>
-              <a:rPr sz="2400" b="0" i="0">
-                <a:solidFill>
-                  <a:srgbClr val="141B2D"/>
-                </a:solidFill>
-                <a:latin typeface="Helvetica Neue"/>
-              </a:rPr>
-              <a:t>Storing embeddings instead of text is not privacy</a:t>
-            </a:r>
-          </a:p>
-          <a:p>
-            <a:pPr marL="342900" indent="-342900">
-              <a:spcAft>
-                <a:spcPts val="2000"/>
-              </a:spcAft>
-            </a:pPr>
-            <a:r>
-              <a:rPr sz="2400" b="1">
-                <a:solidFill>
-                  <a:srgbClr val="005EB8"/>
-                </a:solidFill>
-                <a:latin typeface="Helvetica Neue"/>
-              </a:rPr>
-              <a:t>-   </a:t>
-            </a:r>
-            <a:r>
-              <a:rPr sz="2400" b="0" i="0">
-                <a:solidFill>
-                  <a:srgbClr val="141B2D"/>
-                </a:solidFill>
-                <a:latin typeface="Helvetica Neue"/>
-              </a:rPr>
-              <a:t>Keeping sensitive data out of the index beats redacting it later</a:t>
-            </a:r>
-          </a:p>
-          <a:p>
-            <a:pPr marL="342900" indent="-342900">
-              <a:spcAft>
-                <a:spcPts val="2000"/>
-              </a:spcAft>
-            </a:pPr>
-            <a:r>
-              <a:rPr sz="2400" b="1">
-                <a:solidFill>
-                  <a:srgbClr val="005EB8"/>
-                </a:solidFill>
-                <a:latin typeface="Helvetica Neue"/>
-              </a:rPr>
-              <a:t>-   </a:t>
-            </a:r>
-            <a:r>
-              <a:rPr sz="2400" b="0" i="0">
-                <a:solidFill>
-                  <a:srgbClr val="141B2D"/>
-                </a:solidFill>
-                <a:latin typeface="Helvetica Neue"/>
-              </a:rPr>
-              <a:t>Verify the mechanism by attacking it, not by trusting it</a:t>
-            </a:r>
-          </a:p>
-          <a:p>
-            <a:pPr marL="342900" indent="-342900">
-              <a:spcAft>
-                <a:spcPts val="2000"/>
-              </a:spcAft>
-            </a:pPr>
-            <a:r>
-              <a:rPr sz="2400" b="1">
-                <a:solidFill>
-                  <a:srgbClr val="005EB8"/>
-                </a:solidFill>
-                <a:latin typeface="Helvetica Neue"/>
-              </a:rPr>
-              <a:t>-   </a:t>
-            </a:r>
-            <a:r>
-              <a:rPr sz="2400" b="0" i="0">
-                <a:solidFill>
-                  <a:srgbClr val="005EB8"/>
-                </a:solidFill>
-                <a:latin typeface="Helvetica Neue"/>
-              </a:rPr>
-              <a:t>You trade individual resolution for population accuracy, and relevance only needs the latter</a:t>
-            </a:r>
-          </a:p>
-        </p:txBody>
-      </p:sp>
-      <p:sp>
-        <p:nvSpPr>
-          <p:cNvPr id="5" name="TextBox 4"/>
-          <p:cNvSpPr txBox="1"/>
-          <p:nvPr/>
-        </p:nvSpPr>
-        <p:spPr>
-          <a:xfrm>
-            <a:off x="10405872" y="6144768"/>
-            <a:ext cx="960120" cy="411480"/>
-          </a:xfrm>
-          <a:prstGeom prst="rect">
-            <a:avLst/>
-          </a:prstGeom>
-          <a:noFill/>
-        </p:spPr>
-        <p:txBody>
-          <a:bodyPr wrap="square">
-            <a:spAutoFit/>
-          </a:bodyPr>
-          <a:lstStyle/>
-          <a:p>
-            <a:pPr algn="r"/>
-            <a:r>
-              <a:rPr sz="1300" b="0">
-                <a:solidFill>
-                  <a:srgbClr val="5A647A"/>
-                </a:solidFill>
-                <a:latin typeface="Helvetica Neue"/>
-              </a:rPr>
-              <a:t>30</a:t>
-            </a:r>
-          </a:p>
-        </p:txBody>
-      </p:sp>
-    </p:spTree>
-  </p:cSld>
-  <p:clrMapOvr>
-    <a:masterClrMapping/>
-  </p:clrMapOvr>
-</p:sld>
-</file>
-
-<file path=ppt/slides/slide31.xml><?xml version="1.0" encoding="utf-8"?>
-<p:sld xmlns:a="http://schemas.openxmlformats.org/drawingml/2006/main" xmlns:p="http://schemas.openxmlformats.org/presentationml/2006/main" xmlns:r="http://schemas.openxmlformats.org/officeDocument/2006/relationships">
-  <p:cSld>
-    <p:bg>
-      <p:bgPr>
-        <a:solidFill>
-          <a:srgbClr val="0E1A2F"/>
-        </a:solidFill>
-        <a:effectLst/>
-      </p:bgPr>
-    </p:bg>
-    <p:spTree>
-      <p:nvGrpSpPr>
-        <p:cNvPr id="1" name=""/>
-        <p:cNvGrpSpPr/>
-        <p:nvPr/>
-      </p:nvGrpSpPr>
-      <p:grpSpPr/>
-      <p:sp>
-        <p:nvSpPr>
-          <p:cNvPr id="2" name="TextBox 1"/>
-          <p:cNvSpPr txBox="1"/>
-          <p:nvPr/>
-        </p:nvSpPr>
-        <p:spPr>
-          <a:xfrm>
-            <a:off x="822960" y="2103120"/>
-            <a:ext cx="10515600" cy="2377440"/>
-          </a:xfrm>
-          <a:prstGeom prst="rect">
-            <a:avLst/>
-          </a:prstGeom>
-          <a:noFill/>
-        </p:spPr>
-        <p:txBody>
-          <a:bodyPr wrap="square">
-            <a:spAutoFit/>
-          </a:bodyPr>
-          <a:lstStyle/>
-          <a:p>
-            <a:r>
-              <a:rPr sz="4800" b="1">
-                <a:solidFill>
-                  <a:srgbClr val="FFFFFF"/>
-                </a:solidFill>
-                <a:latin typeface="Helvetica Neue"/>
-              </a:rPr>
-              <a:t>Questions</a:t>
-            </a:r>
-          </a:p>
-          <a:p>
-            <a:pPr>
-              <a:spcBef>
-                <a:spcPts val="1400"/>
-              </a:spcBef>
-            </a:pPr>
-            <a:r>
-              <a:rPr sz="2600" b="0">
-                <a:solidFill>
-                  <a:srgbClr val="8EB8E8"/>
-                </a:solidFill>
-                <a:latin typeface="Helvetica Neue"/>
-              </a:rPr>
-              <a:t>github.com/jzonthemtn/ldp-for-search</a:t>
-            </a:r>
-          </a:p>
-        </p:txBody>
-      </p:sp>
-      <p:sp>
-        <p:nvSpPr>
-          <p:cNvPr id="3" name="TextBox 2"/>
-          <p:cNvSpPr txBox="1"/>
-          <p:nvPr/>
-        </p:nvSpPr>
-        <p:spPr>
-          <a:xfrm>
-            <a:off x="822960" y="5532120"/>
-            <a:ext cx="10515600" cy="914400"/>
-          </a:xfrm>
-          <a:prstGeom prst="rect">
-            <a:avLst/>
-          </a:prstGeom>
-          <a:noFill/>
-        </p:spPr>
-        <p:txBody>
-          <a:bodyPr wrap="square">
-            <a:spAutoFit/>
-          </a:bodyPr>
-          <a:lstStyle/>
-          <a:p>
-            <a:r>
-              <a:rPr sz="1800" b="1">
-                <a:solidFill>
-                  <a:srgbClr val="C5CFE0"/>
-                </a:solidFill>
-                <a:latin typeface="Helvetica Neue"/>
-              </a:rPr>
-              <a:t>Jeff Zemerick</a:t>
-            </a:r>
-          </a:p>
-          <a:p>
-            <a:pPr>
-              <a:spcBef>
-                <a:spcPts val="400"/>
-              </a:spcBef>
-            </a:pPr>
-            <a:r>
-              <a:rPr sz="1500" b="0">
-                <a:solidFill>
-                  <a:srgbClr val="7C889E"/>
-                </a:solidFill>
-                <a:latin typeface="Helvetica Neue"/>
-              </a:rPr>
-              <a:t>OpenSearchCon NA</a:t>
-            </a:r>
-          </a:p>
-          <a:p>
-            <a:pPr>
-              <a:spcBef>
-                <a:spcPts val="100"/>
-              </a:spcBef>
-            </a:pPr>
-            <a:r>
-              <a:rPr sz="1500" b="0">
-                <a:solidFill>
-                  <a:srgbClr val="7C889E"/>
-                </a:solidFill>
-                <a:latin typeface="Helvetica Neue"/>
-              </a:rPr>
-              <a:t>September 24, 2026</a:t>
-            </a:r>
-          </a:p>
-        </p:txBody>
-      </p:sp>
-      <p:sp>
-        <p:nvSpPr>
-          <p:cNvPr id="4" name="Rectangle 3"/>
-          <p:cNvSpPr/>
-          <p:nvPr/>
-        </p:nvSpPr>
-        <p:spPr>
-          <a:xfrm>
-            <a:off x="8771839" y="1975104"/>
-            <a:ext cx="2724912" cy="2724912"/>
-          </a:xfrm>
-          <a:prstGeom prst="rect">
-            <a:avLst/>
-          </a:prstGeom>
-          <a:solidFill>
-            <a:srgbClr val="FFFFFF"/>
-          </a:solidFill>
-          <a:ln>
-            <a:noFill/>
-          </a:ln>
-          <a:effectLst/>
-        </p:spPr>
-        <p:style>
-          <a:lnRef idx="1">
-            <a:schemeClr val="accent1"/>
-          </a:lnRef>
-          <a:fillRef idx="3">
-            <a:schemeClr val="accent1"/>
-          </a:fillRef>
-          <a:effectRef idx="2">
-            <a:schemeClr val="accent1"/>
-          </a:effectRef>
-          <a:fontRef idx="minor">
-            <a:schemeClr val="lt1"/>
-          </a:fontRef>
-        </p:style>
-        <p:txBody>
-          <a:bodyPr rtlCol="0" anchor="ctr"/>
-          <a:lstStyle/>
-          <a:p>
-            <a:pPr algn="ctr"/>
-          </a:p>
-        </p:txBody>
-      </p:sp>
-      <p:pic>
-        <p:nvPicPr>
-          <p:cNvPr id="5" name="Picture 4" descr="leveraging-ldp-for-high-trust-opensearch-ubi_zemerick_1212636_feedback-code.png"/>
-          <p:cNvPicPr>
-            <a:picLocks noChangeAspect="1"/>
-          </p:cNvPicPr>
-          <p:nvPr/>
-        </p:nvPicPr>
-        <p:blipFill>
-          <a:blip r:embed="rId2"/>
-          <a:stretch>
-            <a:fillRect/>
-          </a:stretch>
-        </p:blipFill>
-        <p:spPr>
-          <a:xfrm>
-            <a:off x="8899855" y="2103120"/>
-            <a:ext cx="2468880" cy="2468880"/>
-          </a:xfrm>
-          <a:prstGeom prst="rect">
-            <a:avLst/>
-          </a:prstGeom>
-        </p:spPr>
-      </p:pic>
-      <p:sp>
-        <p:nvSpPr>
-          <p:cNvPr id="6" name="TextBox 5"/>
-          <p:cNvSpPr txBox="1"/>
-          <p:nvPr/>
-        </p:nvSpPr>
-        <p:spPr>
-          <a:xfrm>
-            <a:off x="8771839" y="4809744"/>
-            <a:ext cx="2724912" cy="365760"/>
-          </a:xfrm>
-          <a:prstGeom prst="rect">
-            <a:avLst/>
-          </a:prstGeom>
-          <a:noFill/>
-        </p:spPr>
-        <p:txBody>
-          <a:bodyPr wrap="square">
-            <a:spAutoFit/>
-          </a:bodyPr>
-          <a:lstStyle/>
-          <a:p>
-            <a:pPr algn="ctr"/>
-            <a:r>
-              <a:rPr sz="1400" b="0">
-                <a:solidFill>
-                  <a:srgbClr val="8EB8E8"/>
-                </a:solidFill>
-                <a:latin typeface="Helvetica Neue"/>
-              </a:rPr>
-              <a:t>Session feedback</a:t>
-            </a:r>
-          </a:p>
-        </p:txBody>
-      </p:sp>
-      <p:sp>
-        <p:nvSpPr>
-          <p:cNvPr id="7" name="TextBox 6"/>
-          <p:cNvSpPr txBox="1"/>
-          <p:nvPr/>
-        </p:nvSpPr>
-        <p:spPr>
-          <a:xfrm>
-            <a:off x="10405872" y="6144768"/>
-            <a:ext cx="960120" cy="411480"/>
-          </a:xfrm>
-          <a:prstGeom prst="rect">
-            <a:avLst/>
-          </a:prstGeom>
-          <a:noFill/>
-        </p:spPr>
-        <p:txBody>
-          <a:bodyPr wrap="square">
-            <a:spAutoFit/>
-          </a:bodyPr>
-          <a:lstStyle/>
-          <a:p>
-            <a:pPr algn="r"/>
-            <a:r>
-              <a:rPr sz="1300" b="0">
-                <a:solidFill>
-                  <a:srgbClr val="6E7C93"/>
-                </a:solidFill>
-                <a:latin typeface="Helvetica Neue"/>
-              </a:rPr>
-              <a:t>31</a:t>
-            </a:r>
-          </a:p>
-        </p:txBody>
-      </p:sp>
-    </p:spTree>
-  </p:cSld>
-  <p:clrMapOvr>
-    <a:masterClrMapping/>
-  </p:clrMapOvr>
-</p:sld>
-</file>
-
 <file path=ppt/slides/slide4.xml><?xml version="1.0" encoding="utf-8"?>
 <p:sld xmlns:a="http://schemas.openxmlformats.org/drawingml/2006/main" xmlns:p="http://schemas.openxmlformats.org/presentationml/2006/main" xmlns:r="http://schemas.openxmlformats.org/officeDocument/2006/relationships">
   <p:cSld>
@@ -12032,6 +11622,31 @@
                 <a:latin typeface="Helvetica Neue"/>
               </a:rPr>
               <a:t>Zero-trust becomes a blocker to relevance tuning</a:t>
+            </a:r>
+          </a:p>
+          <a:p>
+            <a:pPr marL="342900" indent="-342900">
+              <a:spcAft>
+                <a:spcPts val="2000"/>
+              </a:spcAft>
+            </a:pPr>
+            <a:r>
+              <a:rPr sz="2400" b="1">
+                <a:solidFill>
+                  <a:srgbClr val="B4311A"/>
+                </a:solidFill>
+                <a:latin typeface="Helvetica Neue"/>
+              </a:rPr>
+              <a:t>-   </a:t>
+            </a:r>
+            <a:r>
+              <a:rPr sz="2400" b="0" i="0">
+                <a:solidFill>
+                  <a:srgbClr val="141B2D"/>
+                </a:solidFill>
+                <a:latin typeface="Helvetica Neue"/>
+              </a:rPr>
+              <a:t>This applies to any behavioral data, not just search tuning</a:t>
             </a:r>
           </a:p>
         </p:txBody>

--- a/ldp_for_search_slides.pptx
+++ b/ldp_for_search_slides.pptx
@@ -34,6 +34,7 @@
     <p:sldId id="282" r:id="rId34"/>
     <p:sldId id="283" r:id="rId35"/>
     <p:sldId id="284" r:id="rId36"/>
+    <p:sldId id="285" r:id="rId37"/>
   </p:sldIdLst>
   <p:sldSz cx="12191695" cy="6858000" type="screen4x3"/>
   <p:notesSz cx="6858000" cy="9144000"/>
@@ -810,7 +811,7 @@
           <a:lstStyle/>
           <a:p>
             <a:r>
-              <a:t>One slide only. Resist the urge to teach differential privacy properly, there is not time and it is not the point of the talk. The noise is Laplace, but the word can wait for the next slide, where the shape is on screen and does the explaining for you. If someone asks here, one sentence: symmetric noise, equally likely to push the value up or down, centered on the truth. The formula is deliberately off the slide. If someone asks, the noise scale is sensitivity over epsilon, and sensitivity here is 1.0 per coordinate on vectors whose whole norm is 1, which is conservative rather than tight. The notes file has the longer answer. Do not volunteer the word, it is the only term in the deck with no definition behind it.</a:t>
+              <a:t>Give the technique a reference point before defining it. Most of the room has heard that the 2020 US Census used differential privacy, and that is the central flavour: the Bureau collects every raw response, holds it, and adds noise to the tables it publishes. The guarantee is about what leaves the building. That works because there is a curator everyone is willing to trust, backed by law. Part 1 was the argument that we do not have one. Legal will not let the cluster hold readable queries, so the noise has to go in before anything is sent, which is the local flavour. Be honest about the price, because it is the whole reason central DP exists: noising one aggregate needs far less noise than noising every record, so central DP is much more accurate at the same epsilon. Everything after this slide is the cost of removing the curator, and whether the numbers still work. Apple and Google are the credibility point if anyone thinks local DP is academic. Apple has shipped it on iOS for years to learn which emoji and which QuickType suggestions are popular, and Google ships RAPPOR in Chrome. The emoji case is worth spelling out, because it is our problem exactly: they learn which emoji are trending across everyone without learning which emoji you sent. Swap emoji for queries and that is this talk.</a:t>
             </a:r>
           </a:p>
         </p:txBody>
@@ -880,7 +881,7 @@
           <a:lstStyle/>
           <a:p>
             <a:r>
-              <a:t>This is the distributional check. It proves the mechanism is implemented correctly. It does not prove an attacker fails, which is why the next slide exists. Say what the thousand is, because the title does not: one query, one coordinate of its vector, and a thousand independent noise draws on that same true value. You cannot audit a random mechanism from one sample, so you repeat it until the shape shows. Then head off the objection someone in the room is already forming. Yes, averaging those thousand draws recovers the true value, which is exactly what the peak landing on the red line shows. That is the auditor's view rather than a usage pattern: a query is privatized once, on submit. The moment one person emits the same query a thousand times, an attacker can average it back, which is why the appendix says privatize on submit and never per keystroke. It is the asymmetry the payoff rests on, pointed the other way. Many draws from one person breaks privacy, one draw each from many people preserves it.</a:t>
+              <a:t>One slide only. Resist the urge to teach differential privacy properly, there is not time and it is not the point of the talk. The noise is Laplace, but the word can wait for the next slide, where the shape is on screen and does the explaining for you. If someone asks here, one sentence: symmetric noise, equally likely to push the value up or down, centered on the truth. The formula is deliberately off the slide. If someone asks, the noise scale is sensitivity over epsilon, and sensitivity here is 1.0 per coordinate on vectors whose whole norm is 1, which is conservative rather than tight. The notes file has the longer answer. Do not volunteer the word, it is the only term in the deck with no definition behind it.</a:t>
             </a:r>
           </a:p>
         </p:txBody>
@@ -950,7 +951,7 @@
           <a:lstStyle/>
           <a:p>
             <a:r>
-              <a:t>The dial, made visible. Same query, same coordinate, same thousand draws. Only epsilon differs. The scale is one over epsilon, so 1.2 gives 0.833 and 10 gives 0.100, about eight times narrower. Say why the shared x axis matters: let each panel scale itself and they look identical, which is the opposite of the point. Then land both halves of the trade. At epsilon 10 the noise is finally smaller than the index itself, 0.141 against a coordinate spread of 0.171, which is why the next part shows utility jumping from 0.72 to 0.98 between epsilon 5 and 10. And that is also the cost: a spread this narrow means someone reading a single sample is reading the true value. There is no setting that is private and accurate for one query, which is what the payoff slides exist to answer.</a:t>
+              <a:t>This is the distributional check. It proves the mechanism is implemented correctly. It does not prove an attacker fails, which is why the next slide exists. Say what the thousand is, because the title does not: one query, one coordinate of its vector, and a thousand independent noise draws on that same true value. You cannot audit a random mechanism from one sample, so you repeat it until the shape shows. Then head off the objection someone in the room is already forming. Yes, averaging those thousand draws recovers the true value, which is exactly what the peak landing on the red line shows. That is the auditor's view rather than a usage pattern: a query is privatized once, on submit. The moment one person emits the same query a thousand times, an attacker can average it back, which is why the appendix says privatize on submit and never per keystroke. It is the asymmetry the payoff rests on, pointed the other way. Many draws from one person breaks privacy, one draw each from many people preserves it.</a:t>
             </a:r>
           </a:p>
         </p:txBody>
@@ -1020,7 +1021,7 @@
           <a:lstStyle/>
           <a:p>
             <a:r>
-              <a:t>Stronger evidence than the histogram, because it measures an adversary rather than a distribution. This discharges the 'verify, do not hope' promise in the abstract. Head off the obvious confusion: the previous slide used epsilon 1.2 and this axis runs to 200. Epsilon is not portable between indexes, because what matters is the noise scale relative to the spread of the coordinates, and that spread differs between the 20-document PCA and this 43,000-document one. On the baselines: the query is 'solid wood platform bed', whose class Beds holds 1,112 of the 42,994 products, so class chance is 2.6 percent and item chance 0.002 percent. Class recovery of 6 percent at epsilon 1 is low but not nothing. Do not oversell the item curve either: 13 percent at epsilon 10 is still about 5,600 times chance, so the claim is that the category leaks first, not that the item is safe. This is where the limitations slide gets its first bullet, so it lands later as a callback rather than a new admission.</a:t>
+              <a:t>The dial, made visible. Same query, same coordinate, same thousand draws. Only epsilon differs. The scale is one over epsilon, so 1.2 gives 0.833 and 10 gives 0.100, about eight times narrower. Say why the shared x axis matters: let each panel scale itself and they look identical, which is the opposite of the point. Then land both halves of the trade. At epsilon 10 the noise is finally smaller than the index itself, 0.141 against a coordinate spread of 0.171, which is why the next part shows utility jumping from 0.72 to 0.98 between epsilon 5 and 10. And that is also the cost: a spread this narrow means someone reading a single sample is reading the true value. There is no setting that is private and accurate for one query, which is what the payoff slides exist to answer.</a:t>
             </a:r>
           </a:p>
         </p:txBody>
@@ -1090,7 +1091,7 @@
           <a:lstStyle/>
           <a:p>
             <a:r>
-              <a:t>Volunteer the confession here, because no slide makes it for you any more. That demo back in Part 2 was rigged: epsilon 1.2 on a twenty document index, where the attacker learned nothing and neither did the user. Say it yourself. If it comes out in Q&amp;A instead, the talk loses, and volunteering it is what makes the payoff believable. Go to the red line first and stay there. That is the demo from Part 2, with the top hit correct 7 percent of the time against a 5 percent baseline, and the top five 45 against 25. Barely above guessing. Then sweep right to make the second point, that utility only returns as epsilon rises, and by then the attacker is reading the query too. Note the curves rise here where slide 16's rose for the attacker: up means the search still works. Exact values if asked: at epsilon 1.2, P@1 0.07 and R@5 0.45; at 3, 0.38 and 0.75; at 5, 0.72 and 0.95; at 10, 0.98 and 1.00. Resist calling epsilon 3 to 5 a usable window. P@1 of 0.38 is eight times chance, so the attacker is already doing well there. The honest version of that argument needs the real index, which is the next slide.</a:t>
+              <a:t>Stronger evidence than the histogram, because it measures an adversary rather than a distribution. This discharges the 'verify, do not hope' promise in the abstract. Head off the obvious confusion: the previous slide used epsilon 1.2 and this axis runs to 200. Epsilon is not portable between indexes, because what matters is the noise scale relative to the spread of the coordinates, and that spread differs between the 20-document PCA and this 43,000-document one. On the baselines: the query is 'solid wood platform bed', whose class Beds holds 1,112 of the 42,994 products, so class chance is 2.6 percent and item chance 0.002 percent. Class recovery of 6 percent at epsilon 1 is low but not nothing. Do not oversell the item curve either: 13 percent at epsilon 10 is still about 5,600 times chance, so the claim is that the category leaks first, not that the item is safe. This is where the limitations slide gets its first bullet, so it lands later as a callback rather than a new admission.</a:t>
             </a:r>
           </a:p>
         </p:txBody>
@@ -1160,7 +1161,7 @@
           <a:lstStyle/>
           <a:p>
             <a:r>
-              <a:t>This is the conceptual core of the talk. Everything before it was setup. LDP is not a privacy tax, it is a trade of individual resolution for population accuracy.</a:t>
+              <a:t>Volunteer the confession here, because no slide makes it for you any more. That demo back in Part 2 was rigged: epsilon 1.2 on a twenty document index, where the attacker learned nothing and neither did the user. Say it yourself. If it comes out in Q&amp;A instead, the talk loses, and volunteering it is what makes the payoff believable. Go to the red line first and stay there. That is the demo from Part 2, with the top hit correct 7 percent of the time against a 5 percent baseline, and the top five 45 against 25. Barely above guessing. Then sweep right to make the second point, that utility only returns as epsilon rises, and by then the attacker is reading the query too. Note the curves rise here where slide 16's rose for the attacker: up means the search still works. Exact values if asked: at epsilon 1.2, P@1 0.07 and R@5 0.45; at 3, 0.38 and 0.75; at 5, 0.72 and 0.95; at 10, 0.98 and 1.00. Resist calling epsilon 3 to 5 a usable window. P@1 of 0.38 is eight times chance, so the attacker is already doing well there. The honest version of that argument needs the real index, which is the next slide.</a:t>
             </a:r>
           </a:p>
         </p:txBody>
@@ -1230,7 +1231,7 @@
           <a:lstStyle/>
           <a:p>
             <a:r>
-              <a:t>The centerpiece, and now the only place section 11's result appears, so open with it. 480 real WANDS queries in five segments, every user privatizing independently on their own device, no readable query anywhere and no trusted intermediate step. Individual recovery per segment runs 0.020, 0.020, 0.063, 0.070 and 0.030 against chance of 0.014 to 0.031, roughly one to two and a half times chance, which is not usable. Segment identification is 5 of 5, exact. Same data, same epsilon of 1.0, two different questions. Then the plot. Take the shape first. More users, less error. The measured green line tracks the predicted grey one across four orders of magnitude. This is ordinary statistics, so say so: averaging n independent things shrinks the noise as one over root n, the same reason a poll of four thousand beats one of one thousand. Nothing here is special to privacy. Then the red line. Read it off the bottom axis: 2,300 users. That is the answer, and it is the next slide. If asked where 2,300 comes from, it is where the measured error drops under 0.128, the average spread of one coordinate across the index. That bar is strict on purpose. Two typical products sit about 0.82 apart, so the line is roughly six times stricter than just telling products apart.</a:t>
+              <a:t>This is the conceptual core of the talk. Everything before it was setup. LDP is not a privacy tax, it is a trade of individual resolution for population accuracy.</a:t>
             </a:r>
           </a:p>
         </p:txBody>
@@ -1370,7 +1371,7 @@
           <a:lstStyle/>
           <a:p>
             <a:r>
-              <a:t>Give the audience one operational number they can apply on Monday. This is it. The 2,300 is where the measured error crosses the spread of the index, 0.128, on the convergence plot. It is not a constant: error goes as one over epsilon times one over root n, so the threshold scales as one over epsilon squared. At epsilon 0.5 it is about 9,200 users, at epsilon 2 it is about 575.</a:t>
+              <a:t>The centerpiece, and now the only place section 11's result appears, so open with it. 480 real WANDS queries in five segments, every user privatizing independently on their own device, no readable query anywhere and no trusted intermediate step. Individual recovery per segment runs 0.020, 0.020, 0.063, 0.070 and 0.030 against chance of 0.014 to 0.031, roughly one to two and a half times chance, which is not usable. Segment identification is 5 of 5, exact. Same data, same epsilon of 1.0, two different questions. Then the plot. Take the shape first. More users, less error. The measured green line tracks the predicted grey one across four orders of magnitude. This is ordinary statistics, so say so: averaging n independent things shrinks the noise as one over root n, the same reason a poll of four thousand beats one of one thousand. Nothing here is special to privacy. Then the red line. Read it off the bottom axis: 2,300 users. That is the answer, and it is the next slide. If asked where 2,300 comes from, it is where the measured error drops under 0.128, the average spread of one coordinate across the index. That bar is strict on purpose. Two typical products sit about 0.82 apart, so the line is roughly six times stricter than just telling products apart.</a:t>
             </a:r>
           </a:p>
         </p:txBody>
@@ -1440,7 +1441,7 @@
           <a:lstStyle/>
           <a:p>
             <a:r>
-              <a:t>The question everyone is holding, answered now that they have seen the evidence for every step. Step one is the reframe: there is no epsilon that is private and accurate for one query, so stop looking for it on the tradeoff curve. Point back to the attack curve for step two, because that is how you measure what an epsilon buys on an index you actually run. Step three is the convergence plot and the previous slide. Step four is the whole talk in one line: error goes as one over epsilon times one over root n, so privacy rides on epsilon alone while accuracy has two dials, and n is the one that costs nothing. If someone wants a starting number, say epsilon 1 on an index like this one and then measure, rather than giving them a figure to carry home unexamined.</a:t>
+              <a:t>Give the audience one operational number they can apply on Monday. This is it. The 2,300 is where the measured error crosses the spread of the index, 0.128, on the convergence plot. It is not a constant: error goes as one over epsilon times one over root n, so the threshold scales as one over epsilon squared. At epsilon 0.5 it is about 9,200 users, at epsilon 2 it is about 575.</a:t>
             </a:r>
           </a:p>
         </p:txBody>
@@ -1510,7 +1511,7 @@
           <a:lstStyle/>
           <a:p>
             <a:r>
-              <a:t>The reframe. Every input relevance tuning actually needs is a population statistic. Let this sit on screen for a beat before moving on.</a:t>
+              <a:t>The question everyone is holding, answered now that they have seen the evidence for every step. Step one is the reframe: there is no epsilon that is private and accurate for one query, so stop looking for it on the tradeoff curve. Point back to the attack curve for step two, because that is how you measure what an epsilon buys on an index you actually run. Step three is the convergence plot and the previous slide. Step four is the whole talk in one line: error goes as one over epsilon times one over root n, so privacy rides on epsilon alone while accuracy has two dials, and n is the one that costs nothing. If someone wants a starting number, say epsilon 1 on an index like this one and then measure, rather than giving them a figure to carry home unexamined.</a:t>
             </a:r>
           </a:p>
         </p:txBody>
@@ -1580,7 +1581,7 @@
           <a:lstStyle/>
           <a:p>
             <a:r>
-              <a:t>About 7 minutes. Land the integration, then be honest about what does not work.</a:t>
+              <a:t>The reframe. Every input relevance tuning actually needs is a population statistic. Let this sit on screen for a beat before moving on.</a:t>
             </a:r>
           </a:p>
         </p:txBody>
@@ -1650,7 +1651,7 @@
           <a:lstStyle/>
           <a:p>
             <a:r>
-              <a:t>Say up front that none of this is built into UBI today. ubi.js is a serializer, and the embedding, the projection and the noise are code the adopter writes and runs before handing the request to trackQuery. The notes file has the call shape and the two ways to get it wrong. The architectural payoff. The trust boundary moves to the device, which is the only place the raw query legitimately exists. The last bullet answers the obvious objection, that the people collecting the data are the ones choosing how much privacy users get. True, and the standing critique of deployed LDP. The web deployment is the answer: because the mechanism ships as JavaScript, a user, an auditor or a regulator can open devtools and check the epsilon. A server-side pipeline or a native app cannot make that claim. It turns trust us into check us, which is the same promise as the rest of the talk.</a:t>
+              <a:t>About 7 minutes. Land the integration, then be honest about what does not work.</a:t>
             </a:r>
           </a:p>
         </p:txBody>
@@ -1720,7 +1721,7 @@
           <a:lstStyle/>
           <a:p>
             <a:r>
-              <a:t>The integration question, answered concretely, and it needs no change to the UBI spec. query_attributes is typed as a free-form object for exactly this kind of thing, and the epsilon travels with the record so a reader knows the budget it was collected under. user_query is emptied rather than dropped because the published schema lists it as required. Worth knowing if someone asks: the schema contradicts itself there, since the field also carries a comment saying it is not required, for recommendation systems with no typed query. Two things to volunteer: the identifiers are deliberately identical on both sides, which is the limitation two slides later, and every dashboard that reads user_query breaks, which is the real migration cost. A float array in an object is not a knn_vector either, so averaging these at query time needs a scripted aggregation or an explicit vector mapping.</a:t>
+              <a:t>Say up front that none of this is built into UBI today. ubi.js is a serializer, and the embedding, the projection and the noise are code the adopter writes and runs before handing the request to trackQuery. The notes file has the call shape and the two ways to get it wrong. The architectural payoff. The trust boundary moves to the device, which is the only place the raw query legitimately exists. The last bullet answers the obvious objection, that the people collecting the data are the ones choosing how much privacy users get. True, and the standing critique of deployed LDP. The web deployment is the answer: because the mechanism ships as JavaScript, a user, an auditor or a regulator can open devtools and check the epsilon. A server-side pipeline or a native app cannot make that claim. It turns trust us into check us, which is the same promise as the rest of the talk.</a:t>
             </a:r>
           </a:p>
         </p:txBody>
@@ -1790,7 +1791,7 @@
           <a:lstStyle/>
           <a:p>
             <a:r>
-              <a:t>Tie back to the abstract's promise about LTR and query-intent analysis. Then name the thing that genuinely goes away. If anyone presses on the learning-to-rank bullet, be straight: LTR judgments come from clicks, and this mechanism does not touch clicks, so that signal survives because it was never protected rather than because LDP preserved it. The limitations slide says so.</a:t>
+              <a:t>The integration question, answered concretely, and it needs no change to the UBI spec. query_attributes is typed as a free-form object for exactly this kind of thing, and the epsilon travels with the record so a reader knows the budget it was collected under. user_query is emptied rather than dropped because the published schema lists it as required. Worth knowing if someone asks: the schema contradicts itself there, since the field also carries a comment saying it is not required, for recommendation systems with no typed query. Two things to volunteer: the identifiers are deliberately identical on both sides, which is the limitation two slides later, and every dashboard that reads user_query breaks, which is the real migration cost. A float array in an object is not a knn_vector either, so averaging these at query time needs a scripted aggregation or an explicit vector mapping.</a:t>
             </a:r>
           </a:p>
         </p:txBody>
@@ -1860,7 +1861,7 @@
           <a:lstStyle/>
           <a:p>
             <a:r>
-              <a:t>Every one of these is a question someone will ask. Answering them first is cheaper than answering them under pressure. Also mention that a formal epsilon-DP claim needs sensitivity calibrated to the true coordinate range. Here the vectors are L2-normalized before PCA, so the whole 20-dimensional vector has norm 1, which makes sensitivity 1.0 per coordinate conservative rather than tight. That is the answer if someone asks how sensitivity was set. Two follow-ups come off that bullet. Asked how often epsilon needs re-tuning, say when you re-embed or refit PCA, because routine additions to a large index do not move the coordinate spread, and normalizing before PCA keeps sensitivity itself stable whatever the catalogue holds. Asked whether privacy decays over time, say yes but not through epsilon: one user's repeated queries compose, and an attacker who averages that one user's own noised draws recovers the intent, which is the asymmetry of the payoff turned around. Epsilon is a budget per release rather than a standing property, so the fix is rotating or dropping client_id and session_id, not a smaller epsilon. On the long tail, which someone will ask about: the workarounds are coarser segments and longer time windows, and both are the same trade at lower resolution, because they only raise n. The genuinely different answer is shuffle DP or secure aggregation, which buys far more utility at the same epsilon but changes the architecture rather than the parameter. Worth adding that tail relevance is usually improved by retrieval work rather than behavioural signal anyway. On the last bullet, be direct: this is scoped work, not a finished privacy story for all of UBI. The query text is covered. Clicks are counts rather than vectors and want randomized response, and client_id and session_id would need rotating or dropping. That is the honest answer to the linkability half of the problem raised in Part 1.</a:t>
+              <a:t>Tie back to the abstract's promise about LTR and query-intent analysis. Then name the thing that genuinely goes away. If anyone presses on the learning-to-rank bullet, be straight: LTR judgments come from clicks, and this mechanism does not touch clicks, so that signal survives because it was never protected rather than because LDP preserved it. The limitations slide says so.</a:t>
             </a:r>
           </a:p>
         </p:txBody>
@@ -1930,7 +1931,7 @@
           <a:lstStyle/>
           <a:p>
             <a:r>
-              <a:t>Four sentences. If someone remembers only one, it should be the last.</a:t>
+              <a:t>Every one of these is a question someone will ask. Answering them first is cheaper than answering them under pressure. Also mention that a formal epsilon-DP claim needs sensitivity calibrated to the true coordinate range. Here the vectors are L2-normalized before PCA, so the whole 20-dimensional vector has norm 1, which makes sensitivity 1.0 per coordinate conservative rather than tight. That is the answer if someone asks how sensitivity was set. Two follow-ups come off that bullet. Asked how often epsilon needs re-tuning, say when you re-embed or refit PCA, because routine additions to a large index do not move the coordinate spread, and normalizing before PCA keeps sensitivity itself stable whatever the catalogue holds. Asked whether privacy decays over time, say yes but not through epsilon: one user's repeated queries compose, and an attacker who averages that one user's own noised draws recovers the intent, which is the asymmetry of the payoff turned around. Epsilon is a budget per release rather than a standing property, so the fix is rotating or dropping client_id and session_id, not a smaller epsilon. On the long tail, which someone will ask about: the workarounds are coarser segments and longer time windows, and both are the same trade at lower resolution, because they only raise n. The genuinely different answer is shuffle DP or secure aggregation, which buys far more utility at the same epsilon but changes the architecture rather than the parameter. Worth adding that tail relevance is usually improved by retrieval work rather than behavioural signal anyway. On the last bullet, be direct: this is scoped work, not a finished privacy story for all of UBI. The query text is covered. Clicks are counts rather than vectors and want randomized response, and client_id and session_id would need rotating or dropping. That is the honest answer to the linkability half of the problem raised in Part 1.</a:t>
             </a:r>
           </a:p>
         </p:txBody>
@@ -2000,7 +2001,7 @@
           <a:lstStyle/>
           <a:p>
             <a:r>
-              <a:t>Have the notebook open on the convergence plot behind you during Q&amp;A. Likely questions: formal DP guarantee, why PCA, composition across repeated queries from one user, why not just hash the query, and how you actually test the mechanism. That last one is the takeaway slide's promise, so have the four checks ready, each catching something different. One, audit the distribution, section 8: privatize one coordinate a thousand times and confirm the peak sits on the true value and the spread is sensitivity over epsilon. That catches a mechanism that is not what you claim, a wrong scale or a sign error, and it is cheap. Two, run an actual attacker, section 10: noise a query, do nearest neighbour against your real index, and score item and class recovery against chance across an epsilon sweep. That catches correctly implemented but still leaking, which is the one that matters. Three, measure the utility cost, section 7, so you know what the epsilon test two approved leaves you. Four, check the convergence, section 11: confirm error falls as one over root n. That catches noise that is not independent across users, a reused seed or a per-session draw, because correlated noise does not cancel and the measured line flattens away from theory. Two things worth saying: none of this needs production data, and tests two and four are the ones people skip and the ones that find real problems.</a:t>
+              <a:t>Four sentences. If someone remembers only one, it should be the last.</a:t>
             </a:r>
           </a:p>
         </p:txBody>
@@ -2071,6 +2072,76 @@
           <a:p>
             <a:r>
               <a:t>About 8 minutes. Goal is that everyone understands the problem before any code appears.</a:t>
+            </a:r>
+          </a:p>
+        </p:txBody>
+      </p:sp>
+      <p:sp>
+        <p:nvSpPr>
+          <p:cNvPr id="4" name="Slide Number Placeholder 3"/>
+          <p:cNvSpPr>
+            <a:spLocks noGrp="1"/>
+          </p:cNvSpPr>
+          <p:nvPr>
+            <p:ph type="sldNum" idx="5" sz="quarter"/>
+          </p:nvPr>
+        </p:nvSpPr>
+        <p:spPr/>
+      </p:sp>
+    </p:spTree>
+  </p:cSld>
+  <p:clrMapOvr>
+    <a:masterClrMapping/>
+  </p:clrMapOvr>
+</p:notes>
+</file>
+
+<file path=ppt/notesSlides/notesSlide30.xml><?xml version="1.0" encoding="utf-8"?>
+<p:notes xmlns:a="http://schemas.openxmlformats.org/drawingml/2006/main" xmlns:p="http://schemas.openxmlformats.org/presentationml/2006/main" xmlns:r="http://schemas.openxmlformats.org/officeDocument/2006/relationships">
+  <p:cSld>
+    <p:spTree>
+      <p:nvGrpSpPr>
+        <p:cNvPr id="1" name=""/>
+        <p:cNvGrpSpPr/>
+        <p:nvPr/>
+      </p:nvGrpSpPr>
+      <p:grpSpPr>
+        <a:xfrm>
+          <a:off x="0" y="0"/>
+          <a:ext cx="0" cy="0"/>
+          <a:chOff x="0" y="0"/>
+          <a:chExt cx="0" cy="0"/>
+        </a:xfrm>
+      </p:grpSpPr>
+      <p:sp>
+        <p:nvSpPr>
+          <p:cNvPr id="2" name="Slide Image Placeholder 1"/>
+          <p:cNvSpPr>
+            <a:spLocks noGrp="1"/>
+          </p:cNvSpPr>
+          <p:nvPr>
+            <p:ph type="sldImg" idx="2"/>
+          </p:nvPr>
+        </p:nvSpPr>
+        <p:spPr/>
+      </p:sp>
+      <p:sp>
+        <p:nvSpPr>
+          <p:cNvPr id="3" name="Notes Placeholder 2"/>
+          <p:cNvSpPr>
+            <a:spLocks noGrp="1"/>
+          </p:cNvSpPr>
+          <p:nvPr>
+            <p:ph type="body" idx="3" sz="quarter"/>
+          </p:nvPr>
+        </p:nvSpPr>
+        <p:spPr/>
+        <p:txBody>
+          <a:bodyPr/>
+          <a:lstStyle/>
+          <a:p>
+            <a:r>
+              <a:t>Have the notebook open on the convergence plot behind you during Q&amp;A. Likely questions: formal DP guarantee, why PCA, composition across repeated queries from one user, why not just hash the query, and how you actually test the mechanism. That last one is the takeaway slide's promise, so have the four checks ready, each catching something different. One, audit the distribution, section 8: privatize one coordinate a thousand times and confirm the peak sits on the true value and the spread is sensitivity over epsilon. That catches a mechanism that is not what you claim, a wrong scale or a sign error, and it is cheap. Two, run an actual attacker, section 10: noise a query, do nearest neighbour against your real index, and score item and class recovery against chance across an epsilon sweep. That catches correctly implemented but still leaking, which is the one that matters. Three, measure the utility cost, section 7, so you know what the epsilon test two approved leaves you. Four, check the convergence, section 11: confirm error falls as one over root n. That catches noise that is not independent across users, a reused seed or a per-session draw, because correlated noise does not cancel and the measured line flattens away from theory. Two things worth saying: none of this needs production data, and tests two and four are the ones people skip and the ones that find real problems.</a:t>
             </a:r>
           </a:p>
         </p:txBody>
@@ -6401,7 +6472,7 @@
                 </a:solidFill>
                 <a:latin typeface="Helvetica Neue"/>
               </a:rPr>
-              <a:t>The fix and the proof</a:t>
+              <a:t>The fix: Local Differential Privacy</a:t>
             </a:r>
           </a:p>
         </p:txBody>
@@ -6490,13 +6561,13 @@
           <a:lstStyle/>
           <a:p>
             <a:r>
-              <a:rPr sz="3400" b="1">
+              <a:rPr sz="3200" b="1">
                 <a:solidFill>
                   <a:srgbClr val="141B2D"/>
                 </a:solidFill>
                 <a:latin typeface="Helvetica Neue"/>
               </a:rPr>
-              <a:t>Local Differential Privacy</a:t>
+              <a:t>Two places to add the noise</a:t>
             </a:r>
           </a:p>
         </p:txBody>
@@ -6509,7 +6580,7 @@
         </p:nvSpPr>
         <p:spPr>
           <a:xfrm>
-            <a:off x="822960" y="1276603"/>
+            <a:off x="822960" y="1245615"/>
             <a:ext cx="1463040" cy="50800"/>
           </a:xfrm>
           <a:prstGeom prst="rect">
@@ -6553,8 +6624,8 @@
         </p:nvSpPr>
         <p:spPr>
           <a:xfrm>
-            <a:off x="822960" y="2057400"/>
-            <a:ext cx="5120640" cy="4023360"/>
+            <a:off x="822960" y="1691640"/>
+            <a:ext cx="10515600" cy="548640"/>
           </a:xfrm>
           <a:prstGeom prst="rect">
             <a:avLst/>
@@ -6567,131 +6638,320 @@
           </a:bodyPr>
           <a:lstStyle/>
           <a:p>
-            <a:pPr marL="342900" indent="-342900">
-              <a:spcAft>
-                <a:spcPts val="1400"/>
-              </a:spcAft>
-            </a:pPr>
-            <a:r>
-              <a:rPr sz="2100" b="1">
-                <a:solidFill>
-                  <a:srgbClr val="005EB8"/>
-                </a:solidFill>
-                <a:latin typeface="Helvetica Neue"/>
-              </a:rPr>
-              <a:t>-   </a:t>
-            </a:r>
-            <a:r>
-              <a:rPr sz="2100" b="0" i="0">
-                <a:solidFill>
-                  <a:srgbClr val="141B2D"/>
-                </a:solidFill>
-                <a:latin typeface="Helvetica Neue"/>
-              </a:rPr>
-              <a:t>The vector was never the problem, storing it readable was</a:t>
-            </a:r>
-          </a:p>
-          <a:p>
-            <a:pPr marL="342900" indent="-342900">
-              <a:spcAft>
-                <a:spcPts val="1400"/>
-              </a:spcAft>
-            </a:pPr>
-            <a:r>
-              <a:rPr sz="2100" b="1">
-                <a:solidFill>
-                  <a:srgbClr val="005EB8"/>
-                </a:solidFill>
-                <a:latin typeface="Helvetica Neue"/>
-              </a:rPr>
-              <a:t>-   </a:t>
-            </a:r>
-            <a:r>
-              <a:rPr sz="2100" b="0" i="0">
-                <a:solidFill>
-                  <a:srgbClr val="141B2D"/>
-                </a:solidFill>
-                <a:latin typeface="Helvetica Neue"/>
-              </a:rPr>
-              <a:t>Add calibrated noise to the query vector on the device</a:t>
-            </a:r>
-          </a:p>
-          <a:p>
-            <a:pPr marL="342900" indent="-342900">
-              <a:spcAft>
-                <a:spcPts val="1400"/>
-              </a:spcAft>
-            </a:pPr>
-            <a:r>
-              <a:rPr sz="2100" b="1">
-                <a:solidFill>
-                  <a:srgbClr val="005EB8"/>
-                </a:solidFill>
-                <a:latin typeface="Helvetica Neue"/>
-              </a:rPr>
-              <a:t>-   </a:t>
-            </a:r>
-            <a:r>
-              <a:rPr sz="2100" b="0" i="0">
-                <a:solidFill>
-                  <a:srgbClr val="141B2D"/>
-                </a:solidFill>
-                <a:latin typeface="Helvetica Neue"/>
-              </a:rPr>
-              <a:t>Epsilon is the dial, and lower epsilon means more noise and more privacy</a:t>
-            </a:r>
-          </a:p>
-          <a:p>
-            <a:pPr marL="342900" indent="-342900">
-              <a:spcAft>
-                <a:spcPts val="1400"/>
-              </a:spcAft>
-            </a:pPr>
-            <a:r>
-              <a:rPr sz="2100" b="1">
-                <a:solidFill>
-                  <a:srgbClr val="005EB8"/>
-                </a:solidFill>
-                <a:latin typeface="Helvetica Neue"/>
-              </a:rPr>
-              <a:t>-   </a:t>
-            </a:r>
-            <a:r>
-              <a:rPr sz="2100" b="0" i="0">
-                <a:solidFill>
-                  <a:srgbClr val="141B2D"/>
-                </a:solidFill>
-                <a:latin typeface="Helvetica Neue"/>
-              </a:rPr>
-              <a:t>The user's query is not stored so there is nothing to redact</a:t>
-            </a:r>
-          </a:p>
-        </p:txBody>
-      </p:sp>
-      <p:pic>
-        <p:nvPicPr>
-          <p:cNvPr id="5" name="Picture 4" descr="13_epsilon_dial.png"/>
-          <p:cNvPicPr>
-            <a:picLocks noChangeAspect="1"/>
-          </p:cNvPicPr>
+            <a:r>
+              <a:rPr sz="2100" b="0">
+                <a:solidFill>
+                  <a:srgbClr val="5A647A"/>
+                </a:solidFill>
+                <a:latin typeface="Helvetica Neue"/>
+              </a:rPr>
+              <a:t>Differential privacy comes in two shapes, and the difference is who you trust</a:t>
+            </a:r>
+          </a:p>
+        </p:txBody>
+      </p:sp>
+      <p:graphicFrame>
+        <p:nvGraphicFramePr>
+          <p:cNvPr id="5" name="Table 4"/>
+          <p:cNvGraphicFramePr>
+            <a:graphicFrameLocks noGrp="1"/>
+          </p:cNvGraphicFramePr>
           <p:nvPr/>
-        </p:nvPicPr>
-        <p:blipFill>
-          <a:blip r:embed="rId2"/>
-          <a:stretch>
-            <a:fillRect/>
-          </a:stretch>
-        </p:blipFill>
-        <p:spPr>
-          <a:xfrm>
-            <a:off x="6263640" y="2535314"/>
-            <a:ext cx="5029200" cy="2701770"/>
-          </a:xfrm>
-          <a:prstGeom prst="rect">
-            <a:avLst/>
-          </a:prstGeom>
-        </p:spPr>
-      </p:pic>
+        </p:nvGraphicFramePr>
+        <p:xfrm>
+          <a:off x="1523847" y="2514600"/>
+          <a:ext cx="9144000" cy="2267712"/>
+        </p:xfrm>
+        <a:graphic>
+          <a:graphicData uri="http://schemas.openxmlformats.org/drawingml/2006/table">
+            <a:tbl>
+              <a:tblPr firstRow="1" bandRow="1">
+                <a:tableStyleId>{5C22544A-7EE6-4342-B048-85BDC9FD1C3A}</a:tableStyleId>
+              </a:tblPr>
+              <a:tblGrid>
+                <a:gridCol w="3048000"/>
+                <a:gridCol w="3048000"/>
+                <a:gridCol w="3048000"/>
+              </a:tblGrid>
+              <a:tr h="566928">
+                <a:tc>
+                  <a:txBody>
+                    <a:bodyPr/>
+                    <a:lstStyle/>
+                    <a:p>
+                      <a:pPr algn="l"/>
+                    </a:p>
+                  </a:txBody>
+                  <a:tcPr anchor="ctr">
+                    <a:solidFill>
+                      <a:srgbClr val="005EB8"/>
+                    </a:solidFill>
+                  </a:tcPr>
+                </a:tc>
+                <a:tc>
+                  <a:txBody>
+                    <a:bodyPr/>
+                    <a:lstStyle/>
+                    <a:p>
+                      <a:pPr algn="ctr"/>
+                      <a:r>
+                        <a:rPr sz="1800" b="1">
+                          <a:solidFill>
+                            <a:srgbClr val="FFFFFF"/>
+                          </a:solidFill>
+                          <a:latin typeface="Helvetica Neue"/>
+                        </a:rPr>
+                        <a:t>Central DP</a:t>
+                      </a:r>
+                    </a:p>
+                  </a:txBody>
+                  <a:tcPr anchor="ctr">
+                    <a:solidFill>
+                      <a:srgbClr val="005EB8"/>
+                    </a:solidFill>
+                  </a:tcPr>
+                </a:tc>
+                <a:tc>
+                  <a:txBody>
+                    <a:bodyPr/>
+                    <a:lstStyle/>
+                    <a:p>
+                      <a:pPr algn="ctr"/>
+                      <a:r>
+                        <a:rPr sz="1800" b="1">
+                          <a:solidFill>
+                            <a:srgbClr val="FFFFFF"/>
+                          </a:solidFill>
+                          <a:latin typeface="Helvetica Neue"/>
+                        </a:rPr>
+                        <a:t>Local DP</a:t>
+                      </a:r>
+                    </a:p>
+                  </a:txBody>
+                  <a:tcPr anchor="ctr">
+                    <a:solidFill>
+                      <a:srgbClr val="005EB8"/>
+                    </a:solidFill>
+                  </a:tcPr>
+                </a:tc>
+              </a:tr>
+              <a:tr h="566928">
+                <a:tc>
+                  <a:txBody>
+                    <a:bodyPr/>
+                    <a:lstStyle/>
+                    <a:p>
+                      <a:pPr algn="l"/>
+                      <a:r>
+                        <a:rPr sz="1800" b="0">
+                          <a:solidFill>
+                            <a:srgbClr val="141B2D"/>
+                          </a:solidFill>
+                          <a:latin typeface="Helvetica Neue"/>
+                        </a:rPr>
+                        <a:t>Noise is added</a:t>
+                      </a:r>
+                    </a:p>
+                  </a:txBody>
+                  <a:tcPr anchor="ctr">
+                    <a:solidFill>
+                      <a:srgbClr val="F4F7FB"/>
+                    </a:solidFill>
+                  </a:tcPr>
+                </a:tc>
+                <a:tc>
+                  <a:txBody>
+                    <a:bodyPr/>
+                    <a:lstStyle/>
+                    <a:p>
+                      <a:pPr algn="ctr"/>
+                      <a:r>
+                        <a:rPr sz="1800" b="0">
+                          <a:solidFill>
+                            <a:srgbClr val="141B2D"/>
+                          </a:solidFill>
+                          <a:latin typeface="Helvetica Neue"/>
+                        </a:rPr>
+                        <a:t>After collection</a:t>
+                      </a:r>
+                    </a:p>
+                  </a:txBody>
+                  <a:tcPr anchor="ctr">
+                    <a:solidFill>
+                      <a:srgbClr val="F4F7FB"/>
+                    </a:solidFill>
+                  </a:tcPr>
+                </a:tc>
+                <a:tc>
+                  <a:txBody>
+                    <a:bodyPr/>
+                    <a:lstStyle/>
+                    <a:p>
+                      <a:pPr algn="ctr"/>
+                      <a:r>
+                        <a:rPr sz="1800" b="0">
+                          <a:solidFill>
+                            <a:srgbClr val="141B2D"/>
+                          </a:solidFill>
+                          <a:latin typeface="Helvetica Neue"/>
+                        </a:rPr>
+                        <a:t>On the device</a:t>
+                      </a:r>
+                    </a:p>
+                  </a:txBody>
+                  <a:tcPr anchor="ctr">
+                    <a:solidFill>
+                      <a:srgbClr val="F4F7FB"/>
+                    </a:solidFill>
+                  </a:tcPr>
+                </a:tc>
+              </a:tr>
+              <a:tr h="566928">
+                <a:tc>
+                  <a:txBody>
+                    <a:bodyPr/>
+                    <a:lstStyle/>
+                    <a:p>
+                      <a:pPr algn="l"/>
+                      <a:r>
+                        <a:rPr sz="1800" b="0">
+                          <a:solidFill>
+                            <a:srgbClr val="141B2D"/>
+                          </a:solidFill>
+                          <a:latin typeface="Helvetica Neue"/>
+                        </a:rPr>
+                        <a:t>Who sees the raw data</a:t>
+                      </a:r>
+                    </a:p>
+                  </a:txBody>
+                  <a:tcPr anchor="ctr">
+                    <a:solidFill>
+                      <a:srgbClr val="FFFFFF"/>
+                    </a:solidFill>
+                  </a:tcPr>
+                </a:tc>
+                <a:tc>
+                  <a:txBody>
+                    <a:bodyPr/>
+                    <a:lstStyle/>
+                    <a:p>
+                      <a:pPr algn="ctr"/>
+                      <a:r>
+                        <a:rPr sz="1800" b="0">
+                          <a:solidFill>
+                            <a:srgbClr val="141B2D"/>
+                          </a:solidFill>
+                          <a:latin typeface="Helvetica Neue"/>
+                        </a:rPr>
+                        <a:t>A trusted curator</a:t>
+                      </a:r>
+                    </a:p>
+                  </a:txBody>
+                  <a:tcPr anchor="ctr">
+                    <a:solidFill>
+                      <a:srgbClr val="FFFFFF"/>
+                    </a:solidFill>
+                  </a:tcPr>
+                </a:tc>
+                <a:tc>
+                  <a:txBody>
+                    <a:bodyPr/>
+                    <a:lstStyle/>
+                    <a:p>
+                      <a:pPr algn="ctr"/>
+                      <a:r>
+                        <a:rPr sz="1800" b="0">
+                          <a:solidFill>
+                            <a:srgbClr val="141B2D"/>
+                          </a:solidFill>
+                          <a:latin typeface="Helvetica Neue"/>
+                        </a:rPr>
+                        <a:t>No one</a:t>
+                      </a:r>
+                    </a:p>
+                  </a:txBody>
+                  <a:tcPr anchor="ctr">
+                    <a:solidFill>
+                      <a:srgbClr val="FFFFFF"/>
+                    </a:solidFill>
+                  </a:tcPr>
+                </a:tc>
+              </a:tr>
+              <a:tr h="566928">
+                <a:tc>
+                  <a:txBody>
+                    <a:bodyPr/>
+                    <a:lstStyle/>
+                    <a:p>
+                      <a:pPr algn="l"/>
+                      <a:r>
+                        <a:rPr sz="1800" b="0">
+                          <a:solidFill>
+                            <a:srgbClr val="141B2D"/>
+                          </a:solidFill>
+                          <a:latin typeface="Helvetica Neue"/>
+                        </a:rPr>
+                        <a:t>Who uses it</a:t>
+                      </a:r>
+                    </a:p>
+                  </a:txBody>
+                  <a:tcPr anchor="ctr">
+                    <a:solidFill>
+                      <a:srgbClr val="F4F7FB"/>
+                    </a:solidFill>
+                  </a:tcPr>
+                </a:tc>
+                <a:tc>
+                  <a:txBody>
+                    <a:bodyPr/>
+                    <a:lstStyle/>
+                    <a:p>
+                      <a:pPr algn="ctr"/>
+                      <a:r>
+                        <a:rPr sz="1800" b="0">
+                          <a:solidFill>
+                            <a:srgbClr val="141B2D"/>
+                          </a:solidFill>
+                          <a:latin typeface="Helvetica Neue"/>
+                        </a:rPr>
+                        <a:t>The 2020 US Census</a:t>
+                      </a:r>
+                    </a:p>
+                  </a:txBody>
+                  <a:tcPr anchor="ctr">
+                    <a:solidFill>
+                      <a:srgbClr val="F4F7FB"/>
+                    </a:solidFill>
+                  </a:tcPr>
+                </a:tc>
+                <a:tc>
+                  <a:txBody>
+                    <a:bodyPr/>
+                    <a:lstStyle/>
+                    <a:p>
+                      <a:pPr algn="ctr"/>
+                      <a:r>
+                        <a:rPr sz="1800" b="0">
+                          <a:solidFill>
+                            <a:srgbClr val="141B2D"/>
+                          </a:solidFill>
+                          <a:latin typeface="Helvetica Neue"/>
+                        </a:rPr>
+                        <a:t>Apple emoji trends</a:t>
+                      </a:r>
+                    </a:p>
+                  </a:txBody>
+                  <a:tcPr anchor="ctr">
+                    <a:solidFill>
+                      <a:srgbClr val="F4F7FB"/>
+                    </a:solidFill>
+                  </a:tcPr>
+                </a:tc>
+              </a:tr>
+            </a:tbl>
+          </a:graphicData>
+        </a:graphic>
+      </p:graphicFrame>
       <p:sp>
         <p:nvSpPr>
           <p:cNvPr id="6" name="TextBox 5"/>
@@ -6700,8 +6960,8 @@
         </p:nvSpPr>
         <p:spPr>
           <a:xfrm>
-            <a:off x="822960" y="5989320"/>
-            <a:ext cx="8961120" cy="502920"/>
+            <a:off x="1508760" y="5129784"/>
+            <a:ext cx="9144000" cy="1737360"/>
           </a:xfrm>
           <a:prstGeom prst="rect">
             <a:avLst/>
@@ -6714,6 +6974,61 @@
           </a:bodyPr>
           <a:lstStyle/>
           <a:p>
+            <a:pPr>
+              <a:spcAft>
+                <a:spcPts val="800"/>
+              </a:spcAft>
+            </a:pPr>
+            <a:r>
+              <a:rPr sz="1800" b="0" i="0">
+                <a:solidFill>
+                  <a:srgbClr val="141B2D"/>
+                </a:solidFill>
+                <a:latin typeface="Helvetica Neue"/>
+              </a:rPr>
+              <a:t>The Census Bureau sees every raw response, then noises what it publishes.</a:t>
+            </a:r>
+          </a:p>
+          <a:p>
+            <a:pPr>
+              <a:spcAft>
+                <a:spcPts val="800"/>
+              </a:spcAft>
+            </a:pPr>
+            <a:r>
+              <a:rPr sz="1800" b="0" i="0">
+                <a:solidFill>
+                  <a:srgbClr val="141B2D"/>
+                </a:solidFill>
+                <a:latin typeface="Helvetica Neue"/>
+              </a:rPr>
+              <a:t>Apple never sees your emoji, only a noised count from every phone.</a:t>
+            </a:r>
+          </a:p>
+        </p:txBody>
+      </p:sp>
+      <p:sp>
+        <p:nvSpPr>
+          <p:cNvPr id="7" name="TextBox 6"/>
+          <p:cNvSpPr txBox="1"/>
+          <p:nvPr/>
+        </p:nvSpPr>
+        <p:spPr>
+          <a:xfrm>
+            <a:off x="822960" y="5943600"/>
+            <a:ext cx="8961120" cy="502920"/>
+          </a:xfrm>
+          <a:prstGeom prst="rect">
+            <a:avLst/>
+          </a:prstGeom>
+          <a:noFill/>
+        </p:spPr>
+        <p:txBody>
+          <a:bodyPr wrap="square">
+            <a:spAutoFit/>
+          </a:bodyPr>
+          <a:lstStyle/>
+          <a:p>
             <a:r>
               <a:rPr sz="1400" b="0" i="0">
                 <a:solidFill>
@@ -6721,7 +7036,7 @@
                 </a:solidFill>
                 <a:latin typeface="Helvetica Neue"/>
               </a:rPr>
-              <a:t>More on local differential privacy: </a:t>
+              <a:t>Apple, Learning with Privacy at Scale, 2017: </a:t>
             </a:r>
             <a:r>
               <a:rPr sz="1400" b="0" u="sng">
@@ -6729,16 +7044,16 @@
                   <a:srgbClr val="005EB8"/>
                 </a:solidFill>
                 <a:latin typeface="Helvetica Neue"/>
-                <a:hlinkClick r:id="rId3"/>
-              </a:rPr>
-              <a:t>en.wikipedia.org/wiki/Local_differential_privacy</a:t>
-            </a:r>
-          </a:p>
-        </p:txBody>
-      </p:sp>
-      <p:sp>
-        <p:nvSpPr>
-          <p:cNvPr id="7" name="TextBox 6"/>
+                <a:hlinkClick r:id="rId2"/>
+              </a:rPr>
+              <a:t>machinelearning.apple.com</a:t>
+            </a:r>
+          </a:p>
+        </p:txBody>
+      </p:sp>
+      <p:sp>
+        <p:nvSpPr>
+          <p:cNvPr id="8" name="TextBox 7"/>
           <p:cNvSpPr txBox="1"/>
           <p:nvPr/>
         </p:nvSpPr>
@@ -6805,8 +7120,8 @@
         </p:nvSpPr>
         <p:spPr>
           <a:xfrm>
-            <a:off x="822960" y="411480"/>
-            <a:ext cx="10515600" cy="822960"/>
+            <a:off x="822960" y="640080"/>
+            <a:ext cx="10515600" cy="960120"/>
           </a:xfrm>
           <a:prstGeom prst="rect">
             <a:avLst/>
@@ -6820,20 +7135,187 @@
           <a:lstStyle/>
           <a:p>
             <a:r>
-              <a:rPr sz="3000" b="1">
+              <a:rPr sz="3400" b="1">
                 <a:solidFill>
                   <a:srgbClr val="141B2D"/>
                 </a:solidFill>
                 <a:latin typeface="Helvetica Neue"/>
               </a:rPr>
-              <a:t>Verification 1: the noise</a:t>
+              <a:t>Local Differential Privacy</a:t>
+            </a:r>
+          </a:p>
+        </p:txBody>
+      </p:sp>
+      <p:sp>
+        <p:nvSpPr>
+          <p:cNvPr id="3" name="Rectangle 2"/>
+          <p:cNvSpPr/>
+          <p:nvPr/>
+        </p:nvSpPr>
+        <p:spPr>
+          <a:xfrm>
+            <a:off x="822960" y="1276603"/>
+            <a:ext cx="1463040" cy="50800"/>
+          </a:xfrm>
+          <a:prstGeom prst="rect">
+            <a:avLst/>
+          </a:prstGeom>
+          <a:solidFill>
+            <a:srgbClr val="005EB8"/>
+          </a:solidFill>
+          <a:ln>
+            <a:noFill/>
+          </a:ln>
+          <a:effectLst/>
+        </p:spPr>
+        <p:style>
+          <a:lnRef idx="1">
+            <a:schemeClr val="accent1"/>
+          </a:lnRef>
+          <a:fillRef idx="3">
+            <a:schemeClr val="accent1"/>
+          </a:fillRef>
+          <a:effectRef idx="2">
+            <a:schemeClr val="accent1"/>
+          </a:effectRef>
+          <a:fontRef idx="minor">
+            <a:schemeClr val="lt1"/>
+          </a:fontRef>
+        </p:style>
+        <p:txBody>
+          <a:bodyPr rtlCol="0" anchor="ctr"/>
+          <a:lstStyle/>
+          <a:p>
+            <a:pPr algn="ctr"/>
+          </a:p>
+        </p:txBody>
+      </p:sp>
+      <p:sp>
+        <p:nvSpPr>
+          <p:cNvPr id="4" name="TextBox 3"/>
+          <p:cNvSpPr txBox="1"/>
+          <p:nvPr/>
+        </p:nvSpPr>
+        <p:spPr>
+          <a:xfrm>
+            <a:off x="822960" y="2057400"/>
+            <a:ext cx="5120640" cy="4023360"/>
+          </a:xfrm>
+          <a:prstGeom prst="rect">
+            <a:avLst/>
+          </a:prstGeom>
+          <a:noFill/>
+        </p:spPr>
+        <p:txBody>
+          <a:bodyPr wrap="square">
+            <a:spAutoFit/>
+          </a:bodyPr>
+          <a:lstStyle/>
+          <a:p>
+            <a:pPr marL="342900" indent="-342900">
+              <a:spcAft>
+                <a:spcPts val="1400"/>
+              </a:spcAft>
+            </a:pPr>
+            <a:r>
+              <a:rPr sz="2100" b="1">
+                <a:solidFill>
+                  <a:srgbClr val="005EB8"/>
+                </a:solidFill>
+                <a:latin typeface="Helvetica Neue"/>
+              </a:rPr>
+              <a:t>-   </a:t>
+            </a:r>
+            <a:r>
+              <a:rPr sz="2100" b="0" i="0">
+                <a:solidFill>
+                  <a:srgbClr val="141B2D"/>
+                </a:solidFill>
+                <a:latin typeface="Helvetica Neue"/>
+              </a:rPr>
+              <a:t>The vector was never the problem, storing it readable was</a:t>
+            </a:r>
+          </a:p>
+          <a:p>
+            <a:pPr marL="342900" indent="-342900">
+              <a:spcAft>
+                <a:spcPts val="1400"/>
+              </a:spcAft>
+            </a:pPr>
+            <a:r>
+              <a:rPr sz="2100" b="1">
+                <a:solidFill>
+                  <a:srgbClr val="005EB8"/>
+                </a:solidFill>
+                <a:latin typeface="Helvetica Neue"/>
+              </a:rPr>
+              <a:t>-   </a:t>
+            </a:r>
+            <a:r>
+              <a:rPr sz="2100" b="0" i="0">
+                <a:solidFill>
+                  <a:srgbClr val="141B2D"/>
+                </a:solidFill>
+                <a:latin typeface="Helvetica Neue"/>
+              </a:rPr>
+              <a:t>Add calibrated noise to the query vector on the device</a:t>
+            </a:r>
+          </a:p>
+          <a:p>
+            <a:pPr marL="342900" indent="-342900">
+              <a:spcAft>
+                <a:spcPts val="1400"/>
+              </a:spcAft>
+            </a:pPr>
+            <a:r>
+              <a:rPr sz="2100" b="1">
+                <a:solidFill>
+                  <a:srgbClr val="005EB8"/>
+                </a:solidFill>
+                <a:latin typeface="Helvetica Neue"/>
+              </a:rPr>
+              <a:t>-   </a:t>
+            </a:r>
+            <a:r>
+              <a:rPr sz="2100" b="0" i="0">
+                <a:solidFill>
+                  <a:srgbClr val="141B2D"/>
+                </a:solidFill>
+                <a:latin typeface="Helvetica Neue"/>
+              </a:rPr>
+              <a:t>Epsilon is the dial, and lower epsilon means more noise and more privacy</a:t>
+            </a:r>
+          </a:p>
+          <a:p>
+            <a:pPr marL="342900" indent="-342900">
+              <a:spcAft>
+                <a:spcPts val="1400"/>
+              </a:spcAft>
+            </a:pPr>
+            <a:r>
+              <a:rPr sz="2100" b="1">
+                <a:solidFill>
+                  <a:srgbClr val="005EB8"/>
+                </a:solidFill>
+                <a:latin typeface="Helvetica Neue"/>
+              </a:rPr>
+              <a:t>-   </a:t>
+            </a:r>
+            <a:r>
+              <a:rPr sz="2100" b="0" i="0">
+                <a:solidFill>
+                  <a:srgbClr val="141B2D"/>
+                </a:solidFill>
+                <a:latin typeface="Helvetica Neue"/>
+              </a:rPr>
+              <a:t>The user's query is not stored so there is nothing to redact</a:t>
             </a:r>
           </a:p>
         </p:txBody>
       </p:sp>
       <p:pic>
         <p:nvPicPr>
-          <p:cNvPr id="3" name="Picture 2" descr="08_laplace_tent_audit.png"/>
+          <p:cNvPr id="5" name="Picture 4" descr="13_epsilon_dial.png"/>
           <p:cNvPicPr>
             <a:picLocks noChangeAspect="1"/>
           </p:cNvPicPr>
@@ -6847,8 +7329,8 @@
         </p:blipFill>
         <p:spPr>
           <a:xfrm>
-            <a:off x="2161809" y="1417320"/>
-            <a:ext cx="7868076" cy="4343400"/>
+            <a:off x="6263640" y="2535314"/>
+            <a:ext cx="5029200" cy="2701770"/>
           </a:xfrm>
           <a:prstGeom prst="rect">
             <a:avLst/>
@@ -6857,14 +7339,14 @@
       </p:pic>
       <p:sp>
         <p:nvSpPr>
-          <p:cNvPr id="4" name="TextBox 3"/>
+          <p:cNvPr id="6" name="TextBox 5"/>
           <p:cNvSpPr txBox="1"/>
           <p:nvPr/>
         </p:nvSpPr>
         <p:spPr>
           <a:xfrm>
-            <a:off x="1325880" y="5989320"/>
-            <a:ext cx="9509760" cy="640080"/>
+            <a:off x="822960" y="5989320"/>
+            <a:ext cx="8961120" cy="502920"/>
           </a:xfrm>
           <a:prstGeom prst="rect">
             <a:avLst/>
@@ -6877,22 +7359,31 @@
           </a:bodyPr>
           <a:lstStyle/>
           <a:p>
-            <a:pPr algn="ctr"/>
-            <a:r>
-              <a:rPr sz="1600" b="0" i="0">
+            <a:r>
+              <a:rPr sz="1400" b="0" i="0">
                 <a:solidFill>
                   <a:srgbClr val="5A647A"/>
                 </a:solidFill>
                 <a:latin typeface="Helvetica Neue"/>
               </a:rPr>
-              <a:t>A biased mechanism would put the peak off the red line, and the spread is the privacy.</a:t>
-            </a:r>
-          </a:p>
-        </p:txBody>
-      </p:sp>
-      <p:sp>
-        <p:nvSpPr>
-          <p:cNvPr id="5" name="TextBox 4"/>
+              <a:t>More on local differential privacy: </a:t>
+            </a:r>
+            <a:r>
+              <a:rPr sz="1400" b="0" u="sng">
+                <a:solidFill>
+                  <a:srgbClr val="005EB8"/>
+                </a:solidFill>
+                <a:latin typeface="Helvetica Neue"/>
+                <a:hlinkClick r:id="rId3"/>
+              </a:rPr>
+              <a:t>en.wikipedia.org/wiki/Local_differential_privacy</a:t>
+            </a:r>
+          </a:p>
+        </p:txBody>
+      </p:sp>
+      <p:sp>
+        <p:nvSpPr>
+          <p:cNvPr id="7" name="TextBox 6"/>
           <p:cNvSpPr txBox="1"/>
           <p:nvPr/>
         </p:nvSpPr>
@@ -6980,14 +7471,14 @@
                 </a:solidFill>
                 <a:latin typeface="Helvetica Neue"/>
               </a:rPr>
-              <a:t>A higher epsilon is a narrower spread</a:t>
+              <a:t>Verification 1: the noise</a:t>
             </a:r>
           </a:p>
         </p:txBody>
       </p:sp>
       <p:pic>
         <p:nvPicPr>
-          <p:cNvPr id="3" name="Picture 2" descr="08b_epsilon_spread_comparison.png"/>
+          <p:cNvPr id="3" name="Picture 2" descr="08_laplace_tent_audit.png"/>
           <p:cNvPicPr>
             <a:picLocks noChangeAspect="1"/>
           </p:cNvPicPr>
@@ -7001,8 +7492,8 @@
         </p:blipFill>
         <p:spPr>
           <a:xfrm>
-            <a:off x="883767" y="1417320"/>
-            <a:ext cx="10424160" cy="3906870"/>
+            <a:off x="2161809" y="1417320"/>
+            <a:ext cx="7868076" cy="4343400"/>
           </a:xfrm>
           <a:prstGeom prst="rect">
             <a:avLst/>
@@ -7039,7 +7530,7 @@
                 </a:solidFill>
                 <a:latin typeface="Helvetica Neue"/>
               </a:rPr>
-              <a:t>Both panels share one x axis. At epsilon 10 almost every draw lands on the red line.</a:t>
+              <a:t>A biased mechanism would put the peak off the red line, and the spread is the privacy.</a:t>
             </a:r>
           </a:p>
         </p:txBody>
@@ -7134,14 +7625,14 @@
                 </a:solidFill>
                 <a:latin typeface="Helvetica Neue"/>
               </a:rPr>
-              <a:t>Verification 2: measure an actual attacker</a:t>
+              <a:t>A higher epsilon is a narrower spread</a:t>
             </a:r>
           </a:p>
         </p:txBody>
       </p:sp>
       <p:pic>
         <p:nvPicPr>
-          <p:cNvPr id="3" name="Picture 2" descr="10_item_vs_class_recovery.png"/>
+          <p:cNvPr id="3" name="Picture 2" descr="08b_epsilon_spread_comparison.png"/>
           <p:cNvPicPr>
             <a:picLocks noChangeAspect="1"/>
           </p:cNvPicPr>
@@ -7155,8 +7646,8 @@
         </p:blipFill>
         <p:spPr>
           <a:xfrm>
-            <a:off x="2479197" y="1417320"/>
-            <a:ext cx="7233300" cy="4343400"/>
+            <a:off x="883767" y="1417320"/>
+            <a:ext cx="10424160" cy="3906870"/>
           </a:xfrm>
           <a:prstGeom prst="rect">
             <a:avLst/>
@@ -7193,7 +7684,7 @@
                 </a:solidFill>
                 <a:latin typeface="Helvetica Neue"/>
               </a:rPr>
-              <a:t>The category leaks well before the item does.</a:t>
+              <a:t>Both panels share one x axis. At epsilon 10 almost every draw lands on the red line.</a:t>
             </a:r>
           </a:p>
         </p:txBody>
@@ -7201,51 +7692,6 @@
       <p:sp>
         <p:nvSpPr>
           <p:cNvPr id="5" name="TextBox 4"/>
-          <p:cNvSpPr txBox="1"/>
-          <p:nvPr/>
-        </p:nvSpPr>
-        <p:spPr>
-          <a:xfrm>
-            <a:off x="1325880" y="6355080"/>
-            <a:ext cx="9509760" cy="502920"/>
-          </a:xfrm>
-          <a:prstGeom prst="rect">
-            <a:avLst/>
-          </a:prstGeom>
-          <a:noFill/>
-        </p:spPr>
-        <p:txBody>
-          <a:bodyPr wrap="square">
-            <a:spAutoFit/>
-          </a:bodyPr>
-          <a:lstStyle/>
-          <a:p>
-            <a:pPr algn="ctr"/>
-            <a:r>
-              <a:rPr sz="1400" b="0" i="0">
-                <a:solidFill>
-                  <a:srgbClr val="5A647A"/>
-                </a:solidFill>
-                <a:latin typeface="Helvetica Neue"/>
-              </a:rPr>
-              <a:t>Data: WANDS, Wayfair product search relevance (ECIR 2022), MIT licensed: </a:t>
-            </a:r>
-            <a:r>
-              <a:rPr sz="1400" b="0" u="sng">
-                <a:solidFill>
-                  <a:srgbClr val="005EB8"/>
-                </a:solidFill>
-                <a:latin typeface="Helvetica Neue"/>
-                <a:hlinkClick r:id="rId3"/>
-              </a:rPr>
-              <a:t>github.com/wayfair/WANDS</a:t>
-            </a:r>
-          </a:p>
-        </p:txBody>
-      </p:sp>
-      <p:sp>
-        <p:nvSpPr>
-          <p:cNvPr id="6" name="TextBox 5"/>
           <p:cNvSpPr txBox="1"/>
           <p:nvPr/>
         </p:nvSpPr>
@@ -7333,14 +7779,14 @@
                 </a:solidFill>
                 <a:latin typeface="Helvetica Neue"/>
               </a:rPr>
-              <a:t>Epsilon 1.2 is barely better than guessing</a:t>
+              <a:t>Verification 2: measure an actual attacker</a:t>
             </a:r>
           </a:p>
         </p:txBody>
       </p:sp>
       <p:pic>
         <p:nvPicPr>
-          <p:cNvPr id="3" name="Picture 2" descr="07_epsilon_tradeoff_toy_index.png"/>
+          <p:cNvPr id="3" name="Picture 2" descr="10_item_vs_class_recovery.png"/>
           <p:cNvPicPr>
             <a:picLocks noChangeAspect="1"/>
           </p:cNvPicPr>
@@ -7354,8 +7800,8 @@
         </p:blipFill>
         <p:spPr>
           <a:xfrm>
-            <a:off x="2182624" y="1417320"/>
-            <a:ext cx="7826446" cy="4343400"/>
+            <a:off x="2479197" y="1417320"/>
+            <a:ext cx="7233300" cy="4343400"/>
           </a:xfrm>
           <a:prstGeom prst="rect">
             <a:avLst/>
@@ -7392,7 +7838,7 @@
                 </a:solidFill>
                 <a:latin typeface="Helvetica Neue"/>
               </a:rPr>
-              <a:t>The red line is where the Part 2 demo ran. Utility only comes back where the attacker wins too.</a:t>
+              <a:t>The category leaks well before the item does.</a:t>
             </a:r>
           </a:p>
         </p:txBody>
@@ -7400,6 +7846,51 @@
       <p:sp>
         <p:nvSpPr>
           <p:cNvPr id="5" name="TextBox 4"/>
+          <p:cNvSpPr txBox="1"/>
+          <p:nvPr/>
+        </p:nvSpPr>
+        <p:spPr>
+          <a:xfrm>
+            <a:off x="1325880" y="6355080"/>
+            <a:ext cx="9509760" cy="502920"/>
+          </a:xfrm>
+          <a:prstGeom prst="rect">
+            <a:avLst/>
+          </a:prstGeom>
+          <a:noFill/>
+        </p:spPr>
+        <p:txBody>
+          <a:bodyPr wrap="square">
+            <a:spAutoFit/>
+          </a:bodyPr>
+          <a:lstStyle/>
+          <a:p>
+            <a:pPr algn="ctr"/>
+            <a:r>
+              <a:rPr sz="1400" b="0" i="0">
+                <a:solidFill>
+                  <a:srgbClr val="5A647A"/>
+                </a:solidFill>
+                <a:latin typeface="Helvetica Neue"/>
+              </a:rPr>
+              <a:t>Data: WANDS, Wayfair product search relevance (ECIR 2022), MIT licensed: </a:t>
+            </a:r>
+            <a:r>
+              <a:rPr sz="1400" b="0" u="sng">
+                <a:solidFill>
+                  <a:srgbClr val="005EB8"/>
+                </a:solidFill>
+                <a:latin typeface="Helvetica Neue"/>
+                <a:hlinkClick r:id="rId3"/>
+              </a:rPr>
+              <a:t>github.com/wayfair/WANDS</a:t>
+            </a:r>
+          </a:p>
+        </p:txBody>
+      </p:sp>
+      <p:sp>
+        <p:nvSpPr>
+          <p:cNvPr id="6" name="TextBox 5"/>
           <p:cNvSpPr txBox="1"/>
           <p:nvPr/>
         </p:nvSpPr>
@@ -7466,8 +7957,8 @@
         </p:nvSpPr>
         <p:spPr>
           <a:xfrm>
-            <a:off x="822960" y="640080"/>
-            <a:ext cx="10515600" cy="960120"/>
+            <a:off x="822960" y="411480"/>
+            <a:ext cx="10515600" cy="822960"/>
           </a:xfrm>
           <a:prstGeom prst="rect">
             <a:avLst/>
@@ -7481,187 +7972,20 @@
           <a:lstStyle/>
           <a:p>
             <a:r>
-              <a:rPr sz="3400" b="1">
+              <a:rPr sz="3000" b="1">
                 <a:solidFill>
                   <a:srgbClr val="141B2D"/>
                 </a:solidFill>
                 <a:latin typeface="Helvetica Neue"/>
               </a:rPr>
-              <a:t>You lose the person and keep the pattern</a:t>
-            </a:r>
-          </a:p>
-        </p:txBody>
-      </p:sp>
-      <p:sp>
-        <p:nvSpPr>
-          <p:cNvPr id="3" name="Rectangle 2"/>
-          <p:cNvSpPr/>
-          <p:nvPr/>
-        </p:nvSpPr>
-        <p:spPr>
-          <a:xfrm>
-            <a:off x="822960" y="1276603"/>
-            <a:ext cx="1463040" cy="50800"/>
-          </a:xfrm>
-          <a:prstGeom prst="rect">
-            <a:avLst/>
-          </a:prstGeom>
-          <a:solidFill>
-            <a:srgbClr val="005EB8"/>
-          </a:solidFill>
-          <a:ln>
-            <a:noFill/>
-          </a:ln>
-          <a:effectLst/>
-        </p:spPr>
-        <p:style>
-          <a:lnRef idx="1">
-            <a:schemeClr val="accent1"/>
-          </a:lnRef>
-          <a:fillRef idx="3">
-            <a:schemeClr val="accent1"/>
-          </a:fillRef>
-          <a:effectRef idx="2">
-            <a:schemeClr val="accent1"/>
-          </a:effectRef>
-          <a:fontRef idx="minor">
-            <a:schemeClr val="lt1"/>
-          </a:fontRef>
-        </p:style>
-        <p:txBody>
-          <a:bodyPr rtlCol="0" anchor="ctr"/>
-          <a:lstStyle/>
-          <a:p>
-            <a:pPr algn="ctr"/>
-          </a:p>
-        </p:txBody>
-      </p:sp>
-      <p:sp>
-        <p:nvSpPr>
-          <p:cNvPr id="4" name="TextBox 3"/>
-          <p:cNvSpPr txBox="1"/>
-          <p:nvPr/>
-        </p:nvSpPr>
-        <p:spPr>
-          <a:xfrm>
-            <a:off x="822960" y="2057400"/>
-            <a:ext cx="5120640" cy="4023360"/>
-          </a:xfrm>
-          <a:prstGeom prst="rect">
-            <a:avLst/>
-          </a:prstGeom>
-          <a:noFill/>
-        </p:spPr>
-        <p:txBody>
-          <a:bodyPr wrap="square">
-            <a:spAutoFit/>
-          </a:bodyPr>
-          <a:lstStyle/>
-          <a:p>
-            <a:pPr marL="342900" indent="-342900">
-              <a:spcAft>
-                <a:spcPts val="1400"/>
-              </a:spcAft>
-            </a:pPr>
-            <a:r>
-              <a:rPr sz="2100" b="1">
-                <a:solidFill>
-                  <a:srgbClr val="005EB8"/>
-                </a:solidFill>
-                <a:latin typeface="Helvetica Neue"/>
-              </a:rPr>
-              <a:t>-   </a:t>
-            </a:r>
-            <a:r>
-              <a:rPr sz="2100" b="0" i="0">
-                <a:solidFill>
-                  <a:srgbClr val="141B2D"/>
-                </a:solidFill>
-                <a:latin typeface="Helvetica Neue"/>
-              </a:rPr>
-              <a:t>The noise cancels when you average over many users</a:t>
-            </a:r>
-          </a:p>
-          <a:p>
-            <a:pPr marL="342900" indent="-342900">
-              <a:spcAft>
-                <a:spcPts val="1400"/>
-              </a:spcAft>
-            </a:pPr>
-            <a:r>
-              <a:rPr sz="2100" b="1">
-                <a:solidFill>
-                  <a:srgbClr val="005EB8"/>
-                </a:solidFill>
-                <a:latin typeface="Helvetica Neue"/>
-              </a:rPr>
-              <a:t>-   </a:t>
-            </a:r>
-            <a:r>
-              <a:rPr sz="2100" b="0" i="0">
-                <a:solidFill>
-                  <a:srgbClr val="141B2D"/>
-                </a:solidFill>
-                <a:latin typeface="Helvetica Neue"/>
-              </a:rPr>
-              <a:t>One person's query is unrecoverable</a:t>
-            </a:r>
-          </a:p>
-          <a:p>
-            <a:pPr marL="342900" indent="-342900">
-              <a:spcAft>
-                <a:spcPts val="1400"/>
-              </a:spcAft>
-            </a:pPr>
-            <a:r>
-              <a:rPr sz="2100" b="1">
-                <a:solidFill>
-                  <a:srgbClr val="005EB8"/>
-                </a:solidFill>
-                <a:latin typeface="Helvetica Neue"/>
-              </a:rPr>
-              <a:t>-   </a:t>
-            </a:r>
-            <a:r>
-              <a:rPr sz="2100" b="0" i="0">
-                <a:solidFill>
-                  <a:srgbClr val="141B2D"/>
-                </a:solidFill>
-                <a:latin typeface="Helvetica Neue"/>
-              </a:rPr>
-              <a:t>The trend across ten thousand people is not</a:t>
-            </a:r>
-          </a:p>
-          <a:p>
-            <a:pPr marL="342900" indent="-342900">
-              <a:spcAft>
-                <a:spcPts val="1400"/>
-              </a:spcAft>
-            </a:pPr>
-            <a:r>
-              <a:rPr sz="2100" b="1">
-                <a:solidFill>
-                  <a:srgbClr val="005EB8"/>
-                </a:solidFill>
-                <a:latin typeface="Helvetica Neue"/>
-              </a:rPr>
-              <a:t>-   </a:t>
-            </a:r>
-            <a:r>
-              <a:rPr sz="2100" b="0" i="0">
-                <a:solidFill>
-                  <a:srgbClr val="141B2D"/>
-                </a:solidFill>
-                <a:latin typeface="Helvetica Neue"/>
-              </a:rPr>
-              <a:t>That trend is all UBI needs to tune relevance</a:t>
+              <a:t>Epsilon 1.2 is barely better than guessing</a:t>
             </a:r>
           </a:p>
         </p:txBody>
       </p:sp>
       <p:pic>
         <p:nvPicPr>
-          <p:cNvPr id="5" name="Picture 4" descr="21_cancellation.png"/>
+          <p:cNvPr id="3" name="Picture 2" descr="07_epsilon_tradeoff_toy_index.png"/>
           <p:cNvPicPr>
             <a:picLocks noChangeAspect="1"/>
           </p:cNvPicPr>
@@ -7675,8 +7999,8 @@
         </p:blipFill>
         <p:spPr>
           <a:xfrm>
-            <a:off x="6600990" y="1874519"/>
-            <a:ext cx="4354500" cy="4023360"/>
+            <a:off x="2182624" y="1417320"/>
+            <a:ext cx="7826446" cy="4343400"/>
           </a:xfrm>
           <a:prstGeom prst="rect">
             <a:avLst/>
@@ -7685,7 +8009,42 @@
       </p:pic>
       <p:sp>
         <p:nvSpPr>
-          <p:cNvPr id="6" name="TextBox 5"/>
+          <p:cNvPr id="4" name="TextBox 3"/>
+          <p:cNvSpPr txBox="1"/>
+          <p:nvPr/>
+        </p:nvSpPr>
+        <p:spPr>
+          <a:xfrm>
+            <a:off x="1325880" y="5989320"/>
+            <a:ext cx="9509760" cy="640080"/>
+          </a:xfrm>
+          <a:prstGeom prst="rect">
+            <a:avLst/>
+          </a:prstGeom>
+          <a:noFill/>
+        </p:spPr>
+        <p:txBody>
+          <a:bodyPr wrap="square">
+            <a:spAutoFit/>
+          </a:bodyPr>
+          <a:lstStyle/>
+          <a:p>
+            <a:pPr algn="ctr"/>
+            <a:r>
+              <a:rPr sz="1600" b="0" i="0">
+                <a:solidFill>
+                  <a:srgbClr val="5A647A"/>
+                </a:solidFill>
+                <a:latin typeface="Helvetica Neue"/>
+              </a:rPr>
+              <a:t>The red line is where the Part 2 demo ran. Utility only comes back where the attacker wins too.</a:t>
+            </a:r>
+          </a:p>
+        </p:txBody>
+      </p:sp>
+      <p:sp>
+        <p:nvSpPr>
+          <p:cNvPr id="5" name="TextBox 4"/>
           <p:cNvSpPr txBox="1"/>
           <p:nvPr/>
         </p:nvSpPr>
@@ -7752,8 +8111,8 @@
         </p:nvSpPr>
         <p:spPr>
           <a:xfrm>
-            <a:off x="822960" y="411480"/>
-            <a:ext cx="10515600" cy="822960"/>
+            <a:off x="822960" y="640080"/>
+            <a:ext cx="10515600" cy="960120"/>
           </a:xfrm>
           <a:prstGeom prst="rect">
             <a:avLst/>
@@ -7767,27 +8126,71 @@
           <a:lstStyle/>
           <a:p>
             <a:r>
-              <a:rPr sz="3000" b="1">
+              <a:rPr sz="3400" b="1">
                 <a:solidFill>
                   <a:srgbClr val="141B2D"/>
                 </a:solidFill>
                 <a:latin typeface="Helvetica Neue"/>
               </a:rPr>
-              <a:t>Error falls as 1 / sqrt(users)</a:t>
-            </a:r>
-          </a:p>
-        </p:txBody>
-      </p:sp>
-      <p:sp>
-        <p:nvSpPr>
-          <p:cNvPr id="3" name="TextBox 2"/>
+              <a:t>You lose the person and keep the pattern</a:t>
+            </a:r>
+          </a:p>
+        </p:txBody>
+      </p:sp>
+      <p:sp>
+        <p:nvSpPr>
+          <p:cNvPr id="3" name="Rectangle 2"/>
+          <p:cNvSpPr/>
+          <p:nvPr/>
+        </p:nvSpPr>
+        <p:spPr>
+          <a:xfrm>
+            <a:off x="822960" y="1276603"/>
+            <a:ext cx="1463040" cy="50800"/>
+          </a:xfrm>
+          <a:prstGeom prst="rect">
+            <a:avLst/>
+          </a:prstGeom>
+          <a:solidFill>
+            <a:srgbClr val="005EB8"/>
+          </a:solidFill>
+          <a:ln>
+            <a:noFill/>
+          </a:ln>
+          <a:effectLst/>
+        </p:spPr>
+        <p:style>
+          <a:lnRef idx="1">
+            <a:schemeClr val="accent1"/>
+          </a:lnRef>
+          <a:fillRef idx="3">
+            <a:schemeClr val="accent1"/>
+          </a:fillRef>
+          <a:effectRef idx="2">
+            <a:schemeClr val="accent1"/>
+          </a:effectRef>
+          <a:fontRef idx="minor">
+            <a:schemeClr val="lt1"/>
+          </a:fontRef>
+        </p:style>
+        <p:txBody>
+          <a:bodyPr rtlCol="0" anchor="ctr"/>
+          <a:lstStyle/>
+          <a:p>
+            <a:pPr algn="ctr"/>
+          </a:p>
+        </p:txBody>
+      </p:sp>
+      <p:sp>
+        <p:nvSpPr>
+          <p:cNvPr id="4" name="TextBox 3"/>
           <p:cNvSpPr txBox="1"/>
           <p:nvPr/>
         </p:nvSpPr>
         <p:spPr>
           <a:xfrm>
-            <a:off x="822960" y="1097280"/>
-            <a:ext cx="10515600" cy="457200"/>
+            <a:off x="822960" y="2057400"/>
+            <a:ext cx="5120640" cy="4023360"/>
           </a:xfrm>
           <a:prstGeom prst="rect">
             <a:avLst/>
@@ -7800,40 +8203,110 @@
           </a:bodyPr>
           <a:lstStyle/>
           <a:p>
-            <a:pPr algn="ctr"/>
-            <a:r>
-              <a:rPr sz="1500" b="0" i="0">
-                <a:solidFill>
-                  <a:srgbClr val="5A647A"/>
-                </a:solidFill>
-                <a:latin typeface="Helvetica Neue"/>
-              </a:rPr>
-              <a:t>Average the noised queries of </a:t>
-            </a:r>
-            <a:r>
-              <a:rPr sz="1300" b="0">
-                <a:solidFill>
-                  <a:srgbClr val="5A647A"/>
-                </a:solidFill>
-                <a:latin typeface="Consolas"/>
-              </a:rPr>
-              <a:t>n</a:t>
-            </a:r>
-            <a:r>
-              <a:rPr sz="1500" b="0" i="0">
-                <a:solidFill>
-                  <a:srgbClr val="5A647A"/>
-                </a:solidFill>
-                <a:latin typeface="Helvetica Neue"/>
-              </a:rPr>
-              <a:t> users in one segment, then see how far that average lands from the truth.</a:t>
+            <a:pPr marL="342900" indent="-342900">
+              <a:spcAft>
+                <a:spcPts val="1400"/>
+              </a:spcAft>
+            </a:pPr>
+            <a:r>
+              <a:rPr sz="2100" b="1">
+                <a:solidFill>
+                  <a:srgbClr val="005EB8"/>
+                </a:solidFill>
+                <a:latin typeface="Helvetica Neue"/>
+              </a:rPr>
+              <a:t>-   </a:t>
+            </a:r>
+            <a:r>
+              <a:rPr sz="2100" b="0" i="0">
+                <a:solidFill>
+                  <a:srgbClr val="141B2D"/>
+                </a:solidFill>
+                <a:latin typeface="Helvetica Neue"/>
+              </a:rPr>
+              <a:t>The noise cancels when you average over many users</a:t>
+            </a:r>
+          </a:p>
+          <a:p>
+            <a:pPr marL="342900" indent="-342900">
+              <a:spcAft>
+                <a:spcPts val="1400"/>
+              </a:spcAft>
+            </a:pPr>
+            <a:r>
+              <a:rPr sz="2100" b="1">
+                <a:solidFill>
+                  <a:srgbClr val="005EB8"/>
+                </a:solidFill>
+                <a:latin typeface="Helvetica Neue"/>
+              </a:rPr>
+              <a:t>-   </a:t>
+            </a:r>
+            <a:r>
+              <a:rPr sz="2100" b="0" i="0">
+                <a:solidFill>
+                  <a:srgbClr val="141B2D"/>
+                </a:solidFill>
+                <a:latin typeface="Helvetica Neue"/>
+              </a:rPr>
+              <a:t>One person's query is unrecoverable</a:t>
+            </a:r>
+          </a:p>
+          <a:p>
+            <a:pPr marL="342900" indent="-342900">
+              <a:spcAft>
+                <a:spcPts val="1400"/>
+              </a:spcAft>
+            </a:pPr>
+            <a:r>
+              <a:rPr sz="2100" b="1">
+                <a:solidFill>
+                  <a:srgbClr val="005EB8"/>
+                </a:solidFill>
+                <a:latin typeface="Helvetica Neue"/>
+              </a:rPr>
+              <a:t>-   </a:t>
+            </a:r>
+            <a:r>
+              <a:rPr sz="2100" b="0" i="0">
+                <a:solidFill>
+                  <a:srgbClr val="141B2D"/>
+                </a:solidFill>
+                <a:latin typeface="Helvetica Neue"/>
+              </a:rPr>
+              <a:t>The trend across ten thousand people is not</a:t>
+            </a:r>
+          </a:p>
+          <a:p>
+            <a:pPr marL="342900" indent="-342900">
+              <a:spcAft>
+                <a:spcPts val="1400"/>
+              </a:spcAft>
+            </a:pPr>
+            <a:r>
+              <a:rPr sz="2100" b="1">
+                <a:solidFill>
+                  <a:srgbClr val="005EB8"/>
+                </a:solidFill>
+                <a:latin typeface="Helvetica Neue"/>
+              </a:rPr>
+              <a:t>-   </a:t>
+            </a:r>
+            <a:r>
+              <a:rPr sz="2100" b="0" i="0">
+                <a:solidFill>
+                  <a:srgbClr val="141B2D"/>
+                </a:solidFill>
+                <a:latin typeface="Helvetica Neue"/>
+              </a:rPr>
+              <a:t>That trend is all UBI needs to tune relevance</a:t>
             </a:r>
           </a:p>
         </p:txBody>
       </p:sp>
       <p:pic>
         <p:nvPicPr>
-          <p:cNvPr id="4" name="Picture 3" descr="11_aggregate_convergence.png"/>
+          <p:cNvPr id="5" name="Picture 4" descr="21_cancellation.png"/>
           <p:cNvPicPr>
             <a:picLocks noChangeAspect="1"/>
           </p:cNvPicPr>
@@ -7847,49 +8320,14 @@
         </p:blipFill>
         <p:spPr>
           <a:xfrm>
-            <a:off x="2781192" y="1828800"/>
-            <a:ext cx="6629310" cy="3931920"/>
+            <a:off x="6600990" y="1874519"/>
+            <a:ext cx="4354500" cy="4023360"/>
           </a:xfrm>
           <a:prstGeom prst="rect">
             <a:avLst/>
           </a:prstGeom>
         </p:spPr>
       </p:pic>
-      <p:sp>
-        <p:nvSpPr>
-          <p:cNvPr id="5" name="TextBox 4"/>
-          <p:cNvSpPr txBox="1"/>
-          <p:nvPr/>
-        </p:nvSpPr>
-        <p:spPr>
-          <a:xfrm>
-            <a:off x="1325880" y="5989320"/>
-            <a:ext cx="9509760" cy="640080"/>
-          </a:xfrm>
-          <a:prstGeom prst="rect">
-            <a:avLst/>
-          </a:prstGeom>
-          <a:noFill/>
-        </p:spPr>
-        <p:txBody>
-          <a:bodyPr wrap="square">
-            <a:spAutoFit/>
-          </a:bodyPr>
-          <a:lstStyle/>
-          <a:p>
-            <a:pPr algn="ctr"/>
-            <a:r>
-              <a:rPr sz="1600" b="0" i="0">
-                <a:solidFill>
-                  <a:srgbClr val="5A647A"/>
-                </a:solidFill>
-                <a:latin typeface="Helvetica Neue"/>
-              </a:rPr>
-              <a:t>The red line is the smallest segment you can measure.</a:t>
-            </a:r>
-          </a:p>
-        </p:txBody>
-      </p:sp>
       <p:sp>
         <p:nvSpPr>
           <p:cNvPr id="6" name="TextBox 5"/>
@@ -8263,8 +8701,8 @@
         </p:nvSpPr>
         <p:spPr>
           <a:xfrm>
-            <a:off x="822960" y="640080"/>
-            <a:ext cx="10515600" cy="960120"/>
+            <a:off x="822960" y="411480"/>
+            <a:ext cx="10515600" cy="822960"/>
           </a:xfrm>
           <a:prstGeom prst="rect">
             <a:avLst/>
@@ -8278,71 +8716,27 @@
           <a:lstStyle/>
           <a:p>
             <a:r>
-              <a:rPr sz="3400" b="1">
+              <a:rPr sz="3000" b="1">
                 <a:solidFill>
                   <a:srgbClr val="141B2D"/>
                 </a:solidFill>
                 <a:latin typeface="Helvetica Neue"/>
               </a:rPr>
-              <a:t>How big a segment has to be</a:t>
-            </a:r>
-          </a:p>
-        </p:txBody>
-      </p:sp>
-      <p:sp>
-        <p:nvSpPr>
-          <p:cNvPr id="3" name="Rectangle 2"/>
-          <p:cNvSpPr/>
-          <p:nvPr/>
-        </p:nvSpPr>
-        <p:spPr>
-          <a:xfrm>
-            <a:off x="822960" y="1276603"/>
-            <a:ext cx="1463040" cy="50800"/>
-          </a:xfrm>
-          <a:prstGeom prst="rect">
-            <a:avLst/>
-          </a:prstGeom>
-          <a:solidFill>
-            <a:srgbClr val="005EB8"/>
-          </a:solidFill>
-          <a:ln>
-            <a:noFill/>
-          </a:ln>
-          <a:effectLst/>
-        </p:spPr>
-        <p:style>
-          <a:lnRef idx="1">
-            <a:schemeClr val="accent1"/>
-          </a:lnRef>
-          <a:fillRef idx="3">
-            <a:schemeClr val="accent1"/>
-          </a:fillRef>
-          <a:effectRef idx="2">
-            <a:schemeClr val="accent1"/>
-          </a:effectRef>
-          <a:fontRef idx="minor">
-            <a:schemeClr val="lt1"/>
-          </a:fontRef>
-        </p:style>
-        <p:txBody>
-          <a:bodyPr rtlCol="0" anchor="ctr"/>
-          <a:lstStyle/>
-          <a:p>
-            <a:pPr algn="ctr"/>
-          </a:p>
-        </p:txBody>
-      </p:sp>
-      <p:sp>
-        <p:nvSpPr>
-          <p:cNvPr id="4" name="TextBox 3"/>
+              <a:t>Error falls as 1 / sqrt(users)</a:t>
+            </a:r>
+          </a:p>
+        </p:txBody>
+      </p:sp>
+      <p:sp>
+        <p:nvSpPr>
+          <p:cNvPr id="3" name="TextBox 2"/>
           <p:cNvSpPr txBox="1"/>
           <p:nvPr/>
         </p:nvSpPr>
         <p:spPr>
           <a:xfrm>
-            <a:off x="822960" y="2057400"/>
-            <a:ext cx="10515600" cy="4023360"/>
+            <a:off x="822960" y="1097280"/>
+            <a:ext cx="10515600" cy="457200"/>
           </a:xfrm>
           <a:prstGeom prst="rect">
             <a:avLst/>
@@ -8355,135 +8749,99 @@
           </a:bodyPr>
           <a:lstStyle/>
           <a:p>
-            <a:pPr marL="342900" indent="-342900">
-              <a:spcAft>
-                <a:spcPts val="2000"/>
-              </a:spcAft>
-            </a:pPr>
-            <a:r>
-              <a:rPr sz="2400" b="1">
-                <a:solidFill>
-                  <a:srgbClr val="005EB8"/>
-                </a:solidFill>
-                <a:latin typeface="Helvetica Neue"/>
-              </a:rPr>
-              <a:t>-   </a:t>
-            </a:r>
-            <a:r>
-              <a:rPr sz="2400" b="0" i="0">
-                <a:solidFill>
-                  <a:srgbClr val="141B2D"/>
-                </a:solidFill>
-                <a:latin typeface="Helvetica Neue"/>
-              </a:rPr>
-              <a:t>Error drops below the spread of the index at roughly 2,300 users</a:t>
-            </a:r>
-          </a:p>
-          <a:p>
-            <a:pPr marL="342900" indent="-342900">
-              <a:spcAft>
-                <a:spcPts val="2000"/>
-              </a:spcAft>
-            </a:pPr>
-            <a:r>
-              <a:rPr sz="2400" b="1">
-                <a:solidFill>
-                  <a:srgbClr val="005EB8"/>
-                </a:solidFill>
-                <a:latin typeface="Helvetica Neue"/>
-              </a:rPr>
-              <a:t>-   </a:t>
-            </a:r>
-            <a:r>
-              <a:rPr sz="2400" b="0" i="0">
-                <a:solidFill>
-                  <a:srgbClr val="141B2D"/>
-                </a:solidFill>
-                <a:latin typeface="Helvetica Neue"/>
-              </a:rPr>
-              <a:t>That is at epsilon 1, and halving epsilon needs four times the users</a:t>
-            </a:r>
-          </a:p>
-          <a:p>
-            <a:pPr marL="342900" indent="-342900">
-              <a:spcAft>
-                <a:spcPts val="2000"/>
-              </a:spcAft>
-            </a:pPr>
-            <a:r>
-              <a:rPr sz="2400" b="1">
-                <a:solidFill>
-                  <a:srgbClr val="005EB8"/>
-                </a:solidFill>
-                <a:latin typeface="Helvetica Neue"/>
-              </a:rPr>
-              <a:t>-   </a:t>
-            </a:r>
-            <a:r>
-              <a:rPr sz="2400" b="0" i="0">
-                <a:solidFill>
-                  <a:srgbClr val="141B2D"/>
-                </a:solidFill>
-                <a:latin typeface="Helvetica Neue"/>
-              </a:rPr>
-              <a:t>Segments with thousands of users are measurable under LDP</a:t>
-            </a:r>
-          </a:p>
-          <a:p>
-            <a:pPr marL="342900" indent="-342900">
-              <a:spcAft>
-                <a:spcPts val="2000"/>
-              </a:spcAft>
-            </a:pPr>
-            <a:r>
-              <a:rPr sz="2400" b="1">
-                <a:solidFill>
-                  <a:srgbClr val="005EB8"/>
-                </a:solidFill>
-                <a:latin typeface="Helvetica Neue"/>
-              </a:rPr>
-              <a:t>-   </a:t>
-            </a:r>
-            <a:r>
-              <a:rPr sz="2400" b="0" i="0">
-                <a:solidFill>
-                  <a:srgbClr val="141B2D"/>
-                </a:solidFill>
-                <a:latin typeface="Helvetica Neue"/>
-              </a:rPr>
-              <a:t>Segments with dozens are not measurable</a:t>
-            </a:r>
-          </a:p>
-          <a:p>
-            <a:pPr marL="342900" indent="-342900">
-              <a:spcAft>
-                <a:spcPts val="2000"/>
-              </a:spcAft>
-            </a:pPr>
-            <a:r>
-              <a:rPr sz="2400" b="1">
-                <a:solidFill>
-                  <a:srgbClr val="005EB8"/>
-                </a:solidFill>
-                <a:latin typeface="Helvetica Neue"/>
-              </a:rPr>
-              <a:t>-   </a:t>
-            </a:r>
-            <a:r>
-              <a:rPr sz="2400" b="0" i="0">
-                <a:solidFill>
-                  <a:srgbClr val="141B2D"/>
-                </a:solidFill>
-                <a:latin typeface="Helvetica Neue"/>
-              </a:rPr>
-              <a:t>Your head terms work, but your long tail does not</a:t>
-            </a:r>
-          </a:p>
-        </p:txBody>
-      </p:sp>
+            <a:pPr algn="ctr"/>
+            <a:r>
+              <a:rPr sz="1500" b="0" i="0">
+                <a:solidFill>
+                  <a:srgbClr val="5A647A"/>
+                </a:solidFill>
+                <a:latin typeface="Helvetica Neue"/>
+              </a:rPr>
+              <a:t>Average the noised queries of </a:t>
+            </a:r>
+            <a:r>
+              <a:rPr sz="1300" b="0">
+                <a:solidFill>
+                  <a:srgbClr val="5A647A"/>
+                </a:solidFill>
+                <a:latin typeface="Consolas"/>
+              </a:rPr>
+              <a:t>n</a:t>
+            </a:r>
+            <a:r>
+              <a:rPr sz="1500" b="0" i="0">
+                <a:solidFill>
+                  <a:srgbClr val="5A647A"/>
+                </a:solidFill>
+                <a:latin typeface="Helvetica Neue"/>
+              </a:rPr>
+              <a:t> users in one segment, then see how far that average lands from the truth.</a:t>
+            </a:r>
+          </a:p>
+        </p:txBody>
+      </p:sp>
+      <p:pic>
+        <p:nvPicPr>
+          <p:cNvPr id="4" name="Picture 3" descr="11_aggregate_convergence.png"/>
+          <p:cNvPicPr>
+            <a:picLocks noChangeAspect="1"/>
+          </p:cNvPicPr>
+          <p:nvPr/>
+        </p:nvPicPr>
+        <p:blipFill>
+          <a:blip r:embed="rId2"/>
+          <a:stretch>
+            <a:fillRect/>
+          </a:stretch>
+        </p:blipFill>
+        <p:spPr>
+          <a:xfrm>
+            <a:off x="2781192" y="1828800"/>
+            <a:ext cx="6629310" cy="3931920"/>
+          </a:xfrm>
+          <a:prstGeom prst="rect">
+            <a:avLst/>
+          </a:prstGeom>
+        </p:spPr>
+      </p:pic>
       <p:sp>
         <p:nvSpPr>
           <p:cNvPr id="5" name="TextBox 4"/>
+          <p:cNvSpPr txBox="1"/>
+          <p:nvPr/>
+        </p:nvSpPr>
+        <p:spPr>
+          <a:xfrm>
+            <a:off x="1325880" y="5989320"/>
+            <a:ext cx="9509760" cy="640080"/>
+          </a:xfrm>
+          <a:prstGeom prst="rect">
+            <a:avLst/>
+          </a:prstGeom>
+          <a:noFill/>
+        </p:spPr>
+        <p:txBody>
+          <a:bodyPr wrap="square">
+            <a:spAutoFit/>
+          </a:bodyPr>
+          <a:lstStyle/>
+          <a:p>
+            <a:pPr algn="ctr"/>
+            <a:r>
+              <a:rPr sz="1600" b="0" i="0">
+                <a:solidFill>
+                  <a:srgbClr val="5A647A"/>
+                </a:solidFill>
+                <a:latin typeface="Helvetica Neue"/>
+              </a:rPr>
+              <a:t>The red line is the smallest segment you can measure.</a:t>
+            </a:r>
+          </a:p>
+        </p:txBody>
+      </p:sp>
+      <p:sp>
+        <p:nvSpPr>
+          <p:cNvPr id="6" name="TextBox 5"/>
           <p:cNvSpPr txBox="1"/>
           <p:nvPr/>
         </p:nvSpPr>
@@ -8571,7 +8929,7 @@
                 </a:solidFill>
                 <a:latin typeface="Helvetica Neue"/>
               </a:rPr>
-              <a:t>So how do you pick epsilon</a:t>
+              <a:t>How big a segment has to be</a:t>
             </a:r>
           </a:p>
         </p:txBody>
@@ -8663,7 +9021,7 @@
                 </a:solidFill>
                 <a:latin typeface="Helvetica Neue"/>
               </a:rPr>
-              <a:t>Start at epsilon 1, then measure</a:t>
+              <a:t>Error drops below the spread of the index at roughly 2,300 users</a:t>
             </a:r>
           </a:p>
           <a:p>
@@ -8688,7 +9046,7 @@
                 </a:solidFill>
                 <a:latin typeface="Helvetica Neue"/>
               </a:rPr>
-              <a:t>Pick it for the privacy you need, because utility also depends on the number of users</a:t>
+              <a:t>That is at epsilon 1, and halving epsilon needs four times the users</a:t>
             </a:r>
           </a:p>
           <a:p>
@@ -8709,11 +9067,61 @@
             <a:r>
               <a:rPr sz="2400" b="0" i="0">
                 <a:solidFill>
+                  <a:srgbClr val="141B2D"/>
+                </a:solidFill>
+                <a:latin typeface="Helvetica Neue"/>
+              </a:rPr>
+              <a:t>Segments with thousands of users are measurable under LDP</a:t>
+            </a:r>
+          </a:p>
+          <a:p>
+            <a:pPr marL="342900" indent="-342900">
+              <a:spcAft>
+                <a:spcPts val="2000"/>
+              </a:spcAft>
+            </a:pPr>
+            <a:r>
+              <a:rPr sz="2400" b="1">
+                <a:solidFill>
                   <a:srgbClr val="005EB8"/>
                 </a:solidFill>
                 <a:latin typeface="Helvetica Neue"/>
               </a:rPr>
-              <a:t>Segments too small? Add users or widen them, and leave epsilon alone</a:t>
+              <a:t>-   </a:t>
+            </a:r>
+            <a:r>
+              <a:rPr sz="2400" b="0" i="0">
+                <a:solidFill>
+                  <a:srgbClr val="141B2D"/>
+                </a:solidFill>
+                <a:latin typeface="Helvetica Neue"/>
+              </a:rPr>
+              <a:t>Segments with dozens are not measurable</a:t>
+            </a:r>
+          </a:p>
+          <a:p>
+            <a:pPr marL="342900" indent="-342900">
+              <a:spcAft>
+                <a:spcPts val="2000"/>
+              </a:spcAft>
+            </a:pPr>
+            <a:r>
+              <a:rPr sz="2400" b="1">
+                <a:solidFill>
+                  <a:srgbClr val="005EB8"/>
+                </a:solidFill>
+                <a:latin typeface="Helvetica Neue"/>
+              </a:rPr>
+              <a:t>-   </a:t>
+            </a:r>
+            <a:r>
+              <a:rPr sz="2400" b="0" i="0">
+                <a:solidFill>
+                  <a:srgbClr val="141B2D"/>
+                </a:solidFill>
+                <a:latin typeface="Helvetica Neue"/>
+              </a:rPr>
+              <a:t>Your head terms work, but your long tail does not</a:t>
             </a:r>
           </a:p>
         </p:txBody>
@@ -8787,8 +9195,8 @@
         </p:nvSpPr>
         <p:spPr>
           <a:xfrm>
-            <a:off x="1005840" y="2286000"/>
-            <a:ext cx="10149840" cy="2377440"/>
+            <a:off x="822960" y="640080"/>
+            <a:ext cx="10515600" cy="960120"/>
           </a:xfrm>
           <a:prstGeom prst="rect">
             <a:avLst/>
@@ -8801,42 +9209,163 @@
           </a:bodyPr>
           <a:lstStyle/>
           <a:p>
-            <a:pPr>
+            <a:r>
+              <a:rPr sz="3400" b="1">
+                <a:solidFill>
+                  <a:srgbClr val="141B2D"/>
+                </a:solidFill>
+                <a:latin typeface="Helvetica Neue"/>
+              </a:rPr>
+              <a:t>So how do you pick epsilon</a:t>
+            </a:r>
+          </a:p>
+        </p:txBody>
+      </p:sp>
+      <p:sp>
+        <p:nvSpPr>
+          <p:cNvPr id="3" name="Rectangle 2"/>
+          <p:cNvSpPr/>
+          <p:nvPr/>
+        </p:nvSpPr>
+        <p:spPr>
+          <a:xfrm>
+            <a:off x="822960" y="1276603"/>
+            <a:ext cx="1463040" cy="50800"/>
+          </a:xfrm>
+          <a:prstGeom prst="rect">
+            <a:avLst/>
+          </a:prstGeom>
+          <a:solidFill>
+            <a:srgbClr val="005EB8"/>
+          </a:solidFill>
+          <a:ln>
+            <a:noFill/>
+          </a:ln>
+          <a:effectLst/>
+        </p:spPr>
+        <p:style>
+          <a:lnRef idx="1">
+            <a:schemeClr val="accent1"/>
+          </a:lnRef>
+          <a:fillRef idx="3">
+            <a:schemeClr val="accent1"/>
+          </a:fillRef>
+          <a:effectRef idx="2">
+            <a:schemeClr val="accent1"/>
+          </a:effectRef>
+          <a:fontRef idx="minor">
+            <a:schemeClr val="lt1"/>
+          </a:fontRef>
+        </p:style>
+        <p:txBody>
+          <a:bodyPr rtlCol="0" anchor="ctr"/>
+          <a:lstStyle/>
+          <a:p>
+            <a:pPr algn="ctr"/>
+          </a:p>
+        </p:txBody>
+      </p:sp>
+      <p:sp>
+        <p:nvSpPr>
+          <p:cNvPr id="4" name="TextBox 3"/>
+          <p:cNvSpPr txBox="1"/>
+          <p:nvPr/>
+        </p:nvSpPr>
+        <p:spPr>
+          <a:xfrm>
+            <a:off x="822960" y="2057400"/>
+            <a:ext cx="10515600" cy="4023360"/>
+          </a:xfrm>
+          <a:prstGeom prst="rect">
+            <a:avLst/>
+          </a:prstGeom>
+          <a:noFill/>
+        </p:spPr>
+        <p:txBody>
+          <a:bodyPr wrap="square">
+            <a:spAutoFit/>
+          </a:bodyPr>
+          <a:lstStyle/>
+          <a:p>
+            <a:pPr marL="342900" indent="-342900">
               <a:spcAft>
-                <a:spcPts val="1600"/>
+                <a:spcPts val="2000"/>
               </a:spcAft>
             </a:pPr>
             <a:r>
-              <a:rPr sz="3400" b="1">
+              <a:rPr sz="2400" b="1">
+                <a:solidFill>
+                  <a:srgbClr val="005EB8"/>
+                </a:solidFill>
+                <a:latin typeface="Helvetica Neue"/>
+              </a:rPr>
+              <a:t>-   </a:t>
+            </a:r>
+            <a:r>
+              <a:rPr sz="2400" b="0" i="0">
                 <a:solidFill>
                   <a:srgbClr val="141B2D"/>
                 </a:solidFill>
                 <a:latin typeface="Helvetica Neue"/>
               </a:rPr>
-              <a:t>LDP does not cost you your analytics.</a:t>
-            </a:r>
-          </a:p>
-          <a:p>
-            <a:pPr>
+              <a:t>Start at epsilon 1, then measure</a:t>
+            </a:r>
+          </a:p>
+          <a:p>
+            <a:pPr marL="342900" indent="-342900">
               <a:spcAft>
-                <a:spcPts val="1600"/>
+                <a:spcPts val="2000"/>
               </a:spcAft>
             </a:pPr>
             <a:r>
-              <a:rPr sz="3400" b="0">
+              <a:rPr sz="2400" b="1">
                 <a:solidFill>
                   <a:srgbClr val="005EB8"/>
                 </a:solidFill>
                 <a:latin typeface="Helvetica Neue"/>
               </a:rPr>
-              <a:t>It costs you the ability to ask about one person.</a:t>
-            </a:r>
-          </a:p>
-        </p:txBody>
-      </p:sp>
-      <p:sp>
-        <p:nvSpPr>
-          <p:cNvPr id="3" name="TextBox 2"/>
+              <a:t>-   </a:t>
+            </a:r>
+            <a:r>
+              <a:rPr sz="2400" b="0" i="0">
+                <a:solidFill>
+                  <a:srgbClr val="141B2D"/>
+                </a:solidFill>
+                <a:latin typeface="Helvetica Neue"/>
+              </a:rPr>
+              <a:t>Pick it for the privacy you need, because utility also depends on the number of users</a:t>
+            </a:r>
+          </a:p>
+          <a:p>
+            <a:pPr marL="342900" indent="-342900">
+              <a:spcAft>
+                <a:spcPts val="2000"/>
+              </a:spcAft>
+            </a:pPr>
+            <a:r>
+              <a:rPr sz="2400" b="1">
+                <a:solidFill>
+                  <a:srgbClr val="005EB8"/>
+                </a:solidFill>
+                <a:latin typeface="Helvetica Neue"/>
+              </a:rPr>
+              <a:t>-   </a:t>
+            </a:r>
+            <a:r>
+              <a:rPr sz="2400" b="0" i="0">
+                <a:solidFill>
+                  <a:srgbClr val="005EB8"/>
+                </a:solidFill>
+                <a:latin typeface="Helvetica Neue"/>
+              </a:rPr>
+              <a:t>Segments too small? Add users or widen them, and leave epsilon alone</a:t>
+            </a:r>
+          </a:p>
+        </p:txBody>
+      </p:sp>
+      <p:sp>
+        <p:nvSpPr>
+          <p:cNvPr id="5" name="TextBox 4"/>
           <p:cNvSpPr txBox="1"/>
           <p:nvPr/>
         </p:nvSpPr>
@@ -8878,6 +9407,122 @@
 </file>
 
 <file path=ppt/slides/slide23.xml><?xml version="1.0" encoding="utf-8"?>
+<p:sld xmlns:a="http://schemas.openxmlformats.org/drawingml/2006/main" xmlns:p="http://schemas.openxmlformats.org/presentationml/2006/main" xmlns:r="http://schemas.openxmlformats.org/officeDocument/2006/relationships">
+  <p:cSld>
+    <p:bg>
+      <p:bgPr>
+        <a:solidFill>
+          <a:srgbClr val="FFFFFF"/>
+        </a:solidFill>
+        <a:effectLst/>
+      </p:bgPr>
+    </p:bg>
+    <p:spTree>
+      <p:nvGrpSpPr>
+        <p:cNvPr id="1" name=""/>
+        <p:cNvGrpSpPr/>
+        <p:nvPr/>
+      </p:nvGrpSpPr>
+      <p:grpSpPr/>
+      <p:sp>
+        <p:nvSpPr>
+          <p:cNvPr id="2" name="TextBox 1"/>
+          <p:cNvSpPr txBox="1"/>
+          <p:nvPr/>
+        </p:nvSpPr>
+        <p:spPr>
+          <a:xfrm>
+            <a:off x="1005840" y="2286000"/>
+            <a:ext cx="10149840" cy="2377440"/>
+          </a:xfrm>
+          <a:prstGeom prst="rect">
+            <a:avLst/>
+          </a:prstGeom>
+          <a:noFill/>
+        </p:spPr>
+        <p:txBody>
+          <a:bodyPr wrap="square">
+            <a:spAutoFit/>
+          </a:bodyPr>
+          <a:lstStyle/>
+          <a:p>
+            <a:pPr>
+              <a:spcAft>
+                <a:spcPts val="1600"/>
+              </a:spcAft>
+            </a:pPr>
+            <a:r>
+              <a:rPr sz="3400" b="1">
+                <a:solidFill>
+                  <a:srgbClr val="141B2D"/>
+                </a:solidFill>
+                <a:latin typeface="Helvetica Neue"/>
+              </a:rPr>
+              <a:t>LDP does not cost you your analytics.</a:t>
+            </a:r>
+          </a:p>
+          <a:p>
+            <a:pPr>
+              <a:spcAft>
+                <a:spcPts val="1600"/>
+              </a:spcAft>
+            </a:pPr>
+            <a:r>
+              <a:rPr sz="3400" b="0">
+                <a:solidFill>
+                  <a:srgbClr val="005EB8"/>
+                </a:solidFill>
+                <a:latin typeface="Helvetica Neue"/>
+              </a:rPr>
+              <a:t>It costs you the ability to ask about one person.</a:t>
+            </a:r>
+          </a:p>
+        </p:txBody>
+      </p:sp>
+      <p:sp>
+        <p:nvSpPr>
+          <p:cNvPr id="3" name="TextBox 2"/>
+          <p:cNvSpPr txBox="1"/>
+          <p:nvPr/>
+        </p:nvSpPr>
+        <p:spPr>
+          <a:xfrm>
+            <a:off x="10405872" y="6144768"/>
+            <a:ext cx="960120" cy="411480"/>
+          </a:xfrm>
+          <a:prstGeom prst="rect">
+            <a:avLst/>
+          </a:prstGeom>
+          <a:noFill/>
+        </p:spPr>
+        <p:txBody>
+          <a:bodyPr wrap="square">
+            <a:spAutoFit/>
+          </a:bodyPr>
+          <a:lstStyle/>
+          <a:p>
+            <a:pPr algn="r"/>
+            <a:r>
+              <a:rPr sz="1300" b="0">
+                <a:solidFill>
+                  <a:srgbClr val="5A647A"/>
+                </a:solidFill>
+                <a:latin typeface="Helvetica Neue"/>
+              </a:rPr>
+              <a:t>23</a:t>
+            </a:r>
+          </a:p>
+        </p:txBody>
+      </p:sp>
+    </p:spTree>
+  </p:cSld>
+  <p:clrMapOvr>
+    <a:masterClrMapping/>
+  </p:clrMapOvr>
+</p:sld>
+</file>
+
+<file path=ppt/slides/slide24.xml><?xml version="1.0" encoding="utf-8"?>
 <p:sld xmlns:a="http://schemas.openxmlformats.org/drawingml/2006/main" xmlns:p="http://schemas.openxmlformats.org/presentationml/2006/main" xmlns:r="http://schemas.openxmlformats.org/officeDocument/2006/relationships">
   <p:cSld>
     <p:bg>
@@ -8972,353 +9617,6 @@
               <a:rPr sz="1300" b="0">
                 <a:solidFill>
                   <a:srgbClr val="6E7C93"/>
-                </a:solidFill>
-                <a:latin typeface="Helvetica Neue"/>
-              </a:rPr>
-              <a:t>23</a:t>
-            </a:r>
-          </a:p>
-        </p:txBody>
-      </p:sp>
-    </p:spTree>
-  </p:cSld>
-  <p:clrMapOvr>
-    <a:masterClrMapping/>
-  </p:clrMapOvr>
-</p:sld>
-</file>
-
-<file path=ppt/slides/slide24.xml><?xml version="1.0" encoding="utf-8"?>
-<p:sld xmlns:a="http://schemas.openxmlformats.org/drawingml/2006/main" xmlns:p="http://schemas.openxmlformats.org/presentationml/2006/main" xmlns:r="http://schemas.openxmlformats.org/officeDocument/2006/relationships">
-  <p:cSld>
-    <p:bg>
-      <p:bgPr>
-        <a:solidFill>
-          <a:srgbClr val="FFFFFF"/>
-        </a:solidFill>
-        <a:effectLst/>
-      </p:bgPr>
-    </p:bg>
-    <p:spTree>
-      <p:nvGrpSpPr>
-        <p:cNvPr id="1" name=""/>
-        <p:cNvGrpSpPr/>
-        <p:nvPr/>
-      </p:nvGrpSpPr>
-      <p:grpSpPr/>
-      <p:sp>
-        <p:nvSpPr>
-          <p:cNvPr id="2" name="TextBox 1"/>
-          <p:cNvSpPr txBox="1"/>
-          <p:nvPr/>
-        </p:nvSpPr>
-        <p:spPr>
-          <a:xfrm>
-            <a:off x="822960" y="640080"/>
-            <a:ext cx="10515600" cy="960120"/>
-          </a:xfrm>
-          <a:prstGeom prst="rect">
-            <a:avLst/>
-          </a:prstGeom>
-          <a:noFill/>
-        </p:spPr>
-        <p:txBody>
-          <a:bodyPr wrap="square">
-            <a:spAutoFit/>
-          </a:bodyPr>
-          <a:lstStyle/>
-          <a:p>
-            <a:r>
-              <a:rPr sz="3400" b="1">
-                <a:solidFill>
-                  <a:srgbClr val="141B2D"/>
-                </a:solidFill>
-                <a:latin typeface="Helvetica Neue"/>
-              </a:rPr>
-              <a:t>Where the noise gets injected</a:t>
-            </a:r>
-          </a:p>
-        </p:txBody>
-      </p:sp>
-      <p:sp>
-        <p:nvSpPr>
-          <p:cNvPr id="3" name="Rectangle 2"/>
-          <p:cNvSpPr/>
-          <p:nvPr/>
-        </p:nvSpPr>
-        <p:spPr>
-          <a:xfrm>
-            <a:off x="822960" y="1276603"/>
-            <a:ext cx="1463040" cy="50800"/>
-          </a:xfrm>
-          <a:prstGeom prst="rect">
-            <a:avLst/>
-          </a:prstGeom>
-          <a:solidFill>
-            <a:srgbClr val="005EB8"/>
-          </a:solidFill>
-          <a:ln>
-            <a:noFill/>
-          </a:ln>
-          <a:effectLst/>
-        </p:spPr>
-        <p:style>
-          <a:lnRef idx="1">
-            <a:schemeClr val="accent1"/>
-          </a:lnRef>
-          <a:fillRef idx="3">
-            <a:schemeClr val="accent1"/>
-          </a:fillRef>
-          <a:effectRef idx="2">
-            <a:schemeClr val="accent1"/>
-          </a:effectRef>
-          <a:fontRef idx="minor">
-            <a:schemeClr val="lt1"/>
-          </a:fontRef>
-        </p:style>
-        <p:txBody>
-          <a:bodyPr rtlCol="0" anchor="ctr"/>
-          <a:lstStyle/>
-          <a:p>
-            <a:pPr algn="ctr"/>
-          </a:p>
-        </p:txBody>
-      </p:sp>
-      <p:sp>
-        <p:nvSpPr>
-          <p:cNvPr id="4" name="TextBox 3"/>
-          <p:cNvSpPr txBox="1"/>
-          <p:nvPr/>
-        </p:nvSpPr>
-        <p:spPr>
-          <a:xfrm>
-            <a:off x="822960" y="2057400"/>
-            <a:ext cx="5120640" cy="4023360"/>
-          </a:xfrm>
-          <a:prstGeom prst="rect">
-            <a:avLst/>
-          </a:prstGeom>
-          <a:noFill/>
-        </p:spPr>
-        <p:txBody>
-          <a:bodyPr wrap="square">
-            <a:spAutoFit/>
-          </a:bodyPr>
-          <a:lstStyle/>
-          <a:p>
-            <a:pPr marL="342900" indent="-342900">
-              <a:spcAft>
-                <a:spcPts val="1400"/>
-              </a:spcAft>
-            </a:pPr>
-            <a:r>
-              <a:rPr sz="2100" b="1">
-                <a:solidFill>
-                  <a:srgbClr val="005EB8"/>
-                </a:solidFill>
-                <a:latin typeface="Helvetica Neue"/>
-              </a:rPr>
-              <a:t>-   </a:t>
-            </a:r>
-            <a:r>
-              <a:rPr sz="2100" b="0" i="0">
-                <a:solidFill>
-                  <a:srgbClr val="141B2D"/>
-                </a:solidFill>
-                <a:latin typeface="Helvetica Neue"/>
-              </a:rPr>
-              <a:t>On the device, before </a:t>
-            </a:r>
-            <a:r>
-              <a:rPr sz="1900" b="0">
-                <a:solidFill>
-                  <a:srgbClr val="141B2D"/>
-                </a:solidFill>
-                <a:latin typeface="Consolas"/>
-              </a:rPr>
-              <a:t>ubi.js</a:t>
-            </a:r>
-            <a:r>
-              <a:rPr sz="2100" b="0" i="0">
-                <a:solidFill>
-                  <a:srgbClr val="141B2D"/>
-                </a:solidFill>
-                <a:latin typeface="Helvetica Neue"/>
-              </a:rPr>
-              <a:t> sends the event</a:t>
-            </a:r>
-          </a:p>
-          <a:p>
-            <a:pPr marL="342900" indent="-342900">
-              <a:spcAft>
-                <a:spcPts val="1400"/>
-              </a:spcAft>
-            </a:pPr>
-            <a:r>
-              <a:rPr sz="2100" b="1">
-                <a:solidFill>
-                  <a:srgbClr val="005EB8"/>
-                </a:solidFill>
-                <a:latin typeface="Helvetica Neue"/>
-              </a:rPr>
-              <a:t>-   </a:t>
-            </a:r>
-            <a:r>
-              <a:rPr sz="2100" b="0" i="0">
-                <a:solidFill>
-                  <a:srgbClr val="141B2D"/>
-                </a:solidFill>
-                <a:latin typeface="Helvetica Neue"/>
-              </a:rPr>
-              <a:t>Aggregation happens at query time over the noised data</a:t>
-            </a:r>
-          </a:p>
-          <a:p>
-            <a:pPr marL="342900" indent="-342900">
-              <a:spcAft>
-                <a:spcPts val="1400"/>
-              </a:spcAft>
-            </a:pPr>
-            <a:r>
-              <a:rPr sz="2100" b="1">
-                <a:solidFill>
-                  <a:srgbClr val="005EB8"/>
-                </a:solidFill>
-                <a:latin typeface="Helvetica Neue"/>
-              </a:rPr>
-              <a:t>-   </a:t>
-            </a:r>
-            <a:r>
-              <a:rPr sz="2100" b="0" i="0">
-                <a:solidFill>
-                  <a:srgbClr val="141B2D"/>
-                </a:solidFill>
-                <a:latin typeface="Helvetica Neue"/>
-              </a:rPr>
-              <a:t>Nothing downstream needs to be trusted, because nothing downstream has the original</a:t>
-            </a:r>
-          </a:p>
-          <a:p>
-            <a:pPr marL="342900" indent="-342900">
-              <a:spcAft>
-                <a:spcPts val="1400"/>
-              </a:spcAft>
-            </a:pPr>
-            <a:r>
-              <a:rPr sz="2100" b="1">
-                <a:solidFill>
-                  <a:srgbClr val="005EB8"/>
-                </a:solidFill>
-                <a:latin typeface="Helvetica Neue"/>
-              </a:rPr>
-              <a:t>-   </a:t>
-            </a:r>
-            <a:r>
-              <a:rPr sz="2100" b="0" i="0">
-                <a:solidFill>
-                  <a:srgbClr val="141B2D"/>
-                </a:solidFill>
-                <a:latin typeface="Helvetica Neue"/>
-              </a:rPr>
-              <a:t>You set epsilon in the client you ship</a:t>
-            </a:r>
-          </a:p>
-        </p:txBody>
-      </p:sp>
-      <p:pic>
-        <p:nvPicPr>
-          <p:cNvPr id="5" name="Picture 4" descr="28_trust_boundary.png"/>
-          <p:cNvPicPr>
-            <a:picLocks noChangeAspect="1"/>
-          </p:cNvPicPr>
-          <p:nvPr/>
-        </p:nvPicPr>
-        <p:blipFill>
-          <a:blip r:embed="rId2"/>
-          <a:stretch>
-            <a:fillRect/>
-          </a:stretch>
-        </p:blipFill>
-        <p:spPr>
-          <a:xfrm>
-            <a:off x="6263640" y="2177248"/>
-            <a:ext cx="5029200" cy="3417902"/>
-          </a:xfrm>
-          <a:prstGeom prst="rect">
-            <a:avLst/>
-          </a:prstGeom>
-        </p:spPr>
-      </p:pic>
-      <p:sp>
-        <p:nvSpPr>
-          <p:cNvPr id="6" name="TextBox 5"/>
-          <p:cNvSpPr txBox="1"/>
-          <p:nvPr/>
-        </p:nvSpPr>
-        <p:spPr>
-          <a:xfrm>
-            <a:off x="822960" y="5989320"/>
-            <a:ext cx="8961120" cy="502920"/>
-          </a:xfrm>
-          <a:prstGeom prst="rect">
-            <a:avLst/>
-          </a:prstGeom>
-          <a:noFill/>
-        </p:spPr>
-        <p:txBody>
-          <a:bodyPr wrap="square">
-            <a:spAutoFit/>
-          </a:bodyPr>
-          <a:lstStyle/>
-          <a:p>
-            <a:r>
-              <a:rPr sz="1400" b="0" i="0">
-                <a:solidFill>
-                  <a:srgbClr val="5A647A"/>
-                </a:solidFill>
-                <a:latin typeface="Helvetica Neue"/>
-              </a:rPr>
-              <a:t>An upcoming UBI RFC will bring this capability into </a:t>
-            </a:r>
-            <a:r>
-              <a:rPr sz="1200" b="0">
-                <a:solidFill>
-                  <a:srgbClr val="5A647A"/>
-                </a:solidFill>
-                <a:latin typeface="Consolas"/>
-              </a:rPr>
-              <a:t>ubi.js</a:t>
-            </a:r>
-          </a:p>
-        </p:txBody>
-      </p:sp>
-      <p:sp>
-        <p:nvSpPr>
-          <p:cNvPr id="7" name="TextBox 6"/>
-          <p:cNvSpPr txBox="1"/>
-          <p:nvPr/>
-        </p:nvSpPr>
-        <p:spPr>
-          <a:xfrm>
-            <a:off x="10405872" y="6144768"/>
-            <a:ext cx="960120" cy="411480"/>
-          </a:xfrm>
-          <a:prstGeom prst="rect">
-            <a:avLst/>
-          </a:prstGeom>
-          <a:noFill/>
-        </p:spPr>
-        <p:txBody>
-          <a:bodyPr wrap="square">
-            <a:spAutoFit/>
-          </a:bodyPr>
-          <a:lstStyle/>
-          <a:p>
-            <a:pPr algn="r"/>
-            <a:r>
-              <a:rPr sz="1300" b="0">
-                <a:solidFill>
-                  <a:srgbClr val="5A647A"/>
                 </a:solidFill>
                 <a:latin typeface="Helvetica Neue"/>
               </a:rPr>
@@ -9361,8 +9659,8 @@
         </p:nvSpPr>
         <p:spPr>
           <a:xfrm>
-            <a:off x="822960" y="411480"/>
-            <a:ext cx="10515600" cy="822960"/>
+            <a:off x="822960" y="640080"/>
+            <a:ext cx="10515600" cy="960120"/>
           </a:xfrm>
           <a:prstGeom prst="rect">
             <a:avLst/>
@@ -9376,20 +9674,205 @@
           <a:lstStyle/>
           <a:p>
             <a:r>
-              <a:rPr sz="3000" b="1">
+              <a:rPr sz="3400" b="1">
                 <a:solidFill>
                   <a:srgbClr val="141B2D"/>
                 </a:solidFill>
                 <a:latin typeface="Helvetica Neue"/>
               </a:rPr>
-              <a:t>What changes in ubi_queries</a:t>
+              <a:t>Where the noise gets injected</a:t>
+            </a:r>
+          </a:p>
+        </p:txBody>
+      </p:sp>
+      <p:sp>
+        <p:nvSpPr>
+          <p:cNvPr id="3" name="Rectangle 2"/>
+          <p:cNvSpPr/>
+          <p:nvPr/>
+        </p:nvSpPr>
+        <p:spPr>
+          <a:xfrm>
+            <a:off x="822960" y="1276603"/>
+            <a:ext cx="1463040" cy="50800"/>
+          </a:xfrm>
+          <a:prstGeom prst="rect">
+            <a:avLst/>
+          </a:prstGeom>
+          <a:solidFill>
+            <a:srgbClr val="005EB8"/>
+          </a:solidFill>
+          <a:ln>
+            <a:noFill/>
+          </a:ln>
+          <a:effectLst/>
+        </p:spPr>
+        <p:style>
+          <a:lnRef idx="1">
+            <a:schemeClr val="accent1"/>
+          </a:lnRef>
+          <a:fillRef idx="3">
+            <a:schemeClr val="accent1"/>
+          </a:fillRef>
+          <a:effectRef idx="2">
+            <a:schemeClr val="accent1"/>
+          </a:effectRef>
+          <a:fontRef idx="minor">
+            <a:schemeClr val="lt1"/>
+          </a:fontRef>
+        </p:style>
+        <p:txBody>
+          <a:bodyPr rtlCol="0" anchor="ctr"/>
+          <a:lstStyle/>
+          <a:p>
+            <a:pPr algn="ctr"/>
+          </a:p>
+        </p:txBody>
+      </p:sp>
+      <p:sp>
+        <p:nvSpPr>
+          <p:cNvPr id="4" name="TextBox 3"/>
+          <p:cNvSpPr txBox="1"/>
+          <p:nvPr/>
+        </p:nvSpPr>
+        <p:spPr>
+          <a:xfrm>
+            <a:off x="822960" y="2057400"/>
+            <a:ext cx="5120640" cy="4023360"/>
+          </a:xfrm>
+          <a:prstGeom prst="rect">
+            <a:avLst/>
+          </a:prstGeom>
+          <a:noFill/>
+        </p:spPr>
+        <p:txBody>
+          <a:bodyPr wrap="square">
+            <a:spAutoFit/>
+          </a:bodyPr>
+          <a:lstStyle/>
+          <a:p>
+            <a:pPr marL="342900" indent="-342900">
+              <a:spcAft>
+                <a:spcPts val="1400"/>
+              </a:spcAft>
+            </a:pPr>
+            <a:r>
+              <a:rPr sz="2100" b="1">
+                <a:solidFill>
+                  <a:srgbClr val="005EB8"/>
+                </a:solidFill>
+                <a:latin typeface="Helvetica Neue"/>
+              </a:rPr>
+              <a:t>-   </a:t>
+            </a:r>
+            <a:r>
+              <a:rPr sz="2100" b="0" i="0">
+                <a:solidFill>
+                  <a:srgbClr val="141B2D"/>
+                </a:solidFill>
+                <a:latin typeface="Helvetica Neue"/>
+              </a:rPr>
+              <a:t>On the device, before </a:t>
+            </a:r>
+            <a:r>
+              <a:rPr sz="1900" b="0">
+                <a:solidFill>
+                  <a:srgbClr val="141B2D"/>
+                </a:solidFill>
+                <a:latin typeface="Consolas"/>
+              </a:rPr>
+              <a:t>ubi.js</a:t>
+            </a:r>
+            <a:r>
+              <a:rPr sz="2100" b="0" i="0">
+                <a:solidFill>
+                  <a:srgbClr val="141B2D"/>
+                </a:solidFill>
+                <a:latin typeface="Helvetica Neue"/>
+              </a:rPr>
+              <a:t> sends the event</a:t>
+            </a:r>
+          </a:p>
+          <a:p>
+            <a:pPr marL="342900" indent="-342900">
+              <a:spcAft>
+                <a:spcPts val="1400"/>
+              </a:spcAft>
+            </a:pPr>
+            <a:r>
+              <a:rPr sz="2100" b="1">
+                <a:solidFill>
+                  <a:srgbClr val="005EB8"/>
+                </a:solidFill>
+                <a:latin typeface="Helvetica Neue"/>
+              </a:rPr>
+              <a:t>-   </a:t>
+            </a:r>
+            <a:r>
+              <a:rPr sz="2100" b="0" i="0">
+                <a:solidFill>
+                  <a:srgbClr val="141B2D"/>
+                </a:solidFill>
+                <a:latin typeface="Helvetica Neue"/>
+              </a:rPr>
+              <a:t>Aggregation happens at query time over the noised data</a:t>
+            </a:r>
+          </a:p>
+          <a:p>
+            <a:pPr marL="342900" indent="-342900">
+              <a:spcAft>
+                <a:spcPts val="1400"/>
+              </a:spcAft>
+            </a:pPr>
+            <a:r>
+              <a:rPr sz="2100" b="1">
+                <a:solidFill>
+                  <a:srgbClr val="005EB8"/>
+                </a:solidFill>
+                <a:latin typeface="Helvetica Neue"/>
+              </a:rPr>
+              <a:t>-   </a:t>
+            </a:r>
+            <a:r>
+              <a:rPr sz="2100" b="0" i="0">
+                <a:solidFill>
+                  <a:srgbClr val="141B2D"/>
+                </a:solidFill>
+                <a:latin typeface="Helvetica Neue"/>
+              </a:rPr>
+              <a:t>Nothing downstream needs to be trusted, because nothing downstream has the original</a:t>
+            </a:r>
+          </a:p>
+          <a:p>
+            <a:pPr marL="342900" indent="-342900">
+              <a:spcAft>
+                <a:spcPts val="1400"/>
+              </a:spcAft>
+            </a:pPr>
+            <a:r>
+              <a:rPr sz="2100" b="1">
+                <a:solidFill>
+                  <a:srgbClr val="005EB8"/>
+                </a:solidFill>
+                <a:latin typeface="Helvetica Neue"/>
+              </a:rPr>
+              <a:t>-   </a:t>
+            </a:r>
+            <a:r>
+              <a:rPr sz="2100" b="0" i="0">
+                <a:solidFill>
+                  <a:srgbClr val="141B2D"/>
+                </a:solidFill>
+                <a:latin typeface="Helvetica Neue"/>
+              </a:rPr>
+              <a:t>You set epsilon in the client you ship</a:t>
             </a:r>
           </a:p>
         </p:txBody>
       </p:sp>
       <p:pic>
         <p:nvPicPr>
-          <p:cNvPr id="3" name="Picture 2" descr="28_ubi_document.png"/>
+          <p:cNvPr id="5" name="Picture 4" descr="28_trust_boundary.png"/>
           <p:cNvPicPr>
             <a:picLocks noChangeAspect="1"/>
           </p:cNvPicPr>
@@ -9403,8 +9886,8 @@
         </p:blipFill>
         <p:spPr>
           <a:xfrm>
-            <a:off x="1070391" y="1417320"/>
-            <a:ext cx="10050912" cy="4343400"/>
+            <a:off x="6263640" y="2177248"/>
+            <a:ext cx="5029200" cy="3417902"/>
           </a:xfrm>
           <a:prstGeom prst="rect">
             <a:avLst/>
@@ -9413,7 +9896,7 @@
       </p:pic>
       <p:sp>
         <p:nvSpPr>
-          <p:cNvPr id="4" name="TextBox 3"/>
+          <p:cNvPr id="6" name="TextBox 5"/>
           <p:cNvSpPr txBox="1"/>
           <p:nvPr/>
         </p:nvSpPr>
@@ -9440,7 +9923,7 @@
                 </a:solidFill>
                 <a:latin typeface="Helvetica Neue"/>
               </a:rPr>
-              <a:t>UBI supports this today through </a:t>
+              <a:t>An upcoming UBI RFC will bring this capability into </a:t>
             </a:r>
             <a:r>
               <a:rPr sz="1200" b="0">
@@ -9449,23 +9932,14 @@
                 </a:solidFill>
                 <a:latin typeface="Consolas"/>
               </a:rPr>
-              <a:t>query_attributes</a:t>
-            </a:r>
-            <a:r>
-              <a:rPr sz="1400" b="0" i="0">
-                <a:solidFill>
-                  <a:srgbClr val="5A647A"/>
-                </a:solidFill>
-                <a:latin typeface="Helvetica Neue"/>
-              </a:rPr>
-              <a:t>, and the RFC will propose making it first-class</a:t>
-            </a:r>
-          </a:p>
-        </p:txBody>
-      </p:sp>
-      <p:sp>
-        <p:nvSpPr>
-          <p:cNvPr id="5" name="TextBox 4"/>
+              <a:t>ubi.js</a:t>
+            </a:r>
+          </a:p>
+        </p:txBody>
+      </p:sp>
+      <p:sp>
+        <p:nvSpPr>
+          <p:cNvPr id="7" name="TextBox 6"/>
           <p:cNvSpPr txBox="1"/>
           <p:nvPr/>
         </p:nvSpPr>
@@ -9532,8 +10006,8 @@
         </p:nvSpPr>
         <p:spPr>
           <a:xfrm>
-            <a:off x="822960" y="640080"/>
-            <a:ext cx="10515600" cy="960120"/>
+            <a:off x="822960" y="411480"/>
+            <a:ext cx="10515600" cy="822960"/>
           </a:xfrm>
           <a:prstGeom prst="rect">
             <a:avLst/>
@@ -9547,61 +10021,41 @@
           <a:lstStyle/>
           <a:p>
             <a:r>
-              <a:rPr sz="3400" b="1">
+              <a:rPr sz="3000" b="1">
                 <a:solidFill>
                   <a:srgbClr val="141B2D"/>
                 </a:solidFill>
                 <a:latin typeface="Helvetica Neue"/>
               </a:rPr>
-              <a:t>What your dashboards can still compute</a:t>
-            </a:r>
-          </a:p>
-        </p:txBody>
-      </p:sp>
-      <p:sp>
-        <p:nvSpPr>
-          <p:cNvPr id="3" name="Rectangle 2"/>
-          <p:cNvSpPr/>
+              <a:t>What changes in ubi_queries</a:t>
+            </a:r>
+          </a:p>
+        </p:txBody>
+      </p:sp>
+      <p:pic>
+        <p:nvPicPr>
+          <p:cNvPr id="3" name="Picture 2" descr="28_ubi_document.png"/>
+          <p:cNvPicPr>
+            <a:picLocks noChangeAspect="1"/>
+          </p:cNvPicPr>
           <p:nvPr/>
-        </p:nvSpPr>
-        <p:spPr>
-          <a:xfrm>
-            <a:off x="822960" y="1276603"/>
-            <a:ext cx="1463040" cy="50800"/>
+        </p:nvPicPr>
+        <p:blipFill>
+          <a:blip r:embed="rId2"/>
+          <a:stretch>
+            <a:fillRect/>
+          </a:stretch>
+        </p:blipFill>
+        <p:spPr>
+          <a:xfrm>
+            <a:off x="1070391" y="1417320"/>
+            <a:ext cx="10050912" cy="4343400"/>
           </a:xfrm>
           <a:prstGeom prst="rect">
             <a:avLst/>
           </a:prstGeom>
-          <a:solidFill>
-            <a:srgbClr val="005EB8"/>
-          </a:solidFill>
-          <a:ln>
-            <a:noFill/>
-          </a:ln>
-          <a:effectLst/>
-        </p:spPr>
-        <p:style>
-          <a:lnRef idx="1">
-            <a:schemeClr val="accent1"/>
-          </a:lnRef>
-          <a:fillRef idx="3">
-            <a:schemeClr val="accent1"/>
-          </a:fillRef>
-          <a:effectRef idx="2">
-            <a:schemeClr val="accent1"/>
-          </a:effectRef>
-          <a:fontRef idx="minor">
-            <a:schemeClr val="lt1"/>
-          </a:fontRef>
-        </p:style>
-        <p:txBody>
-          <a:bodyPr rtlCol="0" anchor="ctr"/>
-          <a:lstStyle/>
-          <a:p>
-            <a:pPr algn="ctr"/>
-          </a:p>
-        </p:txBody>
-      </p:sp>
+        </p:spPr>
+      </p:pic>
       <p:sp>
         <p:nvSpPr>
           <p:cNvPr id="4" name="TextBox 3"/>
@@ -9610,8 +10064,8 @@
         </p:nvSpPr>
         <p:spPr>
           <a:xfrm>
-            <a:off x="822960" y="2057400"/>
-            <a:ext cx="10515600" cy="4023360"/>
+            <a:off x="822960" y="5989320"/>
+            <a:ext cx="8961120" cy="502920"/>
           </a:xfrm>
           <a:prstGeom prst="rect">
             <a:avLst/>
@@ -9624,103 +10078,32 @@
           </a:bodyPr>
           <a:lstStyle/>
           <a:p>
-            <a:pPr marL="342900" indent="-342900">
-              <a:spcAft>
-                <a:spcPts val="2000"/>
-              </a:spcAft>
-            </a:pPr>
-            <a:r>
-              <a:rPr sz="2400" b="1">
-                <a:solidFill>
-                  <a:srgbClr val="005EB8"/>
-                </a:solidFill>
-                <a:latin typeface="Helvetica Neue"/>
-              </a:rPr>
-              <a:t>-   </a:t>
-            </a:r>
-            <a:r>
-              <a:rPr sz="2400" b="0" i="0">
-                <a:solidFill>
-                  <a:srgbClr val="141B2D"/>
-                </a:solidFill>
-                <a:latin typeface="Helvetica Neue"/>
-              </a:rPr>
-              <a:t>Aggregate query intent per segment</a:t>
-            </a:r>
-          </a:p>
-          <a:p>
-            <a:pPr marL="342900" indent="-342900">
-              <a:spcAft>
-                <a:spcPts val="2000"/>
-              </a:spcAft>
-            </a:pPr>
-            <a:r>
-              <a:rPr sz="2400" b="1">
-                <a:solidFill>
-                  <a:srgbClr val="005EB8"/>
-                </a:solidFill>
-                <a:latin typeface="Helvetica Neue"/>
-              </a:rPr>
-              <a:t>-   </a:t>
-            </a:r>
-            <a:r>
-              <a:rPr sz="2400" b="0" i="0">
-                <a:solidFill>
-                  <a:srgbClr val="141B2D"/>
-                </a:solidFill>
-                <a:latin typeface="Helvetica Neue"/>
-              </a:rPr>
-              <a:t>Demand trends and shifts over time</a:t>
-            </a:r>
-          </a:p>
-          <a:p>
-            <a:pPr marL="342900" indent="-342900">
-              <a:spcAft>
-                <a:spcPts val="2000"/>
-              </a:spcAft>
-            </a:pPr>
-            <a:r>
-              <a:rPr sz="2400" b="1">
-                <a:solidFill>
-                  <a:srgbClr val="005EB8"/>
-                </a:solidFill>
-                <a:latin typeface="Helvetica Neue"/>
-              </a:rPr>
-              <a:t>-   </a:t>
-            </a:r>
-            <a:r>
-              <a:rPr sz="2400" b="0" i="0">
-                <a:solidFill>
-                  <a:srgbClr val="141B2D"/>
-                </a:solidFill>
-                <a:latin typeface="Helvetica Neue"/>
-              </a:rPr>
-              <a:t>Segment-level training signal for learning-to-rank</a:t>
-            </a:r>
-          </a:p>
-          <a:p>
-            <a:pPr marL="342900" indent="-342900">
-              <a:spcAft>
-                <a:spcPts val="2000"/>
-              </a:spcAft>
-            </a:pPr>
-            <a:r>
-              <a:rPr sz="2400" b="1">
-                <a:solidFill>
-                  <a:srgbClr val="005EB8"/>
-                </a:solidFill>
-                <a:latin typeface="Helvetica Neue"/>
-              </a:rPr>
-              <a:t>-   </a:t>
-            </a:r>
-            <a:r>
-              <a:rPr sz="2400" b="0" i="0">
-                <a:solidFill>
-                  <a:srgbClr val="141B2D"/>
-                </a:solidFill>
-                <a:latin typeface="Helvetica Neue"/>
-              </a:rPr>
-              <a:t>What they cannot do is show you one user's session</a:t>
+            <a:r>
+              <a:rPr sz="1400" b="0" i="0">
+                <a:solidFill>
+                  <a:srgbClr val="5A647A"/>
+                </a:solidFill>
+                <a:latin typeface="Helvetica Neue"/>
+              </a:rPr>
+              <a:t>UBI supports this today through </a:t>
+            </a:r>
+            <a:r>
+              <a:rPr sz="1200" b="0">
+                <a:solidFill>
+                  <a:srgbClr val="5A647A"/>
+                </a:solidFill>
+                <a:latin typeface="Consolas"/>
+              </a:rPr>
+              <a:t>query_attributes</a:t>
+            </a:r>
+            <a:r>
+              <a:rPr sz="1400" b="0" i="0">
+                <a:solidFill>
+                  <a:srgbClr val="5A647A"/>
+                </a:solidFill>
+                <a:latin typeface="Helvetica Neue"/>
+              </a:rPr>
+              <a:t>, and the RFC will propose making it first-class</a:t>
             </a:r>
           </a:p>
         </p:txBody>
@@ -9815,7 +10198,7 @@
                 </a:solidFill>
                 <a:latin typeface="Helvetica Neue"/>
               </a:rPr>
-              <a:t>The limitations</a:t>
+              <a:t>What your dashboards can still compute</a:t>
             </a:r>
           </a:p>
         </p:txBody>
@@ -9835,7 +10218,7 @@
             <a:avLst/>
           </a:prstGeom>
           <a:solidFill>
-            <a:srgbClr val="B4311A"/>
+            <a:srgbClr val="005EB8"/>
           </a:solidFill>
           <a:ln>
             <a:noFill/>
@@ -9894,7 +10277,7 @@
             <a:r>
               <a:rPr sz="2400" b="1">
                 <a:solidFill>
-                  <a:srgbClr val="B4311A"/>
+                  <a:srgbClr val="005EB8"/>
                 </a:solidFill>
                 <a:latin typeface="Helvetica Neue"/>
               </a:rPr>
@@ -9907,7 +10290,7 @@
                 </a:solidFill>
                 <a:latin typeface="Helvetica Neue"/>
               </a:rPr>
-              <a:t>The category leaks and that is worse for healthcare than furniture</a:t>
+              <a:t>Aggregate query intent per segment</a:t>
             </a:r>
           </a:p>
           <a:p>
@@ -9919,7 +10302,7 @@
             <a:r>
               <a:rPr sz="2400" b="1">
                 <a:solidFill>
-                  <a:srgbClr val="B4311A"/>
+                  <a:srgbClr val="005EB8"/>
                 </a:solidFill>
                 <a:latin typeface="Helvetica Neue"/>
               </a:rPr>
@@ -9932,7 +10315,7 @@
                 </a:solidFill>
                 <a:latin typeface="Helvetica Neue"/>
               </a:rPr>
-              <a:t>Epsilon values don't transfer between indexes</a:t>
+              <a:t>Demand trends and shifts over time</a:t>
             </a:r>
           </a:p>
           <a:p>
@@ -9944,7 +10327,7 @@
             <a:r>
               <a:rPr sz="2400" b="1">
                 <a:solidFill>
-                  <a:srgbClr val="B4311A"/>
+                  <a:srgbClr val="005EB8"/>
                 </a:solidFill>
                 <a:latin typeface="Helvetica Neue"/>
               </a:rPr>
@@ -9957,7 +10340,7 @@
                 </a:solidFill>
                 <a:latin typeface="Helvetica Neue"/>
               </a:rPr>
-              <a:t>Long tail queries stay unmeasurable</a:t>
+              <a:t>Segment-level training signal for learning-to-rank</a:t>
             </a:r>
           </a:p>
           <a:p>
@@ -9969,7 +10352,7 @@
             <a:r>
               <a:rPr sz="2400" b="1">
                 <a:solidFill>
-                  <a:srgbClr val="B4311A"/>
+                  <a:srgbClr val="005EB8"/>
                 </a:solidFill>
                 <a:latin typeface="Helvetica Neue"/>
               </a:rPr>
@@ -9982,43 +10365,7 @@
                 </a:solidFill>
                 <a:latin typeface="Helvetica Neue"/>
               </a:rPr>
-              <a:t>This protects </a:t>
-            </a:r>
-            <a:r>
-              <a:rPr sz="2200" b="0">
-                <a:solidFill>
-                  <a:srgbClr val="141B2D"/>
-                </a:solidFill>
-                <a:latin typeface="Consolas"/>
-              </a:rPr>
-              <a:t>user_query</a:t>
-            </a:r>
-            <a:r>
-              <a:rPr sz="2400" b="0" i="0">
-                <a:solidFill>
-                  <a:srgbClr val="141B2D"/>
-                </a:solidFill>
-                <a:latin typeface="Helvetica Neue"/>
-              </a:rPr>
-              <a:t> but </a:t>
-            </a:r>
-            <a:r>
-              <a:rPr sz="2200" b="0">
-                <a:solidFill>
-                  <a:srgbClr val="141B2D"/>
-                </a:solidFill>
-                <a:latin typeface="Consolas"/>
-              </a:rPr>
-              <a:t>ubi_events</a:t>
-            </a:r>
-            <a:r>
-              <a:rPr sz="2400" b="0" i="0">
-                <a:solidFill>
-                  <a:srgbClr val="141B2D"/>
-                </a:solidFill>
-                <a:latin typeface="Helvetica Neue"/>
-              </a:rPr>
-              <a:t> still holds clicks and ids in the clear</a:t>
+              <a:t>What they cannot do is show you one user's session</a:t>
             </a:r>
           </a:p>
         </p:txBody>
@@ -10113,7 +10460,7 @@
                 </a:solidFill>
                 <a:latin typeface="Helvetica Neue"/>
               </a:rPr>
-              <a:t>Takeaways</a:t>
+              <a:t>The limitations</a:t>
             </a:r>
           </a:p>
         </p:txBody>
@@ -10133,7 +10480,7 @@
             <a:avLst/>
           </a:prstGeom>
           <a:solidFill>
-            <a:srgbClr val="005EB8"/>
+            <a:srgbClr val="B4311A"/>
           </a:solidFill>
           <a:ln>
             <a:noFill/>
@@ -10192,7 +10539,7 @@
             <a:r>
               <a:rPr sz="2400" b="1">
                 <a:solidFill>
-                  <a:srgbClr val="005EB8"/>
+                  <a:srgbClr val="B4311A"/>
                 </a:solidFill>
                 <a:latin typeface="Helvetica Neue"/>
               </a:rPr>
@@ -10205,7 +10552,7 @@
                 </a:solidFill>
                 <a:latin typeface="Helvetica Neue"/>
               </a:rPr>
-              <a:t>Storing embeddings instead of text is not privacy</a:t>
+              <a:t>The category leaks and that is worse for healthcare than furniture</a:t>
             </a:r>
           </a:p>
           <a:p>
@@ -10217,7 +10564,7 @@
             <a:r>
               <a:rPr sz="2400" b="1">
                 <a:solidFill>
-                  <a:srgbClr val="005EB8"/>
+                  <a:srgbClr val="B4311A"/>
                 </a:solidFill>
                 <a:latin typeface="Helvetica Neue"/>
               </a:rPr>
@@ -10230,7 +10577,7 @@
                 </a:solidFill>
                 <a:latin typeface="Helvetica Neue"/>
               </a:rPr>
-              <a:t>Keeping sensitive data out of the index beats redacting it later</a:t>
+              <a:t>Epsilon values don't transfer between indexes</a:t>
             </a:r>
           </a:p>
           <a:p>
@@ -10242,7 +10589,7 @@
             <a:r>
               <a:rPr sz="2400" b="1">
                 <a:solidFill>
-                  <a:srgbClr val="005EB8"/>
+                  <a:srgbClr val="B4311A"/>
                 </a:solidFill>
                 <a:latin typeface="Helvetica Neue"/>
               </a:rPr>
@@ -10255,7 +10602,7 @@
                 </a:solidFill>
                 <a:latin typeface="Helvetica Neue"/>
               </a:rPr>
-              <a:t>Verify the mechanism by testing it, not by trusting it</a:t>
+              <a:t>Long tail queries stay unmeasurable</a:t>
             </a:r>
           </a:p>
           <a:p>
@@ -10267,7 +10614,7 @@
             <a:r>
               <a:rPr sz="2400" b="1">
                 <a:solidFill>
-                  <a:srgbClr val="005EB8"/>
+                  <a:srgbClr val="B4311A"/>
                 </a:solidFill>
                 <a:latin typeface="Helvetica Neue"/>
               </a:rPr>
@@ -10276,11 +10623,47 @@
             <a:r>
               <a:rPr sz="2400" b="0" i="0">
                 <a:solidFill>
-                  <a:srgbClr val="005EB8"/>
-                </a:solidFill>
-                <a:latin typeface="Helvetica Neue"/>
-              </a:rPr>
-              <a:t>You trade individual resolution for population accuracy but that's what relevance tuning needs</a:t>
+                  <a:srgbClr val="141B2D"/>
+                </a:solidFill>
+                <a:latin typeface="Helvetica Neue"/>
+              </a:rPr>
+              <a:t>This protects </a:t>
+            </a:r>
+            <a:r>
+              <a:rPr sz="2200" b="0">
+                <a:solidFill>
+                  <a:srgbClr val="141B2D"/>
+                </a:solidFill>
+                <a:latin typeface="Consolas"/>
+              </a:rPr>
+              <a:t>user_query</a:t>
+            </a:r>
+            <a:r>
+              <a:rPr sz="2400" b="0" i="0">
+                <a:solidFill>
+                  <a:srgbClr val="141B2D"/>
+                </a:solidFill>
+                <a:latin typeface="Helvetica Neue"/>
+              </a:rPr>
+              <a:t> but </a:t>
+            </a:r>
+            <a:r>
+              <a:rPr sz="2200" b="0">
+                <a:solidFill>
+                  <a:srgbClr val="141B2D"/>
+                </a:solidFill>
+                <a:latin typeface="Consolas"/>
+              </a:rPr>
+              <a:t>ubi_events</a:t>
+            </a:r>
+            <a:r>
+              <a:rPr sz="2400" b="0" i="0">
+                <a:solidFill>
+                  <a:srgbClr val="141B2D"/>
+                </a:solidFill>
+                <a:latin typeface="Helvetica Neue"/>
+              </a:rPr>
+              <a:t> still holds clicks and ids in the clear</a:t>
             </a:r>
           </a:p>
         </p:txBody>
@@ -10334,7 +10717,7 @@
     <p:bg>
       <p:bgPr>
         <a:solidFill>
-          <a:srgbClr val="0E1A2F"/>
+          <a:srgbClr val="FFFFFF"/>
         </a:solidFill>
         <a:effectLst/>
       </p:bgPr>
@@ -10354,8 +10737,8 @@
         </p:nvSpPr>
         <p:spPr>
           <a:xfrm>
-            <a:off x="822960" y="2103120"/>
-            <a:ext cx="10515600" cy="2377440"/>
+            <a:off x="822960" y="640080"/>
+            <a:ext cx="10515600" cy="960120"/>
           </a:xfrm>
           <a:prstGeom prst="rect">
             <a:avLst/>
@@ -10369,115 +10752,33 @@
           <a:lstStyle/>
           <a:p>
             <a:r>
-              <a:rPr sz="4800" b="1">
-                <a:solidFill>
-                  <a:srgbClr val="FFFFFF"/>
-                </a:solidFill>
-                <a:latin typeface="Helvetica Neue"/>
-              </a:rPr>
-              <a:t>Questions</a:t>
-            </a:r>
-          </a:p>
-          <a:p>
-            <a:pPr>
-              <a:spcBef>
-                <a:spcPts val="1400"/>
-              </a:spcBef>
-            </a:pPr>
-            <a:r>
-              <a:rPr sz="2600" b="0">
-                <a:solidFill>
-                  <a:srgbClr val="8EB8E8"/>
-                </a:solidFill>
-                <a:latin typeface="Helvetica Neue"/>
-              </a:rPr>
-              <a:t>github.com/jzonthemtn/ldp-for-search</a:t>
-            </a:r>
-          </a:p>
-        </p:txBody>
-      </p:sp>
-      <p:sp>
-        <p:nvSpPr>
-          <p:cNvPr id="3" name="TextBox 2"/>
-          <p:cNvSpPr txBox="1"/>
-          <p:nvPr/>
-        </p:nvSpPr>
-        <p:spPr>
-          <a:xfrm>
-            <a:off x="822960" y="5532120"/>
-            <a:ext cx="10515600" cy="914400"/>
-          </a:xfrm>
-          <a:prstGeom prst="rect">
-            <a:avLst/>
-          </a:prstGeom>
-          <a:noFill/>
-        </p:spPr>
-        <p:txBody>
-          <a:bodyPr wrap="square">
-            <a:spAutoFit/>
-          </a:bodyPr>
-          <a:lstStyle/>
-          <a:p>
-            <a:r>
-              <a:rPr sz="1800" b="1">
-                <a:solidFill>
-                  <a:srgbClr val="C5CFE0"/>
-                </a:solidFill>
-                <a:latin typeface="Helvetica Neue"/>
-              </a:rPr>
-              <a:t>Jeff Zemerick</a:t>
-            </a:r>
-          </a:p>
-          <a:p>
-            <a:pPr>
-              <a:spcBef>
-                <a:spcPts val="400"/>
-              </a:spcBef>
-            </a:pPr>
-            <a:r>
-              <a:rPr sz="1500" b="0">
-                <a:solidFill>
-                  <a:srgbClr val="7C889E"/>
-                </a:solidFill>
-                <a:latin typeface="Helvetica Neue"/>
-              </a:rPr>
-              <a:t>OpenSearchCon NA</a:t>
-            </a:r>
-          </a:p>
-          <a:p>
-            <a:pPr>
-              <a:spcBef>
-                <a:spcPts val="100"/>
-              </a:spcBef>
-            </a:pPr>
-            <a:r>
-              <a:rPr sz="1500" b="0">
-                <a:solidFill>
-                  <a:srgbClr val="7C889E"/>
-                </a:solidFill>
-                <a:latin typeface="Helvetica Neue"/>
-              </a:rPr>
-              <a:t>September 24, 2026</a:t>
-            </a:r>
-          </a:p>
-        </p:txBody>
-      </p:sp>
-      <p:sp>
-        <p:nvSpPr>
-          <p:cNvPr id="4" name="Rectangle 3"/>
+              <a:rPr sz="3400" b="1">
+                <a:solidFill>
+                  <a:srgbClr val="141B2D"/>
+                </a:solidFill>
+                <a:latin typeface="Helvetica Neue"/>
+              </a:rPr>
+              <a:t>Takeaways</a:t>
+            </a:r>
+          </a:p>
+        </p:txBody>
+      </p:sp>
+      <p:sp>
+        <p:nvSpPr>
+          <p:cNvPr id="3" name="Rectangle 2"/>
           <p:cNvSpPr/>
           <p:nvPr/>
         </p:nvSpPr>
         <p:spPr>
           <a:xfrm>
-            <a:off x="8771839" y="1975104"/>
-            <a:ext cx="2724912" cy="2724912"/>
+            <a:off x="822960" y="1276603"/>
+            <a:ext cx="1463040" cy="50800"/>
           </a:xfrm>
           <a:prstGeom prst="rect">
             <a:avLst/>
           </a:prstGeom>
           <a:solidFill>
-            <a:srgbClr val="FFFFFF"/>
+            <a:srgbClr val="005EB8"/>
           </a:solidFill>
           <a:ln>
             <a:noFill/>
@@ -10506,40 +10807,16 @@
           </a:p>
         </p:txBody>
       </p:sp>
-      <p:pic>
-        <p:nvPicPr>
-          <p:cNvPr id="5" name="Picture 4" descr="leveraging-ldp-for-high-trust-opensearch-ubi_zemerick_1212636_feedback-code.png"/>
-          <p:cNvPicPr>
-            <a:picLocks noChangeAspect="1"/>
-          </p:cNvPicPr>
-          <p:nvPr/>
-        </p:nvPicPr>
-        <p:blipFill>
-          <a:blip r:embed="rId2"/>
-          <a:stretch>
-            <a:fillRect/>
-          </a:stretch>
-        </p:blipFill>
-        <p:spPr>
-          <a:xfrm>
-            <a:off x="8899855" y="2103120"/>
-            <a:ext cx="2468880" cy="2468880"/>
-          </a:xfrm>
-          <a:prstGeom prst="rect">
-            <a:avLst/>
-          </a:prstGeom>
-        </p:spPr>
-      </p:pic>
-      <p:sp>
-        <p:nvSpPr>
-          <p:cNvPr id="6" name="TextBox 5"/>
+      <p:sp>
+        <p:nvSpPr>
+          <p:cNvPr id="4" name="TextBox 3"/>
           <p:cNvSpPr txBox="1"/>
           <p:nvPr/>
         </p:nvSpPr>
         <p:spPr>
           <a:xfrm>
-            <a:off x="8771839" y="4809744"/>
-            <a:ext cx="2724912" cy="365760"/>
+            <a:off x="822960" y="2057400"/>
+            <a:ext cx="10515600" cy="4023360"/>
           </a:xfrm>
           <a:prstGeom prst="rect">
             <a:avLst/>
@@ -10552,22 +10829,110 @@
           </a:bodyPr>
           <a:lstStyle/>
           <a:p>
-            <a:pPr algn="ctr"/>
-            <a:r>
-              <a:rPr sz="1400" b="0">
-                <a:solidFill>
-                  <a:srgbClr val="8EB8E8"/>
-                </a:solidFill>
-                <a:latin typeface="Helvetica Neue"/>
-              </a:rPr>
-              <a:t>Session feedback</a:t>
-            </a:r>
-          </a:p>
-        </p:txBody>
-      </p:sp>
-      <p:sp>
-        <p:nvSpPr>
-          <p:cNvPr id="7" name="TextBox 6"/>
+            <a:pPr marL="342900" indent="-342900">
+              <a:spcAft>
+                <a:spcPts val="2000"/>
+              </a:spcAft>
+            </a:pPr>
+            <a:r>
+              <a:rPr sz="2400" b="1">
+                <a:solidFill>
+                  <a:srgbClr val="005EB8"/>
+                </a:solidFill>
+                <a:latin typeface="Helvetica Neue"/>
+              </a:rPr>
+              <a:t>-   </a:t>
+            </a:r>
+            <a:r>
+              <a:rPr sz="2400" b="0" i="0">
+                <a:solidFill>
+                  <a:srgbClr val="141B2D"/>
+                </a:solidFill>
+                <a:latin typeface="Helvetica Neue"/>
+              </a:rPr>
+              <a:t>Storing embeddings instead of text is not privacy</a:t>
+            </a:r>
+          </a:p>
+          <a:p>
+            <a:pPr marL="342900" indent="-342900">
+              <a:spcAft>
+                <a:spcPts val="2000"/>
+              </a:spcAft>
+            </a:pPr>
+            <a:r>
+              <a:rPr sz="2400" b="1">
+                <a:solidFill>
+                  <a:srgbClr val="005EB8"/>
+                </a:solidFill>
+                <a:latin typeface="Helvetica Neue"/>
+              </a:rPr>
+              <a:t>-   </a:t>
+            </a:r>
+            <a:r>
+              <a:rPr sz="2400" b="0" i="0">
+                <a:solidFill>
+                  <a:srgbClr val="141B2D"/>
+                </a:solidFill>
+                <a:latin typeface="Helvetica Neue"/>
+              </a:rPr>
+              <a:t>Keeping sensitive data out of the index beats redacting it later</a:t>
+            </a:r>
+          </a:p>
+          <a:p>
+            <a:pPr marL="342900" indent="-342900">
+              <a:spcAft>
+                <a:spcPts val="2000"/>
+              </a:spcAft>
+            </a:pPr>
+            <a:r>
+              <a:rPr sz="2400" b="1">
+                <a:solidFill>
+                  <a:srgbClr val="005EB8"/>
+                </a:solidFill>
+                <a:latin typeface="Helvetica Neue"/>
+              </a:rPr>
+              <a:t>-   </a:t>
+            </a:r>
+            <a:r>
+              <a:rPr sz="2400" b="0" i="0">
+                <a:solidFill>
+                  <a:srgbClr val="141B2D"/>
+                </a:solidFill>
+                <a:latin typeface="Helvetica Neue"/>
+              </a:rPr>
+              <a:t>Verify the mechanism by testing it, not by trusting it</a:t>
+            </a:r>
+          </a:p>
+          <a:p>
+            <a:pPr marL="342900" indent="-342900">
+              <a:spcAft>
+                <a:spcPts val="2000"/>
+              </a:spcAft>
+            </a:pPr>
+            <a:r>
+              <a:rPr sz="2400" b="1">
+                <a:solidFill>
+                  <a:srgbClr val="005EB8"/>
+                </a:solidFill>
+                <a:latin typeface="Helvetica Neue"/>
+              </a:rPr>
+              <a:t>-   </a:t>
+            </a:r>
+            <a:r>
+              <a:rPr sz="2400" b="0" i="0">
+                <a:solidFill>
+                  <a:srgbClr val="005EB8"/>
+                </a:solidFill>
+                <a:latin typeface="Helvetica Neue"/>
+              </a:rPr>
+              <a:t>You trade individual resolution for population accuracy but that's what relevance tuning needs</a:t>
+            </a:r>
+          </a:p>
+        </p:txBody>
+      </p:sp>
+      <p:sp>
+        <p:nvSpPr>
+          <p:cNvPr id="5" name="TextBox 4"/>
           <p:cNvSpPr txBox="1"/>
           <p:nvPr/>
         </p:nvSpPr>
@@ -10591,7 +10956,7 @@
             <a:r>
               <a:rPr sz="1300" b="0">
                 <a:solidFill>
-                  <a:srgbClr val="6E7C93"/>
+                  <a:srgbClr val="5A647A"/>
                 </a:solidFill>
                 <a:latin typeface="Helvetica Neue"/>
               </a:rPr>
@@ -10719,6 +11084,286 @@
 </p:sld>
 </file>
 
+<file path=ppt/slides/slide30.xml><?xml version="1.0" encoding="utf-8"?>
+<p:sld xmlns:a="http://schemas.openxmlformats.org/drawingml/2006/main" xmlns:p="http://schemas.openxmlformats.org/presentationml/2006/main" xmlns:r="http://schemas.openxmlformats.org/officeDocument/2006/relationships">
+  <p:cSld>
+    <p:bg>
+      <p:bgPr>
+        <a:solidFill>
+          <a:srgbClr val="0E1A2F"/>
+        </a:solidFill>
+        <a:effectLst/>
+      </p:bgPr>
+    </p:bg>
+    <p:spTree>
+      <p:nvGrpSpPr>
+        <p:cNvPr id="1" name=""/>
+        <p:cNvGrpSpPr/>
+        <p:nvPr/>
+      </p:nvGrpSpPr>
+      <p:grpSpPr/>
+      <p:sp>
+        <p:nvSpPr>
+          <p:cNvPr id="2" name="TextBox 1"/>
+          <p:cNvSpPr txBox="1"/>
+          <p:nvPr/>
+        </p:nvSpPr>
+        <p:spPr>
+          <a:xfrm>
+            <a:off x="822960" y="2103120"/>
+            <a:ext cx="10515600" cy="2377440"/>
+          </a:xfrm>
+          <a:prstGeom prst="rect">
+            <a:avLst/>
+          </a:prstGeom>
+          <a:noFill/>
+        </p:spPr>
+        <p:txBody>
+          <a:bodyPr wrap="square">
+            <a:spAutoFit/>
+          </a:bodyPr>
+          <a:lstStyle/>
+          <a:p>
+            <a:r>
+              <a:rPr sz="4800" b="1">
+                <a:solidFill>
+                  <a:srgbClr val="FFFFFF"/>
+                </a:solidFill>
+                <a:latin typeface="Helvetica Neue"/>
+              </a:rPr>
+              <a:t>Questions</a:t>
+            </a:r>
+          </a:p>
+          <a:p>
+            <a:pPr>
+              <a:spcBef>
+                <a:spcPts val="1400"/>
+              </a:spcBef>
+            </a:pPr>
+            <a:r>
+              <a:rPr sz="2600" b="0">
+                <a:solidFill>
+                  <a:srgbClr val="8EB8E8"/>
+                </a:solidFill>
+                <a:latin typeface="Helvetica Neue"/>
+              </a:rPr>
+              <a:t>github.com/jzonthemtn/ldp-for-search</a:t>
+            </a:r>
+          </a:p>
+        </p:txBody>
+      </p:sp>
+      <p:sp>
+        <p:nvSpPr>
+          <p:cNvPr id="3" name="TextBox 2"/>
+          <p:cNvSpPr txBox="1"/>
+          <p:nvPr/>
+        </p:nvSpPr>
+        <p:spPr>
+          <a:xfrm>
+            <a:off x="822960" y="5532120"/>
+            <a:ext cx="10515600" cy="914400"/>
+          </a:xfrm>
+          <a:prstGeom prst="rect">
+            <a:avLst/>
+          </a:prstGeom>
+          <a:noFill/>
+        </p:spPr>
+        <p:txBody>
+          <a:bodyPr wrap="square">
+            <a:spAutoFit/>
+          </a:bodyPr>
+          <a:lstStyle/>
+          <a:p>
+            <a:r>
+              <a:rPr sz="1800" b="1">
+                <a:solidFill>
+                  <a:srgbClr val="C5CFE0"/>
+                </a:solidFill>
+                <a:latin typeface="Helvetica Neue"/>
+              </a:rPr>
+              <a:t>Jeff Zemerick</a:t>
+            </a:r>
+          </a:p>
+          <a:p>
+            <a:pPr>
+              <a:spcBef>
+                <a:spcPts val="400"/>
+              </a:spcBef>
+            </a:pPr>
+            <a:r>
+              <a:rPr sz="1500" b="0">
+                <a:solidFill>
+                  <a:srgbClr val="7C889E"/>
+                </a:solidFill>
+                <a:latin typeface="Helvetica Neue"/>
+              </a:rPr>
+              <a:t>OpenSearchCon NA</a:t>
+            </a:r>
+          </a:p>
+          <a:p>
+            <a:pPr>
+              <a:spcBef>
+                <a:spcPts val="100"/>
+              </a:spcBef>
+            </a:pPr>
+            <a:r>
+              <a:rPr sz="1500" b="0">
+                <a:solidFill>
+                  <a:srgbClr val="7C889E"/>
+                </a:solidFill>
+                <a:latin typeface="Helvetica Neue"/>
+              </a:rPr>
+              <a:t>September 24, 2026</a:t>
+            </a:r>
+          </a:p>
+        </p:txBody>
+      </p:sp>
+      <p:sp>
+        <p:nvSpPr>
+          <p:cNvPr id="4" name="Rectangle 3"/>
+          <p:cNvSpPr/>
+          <p:nvPr/>
+        </p:nvSpPr>
+        <p:spPr>
+          <a:xfrm>
+            <a:off x="8771839" y="1975104"/>
+            <a:ext cx="2724912" cy="2724912"/>
+          </a:xfrm>
+          <a:prstGeom prst="rect">
+            <a:avLst/>
+          </a:prstGeom>
+          <a:solidFill>
+            <a:srgbClr val="FFFFFF"/>
+          </a:solidFill>
+          <a:ln>
+            <a:noFill/>
+          </a:ln>
+          <a:effectLst/>
+        </p:spPr>
+        <p:style>
+          <a:lnRef idx="1">
+            <a:schemeClr val="accent1"/>
+          </a:lnRef>
+          <a:fillRef idx="3">
+            <a:schemeClr val="accent1"/>
+          </a:fillRef>
+          <a:effectRef idx="2">
+            <a:schemeClr val="accent1"/>
+          </a:effectRef>
+          <a:fontRef idx="minor">
+            <a:schemeClr val="lt1"/>
+          </a:fontRef>
+        </p:style>
+        <p:txBody>
+          <a:bodyPr rtlCol="0" anchor="ctr"/>
+          <a:lstStyle/>
+          <a:p>
+            <a:pPr algn="ctr"/>
+          </a:p>
+        </p:txBody>
+      </p:sp>
+      <p:pic>
+        <p:nvPicPr>
+          <p:cNvPr id="5" name="Picture 4" descr="leveraging-ldp-for-high-trust-opensearch-ubi_zemerick_1212636_feedback-code.png"/>
+          <p:cNvPicPr>
+            <a:picLocks noChangeAspect="1"/>
+          </p:cNvPicPr>
+          <p:nvPr/>
+        </p:nvPicPr>
+        <p:blipFill>
+          <a:blip r:embed="rId2"/>
+          <a:stretch>
+            <a:fillRect/>
+          </a:stretch>
+        </p:blipFill>
+        <p:spPr>
+          <a:xfrm>
+            <a:off x="8899855" y="2103120"/>
+            <a:ext cx="2468880" cy="2468880"/>
+          </a:xfrm>
+          <a:prstGeom prst="rect">
+            <a:avLst/>
+          </a:prstGeom>
+        </p:spPr>
+      </p:pic>
+      <p:sp>
+        <p:nvSpPr>
+          <p:cNvPr id="6" name="TextBox 5"/>
+          <p:cNvSpPr txBox="1"/>
+          <p:nvPr/>
+        </p:nvSpPr>
+        <p:spPr>
+          <a:xfrm>
+            <a:off x="8771839" y="4809744"/>
+            <a:ext cx="2724912" cy="365760"/>
+          </a:xfrm>
+          <a:prstGeom prst="rect">
+            <a:avLst/>
+          </a:prstGeom>
+          <a:noFill/>
+        </p:spPr>
+        <p:txBody>
+          <a:bodyPr wrap="square">
+            <a:spAutoFit/>
+          </a:bodyPr>
+          <a:lstStyle/>
+          <a:p>
+            <a:pPr algn="ctr"/>
+            <a:r>
+              <a:rPr sz="1400" b="0">
+                <a:solidFill>
+                  <a:srgbClr val="8EB8E8"/>
+                </a:solidFill>
+                <a:latin typeface="Helvetica Neue"/>
+              </a:rPr>
+              <a:t>Session feedback</a:t>
+            </a:r>
+          </a:p>
+        </p:txBody>
+      </p:sp>
+      <p:sp>
+        <p:nvSpPr>
+          <p:cNvPr id="7" name="TextBox 6"/>
+          <p:cNvSpPr txBox="1"/>
+          <p:nvPr/>
+        </p:nvSpPr>
+        <p:spPr>
+          <a:xfrm>
+            <a:off x="10405872" y="6144768"/>
+            <a:ext cx="960120" cy="411480"/>
+          </a:xfrm>
+          <a:prstGeom prst="rect">
+            <a:avLst/>
+          </a:prstGeom>
+          <a:noFill/>
+        </p:spPr>
+        <p:txBody>
+          <a:bodyPr wrap="square">
+            <a:spAutoFit/>
+          </a:bodyPr>
+          <a:lstStyle/>
+          <a:p>
+            <a:pPr algn="r"/>
+            <a:r>
+              <a:rPr sz="1300" b="0">
+                <a:solidFill>
+                  <a:srgbClr val="6E7C93"/>
+                </a:solidFill>
+                <a:latin typeface="Helvetica Neue"/>
+              </a:rPr>
+              <a:t>30</a:t>
+            </a:r>
+          </a:p>
+        </p:txBody>
+      </p:sp>
+    </p:spTree>
+  </p:cSld>
+  <p:clrMapOvr>
+    <a:masterClrMapping/>
+  </p:clrMapOvr>
+</p:sld>
+</file>
+
 <file path=ppt/slides/slide4.xml><?xml version="1.0" encoding="utf-8"?>
 <p:sld xmlns:a="http://schemas.openxmlformats.org/drawingml/2006/main" xmlns:p="http://schemas.openxmlformats.org/presentationml/2006/main" xmlns:r="http://schemas.openxmlformats.org/officeDocument/2006/relationships">
   <p:cSld>
@@ -10933,7 +11578,7 @@
                 </a:solidFill>
                 <a:latin typeface="Helvetica Neue"/>
               </a:rPr>
-              <a:t>Without it you are guessing, and shipping guesses to production</a:t>
+              <a:t>Without measurement you are guessing</a:t>
             </a:r>
           </a:p>
         </p:txBody>
@@ -11264,7 +11909,7 @@
                 </a:solidFill>
                 <a:latin typeface="Helvetica Neue"/>
               </a:rPr>
-              <a:t>This is the raw material relevance tuning runs on</a:t>
+              <a:t>This is what we use to tune search</a:t>
             </a:r>
           </a:p>
           <a:p>
@@ -11389,7 +12034,7 @@
         <p:spPr>
           <a:xfrm>
             <a:off x="822960" y="640080"/>
-            <a:ext cx="10515600" cy="960120"/>
+            <a:ext cx="10515600" cy="1463040"/>
           </a:xfrm>
           <a:prstGeom prst="rect">
             <a:avLst/>
@@ -11409,7 +12054,7 @@
                 </a:solidFill>
                 <a:latin typeface="Helvetica Neue"/>
               </a:rPr>
-              <a:t>Legal rules won't let us see the user queries</a:t>
+              <a:t>But what about when we don't know the user queries?</a:t>
             </a:r>
           </a:p>
         </p:txBody>
@@ -11422,7 +12067,7 @@
         </p:nvSpPr>
         <p:spPr>
           <a:xfrm>
-            <a:off x="822960" y="1276603"/>
+            <a:off x="822960" y="1803399"/>
             <a:ext cx="1463040" cy="50800"/>
           </a:xfrm>
           <a:prstGeom prst="rect">
@@ -11466,8 +12111,8 @@
         </p:nvSpPr>
         <p:spPr>
           <a:xfrm>
-            <a:off x="822960" y="2057400"/>
-            <a:ext cx="10515600" cy="4023360"/>
+            <a:off x="822960" y="2560320"/>
+            <a:ext cx="10515600" cy="3520440"/>
           </a:xfrm>
           <a:prstGeom prst="rect">
             <a:avLst/>
@@ -12349,7 +12994,7 @@
                 </a:solidFill>
                 <a:latin typeface="Helvetica Neue"/>
               </a:rPr>
-              <a:t>Vector inversion recovers the intent</a:t>
+              <a:t>Intent can be recovered</a:t>
             </a:r>
           </a:p>
         </p:txBody>

--- a/ldp_for_search_slides.pptx
+++ b/ldp_for_search_slides.pptx
@@ -8585,31 +8585,6 @@
                 </a:solidFill>
                 <a:latin typeface="Helvetica Neue"/>
               </a:rPr>
-              <a:t>PII redaction tooling at Philterd</a:t>
-            </a:r>
-          </a:p>
-          <a:p>
-            <a:pPr marL="342900" indent="-342900">
-              <a:spcAft>
-                <a:spcPts val="2000"/>
-              </a:spcAft>
-            </a:pPr>
-            <a:r>
-              <a:rPr sz="2400" b="1">
-                <a:solidFill>
-                  <a:srgbClr val="005EB8"/>
-                </a:solidFill>
-                <a:latin typeface="Helvetica Neue"/>
-              </a:rPr>
-              <a:t>-   </a:t>
-            </a:r>
-            <a:r>
-              <a:rPr sz="2400" b="0" i="0">
-                <a:solidFill>
-                  <a:srgbClr val="141B2D"/>
-                </a:solidFill>
-                <a:latin typeface="Helvetica Neue"/>
-              </a:rPr>
               <a:t>Works in search, NLP, and privacy</a:t>
             </a:r>
           </a:p>
@@ -11528,32 +11503,7 @@
                 </a:solidFill>
                 <a:latin typeface="Helvetica Neue"/>
               </a:rPr>
-              <a:t>Which queries fire, which results get clicked, at which position</a:t>
-            </a:r>
-          </a:p>
-          <a:p>
-            <a:pPr marL="342900" indent="-342900">
-              <a:spcAft>
-                <a:spcPts val="1400"/>
-              </a:spcAft>
-            </a:pPr>
-            <a:r>
-              <a:rPr sz="2100" b="1">
-                <a:solidFill>
-                  <a:srgbClr val="005EB8"/>
-                </a:solidFill>
-                <a:latin typeface="Helvetica Neue"/>
-              </a:rPr>
-              <a:t>-   </a:t>
-            </a:r>
-            <a:r>
-              <a:rPr sz="2100" b="0" i="0">
-                <a:solidFill>
-                  <a:srgbClr val="141B2D"/>
-                </a:solidFill>
-                <a:latin typeface="Helvetica Neue"/>
-              </a:rPr>
-              <a:t>Learning-to-rank trains on exactly this signal</a:t>
+              <a:t>What queries, what's clicked, and where</a:t>
             </a:r>
           </a:p>
           <a:p>

--- a/ldp_for_search_slides.pptx
+++ b/ldp_for_search_slides.pptx
@@ -11529,6 +11529,31 @@
                 <a:latin typeface="Helvetica Neue"/>
               </a:rPr>
               <a:t>Without measurement you are guessing</a:t>
+            </a:r>
+          </a:p>
+          <a:p>
+            <a:pPr marL="342900" indent="-342900">
+              <a:spcAft>
+                <a:spcPts val="1400"/>
+              </a:spcAft>
+            </a:pPr>
+            <a:r>
+              <a:rPr sz="2100" b="1">
+                <a:solidFill>
+                  <a:srgbClr val="005EB8"/>
+                </a:solidFill>
+                <a:latin typeface="Helvetica Neue"/>
+              </a:rPr>
+              <a:t>-   </a:t>
+            </a:r>
+            <a:r>
+              <a:rPr sz="2100" b="0" i="0">
+                <a:solidFill>
+                  <a:srgbClr val="141B2D"/>
+                </a:solidFill>
+                <a:latin typeface="Helvetica Neue"/>
+              </a:rPr>
+              <a:t>Learning-to-rank can't be trained on guesses</a:t>
             </a:r>
           </a:p>
         </p:txBody>

--- a/ldp_for_search_slides.pptx
+++ b/ldp_for_search_slides.pptx
@@ -35,6 +35,7 @@
     <p:sldId id="283" r:id="rId35"/>
     <p:sldId id="284" r:id="rId36"/>
     <p:sldId id="285" r:id="rId37"/>
+    <p:sldId id="286" r:id="rId38"/>
   </p:sldIdLst>
   <p:sldSz cx="12191695" cy="6858000" type="screen4x3"/>
   <p:notesSz cx="6858000" cy="9144000"/>
@@ -1931,7 +1932,7 @@
           <a:lstStyle/>
           <a:p>
             <a:r>
-              <a:t>Every one of these is a question someone will ask. Answering them first is cheaper than answering them under pressure. Also mention that a formal epsilon-DP claim needs sensitivity calibrated to the true coordinate range. Here the vectors are L2-normalized before PCA, so the whole 20-dimensional vector has norm 1, which makes sensitivity 1.0 per coordinate conservative rather than tight. That is the answer if someone asks how sensitivity was set. Two follow-ups come off that bullet. Asked how often epsilon needs re-tuning, say when you re-embed or refit PCA, because routine additions to a large index do not move the coordinate spread, and normalizing before PCA keeps sensitivity itself stable whatever the catalogue holds. Asked whether privacy decays over time, say yes but not through epsilon: one user's repeated queries compose, and an attacker who averages that one user's own noised draws recovers the intent, which is the asymmetry of the payoff turned around. Epsilon is a budget per release rather than a standing property, so the fix is rotating or dropping client_id and session_id, not a smaller epsilon. On the long tail, which someone will ask about: the workarounds are coarser segments and longer time windows, and both are the same trade at lower resolution, because they only raise n. The genuinely different answer is shuffle DP or secure aggregation, which buys far more utility at the same epsilon but changes the architecture rather than the parameter. Worth adding that tail relevance is usually improved by retrieval work rather than behavioural signal anyway. On the last bullet, be direct: this is scoped work, not a finished privacy story for all of UBI. The query text is covered. Clicks are counts rather than vectors and want randomized response, and client_id and session_id would need rotating or dropping. That is the honest answer to the linkability half of the problem raised in Part 1.</a:t>
+              <a:t>This expands the learning-to-rank bullet on the previous slide, and it is the one place to be careful, because it is a recipe rather than a result. Nothing in this talk trains a ranker. Say so if asked. What is measured is the inputs: clicks were never touched by the mechanism, and the segment centroid is accurate above roughly 2,300 users. The labels are therefore exactly what they are today. What moves is the key. You cannot read a query, so you cannot build judgment lists per query string, and you cannot recompute BM25 against words you do not have. You group by segment instead and use its centroid as the query representation, which suits an embedding ranker and suits a term-based feature set badly. Walk the example slowly, it is the whole slide: a few thousand people search for beds, every one of them privatizes on their own device, and the server averages what arrives into a centroid that is accurate but belongs to nobody. The clicks sitting next to it were never noised. That pair, the centroid and the clicks, is a training example. Beds is the cohort behind the convergence plot, so this is the same segment they have already seen measured. Name the category honestly: this is closer to intent-based ranking profiles than to per-query learning-to-rank, and it is coarser, because every query in a segment collapses to one key. If someone asks how much that costs, say it has not been measured and that the two losses separate: keying on segments instead of queries is a modelling choice you can evaluate on clean data with no privacy involved, while the noise itself costs almost nothing above 2,300 users, which is what the convergence plot showed. Everything inherits the segment constraint from earlier: head segments train, the long tail does not reach the user count.</a:t>
             </a:r>
           </a:p>
         </p:txBody>
@@ -2001,7 +2002,7 @@
           <a:lstStyle/>
           <a:p>
             <a:r>
-              <a:t>Four sentences. If someone remembers only one, it should be the last.</a:t>
+              <a:t>Every one of these is a question someone will ask. Answering them first is cheaper than answering them under pressure. Also mention that a formal epsilon-DP claim needs sensitivity calibrated to the true coordinate range. Here the vectors are L2-normalized before PCA, so the whole 20-dimensional vector has norm 1, which makes sensitivity 1.0 per coordinate conservative rather than tight. That is the answer if someone asks how sensitivity was set. Two follow-ups come off that bullet. Asked how often epsilon needs re-tuning, say when you re-embed or refit PCA, because routine additions to a large index do not move the coordinate spread, and normalizing before PCA keeps sensitivity itself stable whatever the catalogue holds. Asked whether privacy decays over time, say yes but not through epsilon: one user's repeated queries compose, and an attacker who averages that one user's own noised draws recovers the intent, which is the asymmetry of the payoff turned around. Epsilon is a budget per release rather than a standing property, so the fix is rotating or dropping client_id and session_id, not a smaller epsilon. On the long tail, which someone will ask about: the workarounds are coarser segments and longer time windows, and both are the same trade at lower resolution, because they only raise n. The genuinely different answer is shuffle DP or secure aggregation, which buys far more utility at the same epsilon but changes the architecture rather than the parameter. Worth adding that tail relevance is usually improved by retrieval work rather than behavioural signal anyway. On the last bullet, be direct: this is scoped work, not a finished privacy story for all of UBI. The query text is covered. Clicks are counts rather than vectors and want randomized response, and client_id and session_id would need rotating or dropping. That is the honest answer to the linkability half of the problem raised in Part 1.</a:t>
             </a:r>
           </a:p>
         </p:txBody>
@@ -2097,6 +2098,76 @@
 </file>
 
 <file path=ppt/notesSlides/notesSlide30.xml><?xml version="1.0" encoding="utf-8"?>
+<p:notes xmlns:a="http://schemas.openxmlformats.org/drawingml/2006/main" xmlns:p="http://schemas.openxmlformats.org/presentationml/2006/main" xmlns:r="http://schemas.openxmlformats.org/officeDocument/2006/relationships">
+  <p:cSld>
+    <p:spTree>
+      <p:nvGrpSpPr>
+        <p:cNvPr id="1" name=""/>
+        <p:cNvGrpSpPr/>
+        <p:nvPr/>
+      </p:nvGrpSpPr>
+      <p:grpSpPr>
+        <a:xfrm>
+          <a:off x="0" y="0"/>
+          <a:ext cx="0" cy="0"/>
+          <a:chOff x="0" y="0"/>
+          <a:chExt cx="0" cy="0"/>
+        </a:xfrm>
+      </p:grpSpPr>
+      <p:sp>
+        <p:nvSpPr>
+          <p:cNvPr id="2" name="Slide Image Placeholder 1"/>
+          <p:cNvSpPr>
+            <a:spLocks noGrp="1"/>
+          </p:cNvSpPr>
+          <p:nvPr>
+            <p:ph type="sldImg" idx="2"/>
+          </p:nvPr>
+        </p:nvSpPr>
+        <p:spPr/>
+      </p:sp>
+      <p:sp>
+        <p:nvSpPr>
+          <p:cNvPr id="3" name="Notes Placeholder 2"/>
+          <p:cNvSpPr>
+            <a:spLocks noGrp="1"/>
+          </p:cNvSpPr>
+          <p:nvPr>
+            <p:ph type="body" idx="3" sz="quarter"/>
+          </p:nvPr>
+        </p:nvSpPr>
+        <p:spPr/>
+        <p:txBody>
+          <a:bodyPr/>
+          <a:lstStyle/>
+          <a:p>
+            <a:r>
+              <a:t>Four sentences. If someone remembers only one, it should be the last.</a:t>
+            </a:r>
+          </a:p>
+        </p:txBody>
+      </p:sp>
+      <p:sp>
+        <p:nvSpPr>
+          <p:cNvPr id="4" name="Slide Number Placeholder 3"/>
+          <p:cNvSpPr>
+            <a:spLocks noGrp="1"/>
+          </p:cNvSpPr>
+          <p:nvPr>
+            <p:ph type="sldNum" idx="5" sz="quarter"/>
+          </p:nvPr>
+        </p:nvSpPr>
+        <p:spPr/>
+      </p:sp>
+    </p:spTree>
+  </p:cSld>
+  <p:clrMapOvr>
+    <a:masterClrMapping/>
+  </p:clrMapOvr>
+</p:notes>
+</file>
+
+<file path=ppt/notesSlides/notesSlide31.xml><?xml version="1.0" encoding="utf-8"?>
 <p:notes xmlns:a="http://schemas.openxmlformats.org/drawingml/2006/main" xmlns:p="http://schemas.openxmlformats.org/presentationml/2006/main" xmlns:r="http://schemas.openxmlformats.org/officeDocument/2006/relationships">
   <p:cSld>
     <p:spTree>
@@ -10429,13 +10500,13 @@
           <a:lstStyle/>
           <a:p>
             <a:r>
-              <a:rPr sz="3400" b="1">
+              <a:rPr sz="3200" b="1">
                 <a:solidFill>
                   <a:srgbClr val="141B2D"/>
                 </a:solidFill>
                 <a:latin typeface="Helvetica Neue"/>
               </a:rPr>
-              <a:t>The limitations</a:t>
+              <a:t>Training learning-to-rank on noised queries</a:t>
             </a:r>
           </a:p>
         </p:txBody>
@@ -10448,14 +10519,14 @@
         </p:nvSpPr>
         <p:spPr>
           <a:xfrm>
-            <a:off x="822960" y="1276603"/>
+            <a:off x="822960" y="1245615"/>
             <a:ext cx="1463040" cy="50800"/>
           </a:xfrm>
           <a:prstGeom prst="rect">
             <a:avLst/>
           </a:prstGeom>
           <a:solidFill>
-            <a:srgbClr val="B4311A"/>
+            <a:srgbClr val="005EB8"/>
           </a:solidFill>
           <a:ln>
             <a:noFill/>
@@ -10492,8 +10563,8 @@
         </p:nvSpPr>
         <p:spPr>
           <a:xfrm>
-            <a:off x="822960" y="2057400"/>
-            <a:ext cx="10515600" cy="4023360"/>
+            <a:off x="822960" y="1691640"/>
+            <a:ext cx="10515600" cy="548640"/>
           </a:xfrm>
           <a:prstGeom prst="rect">
             <a:avLst/>
@@ -10506,146 +10577,387 @@
           </a:bodyPr>
           <a:lstStyle/>
           <a:p>
-            <a:pPr marL="342900" indent="-342900">
+            <a:r>
+              <a:rPr sz="2100" b="0">
+                <a:solidFill>
+                  <a:srgbClr val="5A647A"/>
+                </a:solidFill>
+                <a:latin typeface="Helvetica Neue"/>
+              </a:rPr>
+              <a:t>The labels were never protected, so what changes is what you key them on</a:t>
+            </a:r>
+          </a:p>
+        </p:txBody>
+      </p:sp>
+      <p:graphicFrame>
+        <p:nvGraphicFramePr>
+          <p:cNvPr id="5" name="Table 4"/>
+          <p:cNvGraphicFramePr>
+            <a:graphicFrameLocks noGrp="1"/>
+          </p:cNvGraphicFramePr>
+          <p:nvPr/>
+        </p:nvGraphicFramePr>
+        <p:xfrm>
+          <a:off x="1523847" y="2514600"/>
+          <a:ext cx="9144000" cy="2267712"/>
+        </p:xfrm>
+        <a:graphic>
+          <a:graphicData uri="http://schemas.openxmlformats.org/drawingml/2006/table">
+            <a:tbl>
+              <a:tblPr firstRow="1" bandRow="1">
+                <a:tableStyleId>{5C22544A-7EE6-4342-B048-85BDC9FD1C3A}</a:tableStyleId>
+              </a:tblPr>
+              <a:tblGrid>
+                <a:gridCol w="3048000"/>
+                <a:gridCol w="3048000"/>
+                <a:gridCol w="3048000"/>
+              </a:tblGrid>
+              <a:tr h="566928">
+                <a:tc>
+                  <a:txBody>
+                    <a:bodyPr/>
+                    <a:lstStyle/>
+                    <a:p>
+                      <a:pPr algn="l"/>
+                    </a:p>
+                  </a:txBody>
+                  <a:tcPr anchor="ctr">
+                    <a:solidFill>
+                      <a:srgbClr val="005EB8"/>
+                    </a:solidFill>
+                  </a:tcPr>
+                </a:tc>
+                <a:tc>
+                  <a:txBody>
+                    <a:bodyPr/>
+                    <a:lstStyle/>
+                    <a:p>
+                      <a:pPr algn="ctr"/>
+                      <a:r>
+                        <a:rPr sz="1800" b="1">
+                          <a:solidFill>
+                            <a:srgbClr val="FFFFFF"/>
+                          </a:solidFill>
+                          <a:latin typeface="Helvetica Neue"/>
+                        </a:rPr>
+                        <a:t>Classic LTR</a:t>
+                      </a:r>
+                    </a:p>
+                  </a:txBody>
+                  <a:tcPr anchor="ctr">
+                    <a:solidFill>
+                      <a:srgbClr val="005EB8"/>
+                    </a:solidFill>
+                  </a:tcPr>
+                </a:tc>
+                <a:tc>
+                  <a:txBody>
+                    <a:bodyPr/>
+                    <a:lstStyle/>
+                    <a:p>
+                      <a:pPr algn="ctr"/>
+                      <a:r>
+                        <a:rPr sz="1800" b="1">
+                          <a:solidFill>
+                            <a:srgbClr val="FFFFFF"/>
+                          </a:solidFill>
+                          <a:latin typeface="Helvetica Neue"/>
+                        </a:rPr>
+                        <a:t>Under LDP</a:t>
+                      </a:r>
+                    </a:p>
+                  </a:txBody>
+                  <a:tcPr anchor="ctr">
+                    <a:solidFill>
+                      <a:srgbClr val="005EB8"/>
+                    </a:solidFill>
+                  </a:tcPr>
+                </a:tc>
+              </a:tr>
+              <a:tr h="566928">
+                <a:tc>
+                  <a:txBody>
+                    <a:bodyPr/>
+                    <a:lstStyle/>
+                    <a:p>
+                      <a:pPr algn="l"/>
+                      <a:r>
+                        <a:rPr sz="1800" b="0">
+                          <a:solidFill>
+                            <a:srgbClr val="141B2D"/>
+                          </a:solidFill>
+                          <a:latin typeface="Helvetica Neue"/>
+                        </a:rPr>
+                        <a:t>Labels</a:t>
+                      </a:r>
+                    </a:p>
+                  </a:txBody>
+                  <a:tcPr anchor="ctr">
+                    <a:solidFill>
+                      <a:srgbClr val="F4F7FB"/>
+                    </a:solidFill>
+                  </a:tcPr>
+                </a:tc>
+                <a:tc>
+                  <a:txBody>
+                    <a:bodyPr/>
+                    <a:lstStyle/>
+                    <a:p>
+                      <a:pPr algn="ctr"/>
+                      <a:r>
+                        <a:rPr sz="1800" b="0">
+                          <a:solidFill>
+                            <a:srgbClr val="141B2D"/>
+                          </a:solidFill>
+                          <a:latin typeface="Helvetica Neue"/>
+                        </a:rPr>
+                        <a:t>Clicks</a:t>
+                      </a:r>
+                    </a:p>
+                  </a:txBody>
+                  <a:tcPr anchor="ctr">
+                    <a:solidFill>
+                      <a:srgbClr val="F4F7FB"/>
+                    </a:solidFill>
+                  </a:tcPr>
+                </a:tc>
+                <a:tc>
+                  <a:txBody>
+                    <a:bodyPr/>
+                    <a:lstStyle/>
+                    <a:p>
+                      <a:pPr algn="ctr"/>
+                      <a:r>
+                        <a:rPr sz="1800" b="0">
+                          <a:solidFill>
+                            <a:srgbClr val="141B2D"/>
+                          </a:solidFill>
+                          <a:latin typeface="Helvetica Neue"/>
+                        </a:rPr>
+                        <a:t>Clicks</a:t>
+                      </a:r>
+                    </a:p>
+                  </a:txBody>
+                  <a:tcPr anchor="ctr">
+                    <a:solidFill>
+                      <a:srgbClr val="F4F7FB"/>
+                    </a:solidFill>
+                  </a:tcPr>
+                </a:tc>
+              </a:tr>
+              <a:tr h="566928">
+                <a:tc>
+                  <a:txBody>
+                    <a:bodyPr/>
+                    <a:lstStyle/>
+                    <a:p>
+                      <a:pPr algn="l"/>
+                      <a:r>
+                        <a:rPr sz="1800" b="0">
+                          <a:solidFill>
+                            <a:srgbClr val="141B2D"/>
+                          </a:solidFill>
+                          <a:latin typeface="Helvetica Neue"/>
+                        </a:rPr>
+                        <a:t>Keyed on</a:t>
+                      </a:r>
+                    </a:p>
+                  </a:txBody>
+                  <a:tcPr anchor="ctr">
+                    <a:solidFill>
+                      <a:srgbClr val="FFFFFF"/>
+                    </a:solidFill>
+                  </a:tcPr>
+                </a:tc>
+                <a:tc>
+                  <a:txBody>
+                    <a:bodyPr/>
+                    <a:lstStyle/>
+                    <a:p>
+                      <a:pPr algn="ctr"/>
+                      <a:r>
+                        <a:rPr sz="1800" b="0">
+                          <a:solidFill>
+                            <a:srgbClr val="141B2D"/>
+                          </a:solidFill>
+                          <a:latin typeface="Helvetica Neue"/>
+                        </a:rPr>
+                        <a:t>The query</a:t>
+                      </a:r>
+                    </a:p>
+                  </a:txBody>
+                  <a:tcPr anchor="ctr">
+                    <a:solidFill>
+                      <a:srgbClr val="FFFFFF"/>
+                    </a:solidFill>
+                  </a:tcPr>
+                </a:tc>
+                <a:tc>
+                  <a:txBody>
+                    <a:bodyPr/>
+                    <a:lstStyle/>
+                    <a:p>
+                      <a:pPr algn="ctr"/>
+                      <a:r>
+                        <a:rPr sz="1800" b="0">
+                          <a:solidFill>
+                            <a:srgbClr val="141B2D"/>
+                          </a:solidFill>
+                          <a:latin typeface="Helvetica Neue"/>
+                        </a:rPr>
+                        <a:t>The segment</a:t>
+                      </a:r>
+                    </a:p>
+                  </a:txBody>
+                  <a:tcPr anchor="ctr">
+                    <a:solidFill>
+                      <a:srgbClr val="FFFFFF"/>
+                    </a:solidFill>
+                  </a:tcPr>
+                </a:tc>
+              </a:tr>
+              <a:tr h="566928">
+                <a:tc>
+                  <a:txBody>
+                    <a:bodyPr/>
+                    <a:lstStyle/>
+                    <a:p>
+                      <a:pPr algn="l"/>
+                      <a:r>
+                        <a:rPr sz="1800" b="0">
+                          <a:solidFill>
+                            <a:srgbClr val="141B2D"/>
+                          </a:solidFill>
+                          <a:latin typeface="Helvetica Neue"/>
+                        </a:rPr>
+                        <a:t>Query features</a:t>
+                      </a:r>
+                    </a:p>
+                  </a:txBody>
+                  <a:tcPr anchor="ctr">
+                    <a:solidFill>
+                      <a:srgbClr val="F4F7FB"/>
+                    </a:solidFill>
+                  </a:tcPr>
+                </a:tc>
+                <a:tc>
+                  <a:txBody>
+                    <a:bodyPr/>
+                    <a:lstStyle/>
+                    <a:p>
+                      <a:pPr algn="ctr"/>
+                      <a:r>
+                        <a:rPr sz="1800" b="0">
+                          <a:solidFill>
+                            <a:srgbClr val="141B2D"/>
+                          </a:solidFill>
+                          <a:latin typeface="Helvetica Neue"/>
+                        </a:rPr>
+                        <a:t>BM25 and term matches</a:t>
+                      </a:r>
+                    </a:p>
+                  </a:txBody>
+                  <a:tcPr anchor="ctr">
+                    <a:solidFill>
+                      <a:srgbClr val="F4F7FB"/>
+                    </a:solidFill>
+                  </a:tcPr>
+                </a:tc>
+                <a:tc>
+                  <a:txBody>
+                    <a:bodyPr/>
+                    <a:lstStyle/>
+                    <a:p>
+                      <a:pPr algn="ctr"/>
+                      <a:r>
+                        <a:rPr sz="1800" b="0">
+                          <a:solidFill>
+                            <a:srgbClr val="141B2D"/>
+                          </a:solidFill>
+                          <a:latin typeface="Helvetica Neue"/>
+                        </a:rPr>
+                        <a:t>The segment centroid</a:t>
+                      </a:r>
+                    </a:p>
+                  </a:txBody>
+                  <a:tcPr anchor="ctr">
+                    <a:solidFill>
+                      <a:srgbClr val="F4F7FB"/>
+                    </a:solidFill>
+                  </a:tcPr>
+                </a:tc>
+              </a:tr>
+            </a:tbl>
+          </a:graphicData>
+        </a:graphic>
+      </p:graphicFrame>
+      <p:sp>
+        <p:nvSpPr>
+          <p:cNvPr id="6" name="TextBox 5"/>
+          <p:cNvSpPr txBox="1"/>
+          <p:nvPr/>
+        </p:nvSpPr>
+        <p:spPr>
+          <a:xfrm>
+            <a:off x="1508760" y="5129784"/>
+            <a:ext cx="9144000" cy="1737360"/>
+          </a:xfrm>
+          <a:prstGeom prst="rect">
+            <a:avLst/>
+          </a:prstGeom>
+          <a:noFill/>
+        </p:spPr>
+        <p:txBody>
+          <a:bodyPr wrap="square">
+            <a:spAutoFit/>
+          </a:bodyPr>
+          <a:lstStyle/>
+          <a:p>
+            <a:pPr>
               <a:spcAft>
-                <a:spcPts val="2000"/>
+                <a:spcPts val="800"/>
               </a:spcAft>
             </a:pPr>
             <a:r>
-              <a:rPr sz="2400" b="1">
-                <a:solidFill>
-                  <a:srgbClr val="B4311A"/>
-                </a:solidFill>
-                <a:latin typeface="Helvetica Neue"/>
-              </a:rPr>
-              <a:t>-   </a:t>
-            </a:r>
-            <a:r>
-              <a:rPr sz="2400" b="0" i="0">
+              <a:rPr sz="1600" b="0">
                 <a:solidFill>
                   <a:srgbClr val="141B2D"/>
                 </a:solidFill>
-                <a:latin typeface="Helvetica Neue"/>
-              </a:rPr>
-              <a:t>The category leaks and that is worse for healthcare than furniture</a:t>
-            </a:r>
-          </a:p>
-          <a:p>
-            <a:pPr marL="342900" indent="-342900">
+                <a:latin typeface="Consolas"/>
+              </a:rPr>
+              <a:t>ubi_events</a:t>
+            </a:r>
+            <a:r>
+              <a:rPr sz="1800" b="0" i="0">
+                <a:solidFill>
+                  <a:srgbClr val="141B2D"/>
+                </a:solidFill>
+                <a:latin typeface="Helvetica Neue"/>
+              </a:rPr>
+              <a:t> still shows which results were clicked</a:t>
+            </a:r>
+          </a:p>
+          <a:p>
+            <a:pPr>
               <a:spcAft>
-                <a:spcPts val="2000"/>
+                <a:spcPts val="800"/>
               </a:spcAft>
             </a:pPr>
             <a:r>
-              <a:rPr sz="2400" b="1">
-                <a:solidFill>
-                  <a:srgbClr val="B4311A"/>
-                </a:solidFill>
-                <a:latin typeface="Helvetica Neue"/>
-              </a:rPr>
-              <a:t>-   </a:t>
-            </a:r>
-            <a:r>
-              <a:rPr sz="2400" b="0" i="0">
+              <a:rPr sz="1800" b="0" i="0">
                 <a:solidFill>
                   <a:srgbClr val="141B2D"/>
                 </a:solidFill>
                 <a:latin typeface="Helvetica Neue"/>
               </a:rPr>
-              <a:t>Epsilon values don't transfer between indexes</a:t>
-            </a:r>
-          </a:p>
-          <a:p>
-            <a:pPr marL="342900" indent="-342900">
-              <a:spcAft>
-                <a:spcPts val="2000"/>
-              </a:spcAft>
-            </a:pPr>
-            <a:r>
-              <a:rPr sz="2400" b="1">
-                <a:solidFill>
-                  <a:srgbClr val="B4311A"/>
-                </a:solidFill>
-                <a:latin typeface="Helvetica Neue"/>
-              </a:rPr>
-              <a:t>-   </a:t>
-            </a:r>
-            <a:r>
-              <a:rPr sz="2400" b="0" i="0">
-                <a:solidFill>
-                  <a:srgbClr val="141B2D"/>
-                </a:solidFill>
-                <a:latin typeface="Helvetica Neue"/>
-              </a:rPr>
-              <a:t>Long tail queries stay unmeasurable</a:t>
-            </a:r>
-          </a:p>
-          <a:p>
-            <a:pPr marL="342900" indent="-342900">
-              <a:spcAft>
-                <a:spcPts val="2000"/>
-              </a:spcAft>
-            </a:pPr>
-            <a:r>
-              <a:rPr sz="2400" b="1">
-                <a:solidFill>
-                  <a:srgbClr val="B4311A"/>
-                </a:solidFill>
-                <a:latin typeface="Helvetica Neue"/>
-              </a:rPr>
-              <a:t>-   </a:t>
-            </a:r>
-            <a:r>
-              <a:rPr sz="2400" b="0" i="0">
-                <a:solidFill>
-                  <a:srgbClr val="141B2D"/>
-                </a:solidFill>
-                <a:latin typeface="Helvetica Neue"/>
-              </a:rPr>
-              <a:t>This protects </a:t>
-            </a:r>
-            <a:r>
-              <a:rPr sz="2200" b="0">
-                <a:solidFill>
-                  <a:srgbClr val="141B2D"/>
-                </a:solidFill>
-                <a:latin typeface="Consolas"/>
-              </a:rPr>
-              <a:t>user_query</a:t>
-            </a:r>
-            <a:r>
-              <a:rPr sz="2400" b="0" i="0">
-                <a:solidFill>
-                  <a:srgbClr val="141B2D"/>
-                </a:solidFill>
-                <a:latin typeface="Helvetica Neue"/>
-              </a:rPr>
-              <a:t> but </a:t>
-            </a:r>
-            <a:r>
-              <a:rPr sz="2200" b="0">
-                <a:solidFill>
-                  <a:srgbClr val="141B2D"/>
-                </a:solidFill>
-                <a:latin typeface="Consolas"/>
-              </a:rPr>
-              <a:t>ubi_events</a:t>
-            </a:r>
-            <a:r>
-              <a:rPr sz="2400" b="0" i="0">
-                <a:solidFill>
-                  <a:srgbClr val="141B2D"/>
-                </a:solidFill>
-                <a:latin typeface="Helvetica Neue"/>
-              </a:rPr>
-              <a:t> still holds clicks and ids in the clear</a:t>
-            </a:r>
-          </a:p>
-        </p:txBody>
-      </p:sp>
-      <p:sp>
-        <p:nvSpPr>
-          <p:cNvPr id="5" name="TextBox 4"/>
+              <a:t>Intent-based ranking profiles: for bed shoppers, boost these attributes</a:t>
+            </a:r>
+          </a:p>
+        </p:txBody>
+      </p:sp>
+      <p:sp>
+        <p:nvSpPr>
+          <p:cNvPr id="7" name="TextBox 6"/>
           <p:cNvSpPr txBox="1"/>
           <p:nvPr/>
         </p:nvSpPr>
@@ -10733,7 +11045,7 @@
                 </a:solidFill>
                 <a:latin typeface="Helvetica Neue"/>
               </a:rPr>
-              <a:t>Takeaways</a:t>
+              <a:t>The limitations</a:t>
             </a:r>
           </a:p>
         </p:txBody>
@@ -10753,7 +11065,7 @@
             <a:avLst/>
           </a:prstGeom>
           <a:solidFill>
-            <a:srgbClr val="005EB8"/>
+            <a:srgbClr val="B4311A"/>
           </a:solidFill>
           <a:ln>
             <a:noFill/>
@@ -10812,7 +11124,7 @@
             <a:r>
               <a:rPr sz="2400" b="1">
                 <a:solidFill>
-                  <a:srgbClr val="005EB8"/>
+                  <a:srgbClr val="B4311A"/>
                 </a:solidFill>
                 <a:latin typeface="Helvetica Neue"/>
               </a:rPr>
@@ -10825,7 +11137,7 @@
                 </a:solidFill>
                 <a:latin typeface="Helvetica Neue"/>
               </a:rPr>
-              <a:t>Storing embeddings instead of text is not privacy</a:t>
+              <a:t>The category leaks and that is worse for healthcare than furniture</a:t>
             </a:r>
           </a:p>
           <a:p>
@@ -10837,7 +11149,7 @@
             <a:r>
               <a:rPr sz="2400" b="1">
                 <a:solidFill>
-                  <a:srgbClr val="005EB8"/>
+                  <a:srgbClr val="B4311A"/>
                 </a:solidFill>
                 <a:latin typeface="Helvetica Neue"/>
               </a:rPr>
@@ -10850,7 +11162,7 @@
                 </a:solidFill>
                 <a:latin typeface="Helvetica Neue"/>
               </a:rPr>
-              <a:t>Keeping sensitive data out of the index beats redacting it later</a:t>
+              <a:t>Epsilon values don't transfer between indexes</a:t>
             </a:r>
           </a:p>
           <a:p>
@@ -10862,7 +11174,7 @@
             <a:r>
               <a:rPr sz="2400" b="1">
                 <a:solidFill>
-                  <a:srgbClr val="005EB8"/>
+                  <a:srgbClr val="B4311A"/>
                 </a:solidFill>
                 <a:latin typeface="Helvetica Neue"/>
               </a:rPr>
@@ -10875,7 +11187,7 @@
                 </a:solidFill>
                 <a:latin typeface="Helvetica Neue"/>
               </a:rPr>
-              <a:t>Verify the mechanism by testing it, not by trusting it</a:t>
+              <a:t>Long tail queries stay unmeasurable</a:t>
             </a:r>
           </a:p>
           <a:p>
@@ -10887,7 +11199,7 @@
             <a:r>
               <a:rPr sz="2400" b="1">
                 <a:solidFill>
-                  <a:srgbClr val="005EB8"/>
+                  <a:srgbClr val="B4311A"/>
                 </a:solidFill>
                 <a:latin typeface="Helvetica Neue"/>
               </a:rPr>
@@ -10896,11 +11208,47 @@
             <a:r>
               <a:rPr sz="2400" b="0" i="0">
                 <a:solidFill>
-                  <a:srgbClr val="005EB8"/>
-                </a:solidFill>
-                <a:latin typeface="Helvetica Neue"/>
-              </a:rPr>
-              <a:t>You trade individual resolution for population accuracy but that's what relevance tuning needs</a:t>
+                  <a:srgbClr val="141B2D"/>
+                </a:solidFill>
+                <a:latin typeface="Helvetica Neue"/>
+              </a:rPr>
+              <a:t>This protects </a:t>
+            </a:r>
+            <a:r>
+              <a:rPr sz="2200" b="0">
+                <a:solidFill>
+                  <a:srgbClr val="141B2D"/>
+                </a:solidFill>
+                <a:latin typeface="Consolas"/>
+              </a:rPr>
+              <a:t>user_query</a:t>
+            </a:r>
+            <a:r>
+              <a:rPr sz="2400" b="0" i="0">
+                <a:solidFill>
+                  <a:srgbClr val="141B2D"/>
+                </a:solidFill>
+                <a:latin typeface="Helvetica Neue"/>
+              </a:rPr>
+              <a:t> but </a:t>
+            </a:r>
+            <a:r>
+              <a:rPr sz="2200" b="0">
+                <a:solidFill>
+                  <a:srgbClr val="141B2D"/>
+                </a:solidFill>
+                <a:latin typeface="Consolas"/>
+              </a:rPr>
+              <a:t>ubi_events</a:t>
+            </a:r>
+            <a:r>
+              <a:rPr sz="2400" b="0" i="0">
+                <a:solidFill>
+                  <a:srgbClr val="141B2D"/>
+                </a:solidFill>
+                <a:latin typeface="Helvetica Neue"/>
+              </a:rPr>
+              <a:t> still holds clicks and ids in the clear</a:t>
             </a:r>
           </a:p>
         </p:txBody>
@@ -11065,7 +11413,7 @@
     <p:bg>
       <p:bgPr>
         <a:solidFill>
-          <a:srgbClr val="0E1A2F"/>
+          <a:srgbClr val="FFFFFF"/>
         </a:solidFill>
         <a:effectLst/>
       </p:bgPr>
@@ -11085,8 +11433,8 @@
         </p:nvSpPr>
         <p:spPr>
           <a:xfrm>
-            <a:off x="822960" y="2103120"/>
-            <a:ext cx="10515600" cy="2377440"/>
+            <a:off x="822960" y="640080"/>
+            <a:ext cx="10515600" cy="960120"/>
           </a:xfrm>
           <a:prstGeom prst="rect">
             <a:avLst/>
@@ -11100,115 +11448,33 @@
           <a:lstStyle/>
           <a:p>
             <a:r>
-              <a:rPr sz="4800" b="1">
-                <a:solidFill>
-                  <a:srgbClr val="FFFFFF"/>
-                </a:solidFill>
-                <a:latin typeface="Helvetica Neue"/>
-              </a:rPr>
-              <a:t>Questions</a:t>
-            </a:r>
-          </a:p>
-          <a:p>
-            <a:pPr>
-              <a:spcBef>
-                <a:spcPts val="1400"/>
-              </a:spcBef>
-            </a:pPr>
-            <a:r>
-              <a:rPr sz="2600" b="0">
-                <a:solidFill>
-                  <a:srgbClr val="8EB8E8"/>
-                </a:solidFill>
-                <a:latin typeface="Helvetica Neue"/>
-              </a:rPr>
-              <a:t>github.com/jzonthemtn/ldp-for-search</a:t>
-            </a:r>
-          </a:p>
-        </p:txBody>
-      </p:sp>
-      <p:sp>
-        <p:nvSpPr>
-          <p:cNvPr id="3" name="TextBox 2"/>
-          <p:cNvSpPr txBox="1"/>
-          <p:nvPr/>
-        </p:nvSpPr>
-        <p:spPr>
-          <a:xfrm>
-            <a:off x="822960" y="5532120"/>
-            <a:ext cx="10515600" cy="914400"/>
-          </a:xfrm>
-          <a:prstGeom prst="rect">
-            <a:avLst/>
-          </a:prstGeom>
-          <a:noFill/>
-        </p:spPr>
-        <p:txBody>
-          <a:bodyPr wrap="square">
-            <a:spAutoFit/>
-          </a:bodyPr>
-          <a:lstStyle/>
-          <a:p>
-            <a:r>
-              <a:rPr sz="1800" b="1">
-                <a:solidFill>
-                  <a:srgbClr val="C5CFE0"/>
-                </a:solidFill>
-                <a:latin typeface="Helvetica Neue"/>
-              </a:rPr>
-              <a:t>Jeff Zemerick</a:t>
-            </a:r>
-          </a:p>
-          <a:p>
-            <a:pPr>
-              <a:spcBef>
-                <a:spcPts val="400"/>
-              </a:spcBef>
-            </a:pPr>
-            <a:r>
-              <a:rPr sz="1500" b="0">
-                <a:solidFill>
-                  <a:srgbClr val="7C889E"/>
-                </a:solidFill>
-                <a:latin typeface="Helvetica Neue"/>
-              </a:rPr>
-              <a:t>OpenSearchCon NA</a:t>
-            </a:r>
-          </a:p>
-          <a:p>
-            <a:pPr>
-              <a:spcBef>
-                <a:spcPts val="100"/>
-              </a:spcBef>
-            </a:pPr>
-            <a:r>
-              <a:rPr sz="1500" b="0">
-                <a:solidFill>
-                  <a:srgbClr val="7C889E"/>
-                </a:solidFill>
-                <a:latin typeface="Helvetica Neue"/>
-              </a:rPr>
-              <a:t>September 24, 2026</a:t>
-            </a:r>
-          </a:p>
-        </p:txBody>
-      </p:sp>
-      <p:sp>
-        <p:nvSpPr>
-          <p:cNvPr id="4" name="Rectangle 3"/>
+              <a:rPr sz="3400" b="1">
+                <a:solidFill>
+                  <a:srgbClr val="141B2D"/>
+                </a:solidFill>
+                <a:latin typeface="Helvetica Neue"/>
+              </a:rPr>
+              <a:t>Takeaways</a:t>
+            </a:r>
+          </a:p>
+        </p:txBody>
+      </p:sp>
+      <p:sp>
+        <p:nvSpPr>
+          <p:cNvPr id="3" name="Rectangle 2"/>
           <p:cNvSpPr/>
           <p:nvPr/>
         </p:nvSpPr>
         <p:spPr>
           <a:xfrm>
-            <a:off x="8771839" y="1975104"/>
-            <a:ext cx="2724912" cy="2724912"/>
+            <a:off x="822960" y="1276603"/>
+            <a:ext cx="1463040" cy="50800"/>
           </a:xfrm>
           <a:prstGeom prst="rect">
             <a:avLst/>
           </a:prstGeom>
           <a:solidFill>
-            <a:srgbClr val="FFFFFF"/>
+            <a:srgbClr val="005EB8"/>
           </a:solidFill>
           <a:ln>
             <a:noFill/>
@@ -11237,6 +11503,350 @@
           </a:p>
         </p:txBody>
       </p:sp>
+      <p:sp>
+        <p:nvSpPr>
+          <p:cNvPr id="4" name="TextBox 3"/>
+          <p:cNvSpPr txBox="1"/>
+          <p:nvPr/>
+        </p:nvSpPr>
+        <p:spPr>
+          <a:xfrm>
+            <a:off x="822960" y="2057400"/>
+            <a:ext cx="10515600" cy="4023360"/>
+          </a:xfrm>
+          <a:prstGeom prst="rect">
+            <a:avLst/>
+          </a:prstGeom>
+          <a:noFill/>
+        </p:spPr>
+        <p:txBody>
+          <a:bodyPr wrap="square">
+            <a:spAutoFit/>
+          </a:bodyPr>
+          <a:lstStyle/>
+          <a:p>
+            <a:pPr marL="342900" indent="-342900">
+              <a:spcAft>
+                <a:spcPts val="2000"/>
+              </a:spcAft>
+            </a:pPr>
+            <a:r>
+              <a:rPr sz="2400" b="1">
+                <a:solidFill>
+                  <a:srgbClr val="005EB8"/>
+                </a:solidFill>
+                <a:latin typeface="Helvetica Neue"/>
+              </a:rPr>
+              <a:t>-   </a:t>
+            </a:r>
+            <a:r>
+              <a:rPr sz="2400" b="0" i="0">
+                <a:solidFill>
+                  <a:srgbClr val="141B2D"/>
+                </a:solidFill>
+                <a:latin typeface="Helvetica Neue"/>
+              </a:rPr>
+              <a:t>Storing embeddings instead of text is not privacy</a:t>
+            </a:r>
+          </a:p>
+          <a:p>
+            <a:pPr marL="342900" indent="-342900">
+              <a:spcAft>
+                <a:spcPts val="2000"/>
+              </a:spcAft>
+            </a:pPr>
+            <a:r>
+              <a:rPr sz="2400" b="1">
+                <a:solidFill>
+                  <a:srgbClr val="005EB8"/>
+                </a:solidFill>
+                <a:latin typeface="Helvetica Neue"/>
+              </a:rPr>
+              <a:t>-   </a:t>
+            </a:r>
+            <a:r>
+              <a:rPr sz="2400" b="0" i="0">
+                <a:solidFill>
+                  <a:srgbClr val="141B2D"/>
+                </a:solidFill>
+                <a:latin typeface="Helvetica Neue"/>
+              </a:rPr>
+              <a:t>Keeping sensitive data out of the index beats redacting it later</a:t>
+            </a:r>
+          </a:p>
+          <a:p>
+            <a:pPr marL="342900" indent="-342900">
+              <a:spcAft>
+                <a:spcPts val="2000"/>
+              </a:spcAft>
+            </a:pPr>
+            <a:r>
+              <a:rPr sz="2400" b="1">
+                <a:solidFill>
+                  <a:srgbClr val="005EB8"/>
+                </a:solidFill>
+                <a:latin typeface="Helvetica Neue"/>
+              </a:rPr>
+              <a:t>-   </a:t>
+            </a:r>
+            <a:r>
+              <a:rPr sz="2400" b="0" i="0">
+                <a:solidFill>
+                  <a:srgbClr val="141B2D"/>
+                </a:solidFill>
+                <a:latin typeface="Helvetica Neue"/>
+              </a:rPr>
+              <a:t>Verify the mechanism by testing it, not by trusting it</a:t>
+            </a:r>
+          </a:p>
+          <a:p>
+            <a:pPr marL="342900" indent="-342900">
+              <a:spcAft>
+                <a:spcPts val="2000"/>
+              </a:spcAft>
+            </a:pPr>
+            <a:r>
+              <a:rPr sz="2400" b="1">
+                <a:solidFill>
+                  <a:srgbClr val="005EB8"/>
+                </a:solidFill>
+                <a:latin typeface="Helvetica Neue"/>
+              </a:rPr>
+              <a:t>-   </a:t>
+            </a:r>
+            <a:r>
+              <a:rPr sz="2400" b="0" i="0">
+                <a:solidFill>
+                  <a:srgbClr val="005EB8"/>
+                </a:solidFill>
+                <a:latin typeface="Helvetica Neue"/>
+              </a:rPr>
+              <a:t>You trade individual resolution for population accuracy but that's what relevance tuning needs</a:t>
+            </a:r>
+          </a:p>
+        </p:txBody>
+      </p:sp>
+      <p:sp>
+        <p:nvSpPr>
+          <p:cNvPr id="5" name="TextBox 4"/>
+          <p:cNvSpPr txBox="1"/>
+          <p:nvPr/>
+        </p:nvSpPr>
+        <p:spPr>
+          <a:xfrm>
+            <a:off x="10405872" y="6144768"/>
+            <a:ext cx="960120" cy="411480"/>
+          </a:xfrm>
+          <a:prstGeom prst="rect">
+            <a:avLst/>
+          </a:prstGeom>
+          <a:noFill/>
+        </p:spPr>
+        <p:txBody>
+          <a:bodyPr wrap="square">
+            <a:spAutoFit/>
+          </a:bodyPr>
+          <a:lstStyle/>
+          <a:p>
+            <a:pPr algn="r"/>
+            <a:r>
+              <a:rPr sz="1300" b="0">
+                <a:solidFill>
+                  <a:srgbClr val="5A647A"/>
+                </a:solidFill>
+                <a:latin typeface="Helvetica Neue"/>
+              </a:rPr>
+              <a:t>30</a:t>
+            </a:r>
+          </a:p>
+        </p:txBody>
+      </p:sp>
+    </p:spTree>
+  </p:cSld>
+  <p:clrMapOvr>
+    <a:masterClrMapping/>
+  </p:clrMapOvr>
+</p:sld>
+</file>
+
+<file path=ppt/slides/slide31.xml><?xml version="1.0" encoding="utf-8"?>
+<p:sld xmlns:a="http://schemas.openxmlformats.org/drawingml/2006/main" xmlns:p="http://schemas.openxmlformats.org/presentationml/2006/main" xmlns:r="http://schemas.openxmlformats.org/officeDocument/2006/relationships">
+  <p:cSld>
+    <p:bg>
+      <p:bgPr>
+        <a:solidFill>
+          <a:srgbClr val="0E1A2F"/>
+        </a:solidFill>
+        <a:effectLst/>
+      </p:bgPr>
+    </p:bg>
+    <p:spTree>
+      <p:nvGrpSpPr>
+        <p:cNvPr id="1" name=""/>
+        <p:cNvGrpSpPr/>
+        <p:nvPr/>
+      </p:nvGrpSpPr>
+      <p:grpSpPr/>
+      <p:sp>
+        <p:nvSpPr>
+          <p:cNvPr id="2" name="TextBox 1"/>
+          <p:cNvSpPr txBox="1"/>
+          <p:nvPr/>
+        </p:nvSpPr>
+        <p:spPr>
+          <a:xfrm>
+            <a:off x="822960" y="2103120"/>
+            <a:ext cx="10515600" cy="2377440"/>
+          </a:xfrm>
+          <a:prstGeom prst="rect">
+            <a:avLst/>
+          </a:prstGeom>
+          <a:noFill/>
+        </p:spPr>
+        <p:txBody>
+          <a:bodyPr wrap="square">
+            <a:spAutoFit/>
+          </a:bodyPr>
+          <a:lstStyle/>
+          <a:p>
+            <a:r>
+              <a:rPr sz="4800" b="1">
+                <a:solidFill>
+                  <a:srgbClr val="FFFFFF"/>
+                </a:solidFill>
+                <a:latin typeface="Helvetica Neue"/>
+              </a:rPr>
+              <a:t>Questions</a:t>
+            </a:r>
+          </a:p>
+          <a:p>
+            <a:pPr>
+              <a:spcBef>
+                <a:spcPts val="1400"/>
+              </a:spcBef>
+            </a:pPr>
+            <a:r>
+              <a:rPr sz="2600" b="0">
+                <a:solidFill>
+                  <a:srgbClr val="8EB8E8"/>
+                </a:solidFill>
+                <a:latin typeface="Helvetica Neue"/>
+              </a:rPr>
+              <a:t>github.com/jzonthemtn/ldp-for-search</a:t>
+            </a:r>
+          </a:p>
+        </p:txBody>
+      </p:sp>
+      <p:sp>
+        <p:nvSpPr>
+          <p:cNvPr id="3" name="TextBox 2"/>
+          <p:cNvSpPr txBox="1"/>
+          <p:nvPr/>
+        </p:nvSpPr>
+        <p:spPr>
+          <a:xfrm>
+            <a:off x="822960" y="5532120"/>
+            <a:ext cx="10515600" cy="914400"/>
+          </a:xfrm>
+          <a:prstGeom prst="rect">
+            <a:avLst/>
+          </a:prstGeom>
+          <a:noFill/>
+        </p:spPr>
+        <p:txBody>
+          <a:bodyPr wrap="square">
+            <a:spAutoFit/>
+          </a:bodyPr>
+          <a:lstStyle/>
+          <a:p>
+            <a:r>
+              <a:rPr sz="1800" b="1">
+                <a:solidFill>
+                  <a:srgbClr val="C5CFE0"/>
+                </a:solidFill>
+                <a:latin typeface="Helvetica Neue"/>
+              </a:rPr>
+              <a:t>Jeff Zemerick</a:t>
+            </a:r>
+          </a:p>
+          <a:p>
+            <a:pPr>
+              <a:spcBef>
+                <a:spcPts val="400"/>
+              </a:spcBef>
+            </a:pPr>
+            <a:r>
+              <a:rPr sz="1500" b="0">
+                <a:solidFill>
+                  <a:srgbClr val="7C889E"/>
+                </a:solidFill>
+                <a:latin typeface="Helvetica Neue"/>
+              </a:rPr>
+              <a:t>OpenSearchCon NA</a:t>
+            </a:r>
+          </a:p>
+          <a:p>
+            <a:pPr>
+              <a:spcBef>
+                <a:spcPts val="100"/>
+              </a:spcBef>
+            </a:pPr>
+            <a:r>
+              <a:rPr sz="1500" b="0">
+                <a:solidFill>
+                  <a:srgbClr val="7C889E"/>
+                </a:solidFill>
+                <a:latin typeface="Helvetica Neue"/>
+              </a:rPr>
+              <a:t>September 24, 2026</a:t>
+            </a:r>
+          </a:p>
+        </p:txBody>
+      </p:sp>
+      <p:sp>
+        <p:nvSpPr>
+          <p:cNvPr id="4" name="Rectangle 3"/>
+          <p:cNvSpPr/>
+          <p:nvPr/>
+        </p:nvSpPr>
+        <p:spPr>
+          <a:xfrm>
+            <a:off x="8771839" y="1975104"/>
+            <a:ext cx="2724912" cy="2724912"/>
+          </a:xfrm>
+          <a:prstGeom prst="rect">
+            <a:avLst/>
+          </a:prstGeom>
+          <a:solidFill>
+            <a:srgbClr val="FFFFFF"/>
+          </a:solidFill>
+          <a:ln>
+            <a:noFill/>
+          </a:ln>
+          <a:effectLst/>
+        </p:spPr>
+        <p:style>
+          <a:lnRef idx="1">
+            <a:schemeClr val="accent1"/>
+          </a:lnRef>
+          <a:fillRef idx="3">
+            <a:schemeClr val="accent1"/>
+          </a:fillRef>
+          <a:effectRef idx="2">
+            <a:schemeClr val="accent1"/>
+          </a:effectRef>
+          <a:fontRef idx="minor">
+            <a:schemeClr val="lt1"/>
+          </a:fontRef>
+        </p:style>
+        <p:txBody>
+          <a:bodyPr rtlCol="0" anchor="ctr"/>
+          <a:lstStyle/>
+          <a:p>
+            <a:pPr algn="ctr"/>
+          </a:p>
+        </p:txBody>
+      </p:sp>
       <p:pic>
         <p:nvPicPr>
           <p:cNvPr id="5" name="Picture 4" descr="leveraging-ldp-for-high-trust-opensearch-ubi_zemerick_1212636_feedback-code.png"/>
@@ -11326,7 +11936,7 @@
                 </a:solidFill>
                 <a:latin typeface="Helvetica Neue"/>
               </a:rPr>
-              <a:t>30</a:t>
+              <a:t>31</a:t>
             </a:r>
           </a:p>
         </p:txBody>

--- a/ldp_for_search_slides.pptx
+++ b/ldp_for_search_slides.pptx
@@ -742,7 +742,7 @@
           <a:lstStyle/>
           <a:p>
             <a:r>
-              <a:t>About 7 minutes. Mechanism briefly, then two verification beats, weakest to strongest.</a:t>
+              <a:t>The longest part by far, about 25 minutes, because it carries the mechanism, the evidence, the cost and the payoff. Three evidence slides in order of strength, the distribution audit, then the epsilon comparison, then the attacker. Then what the noise costs, then what survives it. No divider marks the payoff any more, so the turn from the epsilon sweep to the asymmetry slide is yours to make out loud.</a:t>
             </a:r>
           </a:p>
         </p:txBody>
@@ -882,7 +882,7 @@
           <a:lstStyle/>
           <a:p>
             <a:r>
-              <a:t>One slide only. Resist the urge to teach differential privacy properly, there is not time and it is not the point of the talk. The noise is Laplace, but the word can wait for the next slide, where the shape is on screen and does the explaining for you. If someone asks here, one sentence: symmetric noise, equally likely to push the value up or down, centered on the truth. The formula is deliberately off the slide. If someone asks, the noise scale is sensitivity over epsilon, and sensitivity here is 1.0 per coordinate on vectors whose whole norm is 1, which is conservative rather than tight. The notes file has the longer answer. Do not volunteer the word, it is the only term in the deck with no definition behind it.</a:t>
+              <a:t>One slide only. Resist the urge to teach differential privacy properly, there is not time and it is not the point of the talk. The noise is Laplace, but the word appears on no slide, so leave it out unless asked. The shape on the next slide explains it. If someone asks here, one sentence: symmetric noise, equally likely to push the value up or down, centered on the truth. The formula is deliberately off the slide. If someone asks, the noise scale is sensitivity over epsilon, and sensitivity here is 1.0 per coordinate on vectors whose whole norm is 1, which is conservative rather than tight. The notes file has the longer answer. Do not volunteer the word, it is the only term in the deck with no definition behind it.</a:t>
             </a:r>
           </a:p>
         </p:txBody>
@@ -952,7 +952,7 @@
           <a:lstStyle/>
           <a:p>
             <a:r>
-              <a:t>This is the distributional check. It proves the mechanism is implemented correctly. It does not prove an attacker fails, which is why the next slide exists. Say what the thousand is, because the title does not: one query, one coordinate of its vector, and a thousand independent noise draws on that same true value. You cannot audit a random mechanism from one sample, so you repeat it until the shape shows. Then head off the objection someone in the room is already forming. Yes, averaging those thousand draws recovers the true value, which is exactly what the peak landing on the red line shows. That is the auditor's view rather than a usage pattern: a query is privatized once, on submit. The moment one person emits the same query a thousand times, an attacker can average it back, which is why the appendix says privatize on submit and never per keystroke. It is the asymmetry the payoff rests on, pointed the other way. Many draws from one person breaks privacy, one draw each from many people preserves it.</a:t>
+              <a:t>This is the distributional check. It proves the mechanism is implemented correctly. It does not prove an attacker fails, which is why the attacker slide two on exists. Say what the thousand is, because the title does not: one query, one coordinate of its vector, and a thousand independent noise draws on that same true value. You cannot audit a random mechanism from one sample, so you repeat it until the shape shows. Then head off the objection someone in the room is already forming. Yes, averaging those thousand draws recovers the true value, which is exactly what the peak landing on the red line shows. That is the auditor's view rather than a usage pattern: a query is privatized once, on submit. The moment one person emits the same query a thousand times, an attacker can average it back, which is why the appendix says privatize on submit and never per keystroke. It is the asymmetry the payoff rests on, pointed the other way. Many draws from one person breaks privacy, one draw each from many people preserves it.</a:t>
             </a:r>
           </a:p>
         </p:txBody>
@@ -1022,7 +1022,7 @@
           <a:lstStyle/>
           <a:p>
             <a:r>
-              <a:t>The dial, made visible. Same query, same coordinate, same thousand draws. Only epsilon differs. The scale is one over epsilon, so 1.2 gives 0.833 and 10 gives 0.100, about eight times narrower. Say why the shared x axis matters: let each panel scale itself and they look identical, which is the opposite of the point. Then land both halves of the trade. At epsilon 10 the noise is finally smaller than the index itself, 0.141 against a coordinate spread of 0.171, which is why the next part shows utility jumping from 0.72 to 0.98 between epsilon 5 and 10. And that is also the cost: a spread this narrow means someone reading a single sample is reading the true value. There is no setting that is private and accurate for one query, which is what the payoff slides exist to answer.</a:t>
+              <a:t>The dial, made visible. Same query, same coordinate, same thousand draws. Only epsilon differs. The scale is one over epsilon, so 1.2 gives 0.833 and 10 gives 0.100, about eight times narrower. Say why the shared x axis matters: let each panel scale itself and they look identical, which is the opposite of the point. Then land both halves of the trade. At epsilon 10 the noise is finally smaller than the index itself, 0.141 against a coordinate spread of 0.171, which is why the epsilon sweep later shows utility jumping from 0.72 to 0.98 between epsilon 5 and 10. And that is also the cost: a spread this narrow means someone reading a single sample is reading the true value. There is no setting that is private and accurate for one query, which is what the payoff slides exist to answer.</a:t>
             </a:r>
           </a:p>
         </p:txBody>
@@ -1162,7 +1162,7 @@
           <a:lstStyle/>
           <a:p>
             <a:r>
-              <a:t>Volunteer the confession here, because no slide makes it for you any more. That demo back in Part 2 was rigged: epsilon 1.2 on a twenty document index, where the attacker learned nothing and neither did the user. Say it yourself. If it comes out in Q&amp;A instead, the talk loses, and volunteering it is what makes the payoff believable. Go to the red line first and stay there. That is the demo from Part 2, with the top hit correct 7 percent of the time against a 5 percent baseline, and the top five 45 against 25. Barely above guessing. Then sweep right to make the second point, that utility only returns as epsilon rises, and by then the attacker is reading the query too. Note the curves rise here where slide 16's rose for the attacker: up means the search still works. Exact values if asked: at epsilon 1.2, P@1 0.07 and R@5 0.45; at 3, 0.38 and 0.75; at 5, 0.72 and 0.95; at 10, 0.98 and 1.00. Resist calling epsilon 3 to 5 a usable window. P@1 of 0.38 is eight times chance, so the attacker is already doing well there. The honest version of that argument needs the real index, which is the next slide.</a:t>
+              <a:t>Volunteer the confession here, because no slide makes it for you any more. That demo back in Part 2 was rigged: epsilon 1.2 on a twenty document index, where the attacker learned nothing and neither did the user. Say it yourself. If it comes out in Q&amp;A instead, the talk loses, and volunteering it is what makes the payoff believable. Go to the red line first and stay there. That is the demo from Part 2, with the top hit correct 7 percent of the time against a 5 percent baseline, and the top five 45 against 25. Barely above guessing. Then sweep right to make the second point, that utility only returns as epsilon rises, and by then the attacker is reading the query too. Note the curves rise here where slide 17's rose for the attacker, so up means the search still works. Exact values if asked: at epsilon 1.2, P@1 0.07 and R@5 0.45; at 3, 0.38 and 0.75; at 5, 0.72 and 0.95; at 10, 0.98 and 1.00. Resist calling epsilon 3 to 5 a usable window. P@1 of 0.38 is eight times chance, so the attacker is already doing well there. The honest version of that argument needed the real index, which is the attacker curve you showed a slide ago.</a:t>
             </a:r>
           </a:p>
         </p:txBody>
@@ -1302,7 +1302,7 @@
           <a:lstStyle/>
           <a:p>
             <a:r>
-              <a:t>Keep this to about 30 seconds. The credential that matters for this talk is the PII redaction work, because it is why the privacy problem is familiar rather than academic. The UBI maintainership is why the OpenSearch half is credible. Do not read the list.</a:t>
+              <a:t>Keep this to about 30 seconds. The redaction work is no longer a bullet but is still worth saying out loud, because it is why the privacy problem is familiar rather than academic. The UBI maintainership is why the OpenSearch half is credible. Do not read the list.</a:t>
             </a:r>
           </a:p>
         </p:txBody>
@@ -1862,7 +1862,7 @@
           <a:lstStyle/>
           <a:p>
             <a:r>
-              <a:t>Tie back to the abstract's promise about LTR and query-intent analysis. Then name the thing that genuinely goes away. If anyone presses on the learning-to-rank bullet, be straight: LTR judgments come from clicks, and this mechanism does not touch clicks, so that signal survives because it was never protected rather than because LDP preserved it. The limitations slide says so.</a:t>
+              <a:t>Tie back to the abstract's promise about LTR and query-intent analysis. Then name the thing that genuinely goes away. If anyone presses on the learning-to-rank bullet, be straight: LTR judgments come from clicks, and this mechanism does not touch clicks, so that signal survives because it was never protected rather than because LDP preserved it. The next slide shows how that training actually works, and the limitations slide after it says what does not.</a:t>
             </a:r>
           </a:p>
         </p:txBody>

--- a/ldp_for_search_slides.pptx
+++ b/ldp_for_search_slides.pptx
@@ -742,7 +742,7 @@
           <a:lstStyle/>
           <a:p>
             <a:r>
-              <a:t>The longest part by far, about 25 minutes, because it carries the mechanism, the evidence, the cost and the payoff. Three evidence slides in order of strength, the distribution audit, then the epsilon comparison, then the attacker. Then what the noise costs, then what survives it. No divider marks the payoff any more, so the turn from the epsilon sweep to the asymmetry slide is yours to make out loud.</a:t>
+              <a:t>The longest part by far, because it carries the mechanism, the evidence, the cost and the payoff. Three evidence slides in order of strength, the distribution audit, then the epsilon comparison, then the attacker. Then what the noise costs, then what survives it. No divider marks the payoff any more, so the turn from the epsilon sweep to the asymmetry slide is yours to make out loud.</a:t>
             </a:r>
           </a:p>
         </p:txBody>
@@ -1652,7 +1652,7 @@
           <a:lstStyle/>
           <a:p>
             <a:r>
-              <a:t>About 7 minutes. Land the integration, then be honest about what does not work.</a:t>
+              <a:t>Land the integration, then be honest about what does not work.</a:t>
             </a:r>
           </a:p>
         </p:txBody>
@@ -2072,7 +2072,7 @@
           <a:lstStyle/>
           <a:p>
             <a:r>
-              <a:t>About 8 minutes. Goal is that everyone understands the problem before any code appears.</a:t>
+              <a:t>Everyone has to understand the problem before any code appears.</a:t>
             </a:r>
           </a:p>
         </p:txBody>
@@ -2562,7 +2562,7 @@
           <a:lstStyle/>
           <a:p>
             <a:r>
-              <a:t>About 5 minutes. This exists to kill the objection half the room is already forming.</a:t>
+              <a:t>This exists to kill the objection half the room is already forming.</a:t>
             </a:r>
           </a:p>
         </p:txBody>

--- a/ldp_for_search_slides.pptx
+++ b/ldp_for_search_slides.pptx
@@ -36,6 +36,7 @@
     <p:sldId id="284" r:id="rId36"/>
     <p:sldId id="285" r:id="rId37"/>
     <p:sldId id="286" r:id="rId38"/>
+    <p:sldId id="287" r:id="rId39"/>
   </p:sldIdLst>
   <p:sldSz cx="12191695" cy="6858000" type="screen4x3"/>
   <p:notesSz cx="6858000" cy="9144000"/>
@@ -1932,7 +1933,7 @@
           <a:lstStyle/>
           <a:p>
             <a:r>
-              <a:t>This expands the learning-to-rank bullet on the previous slide, and it is the one place to be careful, because it is a recipe rather than a result. Nothing in this talk trains a ranker. Say so if asked. What is measured is the inputs: clicks were never touched by the mechanism, and the segment centroid is accurate above roughly 2,300 users. The labels are therefore exactly what they are today. What moves is the key. You cannot read a query, so you cannot build judgment lists per query string, and you cannot recompute BM25 against words you do not have. You group by segment instead and use its centroid as the query representation, which suits an embedding ranker and suits a term-based feature set badly. Walk the example slowly, it is the whole slide: a few thousand people search for beds, every one of them privatizes on their own device, and the server averages what arrives into a centroid that is accurate but belongs to nobody. The clicks sitting next to it were never noised. That pair, the centroid and the clicks, is a training example. Beds is the cohort behind the convergence plot, so this is the same segment they have already seen measured. Name the category honestly: this is closer to intent-based ranking profiles than to per-query learning-to-rank, and it is coarser, because every query in a segment collapses to one key. If someone asks how much that costs, say it has not been measured and that the two losses separate: keying on segments instead of queries is a modelling choice you can evaluate on clean data with no privacy involved, while the noise itself costs almost nothing above 2,300 users, which is what the convergence plot showed. Everything inherits the segment constraint from earlier: head segments train, the long tail does not reach the user count.</a:t>
+              <a:t>This expands the learning-to-rank bullet on the previous slide, and it is the one place to be careful, because it is a recipe rather than a result. Nothing in this talk trains a ranker. Say so if asked. What is measured is the inputs: clicks were never touched by the mechanism, and the segment centroid is accurate above roughly 2,300 users. The labels are therefore exactly what they are today. What moves is the key. You cannot read a query, so you cannot build judgment lists per query string, and you cannot recompute BM25 against words you do not have. You group by segment instead and use its centroid as the query representation, which suits an embedding ranker and suits a term-based feature set badly. Walk the example slowly, it is the whole slide: a few thousand people search for beds, every one of them privatizes on their own device, and the server averages what arrives into a centroid that is accurate but belongs to nobody. The clicks sitting next to it were never noised. That pair, the centroid and the clicks, is a training example. Beds is the cohort behind the convergence plot, so this is the same segment they have already seen measured. Name the category honestly: this is closer to intent-based ranking profiles than to per-query learning-to-rank, and it is coarser, because every query in a segment collapses to one key. If someone asks how much that costs, the next slide measures it, and the two losses separate cleanly. Keying on segments instead of queries is a modelling choice you can evaluate on clean data with no privacy involved, while the noise itself costs almost nothing above the threshold the convergence plot showed. Everything inherits the segment constraint from earlier, so head segments train and the long tail does not reach the user count.</a:t>
             </a:r>
           </a:p>
         </p:txBody>
@@ -2002,7 +2003,7 @@
           <a:lstStyle/>
           <a:p>
             <a:r>
-              <a:t>Every one of these is a question someone will ask. Answering them first is cheaper than answering them under pressure. Also mention that a formal epsilon-DP claim needs sensitivity calibrated to the true coordinate range. Here the vectors are L2-normalized before PCA, so the whole 20-dimensional vector has norm 1, which makes sensitivity 1.0 per coordinate conservative rather than tight. That is the answer if someone asks how sensitivity was set. Two follow-ups come off that bullet. Asked how often epsilon needs re-tuning, say when you re-embed or refit PCA, because routine additions to a large index do not move the coordinate spread, and normalizing before PCA keeps sensitivity itself stable whatever the catalogue holds. Asked whether privacy decays over time, say yes but not through epsilon: one user's repeated queries compose, and an attacker who averages that one user's own noised draws recovers the intent, which is the asymmetry of the payoff turned around. Epsilon is a budget per release rather than a standing property, so the fix is rotating or dropping client_id and session_id, not a smaller epsilon. On the long tail, which someone will ask about: the workarounds are coarser segments and longer time windows, and both are the same trade at lower resolution, because they only raise n. The genuinely different answer is shuffle DP or secure aggregation, which buys far more utility at the same epsilon but changes the architecture rather than the parameter. Worth adding that tail relevance is usually improved by retrieval work rather than behavioural signal anyway. On the last bullet, be direct: this is scoped work, not a finished privacy story for all of UBI. The query text is covered. Clicks are counts rather than vectors and want randomized response, and client_id and session_id would need rotating or dropping. That is the honest answer to the linkability half of the problem raised in Part 1.</a:t>
+              <a:t>The one slide in this part with a measurement behind it, so lean on it. 472 WANDS queries ranked against 233,430 graded judgments, scored as NDCG@10. The only thing that changes between the three lines is the vector each query is ranked against. Blue is the query itself at 0.763, which is the ceiling. Orange is the segment centroid and green is that centroid recovered from noisy queries at epsilon 1, at 40 segments of roughly a dozen queries each. Point at the last two bars first, because their being identical is the finding. The noise costs 0.001 here and never more than 0.003 anywhere in the sweep, so the whole drop from the first bar is the price of segmenting rather than the price of privacy. That price is real but it moves with how finely you segment, running from 0.586 at five segments to 0.737 at 320, and the notebook has the full curve if anyone wants it. Two caveats to volunteer. This ranks by vector distance rather than training a ranker, which isolates the query representation instead of measuring a production system. And 480 queries is a small corpus, so the numbers are indicative.</a:t>
             </a:r>
           </a:p>
         </p:txBody>
@@ -2142,7 +2143,7 @@
           <a:lstStyle/>
           <a:p>
             <a:r>
-              <a:t>Four sentences. If someone remembers only one, it should be the last.</a:t>
+              <a:t>Every one of these is a question someone will ask. Answering them first is cheaper than answering them under pressure. Also mention that a formal epsilon-DP claim needs sensitivity calibrated to the true coordinate range. Here the vectors are L2-normalized before PCA, so the whole 20-dimensional vector has norm 1, which makes sensitivity 1.0 per coordinate conservative rather than tight. That is the answer if someone asks how sensitivity was set. Two follow-ups come off that bullet. Asked how often epsilon needs re-tuning, say when you re-embed or refit PCA, because routine additions to a large index do not move the coordinate spread, and normalizing before PCA keeps sensitivity itself stable whatever the catalogue holds. Asked whether privacy decays over time, say yes but not through epsilon: one user's repeated queries compose, and an attacker who averages that one user's own noised draws recovers the intent, which is the asymmetry of the payoff turned around. Epsilon is a budget per release rather than a standing property, so the fix is rotating or dropping client_id and session_id, not a smaller epsilon. On the long tail, which someone will ask about: the workarounds are coarser segments and longer time windows, and both are the same trade at lower resolution, because they only raise n. The genuinely different answer is shuffle DP or secure aggregation, which buys far more utility at the same epsilon but changes the architecture rather than the parameter. Worth adding that tail relevance is usually improved by retrieval work rather than behavioural signal anyway. On the last bullet, be direct: this is scoped work, not a finished privacy story for all of UBI. The query text is covered. Clicks are counts rather than vectors and want randomized response, and client_id and session_id would need rotating or dropping. That is the honest answer to the linkability half of the problem raised in Part 1.</a:t>
             </a:r>
           </a:p>
         </p:txBody>
@@ -2168,6 +2169,76 @@
 </file>
 
 <file path=ppt/notesSlides/notesSlide31.xml><?xml version="1.0" encoding="utf-8"?>
+<p:notes xmlns:a="http://schemas.openxmlformats.org/drawingml/2006/main" xmlns:p="http://schemas.openxmlformats.org/presentationml/2006/main" xmlns:r="http://schemas.openxmlformats.org/officeDocument/2006/relationships">
+  <p:cSld>
+    <p:spTree>
+      <p:nvGrpSpPr>
+        <p:cNvPr id="1" name=""/>
+        <p:cNvGrpSpPr/>
+        <p:nvPr/>
+      </p:nvGrpSpPr>
+      <p:grpSpPr>
+        <a:xfrm>
+          <a:off x="0" y="0"/>
+          <a:ext cx="0" cy="0"/>
+          <a:chOff x="0" y="0"/>
+          <a:chExt cx="0" cy="0"/>
+        </a:xfrm>
+      </p:grpSpPr>
+      <p:sp>
+        <p:nvSpPr>
+          <p:cNvPr id="2" name="Slide Image Placeholder 1"/>
+          <p:cNvSpPr>
+            <a:spLocks noGrp="1"/>
+          </p:cNvSpPr>
+          <p:nvPr>
+            <p:ph type="sldImg" idx="2"/>
+          </p:nvPr>
+        </p:nvSpPr>
+        <p:spPr/>
+      </p:sp>
+      <p:sp>
+        <p:nvSpPr>
+          <p:cNvPr id="3" name="Notes Placeholder 2"/>
+          <p:cNvSpPr>
+            <a:spLocks noGrp="1"/>
+          </p:cNvSpPr>
+          <p:nvPr>
+            <p:ph type="body" idx="3" sz="quarter"/>
+          </p:nvPr>
+        </p:nvSpPr>
+        <p:spPr/>
+        <p:txBody>
+          <a:bodyPr/>
+          <a:lstStyle/>
+          <a:p>
+            <a:r>
+              <a:t>Four sentences. If someone remembers only one, it should be the last.</a:t>
+            </a:r>
+          </a:p>
+        </p:txBody>
+      </p:sp>
+      <p:sp>
+        <p:nvSpPr>
+          <p:cNvPr id="4" name="Slide Number Placeholder 3"/>
+          <p:cNvSpPr>
+            <a:spLocks noGrp="1"/>
+          </p:cNvSpPr>
+          <p:nvPr>
+            <p:ph type="sldNum" idx="5" sz="quarter"/>
+          </p:nvPr>
+        </p:nvSpPr>
+        <p:spPr/>
+      </p:sp>
+    </p:spTree>
+  </p:cSld>
+  <p:clrMapOvr>
+    <a:masterClrMapping/>
+  </p:clrMapOvr>
+</p:notes>
+</file>
+
+<file path=ppt/notesSlides/notesSlide32.xml><?xml version="1.0" encoding="utf-8"?>
 <p:notes xmlns:a="http://schemas.openxmlformats.org/drawingml/2006/main" xmlns:p="http://schemas.openxmlformats.org/presentationml/2006/main" xmlns:r="http://schemas.openxmlformats.org/officeDocument/2006/relationships">
   <p:cSld>
     <p:spTree>
@@ -11024,8 +11095,8 @@
         </p:nvSpPr>
         <p:spPr>
           <a:xfrm>
-            <a:off x="822960" y="640080"/>
-            <a:ext cx="10515600" cy="960120"/>
+            <a:off x="822960" y="411480"/>
+            <a:ext cx="10515600" cy="822960"/>
           </a:xfrm>
           <a:prstGeom prst="rect">
             <a:avLst/>
@@ -11039,71 +11110,27 @@
           <a:lstStyle/>
           <a:p>
             <a:r>
-              <a:rPr sz="3400" b="1">
+              <a:rPr sz="3000" b="1">
                 <a:solidFill>
                   <a:srgbClr val="141B2D"/>
                 </a:solidFill>
                 <a:latin typeface="Helvetica Neue"/>
               </a:rPr>
-              <a:t>The limitations</a:t>
-            </a:r>
-          </a:p>
-        </p:txBody>
-      </p:sp>
-      <p:sp>
-        <p:nvSpPr>
-          <p:cNvPr id="3" name="Rectangle 2"/>
-          <p:cNvSpPr/>
-          <p:nvPr/>
-        </p:nvSpPr>
-        <p:spPr>
-          <a:xfrm>
-            <a:off x="822960" y="1276603"/>
-            <a:ext cx="1463040" cy="50800"/>
-          </a:xfrm>
-          <a:prstGeom prst="rect">
-            <a:avLst/>
-          </a:prstGeom>
-          <a:solidFill>
-            <a:srgbClr val="B4311A"/>
-          </a:solidFill>
-          <a:ln>
-            <a:noFill/>
-          </a:ln>
-          <a:effectLst/>
-        </p:spPr>
-        <p:style>
-          <a:lnRef idx="1">
-            <a:schemeClr val="accent1"/>
-          </a:lnRef>
-          <a:fillRef idx="3">
-            <a:schemeClr val="accent1"/>
-          </a:fillRef>
-          <a:effectRef idx="2">
-            <a:schemeClr val="accent1"/>
-          </a:effectRef>
-          <a:fontRef idx="minor">
-            <a:schemeClr val="lt1"/>
-          </a:fontRef>
-        </p:style>
-        <p:txBody>
-          <a:bodyPr rtlCol="0" anchor="ctr"/>
-          <a:lstStyle/>
-          <a:p>
-            <a:pPr algn="ctr"/>
-          </a:p>
-        </p:txBody>
-      </p:sp>
-      <p:sp>
-        <p:nvSpPr>
-          <p:cNvPr id="4" name="TextBox 3"/>
+              <a:t>NDCG@10 Comparison</a:t>
+            </a:r>
+          </a:p>
+        </p:txBody>
+      </p:sp>
+      <p:sp>
+        <p:nvSpPr>
+          <p:cNvPr id="3" name="TextBox 2"/>
           <p:cNvSpPr txBox="1"/>
           <p:nvPr/>
         </p:nvSpPr>
         <p:spPr>
           <a:xfrm>
-            <a:off x="822960" y="2057400"/>
-            <a:ext cx="10515600" cy="4023360"/>
+            <a:off x="822960" y="1097280"/>
+            <a:ext cx="10515600" cy="457200"/>
           </a:xfrm>
           <a:prstGeom prst="rect">
             <a:avLst/>
@@ -11116,146 +11143,80 @@
           </a:bodyPr>
           <a:lstStyle/>
           <a:p>
-            <a:pPr marL="342900" indent="-342900">
-              <a:spcAft>
-                <a:spcPts val="2000"/>
-              </a:spcAft>
-            </a:pPr>
-            <a:r>
-              <a:rPr sz="2400" b="1">
-                <a:solidFill>
-                  <a:srgbClr val="B4311A"/>
-                </a:solidFill>
-                <a:latin typeface="Helvetica Neue"/>
-              </a:rPr>
-              <a:t>-   </a:t>
-            </a:r>
-            <a:r>
-              <a:rPr sz="2400" b="0" i="0">
-                <a:solidFill>
-                  <a:srgbClr val="141B2D"/>
-                </a:solidFill>
-                <a:latin typeface="Helvetica Neue"/>
-              </a:rPr>
-              <a:t>The category leaks and that is worse for healthcare than furniture</a:t>
-            </a:r>
-          </a:p>
-          <a:p>
-            <a:pPr marL="342900" indent="-342900">
-              <a:spcAft>
-                <a:spcPts val="2000"/>
-              </a:spcAft>
-            </a:pPr>
-            <a:r>
-              <a:rPr sz="2400" b="1">
-                <a:solidFill>
-                  <a:srgbClr val="B4311A"/>
-                </a:solidFill>
-                <a:latin typeface="Helvetica Neue"/>
-              </a:rPr>
-              <a:t>-   </a:t>
-            </a:r>
-            <a:r>
-              <a:rPr sz="2400" b="0" i="0">
-                <a:solidFill>
-                  <a:srgbClr val="141B2D"/>
-                </a:solidFill>
-                <a:latin typeface="Helvetica Neue"/>
-              </a:rPr>
-              <a:t>Epsilon values don't transfer between indexes</a:t>
-            </a:r>
-          </a:p>
-          <a:p>
-            <a:pPr marL="342900" indent="-342900">
-              <a:spcAft>
-                <a:spcPts val="2000"/>
-              </a:spcAft>
-            </a:pPr>
-            <a:r>
-              <a:rPr sz="2400" b="1">
-                <a:solidFill>
-                  <a:srgbClr val="B4311A"/>
-                </a:solidFill>
-                <a:latin typeface="Helvetica Neue"/>
-              </a:rPr>
-              <a:t>-   </a:t>
-            </a:r>
-            <a:r>
-              <a:rPr sz="2400" b="0" i="0">
-                <a:solidFill>
-                  <a:srgbClr val="141B2D"/>
-                </a:solidFill>
-                <a:latin typeface="Helvetica Neue"/>
-              </a:rPr>
-              <a:t>Long tail queries stay unmeasurable</a:t>
-            </a:r>
-          </a:p>
-          <a:p>
-            <a:pPr marL="342900" indent="-342900">
-              <a:spcAft>
-                <a:spcPts val="2000"/>
-              </a:spcAft>
-            </a:pPr>
-            <a:r>
-              <a:rPr sz="2400" b="1">
-                <a:solidFill>
-                  <a:srgbClr val="B4311A"/>
-                </a:solidFill>
-                <a:latin typeface="Helvetica Neue"/>
-              </a:rPr>
-              <a:t>-   </a:t>
-            </a:r>
-            <a:r>
-              <a:rPr sz="2400" b="0" i="0">
-                <a:solidFill>
-                  <a:srgbClr val="141B2D"/>
-                </a:solidFill>
-                <a:latin typeface="Helvetica Neue"/>
-              </a:rPr>
-              <a:t>This protects </a:t>
-            </a:r>
-            <a:r>
-              <a:rPr sz="2200" b="0">
-                <a:solidFill>
-                  <a:srgbClr val="141B2D"/>
-                </a:solidFill>
-                <a:latin typeface="Consolas"/>
-              </a:rPr>
-              <a:t>user_query</a:t>
-            </a:r>
-            <a:r>
-              <a:rPr sz="2400" b="0" i="0">
-                <a:solidFill>
-                  <a:srgbClr val="141B2D"/>
-                </a:solidFill>
-                <a:latin typeface="Helvetica Neue"/>
-              </a:rPr>
-              <a:t> but </a:t>
-            </a:r>
-            <a:r>
-              <a:rPr sz="2200" b="0">
-                <a:solidFill>
-                  <a:srgbClr val="141B2D"/>
-                </a:solidFill>
-                <a:latin typeface="Consolas"/>
-              </a:rPr>
-              <a:t>ubi_events</a:t>
-            </a:r>
-            <a:r>
-              <a:rPr sz="2400" b="0" i="0">
-                <a:solidFill>
-                  <a:srgbClr val="141B2D"/>
-                </a:solidFill>
-                <a:latin typeface="Helvetica Neue"/>
-              </a:rPr>
-              <a:t> still holds clicks and ids in the clear</a:t>
-            </a:r>
-          </a:p>
-        </p:txBody>
-      </p:sp>
+            <a:pPr algn="ctr"/>
+            <a:r>
+              <a:rPr sz="1500" b="0" i="0">
+                <a:solidFill>
+                  <a:srgbClr val="5A647A"/>
+                </a:solidFill>
+                <a:latin typeface="Helvetica Neue"/>
+              </a:rPr>
+              <a:t>Each bar ranks the same judged products against a different vector, scored as NDCG@10</a:t>
+            </a:r>
+          </a:p>
+        </p:txBody>
+      </p:sp>
+      <p:pic>
+        <p:nvPicPr>
+          <p:cNvPr id="4" name="Picture 3" descr="12_ltr_segmentation.png"/>
+          <p:cNvPicPr>
+            <a:picLocks noChangeAspect="1"/>
+          </p:cNvPicPr>
+          <p:nvPr/>
+        </p:nvPicPr>
+        <p:blipFill>
+          <a:blip r:embed="rId2"/>
+          <a:stretch>
+            <a:fillRect/>
+          </a:stretch>
+        </p:blipFill>
+        <p:spPr>
+          <a:xfrm>
+            <a:off x="2696882" y="1828800"/>
+            <a:ext cx="6797931" cy="3931920"/>
+          </a:xfrm>
+          <a:prstGeom prst="rect">
+            <a:avLst/>
+          </a:prstGeom>
+        </p:spPr>
+      </p:pic>
       <p:sp>
         <p:nvSpPr>
           <p:cNvPr id="5" name="TextBox 4"/>
+          <p:cNvSpPr txBox="1"/>
+          <p:nvPr/>
+        </p:nvSpPr>
+        <p:spPr>
+          <a:xfrm>
+            <a:off x="822960" y="5989320"/>
+            <a:ext cx="8961120" cy="502920"/>
+          </a:xfrm>
+          <a:prstGeom prst="rect">
+            <a:avLst/>
+          </a:prstGeom>
+          <a:noFill/>
+        </p:spPr>
+        <p:txBody>
+          <a:bodyPr wrap="square">
+            <a:spAutoFit/>
+          </a:bodyPr>
+          <a:lstStyle/>
+          <a:p>
+            <a:r>
+              <a:rPr sz="1400" b="0" i="0">
+                <a:solidFill>
+                  <a:srgbClr val="5A647A"/>
+                </a:solidFill>
+                <a:latin typeface="Helvetica Neue"/>
+              </a:rPr>
+              <a:t>233,430 graded judgments, 40 segments (arbitrarily chosen), epsilon 1 at 20,000 users a segment</a:t>
+            </a:r>
+          </a:p>
+        </p:txBody>
+      </p:sp>
+      <p:sp>
+        <p:nvSpPr>
+          <p:cNvPr id="6" name="TextBox 5"/>
           <p:cNvSpPr txBox="1"/>
           <p:nvPr/>
         </p:nvSpPr>
@@ -11454,7 +11415,7 @@
                 </a:solidFill>
                 <a:latin typeface="Helvetica Neue"/>
               </a:rPr>
-              <a:t>Takeaways</a:t>
+              <a:t>The limitations</a:t>
             </a:r>
           </a:p>
         </p:txBody>
@@ -11474,7 +11435,7 @@
             <a:avLst/>
           </a:prstGeom>
           <a:solidFill>
-            <a:srgbClr val="005EB8"/>
+            <a:srgbClr val="B4311A"/>
           </a:solidFill>
           <a:ln>
             <a:noFill/>
@@ -11533,7 +11494,7 @@
             <a:r>
               <a:rPr sz="2400" b="1">
                 <a:solidFill>
-                  <a:srgbClr val="005EB8"/>
+                  <a:srgbClr val="B4311A"/>
                 </a:solidFill>
                 <a:latin typeface="Helvetica Neue"/>
               </a:rPr>
@@ -11546,7 +11507,7 @@
                 </a:solidFill>
                 <a:latin typeface="Helvetica Neue"/>
               </a:rPr>
-              <a:t>Storing embeddings instead of text is not privacy</a:t>
+              <a:t>The category leaks and that is worse for healthcare than furniture</a:t>
             </a:r>
           </a:p>
           <a:p>
@@ -11558,7 +11519,7 @@
             <a:r>
               <a:rPr sz="2400" b="1">
                 <a:solidFill>
-                  <a:srgbClr val="005EB8"/>
+                  <a:srgbClr val="B4311A"/>
                 </a:solidFill>
                 <a:latin typeface="Helvetica Neue"/>
               </a:rPr>
@@ -11571,7 +11532,7 @@
                 </a:solidFill>
                 <a:latin typeface="Helvetica Neue"/>
               </a:rPr>
-              <a:t>Keeping sensitive data out of the index beats redacting it later</a:t>
+              <a:t>Epsilon values don't transfer between indexes</a:t>
             </a:r>
           </a:p>
           <a:p>
@@ -11583,7 +11544,7 @@
             <a:r>
               <a:rPr sz="2400" b="1">
                 <a:solidFill>
-                  <a:srgbClr val="005EB8"/>
+                  <a:srgbClr val="B4311A"/>
                 </a:solidFill>
                 <a:latin typeface="Helvetica Neue"/>
               </a:rPr>
@@ -11596,7 +11557,7 @@
                 </a:solidFill>
                 <a:latin typeface="Helvetica Neue"/>
               </a:rPr>
-              <a:t>Verify the mechanism by testing it, not by trusting it</a:t>
+              <a:t>Long tail queries stay unmeasurable</a:t>
             </a:r>
           </a:p>
           <a:p>
@@ -11608,7 +11569,7 @@
             <a:r>
               <a:rPr sz="2400" b="1">
                 <a:solidFill>
-                  <a:srgbClr val="005EB8"/>
+                  <a:srgbClr val="B4311A"/>
                 </a:solidFill>
                 <a:latin typeface="Helvetica Neue"/>
               </a:rPr>
@@ -11617,11 +11578,47 @@
             <a:r>
               <a:rPr sz="2400" b="0" i="0">
                 <a:solidFill>
-                  <a:srgbClr val="005EB8"/>
-                </a:solidFill>
-                <a:latin typeface="Helvetica Neue"/>
-              </a:rPr>
-              <a:t>You trade individual resolution for population accuracy but that's what relevance tuning needs</a:t>
+                  <a:srgbClr val="141B2D"/>
+                </a:solidFill>
+                <a:latin typeface="Helvetica Neue"/>
+              </a:rPr>
+              <a:t>This protects </a:t>
+            </a:r>
+            <a:r>
+              <a:rPr sz="2200" b="0">
+                <a:solidFill>
+                  <a:srgbClr val="141B2D"/>
+                </a:solidFill>
+                <a:latin typeface="Consolas"/>
+              </a:rPr>
+              <a:t>user_query</a:t>
+            </a:r>
+            <a:r>
+              <a:rPr sz="2400" b="0" i="0">
+                <a:solidFill>
+                  <a:srgbClr val="141B2D"/>
+                </a:solidFill>
+                <a:latin typeface="Helvetica Neue"/>
+              </a:rPr>
+              <a:t> but </a:t>
+            </a:r>
+            <a:r>
+              <a:rPr sz="2200" b="0">
+                <a:solidFill>
+                  <a:srgbClr val="141B2D"/>
+                </a:solidFill>
+                <a:latin typeface="Consolas"/>
+              </a:rPr>
+              <a:t>ubi_events</a:t>
+            </a:r>
+            <a:r>
+              <a:rPr sz="2400" b="0" i="0">
+                <a:solidFill>
+                  <a:srgbClr val="141B2D"/>
+                </a:solidFill>
+                <a:latin typeface="Helvetica Neue"/>
+              </a:rPr>
+              <a:t> still holds clicks and ids in the clear</a:t>
             </a:r>
           </a:p>
         </p:txBody>
@@ -11670,6 +11667,268 @@
 </file>
 
 <file path=ppt/slides/slide31.xml><?xml version="1.0" encoding="utf-8"?>
+<p:sld xmlns:a="http://schemas.openxmlformats.org/drawingml/2006/main" xmlns:p="http://schemas.openxmlformats.org/presentationml/2006/main" xmlns:r="http://schemas.openxmlformats.org/officeDocument/2006/relationships">
+  <p:cSld>
+    <p:bg>
+      <p:bgPr>
+        <a:solidFill>
+          <a:srgbClr val="FFFFFF"/>
+        </a:solidFill>
+        <a:effectLst/>
+      </p:bgPr>
+    </p:bg>
+    <p:spTree>
+      <p:nvGrpSpPr>
+        <p:cNvPr id="1" name=""/>
+        <p:cNvGrpSpPr/>
+        <p:nvPr/>
+      </p:nvGrpSpPr>
+      <p:grpSpPr/>
+      <p:sp>
+        <p:nvSpPr>
+          <p:cNvPr id="2" name="TextBox 1"/>
+          <p:cNvSpPr txBox="1"/>
+          <p:nvPr/>
+        </p:nvSpPr>
+        <p:spPr>
+          <a:xfrm>
+            <a:off x="822960" y="640080"/>
+            <a:ext cx="10515600" cy="960120"/>
+          </a:xfrm>
+          <a:prstGeom prst="rect">
+            <a:avLst/>
+          </a:prstGeom>
+          <a:noFill/>
+        </p:spPr>
+        <p:txBody>
+          <a:bodyPr wrap="square">
+            <a:spAutoFit/>
+          </a:bodyPr>
+          <a:lstStyle/>
+          <a:p>
+            <a:r>
+              <a:rPr sz="3400" b="1">
+                <a:solidFill>
+                  <a:srgbClr val="141B2D"/>
+                </a:solidFill>
+                <a:latin typeface="Helvetica Neue"/>
+              </a:rPr>
+              <a:t>Takeaways</a:t>
+            </a:r>
+          </a:p>
+        </p:txBody>
+      </p:sp>
+      <p:sp>
+        <p:nvSpPr>
+          <p:cNvPr id="3" name="Rectangle 2"/>
+          <p:cNvSpPr/>
+          <p:nvPr/>
+        </p:nvSpPr>
+        <p:spPr>
+          <a:xfrm>
+            <a:off x="822960" y="1276603"/>
+            <a:ext cx="1463040" cy="50800"/>
+          </a:xfrm>
+          <a:prstGeom prst="rect">
+            <a:avLst/>
+          </a:prstGeom>
+          <a:solidFill>
+            <a:srgbClr val="005EB8"/>
+          </a:solidFill>
+          <a:ln>
+            <a:noFill/>
+          </a:ln>
+          <a:effectLst/>
+        </p:spPr>
+        <p:style>
+          <a:lnRef idx="1">
+            <a:schemeClr val="accent1"/>
+          </a:lnRef>
+          <a:fillRef idx="3">
+            <a:schemeClr val="accent1"/>
+          </a:fillRef>
+          <a:effectRef idx="2">
+            <a:schemeClr val="accent1"/>
+          </a:effectRef>
+          <a:fontRef idx="minor">
+            <a:schemeClr val="lt1"/>
+          </a:fontRef>
+        </p:style>
+        <p:txBody>
+          <a:bodyPr rtlCol="0" anchor="ctr"/>
+          <a:lstStyle/>
+          <a:p>
+            <a:pPr algn="ctr"/>
+          </a:p>
+        </p:txBody>
+      </p:sp>
+      <p:sp>
+        <p:nvSpPr>
+          <p:cNvPr id="4" name="TextBox 3"/>
+          <p:cNvSpPr txBox="1"/>
+          <p:nvPr/>
+        </p:nvSpPr>
+        <p:spPr>
+          <a:xfrm>
+            <a:off x="822960" y="2057400"/>
+            <a:ext cx="10515600" cy="4023360"/>
+          </a:xfrm>
+          <a:prstGeom prst="rect">
+            <a:avLst/>
+          </a:prstGeom>
+          <a:noFill/>
+        </p:spPr>
+        <p:txBody>
+          <a:bodyPr wrap="square">
+            <a:spAutoFit/>
+          </a:bodyPr>
+          <a:lstStyle/>
+          <a:p>
+            <a:pPr marL="342900" indent="-342900">
+              <a:spcAft>
+                <a:spcPts val="2000"/>
+              </a:spcAft>
+            </a:pPr>
+            <a:r>
+              <a:rPr sz="2400" b="1">
+                <a:solidFill>
+                  <a:srgbClr val="005EB8"/>
+                </a:solidFill>
+                <a:latin typeface="Helvetica Neue"/>
+              </a:rPr>
+              <a:t>-   </a:t>
+            </a:r>
+            <a:r>
+              <a:rPr sz="2400" b="0" i="0">
+                <a:solidFill>
+                  <a:srgbClr val="141B2D"/>
+                </a:solidFill>
+                <a:latin typeface="Helvetica Neue"/>
+              </a:rPr>
+              <a:t>Storing embeddings instead of text is not privacy</a:t>
+            </a:r>
+          </a:p>
+          <a:p>
+            <a:pPr marL="342900" indent="-342900">
+              <a:spcAft>
+                <a:spcPts val="2000"/>
+              </a:spcAft>
+            </a:pPr>
+            <a:r>
+              <a:rPr sz="2400" b="1">
+                <a:solidFill>
+                  <a:srgbClr val="005EB8"/>
+                </a:solidFill>
+                <a:latin typeface="Helvetica Neue"/>
+              </a:rPr>
+              <a:t>-   </a:t>
+            </a:r>
+            <a:r>
+              <a:rPr sz="2400" b="0" i="0">
+                <a:solidFill>
+                  <a:srgbClr val="141B2D"/>
+                </a:solidFill>
+                <a:latin typeface="Helvetica Neue"/>
+              </a:rPr>
+              <a:t>Keeping sensitive data out of the index beats redacting it later</a:t>
+            </a:r>
+          </a:p>
+          <a:p>
+            <a:pPr marL="342900" indent="-342900">
+              <a:spcAft>
+                <a:spcPts val="2000"/>
+              </a:spcAft>
+            </a:pPr>
+            <a:r>
+              <a:rPr sz="2400" b="1">
+                <a:solidFill>
+                  <a:srgbClr val="005EB8"/>
+                </a:solidFill>
+                <a:latin typeface="Helvetica Neue"/>
+              </a:rPr>
+              <a:t>-   </a:t>
+            </a:r>
+            <a:r>
+              <a:rPr sz="2400" b="0" i="0">
+                <a:solidFill>
+                  <a:srgbClr val="141B2D"/>
+                </a:solidFill>
+                <a:latin typeface="Helvetica Neue"/>
+              </a:rPr>
+              <a:t>Verify the mechanism by testing it, not by trusting it</a:t>
+            </a:r>
+          </a:p>
+          <a:p>
+            <a:pPr marL="342900" indent="-342900">
+              <a:spcAft>
+                <a:spcPts val="2000"/>
+              </a:spcAft>
+            </a:pPr>
+            <a:r>
+              <a:rPr sz="2400" b="1">
+                <a:solidFill>
+                  <a:srgbClr val="005EB8"/>
+                </a:solidFill>
+                <a:latin typeface="Helvetica Neue"/>
+              </a:rPr>
+              <a:t>-   </a:t>
+            </a:r>
+            <a:r>
+              <a:rPr sz="2400" b="0" i="0">
+                <a:solidFill>
+                  <a:srgbClr val="005EB8"/>
+                </a:solidFill>
+                <a:latin typeface="Helvetica Neue"/>
+              </a:rPr>
+              <a:t>You trade individual resolution for population accuracy but that's what relevance tuning needs</a:t>
+            </a:r>
+          </a:p>
+        </p:txBody>
+      </p:sp>
+      <p:sp>
+        <p:nvSpPr>
+          <p:cNvPr id="5" name="TextBox 4"/>
+          <p:cNvSpPr txBox="1"/>
+          <p:nvPr/>
+        </p:nvSpPr>
+        <p:spPr>
+          <a:xfrm>
+            <a:off x="10405872" y="6144768"/>
+            <a:ext cx="960120" cy="411480"/>
+          </a:xfrm>
+          <a:prstGeom prst="rect">
+            <a:avLst/>
+          </a:prstGeom>
+          <a:noFill/>
+        </p:spPr>
+        <p:txBody>
+          <a:bodyPr wrap="square">
+            <a:spAutoFit/>
+          </a:bodyPr>
+          <a:lstStyle/>
+          <a:p>
+            <a:pPr algn="r"/>
+            <a:r>
+              <a:rPr sz="1300" b="0">
+                <a:solidFill>
+                  <a:srgbClr val="5A647A"/>
+                </a:solidFill>
+                <a:latin typeface="Helvetica Neue"/>
+              </a:rPr>
+              <a:t>31</a:t>
+            </a:r>
+          </a:p>
+        </p:txBody>
+      </p:sp>
+    </p:spTree>
+  </p:cSld>
+  <p:clrMapOvr>
+    <a:masterClrMapping/>
+  </p:clrMapOvr>
+</p:sld>
+</file>
+
+<file path=ppt/slides/slide32.xml><?xml version="1.0" encoding="utf-8"?>
 <p:sld xmlns:a="http://schemas.openxmlformats.org/drawingml/2006/main" xmlns:p="http://schemas.openxmlformats.org/presentationml/2006/main" xmlns:r="http://schemas.openxmlformats.org/officeDocument/2006/relationships">
   <p:cSld>
     <p:bg>
@@ -11936,7 +12195,7 @@
                 </a:solidFill>
                 <a:latin typeface="Helvetica Neue"/>
               </a:rPr>
-              <a:t>31</a:t>
+              <a:t>32</a:t>
             </a:r>
           </a:p>
         </p:txBody>

--- a/ldp_for_search_slides.pptx
+++ b/ldp_for_search_slides.pptx
@@ -35,8 +35,6 @@
     <p:sldId id="283" r:id="rId35"/>
     <p:sldId id="284" r:id="rId36"/>
     <p:sldId id="285" r:id="rId37"/>
-    <p:sldId id="286" r:id="rId38"/>
-    <p:sldId id="287" r:id="rId39"/>
   </p:sldIdLst>
   <p:sldSz cx="12191695" cy="6858000" type="screen4x3"/>
   <p:notesSz cx="6858000" cy="9144000"/>
@@ -1233,7 +1231,7 @@
           <a:lstStyle/>
           <a:p>
             <a:r>
-              <a:t>This is the conceptual core of the talk. Everything before it was setup. LDP is not a privacy tax, it is a trade of individual resolution for population accuracy.</a:t>
+              <a:t>This is the conceptual core of the talk. Everything before it was setup. LDP is not a privacy tax, it is a trade of individual resolution for population accuracy. No chart backs this up any more, so carry section 11's result yourself. 480 real WANDS queries in five segments, every user privatizing independently on their own device, no readable query anywhere and no trusted intermediate step. Individual recovery per segment runs 0.020, 0.020, 0.063, 0.070 and 0.030 against chance of 0.014 to 0.031, so one to two and a half times chance, which is not usable. Segment identification is 5 of 5, exact. Same data, same epsilon of 1.0, two different questions. If anyone wants the convergence behind it, the error falls as one over root n across four orders of magnitude and the notebook plots it.</a:t>
             </a:r>
           </a:p>
         </p:txBody>
@@ -1373,7 +1371,7 @@
           <a:lstStyle/>
           <a:p>
             <a:r>
-              <a:t>The centerpiece, and now the only place section 11's result appears, so open with it. 480 real WANDS queries in five segments, every user privatizing independently on their own device, no readable query anywhere and no trusted intermediate step. Individual recovery per segment runs 0.020, 0.020, 0.063, 0.070 and 0.030 against chance of 0.014 to 0.031, roughly one to two and a half times chance, which is not usable. Segment identification is 5 of 5, exact. Same data, same epsilon of 1.0, two different questions. Then the plot. Take the shape first. More users, less error. The measured green line tracks the predicted grey one across four orders of magnitude. This is ordinary statistics, so say so: averaging n independent things shrinks the noise as one over root n, the same reason a poll of four thousand beats one of one thousand. Nothing here is special to privacy. Then the red line. Read it off the bottom axis: 2,300 users. That is the answer, and it is the next slide. If asked where 2,300 comes from, it is where the measured error drops under 0.128, the average spread of one coordinate across the index. That bar is strict on purpose. Two typical products sit about 0.82 apart, so the line is roughly six times stricter than just telling products apart.</a:t>
+              <a:t>This now carries the one operational number they can apply on Monday, so slow down on the third bullet. The 2,300 is where the measured error crosses the spread of the index, 0.128, on the convergence plot in the notebook. That bar is strict on purpose, since two typical products sit about 0.82 apart, and it is specific to this index. It is not a constant, because error goes as one over epsilon times one over root n, so the threshold scales as one over epsilon squared, which puts it at about 9,200 users at epsilon 0.5 and about 575 at epsilon 2. The question everyone is holding, answered now that they have seen the evidence for every step. Step one is the reframe: there is no epsilon that is private and accurate for one query, so stop looking for it on the tradeoff curve. Point back to the attack curve for step two, because that is how you measure what an epsilon buys on an index you actually run. Step three is the third bullet here. Step four is the whole talk in one line: error goes as one over epsilon times one over root n, so privacy rides on epsilon alone while accuracy has two dials, and n is the one that costs nothing. If someone wants a starting number, say epsilon 1 on an index like this one and then measure, rather than giving them a figure to carry home unexamined.</a:t>
             </a:r>
           </a:p>
         </p:txBody>
@@ -1443,7 +1441,7 @@
           <a:lstStyle/>
           <a:p>
             <a:r>
-              <a:t>Give the audience one operational number they can apply on Monday. This is it. The 2,300 is where the measured error crosses the spread of the index, 0.128, on the convergence plot. It is not a constant: error goes as one over epsilon times one over root n, so the threshold scales as one over epsilon squared. At epsilon 0.5 it is about 9,200 users, at epsilon 2 it is about 575.</a:t>
+              <a:t>The reframe. Every input relevance tuning actually needs is a population statistic. Say queries rather than people, because the identifiers are still in the clear and the limitations slide admits it shortly. Exact is doing work too, since the category still leaks at a usable epsilon, which is the first limitation you show. Let this sit on screen for a beat before moving on.</a:t>
             </a:r>
           </a:p>
         </p:txBody>
@@ -1513,7 +1511,7 @@
           <a:lstStyle/>
           <a:p>
             <a:r>
-              <a:t>The question everyone is holding, answered now that they have seen the evidence for every step. Step one is the reframe: there is no epsilon that is private and accurate for one query, so stop looking for it on the tradeoff curve. Point back to the attack curve for step two, because that is how you measure what an epsilon buys on an index you actually run. Step three is the convergence plot and the previous slide. Step four is the whole talk in one line: error goes as one over epsilon times one over root n, so privacy rides on epsilon alone while accuracy has two dials, and n is the one that costs nothing. If someone wants a starting number, say epsilon 1 on an index like this one and then measure, rather than giving them a figure to carry home unexamined.</a:t>
+              <a:t>Land the integration, then be honest about what does not work.</a:t>
             </a:r>
           </a:p>
         </p:txBody>
@@ -1583,7 +1581,7 @@
           <a:lstStyle/>
           <a:p>
             <a:r>
-              <a:t>The reframe. Every input relevance tuning actually needs is a population statistic. Let this sit on screen for a beat before moving on.</a:t>
+              <a:t>Say up front that none of this is built into UBI today. ubi.js is a serializer, and the embedding, the projection and the noise are code the adopter writes and runs before handing the request to trackQuery. The notes file has the call shape and the two ways to get it wrong. The architectural payoff. The trust boundary moves to the device, which is the only place the raw query legitimately exists. The last bullet answers the obvious objection, that the people collecting the data are the ones choosing how much privacy users get. True, and the standing critique of deployed LDP. The web deployment is the answer: because the mechanism ships as JavaScript, a user, an auditor or a regulator can open devtools and check the epsilon. A server-side pipeline or a native app cannot make that claim. It turns trust us into check us, which is the same promise as the rest of the talk.</a:t>
             </a:r>
           </a:p>
         </p:txBody>
@@ -1653,7 +1651,7 @@
           <a:lstStyle/>
           <a:p>
             <a:r>
-              <a:t>Land the integration, then be honest about what does not work.</a:t>
+              <a:t>The integration question, answered concretely, and it needs no change to the UBI spec. query_attributes is typed as a free-form object for exactly this kind of thing, and the epsilon travels with the record so a reader knows the budget it was collected under. user_query is emptied rather than dropped because the published schema lists it as required. Worth knowing if someone asks: the schema contradicts itself there, since the field also carries a comment saying it is not required, for recommendation systems with no typed query. Two things to volunteer: the identifiers are deliberately identical on both sides, which is the limitation two slides later, and every dashboard that reads user_query breaks, which is the real migration cost. A float array in an object is not a knn_vector either, so averaging these at query time needs a scripted aggregation or an explicit vector mapping.</a:t>
             </a:r>
           </a:p>
         </p:txBody>
@@ -1723,7 +1721,7 @@
           <a:lstStyle/>
           <a:p>
             <a:r>
-              <a:t>Say up front that none of this is built into UBI today. ubi.js is a serializer, and the embedding, the projection and the noise are code the adopter writes and runs before handing the request to trackQuery. The notes file has the call shape and the two ways to get it wrong. The architectural payoff. The trust boundary moves to the device, which is the only place the raw query legitimately exists. The last bullet answers the obvious objection, that the people collecting the data are the ones choosing how much privacy users get. True, and the standing critique of deployed LDP. The web deployment is the answer: because the mechanism ships as JavaScript, a user, an auditor or a regulator can open devtools and check the epsilon. A server-side pipeline or a native app cannot make that claim. It turns trust us into check us, which is the same promise as the rest of the talk.</a:t>
+              <a:t>Tie back to the abstract's promise about LTR and query-intent analysis. Then name the thing that genuinely goes away. If anyone presses on the learning-to-rank bullet, be straight: LTR judgments come from clicks, and this mechanism does not touch clicks, so that signal survives because it was never protected rather than because LDP preserved it. The next slide shows how that training actually works, and the limitations slide after it says what does not.</a:t>
             </a:r>
           </a:p>
         </p:txBody>
@@ -1793,7 +1791,7 @@
           <a:lstStyle/>
           <a:p>
             <a:r>
-              <a:t>The integration question, answered concretely, and it needs no change to the UBI spec. query_attributes is typed as a free-form object for exactly this kind of thing, and the epsilon travels with the record so a reader knows the budget it was collected under. user_query is emptied rather than dropped because the published schema lists it as required. Worth knowing if someone asks: the schema contradicts itself there, since the field also carries a comment saying it is not required, for recommendation systems with no typed query. Two things to volunteer: the identifiers are deliberately identical on both sides, which is the limitation two slides later, and every dashboard that reads user_query breaks, which is the real migration cost. A float array in an object is not a knn_vector either, so averaging these at query time needs a scripted aggregation or an explicit vector mapping.</a:t>
+              <a:t>This expands the learning-to-rank bullet on the previous slide, and it is the one place to be careful, because it is a recipe rather than a result. Nothing in this talk trains a ranker. Say so if asked. What is measured is the inputs: clicks were never touched by the mechanism, and the segment centroid is accurate above roughly 2,300 users. The labels are therefore exactly what they are today. What moves is the key. You cannot read a query, so you cannot build judgment lists per query string, and you cannot recompute BM25 against words you do not have. You group by segment instead and use its centroid as the query representation, which suits an embedding ranker and suits a term-based feature set badly. Walk the example slowly, it is the whole slide: a few thousand people search for beds, every one of them privatizes on their own device, and the server averages what arrives into a centroid that is accurate but belongs to nobody. The clicks sitting next to it were never noised. That pair, the centroid and the clicks, is a training example. Beds is the cohort behind the convergence plot, so this is the same segment they have already seen measured. Name the category honestly: this is closer to intent-based ranking profiles than to per-query learning-to-rank, and it is coarser, because every query in a segment collapses to one key. If someone asks how much that costs, the next slide measures it, and the two losses separate cleanly. Keying on segments instead of queries is a modelling choice you can evaluate on clean data with no privacy involved, while the noise itself costs almost nothing above the threshold the convergence plot showed. Everything inherits the segment constraint from earlier, so head segments train and the long tail does not reach the user count.</a:t>
             </a:r>
           </a:p>
         </p:txBody>
@@ -1863,7 +1861,7 @@
           <a:lstStyle/>
           <a:p>
             <a:r>
-              <a:t>Tie back to the abstract's promise about LTR and query-intent analysis. Then name the thing that genuinely goes away. If anyone presses on the learning-to-rank bullet, be straight: LTR judgments come from clicks, and this mechanism does not touch clicks, so that signal survives because it was never protected rather than because LDP preserved it. The next slide shows how that training actually works, and the limitations slide after it says what does not.</a:t>
+              <a:t>The one slide in this part with a measurement behind it, so lean on it. 472 WANDS queries ranked against 233,430 graded judgments, scored as NDCG@10. The only thing that changes between the three lines is the vector each query is ranked against. Blue is the query itself at 0.763, which is the ceiling. Orange is the segment centroid and green is that centroid recovered from noisy queries at epsilon 1, at 40 segments of roughly a dozen queries each. Point at the last two bars first, because their being identical is the finding. The noise costs 0.001 here and never more than 0.003 anywhere in the sweep, so the whole drop from the first bar is the price of segmenting rather than the price of privacy. That price is real but it moves with how finely you segment, running from 0.586 at five segments to 0.737 at 320, and the notebook has the full curve if anyone wants it. Two caveats to volunteer. This ranks by vector distance rather than training a ranker, which isolates the query representation instead of measuring a production system. And 480 queries is a small corpus, so the numbers are indicative.</a:t>
             </a:r>
           </a:p>
         </p:txBody>
@@ -1933,7 +1931,7 @@
           <a:lstStyle/>
           <a:p>
             <a:r>
-              <a:t>This expands the learning-to-rank bullet on the previous slide, and it is the one place to be careful, because it is a recipe rather than a result. Nothing in this talk trains a ranker. Say so if asked. What is measured is the inputs: clicks were never touched by the mechanism, and the segment centroid is accurate above roughly 2,300 users. The labels are therefore exactly what they are today. What moves is the key. You cannot read a query, so you cannot build judgment lists per query string, and you cannot recompute BM25 against words you do not have. You group by segment instead and use its centroid as the query representation, which suits an embedding ranker and suits a term-based feature set badly. Walk the example slowly, it is the whole slide: a few thousand people search for beds, every one of them privatizes on their own device, and the server averages what arrives into a centroid that is accurate but belongs to nobody. The clicks sitting next to it were never noised. That pair, the centroid and the clicks, is a training example. Beds is the cohort behind the convergence plot, so this is the same segment they have already seen measured. Name the category honestly: this is closer to intent-based ranking profiles than to per-query learning-to-rank, and it is coarser, because every query in a segment collapses to one key. If someone asks how much that costs, the next slide measures it, and the two losses separate cleanly. Keying on segments instead of queries is a modelling choice you can evaluate on clean data with no privacy involved, while the noise itself costs almost nothing above the threshold the convergence plot showed. Everything inherits the segment constraint from earlier, so head segments train and the long tail does not reach the user count.</a:t>
+              <a:t>Every one of these is a question someone will ask. Answering them first is cheaper than answering them under pressure. Also mention that a formal epsilon-DP claim needs sensitivity calibrated to the true coordinate range. Here the vectors are L2-normalized before PCA, so the whole 20-dimensional vector has norm 1, which makes sensitivity 1.0 per coordinate conservative rather than tight. That is the answer if someone asks how sensitivity was set. Two follow-ups come off that bullet. Asked how often epsilon needs re-tuning, say when you re-embed or refit PCA, because routine additions to a large index do not move the coordinate spread, and normalizing before PCA keeps sensitivity itself stable whatever the catalogue holds. Asked whether privacy decays over time, say yes but not through epsilon: one user's repeated queries compose, and an attacker who averages that one user's own noised draws recovers the intent, which is the asymmetry of the payoff turned around. Epsilon is a budget per release rather than a standing property, so the fix is rotating or dropping client_id and session_id, not a smaller epsilon. On the long tail, which someone will ask about: the workarounds are coarser segments and longer time windows, and both are the same trade at lower resolution, because they only raise n. The genuinely different answer is shuffle DP or secure aggregation, which buys far more utility at the same epsilon but changes the architecture rather than the parameter. Worth adding that tail relevance is usually improved by retrieval work rather than behavioural signal anyway. On the last bullet, be direct: this is scoped work, not a finished privacy story for all of UBI. The query text is covered. Clicks are counts rather than vectors and want randomized response, and client_id and session_id would need rotating or dropping. That is the honest answer to the linkability half of the problem raised in Part 1.</a:t>
             </a:r>
           </a:p>
         </p:txBody>
@@ -2003,7 +2001,7 @@
           <a:lstStyle/>
           <a:p>
             <a:r>
-              <a:t>The one slide in this part with a measurement behind it, so lean on it. 472 WANDS queries ranked against 233,430 graded judgments, scored as NDCG@10. The only thing that changes between the three lines is the vector each query is ranked against. Blue is the query itself at 0.763, which is the ceiling. Orange is the segment centroid and green is that centroid recovered from noisy queries at epsilon 1, at 40 segments of roughly a dozen queries each. Point at the last two bars first, because their being identical is the finding. The noise costs 0.001 here and never more than 0.003 anywhere in the sweep, so the whole drop from the first bar is the price of segmenting rather than the price of privacy. That price is real but it moves with how finely you segment, running from 0.586 at five segments to 0.737 at 320, and the notebook has the full curve if anyone wants it. Two caveats to volunteer. This ranks by vector distance rather than training a ranker, which isolates the query representation instead of measuring a production system. And 480 queries is a small corpus, so the numbers are indicative.</a:t>
+              <a:t>Four sentences. If someone remembers only one, it should be the last.</a:t>
             </a:r>
           </a:p>
         </p:txBody>
@@ -2099,146 +2097,6 @@
 </file>
 
 <file path=ppt/notesSlides/notesSlide30.xml><?xml version="1.0" encoding="utf-8"?>
-<p:notes xmlns:a="http://schemas.openxmlformats.org/drawingml/2006/main" xmlns:p="http://schemas.openxmlformats.org/presentationml/2006/main" xmlns:r="http://schemas.openxmlformats.org/officeDocument/2006/relationships">
-  <p:cSld>
-    <p:spTree>
-      <p:nvGrpSpPr>
-        <p:cNvPr id="1" name=""/>
-        <p:cNvGrpSpPr/>
-        <p:nvPr/>
-      </p:nvGrpSpPr>
-      <p:grpSpPr>
-        <a:xfrm>
-          <a:off x="0" y="0"/>
-          <a:ext cx="0" cy="0"/>
-          <a:chOff x="0" y="0"/>
-          <a:chExt cx="0" cy="0"/>
-        </a:xfrm>
-      </p:grpSpPr>
-      <p:sp>
-        <p:nvSpPr>
-          <p:cNvPr id="2" name="Slide Image Placeholder 1"/>
-          <p:cNvSpPr>
-            <a:spLocks noGrp="1"/>
-          </p:cNvSpPr>
-          <p:nvPr>
-            <p:ph type="sldImg" idx="2"/>
-          </p:nvPr>
-        </p:nvSpPr>
-        <p:spPr/>
-      </p:sp>
-      <p:sp>
-        <p:nvSpPr>
-          <p:cNvPr id="3" name="Notes Placeholder 2"/>
-          <p:cNvSpPr>
-            <a:spLocks noGrp="1"/>
-          </p:cNvSpPr>
-          <p:nvPr>
-            <p:ph type="body" idx="3" sz="quarter"/>
-          </p:nvPr>
-        </p:nvSpPr>
-        <p:spPr/>
-        <p:txBody>
-          <a:bodyPr/>
-          <a:lstStyle/>
-          <a:p>
-            <a:r>
-              <a:t>Every one of these is a question someone will ask. Answering them first is cheaper than answering them under pressure. Also mention that a formal epsilon-DP claim needs sensitivity calibrated to the true coordinate range. Here the vectors are L2-normalized before PCA, so the whole 20-dimensional vector has norm 1, which makes sensitivity 1.0 per coordinate conservative rather than tight. That is the answer if someone asks how sensitivity was set. Two follow-ups come off that bullet. Asked how often epsilon needs re-tuning, say when you re-embed or refit PCA, because routine additions to a large index do not move the coordinate spread, and normalizing before PCA keeps sensitivity itself stable whatever the catalogue holds. Asked whether privacy decays over time, say yes but not through epsilon: one user's repeated queries compose, and an attacker who averages that one user's own noised draws recovers the intent, which is the asymmetry of the payoff turned around. Epsilon is a budget per release rather than a standing property, so the fix is rotating or dropping client_id and session_id, not a smaller epsilon. On the long tail, which someone will ask about: the workarounds are coarser segments and longer time windows, and both are the same trade at lower resolution, because they only raise n. The genuinely different answer is shuffle DP or secure aggregation, which buys far more utility at the same epsilon but changes the architecture rather than the parameter. Worth adding that tail relevance is usually improved by retrieval work rather than behavioural signal anyway. On the last bullet, be direct: this is scoped work, not a finished privacy story for all of UBI. The query text is covered. Clicks are counts rather than vectors and want randomized response, and client_id and session_id would need rotating or dropping. That is the honest answer to the linkability half of the problem raised in Part 1.</a:t>
-            </a:r>
-          </a:p>
-        </p:txBody>
-      </p:sp>
-      <p:sp>
-        <p:nvSpPr>
-          <p:cNvPr id="4" name="Slide Number Placeholder 3"/>
-          <p:cNvSpPr>
-            <a:spLocks noGrp="1"/>
-          </p:cNvSpPr>
-          <p:nvPr>
-            <p:ph type="sldNum" idx="5" sz="quarter"/>
-          </p:nvPr>
-        </p:nvSpPr>
-        <p:spPr/>
-      </p:sp>
-    </p:spTree>
-  </p:cSld>
-  <p:clrMapOvr>
-    <a:masterClrMapping/>
-  </p:clrMapOvr>
-</p:notes>
-</file>
-
-<file path=ppt/notesSlides/notesSlide31.xml><?xml version="1.0" encoding="utf-8"?>
-<p:notes xmlns:a="http://schemas.openxmlformats.org/drawingml/2006/main" xmlns:p="http://schemas.openxmlformats.org/presentationml/2006/main" xmlns:r="http://schemas.openxmlformats.org/officeDocument/2006/relationships">
-  <p:cSld>
-    <p:spTree>
-      <p:nvGrpSpPr>
-        <p:cNvPr id="1" name=""/>
-        <p:cNvGrpSpPr/>
-        <p:nvPr/>
-      </p:nvGrpSpPr>
-      <p:grpSpPr>
-        <a:xfrm>
-          <a:off x="0" y="0"/>
-          <a:ext cx="0" cy="0"/>
-          <a:chOff x="0" y="0"/>
-          <a:chExt cx="0" cy="0"/>
-        </a:xfrm>
-      </p:grpSpPr>
-      <p:sp>
-        <p:nvSpPr>
-          <p:cNvPr id="2" name="Slide Image Placeholder 1"/>
-          <p:cNvSpPr>
-            <a:spLocks noGrp="1"/>
-          </p:cNvSpPr>
-          <p:nvPr>
-            <p:ph type="sldImg" idx="2"/>
-          </p:nvPr>
-        </p:nvSpPr>
-        <p:spPr/>
-      </p:sp>
-      <p:sp>
-        <p:nvSpPr>
-          <p:cNvPr id="3" name="Notes Placeholder 2"/>
-          <p:cNvSpPr>
-            <a:spLocks noGrp="1"/>
-          </p:cNvSpPr>
-          <p:nvPr>
-            <p:ph type="body" idx="3" sz="quarter"/>
-          </p:nvPr>
-        </p:nvSpPr>
-        <p:spPr/>
-        <p:txBody>
-          <a:bodyPr/>
-          <a:lstStyle/>
-          <a:p>
-            <a:r>
-              <a:t>Four sentences. If someone remembers only one, it should be the last.</a:t>
-            </a:r>
-          </a:p>
-        </p:txBody>
-      </p:sp>
-      <p:sp>
-        <p:nvSpPr>
-          <p:cNvPr id="4" name="Slide Number Placeholder 3"/>
-          <p:cNvSpPr>
-            <a:spLocks noGrp="1"/>
-          </p:cNvSpPr>
-          <p:nvPr>
-            <p:ph type="sldNum" idx="5" sz="quarter"/>
-          </p:nvPr>
-        </p:nvSpPr>
-        <p:spPr/>
-      </p:sp>
-    </p:spTree>
-  </p:cSld>
-  <p:clrMapOvr>
-    <a:masterClrMapping/>
-  </p:clrMapOvr>
-</p:notes>
-</file>
-
-<file path=ppt/notesSlides/notesSlide32.xml><?xml version="1.0" encoding="utf-8"?>
 <p:notes xmlns:a="http://schemas.openxmlformats.org/drawingml/2006/main" xmlns:p="http://schemas.openxmlformats.org/presentationml/2006/main" xmlns:r="http://schemas.openxmlformats.org/officeDocument/2006/relationships">
   <p:cSld>
     <p:spTree>
@@ -8120,7 +7978,7 @@
                 </a:solidFill>
                 <a:latin typeface="Helvetica Neue"/>
               </a:rPr>
-              <a:t>Epsilon 1.2 is barely better than guessing</a:t>
+              <a:t>Search quality vs epsilon values</a:t>
             </a:r>
           </a:p>
         </p:txBody>
@@ -8179,7 +8037,7 @@
                 </a:solidFill>
                 <a:latin typeface="Helvetica Neue"/>
               </a:rPr>
-              <a:t>The red line is where the Part 2 demo ran. Utility only comes back where the attacker wins too.</a:t>
+              <a:t>Search quality only returns as the noise comes down</a:t>
             </a:r>
           </a:p>
         </p:txBody>
@@ -8818,8 +8676,8 @@
         </p:nvSpPr>
         <p:spPr>
           <a:xfrm>
-            <a:off x="822960" y="411480"/>
-            <a:ext cx="10515600" cy="822960"/>
+            <a:off x="822960" y="640080"/>
+            <a:ext cx="10515600" cy="960120"/>
           </a:xfrm>
           <a:prstGeom prst="rect">
             <a:avLst/>
@@ -8833,27 +8691,71 @@
           <a:lstStyle/>
           <a:p>
             <a:r>
-              <a:rPr sz="3000" b="1">
+              <a:rPr sz="3400" b="1">
                 <a:solidFill>
                   <a:srgbClr val="141B2D"/>
                 </a:solidFill>
                 <a:latin typeface="Helvetica Neue"/>
               </a:rPr>
-              <a:t>Error falls as 1 / sqrt(users)</a:t>
-            </a:r>
-          </a:p>
-        </p:txBody>
-      </p:sp>
-      <p:sp>
-        <p:nvSpPr>
-          <p:cNvPr id="3" name="TextBox 2"/>
+              <a:t>So how do you pick epsilon</a:t>
+            </a:r>
+          </a:p>
+        </p:txBody>
+      </p:sp>
+      <p:sp>
+        <p:nvSpPr>
+          <p:cNvPr id="3" name="Rectangle 2"/>
+          <p:cNvSpPr/>
+          <p:nvPr/>
+        </p:nvSpPr>
+        <p:spPr>
+          <a:xfrm>
+            <a:off x="822960" y="1276603"/>
+            <a:ext cx="1463040" cy="50800"/>
+          </a:xfrm>
+          <a:prstGeom prst="rect">
+            <a:avLst/>
+          </a:prstGeom>
+          <a:solidFill>
+            <a:srgbClr val="005EB8"/>
+          </a:solidFill>
+          <a:ln>
+            <a:noFill/>
+          </a:ln>
+          <a:effectLst/>
+        </p:spPr>
+        <p:style>
+          <a:lnRef idx="1">
+            <a:schemeClr val="accent1"/>
+          </a:lnRef>
+          <a:fillRef idx="3">
+            <a:schemeClr val="accent1"/>
+          </a:fillRef>
+          <a:effectRef idx="2">
+            <a:schemeClr val="accent1"/>
+          </a:effectRef>
+          <a:fontRef idx="minor">
+            <a:schemeClr val="lt1"/>
+          </a:fontRef>
+        </p:style>
+        <p:txBody>
+          <a:bodyPr rtlCol="0" anchor="ctr"/>
+          <a:lstStyle/>
+          <a:p>
+            <a:pPr algn="ctr"/>
+          </a:p>
+        </p:txBody>
+      </p:sp>
+      <p:sp>
+        <p:nvSpPr>
+          <p:cNvPr id="4" name="TextBox 3"/>
           <p:cNvSpPr txBox="1"/>
           <p:nvPr/>
         </p:nvSpPr>
         <p:spPr>
           <a:xfrm>
-            <a:off x="822960" y="1097280"/>
-            <a:ext cx="10515600" cy="457200"/>
+            <a:off x="822960" y="2057400"/>
+            <a:ext cx="10515600" cy="4023360"/>
           </a:xfrm>
           <a:prstGeom prst="rect">
             <a:avLst/>
@@ -8866,99 +8768,135 @@
           </a:bodyPr>
           <a:lstStyle/>
           <a:p>
-            <a:pPr algn="ctr"/>
-            <a:r>
-              <a:rPr sz="1500" b="0" i="0">
-                <a:solidFill>
-                  <a:srgbClr val="5A647A"/>
-                </a:solidFill>
-                <a:latin typeface="Helvetica Neue"/>
-              </a:rPr>
-              <a:t>Average the noised queries of </a:t>
-            </a:r>
-            <a:r>
-              <a:rPr sz="1300" b="0">
-                <a:solidFill>
-                  <a:srgbClr val="5A647A"/>
-                </a:solidFill>
-                <a:latin typeface="Consolas"/>
-              </a:rPr>
-              <a:t>n</a:t>
-            </a:r>
-            <a:r>
-              <a:rPr sz="1500" b="0" i="0">
-                <a:solidFill>
-                  <a:srgbClr val="5A647A"/>
-                </a:solidFill>
-                <a:latin typeface="Helvetica Neue"/>
-              </a:rPr>
-              <a:t> users in one segment, then see how far that average lands from the truth.</a:t>
-            </a:r>
-          </a:p>
-        </p:txBody>
-      </p:sp>
-      <p:pic>
-        <p:nvPicPr>
-          <p:cNvPr id="4" name="Picture 3" descr="11_aggregate_convergence.png"/>
-          <p:cNvPicPr>
-            <a:picLocks noChangeAspect="1"/>
-          </p:cNvPicPr>
-          <p:nvPr/>
-        </p:nvPicPr>
-        <p:blipFill>
-          <a:blip r:embed="rId2"/>
-          <a:stretch>
-            <a:fillRect/>
-          </a:stretch>
-        </p:blipFill>
-        <p:spPr>
-          <a:xfrm>
-            <a:off x="2781192" y="1828800"/>
-            <a:ext cx="6629310" cy="3931920"/>
-          </a:xfrm>
-          <a:prstGeom prst="rect">
-            <a:avLst/>
-          </a:prstGeom>
-        </p:spPr>
-      </p:pic>
+            <a:pPr marL="342900" indent="-342900">
+              <a:spcAft>
+                <a:spcPts val="2000"/>
+              </a:spcAft>
+            </a:pPr>
+            <a:r>
+              <a:rPr sz="2400" b="1">
+                <a:solidFill>
+                  <a:srgbClr val="005EB8"/>
+                </a:solidFill>
+                <a:latin typeface="Helvetica Neue"/>
+              </a:rPr>
+              <a:t>-   </a:t>
+            </a:r>
+            <a:r>
+              <a:rPr sz="2400" b="0" i="0">
+                <a:solidFill>
+                  <a:srgbClr val="141B2D"/>
+                </a:solidFill>
+                <a:latin typeface="Helvetica Neue"/>
+              </a:rPr>
+              <a:t>Start at epsilon 1, then measure</a:t>
+            </a:r>
+          </a:p>
+          <a:p>
+            <a:pPr marL="342900" indent="-342900">
+              <a:spcAft>
+                <a:spcPts val="2000"/>
+              </a:spcAft>
+            </a:pPr>
+            <a:r>
+              <a:rPr sz="2400" b="1">
+                <a:solidFill>
+                  <a:srgbClr val="005EB8"/>
+                </a:solidFill>
+                <a:latin typeface="Helvetica Neue"/>
+              </a:rPr>
+              <a:t>-   </a:t>
+            </a:r>
+            <a:r>
+              <a:rPr sz="2400" b="0" i="0">
+                <a:solidFill>
+                  <a:srgbClr val="141B2D"/>
+                </a:solidFill>
+                <a:latin typeface="Helvetica Neue"/>
+              </a:rPr>
+              <a:t>Pick it for the privacy you need, because utility also depends on the number of users</a:t>
+            </a:r>
+          </a:p>
+          <a:p>
+            <a:pPr marL="342900" indent="-342900">
+              <a:spcAft>
+                <a:spcPts val="2000"/>
+              </a:spcAft>
+            </a:pPr>
+            <a:r>
+              <a:rPr sz="2400" b="1">
+                <a:solidFill>
+                  <a:srgbClr val="005EB8"/>
+                </a:solidFill>
+                <a:latin typeface="Helvetica Neue"/>
+              </a:rPr>
+              <a:t>-   </a:t>
+            </a:r>
+            <a:r>
+              <a:rPr sz="2400" b="0" i="0">
+                <a:solidFill>
+                  <a:srgbClr val="141B2D"/>
+                </a:solidFill>
+                <a:latin typeface="Helvetica Neue"/>
+              </a:rPr>
+              <a:t>A segment needs roughly 2,300 users at epsilon 1, and halving epsilon needs four times that</a:t>
+            </a:r>
+          </a:p>
+          <a:p>
+            <a:pPr marL="342900" indent="-342900">
+              <a:spcAft>
+                <a:spcPts val="2000"/>
+              </a:spcAft>
+            </a:pPr>
+            <a:r>
+              <a:rPr sz="2400" b="1">
+                <a:solidFill>
+                  <a:srgbClr val="005EB8"/>
+                </a:solidFill>
+                <a:latin typeface="Helvetica Neue"/>
+              </a:rPr>
+              <a:t>-   </a:t>
+            </a:r>
+            <a:r>
+              <a:rPr sz="2400" b="0" i="0">
+                <a:solidFill>
+                  <a:srgbClr val="141B2D"/>
+                </a:solidFill>
+                <a:latin typeface="Helvetica Neue"/>
+              </a:rPr>
+              <a:t>Segments too small? Add users or widen them, and leave epsilon alone</a:t>
+            </a:r>
+          </a:p>
+          <a:p>
+            <a:pPr marL="342900" indent="-342900">
+              <a:spcAft>
+                <a:spcPts val="2000"/>
+              </a:spcAft>
+            </a:pPr>
+            <a:r>
+              <a:rPr sz="2400" b="1">
+                <a:solidFill>
+                  <a:srgbClr val="005EB8"/>
+                </a:solidFill>
+                <a:latin typeface="Helvetica Neue"/>
+              </a:rPr>
+              <a:t>-   </a:t>
+            </a:r>
+            <a:r>
+              <a:rPr sz="2400" b="0" i="0">
+                <a:solidFill>
+                  <a:srgbClr val="005EB8"/>
+                </a:solidFill>
+                <a:latin typeface="Helvetica Neue"/>
+              </a:rPr>
+              <a:t>Your head terms work and your long tail does not</a:t>
+            </a:r>
+          </a:p>
+        </p:txBody>
+      </p:sp>
       <p:sp>
         <p:nvSpPr>
           <p:cNvPr id="5" name="TextBox 4"/>
-          <p:cNvSpPr txBox="1"/>
-          <p:nvPr/>
-        </p:nvSpPr>
-        <p:spPr>
-          <a:xfrm>
-            <a:off x="1325880" y="5989320"/>
-            <a:ext cx="9509760" cy="640080"/>
-          </a:xfrm>
-          <a:prstGeom prst="rect">
-            <a:avLst/>
-          </a:prstGeom>
-          <a:noFill/>
-        </p:spPr>
-        <p:txBody>
-          <a:bodyPr wrap="square">
-            <a:spAutoFit/>
-          </a:bodyPr>
-          <a:lstStyle/>
-          <a:p>
-            <a:pPr algn="ctr"/>
-            <a:r>
-              <a:rPr sz="1600" b="0" i="0">
-                <a:solidFill>
-                  <a:srgbClr val="5A647A"/>
-                </a:solidFill>
-                <a:latin typeface="Helvetica Neue"/>
-              </a:rPr>
-              <a:t>The red line is the smallest segment you can measure.</a:t>
-            </a:r>
-          </a:p>
-        </p:txBody>
-      </p:sp>
-      <p:sp>
-        <p:nvSpPr>
-          <p:cNvPr id="6" name="TextBox 5"/>
           <p:cNvSpPr txBox="1"/>
           <p:nvPr/>
         </p:nvSpPr>
@@ -9025,8 +8963,8 @@
         </p:nvSpPr>
         <p:spPr>
           <a:xfrm>
-            <a:off x="822960" y="640080"/>
-            <a:ext cx="10515600" cy="960120"/>
+            <a:off x="1005840" y="2286000"/>
+            <a:ext cx="10149840" cy="2377440"/>
           </a:xfrm>
           <a:prstGeom prst="rect">
             <a:avLst/>
@@ -9039,213 +8977,42 @@
           </a:bodyPr>
           <a:lstStyle/>
           <a:p>
-            <a:r>
-              <a:rPr sz="3400" b="1">
-                <a:solidFill>
-                  <a:srgbClr val="141B2D"/>
-                </a:solidFill>
-                <a:latin typeface="Helvetica Neue"/>
-              </a:rPr>
-              <a:t>How big a segment has to be</a:t>
-            </a:r>
-          </a:p>
-        </p:txBody>
-      </p:sp>
-      <p:sp>
-        <p:nvSpPr>
-          <p:cNvPr id="3" name="Rectangle 2"/>
-          <p:cNvSpPr/>
-          <p:nvPr/>
-        </p:nvSpPr>
-        <p:spPr>
-          <a:xfrm>
-            <a:off x="822960" y="1276603"/>
-            <a:ext cx="1463040" cy="50800"/>
-          </a:xfrm>
-          <a:prstGeom prst="rect">
-            <a:avLst/>
-          </a:prstGeom>
-          <a:solidFill>
-            <a:srgbClr val="005EB8"/>
-          </a:solidFill>
-          <a:ln>
-            <a:noFill/>
-          </a:ln>
-          <a:effectLst/>
-        </p:spPr>
-        <p:style>
-          <a:lnRef idx="1">
-            <a:schemeClr val="accent1"/>
-          </a:lnRef>
-          <a:fillRef idx="3">
-            <a:schemeClr val="accent1"/>
-          </a:fillRef>
-          <a:effectRef idx="2">
-            <a:schemeClr val="accent1"/>
-          </a:effectRef>
-          <a:fontRef idx="minor">
-            <a:schemeClr val="lt1"/>
-          </a:fontRef>
-        </p:style>
-        <p:txBody>
-          <a:bodyPr rtlCol="0" anchor="ctr"/>
-          <a:lstStyle/>
-          <a:p>
-            <a:pPr algn="ctr"/>
-          </a:p>
-        </p:txBody>
-      </p:sp>
-      <p:sp>
-        <p:nvSpPr>
-          <p:cNvPr id="4" name="TextBox 3"/>
-          <p:cNvSpPr txBox="1"/>
-          <p:nvPr/>
-        </p:nvSpPr>
-        <p:spPr>
-          <a:xfrm>
-            <a:off x="822960" y="2057400"/>
-            <a:ext cx="10515600" cy="4023360"/>
-          </a:xfrm>
-          <a:prstGeom prst="rect">
-            <a:avLst/>
-          </a:prstGeom>
-          <a:noFill/>
-        </p:spPr>
-        <p:txBody>
-          <a:bodyPr wrap="square">
-            <a:spAutoFit/>
-          </a:bodyPr>
-          <a:lstStyle/>
-          <a:p>
-            <a:pPr marL="342900" indent="-342900">
+            <a:pPr>
               <a:spcAft>
-                <a:spcPts val="2000"/>
+                <a:spcPts val="1600"/>
               </a:spcAft>
             </a:pPr>
             <a:r>
-              <a:rPr sz="2400" b="1">
-                <a:solidFill>
-                  <a:srgbClr val="005EB8"/>
-                </a:solidFill>
-                <a:latin typeface="Helvetica Neue"/>
-              </a:rPr>
-              <a:t>-   </a:t>
-            </a:r>
-            <a:r>
-              <a:rPr sz="2400" b="0" i="0">
+              <a:rPr sz="3400" b="1">
                 <a:solidFill>
                   <a:srgbClr val="141B2D"/>
                 </a:solidFill>
                 <a:latin typeface="Helvetica Neue"/>
               </a:rPr>
-              <a:t>Error drops below the spread of the index at roughly 2,300 users</a:t>
-            </a:r>
-          </a:p>
-          <a:p>
-            <a:pPr marL="342900" indent="-342900">
+              <a:t>LDP does not cost you search tuning.</a:t>
+            </a:r>
+          </a:p>
+          <a:p>
+            <a:pPr>
               <a:spcAft>
-                <a:spcPts val="2000"/>
+                <a:spcPts val="1600"/>
               </a:spcAft>
             </a:pPr>
             <a:r>
-              <a:rPr sz="2400" b="1">
+              <a:rPr sz="3400" b="0">
                 <a:solidFill>
                   <a:srgbClr val="005EB8"/>
                 </a:solidFill>
                 <a:latin typeface="Helvetica Neue"/>
               </a:rPr>
-              <a:t>-   </a:t>
-            </a:r>
-            <a:r>
-              <a:rPr sz="2400" b="0" i="0">
-                <a:solidFill>
-                  <a:srgbClr val="141B2D"/>
-                </a:solidFill>
-                <a:latin typeface="Helvetica Neue"/>
-              </a:rPr>
-              <a:t>That is at epsilon 1, and halving epsilon needs four times the users</a:t>
-            </a:r>
-          </a:p>
-          <a:p>
-            <a:pPr marL="342900" indent="-342900">
-              <a:spcAft>
-                <a:spcPts val="2000"/>
-              </a:spcAft>
-            </a:pPr>
-            <a:r>
-              <a:rPr sz="2400" b="1">
-                <a:solidFill>
-                  <a:srgbClr val="005EB8"/>
-                </a:solidFill>
-                <a:latin typeface="Helvetica Neue"/>
-              </a:rPr>
-              <a:t>-   </a:t>
-            </a:r>
-            <a:r>
-              <a:rPr sz="2400" b="0" i="0">
-                <a:solidFill>
-                  <a:srgbClr val="141B2D"/>
-                </a:solidFill>
-                <a:latin typeface="Helvetica Neue"/>
-              </a:rPr>
-              <a:t>Segments with thousands of users are measurable under LDP</a:t>
-            </a:r>
-          </a:p>
-          <a:p>
-            <a:pPr marL="342900" indent="-342900">
-              <a:spcAft>
-                <a:spcPts val="2000"/>
-              </a:spcAft>
-            </a:pPr>
-            <a:r>
-              <a:rPr sz="2400" b="1">
-                <a:solidFill>
-                  <a:srgbClr val="005EB8"/>
-                </a:solidFill>
-                <a:latin typeface="Helvetica Neue"/>
-              </a:rPr>
-              <a:t>-   </a:t>
-            </a:r>
-            <a:r>
-              <a:rPr sz="2400" b="0" i="0">
-                <a:solidFill>
-                  <a:srgbClr val="141B2D"/>
-                </a:solidFill>
-                <a:latin typeface="Helvetica Neue"/>
-              </a:rPr>
-              <a:t>Segments with dozens are not measurable</a:t>
-            </a:r>
-          </a:p>
-          <a:p>
-            <a:pPr marL="342900" indent="-342900">
-              <a:spcAft>
-                <a:spcPts val="2000"/>
-              </a:spcAft>
-            </a:pPr>
-            <a:r>
-              <a:rPr sz="2400" b="1">
-                <a:solidFill>
-                  <a:srgbClr val="005EB8"/>
-                </a:solidFill>
-                <a:latin typeface="Helvetica Neue"/>
-              </a:rPr>
-              <a:t>-   </a:t>
-            </a:r>
-            <a:r>
-              <a:rPr sz="2400" b="0" i="0">
-                <a:solidFill>
-                  <a:srgbClr val="141B2D"/>
-                </a:solidFill>
-                <a:latin typeface="Helvetica Neue"/>
-              </a:rPr>
-              <a:t>Your head terms work, but your long tail does not</a:t>
-            </a:r>
-          </a:p>
-        </p:txBody>
-      </p:sp>
-      <p:sp>
-        <p:nvSpPr>
-          <p:cNvPr id="5" name="TextBox 4"/>
+              <a:t>It costs you exact queries.</a:t>
+            </a:r>
+          </a:p>
+        </p:txBody>
+      </p:sp>
+      <p:sp>
+        <p:nvSpPr>
+          <p:cNvPr id="3" name="TextBox 2"/>
           <p:cNvSpPr txBox="1"/>
           <p:nvPr/>
         </p:nvSpPr>
@@ -9292,7 +9059,7 @@
     <p:bg>
       <p:bgPr>
         <a:solidFill>
-          <a:srgbClr val="FFFFFF"/>
+          <a:srgbClr val="0E1A2F"/>
         </a:solidFill>
         <a:effectLst/>
       </p:bgPr>
@@ -9312,8 +9079,8 @@
         </p:nvSpPr>
         <p:spPr>
           <a:xfrm>
-            <a:off x="822960" y="640080"/>
-            <a:ext cx="10515600" cy="960120"/>
+            <a:off x="822960" y="2560320"/>
+            <a:ext cx="10515600" cy="1828800"/>
           </a:xfrm>
           <a:prstGeom prst="rect">
             <a:avLst/>
@@ -9327,71 +9094,43 @@
           <a:lstStyle/>
           <a:p>
             <a:r>
-              <a:rPr sz="3400" b="1">
-                <a:solidFill>
-                  <a:srgbClr val="141B2D"/>
-                </a:solidFill>
-                <a:latin typeface="Helvetica Neue"/>
-              </a:rPr>
-              <a:t>So how do you pick epsilon</a:t>
-            </a:r>
-          </a:p>
-        </p:txBody>
-      </p:sp>
-      <p:sp>
-        <p:nvSpPr>
-          <p:cNvPr id="3" name="Rectangle 2"/>
-          <p:cNvSpPr/>
-          <p:nvPr/>
-        </p:nvSpPr>
-        <p:spPr>
-          <a:xfrm>
-            <a:off x="822960" y="1276603"/>
-            <a:ext cx="1463040" cy="50800"/>
-          </a:xfrm>
-          <a:prstGeom prst="rect">
-            <a:avLst/>
-          </a:prstGeom>
-          <a:solidFill>
-            <a:srgbClr val="005EB8"/>
-          </a:solidFill>
-          <a:ln>
-            <a:noFill/>
-          </a:ln>
-          <a:effectLst/>
-        </p:spPr>
-        <p:style>
-          <a:lnRef idx="1">
-            <a:schemeClr val="accent1"/>
-          </a:lnRef>
-          <a:fillRef idx="3">
-            <a:schemeClr val="accent1"/>
-          </a:fillRef>
-          <a:effectRef idx="2">
-            <a:schemeClr val="accent1"/>
-          </a:effectRef>
-          <a:fontRef idx="minor">
-            <a:schemeClr val="lt1"/>
-          </a:fontRef>
-        </p:style>
-        <p:txBody>
-          <a:bodyPr rtlCol="0" anchor="ctr"/>
-          <a:lstStyle/>
-          <a:p>
-            <a:pPr algn="ctr"/>
-          </a:p>
-        </p:txBody>
-      </p:sp>
-      <p:sp>
-        <p:nvSpPr>
-          <p:cNvPr id="4" name="TextBox 3"/>
+              <a:rPr sz="1800" b="1">
+                <a:solidFill>
+                  <a:srgbClr val="5A9BE8"/>
+                </a:solidFill>
+                <a:latin typeface="Helvetica Neue"/>
+              </a:rPr>
+              <a:t>PART 4</a:t>
+            </a:r>
+          </a:p>
+          <a:p>
+            <a:pPr>
+              <a:spcBef>
+                <a:spcPts val="1000"/>
+              </a:spcBef>
+            </a:pPr>
+            <a:r>
+              <a:rPr sz="4200" b="1">
+                <a:solidFill>
+                  <a:srgbClr val="FFFFFF"/>
+                </a:solidFill>
+                <a:latin typeface="Helvetica Neue"/>
+              </a:rPr>
+              <a:t>Back in OpenSearch</a:t>
+            </a:r>
+          </a:p>
+        </p:txBody>
+      </p:sp>
+      <p:sp>
+        <p:nvSpPr>
+          <p:cNvPr id="3" name="TextBox 2"/>
           <p:cNvSpPr txBox="1"/>
           <p:nvPr/>
         </p:nvSpPr>
         <p:spPr>
           <a:xfrm>
-            <a:off x="822960" y="2057400"/>
-            <a:ext cx="10515600" cy="4023360"/>
+            <a:off x="10405872" y="6144768"/>
+            <a:ext cx="960120" cy="411480"/>
           </a:xfrm>
           <a:prstGeom prst="rect">
             <a:avLst/>
@@ -9404,109 +9143,11 @@
           </a:bodyPr>
           <a:lstStyle/>
           <a:p>
-            <a:pPr marL="342900" indent="-342900">
-              <a:spcAft>
-                <a:spcPts val="2000"/>
-              </a:spcAft>
-            </a:pPr>
-            <a:r>
-              <a:rPr sz="2400" b="1">
-                <a:solidFill>
-                  <a:srgbClr val="005EB8"/>
-                </a:solidFill>
-                <a:latin typeface="Helvetica Neue"/>
-              </a:rPr>
-              <a:t>-   </a:t>
-            </a:r>
-            <a:r>
-              <a:rPr sz="2400" b="0" i="0">
-                <a:solidFill>
-                  <a:srgbClr val="141B2D"/>
-                </a:solidFill>
-                <a:latin typeface="Helvetica Neue"/>
-              </a:rPr>
-              <a:t>Start at epsilon 1, then measure</a:t>
-            </a:r>
-          </a:p>
-          <a:p>
-            <a:pPr marL="342900" indent="-342900">
-              <a:spcAft>
-                <a:spcPts val="2000"/>
-              </a:spcAft>
-            </a:pPr>
-            <a:r>
-              <a:rPr sz="2400" b="1">
-                <a:solidFill>
-                  <a:srgbClr val="005EB8"/>
-                </a:solidFill>
-                <a:latin typeface="Helvetica Neue"/>
-              </a:rPr>
-              <a:t>-   </a:t>
-            </a:r>
-            <a:r>
-              <a:rPr sz="2400" b="0" i="0">
-                <a:solidFill>
-                  <a:srgbClr val="141B2D"/>
-                </a:solidFill>
-                <a:latin typeface="Helvetica Neue"/>
-              </a:rPr>
-              <a:t>Pick it for the privacy you need, because utility also depends on the number of users</a:t>
-            </a:r>
-          </a:p>
-          <a:p>
-            <a:pPr marL="342900" indent="-342900">
-              <a:spcAft>
-                <a:spcPts val="2000"/>
-              </a:spcAft>
-            </a:pPr>
-            <a:r>
-              <a:rPr sz="2400" b="1">
-                <a:solidFill>
-                  <a:srgbClr val="005EB8"/>
-                </a:solidFill>
-                <a:latin typeface="Helvetica Neue"/>
-              </a:rPr>
-              <a:t>-   </a:t>
-            </a:r>
-            <a:r>
-              <a:rPr sz="2400" b="0" i="0">
-                <a:solidFill>
-                  <a:srgbClr val="005EB8"/>
-                </a:solidFill>
-                <a:latin typeface="Helvetica Neue"/>
-              </a:rPr>
-              <a:t>Segments too small? Add users or widen them, and leave epsilon alone</a:t>
-            </a:r>
-          </a:p>
-        </p:txBody>
-      </p:sp>
-      <p:sp>
-        <p:nvSpPr>
-          <p:cNvPr id="5" name="TextBox 4"/>
-          <p:cNvSpPr txBox="1"/>
-          <p:nvPr/>
-        </p:nvSpPr>
-        <p:spPr>
-          <a:xfrm>
-            <a:off x="10405872" y="6144768"/>
-            <a:ext cx="960120" cy="411480"/>
-          </a:xfrm>
-          <a:prstGeom prst="rect">
-            <a:avLst/>
-          </a:prstGeom>
-          <a:noFill/>
-        </p:spPr>
-        <p:txBody>
-          <a:bodyPr wrap="square">
-            <a:spAutoFit/>
-          </a:bodyPr>
-          <a:lstStyle/>
-          <a:p>
             <a:pPr algn="r"/>
             <a:r>
               <a:rPr sz="1300" b="0">
                 <a:solidFill>
-                  <a:srgbClr val="5A647A"/>
+                  <a:srgbClr val="6E7C93"/>
                 </a:solidFill>
                 <a:latin typeface="Helvetica Neue"/>
               </a:rPr>
@@ -9549,8 +9190,8 @@
         </p:nvSpPr>
         <p:spPr>
           <a:xfrm>
-            <a:off x="1005840" y="2286000"/>
-            <a:ext cx="10149840" cy="2377440"/>
+            <a:off x="822960" y="640080"/>
+            <a:ext cx="10515600" cy="960120"/>
           </a:xfrm>
           <a:prstGeom prst="rect">
             <a:avLst/>
@@ -9563,42 +9204,273 @@
           </a:bodyPr>
           <a:lstStyle/>
           <a:p>
-            <a:pPr>
+            <a:r>
+              <a:rPr sz="3400" b="1">
+                <a:solidFill>
+                  <a:srgbClr val="141B2D"/>
+                </a:solidFill>
+                <a:latin typeface="Helvetica Neue"/>
+              </a:rPr>
+              <a:t>Where the noise gets injected</a:t>
+            </a:r>
+          </a:p>
+        </p:txBody>
+      </p:sp>
+      <p:sp>
+        <p:nvSpPr>
+          <p:cNvPr id="3" name="Rectangle 2"/>
+          <p:cNvSpPr/>
+          <p:nvPr/>
+        </p:nvSpPr>
+        <p:spPr>
+          <a:xfrm>
+            <a:off x="822960" y="1276603"/>
+            <a:ext cx="1463040" cy="50800"/>
+          </a:xfrm>
+          <a:prstGeom prst="rect">
+            <a:avLst/>
+          </a:prstGeom>
+          <a:solidFill>
+            <a:srgbClr val="005EB8"/>
+          </a:solidFill>
+          <a:ln>
+            <a:noFill/>
+          </a:ln>
+          <a:effectLst/>
+        </p:spPr>
+        <p:style>
+          <a:lnRef idx="1">
+            <a:schemeClr val="accent1"/>
+          </a:lnRef>
+          <a:fillRef idx="3">
+            <a:schemeClr val="accent1"/>
+          </a:fillRef>
+          <a:effectRef idx="2">
+            <a:schemeClr val="accent1"/>
+          </a:effectRef>
+          <a:fontRef idx="minor">
+            <a:schemeClr val="lt1"/>
+          </a:fontRef>
+        </p:style>
+        <p:txBody>
+          <a:bodyPr rtlCol="0" anchor="ctr"/>
+          <a:lstStyle/>
+          <a:p>
+            <a:pPr algn="ctr"/>
+          </a:p>
+        </p:txBody>
+      </p:sp>
+      <p:sp>
+        <p:nvSpPr>
+          <p:cNvPr id="4" name="TextBox 3"/>
+          <p:cNvSpPr txBox="1"/>
+          <p:nvPr/>
+        </p:nvSpPr>
+        <p:spPr>
+          <a:xfrm>
+            <a:off x="822960" y="2057400"/>
+            <a:ext cx="5120640" cy="4023360"/>
+          </a:xfrm>
+          <a:prstGeom prst="rect">
+            <a:avLst/>
+          </a:prstGeom>
+          <a:noFill/>
+        </p:spPr>
+        <p:txBody>
+          <a:bodyPr wrap="square">
+            <a:spAutoFit/>
+          </a:bodyPr>
+          <a:lstStyle/>
+          <a:p>
+            <a:pPr marL="342900" indent="-342900">
               <a:spcAft>
-                <a:spcPts val="1600"/>
+                <a:spcPts val="1400"/>
               </a:spcAft>
             </a:pPr>
             <a:r>
-              <a:rPr sz="3400" b="1">
+              <a:rPr sz="2100" b="1">
+                <a:solidFill>
+                  <a:srgbClr val="005EB8"/>
+                </a:solidFill>
+                <a:latin typeface="Helvetica Neue"/>
+              </a:rPr>
+              <a:t>-   </a:t>
+            </a:r>
+            <a:r>
+              <a:rPr sz="2100" b="0" i="0">
                 <a:solidFill>
                   <a:srgbClr val="141B2D"/>
                 </a:solidFill>
                 <a:latin typeface="Helvetica Neue"/>
               </a:rPr>
-              <a:t>LDP does not cost you your analytics.</a:t>
-            </a:r>
-          </a:p>
-          <a:p>
-            <a:pPr>
+              <a:t>On the device, before </a:t>
+            </a:r>
+            <a:r>
+              <a:rPr sz="1900" b="0">
+                <a:solidFill>
+                  <a:srgbClr val="141B2D"/>
+                </a:solidFill>
+                <a:latin typeface="Consolas"/>
+              </a:rPr>
+              <a:t>ubi.js</a:t>
+            </a:r>
+            <a:r>
+              <a:rPr sz="2100" b="0" i="0">
+                <a:solidFill>
+                  <a:srgbClr val="141B2D"/>
+                </a:solidFill>
+                <a:latin typeface="Helvetica Neue"/>
+              </a:rPr>
+              <a:t> sends the event</a:t>
+            </a:r>
+          </a:p>
+          <a:p>
+            <a:pPr marL="342900" indent="-342900">
               <a:spcAft>
-                <a:spcPts val="1600"/>
+                <a:spcPts val="1400"/>
               </a:spcAft>
             </a:pPr>
             <a:r>
-              <a:rPr sz="3400" b="0">
+              <a:rPr sz="2100" b="1">
                 <a:solidFill>
                   <a:srgbClr val="005EB8"/>
                 </a:solidFill>
                 <a:latin typeface="Helvetica Neue"/>
               </a:rPr>
-              <a:t>It costs you the ability to ask about one person.</a:t>
-            </a:r>
-          </a:p>
-        </p:txBody>
-      </p:sp>
-      <p:sp>
-        <p:nvSpPr>
-          <p:cNvPr id="3" name="TextBox 2"/>
+              <a:t>-   </a:t>
+            </a:r>
+            <a:r>
+              <a:rPr sz="2100" b="0" i="0">
+                <a:solidFill>
+                  <a:srgbClr val="141B2D"/>
+                </a:solidFill>
+                <a:latin typeface="Helvetica Neue"/>
+              </a:rPr>
+              <a:t>Aggregation happens at query time over the noised data</a:t>
+            </a:r>
+          </a:p>
+          <a:p>
+            <a:pPr marL="342900" indent="-342900">
+              <a:spcAft>
+                <a:spcPts val="1400"/>
+              </a:spcAft>
+            </a:pPr>
+            <a:r>
+              <a:rPr sz="2100" b="1">
+                <a:solidFill>
+                  <a:srgbClr val="005EB8"/>
+                </a:solidFill>
+                <a:latin typeface="Helvetica Neue"/>
+              </a:rPr>
+              <a:t>-   </a:t>
+            </a:r>
+            <a:r>
+              <a:rPr sz="2100" b="0" i="0">
+                <a:solidFill>
+                  <a:srgbClr val="141B2D"/>
+                </a:solidFill>
+                <a:latin typeface="Helvetica Neue"/>
+              </a:rPr>
+              <a:t>Nothing downstream needs to be trusted, because nothing downstream has the original</a:t>
+            </a:r>
+          </a:p>
+          <a:p>
+            <a:pPr marL="342900" indent="-342900">
+              <a:spcAft>
+                <a:spcPts val="1400"/>
+              </a:spcAft>
+            </a:pPr>
+            <a:r>
+              <a:rPr sz="2100" b="1">
+                <a:solidFill>
+                  <a:srgbClr val="005EB8"/>
+                </a:solidFill>
+                <a:latin typeface="Helvetica Neue"/>
+              </a:rPr>
+              <a:t>-   </a:t>
+            </a:r>
+            <a:r>
+              <a:rPr sz="2100" b="0" i="0">
+                <a:solidFill>
+                  <a:srgbClr val="141B2D"/>
+                </a:solidFill>
+                <a:latin typeface="Helvetica Neue"/>
+              </a:rPr>
+              <a:t>You set epsilon in the client you ship</a:t>
+            </a:r>
+          </a:p>
+        </p:txBody>
+      </p:sp>
+      <p:pic>
+        <p:nvPicPr>
+          <p:cNvPr id="5" name="Picture 4" descr="28_trust_boundary.png"/>
+          <p:cNvPicPr>
+            <a:picLocks noChangeAspect="1"/>
+          </p:cNvPicPr>
+          <p:nvPr/>
+        </p:nvPicPr>
+        <p:blipFill>
+          <a:blip r:embed="rId2"/>
+          <a:stretch>
+            <a:fillRect/>
+          </a:stretch>
+        </p:blipFill>
+        <p:spPr>
+          <a:xfrm>
+            <a:off x="6263640" y="2177248"/>
+            <a:ext cx="5029200" cy="3417902"/>
+          </a:xfrm>
+          <a:prstGeom prst="rect">
+            <a:avLst/>
+          </a:prstGeom>
+        </p:spPr>
+      </p:pic>
+      <p:sp>
+        <p:nvSpPr>
+          <p:cNvPr id="6" name="TextBox 5"/>
+          <p:cNvSpPr txBox="1"/>
+          <p:nvPr/>
+        </p:nvSpPr>
+        <p:spPr>
+          <a:xfrm>
+            <a:off x="822960" y="5989320"/>
+            <a:ext cx="8961120" cy="502920"/>
+          </a:xfrm>
+          <a:prstGeom prst="rect">
+            <a:avLst/>
+          </a:prstGeom>
+          <a:noFill/>
+        </p:spPr>
+        <p:txBody>
+          <a:bodyPr wrap="square">
+            <a:spAutoFit/>
+          </a:bodyPr>
+          <a:lstStyle/>
+          <a:p>
+            <a:r>
+              <a:rPr sz="1400" b="0" i="0">
+                <a:solidFill>
+                  <a:srgbClr val="5A647A"/>
+                </a:solidFill>
+                <a:latin typeface="Helvetica Neue"/>
+              </a:rPr>
+              <a:t>An upcoming UBI RFC will bring this capability into </a:t>
+            </a:r>
+            <a:r>
+              <a:rPr sz="1200" b="0">
+                <a:solidFill>
+                  <a:srgbClr val="5A647A"/>
+                </a:solidFill>
+                <a:latin typeface="Consolas"/>
+              </a:rPr>
+              <a:t>ubi.js</a:t>
+            </a:r>
+          </a:p>
+        </p:txBody>
+      </p:sp>
+      <p:sp>
+        <p:nvSpPr>
+          <p:cNvPr id="7" name="TextBox 6"/>
           <p:cNvSpPr txBox="1"/>
           <p:nvPr/>
         </p:nvSpPr>
@@ -9645,7 +9517,7 @@
     <p:bg>
       <p:bgPr>
         <a:solidFill>
-          <a:srgbClr val="0E1A2F"/>
+          <a:srgbClr val="FFFFFF"/>
         </a:solidFill>
         <a:effectLst/>
       </p:bgPr>
@@ -9665,8 +9537,8 @@
         </p:nvSpPr>
         <p:spPr>
           <a:xfrm>
-            <a:off x="822960" y="2560320"/>
-            <a:ext cx="10515600" cy="1828800"/>
+            <a:off x="822960" y="411480"/>
+            <a:ext cx="10515600" cy="822960"/>
           </a:xfrm>
           <a:prstGeom prst="rect">
             <a:avLst/>
@@ -9680,43 +9552,51 @@
           <a:lstStyle/>
           <a:p>
             <a:r>
-              <a:rPr sz="1800" b="1">
-                <a:solidFill>
-                  <a:srgbClr val="5A9BE8"/>
-                </a:solidFill>
-                <a:latin typeface="Helvetica Neue"/>
-              </a:rPr>
-              <a:t>PART 4</a:t>
-            </a:r>
-          </a:p>
-          <a:p>
-            <a:pPr>
-              <a:spcBef>
-                <a:spcPts val="1000"/>
-              </a:spcBef>
-            </a:pPr>
-            <a:r>
-              <a:rPr sz="4200" b="1">
-                <a:solidFill>
-                  <a:srgbClr val="FFFFFF"/>
-                </a:solidFill>
-                <a:latin typeface="Helvetica Neue"/>
-              </a:rPr>
-              <a:t>Back in OpenSearch</a:t>
-            </a:r>
-          </a:p>
-        </p:txBody>
-      </p:sp>
-      <p:sp>
-        <p:nvSpPr>
-          <p:cNvPr id="3" name="TextBox 2"/>
+              <a:rPr sz="3000" b="1">
+                <a:solidFill>
+                  <a:srgbClr val="141B2D"/>
+                </a:solidFill>
+                <a:latin typeface="Helvetica Neue"/>
+              </a:rPr>
+              <a:t>What changes in ubi_queries</a:t>
+            </a:r>
+          </a:p>
+        </p:txBody>
+      </p:sp>
+      <p:pic>
+        <p:nvPicPr>
+          <p:cNvPr id="3" name="Picture 2" descr="28_ubi_document.png"/>
+          <p:cNvPicPr>
+            <a:picLocks noChangeAspect="1"/>
+          </p:cNvPicPr>
+          <p:nvPr/>
+        </p:nvPicPr>
+        <p:blipFill>
+          <a:blip r:embed="rId2"/>
+          <a:stretch>
+            <a:fillRect/>
+          </a:stretch>
+        </p:blipFill>
+        <p:spPr>
+          <a:xfrm>
+            <a:off x="1070391" y="1417320"/>
+            <a:ext cx="10050912" cy="4343400"/>
+          </a:xfrm>
+          <a:prstGeom prst="rect">
+            <a:avLst/>
+          </a:prstGeom>
+        </p:spPr>
+      </p:pic>
+      <p:sp>
+        <p:nvSpPr>
+          <p:cNvPr id="4" name="TextBox 3"/>
           <p:cNvSpPr txBox="1"/>
           <p:nvPr/>
         </p:nvSpPr>
         <p:spPr>
           <a:xfrm>
-            <a:off x="10405872" y="6144768"/>
-            <a:ext cx="960120" cy="411480"/>
+            <a:off x="822960" y="5989320"/>
+            <a:ext cx="8961120" cy="502920"/>
           </a:xfrm>
           <a:prstGeom prst="rect">
             <a:avLst/>
@@ -9729,11 +9609,63 @@
           </a:bodyPr>
           <a:lstStyle/>
           <a:p>
+            <a:r>
+              <a:rPr sz="1400" b="0" i="0">
+                <a:solidFill>
+                  <a:srgbClr val="5A647A"/>
+                </a:solidFill>
+                <a:latin typeface="Helvetica Neue"/>
+              </a:rPr>
+              <a:t>UBI supports this today through </a:t>
+            </a:r>
+            <a:r>
+              <a:rPr sz="1200" b="0">
+                <a:solidFill>
+                  <a:srgbClr val="5A647A"/>
+                </a:solidFill>
+                <a:latin typeface="Consolas"/>
+              </a:rPr>
+              <a:t>query_attributes</a:t>
+            </a:r>
+            <a:r>
+              <a:rPr sz="1400" b="0" i="0">
+                <a:solidFill>
+                  <a:srgbClr val="5A647A"/>
+                </a:solidFill>
+                <a:latin typeface="Helvetica Neue"/>
+              </a:rPr>
+              <a:t>, and the RFC will propose making it first-class</a:t>
+            </a:r>
+          </a:p>
+        </p:txBody>
+      </p:sp>
+      <p:sp>
+        <p:nvSpPr>
+          <p:cNvPr id="5" name="TextBox 4"/>
+          <p:cNvSpPr txBox="1"/>
+          <p:nvPr/>
+        </p:nvSpPr>
+        <p:spPr>
+          <a:xfrm>
+            <a:off x="10405872" y="6144768"/>
+            <a:ext cx="960120" cy="411480"/>
+          </a:xfrm>
+          <a:prstGeom prst="rect">
+            <a:avLst/>
+          </a:prstGeom>
+          <a:noFill/>
+        </p:spPr>
+        <p:txBody>
+          <a:bodyPr wrap="square">
+            <a:spAutoFit/>
+          </a:bodyPr>
+          <a:lstStyle/>
+          <a:p>
             <a:pPr algn="r"/>
             <a:r>
               <a:rPr sz="1300" b="0">
                 <a:solidFill>
-                  <a:srgbClr val="6E7C93"/>
+                  <a:srgbClr val="5A647A"/>
                 </a:solidFill>
                 <a:latin typeface="Helvetica Neue"/>
               </a:rPr>
@@ -9797,7 +9729,7 @@
                 </a:solidFill>
                 <a:latin typeface="Helvetica Neue"/>
               </a:rPr>
-              <a:t>Where the noise gets injected</a:t>
+              <a:t>What your dashboards can still compute</a:t>
             </a:r>
           </a:p>
         </p:txBody>
@@ -9855,7 +9787,7 @@
         <p:spPr>
           <a:xfrm>
             <a:off x="822960" y="2057400"/>
-            <a:ext cx="5120640" cy="4023360"/>
+            <a:ext cx="10515600" cy="4023360"/>
           </a:xfrm>
           <a:prstGeom prst="rect">
             <a:avLst/>
@@ -9870,11 +9802,11 @@
           <a:p>
             <a:pPr marL="342900" indent="-342900">
               <a:spcAft>
-                <a:spcPts val="1400"/>
+                <a:spcPts val="2000"/>
               </a:spcAft>
             </a:pPr>
             <a:r>
-              <a:rPr sz="2100" b="1">
+              <a:rPr sz="2400" b="1">
                 <a:solidFill>
                   <a:srgbClr val="005EB8"/>
                 </a:solidFill>
@@ -9883,41 +9815,23 @@
               <a:t>-   </a:t>
             </a:r>
             <a:r>
-              <a:rPr sz="2100" b="0" i="0">
+              <a:rPr sz="2400" b="0" i="0">
                 <a:solidFill>
                   <a:srgbClr val="141B2D"/>
                 </a:solidFill>
                 <a:latin typeface="Helvetica Neue"/>
               </a:rPr>
-              <a:t>On the device, before </a:t>
-            </a:r>
-            <a:r>
-              <a:rPr sz="1900" b="0">
-                <a:solidFill>
-                  <a:srgbClr val="141B2D"/>
-                </a:solidFill>
-                <a:latin typeface="Consolas"/>
-              </a:rPr>
-              <a:t>ubi.js</a:t>
-            </a:r>
-            <a:r>
-              <a:rPr sz="2100" b="0" i="0">
-                <a:solidFill>
-                  <a:srgbClr val="141B2D"/>
-                </a:solidFill>
-                <a:latin typeface="Helvetica Neue"/>
-              </a:rPr>
-              <a:t> sends the event</a:t>
+              <a:t>Aggregate query intent per segment</a:t>
             </a:r>
           </a:p>
           <a:p>
             <a:pPr marL="342900" indent="-342900">
               <a:spcAft>
-                <a:spcPts val="1400"/>
+                <a:spcPts val="2000"/>
               </a:spcAft>
             </a:pPr>
             <a:r>
-              <a:rPr sz="2100" b="1">
+              <a:rPr sz="2400" b="1">
                 <a:solidFill>
                   <a:srgbClr val="005EB8"/>
                 </a:solidFill>
@@ -9926,23 +9840,23 @@
               <a:t>-   </a:t>
             </a:r>
             <a:r>
-              <a:rPr sz="2100" b="0" i="0">
+              <a:rPr sz="2400" b="0" i="0">
                 <a:solidFill>
                   <a:srgbClr val="141B2D"/>
                 </a:solidFill>
                 <a:latin typeface="Helvetica Neue"/>
               </a:rPr>
-              <a:t>Aggregation happens at query time over the noised data</a:t>
+              <a:t>Demand trends and shifts over time</a:t>
             </a:r>
           </a:p>
           <a:p>
             <a:pPr marL="342900" indent="-342900">
               <a:spcAft>
-                <a:spcPts val="1400"/>
+                <a:spcPts val="2000"/>
               </a:spcAft>
             </a:pPr>
             <a:r>
-              <a:rPr sz="2100" b="1">
+              <a:rPr sz="2400" b="1">
                 <a:solidFill>
                   <a:srgbClr val="005EB8"/>
                 </a:solidFill>
@@ -9951,23 +9865,23 @@
               <a:t>-   </a:t>
             </a:r>
             <a:r>
-              <a:rPr sz="2100" b="0" i="0">
+              <a:rPr sz="2400" b="0" i="0">
                 <a:solidFill>
                   <a:srgbClr val="141B2D"/>
                 </a:solidFill>
                 <a:latin typeface="Helvetica Neue"/>
               </a:rPr>
-              <a:t>Nothing downstream needs to be trusted, because nothing downstream has the original</a:t>
+              <a:t>Segment-level training signal for learning-to-rank</a:t>
             </a:r>
           </a:p>
           <a:p>
             <a:pPr marL="342900" indent="-342900">
               <a:spcAft>
-                <a:spcPts val="1400"/>
+                <a:spcPts val="2000"/>
               </a:spcAft>
             </a:pPr>
             <a:r>
-              <a:rPr sz="2100" b="1">
+              <a:rPr sz="2400" b="1">
                 <a:solidFill>
                   <a:srgbClr val="005EB8"/>
                 </a:solidFill>
@@ -9976,87 +9890,20 @@
               <a:t>-   </a:t>
             </a:r>
             <a:r>
-              <a:rPr sz="2100" b="0" i="0">
+              <a:rPr sz="2400" b="0" i="0">
                 <a:solidFill>
                   <a:srgbClr val="141B2D"/>
                 </a:solidFill>
                 <a:latin typeface="Helvetica Neue"/>
               </a:rPr>
-              <a:t>You set epsilon in the client you ship</a:t>
-            </a:r>
-          </a:p>
-        </p:txBody>
-      </p:sp>
-      <p:pic>
-        <p:nvPicPr>
-          <p:cNvPr id="5" name="Picture 4" descr="28_trust_boundary.png"/>
-          <p:cNvPicPr>
-            <a:picLocks noChangeAspect="1"/>
-          </p:cNvPicPr>
-          <p:nvPr/>
-        </p:nvPicPr>
-        <p:blipFill>
-          <a:blip r:embed="rId2"/>
-          <a:stretch>
-            <a:fillRect/>
-          </a:stretch>
-        </p:blipFill>
-        <p:spPr>
-          <a:xfrm>
-            <a:off x="6263640" y="2177248"/>
-            <a:ext cx="5029200" cy="3417902"/>
-          </a:xfrm>
-          <a:prstGeom prst="rect">
-            <a:avLst/>
-          </a:prstGeom>
-        </p:spPr>
-      </p:pic>
-      <p:sp>
-        <p:nvSpPr>
-          <p:cNvPr id="6" name="TextBox 5"/>
-          <p:cNvSpPr txBox="1"/>
-          <p:nvPr/>
-        </p:nvSpPr>
-        <p:spPr>
-          <a:xfrm>
-            <a:off x="822960" y="5989320"/>
-            <a:ext cx="8961120" cy="502920"/>
-          </a:xfrm>
-          <a:prstGeom prst="rect">
-            <a:avLst/>
-          </a:prstGeom>
-          <a:noFill/>
-        </p:spPr>
-        <p:txBody>
-          <a:bodyPr wrap="square">
-            <a:spAutoFit/>
-          </a:bodyPr>
-          <a:lstStyle/>
-          <a:p>
-            <a:r>
-              <a:rPr sz="1400" b="0" i="0">
-                <a:solidFill>
-                  <a:srgbClr val="5A647A"/>
-                </a:solidFill>
-                <a:latin typeface="Helvetica Neue"/>
-              </a:rPr>
-              <a:t>An upcoming UBI RFC will bring this capability into </a:t>
-            </a:r>
-            <a:r>
-              <a:rPr sz="1200" b="0">
-                <a:solidFill>
-                  <a:srgbClr val="5A647A"/>
-                </a:solidFill>
-                <a:latin typeface="Consolas"/>
-              </a:rPr>
-              <a:t>ubi.js</a:t>
-            </a:r>
-          </a:p>
-        </p:txBody>
-      </p:sp>
-      <p:sp>
-        <p:nvSpPr>
-          <p:cNvPr id="7" name="TextBox 6"/>
+              <a:t>What they cannot do is show you a specific user's session</a:t>
+            </a:r>
+          </a:p>
+        </p:txBody>
+      </p:sp>
+      <p:sp>
+        <p:nvSpPr>
+          <p:cNvPr id="5" name="TextBox 4"/>
           <p:cNvSpPr txBox="1"/>
           <p:nvPr/>
         </p:nvSpPr>
@@ -10098,439 +9945,6 @@
 </file>
 
 <file path=ppt/slides/slide26.xml><?xml version="1.0" encoding="utf-8"?>
-<p:sld xmlns:a="http://schemas.openxmlformats.org/drawingml/2006/main" xmlns:p="http://schemas.openxmlformats.org/presentationml/2006/main" xmlns:r="http://schemas.openxmlformats.org/officeDocument/2006/relationships">
-  <p:cSld>
-    <p:bg>
-      <p:bgPr>
-        <a:solidFill>
-          <a:srgbClr val="FFFFFF"/>
-        </a:solidFill>
-        <a:effectLst/>
-      </p:bgPr>
-    </p:bg>
-    <p:spTree>
-      <p:nvGrpSpPr>
-        <p:cNvPr id="1" name=""/>
-        <p:cNvGrpSpPr/>
-        <p:nvPr/>
-      </p:nvGrpSpPr>
-      <p:grpSpPr/>
-      <p:sp>
-        <p:nvSpPr>
-          <p:cNvPr id="2" name="TextBox 1"/>
-          <p:cNvSpPr txBox="1"/>
-          <p:nvPr/>
-        </p:nvSpPr>
-        <p:spPr>
-          <a:xfrm>
-            <a:off x="822960" y="411480"/>
-            <a:ext cx="10515600" cy="822960"/>
-          </a:xfrm>
-          <a:prstGeom prst="rect">
-            <a:avLst/>
-          </a:prstGeom>
-          <a:noFill/>
-        </p:spPr>
-        <p:txBody>
-          <a:bodyPr wrap="square">
-            <a:spAutoFit/>
-          </a:bodyPr>
-          <a:lstStyle/>
-          <a:p>
-            <a:r>
-              <a:rPr sz="3000" b="1">
-                <a:solidFill>
-                  <a:srgbClr val="141B2D"/>
-                </a:solidFill>
-                <a:latin typeface="Helvetica Neue"/>
-              </a:rPr>
-              <a:t>What changes in ubi_queries</a:t>
-            </a:r>
-          </a:p>
-        </p:txBody>
-      </p:sp>
-      <p:pic>
-        <p:nvPicPr>
-          <p:cNvPr id="3" name="Picture 2" descr="28_ubi_document.png"/>
-          <p:cNvPicPr>
-            <a:picLocks noChangeAspect="1"/>
-          </p:cNvPicPr>
-          <p:nvPr/>
-        </p:nvPicPr>
-        <p:blipFill>
-          <a:blip r:embed="rId2"/>
-          <a:stretch>
-            <a:fillRect/>
-          </a:stretch>
-        </p:blipFill>
-        <p:spPr>
-          <a:xfrm>
-            <a:off x="1070391" y="1417320"/>
-            <a:ext cx="10050912" cy="4343400"/>
-          </a:xfrm>
-          <a:prstGeom prst="rect">
-            <a:avLst/>
-          </a:prstGeom>
-        </p:spPr>
-      </p:pic>
-      <p:sp>
-        <p:nvSpPr>
-          <p:cNvPr id="4" name="TextBox 3"/>
-          <p:cNvSpPr txBox="1"/>
-          <p:nvPr/>
-        </p:nvSpPr>
-        <p:spPr>
-          <a:xfrm>
-            <a:off x="822960" y="5989320"/>
-            <a:ext cx="8961120" cy="502920"/>
-          </a:xfrm>
-          <a:prstGeom prst="rect">
-            <a:avLst/>
-          </a:prstGeom>
-          <a:noFill/>
-        </p:spPr>
-        <p:txBody>
-          <a:bodyPr wrap="square">
-            <a:spAutoFit/>
-          </a:bodyPr>
-          <a:lstStyle/>
-          <a:p>
-            <a:r>
-              <a:rPr sz="1400" b="0" i="0">
-                <a:solidFill>
-                  <a:srgbClr val="5A647A"/>
-                </a:solidFill>
-                <a:latin typeface="Helvetica Neue"/>
-              </a:rPr>
-              <a:t>UBI supports this today through </a:t>
-            </a:r>
-            <a:r>
-              <a:rPr sz="1200" b="0">
-                <a:solidFill>
-                  <a:srgbClr val="5A647A"/>
-                </a:solidFill>
-                <a:latin typeface="Consolas"/>
-              </a:rPr>
-              <a:t>query_attributes</a:t>
-            </a:r>
-            <a:r>
-              <a:rPr sz="1400" b="0" i="0">
-                <a:solidFill>
-                  <a:srgbClr val="5A647A"/>
-                </a:solidFill>
-                <a:latin typeface="Helvetica Neue"/>
-              </a:rPr>
-              <a:t>, and the RFC will propose making it first-class</a:t>
-            </a:r>
-          </a:p>
-        </p:txBody>
-      </p:sp>
-      <p:sp>
-        <p:nvSpPr>
-          <p:cNvPr id="5" name="TextBox 4"/>
-          <p:cNvSpPr txBox="1"/>
-          <p:nvPr/>
-        </p:nvSpPr>
-        <p:spPr>
-          <a:xfrm>
-            <a:off x="10405872" y="6144768"/>
-            <a:ext cx="960120" cy="411480"/>
-          </a:xfrm>
-          <a:prstGeom prst="rect">
-            <a:avLst/>
-          </a:prstGeom>
-          <a:noFill/>
-        </p:spPr>
-        <p:txBody>
-          <a:bodyPr wrap="square">
-            <a:spAutoFit/>
-          </a:bodyPr>
-          <a:lstStyle/>
-          <a:p>
-            <a:pPr algn="r"/>
-            <a:r>
-              <a:rPr sz="1300" b="0">
-                <a:solidFill>
-                  <a:srgbClr val="5A647A"/>
-                </a:solidFill>
-                <a:latin typeface="Helvetica Neue"/>
-              </a:rPr>
-              <a:t>26</a:t>
-            </a:r>
-          </a:p>
-        </p:txBody>
-      </p:sp>
-    </p:spTree>
-  </p:cSld>
-  <p:clrMapOvr>
-    <a:masterClrMapping/>
-  </p:clrMapOvr>
-</p:sld>
-</file>
-
-<file path=ppt/slides/slide27.xml><?xml version="1.0" encoding="utf-8"?>
-<p:sld xmlns:a="http://schemas.openxmlformats.org/drawingml/2006/main" xmlns:p="http://schemas.openxmlformats.org/presentationml/2006/main" xmlns:r="http://schemas.openxmlformats.org/officeDocument/2006/relationships">
-  <p:cSld>
-    <p:bg>
-      <p:bgPr>
-        <a:solidFill>
-          <a:srgbClr val="FFFFFF"/>
-        </a:solidFill>
-        <a:effectLst/>
-      </p:bgPr>
-    </p:bg>
-    <p:spTree>
-      <p:nvGrpSpPr>
-        <p:cNvPr id="1" name=""/>
-        <p:cNvGrpSpPr/>
-        <p:nvPr/>
-      </p:nvGrpSpPr>
-      <p:grpSpPr/>
-      <p:sp>
-        <p:nvSpPr>
-          <p:cNvPr id="2" name="TextBox 1"/>
-          <p:cNvSpPr txBox="1"/>
-          <p:nvPr/>
-        </p:nvSpPr>
-        <p:spPr>
-          <a:xfrm>
-            <a:off x="822960" y="640080"/>
-            <a:ext cx="10515600" cy="960120"/>
-          </a:xfrm>
-          <a:prstGeom prst="rect">
-            <a:avLst/>
-          </a:prstGeom>
-          <a:noFill/>
-        </p:spPr>
-        <p:txBody>
-          <a:bodyPr wrap="square">
-            <a:spAutoFit/>
-          </a:bodyPr>
-          <a:lstStyle/>
-          <a:p>
-            <a:r>
-              <a:rPr sz="3400" b="1">
-                <a:solidFill>
-                  <a:srgbClr val="141B2D"/>
-                </a:solidFill>
-                <a:latin typeface="Helvetica Neue"/>
-              </a:rPr>
-              <a:t>What your dashboards can still compute</a:t>
-            </a:r>
-          </a:p>
-        </p:txBody>
-      </p:sp>
-      <p:sp>
-        <p:nvSpPr>
-          <p:cNvPr id="3" name="Rectangle 2"/>
-          <p:cNvSpPr/>
-          <p:nvPr/>
-        </p:nvSpPr>
-        <p:spPr>
-          <a:xfrm>
-            <a:off x="822960" y="1276603"/>
-            <a:ext cx="1463040" cy="50800"/>
-          </a:xfrm>
-          <a:prstGeom prst="rect">
-            <a:avLst/>
-          </a:prstGeom>
-          <a:solidFill>
-            <a:srgbClr val="005EB8"/>
-          </a:solidFill>
-          <a:ln>
-            <a:noFill/>
-          </a:ln>
-          <a:effectLst/>
-        </p:spPr>
-        <p:style>
-          <a:lnRef idx="1">
-            <a:schemeClr val="accent1"/>
-          </a:lnRef>
-          <a:fillRef idx="3">
-            <a:schemeClr val="accent1"/>
-          </a:fillRef>
-          <a:effectRef idx="2">
-            <a:schemeClr val="accent1"/>
-          </a:effectRef>
-          <a:fontRef idx="minor">
-            <a:schemeClr val="lt1"/>
-          </a:fontRef>
-        </p:style>
-        <p:txBody>
-          <a:bodyPr rtlCol="0" anchor="ctr"/>
-          <a:lstStyle/>
-          <a:p>
-            <a:pPr algn="ctr"/>
-          </a:p>
-        </p:txBody>
-      </p:sp>
-      <p:sp>
-        <p:nvSpPr>
-          <p:cNvPr id="4" name="TextBox 3"/>
-          <p:cNvSpPr txBox="1"/>
-          <p:nvPr/>
-        </p:nvSpPr>
-        <p:spPr>
-          <a:xfrm>
-            <a:off x="822960" y="2057400"/>
-            <a:ext cx="10515600" cy="4023360"/>
-          </a:xfrm>
-          <a:prstGeom prst="rect">
-            <a:avLst/>
-          </a:prstGeom>
-          <a:noFill/>
-        </p:spPr>
-        <p:txBody>
-          <a:bodyPr wrap="square">
-            <a:spAutoFit/>
-          </a:bodyPr>
-          <a:lstStyle/>
-          <a:p>
-            <a:pPr marL="342900" indent="-342900">
-              <a:spcAft>
-                <a:spcPts val="2000"/>
-              </a:spcAft>
-            </a:pPr>
-            <a:r>
-              <a:rPr sz="2400" b="1">
-                <a:solidFill>
-                  <a:srgbClr val="005EB8"/>
-                </a:solidFill>
-                <a:latin typeface="Helvetica Neue"/>
-              </a:rPr>
-              <a:t>-   </a:t>
-            </a:r>
-            <a:r>
-              <a:rPr sz="2400" b="0" i="0">
-                <a:solidFill>
-                  <a:srgbClr val="141B2D"/>
-                </a:solidFill>
-                <a:latin typeface="Helvetica Neue"/>
-              </a:rPr>
-              <a:t>Aggregate query intent per segment</a:t>
-            </a:r>
-          </a:p>
-          <a:p>
-            <a:pPr marL="342900" indent="-342900">
-              <a:spcAft>
-                <a:spcPts val="2000"/>
-              </a:spcAft>
-            </a:pPr>
-            <a:r>
-              <a:rPr sz="2400" b="1">
-                <a:solidFill>
-                  <a:srgbClr val="005EB8"/>
-                </a:solidFill>
-                <a:latin typeface="Helvetica Neue"/>
-              </a:rPr>
-              <a:t>-   </a:t>
-            </a:r>
-            <a:r>
-              <a:rPr sz="2400" b="0" i="0">
-                <a:solidFill>
-                  <a:srgbClr val="141B2D"/>
-                </a:solidFill>
-                <a:latin typeface="Helvetica Neue"/>
-              </a:rPr>
-              <a:t>Demand trends and shifts over time</a:t>
-            </a:r>
-          </a:p>
-          <a:p>
-            <a:pPr marL="342900" indent="-342900">
-              <a:spcAft>
-                <a:spcPts val="2000"/>
-              </a:spcAft>
-            </a:pPr>
-            <a:r>
-              <a:rPr sz="2400" b="1">
-                <a:solidFill>
-                  <a:srgbClr val="005EB8"/>
-                </a:solidFill>
-                <a:latin typeface="Helvetica Neue"/>
-              </a:rPr>
-              <a:t>-   </a:t>
-            </a:r>
-            <a:r>
-              <a:rPr sz="2400" b="0" i="0">
-                <a:solidFill>
-                  <a:srgbClr val="141B2D"/>
-                </a:solidFill>
-                <a:latin typeface="Helvetica Neue"/>
-              </a:rPr>
-              <a:t>Segment-level training signal for learning-to-rank</a:t>
-            </a:r>
-          </a:p>
-          <a:p>
-            <a:pPr marL="342900" indent="-342900">
-              <a:spcAft>
-                <a:spcPts val="2000"/>
-              </a:spcAft>
-            </a:pPr>
-            <a:r>
-              <a:rPr sz="2400" b="1">
-                <a:solidFill>
-                  <a:srgbClr val="005EB8"/>
-                </a:solidFill>
-                <a:latin typeface="Helvetica Neue"/>
-              </a:rPr>
-              <a:t>-   </a:t>
-            </a:r>
-            <a:r>
-              <a:rPr sz="2400" b="0" i="0">
-                <a:solidFill>
-                  <a:srgbClr val="141B2D"/>
-                </a:solidFill>
-                <a:latin typeface="Helvetica Neue"/>
-              </a:rPr>
-              <a:t>What they cannot do is show you one user's session</a:t>
-            </a:r>
-          </a:p>
-        </p:txBody>
-      </p:sp>
-      <p:sp>
-        <p:nvSpPr>
-          <p:cNvPr id="5" name="TextBox 4"/>
-          <p:cNvSpPr txBox="1"/>
-          <p:nvPr/>
-        </p:nvSpPr>
-        <p:spPr>
-          <a:xfrm>
-            <a:off x="10405872" y="6144768"/>
-            <a:ext cx="960120" cy="411480"/>
-          </a:xfrm>
-          <a:prstGeom prst="rect">
-            <a:avLst/>
-          </a:prstGeom>
-          <a:noFill/>
-        </p:spPr>
-        <p:txBody>
-          <a:bodyPr wrap="square">
-            <a:spAutoFit/>
-          </a:bodyPr>
-          <a:lstStyle/>
-          <a:p>
-            <a:pPr algn="r"/>
-            <a:r>
-              <a:rPr sz="1300" b="0">
-                <a:solidFill>
-                  <a:srgbClr val="5A647A"/>
-                </a:solidFill>
-                <a:latin typeface="Helvetica Neue"/>
-              </a:rPr>
-              <a:t>27</a:t>
-            </a:r>
-          </a:p>
-        </p:txBody>
-      </p:sp>
-    </p:spTree>
-  </p:cSld>
-  <p:clrMapOvr>
-    <a:masterClrMapping/>
-  </p:clrMapOvr>
-</p:sld>
-</file>
-
-<file path=ppt/slides/slide28.xml><?xml version="1.0" encoding="utf-8"?>
 <p:sld xmlns:a="http://schemas.openxmlformats.org/drawingml/2006/main" xmlns:p="http://schemas.openxmlformats.org/presentationml/2006/main" xmlns:r="http://schemas.openxmlformats.org/officeDocument/2006/relationships">
   <p:cSld>
     <p:bg>
@@ -11056,6 +10470,492 @@
                 </a:solidFill>
                 <a:latin typeface="Helvetica Neue"/>
               </a:rPr>
+              <a:t>26</a:t>
+            </a:r>
+          </a:p>
+        </p:txBody>
+      </p:sp>
+    </p:spTree>
+  </p:cSld>
+  <p:clrMapOvr>
+    <a:masterClrMapping/>
+  </p:clrMapOvr>
+</p:sld>
+</file>
+
+<file path=ppt/slides/slide27.xml><?xml version="1.0" encoding="utf-8"?>
+<p:sld xmlns:a="http://schemas.openxmlformats.org/drawingml/2006/main" xmlns:p="http://schemas.openxmlformats.org/presentationml/2006/main" xmlns:r="http://schemas.openxmlformats.org/officeDocument/2006/relationships">
+  <p:cSld>
+    <p:bg>
+      <p:bgPr>
+        <a:solidFill>
+          <a:srgbClr val="FFFFFF"/>
+        </a:solidFill>
+        <a:effectLst/>
+      </p:bgPr>
+    </p:bg>
+    <p:spTree>
+      <p:nvGrpSpPr>
+        <p:cNvPr id="1" name=""/>
+        <p:cNvGrpSpPr/>
+        <p:nvPr/>
+      </p:nvGrpSpPr>
+      <p:grpSpPr/>
+      <p:sp>
+        <p:nvSpPr>
+          <p:cNvPr id="2" name="TextBox 1"/>
+          <p:cNvSpPr txBox="1"/>
+          <p:nvPr/>
+        </p:nvSpPr>
+        <p:spPr>
+          <a:xfrm>
+            <a:off x="822960" y="411480"/>
+            <a:ext cx="10515600" cy="822960"/>
+          </a:xfrm>
+          <a:prstGeom prst="rect">
+            <a:avLst/>
+          </a:prstGeom>
+          <a:noFill/>
+        </p:spPr>
+        <p:txBody>
+          <a:bodyPr wrap="square">
+            <a:spAutoFit/>
+          </a:bodyPr>
+          <a:lstStyle/>
+          <a:p>
+            <a:r>
+              <a:rPr sz="3000" b="1">
+                <a:solidFill>
+                  <a:srgbClr val="141B2D"/>
+                </a:solidFill>
+                <a:latin typeface="Helvetica Neue"/>
+              </a:rPr>
+              <a:t>NDCG@10 Comparison</a:t>
+            </a:r>
+          </a:p>
+        </p:txBody>
+      </p:sp>
+      <p:sp>
+        <p:nvSpPr>
+          <p:cNvPr id="3" name="TextBox 2"/>
+          <p:cNvSpPr txBox="1"/>
+          <p:nvPr/>
+        </p:nvSpPr>
+        <p:spPr>
+          <a:xfrm>
+            <a:off x="822960" y="1097280"/>
+            <a:ext cx="10515600" cy="457200"/>
+          </a:xfrm>
+          <a:prstGeom prst="rect">
+            <a:avLst/>
+          </a:prstGeom>
+          <a:noFill/>
+        </p:spPr>
+        <p:txBody>
+          <a:bodyPr wrap="square">
+            <a:spAutoFit/>
+          </a:bodyPr>
+          <a:lstStyle/>
+          <a:p>
+            <a:pPr algn="ctr"/>
+            <a:r>
+              <a:rPr sz="1500" b="0" i="0">
+                <a:solidFill>
+                  <a:srgbClr val="5A647A"/>
+                </a:solidFill>
+                <a:latin typeface="Helvetica Neue"/>
+              </a:rPr>
+              <a:t>Each bar ranks the same judged products against a different vector, scored as NDCG@10</a:t>
+            </a:r>
+          </a:p>
+        </p:txBody>
+      </p:sp>
+      <p:pic>
+        <p:nvPicPr>
+          <p:cNvPr id="4" name="Picture 3" descr="12_ltr_segmentation.png"/>
+          <p:cNvPicPr>
+            <a:picLocks noChangeAspect="1"/>
+          </p:cNvPicPr>
+          <p:nvPr/>
+        </p:nvPicPr>
+        <p:blipFill>
+          <a:blip r:embed="rId2"/>
+          <a:stretch>
+            <a:fillRect/>
+          </a:stretch>
+        </p:blipFill>
+        <p:spPr>
+          <a:xfrm>
+            <a:off x="2696882" y="1828800"/>
+            <a:ext cx="6797931" cy="3931920"/>
+          </a:xfrm>
+          <a:prstGeom prst="rect">
+            <a:avLst/>
+          </a:prstGeom>
+        </p:spPr>
+      </p:pic>
+      <p:sp>
+        <p:nvSpPr>
+          <p:cNvPr id="5" name="TextBox 4"/>
+          <p:cNvSpPr txBox="1"/>
+          <p:nvPr/>
+        </p:nvSpPr>
+        <p:spPr>
+          <a:xfrm>
+            <a:off x="822960" y="5989320"/>
+            <a:ext cx="8961120" cy="502920"/>
+          </a:xfrm>
+          <a:prstGeom prst="rect">
+            <a:avLst/>
+          </a:prstGeom>
+          <a:noFill/>
+        </p:spPr>
+        <p:txBody>
+          <a:bodyPr wrap="square">
+            <a:spAutoFit/>
+          </a:bodyPr>
+          <a:lstStyle/>
+          <a:p>
+            <a:r>
+              <a:rPr sz="1400" b="0" i="0">
+                <a:solidFill>
+                  <a:srgbClr val="5A647A"/>
+                </a:solidFill>
+                <a:latin typeface="Helvetica Neue"/>
+              </a:rPr>
+              <a:t>233,430 graded judgments, 40 segments (arbitrarily chosen), epsilon 1 at 20,000 users a segment</a:t>
+            </a:r>
+          </a:p>
+        </p:txBody>
+      </p:sp>
+      <p:sp>
+        <p:nvSpPr>
+          <p:cNvPr id="6" name="TextBox 5"/>
+          <p:cNvSpPr txBox="1"/>
+          <p:nvPr/>
+        </p:nvSpPr>
+        <p:spPr>
+          <a:xfrm>
+            <a:off x="10405872" y="6144768"/>
+            <a:ext cx="960120" cy="411480"/>
+          </a:xfrm>
+          <a:prstGeom prst="rect">
+            <a:avLst/>
+          </a:prstGeom>
+          <a:noFill/>
+        </p:spPr>
+        <p:txBody>
+          <a:bodyPr wrap="square">
+            <a:spAutoFit/>
+          </a:bodyPr>
+          <a:lstStyle/>
+          <a:p>
+            <a:pPr algn="r"/>
+            <a:r>
+              <a:rPr sz="1300" b="0">
+                <a:solidFill>
+                  <a:srgbClr val="5A647A"/>
+                </a:solidFill>
+                <a:latin typeface="Helvetica Neue"/>
+              </a:rPr>
+              <a:t>27</a:t>
+            </a:r>
+          </a:p>
+        </p:txBody>
+      </p:sp>
+    </p:spTree>
+  </p:cSld>
+  <p:clrMapOvr>
+    <a:masterClrMapping/>
+  </p:clrMapOvr>
+</p:sld>
+</file>
+
+<file path=ppt/slides/slide28.xml><?xml version="1.0" encoding="utf-8"?>
+<p:sld xmlns:a="http://schemas.openxmlformats.org/drawingml/2006/main" xmlns:p="http://schemas.openxmlformats.org/presentationml/2006/main" xmlns:r="http://schemas.openxmlformats.org/officeDocument/2006/relationships">
+  <p:cSld>
+    <p:bg>
+      <p:bgPr>
+        <a:solidFill>
+          <a:srgbClr val="FFFFFF"/>
+        </a:solidFill>
+        <a:effectLst/>
+      </p:bgPr>
+    </p:bg>
+    <p:spTree>
+      <p:nvGrpSpPr>
+        <p:cNvPr id="1" name=""/>
+        <p:cNvGrpSpPr/>
+        <p:nvPr/>
+      </p:nvGrpSpPr>
+      <p:grpSpPr/>
+      <p:sp>
+        <p:nvSpPr>
+          <p:cNvPr id="2" name="TextBox 1"/>
+          <p:cNvSpPr txBox="1"/>
+          <p:nvPr/>
+        </p:nvSpPr>
+        <p:spPr>
+          <a:xfrm>
+            <a:off x="822960" y="640080"/>
+            <a:ext cx="10515600" cy="960120"/>
+          </a:xfrm>
+          <a:prstGeom prst="rect">
+            <a:avLst/>
+          </a:prstGeom>
+          <a:noFill/>
+        </p:spPr>
+        <p:txBody>
+          <a:bodyPr wrap="square">
+            <a:spAutoFit/>
+          </a:bodyPr>
+          <a:lstStyle/>
+          <a:p>
+            <a:r>
+              <a:rPr sz="3400" b="1">
+                <a:solidFill>
+                  <a:srgbClr val="141B2D"/>
+                </a:solidFill>
+                <a:latin typeface="Helvetica Neue"/>
+              </a:rPr>
+              <a:t>The limitations</a:t>
+            </a:r>
+          </a:p>
+        </p:txBody>
+      </p:sp>
+      <p:sp>
+        <p:nvSpPr>
+          <p:cNvPr id="3" name="Rectangle 2"/>
+          <p:cNvSpPr/>
+          <p:nvPr/>
+        </p:nvSpPr>
+        <p:spPr>
+          <a:xfrm>
+            <a:off x="822960" y="1276603"/>
+            <a:ext cx="1463040" cy="50800"/>
+          </a:xfrm>
+          <a:prstGeom prst="rect">
+            <a:avLst/>
+          </a:prstGeom>
+          <a:solidFill>
+            <a:srgbClr val="B4311A"/>
+          </a:solidFill>
+          <a:ln>
+            <a:noFill/>
+          </a:ln>
+          <a:effectLst/>
+        </p:spPr>
+        <p:style>
+          <a:lnRef idx="1">
+            <a:schemeClr val="accent1"/>
+          </a:lnRef>
+          <a:fillRef idx="3">
+            <a:schemeClr val="accent1"/>
+          </a:fillRef>
+          <a:effectRef idx="2">
+            <a:schemeClr val="accent1"/>
+          </a:effectRef>
+          <a:fontRef idx="minor">
+            <a:schemeClr val="lt1"/>
+          </a:fontRef>
+        </p:style>
+        <p:txBody>
+          <a:bodyPr rtlCol="0" anchor="ctr"/>
+          <a:lstStyle/>
+          <a:p>
+            <a:pPr algn="ctr"/>
+          </a:p>
+        </p:txBody>
+      </p:sp>
+      <p:sp>
+        <p:nvSpPr>
+          <p:cNvPr id="4" name="TextBox 3"/>
+          <p:cNvSpPr txBox="1"/>
+          <p:nvPr/>
+        </p:nvSpPr>
+        <p:spPr>
+          <a:xfrm>
+            <a:off x="822960" y="2057400"/>
+            <a:ext cx="10515600" cy="4023360"/>
+          </a:xfrm>
+          <a:prstGeom prst="rect">
+            <a:avLst/>
+          </a:prstGeom>
+          <a:noFill/>
+        </p:spPr>
+        <p:txBody>
+          <a:bodyPr wrap="square">
+            <a:spAutoFit/>
+          </a:bodyPr>
+          <a:lstStyle/>
+          <a:p>
+            <a:pPr marL="342900" indent="-342900">
+              <a:spcAft>
+                <a:spcPts val="2000"/>
+              </a:spcAft>
+            </a:pPr>
+            <a:r>
+              <a:rPr sz="2400" b="1">
+                <a:solidFill>
+                  <a:srgbClr val="B4311A"/>
+                </a:solidFill>
+                <a:latin typeface="Helvetica Neue"/>
+              </a:rPr>
+              <a:t>-   </a:t>
+            </a:r>
+            <a:r>
+              <a:rPr sz="2400" b="0" i="0">
+                <a:solidFill>
+                  <a:srgbClr val="141B2D"/>
+                </a:solidFill>
+                <a:latin typeface="Helvetica Neue"/>
+              </a:rPr>
+              <a:t>The category leaks and that is worse for healthcare than furniture</a:t>
+            </a:r>
+          </a:p>
+          <a:p>
+            <a:pPr marL="342900" indent="-342900">
+              <a:spcAft>
+                <a:spcPts val="2000"/>
+              </a:spcAft>
+            </a:pPr>
+            <a:r>
+              <a:rPr sz="2400" b="1">
+                <a:solidFill>
+                  <a:srgbClr val="B4311A"/>
+                </a:solidFill>
+                <a:latin typeface="Helvetica Neue"/>
+              </a:rPr>
+              <a:t>-   </a:t>
+            </a:r>
+            <a:r>
+              <a:rPr sz="2400" b="0" i="0">
+                <a:solidFill>
+                  <a:srgbClr val="141B2D"/>
+                </a:solidFill>
+                <a:latin typeface="Helvetica Neue"/>
+              </a:rPr>
+              <a:t>Epsilon values don't transfer between indexes</a:t>
+            </a:r>
+          </a:p>
+          <a:p>
+            <a:pPr marL="342900" indent="-342900">
+              <a:spcAft>
+                <a:spcPts val="2000"/>
+              </a:spcAft>
+            </a:pPr>
+            <a:r>
+              <a:rPr sz="2400" b="1">
+                <a:solidFill>
+                  <a:srgbClr val="B4311A"/>
+                </a:solidFill>
+                <a:latin typeface="Helvetica Neue"/>
+              </a:rPr>
+              <a:t>-   </a:t>
+            </a:r>
+            <a:r>
+              <a:rPr sz="2400" b="0" i="0">
+                <a:solidFill>
+                  <a:srgbClr val="141B2D"/>
+                </a:solidFill>
+                <a:latin typeface="Helvetica Neue"/>
+              </a:rPr>
+              <a:t>Long tail queries stay unmeasurable</a:t>
+            </a:r>
+          </a:p>
+          <a:p>
+            <a:pPr marL="342900" indent="-342900">
+              <a:spcAft>
+                <a:spcPts val="2000"/>
+              </a:spcAft>
+            </a:pPr>
+            <a:r>
+              <a:rPr sz="2400" b="1">
+                <a:solidFill>
+                  <a:srgbClr val="B4311A"/>
+                </a:solidFill>
+                <a:latin typeface="Helvetica Neue"/>
+              </a:rPr>
+              <a:t>-   </a:t>
+            </a:r>
+            <a:r>
+              <a:rPr sz="2400" b="0" i="0">
+                <a:solidFill>
+                  <a:srgbClr val="141B2D"/>
+                </a:solidFill>
+                <a:latin typeface="Helvetica Neue"/>
+              </a:rPr>
+              <a:t>This protects </a:t>
+            </a:r>
+            <a:r>
+              <a:rPr sz="2200" b="0">
+                <a:solidFill>
+                  <a:srgbClr val="141B2D"/>
+                </a:solidFill>
+                <a:latin typeface="Consolas"/>
+              </a:rPr>
+              <a:t>user_query</a:t>
+            </a:r>
+            <a:r>
+              <a:rPr sz="2400" b="0" i="0">
+                <a:solidFill>
+                  <a:srgbClr val="141B2D"/>
+                </a:solidFill>
+                <a:latin typeface="Helvetica Neue"/>
+              </a:rPr>
+              <a:t> but </a:t>
+            </a:r>
+            <a:r>
+              <a:rPr sz="2200" b="0">
+                <a:solidFill>
+                  <a:srgbClr val="141B2D"/>
+                </a:solidFill>
+                <a:latin typeface="Consolas"/>
+              </a:rPr>
+              <a:t>ubi_events</a:t>
+            </a:r>
+            <a:r>
+              <a:rPr sz="2400" b="0" i="0">
+                <a:solidFill>
+                  <a:srgbClr val="141B2D"/>
+                </a:solidFill>
+                <a:latin typeface="Helvetica Neue"/>
+              </a:rPr>
+              <a:t> still holds clicks and ids in the clear</a:t>
+            </a:r>
+          </a:p>
+        </p:txBody>
+      </p:sp>
+      <p:sp>
+        <p:nvSpPr>
+          <p:cNvPr id="5" name="TextBox 4"/>
+          <p:cNvSpPr txBox="1"/>
+          <p:nvPr/>
+        </p:nvSpPr>
+        <p:spPr>
+          <a:xfrm>
+            <a:off x="10405872" y="6144768"/>
+            <a:ext cx="960120" cy="411480"/>
+          </a:xfrm>
+          <a:prstGeom prst="rect">
+            <a:avLst/>
+          </a:prstGeom>
+          <a:noFill/>
+        </p:spPr>
+        <p:txBody>
+          <a:bodyPr wrap="square">
+            <a:spAutoFit/>
+          </a:bodyPr>
+          <a:lstStyle/>
+          <a:p>
+            <a:pPr algn="r"/>
+            <a:r>
+              <a:rPr sz="1300" b="0">
+                <a:solidFill>
+                  <a:srgbClr val="5A647A"/>
+                </a:solidFill>
+                <a:latin typeface="Helvetica Neue"/>
+              </a:rPr>
               <a:t>28</a:t>
             </a:r>
           </a:p>
@@ -11095,8 +10995,8 @@
         </p:nvSpPr>
         <p:spPr>
           <a:xfrm>
-            <a:off x="822960" y="411480"/>
-            <a:ext cx="10515600" cy="822960"/>
+            <a:off x="822960" y="640080"/>
+            <a:ext cx="10515600" cy="960120"/>
           </a:xfrm>
           <a:prstGeom prst="rect">
             <a:avLst/>
@@ -11110,27 +11010,71 @@
           <a:lstStyle/>
           <a:p>
             <a:r>
-              <a:rPr sz="3000" b="1">
+              <a:rPr sz="3400" b="1">
                 <a:solidFill>
                   <a:srgbClr val="141B2D"/>
                 </a:solidFill>
                 <a:latin typeface="Helvetica Neue"/>
               </a:rPr>
-              <a:t>NDCG@10 Comparison</a:t>
-            </a:r>
-          </a:p>
-        </p:txBody>
-      </p:sp>
-      <p:sp>
-        <p:nvSpPr>
-          <p:cNvPr id="3" name="TextBox 2"/>
+              <a:t>Takeaways</a:t>
+            </a:r>
+          </a:p>
+        </p:txBody>
+      </p:sp>
+      <p:sp>
+        <p:nvSpPr>
+          <p:cNvPr id="3" name="Rectangle 2"/>
+          <p:cNvSpPr/>
+          <p:nvPr/>
+        </p:nvSpPr>
+        <p:spPr>
+          <a:xfrm>
+            <a:off x="822960" y="1276603"/>
+            <a:ext cx="1463040" cy="50800"/>
+          </a:xfrm>
+          <a:prstGeom prst="rect">
+            <a:avLst/>
+          </a:prstGeom>
+          <a:solidFill>
+            <a:srgbClr val="005EB8"/>
+          </a:solidFill>
+          <a:ln>
+            <a:noFill/>
+          </a:ln>
+          <a:effectLst/>
+        </p:spPr>
+        <p:style>
+          <a:lnRef idx="1">
+            <a:schemeClr val="accent1"/>
+          </a:lnRef>
+          <a:fillRef idx="3">
+            <a:schemeClr val="accent1"/>
+          </a:fillRef>
+          <a:effectRef idx="2">
+            <a:schemeClr val="accent1"/>
+          </a:effectRef>
+          <a:fontRef idx="minor">
+            <a:schemeClr val="lt1"/>
+          </a:fontRef>
+        </p:style>
+        <p:txBody>
+          <a:bodyPr rtlCol="0" anchor="ctr"/>
+          <a:lstStyle/>
+          <a:p>
+            <a:pPr algn="ctr"/>
+          </a:p>
+        </p:txBody>
+      </p:sp>
+      <p:sp>
+        <p:nvSpPr>
+          <p:cNvPr id="4" name="TextBox 3"/>
           <p:cNvSpPr txBox="1"/>
           <p:nvPr/>
         </p:nvSpPr>
         <p:spPr>
           <a:xfrm>
-            <a:off x="822960" y="1097280"/>
-            <a:ext cx="10515600" cy="457200"/>
+            <a:off x="822960" y="2057400"/>
+            <a:ext cx="10515600" cy="4023360"/>
           </a:xfrm>
           <a:prstGeom prst="rect">
             <a:avLst/>
@@ -11143,80 +11087,110 @@
           </a:bodyPr>
           <a:lstStyle/>
           <a:p>
-            <a:pPr algn="ctr"/>
-            <a:r>
-              <a:rPr sz="1500" b="0" i="0">
-                <a:solidFill>
-                  <a:srgbClr val="5A647A"/>
-                </a:solidFill>
-                <a:latin typeface="Helvetica Neue"/>
-              </a:rPr>
-              <a:t>Each bar ranks the same judged products against a different vector, scored as NDCG@10</a:t>
-            </a:r>
-          </a:p>
-        </p:txBody>
-      </p:sp>
-      <p:pic>
-        <p:nvPicPr>
-          <p:cNvPr id="4" name="Picture 3" descr="12_ltr_segmentation.png"/>
-          <p:cNvPicPr>
-            <a:picLocks noChangeAspect="1"/>
-          </p:cNvPicPr>
-          <p:nvPr/>
-        </p:nvPicPr>
-        <p:blipFill>
-          <a:blip r:embed="rId2"/>
-          <a:stretch>
-            <a:fillRect/>
-          </a:stretch>
-        </p:blipFill>
-        <p:spPr>
-          <a:xfrm>
-            <a:off x="2696882" y="1828800"/>
-            <a:ext cx="6797931" cy="3931920"/>
-          </a:xfrm>
-          <a:prstGeom prst="rect">
-            <a:avLst/>
-          </a:prstGeom>
-        </p:spPr>
-      </p:pic>
+            <a:pPr marL="342900" indent="-342900">
+              <a:spcAft>
+                <a:spcPts val="2000"/>
+              </a:spcAft>
+            </a:pPr>
+            <a:r>
+              <a:rPr sz="2400" b="1">
+                <a:solidFill>
+                  <a:srgbClr val="005EB8"/>
+                </a:solidFill>
+                <a:latin typeface="Helvetica Neue"/>
+              </a:rPr>
+              <a:t>-   </a:t>
+            </a:r>
+            <a:r>
+              <a:rPr sz="2400" b="0" i="0">
+                <a:solidFill>
+                  <a:srgbClr val="141B2D"/>
+                </a:solidFill>
+                <a:latin typeface="Helvetica Neue"/>
+              </a:rPr>
+              <a:t>Storing embeddings instead of text is not privacy</a:t>
+            </a:r>
+          </a:p>
+          <a:p>
+            <a:pPr marL="342900" indent="-342900">
+              <a:spcAft>
+                <a:spcPts val="2000"/>
+              </a:spcAft>
+            </a:pPr>
+            <a:r>
+              <a:rPr sz="2400" b="1">
+                <a:solidFill>
+                  <a:srgbClr val="005EB8"/>
+                </a:solidFill>
+                <a:latin typeface="Helvetica Neue"/>
+              </a:rPr>
+              <a:t>-   </a:t>
+            </a:r>
+            <a:r>
+              <a:rPr sz="2400" b="0" i="0">
+                <a:solidFill>
+                  <a:srgbClr val="141B2D"/>
+                </a:solidFill>
+                <a:latin typeface="Helvetica Neue"/>
+              </a:rPr>
+              <a:t>Keeping sensitive data out of the index beats redacting it later</a:t>
+            </a:r>
+          </a:p>
+          <a:p>
+            <a:pPr marL="342900" indent="-342900">
+              <a:spcAft>
+                <a:spcPts val="2000"/>
+              </a:spcAft>
+            </a:pPr>
+            <a:r>
+              <a:rPr sz="2400" b="1">
+                <a:solidFill>
+                  <a:srgbClr val="005EB8"/>
+                </a:solidFill>
+                <a:latin typeface="Helvetica Neue"/>
+              </a:rPr>
+              <a:t>-   </a:t>
+            </a:r>
+            <a:r>
+              <a:rPr sz="2400" b="0" i="0">
+                <a:solidFill>
+                  <a:srgbClr val="141B2D"/>
+                </a:solidFill>
+                <a:latin typeface="Helvetica Neue"/>
+              </a:rPr>
+              <a:t>Verify the mechanism by testing it, not by trusting it</a:t>
+            </a:r>
+          </a:p>
+          <a:p>
+            <a:pPr marL="342900" indent="-342900">
+              <a:spcAft>
+                <a:spcPts val="2000"/>
+              </a:spcAft>
+            </a:pPr>
+            <a:r>
+              <a:rPr sz="2400" b="1">
+                <a:solidFill>
+                  <a:srgbClr val="005EB8"/>
+                </a:solidFill>
+                <a:latin typeface="Helvetica Neue"/>
+              </a:rPr>
+              <a:t>-   </a:t>
+            </a:r>
+            <a:r>
+              <a:rPr sz="2400" b="0" i="0">
+                <a:solidFill>
+                  <a:srgbClr val="005EB8"/>
+                </a:solidFill>
+                <a:latin typeface="Helvetica Neue"/>
+              </a:rPr>
+              <a:t>You trade individual resolution for population accuracy but that's what relevance tuning needs</a:t>
+            </a:r>
+          </a:p>
+        </p:txBody>
+      </p:sp>
       <p:sp>
         <p:nvSpPr>
           <p:cNvPr id="5" name="TextBox 4"/>
-          <p:cNvSpPr txBox="1"/>
-          <p:nvPr/>
-        </p:nvSpPr>
-        <p:spPr>
-          <a:xfrm>
-            <a:off x="822960" y="5989320"/>
-            <a:ext cx="8961120" cy="502920"/>
-          </a:xfrm>
-          <a:prstGeom prst="rect">
-            <a:avLst/>
-          </a:prstGeom>
-          <a:noFill/>
-        </p:spPr>
-        <p:txBody>
-          <a:bodyPr wrap="square">
-            <a:spAutoFit/>
-          </a:bodyPr>
-          <a:lstStyle/>
-          <a:p>
-            <a:r>
-              <a:rPr sz="1400" b="0" i="0">
-                <a:solidFill>
-                  <a:srgbClr val="5A647A"/>
-                </a:solidFill>
-                <a:latin typeface="Helvetica Neue"/>
-              </a:rPr>
-              <a:t>233,430 graded judgments, 40 segments (arbitrarily chosen), epsilon 1 at 20,000 users a segment</a:t>
-            </a:r>
-          </a:p>
-        </p:txBody>
-      </p:sp>
-      <p:sp>
-        <p:nvSpPr>
-          <p:cNvPr id="6" name="TextBox 5"/>
           <p:cNvSpPr txBox="1"/>
           <p:nvPr/>
         </p:nvSpPr>
@@ -11374,7 +11348,7 @@
     <p:bg>
       <p:bgPr>
         <a:solidFill>
-          <a:srgbClr val="FFFFFF"/>
+          <a:srgbClr val="0E1A2F"/>
         </a:solidFill>
         <a:effectLst/>
       </p:bgPr>
@@ -11394,8 +11368,8 @@
         </p:nvSpPr>
         <p:spPr>
           <a:xfrm>
-            <a:off x="822960" y="640080"/>
-            <a:ext cx="10515600" cy="960120"/>
+            <a:off x="822960" y="2103120"/>
+            <a:ext cx="10515600" cy="2377440"/>
           </a:xfrm>
           <a:prstGeom prst="rect">
             <a:avLst/>
@@ -11409,33 +11383,115 @@
           <a:lstStyle/>
           <a:p>
             <a:r>
-              <a:rPr sz="3400" b="1">
-                <a:solidFill>
-                  <a:srgbClr val="141B2D"/>
-                </a:solidFill>
-                <a:latin typeface="Helvetica Neue"/>
-              </a:rPr>
-              <a:t>The limitations</a:t>
-            </a:r>
-          </a:p>
-        </p:txBody>
-      </p:sp>
-      <p:sp>
-        <p:nvSpPr>
-          <p:cNvPr id="3" name="Rectangle 2"/>
+              <a:rPr sz="4800" b="1">
+                <a:solidFill>
+                  <a:srgbClr val="FFFFFF"/>
+                </a:solidFill>
+                <a:latin typeface="Helvetica Neue"/>
+              </a:rPr>
+              <a:t>Questions</a:t>
+            </a:r>
+          </a:p>
+          <a:p>
+            <a:pPr>
+              <a:spcBef>
+                <a:spcPts val="1400"/>
+              </a:spcBef>
+            </a:pPr>
+            <a:r>
+              <a:rPr sz="2600" b="0">
+                <a:solidFill>
+                  <a:srgbClr val="8EB8E8"/>
+                </a:solidFill>
+                <a:latin typeface="Helvetica Neue"/>
+              </a:rPr>
+              <a:t>github.com/jzonthemtn/ldp-for-search</a:t>
+            </a:r>
+          </a:p>
+        </p:txBody>
+      </p:sp>
+      <p:sp>
+        <p:nvSpPr>
+          <p:cNvPr id="3" name="TextBox 2"/>
+          <p:cNvSpPr txBox="1"/>
+          <p:nvPr/>
+        </p:nvSpPr>
+        <p:spPr>
+          <a:xfrm>
+            <a:off x="822960" y="5532120"/>
+            <a:ext cx="10515600" cy="914400"/>
+          </a:xfrm>
+          <a:prstGeom prst="rect">
+            <a:avLst/>
+          </a:prstGeom>
+          <a:noFill/>
+        </p:spPr>
+        <p:txBody>
+          <a:bodyPr wrap="square">
+            <a:spAutoFit/>
+          </a:bodyPr>
+          <a:lstStyle/>
+          <a:p>
+            <a:r>
+              <a:rPr sz="1800" b="1">
+                <a:solidFill>
+                  <a:srgbClr val="C5CFE0"/>
+                </a:solidFill>
+                <a:latin typeface="Helvetica Neue"/>
+              </a:rPr>
+              <a:t>Jeff Zemerick</a:t>
+            </a:r>
+          </a:p>
+          <a:p>
+            <a:pPr>
+              <a:spcBef>
+                <a:spcPts val="400"/>
+              </a:spcBef>
+            </a:pPr>
+            <a:r>
+              <a:rPr sz="1500" b="0">
+                <a:solidFill>
+                  <a:srgbClr val="7C889E"/>
+                </a:solidFill>
+                <a:latin typeface="Helvetica Neue"/>
+              </a:rPr>
+              <a:t>OpenSearchCon NA</a:t>
+            </a:r>
+          </a:p>
+          <a:p>
+            <a:pPr>
+              <a:spcBef>
+                <a:spcPts val="100"/>
+              </a:spcBef>
+            </a:pPr>
+            <a:r>
+              <a:rPr sz="1500" b="0">
+                <a:solidFill>
+                  <a:srgbClr val="7C889E"/>
+                </a:solidFill>
+                <a:latin typeface="Helvetica Neue"/>
+              </a:rPr>
+              <a:t>September 24, 2026</a:t>
+            </a:r>
+          </a:p>
+        </p:txBody>
+      </p:sp>
+      <p:sp>
+        <p:nvSpPr>
+          <p:cNvPr id="4" name="Rectangle 3"/>
           <p:cNvSpPr/>
           <p:nvPr/>
         </p:nvSpPr>
         <p:spPr>
           <a:xfrm>
-            <a:off x="822960" y="1276603"/>
-            <a:ext cx="1463040" cy="50800"/>
+            <a:off x="8771839" y="1975104"/>
+            <a:ext cx="2724912" cy="2724912"/>
           </a:xfrm>
           <a:prstGeom prst="rect">
             <a:avLst/>
           </a:prstGeom>
           <a:solidFill>
-            <a:srgbClr val="B4311A"/>
+            <a:srgbClr val="FFFFFF"/>
           </a:solidFill>
           <a:ln>
             <a:noFill/>
@@ -11464,648 +11520,6 @@
           </a:p>
         </p:txBody>
       </p:sp>
-      <p:sp>
-        <p:nvSpPr>
-          <p:cNvPr id="4" name="TextBox 3"/>
-          <p:cNvSpPr txBox="1"/>
-          <p:nvPr/>
-        </p:nvSpPr>
-        <p:spPr>
-          <a:xfrm>
-            <a:off x="822960" y="2057400"/>
-            <a:ext cx="10515600" cy="4023360"/>
-          </a:xfrm>
-          <a:prstGeom prst="rect">
-            <a:avLst/>
-          </a:prstGeom>
-          <a:noFill/>
-        </p:spPr>
-        <p:txBody>
-          <a:bodyPr wrap="square">
-            <a:spAutoFit/>
-          </a:bodyPr>
-          <a:lstStyle/>
-          <a:p>
-            <a:pPr marL="342900" indent="-342900">
-              <a:spcAft>
-                <a:spcPts val="2000"/>
-              </a:spcAft>
-            </a:pPr>
-            <a:r>
-              <a:rPr sz="2400" b="1">
-                <a:solidFill>
-                  <a:srgbClr val="B4311A"/>
-                </a:solidFill>
-                <a:latin typeface="Helvetica Neue"/>
-              </a:rPr>
-              <a:t>-   </a:t>
-            </a:r>
-            <a:r>
-              <a:rPr sz="2400" b="0" i="0">
-                <a:solidFill>
-                  <a:srgbClr val="141B2D"/>
-                </a:solidFill>
-                <a:latin typeface="Helvetica Neue"/>
-              </a:rPr>
-              <a:t>The category leaks and that is worse for healthcare than furniture</a:t>
-            </a:r>
-          </a:p>
-          <a:p>
-            <a:pPr marL="342900" indent="-342900">
-              <a:spcAft>
-                <a:spcPts val="2000"/>
-              </a:spcAft>
-            </a:pPr>
-            <a:r>
-              <a:rPr sz="2400" b="1">
-                <a:solidFill>
-                  <a:srgbClr val="B4311A"/>
-                </a:solidFill>
-                <a:latin typeface="Helvetica Neue"/>
-              </a:rPr>
-              <a:t>-   </a:t>
-            </a:r>
-            <a:r>
-              <a:rPr sz="2400" b="0" i="0">
-                <a:solidFill>
-                  <a:srgbClr val="141B2D"/>
-                </a:solidFill>
-                <a:latin typeface="Helvetica Neue"/>
-              </a:rPr>
-              <a:t>Epsilon values don't transfer between indexes</a:t>
-            </a:r>
-          </a:p>
-          <a:p>
-            <a:pPr marL="342900" indent="-342900">
-              <a:spcAft>
-                <a:spcPts val="2000"/>
-              </a:spcAft>
-            </a:pPr>
-            <a:r>
-              <a:rPr sz="2400" b="1">
-                <a:solidFill>
-                  <a:srgbClr val="B4311A"/>
-                </a:solidFill>
-                <a:latin typeface="Helvetica Neue"/>
-              </a:rPr>
-              <a:t>-   </a:t>
-            </a:r>
-            <a:r>
-              <a:rPr sz="2400" b="0" i="0">
-                <a:solidFill>
-                  <a:srgbClr val="141B2D"/>
-                </a:solidFill>
-                <a:latin typeface="Helvetica Neue"/>
-              </a:rPr>
-              <a:t>Long tail queries stay unmeasurable</a:t>
-            </a:r>
-          </a:p>
-          <a:p>
-            <a:pPr marL="342900" indent="-342900">
-              <a:spcAft>
-                <a:spcPts val="2000"/>
-              </a:spcAft>
-            </a:pPr>
-            <a:r>
-              <a:rPr sz="2400" b="1">
-                <a:solidFill>
-                  <a:srgbClr val="B4311A"/>
-                </a:solidFill>
-                <a:latin typeface="Helvetica Neue"/>
-              </a:rPr>
-              <a:t>-   </a:t>
-            </a:r>
-            <a:r>
-              <a:rPr sz="2400" b="0" i="0">
-                <a:solidFill>
-                  <a:srgbClr val="141B2D"/>
-                </a:solidFill>
-                <a:latin typeface="Helvetica Neue"/>
-              </a:rPr>
-              <a:t>This protects </a:t>
-            </a:r>
-            <a:r>
-              <a:rPr sz="2200" b="0">
-                <a:solidFill>
-                  <a:srgbClr val="141B2D"/>
-                </a:solidFill>
-                <a:latin typeface="Consolas"/>
-              </a:rPr>
-              <a:t>user_query</a:t>
-            </a:r>
-            <a:r>
-              <a:rPr sz="2400" b="0" i="0">
-                <a:solidFill>
-                  <a:srgbClr val="141B2D"/>
-                </a:solidFill>
-                <a:latin typeface="Helvetica Neue"/>
-              </a:rPr>
-              <a:t> but </a:t>
-            </a:r>
-            <a:r>
-              <a:rPr sz="2200" b="0">
-                <a:solidFill>
-                  <a:srgbClr val="141B2D"/>
-                </a:solidFill>
-                <a:latin typeface="Consolas"/>
-              </a:rPr>
-              <a:t>ubi_events</a:t>
-            </a:r>
-            <a:r>
-              <a:rPr sz="2400" b="0" i="0">
-                <a:solidFill>
-                  <a:srgbClr val="141B2D"/>
-                </a:solidFill>
-                <a:latin typeface="Helvetica Neue"/>
-              </a:rPr>
-              <a:t> still holds clicks and ids in the clear</a:t>
-            </a:r>
-          </a:p>
-        </p:txBody>
-      </p:sp>
-      <p:sp>
-        <p:nvSpPr>
-          <p:cNvPr id="5" name="TextBox 4"/>
-          <p:cNvSpPr txBox="1"/>
-          <p:nvPr/>
-        </p:nvSpPr>
-        <p:spPr>
-          <a:xfrm>
-            <a:off x="10405872" y="6144768"/>
-            <a:ext cx="960120" cy="411480"/>
-          </a:xfrm>
-          <a:prstGeom prst="rect">
-            <a:avLst/>
-          </a:prstGeom>
-          <a:noFill/>
-        </p:spPr>
-        <p:txBody>
-          <a:bodyPr wrap="square">
-            <a:spAutoFit/>
-          </a:bodyPr>
-          <a:lstStyle/>
-          <a:p>
-            <a:pPr algn="r"/>
-            <a:r>
-              <a:rPr sz="1300" b="0">
-                <a:solidFill>
-                  <a:srgbClr val="5A647A"/>
-                </a:solidFill>
-                <a:latin typeface="Helvetica Neue"/>
-              </a:rPr>
-              <a:t>30</a:t>
-            </a:r>
-          </a:p>
-        </p:txBody>
-      </p:sp>
-    </p:spTree>
-  </p:cSld>
-  <p:clrMapOvr>
-    <a:masterClrMapping/>
-  </p:clrMapOvr>
-</p:sld>
-</file>
-
-<file path=ppt/slides/slide31.xml><?xml version="1.0" encoding="utf-8"?>
-<p:sld xmlns:a="http://schemas.openxmlformats.org/drawingml/2006/main" xmlns:p="http://schemas.openxmlformats.org/presentationml/2006/main" xmlns:r="http://schemas.openxmlformats.org/officeDocument/2006/relationships">
-  <p:cSld>
-    <p:bg>
-      <p:bgPr>
-        <a:solidFill>
-          <a:srgbClr val="FFFFFF"/>
-        </a:solidFill>
-        <a:effectLst/>
-      </p:bgPr>
-    </p:bg>
-    <p:spTree>
-      <p:nvGrpSpPr>
-        <p:cNvPr id="1" name=""/>
-        <p:cNvGrpSpPr/>
-        <p:nvPr/>
-      </p:nvGrpSpPr>
-      <p:grpSpPr/>
-      <p:sp>
-        <p:nvSpPr>
-          <p:cNvPr id="2" name="TextBox 1"/>
-          <p:cNvSpPr txBox="1"/>
-          <p:nvPr/>
-        </p:nvSpPr>
-        <p:spPr>
-          <a:xfrm>
-            <a:off x="822960" y="640080"/>
-            <a:ext cx="10515600" cy="960120"/>
-          </a:xfrm>
-          <a:prstGeom prst="rect">
-            <a:avLst/>
-          </a:prstGeom>
-          <a:noFill/>
-        </p:spPr>
-        <p:txBody>
-          <a:bodyPr wrap="square">
-            <a:spAutoFit/>
-          </a:bodyPr>
-          <a:lstStyle/>
-          <a:p>
-            <a:r>
-              <a:rPr sz="3400" b="1">
-                <a:solidFill>
-                  <a:srgbClr val="141B2D"/>
-                </a:solidFill>
-                <a:latin typeface="Helvetica Neue"/>
-              </a:rPr>
-              <a:t>Takeaways</a:t>
-            </a:r>
-          </a:p>
-        </p:txBody>
-      </p:sp>
-      <p:sp>
-        <p:nvSpPr>
-          <p:cNvPr id="3" name="Rectangle 2"/>
-          <p:cNvSpPr/>
-          <p:nvPr/>
-        </p:nvSpPr>
-        <p:spPr>
-          <a:xfrm>
-            <a:off x="822960" y="1276603"/>
-            <a:ext cx="1463040" cy="50800"/>
-          </a:xfrm>
-          <a:prstGeom prst="rect">
-            <a:avLst/>
-          </a:prstGeom>
-          <a:solidFill>
-            <a:srgbClr val="005EB8"/>
-          </a:solidFill>
-          <a:ln>
-            <a:noFill/>
-          </a:ln>
-          <a:effectLst/>
-        </p:spPr>
-        <p:style>
-          <a:lnRef idx="1">
-            <a:schemeClr val="accent1"/>
-          </a:lnRef>
-          <a:fillRef idx="3">
-            <a:schemeClr val="accent1"/>
-          </a:fillRef>
-          <a:effectRef idx="2">
-            <a:schemeClr val="accent1"/>
-          </a:effectRef>
-          <a:fontRef idx="minor">
-            <a:schemeClr val="lt1"/>
-          </a:fontRef>
-        </p:style>
-        <p:txBody>
-          <a:bodyPr rtlCol="0" anchor="ctr"/>
-          <a:lstStyle/>
-          <a:p>
-            <a:pPr algn="ctr"/>
-          </a:p>
-        </p:txBody>
-      </p:sp>
-      <p:sp>
-        <p:nvSpPr>
-          <p:cNvPr id="4" name="TextBox 3"/>
-          <p:cNvSpPr txBox="1"/>
-          <p:nvPr/>
-        </p:nvSpPr>
-        <p:spPr>
-          <a:xfrm>
-            <a:off x="822960" y="2057400"/>
-            <a:ext cx="10515600" cy="4023360"/>
-          </a:xfrm>
-          <a:prstGeom prst="rect">
-            <a:avLst/>
-          </a:prstGeom>
-          <a:noFill/>
-        </p:spPr>
-        <p:txBody>
-          <a:bodyPr wrap="square">
-            <a:spAutoFit/>
-          </a:bodyPr>
-          <a:lstStyle/>
-          <a:p>
-            <a:pPr marL="342900" indent="-342900">
-              <a:spcAft>
-                <a:spcPts val="2000"/>
-              </a:spcAft>
-            </a:pPr>
-            <a:r>
-              <a:rPr sz="2400" b="1">
-                <a:solidFill>
-                  <a:srgbClr val="005EB8"/>
-                </a:solidFill>
-                <a:latin typeface="Helvetica Neue"/>
-              </a:rPr>
-              <a:t>-   </a:t>
-            </a:r>
-            <a:r>
-              <a:rPr sz="2400" b="0" i="0">
-                <a:solidFill>
-                  <a:srgbClr val="141B2D"/>
-                </a:solidFill>
-                <a:latin typeface="Helvetica Neue"/>
-              </a:rPr>
-              <a:t>Storing embeddings instead of text is not privacy</a:t>
-            </a:r>
-          </a:p>
-          <a:p>
-            <a:pPr marL="342900" indent="-342900">
-              <a:spcAft>
-                <a:spcPts val="2000"/>
-              </a:spcAft>
-            </a:pPr>
-            <a:r>
-              <a:rPr sz="2400" b="1">
-                <a:solidFill>
-                  <a:srgbClr val="005EB8"/>
-                </a:solidFill>
-                <a:latin typeface="Helvetica Neue"/>
-              </a:rPr>
-              <a:t>-   </a:t>
-            </a:r>
-            <a:r>
-              <a:rPr sz="2400" b="0" i="0">
-                <a:solidFill>
-                  <a:srgbClr val="141B2D"/>
-                </a:solidFill>
-                <a:latin typeface="Helvetica Neue"/>
-              </a:rPr>
-              <a:t>Keeping sensitive data out of the index beats redacting it later</a:t>
-            </a:r>
-          </a:p>
-          <a:p>
-            <a:pPr marL="342900" indent="-342900">
-              <a:spcAft>
-                <a:spcPts val="2000"/>
-              </a:spcAft>
-            </a:pPr>
-            <a:r>
-              <a:rPr sz="2400" b="1">
-                <a:solidFill>
-                  <a:srgbClr val="005EB8"/>
-                </a:solidFill>
-                <a:latin typeface="Helvetica Neue"/>
-              </a:rPr>
-              <a:t>-   </a:t>
-            </a:r>
-            <a:r>
-              <a:rPr sz="2400" b="0" i="0">
-                <a:solidFill>
-                  <a:srgbClr val="141B2D"/>
-                </a:solidFill>
-                <a:latin typeface="Helvetica Neue"/>
-              </a:rPr>
-              <a:t>Verify the mechanism by testing it, not by trusting it</a:t>
-            </a:r>
-          </a:p>
-          <a:p>
-            <a:pPr marL="342900" indent="-342900">
-              <a:spcAft>
-                <a:spcPts val="2000"/>
-              </a:spcAft>
-            </a:pPr>
-            <a:r>
-              <a:rPr sz="2400" b="1">
-                <a:solidFill>
-                  <a:srgbClr val="005EB8"/>
-                </a:solidFill>
-                <a:latin typeface="Helvetica Neue"/>
-              </a:rPr>
-              <a:t>-   </a:t>
-            </a:r>
-            <a:r>
-              <a:rPr sz="2400" b="0" i="0">
-                <a:solidFill>
-                  <a:srgbClr val="005EB8"/>
-                </a:solidFill>
-                <a:latin typeface="Helvetica Neue"/>
-              </a:rPr>
-              <a:t>You trade individual resolution for population accuracy but that's what relevance tuning needs</a:t>
-            </a:r>
-          </a:p>
-        </p:txBody>
-      </p:sp>
-      <p:sp>
-        <p:nvSpPr>
-          <p:cNvPr id="5" name="TextBox 4"/>
-          <p:cNvSpPr txBox="1"/>
-          <p:nvPr/>
-        </p:nvSpPr>
-        <p:spPr>
-          <a:xfrm>
-            <a:off x="10405872" y="6144768"/>
-            <a:ext cx="960120" cy="411480"/>
-          </a:xfrm>
-          <a:prstGeom prst="rect">
-            <a:avLst/>
-          </a:prstGeom>
-          <a:noFill/>
-        </p:spPr>
-        <p:txBody>
-          <a:bodyPr wrap="square">
-            <a:spAutoFit/>
-          </a:bodyPr>
-          <a:lstStyle/>
-          <a:p>
-            <a:pPr algn="r"/>
-            <a:r>
-              <a:rPr sz="1300" b="0">
-                <a:solidFill>
-                  <a:srgbClr val="5A647A"/>
-                </a:solidFill>
-                <a:latin typeface="Helvetica Neue"/>
-              </a:rPr>
-              <a:t>31</a:t>
-            </a:r>
-          </a:p>
-        </p:txBody>
-      </p:sp>
-    </p:spTree>
-  </p:cSld>
-  <p:clrMapOvr>
-    <a:masterClrMapping/>
-  </p:clrMapOvr>
-</p:sld>
-</file>
-
-<file path=ppt/slides/slide32.xml><?xml version="1.0" encoding="utf-8"?>
-<p:sld xmlns:a="http://schemas.openxmlformats.org/drawingml/2006/main" xmlns:p="http://schemas.openxmlformats.org/presentationml/2006/main" xmlns:r="http://schemas.openxmlformats.org/officeDocument/2006/relationships">
-  <p:cSld>
-    <p:bg>
-      <p:bgPr>
-        <a:solidFill>
-          <a:srgbClr val="0E1A2F"/>
-        </a:solidFill>
-        <a:effectLst/>
-      </p:bgPr>
-    </p:bg>
-    <p:spTree>
-      <p:nvGrpSpPr>
-        <p:cNvPr id="1" name=""/>
-        <p:cNvGrpSpPr/>
-        <p:nvPr/>
-      </p:nvGrpSpPr>
-      <p:grpSpPr/>
-      <p:sp>
-        <p:nvSpPr>
-          <p:cNvPr id="2" name="TextBox 1"/>
-          <p:cNvSpPr txBox="1"/>
-          <p:nvPr/>
-        </p:nvSpPr>
-        <p:spPr>
-          <a:xfrm>
-            <a:off x="822960" y="2103120"/>
-            <a:ext cx="10515600" cy="2377440"/>
-          </a:xfrm>
-          <a:prstGeom prst="rect">
-            <a:avLst/>
-          </a:prstGeom>
-          <a:noFill/>
-        </p:spPr>
-        <p:txBody>
-          <a:bodyPr wrap="square">
-            <a:spAutoFit/>
-          </a:bodyPr>
-          <a:lstStyle/>
-          <a:p>
-            <a:r>
-              <a:rPr sz="4800" b="1">
-                <a:solidFill>
-                  <a:srgbClr val="FFFFFF"/>
-                </a:solidFill>
-                <a:latin typeface="Helvetica Neue"/>
-              </a:rPr>
-              <a:t>Questions</a:t>
-            </a:r>
-          </a:p>
-          <a:p>
-            <a:pPr>
-              <a:spcBef>
-                <a:spcPts val="1400"/>
-              </a:spcBef>
-            </a:pPr>
-            <a:r>
-              <a:rPr sz="2600" b="0">
-                <a:solidFill>
-                  <a:srgbClr val="8EB8E8"/>
-                </a:solidFill>
-                <a:latin typeface="Helvetica Neue"/>
-              </a:rPr>
-              <a:t>github.com/jzonthemtn/ldp-for-search</a:t>
-            </a:r>
-          </a:p>
-        </p:txBody>
-      </p:sp>
-      <p:sp>
-        <p:nvSpPr>
-          <p:cNvPr id="3" name="TextBox 2"/>
-          <p:cNvSpPr txBox="1"/>
-          <p:nvPr/>
-        </p:nvSpPr>
-        <p:spPr>
-          <a:xfrm>
-            <a:off x="822960" y="5532120"/>
-            <a:ext cx="10515600" cy="914400"/>
-          </a:xfrm>
-          <a:prstGeom prst="rect">
-            <a:avLst/>
-          </a:prstGeom>
-          <a:noFill/>
-        </p:spPr>
-        <p:txBody>
-          <a:bodyPr wrap="square">
-            <a:spAutoFit/>
-          </a:bodyPr>
-          <a:lstStyle/>
-          <a:p>
-            <a:r>
-              <a:rPr sz="1800" b="1">
-                <a:solidFill>
-                  <a:srgbClr val="C5CFE0"/>
-                </a:solidFill>
-                <a:latin typeface="Helvetica Neue"/>
-              </a:rPr>
-              <a:t>Jeff Zemerick</a:t>
-            </a:r>
-          </a:p>
-          <a:p>
-            <a:pPr>
-              <a:spcBef>
-                <a:spcPts val="400"/>
-              </a:spcBef>
-            </a:pPr>
-            <a:r>
-              <a:rPr sz="1500" b="0">
-                <a:solidFill>
-                  <a:srgbClr val="7C889E"/>
-                </a:solidFill>
-                <a:latin typeface="Helvetica Neue"/>
-              </a:rPr>
-              <a:t>OpenSearchCon NA</a:t>
-            </a:r>
-          </a:p>
-          <a:p>
-            <a:pPr>
-              <a:spcBef>
-                <a:spcPts val="100"/>
-              </a:spcBef>
-            </a:pPr>
-            <a:r>
-              <a:rPr sz="1500" b="0">
-                <a:solidFill>
-                  <a:srgbClr val="7C889E"/>
-                </a:solidFill>
-                <a:latin typeface="Helvetica Neue"/>
-              </a:rPr>
-              <a:t>September 24, 2026</a:t>
-            </a:r>
-          </a:p>
-        </p:txBody>
-      </p:sp>
-      <p:sp>
-        <p:nvSpPr>
-          <p:cNvPr id="4" name="Rectangle 3"/>
-          <p:cNvSpPr/>
-          <p:nvPr/>
-        </p:nvSpPr>
-        <p:spPr>
-          <a:xfrm>
-            <a:off x="8771839" y="1975104"/>
-            <a:ext cx="2724912" cy="2724912"/>
-          </a:xfrm>
-          <a:prstGeom prst="rect">
-            <a:avLst/>
-          </a:prstGeom>
-          <a:solidFill>
-            <a:srgbClr val="FFFFFF"/>
-          </a:solidFill>
-          <a:ln>
-            <a:noFill/>
-          </a:ln>
-          <a:effectLst/>
-        </p:spPr>
-        <p:style>
-          <a:lnRef idx="1">
-            <a:schemeClr val="accent1"/>
-          </a:lnRef>
-          <a:fillRef idx="3">
-            <a:schemeClr val="accent1"/>
-          </a:fillRef>
-          <a:effectRef idx="2">
-            <a:schemeClr val="accent1"/>
-          </a:effectRef>
-          <a:fontRef idx="minor">
-            <a:schemeClr val="lt1"/>
-          </a:fontRef>
-        </p:style>
-        <p:txBody>
-          <a:bodyPr rtlCol="0" anchor="ctr"/>
-          <a:lstStyle/>
-          <a:p>
-            <a:pPr algn="ctr"/>
-          </a:p>
-        </p:txBody>
-      </p:sp>
       <p:pic>
         <p:nvPicPr>
           <p:cNvPr id="5" name="Picture 4" descr="leveraging-ldp-for-high-trust-opensearch-ubi_zemerick_1212636_feedback-code.png"/>
@@ -12195,7 +11609,7 @@
                 </a:solidFill>
                 <a:latin typeface="Helvetica Neue"/>
               </a:rPr>
-              <a:t>32</a:t>
+              <a:t>30</a:t>
             </a:r>
           </a:p>
         </p:txBody>

--- a/ldp_for_search_slides.pptx
+++ b/ldp_for_search_slides.pptx
@@ -11399,11 +11399,12 @@
               </a:spcBef>
             </a:pPr>
             <a:r>
-              <a:rPr sz="2600" b="0">
+              <a:rPr sz="2600" b="0" u="sng">
                 <a:solidFill>
                   <a:srgbClr val="8EB8E8"/>
                 </a:solidFill>
                 <a:latin typeface="Helvetica Neue"/>
+                <a:hlinkClick r:id="rId2"/>
               </a:rPr>
               <a:t>github.com/jzonthemtn/ldp-for-search</a:t>
             </a:r>
@@ -11529,7 +11530,7 @@
           <p:nvPr/>
         </p:nvPicPr>
         <p:blipFill>
-          <a:blip r:embed="rId2"/>
+          <a:blip r:embed="rId3"/>
           <a:stretch>
             <a:fillRect/>
           </a:stretch>

--- a/ldp_for_search_slides.pptx
+++ b/ldp_for_search_slides.pptx
@@ -1371,7 +1371,7 @@
           <a:lstStyle/>
           <a:p>
             <a:r>
-              <a:t>This now carries the one operational number they can apply on Monday, so slow down on the third bullet. The 2,300 is where the measured error crosses the spread of the index, 0.128, on the convergence plot in the notebook. That bar is strict on purpose, since two typical products sit about 0.82 apart, and it is specific to this index. It is not a constant, because error goes as one over epsilon times one over root n, so the threshold scales as one over epsilon squared, which puts it at about 9,200 users at epsilon 0.5 and about 575 at epsilon 2. The question everyone is holding, answered now that they have seen the evidence for every step. Step one is the reframe: there is no epsilon that is private and accurate for one query, so stop looking for it on the tradeoff curve. Point back to the attack curve for step two, because that is how you measure what an epsilon buys on an index you actually run. Step three is the third bullet here. Step four is the whole talk in one line: error goes as one over epsilon times one over root n, so privacy rides on epsilon alone while accuracy has two dials, and n is the one that costs nothing. If someone wants a starting number, say epsilon 1 on an index like this one and then measure, rather than giving them a figure to carry home unexamined.</a:t>
+              <a:t>The first bullet is the only definition of a segment anywhere in the deck, so say it rather than reading past it. In the notebook a segment is a topical cohort, everyone searching for beds, but in production it is a storefront, a locale, an A/B arm or a device type. The one constraint is that the grouping key has to be something the server can see without reading the query, so it travels as metadata on the noised submission. The threshold itself is no longer on a slide, so it is yours to give if they want a number. The 2,300 is where the measured error crosses the spread of the index, 0.128, on the convergence plot in the notebook. That bar is strict on purpose, since two typical products sit about 0.82 apart, and it is specific to this index. It is not a constant, because error goes as one over epsilon times one over root n, so the threshold scales as one over epsilon squared, which puts it at about 9,200 users at epsilon 0.5 and about 575 at epsilon 2. The question everyone is holding, answered now that they have seen the evidence for every step. Step one is the reframe: there is no epsilon that is private and accurate for one query, so stop looking for it on the tradeoff curve. Point back to the attack curve for step two, because that is how you measure what an epsilon buys on an index you actually run. Step three is the third bullet here. Step four is the whole talk in one line: error goes as one over epsilon times one over root n, so privacy rides on epsilon alone while accuracy has two dials, and n is the one that costs nothing. If someone wants a starting number, say epsilon 1 on an index like this one and then measure, rather than giving them a figure to carry home unexamined.</a:t>
             </a:r>
           </a:p>
         </p:txBody>
@@ -6567,7 +6567,7 @@
                 </a:solidFill>
                 <a:latin typeface="Helvetica Neue"/>
               </a:rPr>
-              <a:t>Two places to add the noise</a:t>
+              <a:t>(Local) Differential Privacy</a:t>
             </a:r>
           </a:p>
         </p:txBody>
@@ -8510,7 +8510,7 @@
                 </a:solidFill>
                 <a:latin typeface="Helvetica Neue"/>
               </a:rPr>
-              <a:t>Independent consultant at Mountain Fog</a:t>
+              <a:t>Independent consultant</a:t>
             </a:r>
           </a:p>
           <a:p>
@@ -8585,7 +8585,7 @@
                 </a:solidFill>
                 <a:latin typeface="Helvetica Neue"/>
               </a:rPr>
-              <a:t>Works in search, NLP, and privacy</a:t>
+              <a:t>Works primarily in cloud, search, and NLP</a:t>
             </a:r>
           </a:p>
           <a:p>
@@ -8839,7 +8839,7 @@
                 </a:solidFill>
                 <a:latin typeface="Helvetica Neue"/>
               </a:rPr>
-              <a:t>A segment needs roughly 2,300 users at epsilon 1, and halving epsilon needs four times that</a:t>
+              <a:t>A segment is any group you would slice a dashboard by</a:t>
             </a:r>
           </a:p>
           <a:p>
@@ -9396,7 +9396,7 @@
                 </a:solidFill>
                 <a:latin typeface="Helvetica Neue"/>
               </a:rPr>
-              <a:t>You set epsilon in the client you ship</a:t>
+              <a:t>You set epsilon in the client</a:t>
             </a:r>
           </a:p>
         </p:txBody>

--- a/ldp_for_search_slides.pptx
+++ b/ldp_for_search_slides.pptx
@@ -10861,67 +10861,6 @@
                 <a:latin typeface="Helvetica Neue"/>
               </a:rPr>
               <a:t>Long tail queries stay unmeasurable</a:t>
-            </a:r>
-          </a:p>
-          <a:p>
-            <a:pPr marL="342900" indent="-342900">
-              <a:spcAft>
-                <a:spcPts val="2000"/>
-              </a:spcAft>
-            </a:pPr>
-            <a:r>
-              <a:rPr sz="2400" b="1">
-                <a:solidFill>
-                  <a:srgbClr val="B4311A"/>
-                </a:solidFill>
-                <a:latin typeface="Helvetica Neue"/>
-              </a:rPr>
-              <a:t>-   </a:t>
-            </a:r>
-            <a:r>
-              <a:rPr sz="2400" b="0" i="0">
-                <a:solidFill>
-                  <a:srgbClr val="141B2D"/>
-                </a:solidFill>
-                <a:latin typeface="Helvetica Neue"/>
-              </a:rPr>
-              <a:t>This protects </a:t>
-            </a:r>
-            <a:r>
-              <a:rPr sz="2200" b="0">
-                <a:solidFill>
-                  <a:srgbClr val="141B2D"/>
-                </a:solidFill>
-                <a:latin typeface="Consolas"/>
-              </a:rPr>
-              <a:t>user_query</a:t>
-            </a:r>
-            <a:r>
-              <a:rPr sz="2400" b="0" i="0">
-                <a:solidFill>
-                  <a:srgbClr val="141B2D"/>
-                </a:solidFill>
-                <a:latin typeface="Helvetica Neue"/>
-              </a:rPr>
-              <a:t> but </a:t>
-            </a:r>
-            <a:r>
-              <a:rPr sz="2200" b="0">
-                <a:solidFill>
-                  <a:srgbClr val="141B2D"/>
-                </a:solidFill>
-                <a:latin typeface="Consolas"/>
-              </a:rPr>
-              <a:t>ubi_events</a:t>
-            </a:r>
-            <a:r>
-              <a:rPr sz="2400" b="0" i="0">
-                <a:solidFill>
-                  <a:srgbClr val="141B2D"/>
-                </a:solidFill>
-                <a:latin typeface="Helvetica Neue"/>
-              </a:rPr>
-              <a:t> still holds clicks and ids in the clear</a:t>
             </a:r>
           </a:p>
         </p:txBody>
